--- a/teacher-slides.pptx
+++ b/teacher-slides.pptx
@@ -2,22 +2,22 @@
 <file path=ppt/presentation.xml><?xml version="1.0" encoding="utf-8"?>
 <p:presentation xmlns:p="http://schemas.openxmlformats.org/presentationml/2006/main">
   <p:sldMasterIdLst>
-    <p:sldMasterId xmlns:r="http://schemas.openxmlformats.org/officeDocument/2006/relationships" id="2147483648" r:id="R345bc7fda9774395"/>
+    <p:sldMasterId xmlns:r="http://schemas.openxmlformats.org/officeDocument/2006/relationships" id="2147483648" r:id="Rd4942d0f4c974a87"/>
   </p:sldMasterIdLst>
   <p:notesMasterIdLst>
-    <p:notesMasterId xmlns:r="http://schemas.openxmlformats.org/officeDocument/2006/relationships" r:id="Ra68363e850854760"/>
+    <p:notesMasterId xmlns:r="http://schemas.openxmlformats.org/officeDocument/2006/relationships" r:id="Rf08cb87359924918"/>
   </p:notesMasterIdLst>
   <p:sldIdLst>
-    <p:sldId xmlns:r="http://schemas.openxmlformats.org/officeDocument/2006/relationships" id="256" r:id="Ra57b540e49d24c80"/>
-    <p:sldId xmlns:r="http://schemas.openxmlformats.org/officeDocument/2006/relationships" id="257" r:id="R635c43cf1fae4f47"/>
-    <p:sldId xmlns:r="http://schemas.openxmlformats.org/officeDocument/2006/relationships" id="258" r:id="Radec4cad9c5d4804"/>
-    <p:sldId xmlns:r="http://schemas.openxmlformats.org/officeDocument/2006/relationships" id="259" r:id="R280f9cf4ef754caf"/>
-    <p:sldId xmlns:r="http://schemas.openxmlformats.org/officeDocument/2006/relationships" id="260" r:id="Rdfd13d3316d84334"/>
-    <p:sldId xmlns:r="http://schemas.openxmlformats.org/officeDocument/2006/relationships" id="261" r:id="Rd5a384a06311437d"/>
-    <p:sldId xmlns:r="http://schemas.openxmlformats.org/officeDocument/2006/relationships" id="262" r:id="Rbd8d78b75aad4589"/>
-    <p:sldId xmlns:r="http://schemas.openxmlformats.org/officeDocument/2006/relationships" id="263" r:id="Rec3b51cdf0c947d8"/>
-    <p:sldId xmlns:r="http://schemas.openxmlformats.org/officeDocument/2006/relationships" id="264" r:id="Rb42a5096b30f4cb0"/>
-    <p:sldId xmlns:r="http://schemas.openxmlformats.org/officeDocument/2006/relationships" id="265" r:id="R0725482784e04ea4"/>
+    <p:sldId xmlns:r="http://schemas.openxmlformats.org/officeDocument/2006/relationships" id="256" r:id="R9cdbae44b19b4525"/>
+    <p:sldId xmlns:r="http://schemas.openxmlformats.org/officeDocument/2006/relationships" id="257" r:id="R76d1fb241c644356"/>
+    <p:sldId xmlns:r="http://schemas.openxmlformats.org/officeDocument/2006/relationships" id="258" r:id="Rfcefa56cb3ab40f2"/>
+    <p:sldId xmlns:r="http://schemas.openxmlformats.org/officeDocument/2006/relationships" id="259" r:id="Rbd5f05a04d8d48d6"/>
+    <p:sldId xmlns:r="http://schemas.openxmlformats.org/officeDocument/2006/relationships" id="260" r:id="R80e49bfccffa462e"/>
+    <p:sldId xmlns:r="http://schemas.openxmlformats.org/officeDocument/2006/relationships" id="261" r:id="R117f843f2da24639"/>
+    <p:sldId xmlns:r="http://schemas.openxmlformats.org/officeDocument/2006/relationships" id="262" r:id="R6e21e9e45b32432f"/>
+    <p:sldId xmlns:r="http://schemas.openxmlformats.org/officeDocument/2006/relationships" id="263" r:id="R5757ae864a1745fb"/>
+    <p:sldId xmlns:r="http://schemas.openxmlformats.org/officeDocument/2006/relationships" id="264" r:id="R3e89ff359f614de0"/>
+    <p:sldId xmlns:r="http://schemas.openxmlformats.org/officeDocument/2006/relationships" id="265" r:id="Re1ed38ce6ef84b4b"/>
   </p:sldIdLst>
   <p:sldSz cx="12192000" cy="6858000"/>
   <p:notesSz cx="6858000" cy="9144000"/>
@@ -1149,7 +1149,7 @@
   </p:cSld>
   <p:clrMap bg1="lt1" tx1="dk1" bg2="lt2" tx2="dk2" accent1="accent1" accent2="accent2" accent3="accent3" accent4="accent4" accent5="accent5" accent6="accent6" hlink="hlink" folHlink="folHlink"/>
   <p:sldLayoutIdLst>
-    <p:sldLayoutId xmlns:r="http://schemas.openxmlformats.org/officeDocument/2006/relationships" id="2147483649" r:id="Rc3a5b03d59e04292"/>
+    <p:sldLayoutId xmlns:r="http://schemas.openxmlformats.org/officeDocument/2006/relationships" id="2147483649" r:id="R9f7779e98b1a46ba"/>
   </p:sldLayoutIdLst>
   <p:txStyles>
     <p:titleStyle>
@@ -4202,7 +4202,7 @@
           <p:cNvPr id="13" name="">
             <a:extLst xmlns:a="http://schemas.openxmlformats.org/drawingml/2006/main">
               <a:ext uri="{FF2B5EF4-FFF2-40B4-BE49-F238E27FC236}">
-                <a16:creationId xmlns:a16="http://schemas.microsoft.com/office/drawing/2014/main" id="{D9DA5AE9-1306-4369-BA5A-835F54851820}"/>
+                <a16:creationId xmlns:a16="http://schemas.microsoft.com/office/drawing/2014/main" id="{41E934F9-657C-4C1F-93DD-E73102B52DAC}"/>
               </a:ext>
             </a:extLst>
           </p:cNvPr>
@@ -4259,7 +4259,7 @@
           <p:cNvPr id="2" name="">
             <a:extLst xmlns:a="http://schemas.openxmlformats.org/drawingml/2006/main">
               <a:ext uri="{FF2B5EF4-FFF2-40B4-BE49-F238E27FC236}">
-                <a16:creationId xmlns:a16="http://schemas.microsoft.com/office/drawing/2014/main" id="{B0F33200-4CC0-4CD0-BEAC-4458B1360E24}"/>
+                <a16:creationId xmlns:a16="http://schemas.microsoft.com/office/drawing/2014/main" id="{2DBDC221-675F-4247-A29E-907F4A2564ED}"/>
               </a:ext>
             </a:extLst>
           </p:cNvPr>
@@ -4316,7 +4316,7 @@
           <p:cNvPr id="3" name="">
             <a:extLst xmlns:a="http://schemas.openxmlformats.org/drawingml/2006/main">
               <a:ext uri="{FF2B5EF4-FFF2-40B4-BE49-F238E27FC236}">
-                <a16:creationId xmlns:a16="http://schemas.microsoft.com/office/drawing/2014/main" id="{0C537609-C2F3-4239-8FC5-4F04F4CBFF11}"/>
+                <a16:creationId xmlns:a16="http://schemas.microsoft.com/office/drawing/2014/main" id="{03F8928A-2D14-4F7D-A877-175CC14103B3}"/>
               </a:ext>
             </a:extLst>
           </p:cNvPr>
@@ -4373,7 +4373,7 @@
           <p:cNvPr id="4" name="">
             <a:extLst xmlns:a="http://schemas.openxmlformats.org/drawingml/2006/main">
               <a:ext uri="{FF2B5EF4-FFF2-40B4-BE49-F238E27FC236}">
-                <a16:creationId xmlns:a16="http://schemas.microsoft.com/office/drawing/2014/main" id="{D4A85D9B-4557-4A4D-9BE6-682ED2C6B5E8}"/>
+                <a16:creationId xmlns:a16="http://schemas.microsoft.com/office/drawing/2014/main" id="{72E7F11E-A19B-46AA-AF73-6DBC9CE95131}"/>
               </a:ext>
             </a:extLst>
           </p:cNvPr>
@@ -4430,7 +4430,7 @@
           <p:cNvPr id="5" name="">
             <a:extLst xmlns:a="http://schemas.openxmlformats.org/drawingml/2006/main">
               <a:ext uri="{FF2B5EF4-FFF2-40B4-BE49-F238E27FC236}">
-                <a16:creationId xmlns:a16="http://schemas.microsoft.com/office/drawing/2014/main" id="{7B178B21-51C1-4BF3-AF28-09D23BAA6BD2}"/>
+                <a16:creationId xmlns:a16="http://schemas.microsoft.com/office/drawing/2014/main" id="{BD58C7D1-3981-45BD-BB70-8BB9DEC49A7C}"/>
               </a:ext>
             </a:extLst>
           </p:cNvPr>
@@ -4487,7 +4487,7 @@
           <p:cNvPr id="6" name="">
             <a:extLst xmlns:a="http://schemas.openxmlformats.org/drawingml/2006/main">
               <a:ext uri="{FF2B5EF4-FFF2-40B4-BE49-F238E27FC236}">
-                <a16:creationId xmlns:a16="http://schemas.microsoft.com/office/drawing/2014/main" id="{ECBB9D60-3C6B-4ACC-A3A8-8CD46467808C}"/>
+                <a16:creationId xmlns:a16="http://schemas.microsoft.com/office/drawing/2014/main" id="{4A595CF4-8016-4F4C-8F3F-905E30A2D60D}"/>
               </a:ext>
             </a:extLst>
           </p:cNvPr>
@@ -4544,7 +4544,7 @@
           <p:cNvPr id="7" name="">
             <a:extLst xmlns:a="http://schemas.openxmlformats.org/drawingml/2006/main">
               <a:ext uri="{FF2B5EF4-FFF2-40B4-BE49-F238E27FC236}">
-                <a16:creationId xmlns:a16="http://schemas.microsoft.com/office/drawing/2014/main" id="{6F42236A-E0C2-426B-93AC-495ECFAC23C6}"/>
+                <a16:creationId xmlns:a16="http://schemas.microsoft.com/office/drawing/2014/main" id="{CE08725A-85D3-4C9C-AAF6-9C00D5C314E6}"/>
               </a:ext>
             </a:extLst>
           </p:cNvPr>
@@ -4601,7 +4601,7 @@
           <p:cNvPr id="8" name="">
             <a:extLst xmlns:a="http://schemas.openxmlformats.org/drawingml/2006/main">
               <a:ext uri="{FF2B5EF4-FFF2-40B4-BE49-F238E27FC236}">
-                <a16:creationId xmlns:a16="http://schemas.microsoft.com/office/drawing/2014/main" id="{CECE8457-8F79-46CF-9747-EE2A4983D441}"/>
+                <a16:creationId xmlns:a16="http://schemas.microsoft.com/office/drawing/2014/main" id="{DE216E70-A202-4D24-8BDD-32CC2FF51969}"/>
               </a:ext>
             </a:extLst>
           </p:cNvPr>
@@ -4658,7 +4658,7 @@
           <p:cNvPr id="9" name="">
             <a:extLst xmlns:a="http://schemas.openxmlformats.org/drawingml/2006/main">
               <a:ext uri="{FF2B5EF4-FFF2-40B4-BE49-F238E27FC236}">
-                <a16:creationId xmlns:a16="http://schemas.microsoft.com/office/drawing/2014/main" id="{872DBA53-20FC-4D38-8178-8A7641C16AAC}"/>
+                <a16:creationId xmlns:a16="http://schemas.microsoft.com/office/drawing/2014/main" id="{C214F267-D08A-4C22-BB27-68F616F86BC6}"/>
               </a:ext>
             </a:extLst>
           </p:cNvPr>
@@ -4715,7 +4715,7 @@
           <p:cNvPr id="10" name="">
             <a:extLst xmlns:a="http://schemas.openxmlformats.org/drawingml/2006/main">
               <a:ext uri="{FF2B5EF4-FFF2-40B4-BE49-F238E27FC236}">
-                <a16:creationId xmlns:a16="http://schemas.microsoft.com/office/drawing/2014/main" id="{C4C4D311-5FCE-4DCB-AB89-A4DD22CC9B89}"/>
+                <a16:creationId xmlns:a16="http://schemas.microsoft.com/office/drawing/2014/main" id="{51D05EC2-4127-4797-9288-C6D86DA3B328}"/>
               </a:ext>
             </a:extLst>
           </p:cNvPr>
@@ -4772,7 +4772,7 @@
           <p:cNvPr id="11" name="">
             <a:extLst xmlns:a="http://schemas.openxmlformats.org/drawingml/2006/main">
               <a:ext uri="{FF2B5EF4-FFF2-40B4-BE49-F238E27FC236}">
-                <a16:creationId xmlns:a16="http://schemas.microsoft.com/office/drawing/2014/main" id="{F8CAC5A2-CCB5-4482-944B-5A5EF26D230A}"/>
+                <a16:creationId xmlns:a16="http://schemas.microsoft.com/office/drawing/2014/main" id="{D572F2DB-D615-41ED-98F2-4F089592E008}"/>
               </a:ext>
             </a:extLst>
           </p:cNvPr>
@@ -4829,7 +4829,7 @@
           <p:cNvPr id="12" name="">
             <a:extLst xmlns:a="http://schemas.openxmlformats.org/drawingml/2006/main">
               <a:ext uri="{FF2B5EF4-FFF2-40B4-BE49-F238E27FC236}">
-                <a16:creationId xmlns:a16="http://schemas.microsoft.com/office/drawing/2014/main" id="{5A48BA69-DADA-486A-AD37-C9C220A8386F}"/>
+                <a16:creationId xmlns:a16="http://schemas.microsoft.com/office/drawing/2014/main" id="{96C5B384-6176-4EFF-B01B-1313AA613492}"/>
               </a:ext>
             </a:extLst>
           </p:cNvPr>
@@ -4884,7 +4884,7 @@
     </p:spTree>
     <p:extLst>
       <p:ext uri="{BB962C8B-B14F-4D97-AF65-F5344CB8AC3E}">
-        <p14:creationId xmlns:p14="http://schemas.microsoft.com/office/powerpoint/2010/main" val="1898609954"/>
+        <p14:creationId xmlns:p14="http://schemas.microsoft.com/office/powerpoint/2010/main" val="550628515"/>
       </p:ext>
     </p:extLst>
   </p:cSld>
@@ -4915,7 +4915,7 @@
           <p:cNvPr id="11" name="">
             <a:extLst xmlns:a="http://schemas.openxmlformats.org/drawingml/2006/main">
               <a:ext uri="{FF2B5EF4-FFF2-40B4-BE49-F238E27FC236}">
-                <a16:creationId xmlns:a16="http://schemas.microsoft.com/office/drawing/2014/main" id="{23720CBE-4F3C-4DAD-BD94-F8B82B08A25F}"/>
+                <a16:creationId xmlns:a16="http://schemas.microsoft.com/office/drawing/2014/main" id="{7CFF15A6-6782-4C06-AD37-B92DAEEFFAD0}"/>
               </a:ext>
             </a:extLst>
           </p:cNvPr>
@@ -4972,7 +4972,7 @@
           <p:cNvPr id="2" name="">
             <a:extLst xmlns:a="http://schemas.openxmlformats.org/drawingml/2006/main">
               <a:ext uri="{FF2B5EF4-FFF2-40B4-BE49-F238E27FC236}">
-                <a16:creationId xmlns:a16="http://schemas.microsoft.com/office/drawing/2014/main" id="{A26449D4-C8D5-4DE9-BA22-2E2B83EAA211}"/>
+                <a16:creationId xmlns:a16="http://schemas.microsoft.com/office/drawing/2014/main" id="{CC2705E1-0F61-423B-B6D4-F2FC1C01FDEE}"/>
               </a:ext>
             </a:extLst>
           </p:cNvPr>
@@ -5029,7 +5029,7 @@
           <p:cNvPr id="3" name="">
             <a:extLst xmlns:a="http://schemas.openxmlformats.org/drawingml/2006/main">
               <a:ext uri="{FF2B5EF4-FFF2-40B4-BE49-F238E27FC236}">
-                <a16:creationId xmlns:a16="http://schemas.microsoft.com/office/drawing/2014/main" id="{A1F41E85-2920-428A-AB50-A505C59FC95A}"/>
+                <a16:creationId xmlns:a16="http://schemas.microsoft.com/office/drawing/2014/main" id="{F31B8BD1-F98A-4FDC-94E5-2817122A2BA1}"/>
               </a:ext>
             </a:extLst>
           </p:cNvPr>
@@ -5086,7 +5086,7 @@
           <p:cNvPr id="4" name="">
             <a:extLst xmlns:a="http://schemas.openxmlformats.org/drawingml/2006/main">
               <a:ext uri="{FF2B5EF4-FFF2-40B4-BE49-F238E27FC236}">
-                <a16:creationId xmlns:a16="http://schemas.microsoft.com/office/drawing/2014/main" id="{8F6591FC-AF0D-4696-924D-92FA4FA46350}"/>
+                <a16:creationId xmlns:a16="http://schemas.microsoft.com/office/drawing/2014/main" id="{5595922B-0BB6-4E93-B204-CACC835061CF}"/>
               </a:ext>
             </a:extLst>
           </p:cNvPr>
@@ -5143,7 +5143,7 @@
           <p:cNvPr id="5" name="">
             <a:extLst xmlns:a="http://schemas.openxmlformats.org/drawingml/2006/main">
               <a:ext uri="{FF2B5EF4-FFF2-40B4-BE49-F238E27FC236}">
-                <a16:creationId xmlns:a16="http://schemas.microsoft.com/office/drawing/2014/main" id="{0BCB142B-8199-4E77-97C3-280BAAC00861}"/>
+                <a16:creationId xmlns:a16="http://schemas.microsoft.com/office/drawing/2014/main" id="{323FEAF1-D787-4ADA-8148-DDBA65DCD0D5}"/>
               </a:ext>
             </a:extLst>
           </p:cNvPr>
@@ -5200,7 +5200,7 @@
           <p:cNvPr id="6" name="">
             <a:extLst xmlns:a="http://schemas.openxmlformats.org/drawingml/2006/main">
               <a:ext uri="{FF2B5EF4-FFF2-40B4-BE49-F238E27FC236}">
-                <a16:creationId xmlns:a16="http://schemas.microsoft.com/office/drawing/2014/main" id="{31D5FFC6-EBD6-4F82-AEEA-43D8067A28D4}"/>
+                <a16:creationId xmlns:a16="http://schemas.microsoft.com/office/drawing/2014/main" id="{6B0A6FF9-D8F3-40E2-8444-6C5F454E3190}"/>
               </a:ext>
             </a:extLst>
           </p:cNvPr>
@@ -5257,7 +5257,7 @@
           <p:cNvPr id="7" name="">
             <a:extLst xmlns:a="http://schemas.openxmlformats.org/drawingml/2006/main">
               <a:ext uri="{FF2B5EF4-FFF2-40B4-BE49-F238E27FC236}">
-                <a16:creationId xmlns:a16="http://schemas.microsoft.com/office/drawing/2014/main" id="{BF445499-4C3C-491C-8B4F-841483122FE9}"/>
+                <a16:creationId xmlns:a16="http://schemas.microsoft.com/office/drawing/2014/main" id="{7339E20A-67B1-47EA-9BC3-DFF7B2169108}"/>
               </a:ext>
             </a:extLst>
           </p:cNvPr>
@@ -5314,7 +5314,7 @@
           <p:cNvPr id="8" name="">
             <a:extLst xmlns:a="http://schemas.openxmlformats.org/drawingml/2006/main">
               <a:ext uri="{FF2B5EF4-FFF2-40B4-BE49-F238E27FC236}">
-                <a16:creationId xmlns:a16="http://schemas.microsoft.com/office/drawing/2014/main" id="{4D20F10B-22FF-413F-A190-6E7C50ED73DF}"/>
+                <a16:creationId xmlns:a16="http://schemas.microsoft.com/office/drawing/2014/main" id="{63D7F877-13A1-4609-A33A-603100BBD0CA}"/>
               </a:ext>
             </a:extLst>
           </p:cNvPr>
@@ -5371,7 +5371,7 @@
           <p:cNvPr id="9" name="">
             <a:extLst xmlns:a="http://schemas.openxmlformats.org/drawingml/2006/main">
               <a:ext uri="{FF2B5EF4-FFF2-40B4-BE49-F238E27FC236}">
-                <a16:creationId xmlns:a16="http://schemas.microsoft.com/office/drawing/2014/main" id="{170AC07D-BCFE-4B0F-9A91-CAF8DDE62D65}"/>
+                <a16:creationId xmlns:a16="http://schemas.microsoft.com/office/drawing/2014/main" id="{0C6201D8-79AC-4D35-A30D-4F152DE3C7A7}"/>
               </a:ext>
             </a:extLst>
           </p:cNvPr>
@@ -5428,7 +5428,7 @@
           <p:cNvPr id="10" name="">
             <a:extLst xmlns:a="http://schemas.openxmlformats.org/drawingml/2006/main">
               <a:ext uri="{FF2B5EF4-FFF2-40B4-BE49-F238E27FC236}">
-                <a16:creationId xmlns:a16="http://schemas.microsoft.com/office/drawing/2014/main" id="{2248BD1D-676E-48FB-A580-B42CA6B03CD4}"/>
+                <a16:creationId xmlns:a16="http://schemas.microsoft.com/office/drawing/2014/main" id="{2639638D-016D-4E89-B887-0791CE4181B6}"/>
               </a:ext>
             </a:extLst>
           </p:cNvPr>
@@ -5483,7 +5483,7 @@
     </p:spTree>
     <p:extLst>
       <p:ext uri="{BB962C8B-B14F-4D97-AF65-F5344CB8AC3E}">
-        <p14:creationId xmlns:p14="http://schemas.microsoft.com/office/powerpoint/2010/main" val="1449629441"/>
+        <p14:creationId xmlns:p14="http://schemas.microsoft.com/office/powerpoint/2010/main" val="1553370169"/>
       </p:ext>
     </p:extLst>
   </p:cSld>
@@ -5514,7 +5514,7 @@
           <p:cNvPr id="12" name="">
             <a:extLst xmlns:a="http://schemas.openxmlformats.org/drawingml/2006/main">
               <a:ext uri="{FF2B5EF4-FFF2-40B4-BE49-F238E27FC236}">
-                <a16:creationId xmlns:a16="http://schemas.microsoft.com/office/drawing/2014/main" id="{EFE248AE-EACF-4AEE-B4AC-4A98F9F2942D}"/>
+                <a16:creationId xmlns:a16="http://schemas.microsoft.com/office/drawing/2014/main" id="{9A62C264-96BF-444F-892F-97CFBC4054F3}"/>
               </a:ext>
             </a:extLst>
           </p:cNvPr>
@@ -5571,7 +5571,7 @@
           <p:cNvPr id="2" name="">
             <a:extLst xmlns:a="http://schemas.openxmlformats.org/drawingml/2006/main">
               <a:ext uri="{FF2B5EF4-FFF2-40B4-BE49-F238E27FC236}">
-                <a16:creationId xmlns:a16="http://schemas.microsoft.com/office/drawing/2014/main" id="{B37C468B-6176-4264-B357-701C2B71203F}"/>
+                <a16:creationId xmlns:a16="http://schemas.microsoft.com/office/drawing/2014/main" id="{114987BC-631C-4815-AEFD-86BB5D83E84F}"/>
               </a:ext>
             </a:extLst>
           </p:cNvPr>
@@ -5628,7 +5628,7 @@
           <p:cNvPr id="3" name="">
             <a:extLst xmlns:a="http://schemas.openxmlformats.org/drawingml/2006/main">
               <a:ext uri="{FF2B5EF4-FFF2-40B4-BE49-F238E27FC236}">
-                <a16:creationId xmlns:a16="http://schemas.microsoft.com/office/drawing/2014/main" id="{DCD8F2D0-F200-4E74-BA97-395FD8194899}"/>
+                <a16:creationId xmlns:a16="http://schemas.microsoft.com/office/drawing/2014/main" id="{FC580F22-9058-41CE-8CB4-1F36B0D8815F}"/>
               </a:ext>
             </a:extLst>
           </p:cNvPr>
@@ -5685,7 +5685,7 @@
           <p:cNvPr id="4" name="">
             <a:extLst xmlns:a="http://schemas.openxmlformats.org/drawingml/2006/main">
               <a:ext uri="{FF2B5EF4-FFF2-40B4-BE49-F238E27FC236}">
-                <a16:creationId xmlns:a16="http://schemas.microsoft.com/office/drawing/2014/main" id="{AADB7EA6-9956-40FF-8D60-C79B97135CAF}"/>
+                <a16:creationId xmlns:a16="http://schemas.microsoft.com/office/drawing/2014/main" id="{5C0232D3-146B-466E-B3DC-790604095414}"/>
               </a:ext>
             </a:extLst>
           </p:cNvPr>
@@ -5742,7 +5742,7 @@
           <p:cNvPr id="5" name="">
             <a:extLst xmlns:a="http://schemas.openxmlformats.org/drawingml/2006/main">
               <a:ext uri="{FF2B5EF4-FFF2-40B4-BE49-F238E27FC236}">
-                <a16:creationId xmlns:a16="http://schemas.microsoft.com/office/drawing/2014/main" id="{6DECB924-B2DA-4933-A15A-0D7AD0F4BA34}"/>
+                <a16:creationId xmlns:a16="http://schemas.microsoft.com/office/drawing/2014/main" id="{F0A6CF7C-B636-4C0A-9D7F-A19A1E0BFFC7}"/>
               </a:ext>
             </a:extLst>
           </p:cNvPr>
@@ -5799,7 +5799,7 @@
           <p:cNvPr id="6" name="">
             <a:extLst xmlns:a="http://schemas.openxmlformats.org/drawingml/2006/main">
               <a:ext uri="{FF2B5EF4-FFF2-40B4-BE49-F238E27FC236}">
-                <a16:creationId xmlns:a16="http://schemas.microsoft.com/office/drawing/2014/main" id="{82AB3CFC-3DB8-4405-8761-1F0F266BE39F}"/>
+                <a16:creationId xmlns:a16="http://schemas.microsoft.com/office/drawing/2014/main" id="{E1DA19AE-1366-43F8-9D7A-0EACF26CA115}"/>
               </a:ext>
             </a:extLst>
           </p:cNvPr>
@@ -5856,7 +5856,7 @@
           <p:cNvPr id="7" name="">
             <a:extLst xmlns:a="http://schemas.openxmlformats.org/drawingml/2006/main">
               <a:ext uri="{FF2B5EF4-FFF2-40B4-BE49-F238E27FC236}">
-                <a16:creationId xmlns:a16="http://schemas.microsoft.com/office/drawing/2014/main" id="{367233E1-AFEC-4B14-AC86-5ED30F1D56B8}"/>
+                <a16:creationId xmlns:a16="http://schemas.microsoft.com/office/drawing/2014/main" id="{BC5B56E1-BF26-49AC-97DB-CAD4EAF0E79C}"/>
               </a:ext>
             </a:extLst>
           </p:cNvPr>
@@ -5913,7 +5913,7 @@
           <p:cNvPr id="8" name="">
             <a:extLst xmlns:a="http://schemas.openxmlformats.org/drawingml/2006/main">
               <a:ext uri="{FF2B5EF4-FFF2-40B4-BE49-F238E27FC236}">
-                <a16:creationId xmlns:a16="http://schemas.microsoft.com/office/drawing/2014/main" id="{A7FBC031-2F89-4109-980F-1A9BF19E985E}"/>
+                <a16:creationId xmlns:a16="http://schemas.microsoft.com/office/drawing/2014/main" id="{FF40B637-2B4B-4DB7-B72F-323BBED02F2B}"/>
               </a:ext>
             </a:extLst>
           </p:cNvPr>
@@ -5970,7 +5970,7 @@
           <p:cNvPr id="9" name="">
             <a:extLst xmlns:a="http://schemas.openxmlformats.org/drawingml/2006/main">
               <a:ext uri="{FF2B5EF4-FFF2-40B4-BE49-F238E27FC236}">
-                <a16:creationId xmlns:a16="http://schemas.microsoft.com/office/drawing/2014/main" id="{86A21B45-DA2B-4A05-8512-C4665902C5BE}"/>
+                <a16:creationId xmlns:a16="http://schemas.microsoft.com/office/drawing/2014/main" id="{6918C0E1-9F7B-4959-ABE6-13DFFEAFB704}"/>
               </a:ext>
             </a:extLst>
           </p:cNvPr>
@@ -6027,7 +6027,7 @@
           <p:cNvPr id="10" name="">
             <a:extLst xmlns:a="http://schemas.openxmlformats.org/drawingml/2006/main">
               <a:ext uri="{FF2B5EF4-FFF2-40B4-BE49-F238E27FC236}">
-                <a16:creationId xmlns:a16="http://schemas.microsoft.com/office/drawing/2014/main" id="{3307EB67-A0DB-4CB4-96BD-8AE17BE9C995}"/>
+                <a16:creationId xmlns:a16="http://schemas.microsoft.com/office/drawing/2014/main" id="{85E30C8B-9143-4470-8ACD-CED0DD60BACB}"/>
               </a:ext>
             </a:extLst>
           </p:cNvPr>
@@ -6091,14 +6091,14 @@
         </p:xfrm>
         <a:graphic xmlns:a="http://schemas.openxmlformats.org/drawingml/2006/main">
           <a:graphicData uri="http://schemas.openxmlformats.org/drawingml/2006/chart">
-            <c:chart xmlns:r="http://schemas.openxmlformats.org/officeDocument/2006/relationships" xmlns:c="http://schemas.openxmlformats.org/drawingml/2006/chart" r:id="R5d14749742a04fbc"/>
+            <c:chart xmlns:r="http://schemas.openxmlformats.org/officeDocument/2006/relationships" xmlns:c="http://schemas.openxmlformats.org/drawingml/2006/chart" r:id="R37ceb5f49c104b76"/>
           </a:graphicData>
         </a:graphic>
       </p:graphicFrame>
     </p:spTree>
     <p:extLst>
       <p:ext uri="{BB962C8B-B14F-4D97-AF65-F5344CB8AC3E}">
-        <p14:creationId xmlns:p14="http://schemas.microsoft.com/office/powerpoint/2010/main" val="423376332"/>
+        <p14:creationId xmlns:p14="http://schemas.microsoft.com/office/powerpoint/2010/main" val="1338848109"/>
       </p:ext>
     </p:extLst>
   </p:cSld>
@@ -6129,7 +6129,7 @@
           <p:cNvPr id="12" name="">
             <a:extLst xmlns:a="http://schemas.openxmlformats.org/drawingml/2006/main">
               <a:ext uri="{FF2B5EF4-FFF2-40B4-BE49-F238E27FC236}">
-                <a16:creationId xmlns:a16="http://schemas.microsoft.com/office/drawing/2014/main" id="{173C3BB7-D3DE-4E9A-BB44-B9199796EBE0}"/>
+                <a16:creationId xmlns:a16="http://schemas.microsoft.com/office/drawing/2014/main" id="{F3A8DEED-BD12-4C9A-8745-F7B640625638}"/>
               </a:ext>
             </a:extLst>
           </p:cNvPr>
@@ -6186,7 +6186,7 @@
           <p:cNvPr id="2" name="">
             <a:extLst xmlns:a="http://schemas.openxmlformats.org/drawingml/2006/main">
               <a:ext uri="{FF2B5EF4-FFF2-40B4-BE49-F238E27FC236}">
-                <a16:creationId xmlns:a16="http://schemas.microsoft.com/office/drawing/2014/main" id="{73F5AD7A-5170-4C69-9648-FC9BC1552003}"/>
+                <a16:creationId xmlns:a16="http://schemas.microsoft.com/office/drawing/2014/main" id="{C025F403-E545-4914-BA45-A2A4A08FB5BC}"/>
               </a:ext>
             </a:extLst>
           </p:cNvPr>
@@ -6243,7 +6243,7 @@
           <p:cNvPr id="3" name="">
             <a:extLst xmlns:a="http://schemas.openxmlformats.org/drawingml/2006/main">
               <a:ext uri="{FF2B5EF4-FFF2-40B4-BE49-F238E27FC236}">
-                <a16:creationId xmlns:a16="http://schemas.microsoft.com/office/drawing/2014/main" id="{56AE9BE7-8B7D-4D4A-AC03-5D3EB3D1D296}"/>
+                <a16:creationId xmlns:a16="http://schemas.microsoft.com/office/drawing/2014/main" id="{77D1DC8C-80C6-4639-A913-E792D04FF421}"/>
               </a:ext>
             </a:extLst>
           </p:cNvPr>
@@ -6300,7 +6300,7 @@
           <p:cNvPr id="4" name="">
             <a:extLst xmlns:a="http://schemas.openxmlformats.org/drawingml/2006/main">
               <a:ext uri="{FF2B5EF4-FFF2-40B4-BE49-F238E27FC236}">
-                <a16:creationId xmlns:a16="http://schemas.microsoft.com/office/drawing/2014/main" id="{2E9F90CB-54C4-4CDD-B594-58E018ACD99F}"/>
+                <a16:creationId xmlns:a16="http://schemas.microsoft.com/office/drawing/2014/main" id="{A2358405-3FBA-4F6B-BC89-4D3368CB1C94}"/>
               </a:ext>
             </a:extLst>
           </p:cNvPr>
@@ -6357,7 +6357,7 @@
           <p:cNvPr id="5" name="">
             <a:extLst xmlns:a="http://schemas.openxmlformats.org/drawingml/2006/main">
               <a:ext uri="{FF2B5EF4-FFF2-40B4-BE49-F238E27FC236}">
-                <a16:creationId xmlns:a16="http://schemas.microsoft.com/office/drawing/2014/main" id="{44EF82F6-CD3A-4AB0-BDFA-DAD859503E2F}"/>
+                <a16:creationId xmlns:a16="http://schemas.microsoft.com/office/drawing/2014/main" id="{62CD501F-A748-4B34-9A8E-E34BE76B98CD}"/>
               </a:ext>
             </a:extLst>
           </p:cNvPr>
@@ -6414,7 +6414,7 @@
           <p:cNvPr id="6" name="">
             <a:extLst xmlns:a="http://schemas.openxmlformats.org/drawingml/2006/main">
               <a:ext uri="{FF2B5EF4-FFF2-40B4-BE49-F238E27FC236}">
-                <a16:creationId xmlns:a16="http://schemas.microsoft.com/office/drawing/2014/main" id="{BA78CCF8-323B-41B2-8ADD-16E43720D6A8}"/>
+                <a16:creationId xmlns:a16="http://schemas.microsoft.com/office/drawing/2014/main" id="{039BD591-5AF6-41CC-8BA8-63EBA0FFD545}"/>
               </a:ext>
             </a:extLst>
           </p:cNvPr>
@@ -6471,7 +6471,7 @@
           <p:cNvPr id="7" name="">
             <a:extLst xmlns:a="http://schemas.openxmlformats.org/drawingml/2006/main">
               <a:ext uri="{FF2B5EF4-FFF2-40B4-BE49-F238E27FC236}">
-                <a16:creationId xmlns:a16="http://schemas.microsoft.com/office/drawing/2014/main" id="{5D83F286-450A-4252-ADE4-12BF82B1F937}"/>
+                <a16:creationId xmlns:a16="http://schemas.microsoft.com/office/drawing/2014/main" id="{2A721B98-7ECB-4503-AD38-6AC2E89BC33D}"/>
               </a:ext>
             </a:extLst>
           </p:cNvPr>
@@ -6528,7 +6528,7 @@
           <p:cNvPr id="8" name="">
             <a:extLst xmlns:a="http://schemas.openxmlformats.org/drawingml/2006/main">
               <a:ext uri="{FF2B5EF4-FFF2-40B4-BE49-F238E27FC236}">
-                <a16:creationId xmlns:a16="http://schemas.microsoft.com/office/drawing/2014/main" id="{DA0B3B4D-6DAE-4CF7-A3A6-790FBC69EB64}"/>
+                <a16:creationId xmlns:a16="http://schemas.microsoft.com/office/drawing/2014/main" id="{65BAEF5F-CC52-4C98-9B50-F7658228EFF5}"/>
               </a:ext>
             </a:extLst>
           </p:cNvPr>
@@ -6585,7 +6585,7 @@
           <p:cNvPr id="9" name="">
             <a:extLst xmlns:a="http://schemas.openxmlformats.org/drawingml/2006/main">
               <a:ext uri="{FF2B5EF4-FFF2-40B4-BE49-F238E27FC236}">
-                <a16:creationId xmlns:a16="http://schemas.microsoft.com/office/drawing/2014/main" id="{72E0B0F5-1DAE-4BA1-AE7E-6745CF64B8E9}"/>
+                <a16:creationId xmlns:a16="http://schemas.microsoft.com/office/drawing/2014/main" id="{07CFE872-A7E2-4836-851F-86448F32B4FF}"/>
               </a:ext>
             </a:extLst>
           </p:cNvPr>
@@ -6642,7 +6642,7 @@
           <p:cNvPr id="10" name="">
             <a:extLst xmlns:a="http://schemas.openxmlformats.org/drawingml/2006/main">
               <a:ext uri="{FF2B5EF4-FFF2-40B4-BE49-F238E27FC236}">
-                <a16:creationId xmlns:a16="http://schemas.microsoft.com/office/drawing/2014/main" id="{B71EB740-F9F0-4B36-A7AA-45BF838685E7}"/>
+                <a16:creationId xmlns:a16="http://schemas.microsoft.com/office/drawing/2014/main" id="{40471AAE-E2FC-4854-8585-AAD4C2E5E2E1}"/>
               </a:ext>
             </a:extLst>
           </p:cNvPr>
@@ -6706,14 +6706,14 @@
         </p:xfrm>
         <a:graphic xmlns:a="http://schemas.openxmlformats.org/drawingml/2006/main">
           <a:graphicData uri="http://schemas.openxmlformats.org/drawingml/2006/chart">
-            <c:chart xmlns:r="http://schemas.openxmlformats.org/officeDocument/2006/relationships" xmlns:c="http://schemas.openxmlformats.org/drawingml/2006/chart" r:id="R2e0f8a61df914296"/>
+            <c:chart xmlns:r="http://schemas.openxmlformats.org/officeDocument/2006/relationships" xmlns:c="http://schemas.openxmlformats.org/drawingml/2006/chart" r:id="R1a69f635333746d9"/>
           </a:graphicData>
         </a:graphic>
       </p:graphicFrame>
     </p:spTree>
     <p:extLst>
       <p:ext uri="{BB962C8B-B14F-4D97-AF65-F5344CB8AC3E}">
-        <p14:creationId xmlns:p14="http://schemas.microsoft.com/office/powerpoint/2010/main" val="1362397809"/>
+        <p14:creationId xmlns:p14="http://schemas.microsoft.com/office/powerpoint/2010/main" val="1309713473"/>
       </p:ext>
     </p:extLst>
   </p:cSld>
@@ -6744,7 +6744,7 @@
           <p:cNvPr id="16" name="">
             <a:extLst xmlns:a="http://schemas.openxmlformats.org/drawingml/2006/main">
               <a:ext uri="{FF2B5EF4-FFF2-40B4-BE49-F238E27FC236}">
-                <a16:creationId xmlns:a16="http://schemas.microsoft.com/office/drawing/2014/main" id="{F2A4AD52-7D3F-42C4-86EA-366DC14EF2BF}"/>
+                <a16:creationId xmlns:a16="http://schemas.microsoft.com/office/drawing/2014/main" id="{8AA00A01-01BB-4829-A1AB-B18B33FB007B}"/>
               </a:ext>
             </a:extLst>
           </p:cNvPr>
@@ -6801,7 +6801,7 @@
           <p:cNvPr id="2" name="">
             <a:extLst xmlns:a="http://schemas.openxmlformats.org/drawingml/2006/main">
               <a:ext uri="{FF2B5EF4-FFF2-40B4-BE49-F238E27FC236}">
-                <a16:creationId xmlns:a16="http://schemas.microsoft.com/office/drawing/2014/main" id="{5FEEDEEF-0738-4484-97E0-60A0C2807617}"/>
+                <a16:creationId xmlns:a16="http://schemas.microsoft.com/office/drawing/2014/main" id="{DCC5465B-B220-4565-8EA4-D6709802153A}"/>
               </a:ext>
             </a:extLst>
           </p:cNvPr>
@@ -6858,7 +6858,7 @@
           <p:cNvPr id="3" name="">
             <a:extLst xmlns:a="http://schemas.openxmlformats.org/drawingml/2006/main">
               <a:ext uri="{FF2B5EF4-FFF2-40B4-BE49-F238E27FC236}">
-                <a16:creationId xmlns:a16="http://schemas.microsoft.com/office/drawing/2014/main" id="{811A728C-1FB6-4BFE-8E12-CE1E1B0C2BD7}"/>
+                <a16:creationId xmlns:a16="http://schemas.microsoft.com/office/drawing/2014/main" id="{661E1955-CBE0-4F0A-BF75-110CAE92A6CC}"/>
               </a:ext>
             </a:extLst>
           </p:cNvPr>
@@ -6915,7 +6915,7 @@
           <p:cNvPr id="4" name="">
             <a:extLst xmlns:a="http://schemas.openxmlformats.org/drawingml/2006/main">
               <a:ext uri="{FF2B5EF4-FFF2-40B4-BE49-F238E27FC236}">
-                <a16:creationId xmlns:a16="http://schemas.microsoft.com/office/drawing/2014/main" id="{B65EF667-B9E1-4E83-9AEE-1A42845AA050}"/>
+                <a16:creationId xmlns:a16="http://schemas.microsoft.com/office/drawing/2014/main" id="{802CCF00-D97A-42A6-B763-009F83BCB6D5}"/>
               </a:ext>
             </a:extLst>
           </p:cNvPr>
@@ -6979,7 +6979,7 @@
         </p:xfrm>
         <a:graphic xmlns:a="http://schemas.openxmlformats.org/drawingml/2006/main">
           <a:graphicData uri="http://schemas.openxmlformats.org/drawingml/2006/chart">
-            <c:chart xmlns:r="http://schemas.openxmlformats.org/officeDocument/2006/relationships" xmlns:c="http://schemas.openxmlformats.org/drawingml/2006/chart" r:id="R78f84691b7764b91"/>
+            <c:chart xmlns:r="http://schemas.openxmlformats.org/officeDocument/2006/relationships" xmlns:c="http://schemas.openxmlformats.org/drawingml/2006/chart" r:id="Rba1b6b0ada254076"/>
           </a:graphicData>
         </a:graphic>
       </p:graphicFrame>
@@ -6988,7 +6988,7 @@
           <p:cNvPr id="6" name="">
             <a:extLst xmlns:a="http://schemas.openxmlformats.org/drawingml/2006/main">
               <a:ext uri="{FF2B5EF4-FFF2-40B4-BE49-F238E27FC236}">
-                <a16:creationId xmlns:a16="http://schemas.microsoft.com/office/drawing/2014/main" id="{E78EB316-73CF-4AD0-9516-B74AB2500FAC}"/>
+                <a16:creationId xmlns:a16="http://schemas.microsoft.com/office/drawing/2014/main" id="{8B1A41CA-3497-40EB-BFE5-729A17CDF9D5}"/>
               </a:ext>
             </a:extLst>
           </p:cNvPr>
@@ -7045,7 +7045,7 @@
           <p:cNvPr id="7" name="">
             <a:extLst xmlns:a="http://schemas.openxmlformats.org/drawingml/2006/main">
               <a:ext uri="{FF2B5EF4-FFF2-40B4-BE49-F238E27FC236}">
-                <a16:creationId xmlns:a16="http://schemas.microsoft.com/office/drawing/2014/main" id="{7DACA6AC-6C53-4BA3-B69C-A0418AD34CEB}"/>
+                <a16:creationId xmlns:a16="http://schemas.microsoft.com/office/drawing/2014/main" id="{3BC524F4-1BE3-4EF0-904C-17DECEFFCFEF}"/>
               </a:ext>
             </a:extLst>
           </p:cNvPr>
@@ -7102,7 +7102,7 @@
           <p:cNvPr id="8" name="">
             <a:extLst xmlns:a="http://schemas.openxmlformats.org/drawingml/2006/main">
               <a:ext uri="{FF2B5EF4-FFF2-40B4-BE49-F238E27FC236}">
-                <a16:creationId xmlns:a16="http://schemas.microsoft.com/office/drawing/2014/main" id="{95B25C2C-3AA6-4AC8-BD32-69A676B2904A}"/>
+                <a16:creationId xmlns:a16="http://schemas.microsoft.com/office/drawing/2014/main" id="{64F535BE-4C01-4C9C-BEE9-A822DE1331AB}"/>
               </a:ext>
             </a:extLst>
           </p:cNvPr>
@@ -7166,7 +7166,7 @@
         </p:xfrm>
         <a:graphic xmlns:a="http://schemas.openxmlformats.org/drawingml/2006/main">
           <a:graphicData uri="http://schemas.openxmlformats.org/drawingml/2006/chart">
-            <c:chart xmlns:r="http://schemas.openxmlformats.org/officeDocument/2006/relationships" xmlns:c="http://schemas.openxmlformats.org/drawingml/2006/chart" r:id="Rbae6ccb3b4624575"/>
+            <c:chart xmlns:r="http://schemas.openxmlformats.org/officeDocument/2006/relationships" xmlns:c="http://schemas.openxmlformats.org/drawingml/2006/chart" r:id="Rce54a3b770a94dfa"/>
           </a:graphicData>
         </a:graphic>
       </p:graphicFrame>
@@ -7175,7 +7175,7 @@
           <p:cNvPr id="10" name="">
             <a:extLst xmlns:a="http://schemas.openxmlformats.org/drawingml/2006/main">
               <a:ext uri="{FF2B5EF4-FFF2-40B4-BE49-F238E27FC236}">
-                <a16:creationId xmlns:a16="http://schemas.microsoft.com/office/drawing/2014/main" id="{E0FFBA5A-62A1-4119-9846-B78F724D7688}"/>
+                <a16:creationId xmlns:a16="http://schemas.microsoft.com/office/drawing/2014/main" id="{CFC993D7-4513-4B2B-BAA5-78F21B0BCAF5}"/>
               </a:ext>
             </a:extLst>
           </p:cNvPr>
@@ -7232,7 +7232,7 @@
           <p:cNvPr id="11" name="">
             <a:extLst xmlns:a="http://schemas.openxmlformats.org/drawingml/2006/main">
               <a:ext uri="{FF2B5EF4-FFF2-40B4-BE49-F238E27FC236}">
-                <a16:creationId xmlns:a16="http://schemas.microsoft.com/office/drawing/2014/main" id="{F1D70BA3-E006-4750-A92B-6DA9BC181E0B}"/>
+                <a16:creationId xmlns:a16="http://schemas.microsoft.com/office/drawing/2014/main" id="{397478C6-FE63-434A-A36A-0694948005F7}"/>
               </a:ext>
             </a:extLst>
           </p:cNvPr>
@@ -7289,7 +7289,7 @@
           <p:cNvPr id="12" name="">
             <a:extLst xmlns:a="http://schemas.openxmlformats.org/drawingml/2006/main">
               <a:ext uri="{FF2B5EF4-FFF2-40B4-BE49-F238E27FC236}">
-                <a16:creationId xmlns:a16="http://schemas.microsoft.com/office/drawing/2014/main" id="{A21ADEB7-AC12-4E14-B8B2-6AFAE8B23663}"/>
+                <a16:creationId xmlns:a16="http://schemas.microsoft.com/office/drawing/2014/main" id="{4367C293-1732-43BA-B7FA-08893BEA8E7B}"/>
               </a:ext>
             </a:extLst>
           </p:cNvPr>
@@ -7353,7 +7353,7 @@
         </p:xfrm>
         <a:graphic xmlns:a="http://schemas.openxmlformats.org/drawingml/2006/main">
           <a:graphicData uri="http://schemas.openxmlformats.org/drawingml/2006/chart">
-            <c:chart xmlns:r="http://schemas.openxmlformats.org/officeDocument/2006/relationships" xmlns:c="http://schemas.openxmlformats.org/drawingml/2006/chart" r:id="Rf06a2c4f8c644812"/>
+            <c:chart xmlns:r="http://schemas.openxmlformats.org/officeDocument/2006/relationships" xmlns:c="http://schemas.openxmlformats.org/drawingml/2006/chart" r:id="R3c1be84effc64bb8"/>
           </a:graphicData>
         </a:graphic>
       </p:graphicFrame>
@@ -7362,7 +7362,7 @@
           <p:cNvPr id="14" name="">
             <a:extLst xmlns:a="http://schemas.openxmlformats.org/drawingml/2006/main">
               <a:ext uri="{FF2B5EF4-FFF2-40B4-BE49-F238E27FC236}">
-                <a16:creationId xmlns:a16="http://schemas.microsoft.com/office/drawing/2014/main" id="{F3CA492C-95D1-44C7-A7DE-EA6019FBC463}"/>
+                <a16:creationId xmlns:a16="http://schemas.microsoft.com/office/drawing/2014/main" id="{E0A0C67E-867C-4C40-B52B-F9B9B5A0F2AA}"/>
               </a:ext>
             </a:extLst>
           </p:cNvPr>
@@ -7419,7 +7419,7 @@
           <p:cNvPr id="15" name="">
             <a:extLst xmlns:a="http://schemas.openxmlformats.org/drawingml/2006/main">
               <a:ext uri="{FF2B5EF4-FFF2-40B4-BE49-F238E27FC236}">
-                <a16:creationId xmlns:a16="http://schemas.microsoft.com/office/drawing/2014/main" id="{5FD6F093-CE41-4088-8FC8-4A133B0FCF78}"/>
+                <a16:creationId xmlns:a16="http://schemas.microsoft.com/office/drawing/2014/main" id="{C4E4A3B4-0329-42A8-A90C-7B0E46943853}"/>
               </a:ext>
             </a:extLst>
           </p:cNvPr>
@@ -7474,7 +7474,7 @@
     </p:spTree>
     <p:extLst>
       <p:ext uri="{BB962C8B-B14F-4D97-AF65-F5344CB8AC3E}">
-        <p14:creationId xmlns:p14="http://schemas.microsoft.com/office/powerpoint/2010/main" val="386402493"/>
+        <p14:creationId xmlns:p14="http://schemas.microsoft.com/office/powerpoint/2010/main" val="311173158"/>
       </p:ext>
     </p:extLst>
   </p:cSld>
@@ -7505,7 +7505,7 @@
           <p:cNvPr id="12" name="">
             <a:extLst xmlns:a="http://schemas.openxmlformats.org/drawingml/2006/main">
               <a:ext uri="{FF2B5EF4-FFF2-40B4-BE49-F238E27FC236}">
-                <a16:creationId xmlns:a16="http://schemas.microsoft.com/office/drawing/2014/main" id="{9435968F-5EC4-4417-A744-7AB4FE56E4D4}"/>
+                <a16:creationId xmlns:a16="http://schemas.microsoft.com/office/drawing/2014/main" id="{1D10444A-FCDC-4490-9E45-4D02A59F77FF}"/>
               </a:ext>
             </a:extLst>
           </p:cNvPr>
@@ -7562,7 +7562,7 @@
           <p:cNvPr id="2" name="">
             <a:extLst xmlns:a="http://schemas.openxmlformats.org/drawingml/2006/main">
               <a:ext uri="{FF2B5EF4-FFF2-40B4-BE49-F238E27FC236}">
-                <a16:creationId xmlns:a16="http://schemas.microsoft.com/office/drawing/2014/main" id="{2A448978-4B9B-41D3-9EBF-EE801592FF64}"/>
+                <a16:creationId xmlns:a16="http://schemas.microsoft.com/office/drawing/2014/main" id="{5EEF78F9-D106-42D9-93E4-065C870AF465}"/>
               </a:ext>
             </a:extLst>
           </p:cNvPr>
@@ -7619,7 +7619,7 @@
           <p:cNvPr id="3" name="">
             <a:extLst xmlns:a="http://schemas.openxmlformats.org/drawingml/2006/main">
               <a:ext uri="{FF2B5EF4-FFF2-40B4-BE49-F238E27FC236}">
-                <a16:creationId xmlns:a16="http://schemas.microsoft.com/office/drawing/2014/main" id="{BF1C97B5-134A-4AB9-A9C1-10A294E33991}"/>
+                <a16:creationId xmlns:a16="http://schemas.microsoft.com/office/drawing/2014/main" id="{8DAE67E9-8816-4CA8-9F51-7CD253831067}"/>
               </a:ext>
             </a:extLst>
           </p:cNvPr>
@@ -7683,7 +7683,7 @@
         </p:xfrm>
         <a:graphic xmlns:a="http://schemas.openxmlformats.org/drawingml/2006/main">
           <a:graphicData uri="http://schemas.openxmlformats.org/drawingml/2006/chart">
-            <c:chart xmlns:r="http://schemas.openxmlformats.org/officeDocument/2006/relationships" xmlns:c="http://schemas.openxmlformats.org/drawingml/2006/chart" r:id="R52a0bdaba48545bd"/>
+            <c:chart xmlns:r="http://schemas.openxmlformats.org/officeDocument/2006/relationships" xmlns:c="http://schemas.openxmlformats.org/drawingml/2006/chart" r:id="Rdfa5f142fa994233"/>
           </a:graphicData>
         </a:graphic>
       </p:graphicFrame>
@@ -7692,7 +7692,7 @@
           <p:cNvPr id="5" name="">
             <a:extLst xmlns:a="http://schemas.openxmlformats.org/drawingml/2006/main">
               <a:ext uri="{FF2B5EF4-FFF2-40B4-BE49-F238E27FC236}">
-                <a16:creationId xmlns:a16="http://schemas.microsoft.com/office/drawing/2014/main" id="{9875074C-79D6-4C8B-B12D-3284120ECC12}"/>
+                <a16:creationId xmlns:a16="http://schemas.microsoft.com/office/drawing/2014/main" id="{7EBF0986-7C0F-4062-A581-38068E7BB87F}"/>
               </a:ext>
             </a:extLst>
           </p:cNvPr>
@@ -7749,7 +7749,7 @@
           <p:cNvPr id="6" name="">
             <a:extLst xmlns:a="http://schemas.openxmlformats.org/drawingml/2006/main">
               <a:ext uri="{FF2B5EF4-FFF2-40B4-BE49-F238E27FC236}">
-                <a16:creationId xmlns:a16="http://schemas.microsoft.com/office/drawing/2014/main" id="{24E882D4-5EA2-490C-969A-ADEE3EA1E884}"/>
+                <a16:creationId xmlns:a16="http://schemas.microsoft.com/office/drawing/2014/main" id="{F08832E8-BB97-464D-8CBC-084758FDA159}"/>
               </a:ext>
             </a:extLst>
           </p:cNvPr>
@@ -7806,7 +7806,7 @@
           <p:cNvPr id="7" name="">
             <a:extLst xmlns:a="http://schemas.openxmlformats.org/drawingml/2006/main">
               <a:ext uri="{FF2B5EF4-FFF2-40B4-BE49-F238E27FC236}">
-                <a16:creationId xmlns:a16="http://schemas.microsoft.com/office/drawing/2014/main" id="{7B164F82-D417-4163-9FD7-44595E9DDB02}"/>
+                <a16:creationId xmlns:a16="http://schemas.microsoft.com/office/drawing/2014/main" id="{D3A20DA5-4F7A-4CA2-BD13-30D8431DA87B}"/>
               </a:ext>
             </a:extLst>
           </p:cNvPr>
@@ -7863,7 +7863,7 @@
           <p:cNvPr id="8" name="">
             <a:extLst xmlns:a="http://schemas.openxmlformats.org/drawingml/2006/main">
               <a:ext uri="{FF2B5EF4-FFF2-40B4-BE49-F238E27FC236}">
-                <a16:creationId xmlns:a16="http://schemas.microsoft.com/office/drawing/2014/main" id="{C4107FD5-1CD8-4FBF-814C-55CE43A432FC}"/>
+                <a16:creationId xmlns:a16="http://schemas.microsoft.com/office/drawing/2014/main" id="{3462A3D3-D76E-4CE3-B2B9-C14F9DA7B8F6}"/>
               </a:ext>
             </a:extLst>
           </p:cNvPr>
@@ -7920,7 +7920,7 @@
           <p:cNvPr id="9" name="">
             <a:extLst xmlns:a="http://schemas.openxmlformats.org/drawingml/2006/main">
               <a:ext uri="{FF2B5EF4-FFF2-40B4-BE49-F238E27FC236}">
-                <a16:creationId xmlns:a16="http://schemas.microsoft.com/office/drawing/2014/main" id="{6933E046-86F6-4B03-90E6-E5D208DD7C13}"/>
+                <a16:creationId xmlns:a16="http://schemas.microsoft.com/office/drawing/2014/main" id="{BB74431D-2E7D-45FC-875E-9FCC23A13D98}"/>
               </a:ext>
             </a:extLst>
           </p:cNvPr>
@@ -7977,7 +7977,7 @@
           <p:cNvPr id="10" name="">
             <a:extLst xmlns:a="http://schemas.openxmlformats.org/drawingml/2006/main">
               <a:ext uri="{FF2B5EF4-FFF2-40B4-BE49-F238E27FC236}">
-                <a16:creationId xmlns:a16="http://schemas.microsoft.com/office/drawing/2014/main" id="{656E242B-F794-4936-B540-214CFFA6A787}"/>
+                <a16:creationId xmlns:a16="http://schemas.microsoft.com/office/drawing/2014/main" id="{46F60C17-5AA2-49B7-A6A5-600E14C9E470}"/>
               </a:ext>
             </a:extLst>
           </p:cNvPr>
@@ -8034,7 +8034,7 @@
           <p:cNvPr id="11" name="">
             <a:extLst xmlns:a="http://schemas.openxmlformats.org/drawingml/2006/main">
               <a:ext uri="{FF2B5EF4-FFF2-40B4-BE49-F238E27FC236}">
-                <a16:creationId xmlns:a16="http://schemas.microsoft.com/office/drawing/2014/main" id="{C80D1403-F6DA-45FB-9BF0-6DE9ABBDFD0B}"/>
+                <a16:creationId xmlns:a16="http://schemas.microsoft.com/office/drawing/2014/main" id="{74657DF4-DE1F-465B-BF64-97E25D329F6E}"/>
               </a:ext>
             </a:extLst>
           </p:cNvPr>
@@ -8089,7 +8089,7 @@
     </p:spTree>
     <p:extLst>
       <p:ext uri="{BB962C8B-B14F-4D97-AF65-F5344CB8AC3E}">
-        <p14:creationId xmlns:p14="http://schemas.microsoft.com/office/powerpoint/2010/main" val="486428853"/>
+        <p14:creationId xmlns:p14="http://schemas.microsoft.com/office/powerpoint/2010/main" val="1928617563"/>
       </p:ext>
     </p:extLst>
   </p:cSld>
@@ -8120,7 +8120,7 @@
           <p:cNvPr id="12" name="">
             <a:extLst xmlns:a="http://schemas.openxmlformats.org/drawingml/2006/main">
               <a:ext uri="{FF2B5EF4-FFF2-40B4-BE49-F238E27FC236}">
-                <a16:creationId xmlns:a16="http://schemas.microsoft.com/office/drawing/2014/main" id="{46A3D470-4AA2-4710-8FA0-DCB12CACB345}"/>
+                <a16:creationId xmlns:a16="http://schemas.microsoft.com/office/drawing/2014/main" id="{09CB534B-B04E-4C3A-8CE1-EAF6D298660E}"/>
               </a:ext>
             </a:extLst>
           </p:cNvPr>
@@ -8177,7 +8177,7 @@
           <p:cNvPr id="2" name="">
             <a:extLst xmlns:a="http://schemas.openxmlformats.org/drawingml/2006/main">
               <a:ext uri="{FF2B5EF4-FFF2-40B4-BE49-F238E27FC236}">
-                <a16:creationId xmlns:a16="http://schemas.microsoft.com/office/drawing/2014/main" id="{96A6A305-5647-4FA2-9F33-B0D79360E50A}"/>
+                <a16:creationId xmlns:a16="http://schemas.microsoft.com/office/drawing/2014/main" id="{2039C4E4-D058-4F3E-B985-30FF2C385E0D}"/>
               </a:ext>
             </a:extLst>
           </p:cNvPr>
@@ -8234,7 +8234,7 @@
           <p:cNvPr id="3" name="">
             <a:extLst xmlns:a="http://schemas.openxmlformats.org/drawingml/2006/main">
               <a:ext uri="{FF2B5EF4-FFF2-40B4-BE49-F238E27FC236}">
-                <a16:creationId xmlns:a16="http://schemas.microsoft.com/office/drawing/2014/main" id="{D8997151-F3DC-4F23-8BA6-88FB4FF64708}"/>
+                <a16:creationId xmlns:a16="http://schemas.microsoft.com/office/drawing/2014/main" id="{EC522A75-81C8-4284-BFA8-4253945E9A8A}"/>
               </a:ext>
             </a:extLst>
           </p:cNvPr>
@@ -8298,7 +8298,7 @@
         </p:xfrm>
         <a:graphic xmlns:a="http://schemas.openxmlformats.org/drawingml/2006/main">
           <a:graphicData uri="http://schemas.openxmlformats.org/drawingml/2006/chart">
-            <c:chart xmlns:r="http://schemas.openxmlformats.org/officeDocument/2006/relationships" xmlns:c="http://schemas.openxmlformats.org/drawingml/2006/chart" r:id="Rdf97942adbdc40c1"/>
+            <c:chart xmlns:r="http://schemas.openxmlformats.org/officeDocument/2006/relationships" xmlns:c="http://schemas.openxmlformats.org/drawingml/2006/chart" r:id="Re37d6a3b5b31485d"/>
           </a:graphicData>
         </a:graphic>
       </p:graphicFrame>
@@ -8307,7 +8307,7 @@
           <p:cNvPr id="5" name="">
             <a:extLst xmlns:a="http://schemas.openxmlformats.org/drawingml/2006/main">
               <a:ext uri="{FF2B5EF4-FFF2-40B4-BE49-F238E27FC236}">
-                <a16:creationId xmlns:a16="http://schemas.microsoft.com/office/drawing/2014/main" id="{ED6809C4-D1DE-40B6-A24E-EF1B8213BDB1}"/>
+                <a16:creationId xmlns:a16="http://schemas.microsoft.com/office/drawing/2014/main" id="{F23B7E77-5D6F-47CF-AAA6-ECB89B916FFF}"/>
               </a:ext>
             </a:extLst>
           </p:cNvPr>
@@ -8364,7 +8364,7 @@
           <p:cNvPr id="6" name="">
             <a:extLst xmlns:a="http://schemas.openxmlformats.org/drawingml/2006/main">
               <a:ext uri="{FF2B5EF4-FFF2-40B4-BE49-F238E27FC236}">
-                <a16:creationId xmlns:a16="http://schemas.microsoft.com/office/drawing/2014/main" id="{82410CBB-660F-4272-A8FB-BAD9AA97B54D}"/>
+                <a16:creationId xmlns:a16="http://schemas.microsoft.com/office/drawing/2014/main" id="{60E0167C-C886-4177-B9E8-784E31C6A382}"/>
               </a:ext>
             </a:extLst>
           </p:cNvPr>
@@ -8421,7 +8421,7 @@
           <p:cNvPr id="7" name="">
             <a:extLst xmlns:a="http://schemas.openxmlformats.org/drawingml/2006/main">
               <a:ext uri="{FF2B5EF4-FFF2-40B4-BE49-F238E27FC236}">
-                <a16:creationId xmlns:a16="http://schemas.microsoft.com/office/drawing/2014/main" id="{DFE89C11-BD90-49D0-AD68-331ECE819CC5}"/>
+                <a16:creationId xmlns:a16="http://schemas.microsoft.com/office/drawing/2014/main" id="{FB300BD5-2618-4F72-ADCF-CF950685B097}"/>
               </a:ext>
             </a:extLst>
           </p:cNvPr>
@@ -8478,7 +8478,7 @@
           <p:cNvPr id="8" name="">
             <a:extLst xmlns:a="http://schemas.openxmlformats.org/drawingml/2006/main">
               <a:ext uri="{FF2B5EF4-FFF2-40B4-BE49-F238E27FC236}">
-                <a16:creationId xmlns:a16="http://schemas.microsoft.com/office/drawing/2014/main" id="{772635BA-E3E6-4F3D-8C1F-E8BA876951F9}"/>
+                <a16:creationId xmlns:a16="http://schemas.microsoft.com/office/drawing/2014/main" id="{58C6CC3D-F150-4B05-B98E-884D0BB091F9}"/>
               </a:ext>
             </a:extLst>
           </p:cNvPr>
@@ -8535,7 +8535,7 @@
           <p:cNvPr id="9" name="">
             <a:extLst xmlns:a="http://schemas.openxmlformats.org/drawingml/2006/main">
               <a:ext uri="{FF2B5EF4-FFF2-40B4-BE49-F238E27FC236}">
-                <a16:creationId xmlns:a16="http://schemas.microsoft.com/office/drawing/2014/main" id="{9A52C3D3-655E-43E0-80CD-D073C723F0FF}"/>
+                <a16:creationId xmlns:a16="http://schemas.microsoft.com/office/drawing/2014/main" id="{3A7434D4-FAB2-4531-ABDF-1698020366B1}"/>
               </a:ext>
             </a:extLst>
           </p:cNvPr>
@@ -8592,7 +8592,7 @@
           <p:cNvPr id="10" name="">
             <a:extLst xmlns:a="http://schemas.openxmlformats.org/drawingml/2006/main">
               <a:ext uri="{FF2B5EF4-FFF2-40B4-BE49-F238E27FC236}">
-                <a16:creationId xmlns:a16="http://schemas.microsoft.com/office/drawing/2014/main" id="{B2C1B0CF-211A-4099-8830-884086EAE3EC}"/>
+                <a16:creationId xmlns:a16="http://schemas.microsoft.com/office/drawing/2014/main" id="{7ACC8045-5496-463C-9771-0FF24E8BBE98}"/>
               </a:ext>
             </a:extLst>
           </p:cNvPr>
@@ -8649,7 +8649,7 @@
           <p:cNvPr id="11" name="">
             <a:extLst xmlns:a="http://schemas.openxmlformats.org/drawingml/2006/main">
               <a:ext uri="{FF2B5EF4-FFF2-40B4-BE49-F238E27FC236}">
-                <a16:creationId xmlns:a16="http://schemas.microsoft.com/office/drawing/2014/main" id="{1B188DC8-4A9A-493C-B477-9937848B94AC}"/>
+                <a16:creationId xmlns:a16="http://schemas.microsoft.com/office/drawing/2014/main" id="{650D2CB8-DCD5-4766-A5CA-3F13902918C0}"/>
               </a:ext>
             </a:extLst>
           </p:cNvPr>
@@ -8704,7 +8704,7 @@
     </p:spTree>
     <p:extLst>
       <p:ext uri="{BB962C8B-B14F-4D97-AF65-F5344CB8AC3E}">
-        <p14:creationId xmlns:p14="http://schemas.microsoft.com/office/powerpoint/2010/main" val="813713526"/>
+        <p14:creationId xmlns:p14="http://schemas.microsoft.com/office/powerpoint/2010/main" val="925143214"/>
       </p:ext>
     </p:extLst>
   </p:cSld>
@@ -8735,7 +8735,7 @@
           <p:cNvPr id="12" name="">
             <a:extLst xmlns:a="http://schemas.openxmlformats.org/drawingml/2006/main">
               <a:ext uri="{FF2B5EF4-FFF2-40B4-BE49-F238E27FC236}">
-                <a16:creationId xmlns:a16="http://schemas.microsoft.com/office/drawing/2014/main" id="{CA213240-B3E3-46BE-AB49-782966FD6009}"/>
+                <a16:creationId xmlns:a16="http://schemas.microsoft.com/office/drawing/2014/main" id="{199939C6-976C-4A06-B8CE-665C990443CC}"/>
               </a:ext>
             </a:extLst>
           </p:cNvPr>
@@ -8792,7 +8792,7 @@
           <p:cNvPr id="2" name="">
             <a:extLst xmlns:a="http://schemas.openxmlformats.org/drawingml/2006/main">
               <a:ext uri="{FF2B5EF4-FFF2-40B4-BE49-F238E27FC236}">
-                <a16:creationId xmlns:a16="http://schemas.microsoft.com/office/drawing/2014/main" id="{6E1E075D-9D5D-4324-AF04-2A8454D2BFF0}"/>
+                <a16:creationId xmlns:a16="http://schemas.microsoft.com/office/drawing/2014/main" id="{A1E91328-0CCA-4531-B19A-D146F9FE46F2}"/>
               </a:ext>
             </a:extLst>
           </p:cNvPr>
@@ -8849,7 +8849,7 @@
           <p:cNvPr id="3" name="">
             <a:extLst xmlns:a="http://schemas.openxmlformats.org/drawingml/2006/main">
               <a:ext uri="{FF2B5EF4-FFF2-40B4-BE49-F238E27FC236}">
-                <a16:creationId xmlns:a16="http://schemas.microsoft.com/office/drawing/2014/main" id="{AB2D07DB-EDB5-427D-BD2C-424D512C5783}"/>
+                <a16:creationId xmlns:a16="http://schemas.microsoft.com/office/drawing/2014/main" id="{FFE5467F-A551-4803-9CDE-18E447549B96}"/>
               </a:ext>
             </a:extLst>
           </p:cNvPr>
@@ -8906,7 +8906,7 @@
           <p:cNvPr id="4" name="">
             <a:extLst xmlns:a="http://schemas.openxmlformats.org/drawingml/2006/main">
               <a:ext uri="{FF2B5EF4-FFF2-40B4-BE49-F238E27FC236}">
-                <a16:creationId xmlns:a16="http://schemas.microsoft.com/office/drawing/2014/main" id="{916708B5-BC48-4113-B89A-2886BF86FB3A}"/>
+                <a16:creationId xmlns:a16="http://schemas.microsoft.com/office/drawing/2014/main" id="{A8691F85-6EE9-4E10-BCBC-144DC48D932C}"/>
               </a:ext>
             </a:extLst>
           </p:cNvPr>
@@ -8963,7 +8963,7 @@
           <p:cNvPr id="5" name="">
             <a:extLst xmlns:a="http://schemas.openxmlformats.org/drawingml/2006/main">
               <a:ext uri="{FF2B5EF4-FFF2-40B4-BE49-F238E27FC236}">
-                <a16:creationId xmlns:a16="http://schemas.microsoft.com/office/drawing/2014/main" id="{276B84E5-99BE-42E0-BC20-53E17563EFBD}"/>
+                <a16:creationId xmlns:a16="http://schemas.microsoft.com/office/drawing/2014/main" id="{45C2439B-E3D5-4A0A-BD94-26C40AA8AE69}"/>
               </a:ext>
             </a:extLst>
           </p:cNvPr>
@@ -9020,7 +9020,7 @@
           <p:cNvPr id="6" name="">
             <a:extLst xmlns:a="http://schemas.openxmlformats.org/drawingml/2006/main">
               <a:ext uri="{FF2B5EF4-FFF2-40B4-BE49-F238E27FC236}">
-                <a16:creationId xmlns:a16="http://schemas.microsoft.com/office/drawing/2014/main" id="{734E5A2F-EE94-4499-894F-4EA536558D9E}"/>
+                <a16:creationId xmlns:a16="http://schemas.microsoft.com/office/drawing/2014/main" id="{8E6207BE-9F7E-4561-842F-6BBEE06F0966}"/>
               </a:ext>
             </a:extLst>
           </p:cNvPr>
@@ -9077,7 +9077,7 @@
           <p:cNvPr id="7" name="">
             <a:extLst xmlns:a="http://schemas.openxmlformats.org/drawingml/2006/main">
               <a:ext uri="{FF2B5EF4-FFF2-40B4-BE49-F238E27FC236}">
-                <a16:creationId xmlns:a16="http://schemas.microsoft.com/office/drawing/2014/main" id="{955C764B-1679-400B-A6A9-C201C4292CF4}"/>
+                <a16:creationId xmlns:a16="http://schemas.microsoft.com/office/drawing/2014/main" id="{A015BF3B-F485-4E40-AA5E-50E2E129BE29}"/>
               </a:ext>
             </a:extLst>
           </p:cNvPr>
@@ -9134,7 +9134,7 @@
           <p:cNvPr id="8" name="">
             <a:extLst xmlns:a="http://schemas.openxmlformats.org/drawingml/2006/main">
               <a:ext uri="{FF2B5EF4-FFF2-40B4-BE49-F238E27FC236}">
-                <a16:creationId xmlns:a16="http://schemas.microsoft.com/office/drawing/2014/main" id="{7A7DF0DE-2157-43D3-BEBE-330B77F60D78}"/>
+                <a16:creationId xmlns:a16="http://schemas.microsoft.com/office/drawing/2014/main" id="{70B1AF5B-FB9A-45A1-917E-AD8C91EC51E5}"/>
               </a:ext>
             </a:extLst>
           </p:cNvPr>
@@ -9191,7 +9191,7 @@
           <p:cNvPr id="9" name="">
             <a:extLst xmlns:a="http://schemas.openxmlformats.org/drawingml/2006/main">
               <a:ext uri="{FF2B5EF4-FFF2-40B4-BE49-F238E27FC236}">
-                <a16:creationId xmlns:a16="http://schemas.microsoft.com/office/drawing/2014/main" id="{253107F8-CDD2-40A9-8B74-6F9D7CFEC2FC}"/>
+                <a16:creationId xmlns:a16="http://schemas.microsoft.com/office/drawing/2014/main" id="{055A1E31-DF30-45F6-B041-A7D035DE03DD}"/>
               </a:ext>
             </a:extLst>
           </p:cNvPr>
@@ -9248,7 +9248,7 @@
           <p:cNvPr id="10" name="">
             <a:extLst xmlns:a="http://schemas.openxmlformats.org/drawingml/2006/main">
               <a:ext uri="{FF2B5EF4-FFF2-40B4-BE49-F238E27FC236}">
-                <a16:creationId xmlns:a16="http://schemas.microsoft.com/office/drawing/2014/main" id="{4C1E4176-5CF9-4E56-BB12-C9F814197A20}"/>
+                <a16:creationId xmlns:a16="http://schemas.microsoft.com/office/drawing/2014/main" id="{E31F10DE-C9A2-48CF-88D0-3530E83C9136}"/>
               </a:ext>
             </a:extLst>
           </p:cNvPr>
@@ -9305,7 +9305,7 @@
           <p:cNvPr id="11" name="">
             <a:extLst xmlns:a="http://schemas.openxmlformats.org/drawingml/2006/main">
               <a:ext uri="{FF2B5EF4-FFF2-40B4-BE49-F238E27FC236}">
-                <a16:creationId xmlns:a16="http://schemas.microsoft.com/office/drawing/2014/main" id="{7D480393-D3C8-4A02-AB32-048C19118A26}"/>
+                <a16:creationId xmlns:a16="http://schemas.microsoft.com/office/drawing/2014/main" id="{2D792161-6C08-49B1-91DD-369FC13504DC}"/>
               </a:ext>
             </a:extLst>
           </p:cNvPr>
@@ -9360,7 +9360,7 @@
     </p:spTree>
     <p:extLst>
       <p:ext uri="{BB962C8B-B14F-4D97-AF65-F5344CB8AC3E}">
-        <p14:creationId xmlns:p14="http://schemas.microsoft.com/office/powerpoint/2010/main" val="729210637"/>
+        <p14:creationId xmlns:p14="http://schemas.microsoft.com/office/powerpoint/2010/main" val="2102989168"/>
       </p:ext>
     </p:extLst>
   </p:cSld>
@@ -9391,7 +9391,7 @@
           <p:cNvPr id="12" name="">
             <a:extLst xmlns:a="http://schemas.openxmlformats.org/drawingml/2006/main">
               <a:ext uri="{FF2B5EF4-FFF2-40B4-BE49-F238E27FC236}">
-                <a16:creationId xmlns:a16="http://schemas.microsoft.com/office/drawing/2014/main" id="{9628DE86-91AE-43A5-85F6-11E6629E8B89}"/>
+                <a16:creationId xmlns:a16="http://schemas.microsoft.com/office/drawing/2014/main" id="{78342080-21FB-43A9-8A1F-74A2D608A3F5}"/>
               </a:ext>
             </a:extLst>
           </p:cNvPr>
@@ -9448,7 +9448,7 @@
           <p:cNvPr id="2" name="">
             <a:extLst xmlns:a="http://schemas.openxmlformats.org/drawingml/2006/main">
               <a:ext uri="{FF2B5EF4-FFF2-40B4-BE49-F238E27FC236}">
-                <a16:creationId xmlns:a16="http://schemas.microsoft.com/office/drawing/2014/main" id="{8F26F9D5-659B-4A19-9FEF-258E5D5E763E}"/>
+                <a16:creationId xmlns:a16="http://schemas.microsoft.com/office/drawing/2014/main" id="{7D9BEAE6-BBC5-4819-8000-EDC45149B177}"/>
               </a:ext>
             </a:extLst>
           </p:cNvPr>
@@ -9505,7 +9505,7 @@
           <p:cNvPr id="3" name="">
             <a:extLst xmlns:a="http://schemas.openxmlformats.org/drawingml/2006/main">
               <a:ext uri="{FF2B5EF4-FFF2-40B4-BE49-F238E27FC236}">
-                <a16:creationId xmlns:a16="http://schemas.microsoft.com/office/drawing/2014/main" id="{405FE0F5-C070-43A8-97F1-4092CE7318B8}"/>
+                <a16:creationId xmlns:a16="http://schemas.microsoft.com/office/drawing/2014/main" id="{C22A5DB5-B7FD-4025-9EDB-E4F3544EAEEC}"/>
               </a:ext>
             </a:extLst>
           </p:cNvPr>
@@ -9569,7 +9569,7 @@
         </p:xfrm>
         <a:graphic xmlns:a="http://schemas.openxmlformats.org/drawingml/2006/main">
           <a:graphicData uri="http://schemas.openxmlformats.org/drawingml/2006/chart">
-            <c:chart xmlns:r="http://schemas.openxmlformats.org/officeDocument/2006/relationships" xmlns:c="http://schemas.openxmlformats.org/drawingml/2006/chart" r:id="Rc415e283d68e4231"/>
+            <c:chart xmlns:r="http://schemas.openxmlformats.org/officeDocument/2006/relationships" xmlns:c="http://schemas.openxmlformats.org/drawingml/2006/chart" r:id="R21a1f1b88a6843b5"/>
           </a:graphicData>
         </a:graphic>
       </p:graphicFrame>
@@ -9578,7 +9578,7 @@
           <p:cNvPr id="5" name="">
             <a:extLst xmlns:a="http://schemas.openxmlformats.org/drawingml/2006/main">
               <a:ext uri="{FF2B5EF4-FFF2-40B4-BE49-F238E27FC236}">
-                <a16:creationId xmlns:a16="http://schemas.microsoft.com/office/drawing/2014/main" id="{A7716CB1-156D-4A2B-9123-B864EFE964B8}"/>
+                <a16:creationId xmlns:a16="http://schemas.microsoft.com/office/drawing/2014/main" id="{5F4C934A-EAC4-4364-9386-ADB095732954}"/>
               </a:ext>
             </a:extLst>
           </p:cNvPr>
@@ -9625,7 +9625,7 @@
                 <a:ea typeface="Heiti TC"/>
                 <a:cs typeface="Heiti TC"/>
               </a:rPr>
-              <a:t>每天 3.5 小時，約得多少分？</a:t>
+              <a:t>3.5 小時的預測成績？</a:t>
             </a:r>
           </a:p>
         </p:txBody>
@@ -9635,7 +9635,7 @@
           <p:cNvPr id="6" name="">
             <a:extLst xmlns:a="http://schemas.openxmlformats.org/drawingml/2006/main">
               <a:ext uri="{FF2B5EF4-FFF2-40B4-BE49-F238E27FC236}">
-                <a16:creationId xmlns:a16="http://schemas.microsoft.com/office/drawing/2014/main" id="{04D32596-6C08-4CA1-A122-01061292C972}"/>
+                <a16:creationId xmlns:a16="http://schemas.microsoft.com/office/drawing/2014/main" id="{E09EC24C-1D60-4F65-9F84-73D376F8DC98}"/>
               </a:ext>
             </a:extLst>
           </p:cNvPr>
@@ -9682,7 +9682,7 @@
                 <a:ea typeface="Arial"/>
                 <a:cs typeface="Arial"/>
               </a:rPr>
-              <a:t>About what score for 3.5 hours a day?</a:t>
+              <a:t>Score for 3.5 hours a day?</a:t>
             </a:r>
           </a:p>
         </p:txBody>
@@ -9692,7 +9692,7 @@
           <p:cNvPr id="7" name="">
             <a:extLst xmlns:a="http://schemas.openxmlformats.org/drawingml/2006/main">
               <a:ext uri="{FF2B5EF4-FFF2-40B4-BE49-F238E27FC236}">
-                <a16:creationId xmlns:a16="http://schemas.microsoft.com/office/drawing/2014/main" id="{74F9C04D-64D1-475E-B365-F72F056960BA}"/>
+                <a16:creationId xmlns:a16="http://schemas.microsoft.com/office/drawing/2014/main" id="{0D8C0AF0-54B0-44F3-A8F7-CBF64DD3EDC9}"/>
               </a:ext>
             </a:extLst>
           </p:cNvPr>
@@ -9749,7 +9749,7 @@
           <p:cNvPr id="8" name="">
             <a:extLst xmlns:a="http://schemas.openxmlformats.org/drawingml/2006/main">
               <a:ext uri="{FF2B5EF4-FFF2-40B4-BE49-F238E27FC236}">
-                <a16:creationId xmlns:a16="http://schemas.microsoft.com/office/drawing/2014/main" id="{F9F85428-197A-48EC-9C9B-8C48329BA773}"/>
+                <a16:creationId xmlns:a16="http://schemas.microsoft.com/office/drawing/2014/main" id="{CAD22AD1-1F71-48F3-8473-0C6000D11DCC}"/>
               </a:ext>
             </a:extLst>
           </p:cNvPr>
@@ -9806,7 +9806,7 @@
           <p:cNvPr id="9" name="">
             <a:extLst xmlns:a="http://schemas.openxmlformats.org/drawingml/2006/main">
               <a:ext uri="{FF2B5EF4-FFF2-40B4-BE49-F238E27FC236}">
-                <a16:creationId xmlns:a16="http://schemas.microsoft.com/office/drawing/2014/main" id="{888C94A4-510D-4A81-84DA-5715045B0C2D}"/>
+                <a16:creationId xmlns:a16="http://schemas.microsoft.com/office/drawing/2014/main" id="{26CA0E76-B698-4722-8C21-41ABC9ADBFEF}"/>
               </a:ext>
             </a:extLst>
           </p:cNvPr>
@@ -9863,7 +9863,7 @@
           <p:cNvPr id="10" name="">
             <a:extLst xmlns:a="http://schemas.openxmlformats.org/drawingml/2006/main">
               <a:ext uri="{FF2B5EF4-FFF2-40B4-BE49-F238E27FC236}">
-                <a16:creationId xmlns:a16="http://schemas.microsoft.com/office/drawing/2014/main" id="{FC72290C-892E-4A33-93E3-DDFDD6802902}"/>
+                <a16:creationId xmlns:a16="http://schemas.microsoft.com/office/drawing/2014/main" id="{D091F5C5-9138-45AF-B3D0-03DFDF19B829}"/>
               </a:ext>
             </a:extLst>
           </p:cNvPr>
@@ -9920,7 +9920,7 @@
           <p:cNvPr id="11" name="">
             <a:extLst xmlns:a="http://schemas.openxmlformats.org/drawingml/2006/main">
               <a:ext uri="{FF2B5EF4-FFF2-40B4-BE49-F238E27FC236}">
-                <a16:creationId xmlns:a16="http://schemas.microsoft.com/office/drawing/2014/main" id="{FA23A155-0D5C-4850-A78C-468D2C483A34}"/>
+                <a16:creationId xmlns:a16="http://schemas.microsoft.com/office/drawing/2014/main" id="{A8F22401-AD61-4293-A1AF-731B7861115B}"/>
               </a:ext>
             </a:extLst>
           </p:cNvPr>
@@ -9975,7 +9975,7 @@
     </p:spTree>
     <p:extLst>
       <p:ext uri="{BB962C8B-B14F-4D97-AF65-F5344CB8AC3E}">
-        <p14:creationId xmlns:p14="http://schemas.microsoft.com/office/powerpoint/2010/main" val="1033701196"/>
+        <p14:creationId xmlns:p14="http://schemas.microsoft.com/office/powerpoint/2010/main" val="788462280"/>
       </p:ext>
     </p:extLst>
   </p:cSld>
@@ -10006,7 +10006,7 @@
           <p:cNvPr id="15" name="">
             <a:extLst xmlns:a="http://schemas.openxmlformats.org/drawingml/2006/main">
               <a:ext uri="{FF2B5EF4-FFF2-40B4-BE49-F238E27FC236}">
-                <a16:creationId xmlns:a16="http://schemas.microsoft.com/office/drawing/2014/main" id="{136ADC5B-D198-4BD7-B0A9-B13E41EE23DF}"/>
+                <a16:creationId xmlns:a16="http://schemas.microsoft.com/office/drawing/2014/main" id="{3EAC87F3-17A3-4262-9139-25574F8740D5}"/>
               </a:ext>
             </a:extLst>
           </p:cNvPr>
@@ -10063,7 +10063,7 @@
           <p:cNvPr id="2" name="">
             <a:extLst xmlns:a="http://schemas.openxmlformats.org/drawingml/2006/main">
               <a:ext uri="{FF2B5EF4-FFF2-40B4-BE49-F238E27FC236}">
-                <a16:creationId xmlns:a16="http://schemas.microsoft.com/office/drawing/2014/main" id="{EC180893-B93C-4A2A-AD5F-A6BDF70ED71D}"/>
+                <a16:creationId xmlns:a16="http://schemas.microsoft.com/office/drawing/2014/main" id="{EC32A996-F461-467C-A6F9-EDE92BD6DC8E}"/>
               </a:ext>
             </a:extLst>
           </p:cNvPr>
@@ -10120,7 +10120,7 @@
           <p:cNvPr id="3" name="">
             <a:extLst xmlns:a="http://schemas.openxmlformats.org/drawingml/2006/main">
               <a:ext uri="{FF2B5EF4-FFF2-40B4-BE49-F238E27FC236}">
-                <a16:creationId xmlns:a16="http://schemas.microsoft.com/office/drawing/2014/main" id="{1378A81C-528E-41C5-9645-7DCD12472330}"/>
+                <a16:creationId xmlns:a16="http://schemas.microsoft.com/office/drawing/2014/main" id="{829C64E5-4611-4FA7-A7E4-4B5B7FCE8E40}"/>
               </a:ext>
             </a:extLst>
           </p:cNvPr>
@@ -10177,7 +10177,7 @@
           <p:cNvPr id="4" name="">
             <a:extLst xmlns:a="http://schemas.openxmlformats.org/drawingml/2006/main">
               <a:ext uri="{FF2B5EF4-FFF2-40B4-BE49-F238E27FC236}">
-                <a16:creationId xmlns:a16="http://schemas.microsoft.com/office/drawing/2014/main" id="{43A69288-6F4D-4753-BC41-D77945469299}"/>
+                <a16:creationId xmlns:a16="http://schemas.microsoft.com/office/drawing/2014/main" id="{D10E744C-606C-4AD8-8CBA-C0DEF5CE21E1}"/>
               </a:ext>
             </a:extLst>
           </p:cNvPr>
@@ -10234,7 +10234,7 @@
           <p:cNvPr id="5" name="">
             <a:extLst xmlns:a="http://schemas.openxmlformats.org/drawingml/2006/main">
               <a:ext uri="{FF2B5EF4-FFF2-40B4-BE49-F238E27FC236}">
-                <a16:creationId xmlns:a16="http://schemas.microsoft.com/office/drawing/2014/main" id="{A1E45746-8567-4677-A457-98642FB7CF30}"/>
+                <a16:creationId xmlns:a16="http://schemas.microsoft.com/office/drawing/2014/main" id="{92D368E6-2882-498C-A42F-C339875D4070}"/>
               </a:ext>
             </a:extLst>
           </p:cNvPr>
@@ -10291,7 +10291,7 @@
           <p:cNvPr id="6" name="">
             <a:extLst xmlns:a="http://schemas.openxmlformats.org/drawingml/2006/main">
               <a:ext uri="{FF2B5EF4-FFF2-40B4-BE49-F238E27FC236}">
-                <a16:creationId xmlns:a16="http://schemas.microsoft.com/office/drawing/2014/main" id="{B479947D-44C8-40B7-AF36-19F4D773FD4A}"/>
+                <a16:creationId xmlns:a16="http://schemas.microsoft.com/office/drawing/2014/main" id="{FCE77090-F89A-44D0-8EA8-A5C95401D16A}"/>
               </a:ext>
             </a:extLst>
           </p:cNvPr>
@@ -10348,7 +10348,7 @@
           <p:cNvPr id="7" name="">
             <a:extLst xmlns:a="http://schemas.openxmlformats.org/drawingml/2006/main">
               <a:ext uri="{FF2B5EF4-FFF2-40B4-BE49-F238E27FC236}">
-                <a16:creationId xmlns:a16="http://schemas.microsoft.com/office/drawing/2014/main" id="{4B75E1C9-5A9E-42CF-9703-34D8B975ACAC}"/>
+                <a16:creationId xmlns:a16="http://schemas.microsoft.com/office/drawing/2014/main" id="{6884F604-4620-484D-9A6C-D395BE784B65}"/>
               </a:ext>
             </a:extLst>
           </p:cNvPr>
@@ -10405,7 +10405,7 @@
           <p:cNvPr id="8" name="">
             <a:extLst xmlns:a="http://schemas.openxmlformats.org/drawingml/2006/main">
               <a:ext uri="{FF2B5EF4-FFF2-40B4-BE49-F238E27FC236}">
-                <a16:creationId xmlns:a16="http://schemas.microsoft.com/office/drawing/2014/main" id="{4BCE816D-10CD-4963-91FF-944EA280C19A}"/>
+                <a16:creationId xmlns:a16="http://schemas.microsoft.com/office/drawing/2014/main" id="{E8D4BB63-C1C4-42C3-A555-9055BBE5EB2B}"/>
               </a:ext>
             </a:extLst>
           </p:cNvPr>
@@ -10462,7 +10462,7 @@
           <p:cNvPr id="9" name="">
             <a:extLst xmlns:a="http://schemas.openxmlformats.org/drawingml/2006/main">
               <a:ext uri="{FF2B5EF4-FFF2-40B4-BE49-F238E27FC236}">
-                <a16:creationId xmlns:a16="http://schemas.microsoft.com/office/drawing/2014/main" id="{56B394EF-CAA9-4EFF-85E5-D8BC7EE051E4}"/>
+                <a16:creationId xmlns:a16="http://schemas.microsoft.com/office/drawing/2014/main" id="{F60ED57F-3969-4A7F-AF86-1AAC6C86DB68}"/>
               </a:ext>
             </a:extLst>
           </p:cNvPr>
@@ -10519,7 +10519,7 @@
           <p:cNvPr id="10" name="">
             <a:extLst xmlns:a="http://schemas.openxmlformats.org/drawingml/2006/main">
               <a:ext uri="{FF2B5EF4-FFF2-40B4-BE49-F238E27FC236}">
-                <a16:creationId xmlns:a16="http://schemas.microsoft.com/office/drawing/2014/main" id="{1692F209-438E-4A6D-B27F-FF388A1ACB4C}"/>
+                <a16:creationId xmlns:a16="http://schemas.microsoft.com/office/drawing/2014/main" id="{99CC448C-A01C-4A27-B434-BBFAF8DF3880}"/>
               </a:ext>
             </a:extLst>
           </p:cNvPr>
@@ -10576,7 +10576,7 @@
           <p:cNvPr id="11" name="">
             <a:extLst xmlns:a="http://schemas.openxmlformats.org/drawingml/2006/main">
               <a:ext uri="{FF2B5EF4-FFF2-40B4-BE49-F238E27FC236}">
-                <a16:creationId xmlns:a16="http://schemas.microsoft.com/office/drawing/2014/main" id="{81CF90FA-1079-46EE-80A8-EBBA93AB1FEF}"/>
+                <a16:creationId xmlns:a16="http://schemas.microsoft.com/office/drawing/2014/main" id="{21CA48EA-F921-4D0B-9E4C-5F55BC7230BC}"/>
               </a:ext>
             </a:extLst>
           </p:cNvPr>
@@ -10633,7 +10633,7 @@
           <p:cNvPr id="12" name="">
             <a:extLst xmlns:a="http://schemas.openxmlformats.org/drawingml/2006/main">
               <a:ext uri="{FF2B5EF4-FFF2-40B4-BE49-F238E27FC236}">
-                <a16:creationId xmlns:a16="http://schemas.microsoft.com/office/drawing/2014/main" id="{385F1C61-D90C-425B-AA4E-5D5D238173B8}"/>
+                <a16:creationId xmlns:a16="http://schemas.microsoft.com/office/drawing/2014/main" id="{4EAF6218-D012-4B1E-B65E-637C2BBD9849}"/>
               </a:ext>
             </a:extLst>
           </p:cNvPr>
@@ -10690,7 +10690,7 @@
           <p:cNvPr id="13" name="">
             <a:extLst xmlns:a="http://schemas.openxmlformats.org/drawingml/2006/main">
               <a:ext uri="{FF2B5EF4-FFF2-40B4-BE49-F238E27FC236}">
-                <a16:creationId xmlns:a16="http://schemas.microsoft.com/office/drawing/2014/main" id="{849843D8-DC30-4FD3-9669-312A5481ABC5}"/>
+                <a16:creationId xmlns:a16="http://schemas.microsoft.com/office/drawing/2014/main" id="{7801DF10-1C05-4565-B505-8E5FD391D854}"/>
               </a:ext>
             </a:extLst>
           </p:cNvPr>
@@ -10747,7 +10747,7 @@
           <p:cNvPr id="14" name="">
             <a:extLst xmlns:a="http://schemas.openxmlformats.org/drawingml/2006/main">
               <a:ext uri="{FF2B5EF4-FFF2-40B4-BE49-F238E27FC236}">
-                <a16:creationId xmlns:a16="http://schemas.microsoft.com/office/drawing/2014/main" id="{15797FF8-4837-4787-AEF1-5E073D4E3918}"/>
+                <a16:creationId xmlns:a16="http://schemas.microsoft.com/office/drawing/2014/main" id="{EED38E19-6F88-49C3-966F-A216BAE232F5}"/>
               </a:ext>
             </a:extLst>
           </p:cNvPr>
@@ -10802,7 +10802,7 @@
     </p:spTree>
     <p:extLst>
       <p:ext uri="{BB962C8B-B14F-4D97-AF65-F5344CB8AC3E}">
-        <p14:creationId xmlns:p14="http://schemas.microsoft.com/office/powerpoint/2010/main" val="1794675191"/>
+        <p14:creationId xmlns:p14="http://schemas.microsoft.com/office/powerpoint/2010/main" val="1855809145"/>
       </p:ext>
     </p:extLst>
   </p:cSld>

--- a/teacher-slides.pptx
+++ b/teacher-slides.pptx
@@ -2,22 +2,22 @@
 <file path=ppt/presentation.xml><?xml version="1.0" encoding="utf-8"?>
 <p:presentation xmlns:p="http://schemas.openxmlformats.org/presentationml/2006/main">
   <p:sldMasterIdLst>
-    <p:sldMasterId xmlns:r="http://schemas.openxmlformats.org/officeDocument/2006/relationships" id="2147483648" r:id="Rd4942d0f4c974a87"/>
+    <p:sldMasterId xmlns:r="http://schemas.openxmlformats.org/officeDocument/2006/relationships" id="2147483648" r:id="Rb87840c133ba45a1"/>
   </p:sldMasterIdLst>
   <p:notesMasterIdLst>
-    <p:notesMasterId xmlns:r="http://schemas.openxmlformats.org/officeDocument/2006/relationships" r:id="Rf08cb87359924918"/>
+    <p:notesMasterId xmlns:r="http://schemas.openxmlformats.org/officeDocument/2006/relationships" r:id="R37cede2ce28f43a5"/>
   </p:notesMasterIdLst>
   <p:sldIdLst>
-    <p:sldId xmlns:r="http://schemas.openxmlformats.org/officeDocument/2006/relationships" id="256" r:id="R9cdbae44b19b4525"/>
-    <p:sldId xmlns:r="http://schemas.openxmlformats.org/officeDocument/2006/relationships" id="257" r:id="R76d1fb241c644356"/>
-    <p:sldId xmlns:r="http://schemas.openxmlformats.org/officeDocument/2006/relationships" id="258" r:id="Rfcefa56cb3ab40f2"/>
-    <p:sldId xmlns:r="http://schemas.openxmlformats.org/officeDocument/2006/relationships" id="259" r:id="Rbd5f05a04d8d48d6"/>
-    <p:sldId xmlns:r="http://schemas.openxmlformats.org/officeDocument/2006/relationships" id="260" r:id="R80e49bfccffa462e"/>
-    <p:sldId xmlns:r="http://schemas.openxmlformats.org/officeDocument/2006/relationships" id="261" r:id="R117f843f2da24639"/>
-    <p:sldId xmlns:r="http://schemas.openxmlformats.org/officeDocument/2006/relationships" id="262" r:id="R6e21e9e45b32432f"/>
-    <p:sldId xmlns:r="http://schemas.openxmlformats.org/officeDocument/2006/relationships" id="263" r:id="R5757ae864a1745fb"/>
-    <p:sldId xmlns:r="http://schemas.openxmlformats.org/officeDocument/2006/relationships" id="264" r:id="R3e89ff359f614de0"/>
-    <p:sldId xmlns:r="http://schemas.openxmlformats.org/officeDocument/2006/relationships" id="265" r:id="Re1ed38ce6ef84b4b"/>
+    <p:sldId xmlns:r="http://schemas.openxmlformats.org/officeDocument/2006/relationships" id="256" r:id="R599e0dd3894f4f37"/>
+    <p:sldId xmlns:r="http://schemas.openxmlformats.org/officeDocument/2006/relationships" id="257" r:id="R7203345ec06f410c"/>
+    <p:sldId xmlns:r="http://schemas.openxmlformats.org/officeDocument/2006/relationships" id="258" r:id="R037bb063dc234d8b"/>
+    <p:sldId xmlns:r="http://schemas.openxmlformats.org/officeDocument/2006/relationships" id="259" r:id="R215a9184593740b0"/>
+    <p:sldId xmlns:r="http://schemas.openxmlformats.org/officeDocument/2006/relationships" id="260" r:id="Rdfe5fd761c4d4fa1"/>
+    <p:sldId xmlns:r="http://schemas.openxmlformats.org/officeDocument/2006/relationships" id="261" r:id="R27224f16267c404b"/>
+    <p:sldId xmlns:r="http://schemas.openxmlformats.org/officeDocument/2006/relationships" id="262" r:id="R92b5fbdef10b4215"/>
+    <p:sldId xmlns:r="http://schemas.openxmlformats.org/officeDocument/2006/relationships" id="263" r:id="Rbcc7a505791d4fda"/>
+    <p:sldId xmlns:r="http://schemas.openxmlformats.org/officeDocument/2006/relationships" id="264" r:id="Rb253c47e278c44cf"/>
+    <p:sldId xmlns:r="http://schemas.openxmlformats.org/officeDocument/2006/relationships" id="265" r:id="Rea90da2126d24bfd"/>
   </p:sldIdLst>
   <p:sldSz cx="12192000" cy="6858000"/>
   <p:notesSz cx="6858000" cy="9144000"/>
@@ -1011,7 +1011,7 @@
           <a:lstStyle xmlns:a="http://schemas.openxmlformats.org/drawingml/2006/main"/>
           <a:p xmlns:a="http://schemas.openxmlformats.org/drawingml/2006/main">
             <a:r>
-              <a:t>Start Step 3. Each dot represents simulated observations from a different student. Students estimate the score for 3.5 hours per day and record it before checking the page. Axes are fixed at 0–24 hours and 0–100 marks. A trend does not prove that more study guarantees a score.</a:t>
+              <a:t>Start Step 3. Each dot represents simulated observations from a different student. Students first draw an intuitive straight line on the worksheet, then estimate the score for 3.5 hours per day and record it before checking the page. Axes are fixed at 0–24 hours and 0–100 marks. A trend does not prove that more study guarantees a score.</a:t>
             </a:r>
           </a:p>
         </p:txBody>
@@ -1149,7 +1149,7 @@
   </p:cSld>
   <p:clrMap bg1="lt1" tx1="dk1" bg2="lt2" tx2="dk2" accent1="accent1" accent2="accent2" accent3="accent3" accent4="accent4" accent5="accent5" accent6="accent6" hlink="hlink" folHlink="folHlink"/>
   <p:sldLayoutIdLst>
-    <p:sldLayoutId xmlns:r="http://schemas.openxmlformats.org/officeDocument/2006/relationships" id="2147483649" r:id="R9f7779e98b1a46ba"/>
+    <p:sldLayoutId xmlns:r="http://schemas.openxmlformats.org/officeDocument/2006/relationships" id="2147483649" r:id="R2f9807e8ffac4deb"/>
   </p:sldLayoutIdLst>
   <p:txStyles>
     <p:titleStyle>
@@ -3915,50 +3915,6 @@
             </c:numLit>
           </c:yVal>
         </c:ser>
-        <c:ser>
-          <c:idx val="1"/>
-          <c:order val="1"/>
-          <c:tx>
-            <c:v>模型 / Model</c:v>
-          </c:tx>
-          <c:spPr>
-            <a:solidFill xmlns:a="http://schemas.openxmlformats.org/drawingml/2006/main">
-              <a:srgbClr val="B65320"/>
-            </a:solidFill>
-            <a:ln xmlns:a="http://schemas.openxmlformats.org/drawingml/2006/main" w="28575">
-              <a:solidFill>
-                <a:srgbClr val="B65320"/>
-              </a:solidFill>
-            </a:ln>
-          </c:spPr>
-          <c:marker>
-            <c:symbol val="none"/>
-          </c:marker>
-          <c:xVal>
-            <c:numLit>
-              <c:formatCode>General</c:formatCode>
-              <c:ptCount val="2"/>
-              <c:pt idx="0">
-                <c:v>0</c:v>
-              </c:pt>
-              <c:pt idx="1">
-                <c:v>24</c:v>
-              </c:pt>
-            </c:numLit>
-          </c:xVal>
-          <c:yVal>
-            <c:numLit>
-              <c:formatCode>0</c:formatCode>
-              <c:ptCount val="2"/>
-              <c:pt idx="0">
-                <c:v>50</c:v>
-              </c:pt>
-              <c:pt idx="1">
-                <c:v>98</c:v>
-              </c:pt>
-            </c:numLit>
-          </c:yVal>
-        </c:ser>
         <c:dLbls>
           <c:txPr>
             <a:bodyPr xmlns:a="http://schemas.openxmlformats.org/drawingml/2006/main" anchorCtr="1"/>
@@ -4202,7 +4158,7 @@
           <p:cNvPr id="13" name="">
             <a:extLst xmlns:a="http://schemas.openxmlformats.org/drawingml/2006/main">
               <a:ext uri="{FF2B5EF4-FFF2-40B4-BE49-F238E27FC236}">
-                <a16:creationId xmlns:a16="http://schemas.microsoft.com/office/drawing/2014/main" id="{41E934F9-657C-4C1F-93DD-E73102B52DAC}"/>
+                <a16:creationId xmlns:a16="http://schemas.microsoft.com/office/drawing/2014/main" id="{5897EECA-374A-4A31-97DF-AF32DC266E8D}"/>
               </a:ext>
             </a:extLst>
           </p:cNvPr>
@@ -4259,7 +4215,7 @@
           <p:cNvPr id="2" name="">
             <a:extLst xmlns:a="http://schemas.openxmlformats.org/drawingml/2006/main">
               <a:ext uri="{FF2B5EF4-FFF2-40B4-BE49-F238E27FC236}">
-                <a16:creationId xmlns:a16="http://schemas.microsoft.com/office/drawing/2014/main" id="{2DBDC221-675F-4247-A29E-907F4A2564ED}"/>
+                <a16:creationId xmlns:a16="http://schemas.microsoft.com/office/drawing/2014/main" id="{06CDE012-56F7-4434-8E15-4E32392C9FE3}"/>
               </a:ext>
             </a:extLst>
           </p:cNvPr>
@@ -4316,7 +4272,7 @@
           <p:cNvPr id="3" name="">
             <a:extLst xmlns:a="http://schemas.openxmlformats.org/drawingml/2006/main">
               <a:ext uri="{FF2B5EF4-FFF2-40B4-BE49-F238E27FC236}">
-                <a16:creationId xmlns:a16="http://schemas.microsoft.com/office/drawing/2014/main" id="{03F8928A-2D14-4F7D-A877-175CC14103B3}"/>
+                <a16:creationId xmlns:a16="http://schemas.microsoft.com/office/drawing/2014/main" id="{C21323CE-8927-4D86-91C9-4764C7BC7608}"/>
               </a:ext>
             </a:extLst>
           </p:cNvPr>
@@ -4373,7 +4329,7 @@
           <p:cNvPr id="4" name="">
             <a:extLst xmlns:a="http://schemas.openxmlformats.org/drawingml/2006/main">
               <a:ext uri="{FF2B5EF4-FFF2-40B4-BE49-F238E27FC236}">
-                <a16:creationId xmlns:a16="http://schemas.microsoft.com/office/drawing/2014/main" id="{72E7F11E-A19B-46AA-AF73-6DBC9CE95131}"/>
+                <a16:creationId xmlns:a16="http://schemas.microsoft.com/office/drawing/2014/main" id="{518065A3-512F-4F87-9BEF-FB50E7D5D714}"/>
               </a:ext>
             </a:extLst>
           </p:cNvPr>
@@ -4430,7 +4386,7 @@
           <p:cNvPr id="5" name="">
             <a:extLst xmlns:a="http://schemas.openxmlformats.org/drawingml/2006/main">
               <a:ext uri="{FF2B5EF4-FFF2-40B4-BE49-F238E27FC236}">
-                <a16:creationId xmlns:a16="http://schemas.microsoft.com/office/drawing/2014/main" id="{BD58C7D1-3981-45BD-BB70-8BB9DEC49A7C}"/>
+                <a16:creationId xmlns:a16="http://schemas.microsoft.com/office/drawing/2014/main" id="{760AF1C8-CCC0-4F68-A13A-0D87F42B82A8}"/>
               </a:ext>
             </a:extLst>
           </p:cNvPr>
@@ -4487,7 +4443,7 @@
           <p:cNvPr id="6" name="">
             <a:extLst xmlns:a="http://schemas.openxmlformats.org/drawingml/2006/main">
               <a:ext uri="{FF2B5EF4-FFF2-40B4-BE49-F238E27FC236}">
-                <a16:creationId xmlns:a16="http://schemas.microsoft.com/office/drawing/2014/main" id="{4A595CF4-8016-4F4C-8F3F-905E30A2D60D}"/>
+                <a16:creationId xmlns:a16="http://schemas.microsoft.com/office/drawing/2014/main" id="{CBE5DE0A-14CF-4FFA-AA41-10FD3131BEC4}"/>
               </a:ext>
             </a:extLst>
           </p:cNvPr>
@@ -4544,7 +4500,7 @@
           <p:cNvPr id="7" name="">
             <a:extLst xmlns:a="http://schemas.openxmlformats.org/drawingml/2006/main">
               <a:ext uri="{FF2B5EF4-FFF2-40B4-BE49-F238E27FC236}">
-                <a16:creationId xmlns:a16="http://schemas.microsoft.com/office/drawing/2014/main" id="{CE08725A-85D3-4C9C-AAF6-9C00D5C314E6}"/>
+                <a16:creationId xmlns:a16="http://schemas.microsoft.com/office/drawing/2014/main" id="{AFE7DF78-4739-4D51-B4AE-B1C94D25A009}"/>
               </a:ext>
             </a:extLst>
           </p:cNvPr>
@@ -4601,7 +4557,7 @@
           <p:cNvPr id="8" name="">
             <a:extLst xmlns:a="http://schemas.openxmlformats.org/drawingml/2006/main">
               <a:ext uri="{FF2B5EF4-FFF2-40B4-BE49-F238E27FC236}">
-                <a16:creationId xmlns:a16="http://schemas.microsoft.com/office/drawing/2014/main" id="{DE216E70-A202-4D24-8BDD-32CC2FF51969}"/>
+                <a16:creationId xmlns:a16="http://schemas.microsoft.com/office/drawing/2014/main" id="{7B617BEF-41DA-4182-BB61-56C0770B6029}"/>
               </a:ext>
             </a:extLst>
           </p:cNvPr>
@@ -4658,7 +4614,7 @@
           <p:cNvPr id="9" name="">
             <a:extLst xmlns:a="http://schemas.openxmlformats.org/drawingml/2006/main">
               <a:ext uri="{FF2B5EF4-FFF2-40B4-BE49-F238E27FC236}">
-                <a16:creationId xmlns:a16="http://schemas.microsoft.com/office/drawing/2014/main" id="{C214F267-D08A-4C22-BB27-68F616F86BC6}"/>
+                <a16:creationId xmlns:a16="http://schemas.microsoft.com/office/drawing/2014/main" id="{F16C0329-8039-4434-AA27-DBBA3BEC7C43}"/>
               </a:ext>
             </a:extLst>
           </p:cNvPr>
@@ -4715,7 +4671,7 @@
           <p:cNvPr id="10" name="">
             <a:extLst xmlns:a="http://schemas.openxmlformats.org/drawingml/2006/main">
               <a:ext uri="{FF2B5EF4-FFF2-40B4-BE49-F238E27FC236}">
-                <a16:creationId xmlns:a16="http://schemas.microsoft.com/office/drawing/2014/main" id="{51D05EC2-4127-4797-9288-C6D86DA3B328}"/>
+                <a16:creationId xmlns:a16="http://schemas.microsoft.com/office/drawing/2014/main" id="{FBDC2F93-ECDB-419C-B1F6-99ADF33B6E51}"/>
               </a:ext>
             </a:extLst>
           </p:cNvPr>
@@ -4772,7 +4728,7 @@
           <p:cNvPr id="11" name="">
             <a:extLst xmlns:a="http://schemas.openxmlformats.org/drawingml/2006/main">
               <a:ext uri="{FF2B5EF4-FFF2-40B4-BE49-F238E27FC236}">
-                <a16:creationId xmlns:a16="http://schemas.microsoft.com/office/drawing/2014/main" id="{D572F2DB-D615-41ED-98F2-4F089592E008}"/>
+                <a16:creationId xmlns:a16="http://schemas.microsoft.com/office/drawing/2014/main" id="{C1DD1E23-A2F6-48BE-94BF-C841C23FA752}"/>
               </a:ext>
             </a:extLst>
           </p:cNvPr>
@@ -4829,7 +4785,7 @@
           <p:cNvPr id="12" name="">
             <a:extLst xmlns:a="http://schemas.openxmlformats.org/drawingml/2006/main">
               <a:ext uri="{FF2B5EF4-FFF2-40B4-BE49-F238E27FC236}">
-                <a16:creationId xmlns:a16="http://schemas.microsoft.com/office/drawing/2014/main" id="{96C5B384-6176-4EFF-B01B-1313AA613492}"/>
+                <a16:creationId xmlns:a16="http://schemas.microsoft.com/office/drawing/2014/main" id="{3FBAC7DF-4AF5-4CED-A840-3BC99036F2D0}"/>
               </a:ext>
             </a:extLst>
           </p:cNvPr>
@@ -4884,7 +4840,7 @@
     </p:spTree>
     <p:extLst>
       <p:ext uri="{BB962C8B-B14F-4D97-AF65-F5344CB8AC3E}">
-        <p14:creationId xmlns:p14="http://schemas.microsoft.com/office/powerpoint/2010/main" val="550628515"/>
+        <p14:creationId xmlns:p14="http://schemas.microsoft.com/office/powerpoint/2010/main" val="1269116003"/>
       </p:ext>
     </p:extLst>
   </p:cSld>
@@ -4915,7 +4871,7 @@
           <p:cNvPr id="11" name="">
             <a:extLst xmlns:a="http://schemas.openxmlformats.org/drawingml/2006/main">
               <a:ext uri="{FF2B5EF4-FFF2-40B4-BE49-F238E27FC236}">
-                <a16:creationId xmlns:a16="http://schemas.microsoft.com/office/drawing/2014/main" id="{7CFF15A6-6782-4C06-AD37-B92DAEEFFAD0}"/>
+                <a16:creationId xmlns:a16="http://schemas.microsoft.com/office/drawing/2014/main" id="{A2996034-6E87-4A92-980D-D429D9BE7741}"/>
               </a:ext>
             </a:extLst>
           </p:cNvPr>
@@ -4972,7 +4928,7 @@
           <p:cNvPr id="2" name="">
             <a:extLst xmlns:a="http://schemas.openxmlformats.org/drawingml/2006/main">
               <a:ext uri="{FF2B5EF4-FFF2-40B4-BE49-F238E27FC236}">
-                <a16:creationId xmlns:a16="http://schemas.microsoft.com/office/drawing/2014/main" id="{CC2705E1-0F61-423B-B6D4-F2FC1C01FDEE}"/>
+                <a16:creationId xmlns:a16="http://schemas.microsoft.com/office/drawing/2014/main" id="{E7E86C5B-48A0-4C63-857B-8C6016F741F5}"/>
               </a:ext>
             </a:extLst>
           </p:cNvPr>
@@ -5029,7 +4985,7 @@
           <p:cNvPr id="3" name="">
             <a:extLst xmlns:a="http://schemas.openxmlformats.org/drawingml/2006/main">
               <a:ext uri="{FF2B5EF4-FFF2-40B4-BE49-F238E27FC236}">
-                <a16:creationId xmlns:a16="http://schemas.microsoft.com/office/drawing/2014/main" id="{F31B8BD1-F98A-4FDC-94E5-2817122A2BA1}"/>
+                <a16:creationId xmlns:a16="http://schemas.microsoft.com/office/drawing/2014/main" id="{61FFC652-1DD2-4426-B9A9-8722389E8576}"/>
               </a:ext>
             </a:extLst>
           </p:cNvPr>
@@ -5086,7 +5042,7 @@
           <p:cNvPr id="4" name="">
             <a:extLst xmlns:a="http://schemas.openxmlformats.org/drawingml/2006/main">
               <a:ext uri="{FF2B5EF4-FFF2-40B4-BE49-F238E27FC236}">
-                <a16:creationId xmlns:a16="http://schemas.microsoft.com/office/drawing/2014/main" id="{5595922B-0BB6-4E93-B204-CACC835061CF}"/>
+                <a16:creationId xmlns:a16="http://schemas.microsoft.com/office/drawing/2014/main" id="{3D404ADD-F5B9-4E4C-8C1F-E4B019DD2B1C}"/>
               </a:ext>
             </a:extLst>
           </p:cNvPr>
@@ -5143,7 +5099,7 @@
           <p:cNvPr id="5" name="">
             <a:extLst xmlns:a="http://schemas.openxmlformats.org/drawingml/2006/main">
               <a:ext uri="{FF2B5EF4-FFF2-40B4-BE49-F238E27FC236}">
-                <a16:creationId xmlns:a16="http://schemas.microsoft.com/office/drawing/2014/main" id="{323FEAF1-D787-4ADA-8148-DDBA65DCD0D5}"/>
+                <a16:creationId xmlns:a16="http://schemas.microsoft.com/office/drawing/2014/main" id="{8A8690FC-1806-4FB4-9154-CADC0AC16765}"/>
               </a:ext>
             </a:extLst>
           </p:cNvPr>
@@ -5200,7 +5156,7 @@
           <p:cNvPr id="6" name="">
             <a:extLst xmlns:a="http://schemas.openxmlformats.org/drawingml/2006/main">
               <a:ext uri="{FF2B5EF4-FFF2-40B4-BE49-F238E27FC236}">
-                <a16:creationId xmlns:a16="http://schemas.microsoft.com/office/drawing/2014/main" id="{6B0A6FF9-D8F3-40E2-8444-6C5F454E3190}"/>
+                <a16:creationId xmlns:a16="http://schemas.microsoft.com/office/drawing/2014/main" id="{CD6A190E-3374-4EC6-895F-5EA0FC2773B3}"/>
               </a:ext>
             </a:extLst>
           </p:cNvPr>
@@ -5247,7 +5203,7 @@
                 <a:ea typeface="Heiti TC"/>
                 <a:cs typeface="Heiti TC"/>
               </a:rPr>
-              <a:t>加入新點後，m 和 c 有甚麼改變？</a:t>
+              <a:t>你畫的直線與網頁的直線有甚麼分別？</a:t>
             </a:r>
           </a:p>
         </p:txBody>
@@ -5257,7 +5213,7 @@
           <p:cNvPr id="7" name="">
             <a:extLst xmlns:a="http://schemas.openxmlformats.org/drawingml/2006/main">
               <a:ext uri="{FF2B5EF4-FFF2-40B4-BE49-F238E27FC236}">
-                <a16:creationId xmlns:a16="http://schemas.microsoft.com/office/drawing/2014/main" id="{7339E20A-67B1-47EA-9BC3-DFF7B2169108}"/>
+                <a16:creationId xmlns:a16="http://schemas.microsoft.com/office/drawing/2014/main" id="{EEDB9BF3-8760-4993-804A-2A115DB43883}"/>
               </a:ext>
             </a:extLst>
           </p:cNvPr>
@@ -5304,7 +5260,7 @@
                 <a:ea typeface="Arial"/>
                 <a:cs typeface="Arial"/>
               </a:rPr>
-              <a:t>How did m and c change after you added a point?</a:t>
+              <a:t>How does your own line compare with the line on the page?</a:t>
             </a:r>
           </a:p>
         </p:txBody>
@@ -5314,7 +5270,7 @@
           <p:cNvPr id="8" name="">
             <a:extLst xmlns:a="http://schemas.openxmlformats.org/drawingml/2006/main">
               <a:ext uri="{FF2B5EF4-FFF2-40B4-BE49-F238E27FC236}">
-                <a16:creationId xmlns:a16="http://schemas.microsoft.com/office/drawing/2014/main" id="{63D7F877-13A1-4609-A33A-603100BBD0CA}"/>
+                <a16:creationId xmlns:a16="http://schemas.microsoft.com/office/drawing/2014/main" id="{0864FC08-762C-4452-BB39-1E9AEF436EB7}"/>
               </a:ext>
             </a:extLst>
           </p:cNvPr>
@@ -5371,7 +5327,7 @@
           <p:cNvPr id="9" name="">
             <a:extLst xmlns:a="http://schemas.openxmlformats.org/drawingml/2006/main">
               <a:ext uri="{FF2B5EF4-FFF2-40B4-BE49-F238E27FC236}">
-                <a16:creationId xmlns:a16="http://schemas.microsoft.com/office/drawing/2014/main" id="{0C6201D8-79AC-4D35-A30D-4F152DE3C7A7}"/>
+                <a16:creationId xmlns:a16="http://schemas.microsoft.com/office/drawing/2014/main" id="{22B05EFB-B38B-4851-97C4-264A4914485A}"/>
               </a:ext>
             </a:extLst>
           </p:cNvPr>
@@ -5428,7 +5384,7 @@
           <p:cNvPr id="10" name="">
             <a:extLst xmlns:a="http://schemas.openxmlformats.org/drawingml/2006/main">
               <a:ext uri="{FF2B5EF4-FFF2-40B4-BE49-F238E27FC236}">
-                <a16:creationId xmlns:a16="http://schemas.microsoft.com/office/drawing/2014/main" id="{2639638D-016D-4E89-B887-0791CE4181B6}"/>
+                <a16:creationId xmlns:a16="http://schemas.microsoft.com/office/drawing/2014/main" id="{D3558A86-051B-4B28-B8FA-9C5F58C1CE10}"/>
               </a:ext>
             </a:extLst>
           </p:cNvPr>
@@ -5483,7 +5439,7 @@
     </p:spTree>
     <p:extLst>
       <p:ext uri="{BB962C8B-B14F-4D97-AF65-F5344CB8AC3E}">
-        <p14:creationId xmlns:p14="http://schemas.microsoft.com/office/powerpoint/2010/main" val="1553370169"/>
+        <p14:creationId xmlns:p14="http://schemas.microsoft.com/office/powerpoint/2010/main" val="1376900396"/>
       </p:ext>
     </p:extLst>
   </p:cSld>
@@ -5514,7 +5470,7 @@
           <p:cNvPr id="12" name="">
             <a:extLst xmlns:a="http://schemas.openxmlformats.org/drawingml/2006/main">
               <a:ext uri="{FF2B5EF4-FFF2-40B4-BE49-F238E27FC236}">
-                <a16:creationId xmlns:a16="http://schemas.microsoft.com/office/drawing/2014/main" id="{9A62C264-96BF-444F-892F-97CFBC4054F3}"/>
+                <a16:creationId xmlns:a16="http://schemas.microsoft.com/office/drawing/2014/main" id="{A17A74F3-8C44-419A-B833-B8BEF9101349}"/>
               </a:ext>
             </a:extLst>
           </p:cNvPr>
@@ -5571,7 +5527,7 @@
           <p:cNvPr id="2" name="">
             <a:extLst xmlns:a="http://schemas.openxmlformats.org/drawingml/2006/main">
               <a:ext uri="{FF2B5EF4-FFF2-40B4-BE49-F238E27FC236}">
-                <a16:creationId xmlns:a16="http://schemas.microsoft.com/office/drawing/2014/main" id="{114987BC-631C-4815-AEFD-86BB5D83E84F}"/>
+                <a16:creationId xmlns:a16="http://schemas.microsoft.com/office/drawing/2014/main" id="{C46085C3-9D0D-40DE-ACF0-3F9D713BD4C7}"/>
               </a:ext>
             </a:extLst>
           </p:cNvPr>
@@ -5628,7 +5584,7 @@
           <p:cNvPr id="3" name="">
             <a:extLst xmlns:a="http://schemas.openxmlformats.org/drawingml/2006/main">
               <a:ext uri="{FF2B5EF4-FFF2-40B4-BE49-F238E27FC236}">
-                <a16:creationId xmlns:a16="http://schemas.microsoft.com/office/drawing/2014/main" id="{FC580F22-9058-41CE-8CB4-1F36B0D8815F}"/>
+                <a16:creationId xmlns:a16="http://schemas.microsoft.com/office/drawing/2014/main" id="{E9FFF018-8215-45BD-A19B-1C20A94BC78C}"/>
               </a:ext>
             </a:extLst>
           </p:cNvPr>
@@ -5685,7 +5641,7 @@
           <p:cNvPr id="4" name="">
             <a:extLst xmlns:a="http://schemas.openxmlformats.org/drawingml/2006/main">
               <a:ext uri="{FF2B5EF4-FFF2-40B4-BE49-F238E27FC236}">
-                <a16:creationId xmlns:a16="http://schemas.microsoft.com/office/drawing/2014/main" id="{5C0232D3-146B-466E-B3DC-790604095414}"/>
+                <a16:creationId xmlns:a16="http://schemas.microsoft.com/office/drawing/2014/main" id="{EAF490FD-8705-429C-97B7-400D92F26008}"/>
               </a:ext>
             </a:extLst>
           </p:cNvPr>
@@ -5742,7 +5698,7 @@
           <p:cNvPr id="5" name="">
             <a:extLst xmlns:a="http://schemas.openxmlformats.org/drawingml/2006/main">
               <a:ext uri="{FF2B5EF4-FFF2-40B4-BE49-F238E27FC236}">
-                <a16:creationId xmlns:a16="http://schemas.microsoft.com/office/drawing/2014/main" id="{F0A6CF7C-B636-4C0A-9D7F-A19A1E0BFFC7}"/>
+                <a16:creationId xmlns:a16="http://schemas.microsoft.com/office/drawing/2014/main" id="{898B3100-EDE1-4804-9E96-D905D48D8B9F}"/>
               </a:ext>
             </a:extLst>
           </p:cNvPr>
@@ -5799,7 +5755,7 @@
           <p:cNvPr id="6" name="">
             <a:extLst xmlns:a="http://schemas.openxmlformats.org/drawingml/2006/main">
               <a:ext uri="{FF2B5EF4-FFF2-40B4-BE49-F238E27FC236}">
-                <a16:creationId xmlns:a16="http://schemas.microsoft.com/office/drawing/2014/main" id="{E1DA19AE-1366-43F8-9D7A-0EACF26CA115}"/>
+                <a16:creationId xmlns:a16="http://schemas.microsoft.com/office/drawing/2014/main" id="{6DF407AB-CF66-4656-B07C-D787F33E22B9}"/>
               </a:ext>
             </a:extLst>
           </p:cNvPr>
@@ -5856,7 +5812,7 @@
           <p:cNvPr id="7" name="">
             <a:extLst xmlns:a="http://schemas.openxmlformats.org/drawingml/2006/main">
               <a:ext uri="{FF2B5EF4-FFF2-40B4-BE49-F238E27FC236}">
-                <a16:creationId xmlns:a16="http://schemas.microsoft.com/office/drawing/2014/main" id="{BC5B56E1-BF26-49AC-97DB-CAD4EAF0E79C}"/>
+                <a16:creationId xmlns:a16="http://schemas.microsoft.com/office/drawing/2014/main" id="{299F87C8-E620-4313-9A19-9C3B37562809}"/>
               </a:ext>
             </a:extLst>
           </p:cNvPr>
@@ -5913,7 +5869,7 @@
           <p:cNvPr id="8" name="">
             <a:extLst xmlns:a="http://schemas.openxmlformats.org/drawingml/2006/main">
               <a:ext uri="{FF2B5EF4-FFF2-40B4-BE49-F238E27FC236}">
-                <a16:creationId xmlns:a16="http://schemas.microsoft.com/office/drawing/2014/main" id="{FF40B637-2B4B-4DB7-B72F-323BBED02F2B}"/>
+                <a16:creationId xmlns:a16="http://schemas.microsoft.com/office/drawing/2014/main" id="{25A0AA19-0E47-4968-9656-0D23ADB8885A}"/>
               </a:ext>
             </a:extLst>
           </p:cNvPr>
@@ -5970,7 +5926,7 @@
           <p:cNvPr id="9" name="">
             <a:extLst xmlns:a="http://schemas.openxmlformats.org/drawingml/2006/main">
               <a:ext uri="{FF2B5EF4-FFF2-40B4-BE49-F238E27FC236}">
-                <a16:creationId xmlns:a16="http://schemas.microsoft.com/office/drawing/2014/main" id="{6918C0E1-9F7B-4959-ABE6-13DFFEAFB704}"/>
+                <a16:creationId xmlns:a16="http://schemas.microsoft.com/office/drawing/2014/main" id="{99C40FA6-432B-406D-BDD5-DFFB74E64694}"/>
               </a:ext>
             </a:extLst>
           </p:cNvPr>
@@ -6027,7 +5983,7 @@
           <p:cNvPr id="10" name="">
             <a:extLst xmlns:a="http://schemas.openxmlformats.org/drawingml/2006/main">
               <a:ext uri="{FF2B5EF4-FFF2-40B4-BE49-F238E27FC236}">
-                <a16:creationId xmlns:a16="http://schemas.microsoft.com/office/drawing/2014/main" id="{85E30C8B-9143-4470-8ACD-CED0DD60BACB}"/>
+                <a16:creationId xmlns:a16="http://schemas.microsoft.com/office/drawing/2014/main" id="{CC941FDD-62A6-44DB-BBDA-A6080A4105B5}"/>
               </a:ext>
             </a:extLst>
           </p:cNvPr>
@@ -6091,14 +6047,14 @@
         </p:xfrm>
         <a:graphic xmlns:a="http://schemas.openxmlformats.org/drawingml/2006/main">
           <a:graphicData uri="http://schemas.openxmlformats.org/drawingml/2006/chart">
-            <c:chart xmlns:r="http://schemas.openxmlformats.org/officeDocument/2006/relationships" xmlns:c="http://schemas.openxmlformats.org/drawingml/2006/chart" r:id="R37ceb5f49c104b76"/>
+            <c:chart xmlns:r="http://schemas.openxmlformats.org/officeDocument/2006/relationships" xmlns:c="http://schemas.openxmlformats.org/drawingml/2006/chart" r:id="R437b7772241a48de"/>
           </a:graphicData>
         </a:graphic>
       </p:graphicFrame>
     </p:spTree>
     <p:extLst>
       <p:ext uri="{BB962C8B-B14F-4D97-AF65-F5344CB8AC3E}">
-        <p14:creationId xmlns:p14="http://schemas.microsoft.com/office/powerpoint/2010/main" val="1338848109"/>
+        <p14:creationId xmlns:p14="http://schemas.microsoft.com/office/powerpoint/2010/main" val="2061989515"/>
       </p:ext>
     </p:extLst>
   </p:cSld>
@@ -6129,7 +6085,7 @@
           <p:cNvPr id="12" name="">
             <a:extLst xmlns:a="http://schemas.openxmlformats.org/drawingml/2006/main">
               <a:ext uri="{FF2B5EF4-FFF2-40B4-BE49-F238E27FC236}">
-                <a16:creationId xmlns:a16="http://schemas.microsoft.com/office/drawing/2014/main" id="{F3A8DEED-BD12-4C9A-8745-F7B640625638}"/>
+                <a16:creationId xmlns:a16="http://schemas.microsoft.com/office/drawing/2014/main" id="{79B901D0-453F-46CB-9B15-DCA6100DCEF9}"/>
               </a:ext>
             </a:extLst>
           </p:cNvPr>
@@ -6186,7 +6142,7 @@
           <p:cNvPr id="2" name="">
             <a:extLst xmlns:a="http://schemas.openxmlformats.org/drawingml/2006/main">
               <a:ext uri="{FF2B5EF4-FFF2-40B4-BE49-F238E27FC236}">
-                <a16:creationId xmlns:a16="http://schemas.microsoft.com/office/drawing/2014/main" id="{C025F403-E545-4914-BA45-A2A4A08FB5BC}"/>
+                <a16:creationId xmlns:a16="http://schemas.microsoft.com/office/drawing/2014/main" id="{DFBB052E-26FB-4C39-9C62-0C6EA74AA046}"/>
               </a:ext>
             </a:extLst>
           </p:cNvPr>
@@ -6243,7 +6199,7 @@
           <p:cNvPr id="3" name="">
             <a:extLst xmlns:a="http://schemas.openxmlformats.org/drawingml/2006/main">
               <a:ext uri="{FF2B5EF4-FFF2-40B4-BE49-F238E27FC236}">
-                <a16:creationId xmlns:a16="http://schemas.microsoft.com/office/drawing/2014/main" id="{77D1DC8C-80C6-4639-A913-E792D04FF421}"/>
+                <a16:creationId xmlns:a16="http://schemas.microsoft.com/office/drawing/2014/main" id="{E1E5148F-40B9-46A4-9C57-953EE7F7D57C}"/>
               </a:ext>
             </a:extLst>
           </p:cNvPr>
@@ -6300,7 +6256,7 @@
           <p:cNvPr id="4" name="">
             <a:extLst xmlns:a="http://schemas.openxmlformats.org/drawingml/2006/main">
               <a:ext uri="{FF2B5EF4-FFF2-40B4-BE49-F238E27FC236}">
-                <a16:creationId xmlns:a16="http://schemas.microsoft.com/office/drawing/2014/main" id="{A2358405-3FBA-4F6B-BC89-4D3368CB1C94}"/>
+                <a16:creationId xmlns:a16="http://schemas.microsoft.com/office/drawing/2014/main" id="{ED03F71F-EA84-4EC6-B679-57B5E31888C8}"/>
               </a:ext>
             </a:extLst>
           </p:cNvPr>
@@ -6357,7 +6313,7 @@
           <p:cNvPr id="5" name="">
             <a:extLst xmlns:a="http://schemas.openxmlformats.org/drawingml/2006/main">
               <a:ext uri="{FF2B5EF4-FFF2-40B4-BE49-F238E27FC236}">
-                <a16:creationId xmlns:a16="http://schemas.microsoft.com/office/drawing/2014/main" id="{62CD501F-A748-4B34-9A8E-E34BE76B98CD}"/>
+                <a16:creationId xmlns:a16="http://schemas.microsoft.com/office/drawing/2014/main" id="{B36ECCA4-1B06-40E2-9D3D-564DC794497A}"/>
               </a:ext>
             </a:extLst>
           </p:cNvPr>
@@ -6414,7 +6370,7 @@
           <p:cNvPr id="6" name="">
             <a:extLst xmlns:a="http://schemas.openxmlformats.org/drawingml/2006/main">
               <a:ext uri="{FF2B5EF4-FFF2-40B4-BE49-F238E27FC236}">
-                <a16:creationId xmlns:a16="http://schemas.microsoft.com/office/drawing/2014/main" id="{039BD591-5AF6-41CC-8BA8-63EBA0FFD545}"/>
+                <a16:creationId xmlns:a16="http://schemas.microsoft.com/office/drawing/2014/main" id="{CEA38183-64BA-4FD2-A22B-F26D39F483BA}"/>
               </a:ext>
             </a:extLst>
           </p:cNvPr>
@@ -6471,7 +6427,7 @@
           <p:cNvPr id="7" name="">
             <a:extLst xmlns:a="http://schemas.openxmlformats.org/drawingml/2006/main">
               <a:ext uri="{FF2B5EF4-FFF2-40B4-BE49-F238E27FC236}">
-                <a16:creationId xmlns:a16="http://schemas.microsoft.com/office/drawing/2014/main" id="{2A721B98-7ECB-4503-AD38-6AC2E89BC33D}"/>
+                <a16:creationId xmlns:a16="http://schemas.microsoft.com/office/drawing/2014/main" id="{9246E134-75B8-4215-9C33-89111C0E685E}"/>
               </a:ext>
             </a:extLst>
           </p:cNvPr>
@@ -6528,7 +6484,7 @@
           <p:cNvPr id="8" name="">
             <a:extLst xmlns:a="http://schemas.openxmlformats.org/drawingml/2006/main">
               <a:ext uri="{FF2B5EF4-FFF2-40B4-BE49-F238E27FC236}">
-                <a16:creationId xmlns:a16="http://schemas.microsoft.com/office/drawing/2014/main" id="{65BAEF5F-CC52-4C98-9B50-F7658228EFF5}"/>
+                <a16:creationId xmlns:a16="http://schemas.microsoft.com/office/drawing/2014/main" id="{E13069B7-CB06-4EB7-B3FC-2A395E6B5ED5}"/>
               </a:ext>
             </a:extLst>
           </p:cNvPr>
@@ -6585,7 +6541,7 @@
           <p:cNvPr id="9" name="">
             <a:extLst xmlns:a="http://schemas.openxmlformats.org/drawingml/2006/main">
               <a:ext uri="{FF2B5EF4-FFF2-40B4-BE49-F238E27FC236}">
-                <a16:creationId xmlns:a16="http://schemas.microsoft.com/office/drawing/2014/main" id="{07CFE872-A7E2-4836-851F-86448F32B4FF}"/>
+                <a16:creationId xmlns:a16="http://schemas.microsoft.com/office/drawing/2014/main" id="{83933070-E104-49E7-A1B4-5276BAC2B2BE}"/>
               </a:ext>
             </a:extLst>
           </p:cNvPr>
@@ -6642,7 +6598,7 @@
           <p:cNvPr id="10" name="">
             <a:extLst xmlns:a="http://schemas.openxmlformats.org/drawingml/2006/main">
               <a:ext uri="{FF2B5EF4-FFF2-40B4-BE49-F238E27FC236}">
-                <a16:creationId xmlns:a16="http://schemas.microsoft.com/office/drawing/2014/main" id="{40471AAE-E2FC-4854-8585-AAD4C2E5E2E1}"/>
+                <a16:creationId xmlns:a16="http://schemas.microsoft.com/office/drawing/2014/main" id="{4A1B3915-2040-4C81-BDB2-6EA919897D4E}"/>
               </a:ext>
             </a:extLst>
           </p:cNvPr>
@@ -6706,14 +6662,14 @@
         </p:xfrm>
         <a:graphic xmlns:a="http://schemas.openxmlformats.org/drawingml/2006/main">
           <a:graphicData uri="http://schemas.openxmlformats.org/drawingml/2006/chart">
-            <c:chart xmlns:r="http://schemas.openxmlformats.org/officeDocument/2006/relationships" xmlns:c="http://schemas.openxmlformats.org/drawingml/2006/chart" r:id="R1a69f635333746d9"/>
+            <c:chart xmlns:r="http://schemas.openxmlformats.org/officeDocument/2006/relationships" xmlns:c="http://schemas.openxmlformats.org/drawingml/2006/chart" r:id="R134249e8bd05490e"/>
           </a:graphicData>
         </a:graphic>
       </p:graphicFrame>
     </p:spTree>
     <p:extLst>
       <p:ext uri="{BB962C8B-B14F-4D97-AF65-F5344CB8AC3E}">
-        <p14:creationId xmlns:p14="http://schemas.microsoft.com/office/powerpoint/2010/main" val="1309713473"/>
+        <p14:creationId xmlns:p14="http://schemas.microsoft.com/office/powerpoint/2010/main" val="1305999608"/>
       </p:ext>
     </p:extLst>
   </p:cSld>
@@ -6744,7 +6700,7 @@
           <p:cNvPr id="16" name="">
             <a:extLst xmlns:a="http://schemas.openxmlformats.org/drawingml/2006/main">
               <a:ext uri="{FF2B5EF4-FFF2-40B4-BE49-F238E27FC236}">
-                <a16:creationId xmlns:a16="http://schemas.microsoft.com/office/drawing/2014/main" id="{8AA00A01-01BB-4829-A1AB-B18B33FB007B}"/>
+                <a16:creationId xmlns:a16="http://schemas.microsoft.com/office/drawing/2014/main" id="{2715EF15-8AF5-429A-BFC6-4B6E399CA98D}"/>
               </a:ext>
             </a:extLst>
           </p:cNvPr>
@@ -6801,7 +6757,7 @@
           <p:cNvPr id="2" name="">
             <a:extLst xmlns:a="http://schemas.openxmlformats.org/drawingml/2006/main">
               <a:ext uri="{FF2B5EF4-FFF2-40B4-BE49-F238E27FC236}">
-                <a16:creationId xmlns:a16="http://schemas.microsoft.com/office/drawing/2014/main" id="{DCC5465B-B220-4565-8EA4-D6709802153A}"/>
+                <a16:creationId xmlns:a16="http://schemas.microsoft.com/office/drawing/2014/main" id="{1BC9751C-C47E-4D50-A7A5-8A021C87E94B}"/>
               </a:ext>
             </a:extLst>
           </p:cNvPr>
@@ -6858,7 +6814,7 @@
           <p:cNvPr id="3" name="">
             <a:extLst xmlns:a="http://schemas.openxmlformats.org/drawingml/2006/main">
               <a:ext uri="{FF2B5EF4-FFF2-40B4-BE49-F238E27FC236}">
-                <a16:creationId xmlns:a16="http://schemas.microsoft.com/office/drawing/2014/main" id="{661E1955-CBE0-4F0A-BF75-110CAE92A6CC}"/>
+                <a16:creationId xmlns:a16="http://schemas.microsoft.com/office/drawing/2014/main" id="{86A0AB2F-8214-4403-B119-F0ADCDCDC726}"/>
               </a:ext>
             </a:extLst>
           </p:cNvPr>
@@ -6915,7 +6871,7 @@
           <p:cNvPr id="4" name="">
             <a:extLst xmlns:a="http://schemas.openxmlformats.org/drawingml/2006/main">
               <a:ext uri="{FF2B5EF4-FFF2-40B4-BE49-F238E27FC236}">
-                <a16:creationId xmlns:a16="http://schemas.microsoft.com/office/drawing/2014/main" id="{802CCF00-D97A-42A6-B763-009F83BCB6D5}"/>
+                <a16:creationId xmlns:a16="http://schemas.microsoft.com/office/drawing/2014/main" id="{0D8E42B8-93D5-4585-BAEA-3F5804FFFA89}"/>
               </a:ext>
             </a:extLst>
           </p:cNvPr>
@@ -6979,7 +6935,7 @@
         </p:xfrm>
         <a:graphic xmlns:a="http://schemas.openxmlformats.org/drawingml/2006/main">
           <a:graphicData uri="http://schemas.openxmlformats.org/drawingml/2006/chart">
-            <c:chart xmlns:r="http://schemas.openxmlformats.org/officeDocument/2006/relationships" xmlns:c="http://schemas.openxmlformats.org/drawingml/2006/chart" r:id="Rba1b6b0ada254076"/>
+            <c:chart xmlns:r="http://schemas.openxmlformats.org/officeDocument/2006/relationships" xmlns:c="http://schemas.openxmlformats.org/drawingml/2006/chart" r:id="R6472b465f9f6477e"/>
           </a:graphicData>
         </a:graphic>
       </p:graphicFrame>
@@ -6988,7 +6944,7 @@
           <p:cNvPr id="6" name="">
             <a:extLst xmlns:a="http://schemas.openxmlformats.org/drawingml/2006/main">
               <a:ext uri="{FF2B5EF4-FFF2-40B4-BE49-F238E27FC236}">
-                <a16:creationId xmlns:a16="http://schemas.microsoft.com/office/drawing/2014/main" id="{8B1A41CA-3497-40EB-BFE5-729A17CDF9D5}"/>
+                <a16:creationId xmlns:a16="http://schemas.microsoft.com/office/drawing/2014/main" id="{CBC414AD-BCEB-47E3-931A-9A16882594C3}"/>
               </a:ext>
             </a:extLst>
           </p:cNvPr>
@@ -7045,7 +7001,7 @@
           <p:cNvPr id="7" name="">
             <a:extLst xmlns:a="http://schemas.openxmlformats.org/drawingml/2006/main">
               <a:ext uri="{FF2B5EF4-FFF2-40B4-BE49-F238E27FC236}">
-                <a16:creationId xmlns:a16="http://schemas.microsoft.com/office/drawing/2014/main" id="{3BC524F4-1BE3-4EF0-904C-17DECEFFCFEF}"/>
+                <a16:creationId xmlns:a16="http://schemas.microsoft.com/office/drawing/2014/main" id="{489E4962-ED85-4F57-A46D-D2FDE1B49CBD}"/>
               </a:ext>
             </a:extLst>
           </p:cNvPr>
@@ -7102,7 +7058,7 @@
           <p:cNvPr id="8" name="">
             <a:extLst xmlns:a="http://schemas.openxmlformats.org/drawingml/2006/main">
               <a:ext uri="{FF2B5EF4-FFF2-40B4-BE49-F238E27FC236}">
-                <a16:creationId xmlns:a16="http://schemas.microsoft.com/office/drawing/2014/main" id="{64F535BE-4C01-4C9C-BEE9-A822DE1331AB}"/>
+                <a16:creationId xmlns:a16="http://schemas.microsoft.com/office/drawing/2014/main" id="{72D9EDEF-3A51-46C3-9047-911C03779591}"/>
               </a:ext>
             </a:extLst>
           </p:cNvPr>
@@ -7166,7 +7122,7 @@
         </p:xfrm>
         <a:graphic xmlns:a="http://schemas.openxmlformats.org/drawingml/2006/main">
           <a:graphicData uri="http://schemas.openxmlformats.org/drawingml/2006/chart">
-            <c:chart xmlns:r="http://schemas.openxmlformats.org/officeDocument/2006/relationships" xmlns:c="http://schemas.openxmlformats.org/drawingml/2006/chart" r:id="Rce54a3b770a94dfa"/>
+            <c:chart xmlns:r="http://schemas.openxmlformats.org/officeDocument/2006/relationships" xmlns:c="http://schemas.openxmlformats.org/drawingml/2006/chart" r:id="R7186cbb7785b4111"/>
           </a:graphicData>
         </a:graphic>
       </p:graphicFrame>
@@ -7175,7 +7131,7 @@
           <p:cNvPr id="10" name="">
             <a:extLst xmlns:a="http://schemas.openxmlformats.org/drawingml/2006/main">
               <a:ext uri="{FF2B5EF4-FFF2-40B4-BE49-F238E27FC236}">
-                <a16:creationId xmlns:a16="http://schemas.microsoft.com/office/drawing/2014/main" id="{CFC993D7-4513-4B2B-BAA5-78F21B0BCAF5}"/>
+                <a16:creationId xmlns:a16="http://schemas.microsoft.com/office/drawing/2014/main" id="{AC480601-5E95-4B25-94AA-F79AC7ACF7CE}"/>
               </a:ext>
             </a:extLst>
           </p:cNvPr>
@@ -7232,7 +7188,7 @@
           <p:cNvPr id="11" name="">
             <a:extLst xmlns:a="http://schemas.openxmlformats.org/drawingml/2006/main">
               <a:ext uri="{FF2B5EF4-FFF2-40B4-BE49-F238E27FC236}">
-                <a16:creationId xmlns:a16="http://schemas.microsoft.com/office/drawing/2014/main" id="{397478C6-FE63-434A-A36A-0694948005F7}"/>
+                <a16:creationId xmlns:a16="http://schemas.microsoft.com/office/drawing/2014/main" id="{0D2F9024-44A6-44DE-B045-EA1E9EF2699C}"/>
               </a:ext>
             </a:extLst>
           </p:cNvPr>
@@ -7289,7 +7245,7 @@
           <p:cNvPr id="12" name="">
             <a:extLst xmlns:a="http://schemas.openxmlformats.org/drawingml/2006/main">
               <a:ext uri="{FF2B5EF4-FFF2-40B4-BE49-F238E27FC236}">
-                <a16:creationId xmlns:a16="http://schemas.microsoft.com/office/drawing/2014/main" id="{4367C293-1732-43BA-B7FA-08893BEA8E7B}"/>
+                <a16:creationId xmlns:a16="http://schemas.microsoft.com/office/drawing/2014/main" id="{FB8C8DCE-7A0C-4D88-957B-1C1F46AF783B}"/>
               </a:ext>
             </a:extLst>
           </p:cNvPr>
@@ -7353,7 +7309,7 @@
         </p:xfrm>
         <a:graphic xmlns:a="http://schemas.openxmlformats.org/drawingml/2006/main">
           <a:graphicData uri="http://schemas.openxmlformats.org/drawingml/2006/chart">
-            <c:chart xmlns:r="http://schemas.openxmlformats.org/officeDocument/2006/relationships" xmlns:c="http://schemas.openxmlformats.org/drawingml/2006/chart" r:id="R3c1be84effc64bb8"/>
+            <c:chart xmlns:r="http://schemas.openxmlformats.org/officeDocument/2006/relationships" xmlns:c="http://schemas.openxmlformats.org/drawingml/2006/chart" r:id="R6590931fbe294bbf"/>
           </a:graphicData>
         </a:graphic>
       </p:graphicFrame>
@@ -7362,7 +7318,7 @@
           <p:cNvPr id="14" name="">
             <a:extLst xmlns:a="http://schemas.openxmlformats.org/drawingml/2006/main">
               <a:ext uri="{FF2B5EF4-FFF2-40B4-BE49-F238E27FC236}">
-                <a16:creationId xmlns:a16="http://schemas.microsoft.com/office/drawing/2014/main" id="{E0A0C67E-867C-4C40-B52B-F9B9B5A0F2AA}"/>
+                <a16:creationId xmlns:a16="http://schemas.microsoft.com/office/drawing/2014/main" id="{AADCA33A-5A1B-4308-853D-EB534128E707}"/>
               </a:ext>
             </a:extLst>
           </p:cNvPr>
@@ -7419,7 +7375,7 @@
           <p:cNvPr id="15" name="">
             <a:extLst xmlns:a="http://schemas.openxmlformats.org/drawingml/2006/main">
               <a:ext uri="{FF2B5EF4-FFF2-40B4-BE49-F238E27FC236}">
-                <a16:creationId xmlns:a16="http://schemas.microsoft.com/office/drawing/2014/main" id="{C4E4A3B4-0329-42A8-A90C-7B0E46943853}"/>
+                <a16:creationId xmlns:a16="http://schemas.microsoft.com/office/drawing/2014/main" id="{B9ED2293-2579-4927-B369-8EE3086F1D13}"/>
               </a:ext>
             </a:extLst>
           </p:cNvPr>
@@ -7474,7 +7430,7 @@
     </p:spTree>
     <p:extLst>
       <p:ext uri="{BB962C8B-B14F-4D97-AF65-F5344CB8AC3E}">
-        <p14:creationId xmlns:p14="http://schemas.microsoft.com/office/powerpoint/2010/main" val="311173158"/>
+        <p14:creationId xmlns:p14="http://schemas.microsoft.com/office/powerpoint/2010/main" val="694792508"/>
       </p:ext>
     </p:extLst>
   </p:cSld>
@@ -7505,7 +7461,7 @@
           <p:cNvPr id="12" name="">
             <a:extLst xmlns:a="http://schemas.openxmlformats.org/drawingml/2006/main">
               <a:ext uri="{FF2B5EF4-FFF2-40B4-BE49-F238E27FC236}">
-                <a16:creationId xmlns:a16="http://schemas.microsoft.com/office/drawing/2014/main" id="{1D10444A-FCDC-4490-9E45-4D02A59F77FF}"/>
+                <a16:creationId xmlns:a16="http://schemas.microsoft.com/office/drawing/2014/main" id="{494BCED3-D681-4BED-8A39-6B09021DA280}"/>
               </a:ext>
             </a:extLst>
           </p:cNvPr>
@@ -7562,7 +7518,7 @@
           <p:cNvPr id="2" name="">
             <a:extLst xmlns:a="http://schemas.openxmlformats.org/drawingml/2006/main">
               <a:ext uri="{FF2B5EF4-FFF2-40B4-BE49-F238E27FC236}">
-                <a16:creationId xmlns:a16="http://schemas.microsoft.com/office/drawing/2014/main" id="{5EEF78F9-D106-42D9-93E4-065C870AF465}"/>
+                <a16:creationId xmlns:a16="http://schemas.microsoft.com/office/drawing/2014/main" id="{AEEC5D00-9FD1-419F-9069-97FF9C5A2C18}"/>
               </a:ext>
             </a:extLst>
           </p:cNvPr>
@@ -7619,7 +7575,7 @@
           <p:cNvPr id="3" name="">
             <a:extLst xmlns:a="http://schemas.openxmlformats.org/drawingml/2006/main">
               <a:ext uri="{FF2B5EF4-FFF2-40B4-BE49-F238E27FC236}">
-                <a16:creationId xmlns:a16="http://schemas.microsoft.com/office/drawing/2014/main" id="{8DAE67E9-8816-4CA8-9F51-7CD253831067}"/>
+                <a16:creationId xmlns:a16="http://schemas.microsoft.com/office/drawing/2014/main" id="{E7C11BBE-8B67-453A-A2D5-2C032F4D6EEB}"/>
               </a:ext>
             </a:extLst>
           </p:cNvPr>
@@ -7683,7 +7639,7 @@
         </p:xfrm>
         <a:graphic xmlns:a="http://schemas.openxmlformats.org/drawingml/2006/main">
           <a:graphicData uri="http://schemas.openxmlformats.org/drawingml/2006/chart">
-            <c:chart xmlns:r="http://schemas.openxmlformats.org/officeDocument/2006/relationships" xmlns:c="http://schemas.openxmlformats.org/drawingml/2006/chart" r:id="Rdfa5f142fa994233"/>
+            <c:chart xmlns:r="http://schemas.openxmlformats.org/officeDocument/2006/relationships" xmlns:c="http://schemas.openxmlformats.org/drawingml/2006/chart" r:id="R9c86b687b451473a"/>
           </a:graphicData>
         </a:graphic>
       </p:graphicFrame>
@@ -7692,7 +7648,7 @@
           <p:cNvPr id="5" name="">
             <a:extLst xmlns:a="http://schemas.openxmlformats.org/drawingml/2006/main">
               <a:ext uri="{FF2B5EF4-FFF2-40B4-BE49-F238E27FC236}">
-                <a16:creationId xmlns:a16="http://schemas.microsoft.com/office/drawing/2014/main" id="{7EBF0986-7C0F-4062-A581-38068E7BB87F}"/>
+                <a16:creationId xmlns:a16="http://schemas.microsoft.com/office/drawing/2014/main" id="{2FC8F212-160C-4897-A606-C25CA2A0304E}"/>
               </a:ext>
             </a:extLst>
           </p:cNvPr>
@@ -7749,7 +7705,7 @@
           <p:cNvPr id="6" name="">
             <a:extLst xmlns:a="http://schemas.openxmlformats.org/drawingml/2006/main">
               <a:ext uri="{FF2B5EF4-FFF2-40B4-BE49-F238E27FC236}">
-                <a16:creationId xmlns:a16="http://schemas.microsoft.com/office/drawing/2014/main" id="{F08832E8-BB97-464D-8CBC-084758FDA159}"/>
+                <a16:creationId xmlns:a16="http://schemas.microsoft.com/office/drawing/2014/main" id="{AB2EDD67-0EFD-4E9B-9A83-CFBD53429DA0}"/>
               </a:ext>
             </a:extLst>
           </p:cNvPr>
@@ -7806,7 +7762,7 @@
           <p:cNvPr id="7" name="">
             <a:extLst xmlns:a="http://schemas.openxmlformats.org/drawingml/2006/main">
               <a:ext uri="{FF2B5EF4-FFF2-40B4-BE49-F238E27FC236}">
-                <a16:creationId xmlns:a16="http://schemas.microsoft.com/office/drawing/2014/main" id="{D3A20DA5-4F7A-4CA2-BD13-30D8431DA87B}"/>
+                <a16:creationId xmlns:a16="http://schemas.microsoft.com/office/drawing/2014/main" id="{9DCBCD52-0FA7-4BC2-B640-77923F319CE9}"/>
               </a:ext>
             </a:extLst>
           </p:cNvPr>
@@ -7863,7 +7819,7 @@
           <p:cNvPr id="8" name="">
             <a:extLst xmlns:a="http://schemas.openxmlformats.org/drawingml/2006/main">
               <a:ext uri="{FF2B5EF4-FFF2-40B4-BE49-F238E27FC236}">
-                <a16:creationId xmlns:a16="http://schemas.microsoft.com/office/drawing/2014/main" id="{3462A3D3-D76E-4CE3-B2B9-C14F9DA7B8F6}"/>
+                <a16:creationId xmlns:a16="http://schemas.microsoft.com/office/drawing/2014/main" id="{EC49F744-1635-4C28-95DE-1FE20D7A47D4}"/>
               </a:ext>
             </a:extLst>
           </p:cNvPr>
@@ -7920,7 +7876,7 @@
           <p:cNvPr id="9" name="">
             <a:extLst xmlns:a="http://schemas.openxmlformats.org/drawingml/2006/main">
               <a:ext uri="{FF2B5EF4-FFF2-40B4-BE49-F238E27FC236}">
-                <a16:creationId xmlns:a16="http://schemas.microsoft.com/office/drawing/2014/main" id="{BB74431D-2E7D-45FC-875E-9FCC23A13D98}"/>
+                <a16:creationId xmlns:a16="http://schemas.microsoft.com/office/drawing/2014/main" id="{689E6B8B-5568-497F-B656-FE72114E698E}"/>
               </a:ext>
             </a:extLst>
           </p:cNvPr>
@@ -7977,7 +7933,7 @@
           <p:cNvPr id="10" name="">
             <a:extLst xmlns:a="http://schemas.openxmlformats.org/drawingml/2006/main">
               <a:ext uri="{FF2B5EF4-FFF2-40B4-BE49-F238E27FC236}">
-                <a16:creationId xmlns:a16="http://schemas.microsoft.com/office/drawing/2014/main" id="{46F60C17-5AA2-49B7-A6A5-600E14C9E470}"/>
+                <a16:creationId xmlns:a16="http://schemas.microsoft.com/office/drawing/2014/main" id="{17B3394E-EF69-484F-8C8C-7B8D427754A9}"/>
               </a:ext>
             </a:extLst>
           </p:cNvPr>
@@ -8034,7 +7990,7 @@
           <p:cNvPr id="11" name="">
             <a:extLst xmlns:a="http://schemas.openxmlformats.org/drawingml/2006/main">
               <a:ext uri="{FF2B5EF4-FFF2-40B4-BE49-F238E27FC236}">
-                <a16:creationId xmlns:a16="http://schemas.microsoft.com/office/drawing/2014/main" id="{74657DF4-DE1F-465B-BF64-97E25D329F6E}"/>
+                <a16:creationId xmlns:a16="http://schemas.microsoft.com/office/drawing/2014/main" id="{9251C5AC-F279-4D30-8606-40DC5845BA76}"/>
               </a:ext>
             </a:extLst>
           </p:cNvPr>
@@ -8089,7 +8045,7 @@
     </p:spTree>
     <p:extLst>
       <p:ext uri="{BB962C8B-B14F-4D97-AF65-F5344CB8AC3E}">
-        <p14:creationId xmlns:p14="http://schemas.microsoft.com/office/powerpoint/2010/main" val="1928617563"/>
+        <p14:creationId xmlns:p14="http://schemas.microsoft.com/office/powerpoint/2010/main" val="381958116"/>
       </p:ext>
     </p:extLst>
   </p:cSld>
@@ -8120,7 +8076,7 @@
           <p:cNvPr id="12" name="">
             <a:extLst xmlns:a="http://schemas.openxmlformats.org/drawingml/2006/main">
               <a:ext uri="{FF2B5EF4-FFF2-40B4-BE49-F238E27FC236}">
-                <a16:creationId xmlns:a16="http://schemas.microsoft.com/office/drawing/2014/main" id="{09CB534B-B04E-4C3A-8CE1-EAF6D298660E}"/>
+                <a16:creationId xmlns:a16="http://schemas.microsoft.com/office/drawing/2014/main" id="{2B9F5760-190A-4F51-801A-E141CE63A029}"/>
               </a:ext>
             </a:extLst>
           </p:cNvPr>
@@ -8177,7 +8133,7 @@
           <p:cNvPr id="2" name="">
             <a:extLst xmlns:a="http://schemas.openxmlformats.org/drawingml/2006/main">
               <a:ext uri="{FF2B5EF4-FFF2-40B4-BE49-F238E27FC236}">
-                <a16:creationId xmlns:a16="http://schemas.microsoft.com/office/drawing/2014/main" id="{2039C4E4-D058-4F3E-B985-30FF2C385E0D}"/>
+                <a16:creationId xmlns:a16="http://schemas.microsoft.com/office/drawing/2014/main" id="{8B0ED192-1DF8-4A8C-9832-453450C97CAC}"/>
               </a:ext>
             </a:extLst>
           </p:cNvPr>
@@ -8234,7 +8190,7 @@
           <p:cNvPr id="3" name="">
             <a:extLst xmlns:a="http://schemas.openxmlformats.org/drawingml/2006/main">
               <a:ext uri="{FF2B5EF4-FFF2-40B4-BE49-F238E27FC236}">
-                <a16:creationId xmlns:a16="http://schemas.microsoft.com/office/drawing/2014/main" id="{EC522A75-81C8-4284-BFA8-4253945E9A8A}"/>
+                <a16:creationId xmlns:a16="http://schemas.microsoft.com/office/drawing/2014/main" id="{9D62B75F-037B-4C87-8A70-E18AC69E2DC7}"/>
               </a:ext>
             </a:extLst>
           </p:cNvPr>
@@ -8298,7 +8254,7 @@
         </p:xfrm>
         <a:graphic xmlns:a="http://schemas.openxmlformats.org/drawingml/2006/main">
           <a:graphicData uri="http://schemas.openxmlformats.org/drawingml/2006/chart">
-            <c:chart xmlns:r="http://schemas.openxmlformats.org/officeDocument/2006/relationships" xmlns:c="http://schemas.openxmlformats.org/drawingml/2006/chart" r:id="Re37d6a3b5b31485d"/>
+            <c:chart xmlns:r="http://schemas.openxmlformats.org/officeDocument/2006/relationships" xmlns:c="http://schemas.openxmlformats.org/drawingml/2006/chart" r:id="Rfbde1cea682f4647"/>
           </a:graphicData>
         </a:graphic>
       </p:graphicFrame>
@@ -8307,7 +8263,7 @@
           <p:cNvPr id="5" name="">
             <a:extLst xmlns:a="http://schemas.openxmlformats.org/drawingml/2006/main">
               <a:ext uri="{FF2B5EF4-FFF2-40B4-BE49-F238E27FC236}">
-                <a16:creationId xmlns:a16="http://schemas.microsoft.com/office/drawing/2014/main" id="{F23B7E77-5D6F-47CF-AAA6-ECB89B916FFF}"/>
+                <a16:creationId xmlns:a16="http://schemas.microsoft.com/office/drawing/2014/main" id="{BED7697F-9506-45C2-9AF4-E7BB376F23E7}"/>
               </a:ext>
             </a:extLst>
           </p:cNvPr>
@@ -8364,7 +8320,7 @@
           <p:cNvPr id="6" name="">
             <a:extLst xmlns:a="http://schemas.openxmlformats.org/drawingml/2006/main">
               <a:ext uri="{FF2B5EF4-FFF2-40B4-BE49-F238E27FC236}">
-                <a16:creationId xmlns:a16="http://schemas.microsoft.com/office/drawing/2014/main" id="{60E0167C-C886-4177-B9E8-784E31C6A382}"/>
+                <a16:creationId xmlns:a16="http://schemas.microsoft.com/office/drawing/2014/main" id="{AD82D457-EE91-4AD5-B1F9-727DB0B40E65}"/>
               </a:ext>
             </a:extLst>
           </p:cNvPr>
@@ -8421,7 +8377,7 @@
           <p:cNvPr id="7" name="">
             <a:extLst xmlns:a="http://schemas.openxmlformats.org/drawingml/2006/main">
               <a:ext uri="{FF2B5EF4-FFF2-40B4-BE49-F238E27FC236}">
-                <a16:creationId xmlns:a16="http://schemas.microsoft.com/office/drawing/2014/main" id="{FB300BD5-2618-4F72-ADCF-CF950685B097}"/>
+                <a16:creationId xmlns:a16="http://schemas.microsoft.com/office/drawing/2014/main" id="{DB49A7D1-0429-4BD5-84BF-B6C2033148D2}"/>
               </a:ext>
             </a:extLst>
           </p:cNvPr>
@@ -8478,7 +8434,7 @@
           <p:cNvPr id="8" name="">
             <a:extLst xmlns:a="http://schemas.openxmlformats.org/drawingml/2006/main">
               <a:ext uri="{FF2B5EF4-FFF2-40B4-BE49-F238E27FC236}">
-                <a16:creationId xmlns:a16="http://schemas.microsoft.com/office/drawing/2014/main" id="{58C6CC3D-F150-4B05-B98E-884D0BB091F9}"/>
+                <a16:creationId xmlns:a16="http://schemas.microsoft.com/office/drawing/2014/main" id="{4A6978EC-9EAE-49D4-899D-73DE7B4453EA}"/>
               </a:ext>
             </a:extLst>
           </p:cNvPr>
@@ -8535,7 +8491,7 @@
           <p:cNvPr id="9" name="">
             <a:extLst xmlns:a="http://schemas.openxmlformats.org/drawingml/2006/main">
               <a:ext uri="{FF2B5EF4-FFF2-40B4-BE49-F238E27FC236}">
-                <a16:creationId xmlns:a16="http://schemas.microsoft.com/office/drawing/2014/main" id="{3A7434D4-FAB2-4531-ABDF-1698020366B1}"/>
+                <a16:creationId xmlns:a16="http://schemas.microsoft.com/office/drawing/2014/main" id="{15208FB1-BFD1-4396-AE3C-BE8A9E409963}"/>
               </a:ext>
             </a:extLst>
           </p:cNvPr>
@@ -8592,7 +8548,7 @@
           <p:cNvPr id="10" name="">
             <a:extLst xmlns:a="http://schemas.openxmlformats.org/drawingml/2006/main">
               <a:ext uri="{FF2B5EF4-FFF2-40B4-BE49-F238E27FC236}">
-                <a16:creationId xmlns:a16="http://schemas.microsoft.com/office/drawing/2014/main" id="{7ACC8045-5496-463C-9771-0FF24E8BBE98}"/>
+                <a16:creationId xmlns:a16="http://schemas.microsoft.com/office/drawing/2014/main" id="{913A8237-D9C7-4E64-A93C-9E40DC2797FE}"/>
               </a:ext>
             </a:extLst>
           </p:cNvPr>
@@ -8649,7 +8605,7 @@
           <p:cNvPr id="11" name="">
             <a:extLst xmlns:a="http://schemas.openxmlformats.org/drawingml/2006/main">
               <a:ext uri="{FF2B5EF4-FFF2-40B4-BE49-F238E27FC236}">
-                <a16:creationId xmlns:a16="http://schemas.microsoft.com/office/drawing/2014/main" id="{650D2CB8-DCD5-4766-A5CA-3F13902918C0}"/>
+                <a16:creationId xmlns:a16="http://schemas.microsoft.com/office/drawing/2014/main" id="{CC30512D-7C01-4554-A240-A5DA83B5B266}"/>
               </a:ext>
             </a:extLst>
           </p:cNvPr>
@@ -8704,7 +8660,7 @@
     </p:spTree>
     <p:extLst>
       <p:ext uri="{BB962C8B-B14F-4D97-AF65-F5344CB8AC3E}">
-        <p14:creationId xmlns:p14="http://schemas.microsoft.com/office/powerpoint/2010/main" val="925143214"/>
+        <p14:creationId xmlns:p14="http://schemas.microsoft.com/office/powerpoint/2010/main" val="2014950798"/>
       </p:ext>
     </p:extLst>
   </p:cSld>
@@ -8735,7 +8691,7 @@
           <p:cNvPr id="12" name="">
             <a:extLst xmlns:a="http://schemas.openxmlformats.org/drawingml/2006/main">
               <a:ext uri="{FF2B5EF4-FFF2-40B4-BE49-F238E27FC236}">
-                <a16:creationId xmlns:a16="http://schemas.microsoft.com/office/drawing/2014/main" id="{199939C6-976C-4A06-B8CE-665C990443CC}"/>
+                <a16:creationId xmlns:a16="http://schemas.microsoft.com/office/drawing/2014/main" id="{F746C1DB-A860-4F1C-B806-E756D4CF959C}"/>
               </a:ext>
             </a:extLst>
           </p:cNvPr>
@@ -8792,7 +8748,7 @@
           <p:cNvPr id="2" name="">
             <a:extLst xmlns:a="http://schemas.openxmlformats.org/drawingml/2006/main">
               <a:ext uri="{FF2B5EF4-FFF2-40B4-BE49-F238E27FC236}">
-                <a16:creationId xmlns:a16="http://schemas.microsoft.com/office/drawing/2014/main" id="{A1E91328-0CCA-4531-B19A-D146F9FE46F2}"/>
+                <a16:creationId xmlns:a16="http://schemas.microsoft.com/office/drawing/2014/main" id="{C3BC3C8C-4E9E-49D6-8707-44A3A4CBF6B5}"/>
               </a:ext>
             </a:extLst>
           </p:cNvPr>
@@ -8849,7 +8805,7 @@
           <p:cNvPr id="3" name="">
             <a:extLst xmlns:a="http://schemas.openxmlformats.org/drawingml/2006/main">
               <a:ext uri="{FF2B5EF4-FFF2-40B4-BE49-F238E27FC236}">
-                <a16:creationId xmlns:a16="http://schemas.microsoft.com/office/drawing/2014/main" id="{FFE5467F-A551-4803-9CDE-18E447549B96}"/>
+                <a16:creationId xmlns:a16="http://schemas.microsoft.com/office/drawing/2014/main" id="{B5DA83A7-A25B-494D-9C72-EF8DD4D0F0D1}"/>
               </a:ext>
             </a:extLst>
           </p:cNvPr>
@@ -8906,7 +8862,7 @@
           <p:cNvPr id="4" name="">
             <a:extLst xmlns:a="http://schemas.openxmlformats.org/drawingml/2006/main">
               <a:ext uri="{FF2B5EF4-FFF2-40B4-BE49-F238E27FC236}">
-                <a16:creationId xmlns:a16="http://schemas.microsoft.com/office/drawing/2014/main" id="{A8691F85-6EE9-4E10-BCBC-144DC48D932C}"/>
+                <a16:creationId xmlns:a16="http://schemas.microsoft.com/office/drawing/2014/main" id="{608F5465-E9C3-453B-B7B0-4A874BAB7B31}"/>
               </a:ext>
             </a:extLst>
           </p:cNvPr>
@@ -8963,7 +8919,7 @@
           <p:cNvPr id="5" name="">
             <a:extLst xmlns:a="http://schemas.openxmlformats.org/drawingml/2006/main">
               <a:ext uri="{FF2B5EF4-FFF2-40B4-BE49-F238E27FC236}">
-                <a16:creationId xmlns:a16="http://schemas.microsoft.com/office/drawing/2014/main" id="{45C2439B-E3D5-4A0A-BD94-26C40AA8AE69}"/>
+                <a16:creationId xmlns:a16="http://schemas.microsoft.com/office/drawing/2014/main" id="{14F06F07-3B8C-456B-81C2-43B8D24EDF69}"/>
               </a:ext>
             </a:extLst>
           </p:cNvPr>
@@ -9020,7 +8976,7 @@
           <p:cNvPr id="6" name="">
             <a:extLst xmlns:a="http://schemas.openxmlformats.org/drawingml/2006/main">
               <a:ext uri="{FF2B5EF4-FFF2-40B4-BE49-F238E27FC236}">
-                <a16:creationId xmlns:a16="http://schemas.microsoft.com/office/drawing/2014/main" id="{8E6207BE-9F7E-4561-842F-6BBEE06F0966}"/>
+                <a16:creationId xmlns:a16="http://schemas.microsoft.com/office/drawing/2014/main" id="{CC11CDEA-95B9-4285-B2B9-35FF31383D15}"/>
               </a:ext>
             </a:extLst>
           </p:cNvPr>
@@ -9077,7 +9033,7 @@
           <p:cNvPr id="7" name="">
             <a:extLst xmlns:a="http://schemas.openxmlformats.org/drawingml/2006/main">
               <a:ext uri="{FF2B5EF4-FFF2-40B4-BE49-F238E27FC236}">
-                <a16:creationId xmlns:a16="http://schemas.microsoft.com/office/drawing/2014/main" id="{A015BF3B-F485-4E40-AA5E-50E2E129BE29}"/>
+                <a16:creationId xmlns:a16="http://schemas.microsoft.com/office/drawing/2014/main" id="{BE64A215-8BE4-4C82-9850-C96E333D0388}"/>
               </a:ext>
             </a:extLst>
           </p:cNvPr>
@@ -9134,7 +9090,7 @@
           <p:cNvPr id="8" name="">
             <a:extLst xmlns:a="http://schemas.openxmlformats.org/drawingml/2006/main">
               <a:ext uri="{FF2B5EF4-FFF2-40B4-BE49-F238E27FC236}">
-                <a16:creationId xmlns:a16="http://schemas.microsoft.com/office/drawing/2014/main" id="{70B1AF5B-FB9A-45A1-917E-AD8C91EC51E5}"/>
+                <a16:creationId xmlns:a16="http://schemas.microsoft.com/office/drawing/2014/main" id="{4FC67AF8-95C9-482C-9EE0-DA4A3E422E4E}"/>
               </a:ext>
             </a:extLst>
           </p:cNvPr>
@@ -9191,7 +9147,7 @@
           <p:cNvPr id="9" name="">
             <a:extLst xmlns:a="http://schemas.openxmlformats.org/drawingml/2006/main">
               <a:ext uri="{FF2B5EF4-FFF2-40B4-BE49-F238E27FC236}">
-                <a16:creationId xmlns:a16="http://schemas.microsoft.com/office/drawing/2014/main" id="{055A1E31-DF30-45F6-B041-A7D035DE03DD}"/>
+                <a16:creationId xmlns:a16="http://schemas.microsoft.com/office/drawing/2014/main" id="{04883810-44AF-4DFF-839F-5E48389E9655}"/>
               </a:ext>
             </a:extLst>
           </p:cNvPr>
@@ -9248,7 +9204,7 @@
           <p:cNvPr id="10" name="">
             <a:extLst xmlns:a="http://schemas.openxmlformats.org/drawingml/2006/main">
               <a:ext uri="{FF2B5EF4-FFF2-40B4-BE49-F238E27FC236}">
-                <a16:creationId xmlns:a16="http://schemas.microsoft.com/office/drawing/2014/main" id="{E31F10DE-C9A2-48CF-88D0-3530E83C9136}"/>
+                <a16:creationId xmlns:a16="http://schemas.microsoft.com/office/drawing/2014/main" id="{8676299C-58AC-4437-9629-2F2D39A0DB01}"/>
               </a:ext>
             </a:extLst>
           </p:cNvPr>
@@ -9305,7 +9261,7 @@
           <p:cNvPr id="11" name="">
             <a:extLst xmlns:a="http://schemas.openxmlformats.org/drawingml/2006/main">
               <a:ext uri="{FF2B5EF4-FFF2-40B4-BE49-F238E27FC236}">
-                <a16:creationId xmlns:a16="http://schemas.microsoft.com/office/drawing/2014/main" id="{2D792161-6C08-49B1-91DD-369FC13504DC}"/>
+                <a16:creationId xmlns:a16="http://schemas.microsoft.com/office/drawing/2014/main" id="{3A2641F9-5C3E-48A4-9CA5-610CC995A2EE}"/>
               </a:ext>
             </a:extLst>
           </p:cNvPr>
@@ -9360,7 +9316,7 @@
     </p:spTree>
     <p:extLst>
       <p:ext uri="{BB962C8B-B14F-4D97-AF65-F5344CB8AC3E}">
-        <p14:creationId xmlns:p14="http://schemas.microsoft.com/office/powerpoint/2010/main" val="2102989168"/>
+        <p14:creationId xmlns:p14="http://schemas.microsoft.com/office/powerpoint/2010/main" val="732136842"/>
       </p:ext>
     </p:extLst>
   </p:cSld>
@@ -9391,7 +9347,7 @@
           <p:cNvPr id="12" name="">
             <a:extLst xmlns:a="http://schemas.openxmlformats.org/drawingml/2006/main">
               <a:ext uri="{FF2B5EF4-FFF2-40B4-BE49-F238E27FC236}">
-                <a16:creationId xmlns:a16="http://schemas.microsoft.com/office/drawing/2014/main" id="{78342080-21FB-43A9-8A1F-74A2D608A3F5}"/>
+                <a16:creationId xmlns:a16="http://schemas.microsoft.com/office/drawing/2014/main" id="{28E9C03A-0120-42B7-B529-DDEDCAC7787C}"/>
               </a:ext>
             </a:extLst>
           </p:cNvPr>
@@ -9448,7 +9404,7 @@
           <p:cNvPr id="2" name="">
             <a:extLst xmlns:a="http://schemas.openxmlformats.org/drawingml/2006/main">
               <a:ext uri="{FF2B5EF4-FFF2-40B4-BE49-F238E27FC236}">
-                <a16:creationId xmlns:a16="http://schemas.microsoft.com/office/drawing/2014/main" id="{7D9BEAE6-BBC5-4819-8000-EDC45149B177}"/>
+                <a16:creationId xmlns:a16="http://schemas.microsoft.com/office/drawing/2014/main" id="{A6F75D8A-0F00-456B-A0AB-187188A281FA}"/>
               </a:ext>
             </a:extLst>
           </p:cNvPr>
@@ -9505,7 +9461,7 @@
           <p:cNvPr id="3" name="">
             <a:extLst xmlns:a="http://schemas.openxmlformats.org/drawingml/2006/main">
               <a:ext uri="{FF2B5EF4-FFF2-40B4-BE49-F238E27FC236}">
-                <a16:creationId xmlns:a16="http://schemas.microsoft.com/office/drawing/2014/main" id="{C22A5DB5-B7FD-4025-9EDB-E4F3544EAEEC}"/>
+                <a16:creationId xmlns:a16="http://schemas.microsoft.com/office/drawing/2014/main" id="{5A77516B-4500-4592-AA24-EAE64B182087}"/>
               </a:ext>
             </a:extLst>
           </p:cNvPr>
@@ -9569,7 +9525,7 @@
         </p:xfrm>
         <a:graphic xmlns:a="http://schemas.openxmlformats.org/drawingml/2006/main">
           <a:graphicData uri="http://schemas.openxmlformats.org/drawingml/2006/chart">
-            <c:chart xmlns:r="http://schemas.openxmlformats.org/officeDocument/2006/relationships" xmlns:c="http://schemas.openxmlformats.org/drawingml/2006/chart" r:id="R21a1f1b88a6843b5"/>
+            <c:chart xmlns:r="http://schemas.openxmlformats.org/officeDocument/2006/relationships" xmlns:c="http://schemas.openxmlformats.org/drawingml/2006/chart" r:id="R4b9cf690c3614ac5"/>
           </a:graphicData>
         </a:graphic>
       </p:graphicFrame>
@@ -9578,7 +9534,7 @@
           <p:cNvPr id="5" name="">
             <a:extLst xmlns:a="http://schemas.openxmlformats.org/drawingml/2006/main">
               <a:ext uri="{FF2B5EF4-FFF2-40B4-BE49-F238E27FC236}">
-                <a16:creationId xmlns:a16="http://schemas.microsoft.com/office/drawing/2014/main" id="{5F4C934A-EAC4-4364-9386-ADB095732954}"/>
+                <a16:creationId xmlns:a16="http://schemas.microsoft.com/office/drawing/2014/main" id="{FCE16414-0839-4592-8BD2-2F293B27E67B}"/>
               </a:ext>
             </a:extLst>
           </p:cNvPr>
@@ -9635,7 +9591,7 @@
           <p:cNvPr id="6" name="">
             <a:extLst xmlns:a="http://schemas.openxmlformats.org/drawingml/2006/main">
               <a:ext uri="{FF2B5EF4-FFF2-40B4-BE49-F238E27FC236}">
-                <a16:creationId xmlns:a16="http://schemas.microsoft.com/office/drawing/2014/main" id="{E09EC24C-1D60-4F65-9F84-73D376F8DC98}"/>
+                <a16:creationId xmlns:a16="http://schemas.microsoft.com/office/drawing/2014/main" id="{1189F653-61E1-4AB6-9859-C423299EDE05}"/>
               </a:ext>
             </a:extLst>
           </p:cNvPr>
@@ -9692,7 +9648,7 @@
           <p:cNvPr id="7" name="">
             <a:extLst xmlns:a="http://schemas.openxmlformats.org/drawingml/2006/main">
               <a:ext uri="{FF2B5EF4-FFF2-40B4-BE49-F238E27FC236}">
-                <a16:creationId xmlns:a16="http://schemas.microsoft.com/office/drawing/2014/main" id="{0D8C0AF0-54B0-44F3-A8F7-CBF64DD3EDC9}"/>
+                <a16:creationId xmlns:a16="http://schemas.microsoft.com/office/drawing/2014/main" id="{0A1D711A-1D59-47D5-B1C2-9FFD9B7EC15A}"/>
               </a:ext>
             </a:extLst>
           </p:cNvPr>
@@ -9739,7 +9695,7 @@
                 <a:ea typeface="Heiti TC"/>
                 <a:cs typeface="Heiti TC"/>
               </a:rPr>
-              <a:t>先估計，再檢查網頁</a:t>
+              <a:t>先畫直線，再估計</a:t>
             </a:r>
           </a:p>
         </p:txBody>
@@ -9749,7 +9705,7 @@
           <p:cNvPr id="8" name="">
             <a:extLst xmlns:a="http://schemas.openxmlformats.org/drawingml/2006/main">
               <a:ext uri="{FF2B5EF4-FFF2-40B4-BE49-F238E27FC236}">
-                <a16:creationId xmlns:a16="http://schemas.microsoft.com/office/drawing/2014/main" id="{CAD22AD1-1F71-48F3-8473-0C6000D11DCC}"/>
+                <a16:creationId xmlns:a16="http://schemas.microsoft.com/office/drawing/2014/main" id="{A8262DF9-6BBF-4981-BCC1-7B38FF546E18}"/>
               </a:ext>
             </a:extLst>
           </p:cNvPr>
@@ -9796,7 +9752,7 @@
                 <a:ea typeface="Arial"/>
                 <a:cs typeface="Arial"/>
               </a:rPr>
-              <a:t>Estimate first, then check the page</a:t>
+              <a:t>Draw your line, then estimate</a:t>
             </a:r>
           </a:p>
         </p:txBody>
@@ -9806,7 +9762,7 @@
           <p:cNvPr id="9" name="">
             <a:extLst xmlns:a="http://schemas.openxmlformats.org/drawingml/2006/main">
               <a:ext uri="{FF2B5EF4-FFF2-40B4-BE49-F238E27FC236}">
-                <a16:creationId xmlns:a16="http://schemas.microsoft.com/office/drawing/2014/main" id="{26CA0E76-B698-4722-8C21-41ABC9ADBFEF}"/>
+                <a16:creationId xmlns:a16="http://schemas.microsoft.com/office/drawing/2014/main" id="{AF57AAAD-F41D-48C4-A37C-BDDF2F52E58B}"/>
               </a:ext>
             </a:extLst>
           </p:cNvPr>
@@ -9863,7 +9819,7 @@
           <p:cNvPr id="10" name="">
             <a:extLst xmlns:a="http://schemas.openxmlformats.org/drawingml/2006/main">
               <a:ext uri="{FF2B5EF4-FFF2-40B4-BE49-F238E27FC236}">
-                <a16:creationId xmlns:a16="http://schemas.microsoft.com/office/drawing/2014/main" id="{D091F5C5-9138-45AF-B3D0-03DFDF19B829}"/>
+                <a16:creationId xmlns:a16="http://schemas.microsoft.com/office/drawing/2014/main" id="{CFC929E6-E84B-4CFE-A44B-1BAB7F8BCABC}"/>
               </a:ext>
             </a:extLst>
           </p:cNvPr>
@@ -9920,7 +9876,7 @@
           <p:cNvPr id="11" name="">
             <a:extLst xmlns:a="http://schemas.openxmlformats.org/drawingml/2006/main">
               <a:ext uri="{FF2B5EF4-FFF2-40B4-BE49-F238E27FC236}">
-                <a16:creationId xmlns:a16="http://schemas.microsoft.com/office/drawing/2014/main" id="{A8F22401-AD61-4293-A1AF-731B7861115B}"/>
+                <a16:creationId xmlns:a16="http://schemas.microsoft.com/office/drawing/2014/main" id="{A2D69B9D-0595-4AAA-AFEB-E79FF880EE3F}"/>
               </a:ext>
             </a:extLst>
           </p:cNvPr>
@@ -9975,7 +9931,7 @@
     </p:spTree>
     <p:extLst>
       <p:ext uri="{BB962C8B-B14F-4D97-AF65-F5344CB8AC3E}">
-        <p14:creationId xmlns:p14="http://schemas.microsoft.com/office/powerpoint/2010/main" val="788462280"/>
+        <p14:creationId xmlns:p14="http://schemas.microsoft.com/office/powerpoint/2010/main" val="651977194"/>
       </p:ext>
     </p:extLst>
   </p:cSld>
@@ -10006,7 +9962,7 @@
           <p:cNvPr id="15" name="">
             <a:extLst xmlns:a="http://schemas.openxmlformats.org/drawingml/2006/main">
               <a:ext uri="{FF2B5EF4-FFF2-40B4-BE49-F238E27FC236}">
-                <a16:creationId xmlns:a16="http://schemas.microsoft.com/office/drawing/2014/main" id="{3EAC87F3-17A3-4262-9139-25574F8740D5}"/>
+                <a16:creationId xmlns:a16="http://schemas.microsoft.com/office/drawing/2014/main" id="{64CA3DA0-0AB8-4C20-894E-CB8ACF3FDD5F}"/>
               </a:ext>
             </a:extLst>
           </p:cNvPr>
@@ -10063,7 +10019,7 @@
           <p:cNvPr id="2" name="">
             <a:extLst xmlns:a="http://schemas.openxmlformats.org/drawingml/2006/main">
               <a:ext uri="{FF2B5EF4-FFF2-40B4-BE49-F238E27FC236}">
-                <a16:creationId xmlns:a16="http://schemas.microsoft.com/office/drawing/2014/main" id="{EC32A996-F461-467C-A6F9-EDE92BD6DC8E}"/>
+                <a16:creationId xmlns:a16="http://schemas.microsoft.com/office/drawing/2014/main" id="{F1F425B4-B1B6-43BF-B2C2-0FE7A094373E}"/>
               </a:ext>
             </a:extLst>
           </p:cNvPr>
@@ -10120,7 +10076,7 @@
           <p:cNvPr id="3" name="">
             <a:extLst xmlns:a="http://schemas.openxmlformats.org/drawingml/2006/main">
               <a:ext uri="{FF2B5EF4-FFF2-40B4-BE49-F238E27FC236}">
-                <a16:creationId xmlns:a16="http://schemas.microsoft.com/office/drawing/2014/main" id="{829C64E5-4611-4FA7-A7E4-4B5B7FCE8E40}"/>
+                <a16:creationId xmlns:a16="http://schemas.microsoft.com/office/drawing/2014/main" id="{7E31F2CB-3208-4CAB-B2D4-CD47C3034365}"/>
               </a:ext>
             </a:extLst>
           </p:cNvPr>
@@ -10177,7 +10133,7 @@
           <p:cNvPr id="4" name="">
             <a:extLst xmlns:a="http://schemas.openxmlformats.org/drawingml/2006/main">
               <a:ext uri="{FF2B5EF4-FFF2-40B4-BE49-F238E27FC236}">
-                <a16:creationId xmlns:a16="http://schemas.microsoft.com/office/drawing/2014/main" id="{D10E744C-606C-4AD8-8CBA-C0DEF5CE21E1}"/>
+                <a16:creationId xmlns:a16="http://schemas.microsoft.com/office/drawing/2014/main" id="{D533A1DA-B729-4A76-ADCF-561AFEE81438}"/>
               </a:ext>
             </a:extLst>
           </p:cNvPr>
@@ -10234,7 +10190,7 @@
           <p:cNvPr id="5" name="">
             <a:extLst xmlns:a="http://schemas.openxmlformats.org/drawingml/2006/main">
               <a:ext uri="{FF2B5EF4-FFF2-40B4-BE49-F238E27FC236}">
-                <a16:creationId xmlns:a16="http://schemas.microsoft.com/office/drawing/2014/main" id="{92D368E6-2882-498C-A42F-C339875D4070}"/>
+                <a16:creationId xmlns:a16="http://schemas.microsoft.com/office/drawing/2014/main" id="{32C3DB2E-CEA0-42C8-8F16-F000C677E385}"/>
               </a:ext>
             </a:extLst>
           </p:cNvPr>
@@ -10291,7 +10247,7 @@
           <p:cNvPr id="6" name="">
             <a:extLst xmlns:a="http://schemas.openxmlformats.org/drawingml/2006/main">
               <a:ext uri="{FF2B5EF4-FFF2-40B4-BE49-F238E27FC236}">
-                <a16:creationId xmlns:a16="http://schemas.microsoft.com/office/drawing/2014/main" id="{FCE77090-F89A-44D0-8EA8-A5C95401D16A}"/>
+                <a16:creationId xmlns:a16="http://schemas.microsoft.com/office/drawing/2014/main" id="{3C20D341-4874-4483-87B8-FF506CB515D7}"/>
               </a:ext>
             </a:extLst>
           </p:cNvPr>
@@ -10348,7 +10304,7 @@
           <p:cNvPr id="7" name="">
             <a:extLst xmlns:a="http://schemas.openxmlformats.org/drawingml/2006/main">
               <a:ext uri="{FF2B5EF4-FFF2-40B4-BE49-F238E27FC236}">
-                <a16:creationId xmlns:a16="http://schemas.microsoft.com/office/drawing/2014/main" id="{6884F604-4620-484D-9A6C-D395BE784B65}"/>
+                <a16:creationId xmlns:a16="http://schemas.microsoft.com/office/drawing/2014/main" id="{3F801363-A6FC-408E-81C0-9E781EEA3E3E}"/>
               </a:ext>
             </a:extLst>
           </p:cNvPr>
@@ -10405,7 +10361,7 @@
           <p:cNvPr id="8" name="">
             <a:extLst xmlns:a="http://schemas.openxmlformats.org/drawingml/2006/main">
               <a:ext uri="{FF2B5EF4-FFF2-40B4-BE49-F238E27FC236}">
-                <a16:creationId xmlns:a16="http://schemas.microsoft.com/office/drawing/2014/main" id="{E8D4BB63-C1C4-42C3-A555-9055BBE5EB2B}"/>
+                <a16:creationId xmlns:a16="http://schemas.microsoft.com/office/drawing/2014/main" id="{A4E8B400-2D01-419B-90C2-E61D8F9DCB65}"/>
               </a:ext>
             </a:extLst>
           </p:cNvPr>
@@ -10462,7 +10418,7 @@
           <p:cNvPr id="9" name="">
             <a:extLst xmlns:a="http://schemas.openxmlformats.org/drawingml/2006/main">
               <a:ext uri="{FF2B5EF4-FFF2-40B4-BE49-F238E27FC236}">
-                <a16:creationId xmlns:a16="http://schemas.microsoft.com/office/drawing/2014/main" id="{F60ED57F-3969-4A7F-AF86-1AAC6C86DB68}"/>
+                <a16:creationId xmlns:a16="http://schemas.microsoft.com/office/drawing/2014/main" id="{8AB9928E-161E-4ECB-AF9B-14A602AAB5C1}"/>
               </a:ext>
             </a:extLst>
           </p:cNvPr>
@@ -10519,7 +10475,7 @@
           <p:cNvPr id="10" name="">
             <a:extLst xmlns:a="http://schemas.openxmlformats.org/drawingml/2006/main">
               <a:ext uri="{FF2B5EF4-FFF2-40B4-BE49-F238E27FC236}">
-                <a16:creationId xmlns:a16="http://schemas.microsoft.com/office/drawing/2014/main" id="{99CC448C-A01C-4A27-B434-BBFAF8DF3880}"/>
+                <a16:creationId xmlns:a16="http://schemas.microsoft.com/office/drawing/2014/main" id="{BDF9EB15-F4CF-4A0E-9199-03D2F20615D8}"/>
               </a:ext>
             </a:extLst>
           </p:cNvPr>
@@ -10576,7 +10532,7 @@
           <p:cNvPr id="11" name="">
             <a:extLst xmlns:a="http://schemas.openxmlformats.org/drawingml/2006/main">
               <a:ext uri="{FF2B5EF4-FFF2-40B4-BE49-F238E27FC236}">
-                <a16:creationId xmlns:a16="http://schemas.microsoft.com/office/drawing/2014/main" id="{21CA48EA-F921-4D0B-9E4C-5F55BC7230BC}"/>
+                <a16:creationId xmlns:a16="http://schemas.microsoft.com/office/drawing/2014/main" id="{AB530495-445B-4D96-8619-FD319876366B}"/>
               </a:ext>
             </a:extLst>
           </p:cNvPr>
@@ -10633,7 +10589,7 @@
           <p:cNvPr id="12" name="">
             <a:extLst xmlns:a="http://schemas.openxmlformats.org/drawingml/2006/main">
               <a:ext uri="{FF2B5EF4-FFF2-40B4-BE49-F238E27FC236}">
-                <a16:creationId xmlns:a16="http://schemas.microsoft.com/office/drawing/2014/main" id="{4EAF6218-D012-4B1E-B65E-637C2BBD9849}"/>
+                <a16:creationId xmlns:a16="http://schemas.microsoft.com/office/drawing/2014/main" id="{4F2D89CE-A2B4-4D33-84D2-9B6C4B8B612A}"/>
               </a:ext>
             </a:extLst>
           </p:cNvPr>
@@ -10690,7 +10646,7 @@
           <p:cNvPr id="13" name="">
             <a:extLst xmlns:a="http://schemas.openxmlformats.org/drawingml/2006/main">
               <a:ext uri="{FF2B5EF4-FFF2-40B4-BE49-F238E27FC236}">
-                <a16:creationId xmlns:a16="http://schemas.microsoft.com/office/drawing/2014/main" id="{7801DF10-1C05-4565-B505-8E5FD391D854}"/>
+                <a16:creationId xmlns:a16="http://schemas.microsoft.com/office/drawing/2014/main" id="{CE10EDA2-02C3-46F2-BCA7-323BC18C4610}"/>
               </a:ext>
             </a:extLst>
           </p:cNvPr>
@@ -10747,7 +10703,7 @@
           <p:cNvPr id="14" name="">
             <a:extLst xmlns:a="http://schemas.openxmlformats.org/drawingml/2006/main">
               <a:ext uri="{FF2B5EF4-FFF2-40B4-BE49-F238E27FC236}">
-                <a16:creationId xmlns:a16="http://schemas.microsoft.com/office/drawing/2014/main" id="{EED38E19-6F88-49C3-966F-A216BAE232F5}"/>
+                <a16:creationId xmlns:a16="http://schemas.microsoft.com/office/drawing/2014/main" id="{E40AFA05-865F-4C9D-A46A-228C271CEF62}"/>
               </a:ext>
             </a:extLst>
           </p:cNvPr>
@@ -10802,7 +10758,7 @@
     </p:spTree>
     <p:extLst>
       <p:ext uri="{BB962C8B-B14F-4D97-AF65-F5344CB8AC3E}">
-        <p14:creationId xmlns:p14="http://schemas.microsoft.com/office/powerpoint/2010/main" val="1855809145"/>
+        <p14:creationId xmlns:p14="http://schemas.microsoft.com/office/powerpoint/2010/main" val="1655985118"/>
       </p:ext>
     </p:extLst>
   </p:cSld>

--- a/teacher-slides.pptx
+++ b/teacher-slides.pptx
@@ -2,22 +2,22 @@
 <file path=ppt/presentation.xml><?xml version="1.0" encoding="utf-8"?>
 <p:presentation xmlns:p="http://schemas.openxmlformats.org/presentationml/2006/main">
   <p:sldMasterIdLst>
-    <p:sldMasterId xmlns:r="http://schemas.openxmlformats.org/officeDocument/2006/relationships" id="2147483648" r:id="Rb87840c133ba45a1"/>
+    <p:sldMasterId xmlns:r="http://schemas.openxmlformats.org/officeDocument/2006/relationships" id="2147483648" r:id="Rb55f726044294dd2"/>
   </p:sldMasterIdLst>
   <p:notesMasterIdLst>
-    <p:notesMasterId xmlns:r="http://schemas.openxmlformats.org/officeDocument/2006/relationships" r:id="R37cede2ce28f43a5"/>
+    <p:notesMasterId xmlns:r="http://schemas.openxmlformats.org/officeDocument/2006/relationships" r:id="R43d2231ef32b4834"/>
   </p:notesMasterIdLst>
   <p:sldIdLst>
-    <p:sldId xmlns:r="http://schemas.openxmlformats.org/officeDocument/2006/relationships" id="256" r:id="R599e0dd3894f4f37"/>
-    <p:sldId xmlns:r="http://schemas.openxmlformats.org/officeDocument/2006/relationships" id="257" r:id="R7203345ec06f410c"/>
-    <p:sldId xmlns:r="http://schemas.openxmlformats.org/officeDocument/2006/relationships" id="258" r:id="R037bb063dc234d8b"/>
-    <p:sldId xmlns:r="http://schemas.openxmlformats.org/officeDocument/2006/relationships" id="259" r:id="R215a9184593740b0"/>
-    <p:sldId xmlns:r="http://schemas.openxmlformats.org/officeDocument/2006/relationships" id="260" r:id="Rdfe5fd761c4d4fa1"/>
-    <p:sldId xmlns:r="http://schemas.openxmlformats.org/officeDocument/2006/relationships" id="261" r:id="R27224f16267c404b"/>
-    <p:sldId xmlns:r="http://schemas.openxmlformats.org/officeDocument/2006/relationships" id="262" r:id="R92b5fbdef10b4215"/>
-    <p:sldId xmlns:r="http://schemas.openxmlformats.org/officeDocument/2006/relationships" id="263" r:id="Rbcc7a505791d4fda"/>
-    <p:sldId xmlns:r="http://schemas.openxmlformats.org/officeDocument/2006/relationships" id="264" r:id="Rb253c47e278c44cf"/>
-    <p:sldId xmlns:r="http://schemas.openxmlformats.org/officeDocument/2006/relationships" id="265" r:id="Rea90da2126d24bfd"/>
+    <p:sldId xmlns:r="http://schemas.openxmlformats.org/officeDocument/2006/relationships" id="256" r:id="R9eeb596dd618401f"/>
+    <p:sldId xmlns:r="http://schemas.openxmlformats.org/officeDocument/2006/relationships" id="257" r:id="R6b17db8c0c084bd6"/>
+    <p:sldId xmlns:r="http://schemas.openxmlformats.org/officeDocument/2006/relationships" id="258" r:id="R5cc6cd62321b49eb"/>
+    <p:sldId xmlns:r="http://schemas.openxmlformats.org/officeDocument/2006/relationships" id="259" r:id="Rceaea2d0ddc84b88"/>
+    <p:sldId xmlns:r="http://schemas.openxmlformats.org/officeDocument/2006/relationships" id="260" r:id="Rf40f9121cd854655"/>
+    <p:sldId xmlns:r="http://schemas.openxmlformats.org/officeDocument/2006/relationships" id="261" r:id="R0fdc9f88cfe6451f"/>
+    <p:sldId xmlns:r="http://schemas.openxmlformats.org/officeDocument/2006/relationships" id="262" r:id="Rc503c2a19276432c"/>
+    <p:sldId xmlns:r="http://schemas.openxmlformats.org/officeDocument/2006/relationships" id="263" r:id="Rf7e0003446c8413d"/>
+    <p:sldId xmlns:r="http://schemas.openxmlformats.org/officeDocument/2006/relationships" id="264" r:id="Re5782a9b40f24c0c"/>
+    <p:sldId xmlns:r="http://schemas.openxmlformats.org/officeDocument/2006/relationships" id="265" r:id="R8a382e59d5fa4da3"/>
   </p:sldIdLst>
   <p:sldSz cx="12192000" cy="6858000"/>
   <p:notesSz cx="6858000" cy="9144000"/>
@@ -941,7 +941,7 @@
           <a:lstStyle xmlns:a="http://schemas.openxmlformats.org/drawingml/2006/main"/>
           <a:p xmlns:a="http://schemas.openxmlformats.org/drawingml/2006/main">
             <a:r>
-              <a:t>Start Step 2. Students keep their selected dataset and click or tap the graph. Ask them to predict first, compare m and c, and use Undo or Reset between experiments. No coordinate-entry controls appear on the page.</a:t>
+              <a:t>Start Step 2. Students keep their selected dataset and click or tap the graph. Ask them to predict first, compare m and c, and use Undo or Reset between experiments. Have students undo after each trial before comparing a different new point.</a:t>
             </a:r>
           </a:p>
         </p:txBody>
@@ -1081,7 +1081,7 @@
           <a:lstStyle xmlns:a="http://schemas.openxmlformats.org/drawingml/2006/main"/>
           <a:p xmlns:a="http://schemas.openxmlformats.org/drawingml/2006/main">
             <a:r>
-              <a:t>After written predictions. The fitted line is y=2x+50. m is about 2 marks per extra study hour in this model. c is the estimated score at zero hours. 3.5 hours is within the observed 0–6-hour range. 10 hours is outside. At 24 hours the model gives 98 marks, but this remains far outside the observed range and cannot guarantee a result. Discuss how other factors influence scores.</a:t>
+              <a:t>After written predictions. The fitted line is y=2x+50. m is about 2 marks per extra study hour in this model. c is the estimated score at zero hours. 3.5 hours is within the observed 0–6-hour range. 10 hours is outside. At 24 hours the model gives 98 marks, but this remains far outside the observed range and cannot guarantee a result. Discuss how other factors influence scores. Say: 這些數據不能證明，多溫習一小時就會令成績增加兩分。 These data do not show that an extra study hour causes a two-mark increase.</a:t>
             </a:r>
           </a:p>
         </p:txBody>
@@ -1149,7 +1149,7 @@
   </p:cSld>
   <p:clrMap bg1="lt1" tx1="dk1" bg2="lt2" tx2="dk2" accent1="accent1" accent2="accent2" accent3="accent3" accent4="accent4" accent5="accent5" accent6="accent6" hlink="hlink" folHlink="folHlink"/>
   <p:sldLayoutIdLst>
-    <p:sldLayoutId xmlns:r="http://schemas.openxmlformats.org/officeDocument/2006/relationships" id="2147483649" r:id="R2f9807e8ffac4deb"/>
+    <p:sldLayoutId xmlns:r="http://schemas.openxmlformats.org/officeDocument/2006/relationships" id="2147483649" r:id="Rf63da96829ba4fa7"/>
   </p:sldLayoutIdLst>
   <p:txStyles>
     <p:titleStyle>
@@ -4158,7 +4158,7 @@
           <p:cNvPr id="13" name="">
             <a:extLst xmlns:a="http://schemas.openxmlformats.org/drawingml/2006/main">
               <a:ext uri="{FF2B5EF4-FFF2-40B4-BE49-F238E27FC236}">
-                <a16:creationId xmlns:a16="http://schemas.microsoft.com/office/drawing/2014/main" id="{5897EECA-374A-4A31-97DF-AF32DC266E8D}"/>
+                <a16:creationId xmlns:a16="http://schemas.microsoft.com/office/drawing/2014/main" id="{FBC4E45C-020A-4461-96AC-B78784899A1E}"/>
               </a:ext>
             </a:extLst>
           </p:cNvPr>
@@ -4215,7 +4215,7 @@
           <p:cNvPr id="2" name="">
             <a:extLst xmlns:a="http://schemas.openxmlformats.org/drawingml/2006/main">
               <a:ext uri="{FF2B5EF4-FFF2-40B4-BE49-F238E27FC236}">
-                <a16:creationId xmlns:a16="http://schemas.microsoft.com/office/drawing/2014/main" id="{06CDE012-56F7-4434-8E15-4E32392C9FE3}"/>
+                <a16:creationId xmlns:a16="http://schemas.microsoft.com/office/drawing/2014/main" id="{74E28F95-1A3A-4579-B32D-E67465FE6A00}"/>
               </a:ext>
             </a:extLst>
           </p:cNvPr>
@@ -4272,7 +4272,7 @@
           <p:cNvPr id="3" name="">
             <a:extLst xmlns:a="http://schemas.openxmlformats.org/drawingml/2006/main">
               <a:ext uri="{FF2B5EF4-FFF2-40B4-BE49-F238E27FC236}">
-                <a16:creationId xmlns:a16="http://schemas.microsoft.com/office/drawing/2014/main" id="{C21323CE-8927-4D86-91C9-4764C7BC7608}"/>
+                <a16:creationId xmlns:a16="http://schemas.microsoft.com/office/drawing/2014/main" id="{D4371079-CB6A-4559-88A0-C3818DC65A87}"/>
               </a:ext>
             </a:extLst>
           </p:cNvPr>
@@ -4329,7 +4329,7 @@
           <p:cNvPr id="4" name="">
             <a:extLst xmlns:a="http://schemas.openxmlformats.org/drawingml/2006/main">
               <a:ext uri="{FF2B5EF4-FFF2-40B4-BE49-F238E27FC236}">
-                <a16:creationId xmlns:a16="http://schemas.microsoft.com/office/drawing/2014/main" id="{518065A3-512F-4F87-9BEF-FB50E7D5D714}"/>
+                <a16:creationId xmlns:a16="http://schemas.microsoft.com/office/drawing/2014/main" id="{9EA19486-F92C-4D38-A76D-8281F4348645}"/>
               </a:ext>
             </a:extLst>
           </p:cNvPr>
@@ -4386,7 +4386,7 @@
           <p:cNvPr id="5" name="">
             <a:extLst xmlns:a="http://schemas.openxmlformats.org/drawingml/2006/main">
               <a:ext uri="{FF2B5EF4-FFF2-40B4-BE49-F238E27FC236}">
-                <a16:creationId xmlns:a16="http://schemas.microsoft.com/office/drawing/2014/main" id="{760AF1C8-CCC0-4F68-A13A-0D87F42B82A8}"/>
+                <a16:creationId xmlns:a16="http://schemas.microsoft.com/office/drawing/2014/main" id="{8AA4C5CF-955B-4C20-A6E1-1AB382E864A3}"/>
               </a:ext>
             </a:extLst>
           </p:cNvPr>
@@ -4443,7 +4443,7 @@
           <p:cNvPr id="6" name="">
             <a:extLst xmlns:a="http://schemas.openxmlformats.org/drawingml/2006/main">
               <a:ext uri="{FF2B5EF4-FFF2-40B4-BE49-F238E27FC236}">
-                <a16:creationId xmlns:a16="http://schemas.microsoft.com/office/drawing/2014/main" id="{CBE5DE0A-14CF-4FFA-AA41-10FD3131BEC4}"/>
+                <a16:creationId xmlns:a16="http://schemas.microsoft.com/office/drawing/2014/main" id="{434EEE81-537A-4A8B-A208-FF508DA1A767}"/>
               </a:ext>
             </a:extLst>
           </p:cNvPr>
@@ -4500,7 +4500,7 @@
           <p:cNvPr id="7" name="">
             <a:extLst xmlns:a="http://schemas.openxmlformats.org/drawingml/2006/main">
               <a:ext uri="{FF2B5EF4-FFF2-40B4-BE49-F238E27FC236}">
-                <a16:creationId xmlns:a16="http://schemas.microsoft.com/office/drawing/2014/main" id="{AFE7DF78-4739-4D51-B4AE-B1C94D25A009}"/>
+                <a16:creationId xmlns:a16="http://schemas.microsoft.com/office/drawing/2014/main" id="{1A9E2CB2-3A05-4051-93E2-27F2E5128AB3}"/>
               </a:ext>
             </a:extLst>
           </p:cNvPr>
@@ -4557,7 +4557,7 @@
           <p:cNvPr id="8" name="">
             <a:extLst xmlns:a="http://schemas.openxmlformats.org/drawingml/2006/main">
               <a:ext uri="{FF2B5EF4-FFF2-40B4-BE49-F238E27FC236}">
-                <a16:creationId xmlns:a16="http://schemas.microsoft.com/office/drawing/2014/main" id="{7B617BEF-41DA-4182-BB61-56C0770B6029}"/>
+                <a16:creationId xmlns:a16="http://schemas.microsoft.com/office/drawing/2014/main" id="{E8A90252-DBEB-4D11-8130-8E9C850931B6}"/>
               </a:ext>
             </a:extLst>
           </p:cNvPr>
@@ -4614,7 +4614,7 @@
           <p:cNvPr id="9" name="">
             <a:extLst xmlns:a="http://schemas.openxmlformats.org/drawingml/2006/main">
               <a:ext uri="{FF2B5EF4-FFF2-40B4-BE49-F238E27FC236}">
-                <a16:creationId xmlns:a16="http://schemas.microsoft.com/office/drawing/2014/main" id="{F16C0329-8039-4434-AA27-DBBA3BEC7C43}"/>
+                <a16:creationId xmlns:a16="http://schemas.microsoft.com/office/drawing/2014/main" id="{F6E015F5-A9A5-45BB-98D4-A4B9057772C4}"/>
               </a:ext>
             </a:extLst>
           </p:cNvPr>
@@ -4671,7 +4671,7 @@
           <p:cNvPr id="10" name="">
             <a:extLst xmlns:a="http://schemas.openxmlformats.org/drawingml/2006/main">
               <a:ext uri="{FF2B5EF4-FFF2-40B4-BE49-F238E27FC236}">
-                <a16:creationId xmlns:a16="http://schemas.microsoft.com/office/drawing/2014/main" id="{FBDC2F93-ECDB-419C-B1F6-99ADF33B6E51}"/>
+                <a16:creationId xmlns:a16="http://schemas.microsoft.com/office/drawing/2014/main" id="{F8BA13E2-F6FE-4C65-B6AC-5F6FFCC1BED1}"/>
               </a:ext>
             </a:extLst>
           </p:cNvPr>
@@ -4728,7 +4728,7 @@
           <p:cNvPr id="11" name="">
             <a:extLst xmlns:a="http://schemas.openxmlformats.org/drawingml/2006/main">
               <a:ext uri="{FF2B5EF4-FFF2-40B4-BE49-F238E27FC236}">
-                <a16:creationId xmlns:a16="http://schemas.microsoft.com/office/drawing/2014/main" id="{C1DD1E23-A2F6-48BE-94BF-C841C23FA752}"/>
+                <a16:creationId xmlns:a16="http://schemas.microsoft.com/office/drawing/2014/main" id="{4CD84A27-CAED-43B5-9E5E-A1171C1E7785}"/>
               </a:ext>
             </a:extLst>
           </p:cNvPr>
@@ -4785,7 +4785,7 @@
           <p:cNvPr id="12" name="">
             <a:extLst xmlns:a="http://schemas.openxmlformats.org/drawingml/2006/main">
               <a:ext uri="{FF2B5EF4-FFF2-40B4-BE49-F238E27FC236}">
-                <a16:creationId xmlns:a16="http://schemas.microsoft.com/office/drawing/2014/main" id="{3FBAC7DF-4AF5-4CED-A840-3BC99036F2D0}"/>
+                <a16:creationId xmlns:a16="http://schemas.microsoft.com/office/drawing/2014/main" id="{80540ADD-05D3-4818-925B-7ECD4EA372A6}"/>
               </a:ext>
             </a:extLst>
           </p:cNvPr>
@@ -4840,7 +4840,7 @@
     </p:spTree>
     <p:extLst>
       <p:ext uri="{BB962C8B-B14F-4D97-AF65-F5344CB8AC3E}">
-        <p14:creationId xmlns:p14="http://schemas.microsoft.com/office/powerpoint/2010/main" val="1269116003"/>
+        <p14:creationId xmlns:p14="http://schemas.microsoft.com/office/powerpoint/2010/main" val="970504407"/>
       </p:ext>
     </p:extLst>
   </p:cSld>
@@ -4871,7 +4871,7 @@
           <p:cNvPr id="11" name="">
             <a:extLst xmlns:a="http://schemas.openxmlformats.org/drawingml/2006/main">
               <a:ext uri="{FF2B5EF4-FFF2-40B4-BE49-F238E27FC236}">
-                <a16:creationId xmlns:a16="http://schemas.microsoft.com/office/drawing/2014/main" id="{A2996034-6E87-4A92-980D-D429D9BE7741}"/>
+                <a16:creationId xmlns:a16="http://schemas.microsoft.com/office/drawing/2014/main" id="{F42AF76C-948D-4064-9F0B-9F70E4B71AE0}"/>
               </a:ext>
             </a:extLst>
           </p:cNvPr>
@@ -4928,7 +4928,7 @@
           <p:cNvPr id="2" name="">
             <a:extLst xmlns:a="http://schemas.openxmlformats.org/drawingml/2006/main">
               <a:ext uri="{FF2B5EF4-FFF2-40B4-BE49-F238E27FC236}">
-                <a16:creationId xmlns:a16="http://schemas.microsoft.com/office/drawing/2014/main" id="{E7E86C5B-48A0-4C63-857B-8C6016F741F5}"/>
+                <a16:creationId xmlns:a16="http://schemas.microsoft.com/office/drawing/2014/main" id="{112E62E0-6B13-4A48-AA7E-66B362168E3B}"/>
               </a:ext>
             </a:extLst>
           </p:cNvPr>
@@ -4985,7 +4985,7 @@
           <p:cNvPr id="3" name="">
             <a:extLst xmlns:a="http://schemas.openxmlformats.org/drawingml/2006/main">
               <a:ext uri="{FF2B5EF4-FFF2-40B4-BE49-F238E27FC236}">
-                <a16:creationId xmlns:a16="http://schemas.microsoft.com/office/drawing/2014/main" id="{61FFC652-1DD2-4426-B9A9-8722389E8576}"/>
+                <a16:creationId xmlns:a16="http://schemas.microsoft.com/office/drawing/2014/main" id="{63AA8F74-4054-4A2E-AFD9-DC4DEE193903}"/>
               </a:ext>
             </a:extLst>
           </p:cNvPr>
@@ -5042,7 +5042,7 @@
           <p:cNvPr id="4" name="">
             <a:extLst xmlns:a="http://schemas.openxmlformats.org/drawingml/2006/main">
               <a:ext uri="{FF2B5EF4-FFF2-40B4-BE49-F238E27FC236}">
-                <a16:creationId xmlns:a16="http://schemas.microsoft.com/office/drawing/2014/main" id="{3D404ADD-F5B9-4E4C-8C1F-E4B019DD2B1C}"/>
+                <a16:creationId xmlns:a16="http://schemas.microsoft.com/office/drawing/2014/main" id="{9E47C040-B861-4AF3-8A96-DD3D13A76116}"/>
               </a:ext>
             </a:extLst>
           </p:cNvPr>
@@ -5099,7 +5099,7 @@
           <p:cNvPr id="5" name="">
             <a:extLst xmlns:a="http://schemas.openxmlformats.org/drawingml/2006/main">
               <a:ext uri="{FF2B5EF4-FFF2-40B4-BE49-F238E27FC236}">
-                <a16:creationId xmlns:a16="http://schemas.microsoft.com/office/drawing/2014/main" id="{8A8690FC-1806-4FB4-9154-CADC0AC16765}"/>
+                <a16:creationId xmlns:a16="http://schemas.microsoft.com/office/drawing/2014/main" id="{FFFC84D4-7520-41A9-84AD-73492F0291A6}"/>
               </a:ext>
             </a:extLst>
           </p:cNvPr>
@@ -5156,7 +5156,7 @@
           <p:cNvPr id="6" name="">
             <a:extLst xmlns:a="http://schemas.openxmlformats.org/drawingml/2006/main">
               <a:ext uri="{FF2B5EF4-FFF2-40B4-BE49-F238E27FC236}">
-                <a16:creationId xmlns:a16="http://schemas.microsoft.com/office/drawing/2014/main" id="{CD6A190E-3374-4EC6-895F-5EA0FC2773B3}"/>
+                <a16:creationId xmlns:a16="http://schemas.microsoft.com/office/drawing/2014/main" id="{048CA853-7080-4F2F-836C-2FD1F0E135F5}"/>
               </a:ext>
             </a:extLst>
           </p:cNvPr>
@@ -5213,7 +5213,7 @@
           <p:cNvPr id="7" name="">
             <a:extLst xmlns:a="http://schemas.openxmlformats.org/drawingml/2006/main">
               <a:ext uri="{FF2B5EF4-FFF2-40B4-BE49-F238E27FC236}">
-                <a16:creationId xmlns:a16="http://schemas.microsoft.com/office/drawing/2014/main" id="{EEDB9BF3-8760-4993-804A-2A115DB43883}"/>
+                <a16:creationId xmlns:a16="http://schemas.microsoft.com/office/drawing/2014/main" id="{B510A1B2-650F-483A-8F5D-242B02334DD6}"/>
               </a:ext>
             </a:extLst>
           </p:cNvPr>
@@ -5270,7 +5270,7 @@
           <p:cNvPr id="8" name="">
             <a:extLst xmlns:a="http://schemas.openxmlformats.org/drawingml/2006/main">
               <a:ext uri="{FF2B5EF4-FFF2-40B4-BE49-F238E27FC236}">
-                <a16:creationId xmlns:a16="http://schemas.microsoft.com/office/drawing/2014/main" id="{0864FC08-762C-4452-BB39-1E9AEF436EB7}"/>
+                <a16:creationId xmlns:a16="http://schemas.microsoft.com/office/drawing/2014/main" id="{A1FACA54-38B6-4A99-9760-AF8FC0D3EB1F}"/>
               </a:ext>
             </a:extLst>
           </p:cNvPr>
@@ -5327,7 +5327,7 @@
           <p:cNvPr id="9" name="">
             <a:extLst xmlns:a="http://schemas.openxmlformats.org/drawingml/2006/main">
               <a:ext uri="{FF2B5EF4-FFF2-40B4-BE49-F238E27FC236}">
-                <a16:creationId xmlns:a16="http://schemas.microsoft.com/office/drawing/2014/main" id="{22B05EFB-B38B-4851-97C4-264A4914485A}"/>
+                <a16:creationId xmlns:a16="http://schemas.microsoft.com/office/drawing/2014/main" id="{397AA35F-16E8-4434-A539-58ED4DE5724D}"/>
               </a:ext>
             </a:extLst>
           </p:cNvPr>
@@ -5384,7 +5384,7 @@
           <p:cNvPr id="10" name="">
             <a:extLst xmlns:a="http://schemas.openxmlformats.org/drawingml/2006/main">
               <a:ext uri="{FF2B5EF4-FFF2-40B4-BE49-F238E27FC236}">
-                <a16:creationId xmlns:a16="http://schemas.microsoft.com/office/drawing/2014/main" id="{D3558A86-051B-4B28-B8FA-9C5F58C1CE10}"/>
+                <a16:creationId xmlns:a16="http://schemas.microsoft.com/office/drawing/2014/main" id="{8059C805-D4A2-4204-8179-26B758D77970}"/>
               </a:ext>
             </a:extLst>
           </p:cNvPr>
@@ -5439,7 +5439,7 @@
     </p:spTree>
     <p:extLst>
       <p:ext uri="{BB962C8B-B14F-4D97-AF65-F5344CB8AC3E}">
-        <p14:creationId xmlns:p14="http://schemas.microsoft.com/office/powerpoint/2010/main" val="1376900396"/>
+        <p14:creationId xmlns:p14="http://schemas.microsoft.com/office/powerpoint/2010/main" val="1974640751"/>
       </p:ext>
     </p:extLst>
   </p:cSld>
@@ -5470,7 +5470,7 @@
           <p:cNvPr id="12" name="">
             <a:extLst xmlns:a="http://schemas.openxmlformats.org/drawingml/2006/main">
               <a:ext uri="{FF2B5EF4-FFF2-40B4-BE49-F238E27FC236}">
-                <a16:creationId xmlns:a16="http://schemas.microsoft.com/office/drawing/2014/main" id="{A17A74F3-8C44-419A-B833-B8BEF9101349}"/>
+                <a16:creationId xmlns:a16="http://schemas.microsoft.com/office/drawing/2014/main" id="{D1524F16-BA38-46E3-BD74-0403C2648D01}"/>
               </a:ext>
             </a:extLst>
           </p:cNvPr>
@@ -5527,7 +5527,7 @@
           <p:cNvPr id="2" name="">
             <a:extLst xmlns:a="http://schemas.openxmlformats.org/drawingml/2006/main">
               <a:ext uri="{FF2B5EF4-FFF2-40B4-BE49-F238E27FC236}">
-                <a16:creationId xmlns:a16="http://schemas.microsoft.com/office/drawing/2014/main" id="{C46085C3-9D0D-40DE-ACF0-3F9D713BD4C7}"/>
+                <a16:creationId xmlns:a16="http://schemas.microsoft.com/office/drawing/2014/main" id="{D44CE3A9-DE42-4107-B67C-BAA709FBD139}"/>
               </a:ext>
             </a:extLst>
           </p:cNvPr>
@@ -5584,7 +5584,7 @@
           <p:cNvPr id="3" name="">
             <a:extLst xmlns:a="http://schemas.openxmlformats.org/drawingml/2006/main">
               <a:ext uri="{FF2B5EF4-FFF2-40B4-BE49-F238E27FC236}">
-                <a16:creationId xmlns:a16="http://schemas.microsoft.com/office/drawing/2014/main" id="{E9FFF018-8215-45BD-A19B-1C20A94BC78C}"/>
+                <a16:creationId xmlns:a16="http://schemas.microsoft.com/office/drawing/2014/main" id="{9CE0D380-CEC8-4A10-B3A6-EF7C0AEAC6FB}"/>
               </a:ext>
             </a:extLst>
           </p:cNvPr>
@@ -5641,7 +5641,7 @@
           <p:cNvPr id="4" name="">
             <a:extLst xmlns:a="http://schemas.openxmlformats.org/drawingml/2006/main">
               <a:ext uri="{FF2B5EF4-FFF2-40B4-BE49-F238E27FC236}">
-                <a16:creationId xmlns:a16="http://schemas.microsoft.com/office/drawing/2014/main" id="{EAF490FD-8705-429C-97B7-400D92F26008}"/>
+                <a16:creationId xmlns:a16="http://schemas.microsoft.com/office/drawing/2014/main" id="{0E67F8C8-3FEE-4A9B-A0B2-2A80D6B29C93}"/>
               </a:ext>
             </a:extLst>
           </p:cNvPr>
@@ -5698,7 +5698,7 @@
           <p:cNvPr id="5" name="">
             <a:extLst xmlns:a="http://schemas.openxmlformats.org/drawingml/2006/main">
               <a:ext uri="{FF2B5EF4-FFF2-40B4-BE49-F238E27FC236}">
-                <a16:creationId xmlns:a16="http://schemas.microsoft.com/office/drawing/2014/main" id="{898B3100-EDE1-4804-9E96-D905D48D8B9F}"/>
+                <a16:creationId xmlns:a16="http://schemas.microsoft.com/office/drawing/2014/main" id="{BCF90E76-0CE9-450C-A68E-ABFAECFFB6A8}"/>
               </a:ext>
             </a:extLst>
           </p:cNvPr>
@@ -5755,7 +5755,7 @@
           <p:cNvPr id="6" name="">
             <a:extLst xmlns:a="http://schemas.openxmlformats.org/drawingml/2006/main">
               <a:ext uri="{FF2B5EF4-FFF2-40B4-BE49-F238E27FC236}">
-                <a16:creationId xmlns:a16="http://schemas.microsoft.com/office/drawing/2014/main" id="{6DF407AB-CF66-4656-B07C-D787F33E22B9}"/>
+                <a16:creationId xmlns:a16="http://schemas.microsoft.com/office/drawing/2014/main" id="{E0DBE46D-D35C-4AA4-B265-96AAA4D92730}"/>
               </a:ext>
             </a:extLst>
           </p:cNvPr>
@@ -5812,7 +5812,7 @@
           <p:cNvPr id="7" name="">
             <a:extLst xmlns:a="http://schemas.openxmlformats.org/drawingml/2006/main">
               <a:ext uri="{FF2B5EF4-FFF2-40B4-BE49-F238E27FC236}">
-                <a16:creationId xmlns:a16="http://schemas.microsoft.com/office/drawing/2014/main" id="{299F87C8-E620-4313-9A19-9C3B37562809}"/>
+                <a16:creationId xmlns:a16="http://schemas.microsoft.com/office/drawing/2014/main" id="{ADCA5E8C-6F7B-4DC0-95DC-7194A380B171}"/>
               </a:ext>
             </a:extLst>
           </p:cNvPr>
@@ -5869,7 +5869,7 @@
           <p:cNvPr id="8" name="">
             <a:extLst xmlns:a="http://schemas.openxmlformats.org/drawingml/2006/main">
               <a:ext uri="{FF2B5EF4-FFF2-40B4-BE49-F238E27FC236}">
-                <a16:creationId xmlns:a16="http://schemas.microsoft.com/office/drawing/2014/main" id="{25A0AA19-0E47-4968-9656-0D23ADB8885A}"/>
+                <a16:creationId xmlns:a16="http://schemas.microsoft.com/office/drawing/2014/main" id="{1F754ABE-5062-4486-9465-88BD46185AB6}"/>
               </a:ext>
             </a:extLst>
           </p:cNvPr>
@@ -5926,7 +5926,7 @@
           <p:cNvPr id="9" name="">
             <a:extLst xmlns:a="http://schemas.openxmlformats.org/drawingml/2006/main">
               <a:ext uri="{FF2B5EF4-FFF2-40B4-BE49-F238E27FC236}">
-                <a16:creationId xmlns:a16="http://schemas.microsoft.com/office/drawing/2014/main" id="{99C40FA6-432B-406D-BDD5-DFFB74E64694}"/>
+                <a16:creationId xmlns:a16="http://schemas.microsoft.com/office/drawing/2014/main" id="{65183C44-CC26-43EB-AFDA-974E7A5A484C}"/>
               </a:ext>
             </a:extLst>
           </p:cNvPr>
@@ -5983,7 +5983,7 @@
           <p:cNvPr id="10" name="">
             <a:extLst xmlns:a="http://schemas.openxmlformats.org/drawingml/2006/main">
               <a:ext uri="{FF2B5EF4-FFF2-40B4-BE49-F238E27FC236}">
-                <a16:creationId xmlns:a16="http://schemas.microsoft.com/office/drawing/2014/main" id="{CC941FDD-62A6-44DB-BBDA-A6080A4105B5}"/>
+                <a16:creationId xmlns:a16="http://schemas.microsoft.com/office/drawing/2014/main" id="{97DDCEE0-6601-43D8-8B0D-985D2166ABC5}"/>
               </a:ext>
             </a:extLst>
           </p:cNvPr>
@@ -6047,14 +6047,14 @@
         </p:xfrm>
         <a:graphic xmlns:a="http://schemas.openxmlformats.org/drawingml/2006/main">
           <a:graphicData uri="http://schemas.openxmlformats.org/drawingml/2006/chart">
-            <c:chart xmlns:r="http://schemas.openxmlformats.org/officeDocument/2006/relationships" xmlns:c="http://schemas.openxmlformats.org/drawingml/2006/chart" r:id="R437b7772241a48de"/>
+            <c:chart xmlns:r="http://schemas.openxmlformats.org/officeDocument/2006/relationships" xmlns:c="http://schemas.openxmlformats.org/drawingml/2006/chart" r:id="Rd081612c49e146ad"/>
           </a:graphicData>
         </a:graphic>
       </p:graphicFrame>
     </p:spTree>
     <p:extLst>
       <p:ext uri="{BB962C8B-B14F-4D97-AF65-F5344CB8AC3E}">
-        <p14:creationId xmlns:p14="http://schemas.microsoft.com/office/powerpoint/2010/main" val="2061989515"/>
+        <p14:creationId xmlns:p14="http://schemas.microsoft.com/office/powerpoint/2010/main" val="756316432"/>
       </p:ext>
     </p:extLst>
   </p:cSld>
@@ -6085,7 +6085,7 @@
           <p:cNvPr id="12" name="">
             <a:extLst xmlns:a="http://schemas.openxmlformats.org/drawingml/2006/main">
               <a:ext uri="{FF2B5EF4-FFF2-40B4-BE49-F238E27FC236}">
-                <a16:creationId xmlns:a16="http://schemas.microsoft.com/office/drawing/2014/main" id="{79B901D0-453F-46CB-9B15-DCA6100DCEF9}"/>
+                <a16:creationId xmlns:a16="http://schemas.microsoft.com/office/drawing/2014/main" id="{1FBD8026-2590-4828-8CAA-E5DA4C88BE03}"/>
               </a:ext>
             </a:extLst>
           </p:cNvPr>
@@ -6142,7 +6142,7 @@
           <p:cNvPr id="2" name="">
             <a:extLst xmlns:a="http://schemas.openxmlformats.org/drawingml/2006/main">
               <a:ext uri="{FF2B5EF4-FFF2-40B4-BE49-F238E27FC236}">
-                <a16:creationId xmlns:a16="http://schemas.microsoft.com/office/drawing/2014/main" id="{DFBB052E-26FB-4C39-9C62-0C6EA74AA046}"/>
+                <a16:creationId xmlns:a16="http://schemas.microsoft.com/office/drawing/2014/main" id="{EC8AA16F-55D6-49F6-A9B7-ED1443655EA5}"/>
               </a:ext>
             </a:extLst>
           </p:cNvPr>
@@ -6199,7 +6199,7 @@
           <p:cNvPr id="3" name="">
             <a:extLst xmlns:a="http://schemas.openxmlformats.org/drawingml/2006/main">
               <a:ext uri="{FF2B5EF4-FFF2-40B4-BE49-F238E27FC236}">
-                <a16:creationId xmlns:a16="http://schemas.microsoft.com/office/drawing/2014/main" id="{E1E5148F-40B9-46A4-9C57-953EE7F7D57C}"/>
+                <a16:creationId xmlns:a16="http://schemas.microsoft.com/office/drawing/2014/main" id="{BD81314F-28EC-480C-B0BF-9DF681C13870}"/>
               </a:ext>
             </a:extLst>
           </p:cNvPr>
@@ -6256,7 +6256,7 @@
           <p:cNvPr id="4" name="">
             <a:extLst xmlns:a="http://schemas.openxmlformats.org/drawingml/2006/main">
               <a:ext uri="{FF2B5EF4-FFF2-40B4-BE49-F238E27FC236}">
-                <a16:creationId xmlns:a16="http://schemas.microsoft.com/office/drawing/2014/main" id="{ED03F71F-EA84-4EC6-B679-57B5E31888C8}"/>
+                <a16:creationId xmlns:a16="http://schemas.microsoft.com/office/drawing/2014/main" id="{45A90282-230E-448D-85D6-211AEFF61C1D}"/>
               </a:ext>
             </a:extLst>
           </p:cNvPr>
@@ -6313,7 +6313,7 @@
           <p:cNvPr id="5" name="">
             <a:extLst xmlns:a="http://schemas.openxmlformats.org/drawingml/2006/main">
               <a:ext uri="{FF2B5EF4-FFF2-40B4-BE49-F238E27FC236}">
-                <a16:creationId xmlns:a16="http://schemas.microsoft.com/office/drawing/2014/main" id="{B36ECCA4-1B06-40E2-9D3D-564DC794497A}"/>
+                <a16:creationId xmlns:a16="http://schemas.microsoft.com/office/drawing/2014/main" id="{E2FA75E4-E97A-473C-A133-D5D69993A43A}"/>
               </a:ext>
             </a:extLst>
           </p:cNvPr>
@@ -6370,7 +6370,7 @@
           <p:cNvPr id="6" name="">
             <a:extLst xmlns:a="http://schemas.openxmlformats.org/drawingml/2006/main">
               <a:ext uri="{FF2B5EF4-FFF2-40B4-BE49-F238E27FC236}">
-                <a16:creationId xmlns:a16="http://schemas.microsoft.com/office/drawing/2014/main" id="{CEA38183-64BA-4FD2-A22B-F26D39F483BA}"/>
+                <a16:creationId xmlns:a16="http://schemas.microsoft.com/office/drawing/2014/main" id="{C0E548CB-7761-4BA4-A6E0-8E2C84CCEA48}"/>
               </a:ext>
             </a:extLst>
           </p:cNvPr>
@@ -6427,7 +6427,7 @@
           <p:cNvPr id="7" name="">
             <a:extLst xmlns:a="http://schemas.openxmlformats.org/drawingml/2006/main">
               <a:ext uri="{FF2B5EF4-FFF2-40B4-BE49-F238E27FC236}">
-                <a16:creationId xmlns:a16="http://schemas.microsoft.com/office/drawing/2014/main" id="{9246E134-75B8-4215-9C33-89111C0E685E}"/>
+                <a16:creationId xmlns:a16="http://schemas.microsoft.com/office/drawing/2014/main" id="{BC2F1513-900F-4FD3-813D-7414882D6098}"/>
               </a:ext>
             </a:extLst>
           </p:cNvPr>
@@ -6484,7 +6484,7 @@
           <p:cNvPr id="8" name="">
             <a:extLst xmlns:a="http://schemas.openxmlformats.org/drawingml/2006/main">
               <a:ext uri="{FF2B5EF4-FFF2-40B4-BE49-F238E27FC236}">
-                <a16:creationId xmlns:a16="http://schemas.microsoft.com/office/drawing/2014/main" id="{E13069B7-CB06-4EB7-B3FC-2A395E6B5ED5}"/>
+                <a16:creationId xmlns:a16="http://schemas.microsoft.com/office/drawing/2014/main" id="{2B667EB9-CCA1-4F60-A705-A484C0F3BFD0}"/>
               </a:ext>
             </a:extLst>
           </p:cNvPr>
@@ -6541,7 +6541,7 @@
           <p:cNvPr id="9" name="">
             <a:extLst xmlns:a="http://schemas.openxmlformats.org/drawingml/2006/main">
               <a:ext uri="{FF2B5EF4-FFF2-40B4-BE49-F238E27FC236}">
-                <a16:creationId xmlns:a16="http://schemas.microsoft.com/office/drawing/2014/main" id="{83933070-E104-49E7-A1B4-5276BAC2B2BE}"/>
+                <a16:creationId xmlns:a16="http://schemas.microsoft.com/office/drawing/2014/main" id="{6EFE1752-D90B-46FD-9401-D7155DBF55B5}"/>
               </a:ext>
             </a:extLst>
           </p:cNvPr>
@@ -6598,7 +6598,7 @@
           <p:cNvPr id="10" name="">
             <a:extLst xmlns:a="http://schemas.openxmlformats.org/drawingml/2006/main">
               <a:ext uri="{FF2B5EF4-FFF2-40B4-BE49-F238E27FC236}">
-                <a16:creationId xmlns:a16="http://schemas.microsoft.com/office/drawing/2014/main" id="{4A1B3915-2040-4C81-BDB2-6EA919897D4E}"/>
+                <a16:creationId xmlns:a16="http://schemas.microsoft.com/office/drawing/2014/main" id="{03517748-4B63-453C-A15A-A7B8C8729DBA}"/>
               </a:ext>
             </a:extLst>
           </p:cNvPr>
@@ -6662,14 +6662,14 @@
         </p:xfrm>
         <a:graphic xmlns:a="http://schemas.openxmlformats.org/drawingml/2006/main">
           <a:graphicData uri="http://schemas.openxmlformats.org/drawingml/2006/chart">
-            <c:chart xmlns:r="http://schemas.openxmlformats.org/officeDocument/2006/relationships" xmlns:c="http://schemas.openxmlformats.org/drawingml/2006/chart" r:id="R134249e8bd05490e"/>
+            <c:chart xmlns:r="http://schemas.openxmlformats.org/officeDocument/2006/relationships" xmlns:c="http://schemas.openxmlformats.org/drawingml/2006/chart" r:id="Rdf89ecd57f694c0a"/>
           </a:graphicData>
         </a:graphic>
       </p:graphicFrame>
     </p:spTree>
     <p:extLst>
       <p:ext uri="{BB962C8B-B14F-4D97-AF65-F5344CB8AC3E}">
-        <p14:creationId xmlns:p14="http://schemas.microsoft.com/office/powerpoint/2010/main" val="1305999608"/>
+        <p14:creationId xmlns:p14="http://schemas.microsoft.com/office/powerpoint/2010/main" val="1559652239"/>
       </p:ext>
     </p:extLst>
   </p:cSld>
@@ -6700,7 +6700,7 @@
           <p:cNvPr id="16" name="">
             <a:extLst xmlns:a="http://schemas.openxmlformats.org/drawingml/2006/main">
               <a:ext uri="{FF2B5EF4-FFF2-40B4-BE49-F238E27FC236}">
-                <a16:creationId xmlns:a16="http://schemas.microsoft.com/office/drawing/2014/main" id="{2715EF15-8AF5-429A-BFC6-4B6E399CA98D}"/>
+                <a16:creationId xmlns:a16="http://schemas.microsoft.com/office/drawing/2014/main" id="{F465F83B-EFBD-4A92-A9DE-650B1EB43C60}"/>
               </a:ext>
             </a:extLst>
           </p:cNvPr>
@@ -6757,7 +6757,7 @@
           <p:cNvPr id="2" name="">
             <a:extLst xmlns:a="http://schemas.openxmlformats.org/drawingml/2006/main">
               <a:ext uri="{FF2B5EF4-FFF2-40B4-BE49-F238E27FC236}">
-                <a16:creationId xmlns:a16="http://schemas.microsoft.com/office/drawing/2014/main" id="{1BC9751C-C47E-4D50-A7A5-8A021C87E94B}"/>
+                <a16:creationId xmlns:a16="http://schemas.microsoft.com/office/drawing/2014/main" id="{59933248-A45A-42A0-A48E-7F316CF9AA2C}"/>
               </a:ext>
             </a:extLst>
           </p:cNvPr>
@@ -6814,7 +6814,7 @@
           <p:cNvPr id="3" name="">
             <a:extLst xmlns:a="http://schemas.openxmlformats.org/drawingml/2006/main">
               <a:ext uri="{FF2B5EF4-FFF2-40B4-BE49-F238E27FC236}">
-                <a16:creationId xmlns:a16="http://schemas.microsoft.com/office/drawing/2014/main" id="{86A0AB2F-8214-4403-B119-F0ADCDCDC726}"/>
+                <a16:creationId xmlns:a16="http://schemas.microsoft.com/office/drawing/2014/main" id="{D8CEEC41-09CE-4FD7-BD7F-F504081C604A}"/>
               </a:ext>
             </a:extLst>
           </p:cNvPr>
@@ -6871,7 +6871,7 @@
           <p:cNvPr id="4" name="">
             <a:extLst xmlns:a="http://schemas.openxmlformats.org/drawingml/2006/main">
               <a:ext uri="{FF2B5EF4-FFF2-40B4-BE49-F238E27FC236}">
-                <a16:creationId xmlns:a16="http://schemas.microsoft.com/office/drawing/2014/main" id="{0D8E42B8-93D5-4585-BAEA-3F5804FFFA89}"/>
+                <a16:creationId xmlns:a16="http://schemas.microsoft.com/office/drawing/2014/main" id="{E8D9E126-B578-4BEC-9AE7-F0BF6423B5E6}"/>
               </a:ext>
             </a:extLst>
           </p:cNvPr>
@@ -6935,7 +6935,7 @@
         </p:xfrm>
         <a:graphic xmlns:a="http://schemas.openxmlformats.org/drawingml/2006/main">
           <a:graphicData uri="http://schemas.openxmlformats.org/drawingml/2006/chart">
-            <c:chart xmlns:r="http://schemas.openxmlformats.org/officeDocument/2006/relationships" xmlns:c="http://schemas.openxmlformats.org/drawingml/2006/chart" r:id="R6472b465f9f6477e"/>
+            <c:chart xmlns:r="http://schemas.openxmlformats.org/officeDocument/2006/relationships" xmlns:c="http://schemas.openxmlformats.org/drawingml/2006/chart" r:id="Rbce2f6d43e9a4704"/>
           </a:graphicData>
         </a:graphic>
       </p:graphicFrame>
@@ -6944,7 +6944,7 @@
           <p:cNvPr id="6" name="">
             <a:extLst xmlns:a="http://schemas.openxmlformats.org/drawingml/2006/main">
               <a:ext uri="{FF2B5EF4-FFF2-40B4-BE49-F238E27FC236}">
-                <a16:creationId xmlns:a16="http://schemas.microsoft.com/office/drawing/2014/main" id="{CBC414AD-BCEB-47E3-931A-9A16882594C3}"/>
+                <a16:creationId xmlns:a16="http://schemas.microsoft.com/office/drawing/2014/main" id="{1EE9FEC8-4275-4B1D-BCCB-B31445495DFD}"/>
               </a:ext>
             </a:extLst>
           </p:cNvPr>
@@ -6991,7 +6991,7 @@
                 <a:ea typeface="Heiti TC"/>
                 <a:cs typeface="Heiti TC"/>
               </a:rPr>
-              <a:t>y 隨 x 增加</a:t>
+              <a:t>x 增加時，y 增加</a:t>
             </a:r>
           </a:p>
         </p:txBody>
@@ -7001,7 +7001,7 @@
           <p:cNvPr id="7" name="">
             <a:extLst xmlns:a="http://schemas.openxmlformats.org/drawingml/2006/main">
               <a:ext uri="{FF2B5EF4-FFF2-40B4-BE49-F238E27FC236}">
-                <a16:creationId xmlns:a16="http://schemas.microsoft.com/office/drawing/2014/main" id="{489E4962-ED85-4F57-A46D-D2FDE1B49CBD}"/>
+                <a16:creationId xmlns:a16="http://schemas.microsoft.com/office/drawing/2014/main" id="{956C7538-5DEE-481E-A07B-7CF38096474C}"/>
               </a:ext>
             </a:extLst>
           </p:cNvPr>
@@ -7058,7 +7058,7 @@
           <p:cNvPr id="8" name="">
             <a:extLst xmlns:a="http://schemas.openxmlformats.org/drawingml/2006/main">
               <a:ext uri="{FF2B5EF4-FFF2-40B4-BE49-F238E27FC236}">
-                <a16:creationId xmlns:a16="http://schemas.microsoft.com/office/drawing/2014/main" id="{72D9EDEF-3A51-46C3-9047-911C03779591}"/>
+                <a16:creationId xmlns:a16="http://schemas.microsoft.com/office/drawing/2014/main" id="{70598DEF-051A-46DB-BB14-9D792D23B36F}"/>
               </a:ext>
             </a:extLst>
           </p:cNvPr>
@@ -7122,7 +7122,7 @@
         </p:xfrm>
         <a:graphic xmlns:a="http://schemas.openxmlformats.org/drawingml/2006/main">
           <a:graphicData uri="http://schemas.openxmlformats.org/drawingml/2006/chart">
-            <c:chart xmlns:r="http://schemas.openxmlformats.org/officeDocument/2006/relationships" xmlns:c="http://schemas.openxmlformats.org/drawingml/2006/chart" r:id="R7186cbb7785b4111"/>
+            <c:chart xmlns:r="http://schemas.openxmlformats.org/officeDocument/2006/relationships" xmlns:c="http://schemas.openxmlformats.org/drawingml/2006/chart" r:id="Rbb77ad60d249471d"/>
           </a:graphicData>
         </a:graphic>
       </p:graphicFrame>
@@ -7131,7 +7131,7 @@
           <p:cNvPr id="10" name="">
             <a:extLst xmlns:a="http://schemas.openxmlformats.org/drawingml/2006/main">
               <a:ext uri="{FF2B5EF4-FFF2-40B4-BE49-F238E27FC236}">
-                <a16:creationId xmlns:a16="http://schemas.microsoft.com/office/drawing/2014/main" id="{AC480601-5E95-4B25-94AA-F79AC7ACF7CE}"/>
+                <a16:creationId xmlns:a16="http://schemas.microsoft.com/office/drawing/2014/main" id="{EBBF604D-0FD6-4B0F-B2E0-08EB13570835}"/>
               </a:ext>
             </a:extLst>
           </p:cNvPr>
@@ -7178,7 +7178,7 @@
                 <a:ea typeface="Heiti TC"/>
                 <a:cs typeface="Heiti TC"/>
               </a:rPr>
-              <a:t>y 隨 x 減少</a:t>
+              <a:t>x 增加時，y 減少</a:t>
             </a:r>
           </a:p>
         </p:txBody>
@@ -7188,7 +7188,7 @@
           <p:cNvPr id="11" name="">
             <a:extLst xmlns:a="http://schemas.openxmlformats.org/drawingml/2006/main">
               <a:ext uri="{FF2B5EF4-FFF2-40B4-BE49-F238E27FC236}">
-                <a16:creationId xmlns:a16="http://schemas.microsoft.com/office/drawing/2014/main" id="{0D2F9024-44A6-44DE-B045-EA1E9EF2699C}"/>
+                <a16:creationId xmlns:a16="http://schemas.microsoft.com/office/drawing/2014/main" id="{0D89643F-837E-4DF0-9B40-7CC4B8A56866}"/>
               </a:ext>
             </a:extLst>
           </p:cNvPr>
@@ -7245,7 +7245,7 @@
           <p:cNvPr id="12" name="">
             <a:extLst xmlns:a="http://schemas.openxmlformats.org/drawingml/2006/main">
               <a:ext uri="{FF2B5EF4-FFF2-40B4-BE49-F238E27FC236}">
-                <a16:creationId xmlns:a16="http://schemas.microsoft.com/office/drawing/2014/main" id="{FB8C8DCE-7A0C-4D88-957B-1C1F46AF783B}"/>
+                <a16:creationId xmlns:a16="http://schemas.microsoft.com/office/drawing/2014/main" id="{AF3D9E7A-CB7F-4FFC-BD68-6EC1F1A3A7AB}"/>
               </a:ext>
             </a:extLst>
           </p:cNvPr>
@@ -7309,7 +7309,7 @@
         </p:xfrm>
         <a:graphic xmlns:a="http://schemas.openxmlformats.org/drawingml/2006/main">
           <a:graphicData uri="http://schemas.openxmlformats.org/drawingml/2006/chart">
-            <c:chart xmlns:r="http://schemas.openxmlformats.org/officeDocument/2006/relationships" xmlns:c="http://schemas.openxmlformats.org/drawingml/2006/chart" r:id="R6590931fbe294bbf"/>
+            <c:chart xmlns:r="http://schemas.openxmlformats.org/officeDocument/2006/relationships" xmlns:c="http://schemas.openxmlformats.org/drawingml/2006/chart" r:id="R7d4bd9560a0d45af"/>
           </a:graphicData>
         </a:graphic>
       </p:graphicFrame>
@@ -7318,7 +7318,7 @@
           <p:cNvPr id="14" name="">
             <a:extLst xmlns:a="http://schemas.openxmlformats.org/drawingml/2006/main">
               <a:ext uri="{FF2B5EF4-FFF2-40B4-BE49-F238E27FC236}">
-                <a16:creationId xmlns:a16="http://schemas.microsoft.com/office/drawing/2014/main" id="{AADCA33A-5A1B-4308-853D-EB534128E707}"/>
+                <a16:creationId xmlns:a16="http://schemas.microsoft.com/office/drawing/2014/main" id="{227DB007-0E19-42E1-8EE7-C87D59CB99AD}"/>
               </a:ext>
             </a:extLst>
           </p:cNvPr>
@@ -7375,7 +7375,7 @@
           <p:cNvPr id="15" name="">
             <a:extLst xmlns:a="http://schemas.openxmlformats.org/drawingml/2006/main">
               <a:ext uri="{FF2B5EF4-FFF2-40B4-BE49-F238E27FC236}">
-                <a16:creationId xmlns:a16="http://schemas.microsoft.com/office/drawing/2014/main" id="{B9ED2293-2579-4927-B369-8EE3086F1D13}"/>
+                <a16:creationId xmlns:a16="http://schemas.microsoft.com/office/drawing/2014/main" id="{384F2C32-5D8B-4F69-8B78-98A50D26A40B}"/>
               </a:ext>
             </a:extLst>
           </p:cNvPr>
@@ -7430,7 +7430,7 @@
     </p:spTree>
     <p:extLst>
       <p:ext uri="{BB962C8B-B14F-4D97-AF65-F5344CB8AC3E}">
-        <p14:creationId xmlns:p14="http://schemas.microsoft.com/office/powerpoint/2010/main" val="694792508"/>
+        <p14:creationId xmlns:p14="http://schemas.microsoft.com/office/powerpoint/2010/main" val="729908660"/>
       </p:ext>
     </p:extLst>
   </p:cSld>
@@ -7461,7 +7461,7 @@
           <p:cNvPr id="12" name="">
             <a:extLst xmlns:a="http://schemas.openxmlformats.org/drawingml/2006/main">
               <a:ext uri="{FF2B5EF4-FFF2-40B4-BE49-F238E27FC236}">
-                <a16:creationId xmlns:a16="http://schemas.microsoft.com/office/drawing/2014/main" id="{494BCED3-D681-4BED-8A39-6B09021DA280}"/>
+                <a16:creationId xmlns:a16="http://schemas.microsoft.com/office/drawing/2014/main" id="{CB91964F-02C5-42B7-BE1A-6C967C8ABB41}"/>
               </a:ext>
             </a:extLst>
           </p:cNvPr>
@@ -7518,7 +7518,7 @@
           <p:cNvPr id="2" name="">
             <a:extLst xmlns:a="http://schemas.openxmlformats.org/drawingml/2006/main">
               <a:ext uri="{FF2B5EF4-FFF2-40B4-BE49-F238E27FC236}">
-                <a16:creationId xmlns:a16="http://schemas.microsoft.com/office/drawing/2014/main" id="{AEEC5D00-9FD1-419F-9069-97FF9C5A2C18}"/>
+                <a16:creationId xmlns:a16="http://schemas.microsoft.com/office/drawing/2014/main" id="{86885D8E-934A-4A1F-AFB6-4AC0880D8649}"/>
               </a:ext>
             </a:extLst>
           </p:cNvPr>
@@ -7575,7 +7575,7 @@
           <p:cNvPr id="3" name="">
             <a:extLst xmlns:a="http://schemas.openxmlformats.org/drawingml/2006/main">
               <a:ext uri="{FF2B5EF4-FFF2-40B4-BE49-F238E27FC236}">
-                <a16:creationId xmlns:a16="http://schemas.microsoft.com/office/drawing/2014/main" id="{E7C11BBE-8B67-453A-A2D5-2C032F4D6EEB}"/>
+                <a16:creationId xmlns:a16="http://schemas.microsoft.com/office/drawing/2014/main" id="{9BAAE1AA-B8F1-4E16-8D7F-2EC02F971551}"/>
               </a:ext>
             </a:extLst>
           </p:cNvPr>
@@ -7639,7 +7639,7 @@
         </p:xfrm>
         <a:graphic xmlns:a="http://schemas.openxmlformats.org/drawingml/2006/main">
           <a:graphicData uri="http://schemas.openxmlformats.org/drawingml/2006/chart">
-            <c:chart xmlns:r="http://schemas.openxmlformats.org/officeDocument/2006/relationships" xmlns:c="http://schemas.openxmlformats.org/drawingml/2006/chart" r:id="R9c86b687b451473a"/>
+            <c:chart xmlns:r="http://schemas.openxmlformats.org/officeDocument/2006/relationships" xmlns:c="http://schemas.openxmlformats.org/drawingml/2006/chart" r:id="Rd69588eb4c88401e"/>
           </a:graphicData>
         </a:graphic>
       </p:graphicFrame>
@@ -7648,7 +7648,7 @@
           <p:cNvPr id="5" name="">
             <a:extLst xmlns:a="http://schemas.openxmlformats.org/drawingml/2006/main">
               <a:ext uri="{FF2B5EF4-FFF2-40B4-BE49-F238E27FC236}">
-                <a16:creationId xmlns:a16="http://schemas.microsoft.com/office/drawing/2014/main" id="{2FC8F212-160C-4897-A606-C25CA2A0304E}"/>
+                <a16:creationId xmlns:a16="http://schemas.microsoft.com/office/drawing/2014/main" id="{65664E81-3162-40DD-A3C3-47ABF521D70F}"/>
               </a:ext>
             </a:extLst>
           </p:cNvPr>
@@ -7705,7 +7705,7 @@
           <p:cNvPr id="6" name="">
             <a:extLst xmlns:a="http://schemas.openxmlformats.org/drawingml/2006/main">
               <a:ext uri="{FF2B5EF4-FFF2-40B4-BE49-F238E27FC236}">
-                <a16:creationId xmlns:a16="http://schemas.microsoft.com/office/drawing/2014/main" id="{AB2EDD67-0EFD-4E9B-9A83-CFBD53429DA0}"/>
+                <a16:creationId xmlns:a16="http://schemas.microsoft.com/office/drawing/2014/main" id="{C90463C8-3725-46CB-A8DA-49C485E8837F}"/>
               </a:ext>
             </a:extLst>
           </p:cNvPr>
@@ -7762,7 +7762,7 @@
           <p:cNvPr id="7" name="">
             <a:extLst xmlns:a="http://schemas.openxmlformats.org/drawingml/2006/main">
               <a:ext uri="{FF2B5EF4-FFF2-40B4-BE49-F238E27FC236}">
-                <a16:creationId xmlns:a16="http://schemas.microsoft.com/office/drawing/2014/main" id="{9DCBCD52-0FA7-4BC2-B640-77923F319CE9}"/>
+                <a16:creationId xmlns:a16="http://schemas.microsoft.com/office/drawing/2014/main" id="{3FF0F457-850C-4828-8181-ED7360A645E4}"/>
               </a:ext>
             </a:extLst>
           </p:cNvPr>
@@ -7819,7 +7819,7 @@
           <p:cNvPr id="8" name="">
             <a:extLst xmlns:a="http://schemas.openxmlformats.org/drawingml/2006/main">
               <a:ext uri="{FF2B5EF4-FFF2-40B4-BE49-F238E27FC236}">
-                <a16:creationId xmlns:a16="http://schemas.microsoft.com/office/drawing/2014/main" id="{EC49F744-1635-4C28-95DE-1FE20D7A47D4}"/>
+                <a16:creationId xmlns:a16="http://schemas.microsoft.com/office/drawing/2014/main" id="{F0777A6C-D779-4C3C-BB50-15390E3C9FA1}"/>
               </a:ext>
             </a:extLst>
           </p:cNvPr>
@@ -7876,7 +7876,7 @@
           <p:cNvPr id="9" name="">
             <a:extLst xmlns:a="http://schemas.openxmlformats.org/drawingml/2006/main">
               <a:ext uri="{FF2B5EF4-FFF2-40B4-BE49-F238E27FC236}">
-                <a16:creationId xmlns:a16="http://schemas.microsoft.com/office/drawing/2014/main" id="{689E6B8B-5568-497F-B656-FE72114E698E}"/>
+                <a16:creationId xmlns:a16="http://schemas.microsoft.com/office/drawing/2014/main" id="{642A0C54-7040-47D8-B62E-09F89A8025A6}"/>
               </a:ext>
             </a:extLst>
           </p:cNvPr>
@@ -7933,7 +7933,7 @@
           <p:cNvPr id="10" name="">
             <a:extLst xmlns:a="http://schemas.openxmlformats.org/drawingml/2006/main">
               <a:ext uri="{FF2B5EF4-FFF2-40B4-BE49-F238E27FC236}">
-                <a16:creationId xmlns:a16="http://schemas.microsoft.com/office/drawing/2014/main" id="{17B3394E-EF69-484F-8C8C-7B8D427754A9}"/>
+                <a16:creationId xmlns:a16="http://schemas.microsoft.com/office/drawing/2014/main" id="{875F9C19-9EDA-4D70-A973-63A84E4C7F16}"/>
               </a:ext>
             </a:extLst>
           </p:cNvPr>
@@ -7990,7 +7990,7 @@
           <p:cNvPr id="11" name="">
             <a:extLst xmlns:a="http://schemas.openxmlformats.org/drawingml/2006/main">
               <a:ext uri="{FF2B5EF4-FFF2-40B4-BE49-F238E27FC236}">
-                <a16:creationId xmlns:a16="http://schemas.microsoft.com/office/drawing/2014/main" id="{9251C5AC-F279-4D30-8606-40DC5845BA76}"/>
+                <a16:creationId xmlns:a16="http://schemas.microsoft.com/office/drawing/2014/main" id="{A99C36B5-84DE-45AA-BA2A-BFEDB090A1E7}"/>
               </a:ext>
             </a:extLst>
           </p:cNvPr>
@@ -8045,7 +8045,7 @@
     </p:spTree>
     <p:extLst>
       <p:ext uri="{BB962C8B-B14F-4D97-AF65-F5344CB8AC3E}">
-        <p14:creationId xmlns:p14="http://schemas.microsoft.com/office/powerpoint/2010/main" val="381958116"/>
+        <p14:creationId xmlns:p14="http://schemas.microsoft.com/office/powerpoint/2010/main" val="622732196"/>
       </p:ext>
     </p:extLst>
   </p:cSld>
@@ -8076,7 +8076,7 @@
           <p:cNvPr id="12" name="">
             <a:extLst xmlns:a="http://schemas.openxmlformats.org/drawingml/2006/main">
               <a:ext uri="{FF2B5EF4-FFF2-40B4-BE49-F238E27FC236}">
-                <a16:creationId xmlns:a16="http://schemas.microsoft.com/office/drawing/2014/main" id="{2B9F5760-190A-4F51-801A-E141CE63A029}"/>
+                <a16:creationId xmlns:a16="http://schemas.microsoft.com/office/drawing/2014/main" id="{F33AAA4C-A100-47B1-85D6-9B8473B69219}"/>
               </a:ext>
             </a:extLst>
           </p:cNvPr>
@@ -8133,7 +8133,7 @@
           <p:cNvPr id="2" name="">
             <a:extLst xmlns:a="http://schemas.openxmlformats.org/drawingml/2006/main">
               <a:ext uri="{FF2B5EF4-FFF2-40B4-BE49-F238E27FC236}">
-                <a16:creationId xmlns:a16="http://schemas.microsoft.com/office/drawing/2014/main" id="{8B0ED192-1DF8-4A8C-9832-453450C97CAC}"/>
+                <a16:creationId xmlns:a16="http://schemas.microsoft.com/office/drawing/2014/main" id="{5E45DDA1-4D1F-4AEF-8A75-3332A7B10E41}"/>
               </a:ext>
             </a:extLst>
           </p:cNvPr>
@@ -8190,7 +8190,7 @@
           <p:cNvPr id="3" name="">
             <a:extLst xmlns:a="http://schemas.openxmlformats.org/drawingml/2006/main">
               <a:ext uri="{FF2B5EF4-FFF2-40B4-BE49-F238E27FC236}">
-                <a16:creationId xmlns:a16="http://schemas.microsoft.com/office/drawing/2014/main" id="{9D62B75F-037B-4C87-8A70-E18AC69E2DC7}"/>
+                <a16:creationId xmlns:a16="http://schemas.microsoft.com/office/drawing/2014/main" id="{8E9A4095-87C2-46A0-8D24-92AB69478C5F}"/>
               </a:ext>
             </a:extLst>
           </p:cNvPr>
@@ -8254,7 +8254,7 @@
         </p:xfrm>
         <a:graphic xmlns:a="http://schemas.openxmlformats.org/drawingml/2006/main">
           <a:graphicData uri="http://schemas.openxmlformats.org/drawingml/2006/chart">
-            <c:chart xmlns:r="http://schemas.openxmlformats.org/officeDocument/2006/relationships" xmlns:c="http://schemas.openxmlformats.org/drawingml/2006/chart" r:id="Rfbde1cea682f4647"/>
+            <c:chart xmlns:r="http://schemas.openxmlformats.org/officeDocument/2006/relationships" xmlns:c="http://schemas.openxmlformats.org/drawingml/2006/chart" r:id="R374444d5c20b4b55"/>
           </a:graphicData>
         </a:graphic>
       </p:graphicFrame>
@@ -8263,7 +8263,7 @@
           <p:cNvPr id="5" name="">
             <a:extLst xmlns:a="http://schemas.openxmlformats.org/drawingml/2006/main">
               <a:ext uri="{FF2B5EF4-FFF2-40B4-BE49-F238E27FC236}">
-                <a16:creationId xmlns:a16="http://schemas.microsoft.com/office/drawing/2014/main" id="{BED7697F-9506-45C2-9AF4-E7BB376F23E7}"/>
+                <a16:creationId xmlns:a16="http://schemas.microsoft.com/office/drawing/2014/main" id="{8A2FCB5D-F9D5-46DC-A09D-AD4F2E8630A0}"/>
               </a:ext>
             </a:extLst>
           </p:cNvPr>
@@ -8320,7 +8320,7 @@
           <p:cNvPr id="6" name="">
             <a:extLst xmlns:a="http://schemas.openxmlformats.org/drawingml/2006/main">
               <a:ext uri="{FF2B5EF4-FFF2-40B4-BE49-F238E27FC236}">
-                <a16:creationId xmlns:a16="http://schemas.microsoft.com/office/drawing/2014/main" id="{AD82D457-EE91-4AD5-B1F9-727DB0B40E65}"/>
+                <a16:creationId xmlns:a16="http://schemas.microsoft.com/office/drawing/2014/main" id="{49B12DA0-E639-48E3-A645-9AA68A765724}"/>
               </a:ext>
             </a:extLst>
           </p:cNvPr>
@@ -8377,7 +8377,7 @@
           <p:cNvPr id="7" name="">
             <a:extLst xmlns:a="http://schemas.openxmlformats.org/drawingml/2006/main">
               <a:ext uri="{FF2B5EF4-FFF2-40B4-BE49-F238E27FC236}">
-                <a16:creationId xmlns:a16="http://schemas.microsoft.com/office/drawing/2014/main" id="{DB49A7D1-0429-4BD5-84BF-B6C2033148D2}"/>
+                <a16:creationId xmlns:a16="http://schemas.microsoft.com/office/drawing/2014/main" id="{17270E97-A127-4D6A-A11A-9CDB4E0F8A2C}"/>
               </a:ext>
             </a:extLst>
           </p:cNvPr>
@@ -8434,7 +8434,7 @@
           <p:cNvPr id="8" name="">
             <a:extLst xmlns:a="http://schemas.openxmlformats.org/drawingml/2006/main">
               <a:ext uri="{FF2B5EF4-FFF2-40B4-BE49-F238E27FC236}">
-                <a16:creationId xmlns:a16="http://schemas.microsoft.com/office/drawing/2014/main" id="{4A6978EC-9EAE-49D4-899D-73DE7B4453EA}"/>
+                <a16:creationId xmlns:a16="http://schemas.microsoft.com/office/drawing/2014/main" id="{CB02927B-7217-4474-BE86-EF6D4B8FE737}"/>
               </a:ext>
             </a:extLst>
           </p:cNvPr>
@@ -8491,7 +8491,7 @@
           <p:cNvPr id="9" name="">
             <a:extLst xmlns:a="http://schemas.openxmlformats.org/drawingml/2006/main">
               <a:ext uri="{FF2B5EF4-FFF2-40B4-BE49-F238E27FC236}">
-                <a16:creationId xmlns:a16="http://schemas.microsoft.com/office/drawing/2014/main" id="{15208FB1-BFD1-4396-AE3C-BE8A9E409963}"/>
+                <a16:creationId xmlns:a16="http://schemas.microsoft.com/office/drawing/2014/main" id="{763A8ACE-651B-4614-9F1A-D420346B2993}"/>
               </a:ext>
             </a:extLst>
           </p:cNvPr>
@@ -8548,7 +8548,7 @@
           <p:cNvPr id="10" name="">
             <a:extLst xmlns:a="http://schemas.openxmlformats.org/drawingml/2006/main">
               <a:ext uri="{FF2B5EF4-FFF2-40B4-BE49-F238E27FC236}">
-                <a16:creationId xmlns:a16="http://schemas.microsoft.com/office/drawing/2014/main" id="{913A8237-D9C7-4E64-A93C-9E40DC2797FE}"/>
+                <a16:creationId xmlns:a16="http://schemas.microsoft.com/office/drawing/2014/main" id="{66585A27-06B2-452E-B43B-540BBCF6BDA8}"/>
               </a:ext>
             </a:extLst>
           </p:cNvPr>
@@ -8605,7 +8605,7 @@
           <p:cNvPr id="11" name="">
             <a:extLst xmlns:a="http://schemas.openxmlformats.org/drawingml/2006/main">
               <a:ext uri="{FF2B5EF4-FFF2-40B4-BE49-F238E27FC236}">
-                <a16:creationId xmlns:a16="http://schemas.microsoft.com/office/drawing/2014/main" id="{CC30512D-7C01-4554-A240-A5DA83B5B266}"/>
+                <a16:creationId xmlns:a16="http://schemas.microsoft.com/office/drawing/2014/main" id="{7243442C-F84B-411C-9AD4-D67E9180CBD8}"/>
               </a:ext>
             </a:extLst>
           </p:cNvPr>
@@ -8660,7 +8660,7 @@
     </p:spTree>
     <p:extLst>
       <p:ext uri="{BB962C8B-B14F-4D97-AF65-F5344CB8AC3E}">
-        <p14:creationId xmlns:p14="http://schemas.microsoft.com/office/powerpoint/2010/main" val="2014950798"/>
+        <p14:creationId xmlns:p14="http://schemas.microsoft.com/office/powerpoint/2010/main" val="1046792545"/>
       </p:ext>
     </p:extLst>
   </p:cSld>
@@ -8691,7 +8691,7 @@
           <p:cNvPr id="12" name="">
             <a:extLst xmlns:a="http://schemas.openxmlformats.org/drawingml/2006/main">
               <a:ext uri="{FF2B5EF4-FFF2-40B4-BE49-F238E27FC236}">
-                <a16:creationId xmlns:a16="http://schemas.microsoft.com/office/drawing/2014/main" id="{F746C1DB-A860-4F1C-B806-E756D4CF959C}"/>
+                <a16:creationId xmlns:a16="http://schemas.microsoft.com/office/drawing/2014/main" id="{E4853508-A120-43D2-AF14-48474E08D374}"/>
               </a:ext>
             </a:extLst>
           </p:cNvPr>
@@ -8748,7 +8748,7 @@
           <p:cNvPr id="2" name="">
             <a:extLst xmlns:a="http://schemas.openxmlformats.org/drawingml/2006/main">
               <a:ext uri="{FF2B5EF4-FFF2-40B4-BE49-F238E27FC236}">
-                <a16:creationId xmlns:a16="http://schemas.microsoft.com/office/drawing/2014/main" id="{C3BC3C8C-4E9E-49D6-8707-44A3A4CBF6B5}"/>
+                <a16:creationId xmlns:a16="http://schemas.microsoft.com/office/drawing/2014/main" id="{E26C3A5C-1EBA-41FC-9314-1C4A4E3E3F2C}"/>
               </a:ext>
             </a:extLst>
           </p:cNvPr>
@@ -8805,7 +8805,7 @@
           <p:cNvPr id="3" name="">
             <a:extLst xmlns:a="http://schemas.openxmlformats.org/drawingml/2006/main">
               <a:ext uri="{FF2B5EF4-FFF2-40B4-BE49-F238E27FC236}">
-                <a16:creationId xmlns:a16="http://schemas.microsoft.com/office/drawing/2014/main" id="{B5DA83A7-A25B-494D-9C72-EF8DD4D0F0D1}"/>
+                <a16:creationId xmlns:a16="http://schemas.microsoft.com/office/drawing/2014/main" id="{F7DAE845-2A9C-4824-80AE-8F7A1720FA7D}"/>
               </a:ext>
             </a:extLst>
           </p:cNvPr>
@@ -8862,7 +8862,7 @@
           <p:cNvPr id="4" name="">
             <a:extLst xmlns:a="http://schemas.openxmlformats.org/drawingml/2006/main">
               <a:ext uri="{FF2B5EF4-FFF2-40B4-BE49-F238E27FC236}">
-                <a16:creationId xmlns:a16="http://schemas.microsoft.com/office/drawing/2014/main" id="{608F5465-E9C3-453B-B7B0-4A874BAB7B31}"/>
+                <a16:creationId xmlns:a16="http://schemas.microsoft.com/office/drawing/2014/main" id="{ABEFDF6A-E65C-4A5A-9EE9-A88E6FA5EB09}"/>
               </a:ext>
             </a:extLst>
           </p:cNvPr>
@@ -8919,7 +8919,7 @@
           <p:cNvPr id="5" name="">
             <a:extLst xmlns:a="http://schemas.openxmlformats.org/drawingml/2006/main">
               <a:ext uri="{FF2B5EF4-FFF2-40B4-BE49-F238E27FC236}">
-                <a16:creationId xmlns:a16="http://schemas.microsoft.com/office/drawing/2014/main" id="{14F06F07-3B8C-456B-81C2-43B8D24EDF69}"/>
+                <a16:creationId xmlns:a16="http://schemas.microsoft.com/office/drawing/2014/main" id="{28EF7F48-78F2-48C5-970D-043087E2B5BA}"/>
               </a:ext>
             </a:extLst>
           </p:cNvPr>
@@ -8976,7 +8976,7 @@
           <p:cNvPr id="6" name="">
             <a:extLst xmlns:a="http://schemas.openxmlformats.org/drawingml/2006/main">
               <a:ext uri="{FF2B5EF4-FFF2-40B4-BE49-F238E27FC236}">
-                <a16:creationId xmlns:a16="http://schemas.microsoft.com/office/drawing/2014/main" id="{CC11CDEA-95B9-4285-B2B9-35FF31383D15}"/>
+                <a16:creationId xmlns:a16="http://schemas.microsoft.com/office/drawing/2014/main" id="{E5D47DF3-17CE-4E2C-8BA8-46E82836A202}"/>
               </a:ext>
             </a:extLst>
           </p:cNvPr>
@@ -9033,7 +9033,7 @@
           <p:cNvPr id="7" name="">
             <a:extLst xmlns:a="http://schemas.openxmlformats.org/drawingml/2006/main">
               <a:ext uri="{FF2B5EF4-FFF2-40B4-BE49-F238E27FC236}">
-                <a16:creationId xmlns:a16="http://schemas.microsoft.com/office/drawing/2014/main" id="{BE64A215-8BE4-4C82-9850-C96E333D0388}"/>
+                <a16:creationId xmlns:a16="http://schemas.microsoft.com/office/drawing/2014/main" id="{302424EB-8C6F-4F84-A111-7789F36B3626}"/>
               </a:ext>
             </a:extLst>
           </p:cNvPr>
@@ -9090,7 +9090,7 @@
           <p:cNvPr id="8" name="">
             <a:extLst xmlns:a="http://schemas.openxmlformats.org/drawingml/2006/main">
               <a:ext uri="{FF2B5EF4-FFF2-40B4-BE49-F238E27FC236}">
-                <a16:creationId xmlns:a16="http://schemas.microsoft.com/office/drawing/2014/main" id="{4FC67AF8-95C9-482C-9EE0-DA4A3E422E4E}"/>
+                <a16:creationId xmlns:a16="http://schemas.microsoft.com/office/drawing/2014/main" id="{A1AAF799-48C5-46CB-A509-D61D680FC6B9}"/>
               </a:ext>
             </a:extLst>
           </p:cNvPr>
@@ -9147,7 +9147,7 @@
           <p:cNvPr id="9" name="">
             <a:extLst xmlns:a="http://schemas.openxmlformats.org/drawingml/2006/main">
               <a:ext uri="{FF2B5EF4-FFF2-40B4-BE49-F238E27FC236}">
-                <a16:creationId xmlns:a16="http://schemas.microsoft.com/office/drawing/2014/main" id="{04883810-44AF-4DFF-839F-5E48389E9655}"/>
+                <a16:creationId xmlns:a16="http://schemas.microsoft.com/office/drawing/2014/main" id="{4D15F433-63C0-43C2-939C-8E5AE9199530}"/>
               </a:ext>
             </a:extLst>
           </p:cNvPr>
@@ -9204,7 +9204,7 @@
           <p:cNvPr id="10" name="">
             <a:extLst xmlns:a="http://schemas.openxmlformats.org/drawingml/2006/main">
               <a:ext uri="{FF2B5EF4-FFF2-40B4-BE49-F238E27FC236}">
-                <a16:creationId xmlns:a16="http://schemas.microsoft.com/office/drawing/2014/main" id="{8676299C-58AC-4437-9629-2F2D39A0DB01}"/>
+                <a16:creationId xmlns:a16="http://schemas.microsoft.com/office/drawing/2014/main" id="{1CFD6E0A-6949-44BA-B3F6-87FBC4FA7E7D}"/>
               </a:ext>
             </a:extLst>
           </p:cNvPr>
@@ -9261,7 +9261,7 @@
           <p:cNvPr id="11" name="">
             <a:extLst xmlns:a="http://schemas.openxmlformats.org/drawingml/2006/main">
               <a:ext uri="{FF2B5EF4-FFF2-40B4-BE49-F238E27FC236}">
-                <a16:creationId xmlns:a16="http://schemas.microsoft.com/office/drawing/2014/main" id="{3A2641F9-5C3E-48A4-9CA5-610CC995A2EE}"/>
+                <a16:creationId xmlns:a16="http://schemas.microsoft.com/office/drawing/2014/main" id="{BD3C3F9B-5BEA-42FB-8E89-C99D55DE7DE1}"/>
               </a:ext>
             </a:extLst>
           </p:cNvPr>
@@ -9316,7 +9316,7 @@
     </p:spTree>
     <p:extLst>
       <p:ext uri="{BB962C8B-B14F-4D97-AF65-F5344CB8AC3E}">
-        <p14:creationId xmlns:p14="http://schemas.microsoft.com/office/powerpoint/2010/main" val="732136842"/>
+        <p14:creationId xmlns:p14="http://schemas.microsoft.com/office/powerpoint/2010/main" val="1283191213"/>
       </p:ext>
     </p:extLst>
   </p:cSld>
@@ -9347,7 +9347,7 @@
           <p:cNvPr id="12" name="">
             <a:extLst xmlns:a="http://schemas.openxmlformats.org/drawingml/2006/main">
               <a:ext uri="{FF2B5EF4-FFF2-40B4-BE49-F238E27FC236}">
-                <a16:creationId xmlns:a16="http://schemas.microsoft.com/office/drawing/2014/main" id="{28E9C03A-0120-42B7-B529-DDEDCAC7787C}"/>
+                <a16:creationId xmlns:a16="http://schemas.microsoft.com/office/drawing/2014/main" id="{E3DC4E9F-9A0E-4BDA-9E7A-1DFCC7E60567}"/>
               </a:ext>
             </a:extLst>
           </p:cNvPr>
@@ -9404,7 +9404,7 @@
           <p:cNvPr id="2" name="">
             <a:extLst xmlns:a="http://schemas.openxmlformats.org/drawingml/2006/main">
               <a:ext uri="{FF2B5EF4-FFF2-40B4-BE49-F238E27FC236}">
-                <a16:creationId xmlns:a16="http://schemas.microsoft.com/office/drawing/2014/main" id="{A6F75D8A-0F00-456B-A0AB-187188A281FA}"/>
+                <a16:creationId xmlns:a16="http://schemas.microsoft.com/office/drawing/2014/main" id="{9956538E-8B20-4E90-8AD2-48945CFC0D18}"/>
               </a:ext>
             </a:extLst>
           </p:cNvPr>
@@ -9461,7 +9461,7 @@
           <p:cNvPr id="3" name="">
             <a:extLst xmlns:a="http://schemas.openxmlformats.org/drawingml/2006/main">
               <a:ext uri="{FF2B5EF4-FFF2-40B4-BE49-F238E27FC236}">
-                <a16:creationId xmlns:a16="http://schemas.microsoft.com/office/drawing/2014/main" id="{5A77516B-4500-4592-AA24-EAE64B182087}"/>
+                <a16:creationId xmlns:a16="http://schemas.microsoft.com/office/drawing/2014/main" id="{9CD6CA66-FACB-4E6D-B62A-8F73BEB12F4A}"/>
               </a:ext>
             </a:extLst>
           </p:cNvPr>
@@ -9525,7 +9525,7 @@
         </p:xfrm>
         <a:graphic xmlns:a="http://schemas.openxmlformats.org/drawingml/2006/main">
           <a:graphicData uri="http://schemas.openxmlformats.org/drawingml/2006/chart">
-            <c:chart xmlns:r="http://schemas.openxmlformats.org/officeDocument/2006/relationships" xmlns:c="http://schemas.openxmlformats.org/drawingml/2006/chart" r:id="R4b9cf690c3614ac5"/>
+            <c:chart xmlns:r="http://schemas.openxmlformats.org/officeDocument/2006/relationships" xmlns:c="http://schemas.openxmlformats.org/drawingml/2006/chart" r:id="Rd9c2f89c20144c5f"/>
           </a:graphicData>
         </a:graphic>
       </p:graphicFrame>
@@ -9534,7 +9534,7 @@
           <p:cNvPr id="5" name="">
             <a:extLst xmlns:a="http://schemas.openxmlformats.org/drawingml/2006/main">
               <a:ext uri="{FF2B5EF4-FFF2-40B4-BE49-F238E27FC236}">
-                <a16:creationId xmlns:a16="http://schemas.microsoft.com/office/drawing/2014/main" id="{FCE16414-0839-4592-8BD2-2F293B27E67B}"/>
+                <a16:creationId xmlns:a16="http://schemas.microsoft.com/office/drawing/2014/main" id="{65D0F19A-7038-4958-830E-32A1FDF829D8}"/>
               </a:ext>
             </a:extLst>
           </p:cNvPr>
@@ -9591,7 +9591,7 @@
           <p:cNvPr id="6" name="">
             <a:extLst xmlns:a="http://schemas.openxmlformats.org/drawingml/2006/main">
               <a:ext uri="{FF2B5EF4-FFF2-40B4-BE49-F238E27FC236}">
-                <a16:creationId xmlns:a16="http://schemas.microsoft.com/office/drawing/2014/main" id="{1189F653-61E1-4AB6-9859-C423299EDE05}"/>
+                <a16:creationId xmlns:a16="http://schemas.microsoft.com/office/drawing/2014/main" id="{8093FFD8-E1E5-469D-AAB9-C4CDD1B653D3}"/>
               </a:ext>
             </a:extLst>
           </p:cNvPr>
@@ -9648,7 +9648,7 @@
           <p:cNvPr id="7" name="">
             <a:extLst xmlns:a="http://schemas.openxmlformats.org/drawingml/2006/main">
               <a:ext uri="{FF2B5EF4-FFF2-40B4-BE49-F238E27FC236}">
-                <a16:creationId xmlns:a16="http://schemas.microsoft.com/office/drawing/2014/main" id="{0A1D711A-1D59-47D5-B1C2-9FFD9B7EC15A}"/>
+                <a16:creationId xmlns:a16="http://schemas.microsoft.com/office/drawing/2014/main" id="{955F88C6-3ED1-47E6-82AC-468FD32F3D0E}"/>
               </a:ext>
             </a:extLst>
           </p:cNvPr>
@@ -9705,7 +9705,7 @@
           <p:cNvPr id="8" name="">
             <a:extLst xmlns:a="http://schemas.openxmlformats.org/drawingml/2006/main">
               <a:ext uri="{FF2B5EF4-FFF2-40B4-BE49-F238E27FC236}">
-                <a16:creationId xmlns:a16="http://schemas.microsoft.com/office/drawing/2014/main" id="{A8262DF9-6BBF-4981-BCC1-7B38FF546E18}"/>
+                <a16:creationId xmlns:a16="http://schemas.microsoft.com/office/drawing/2014/main" id="{3C085E7E-8F6B-4EB9-8656-A9D8F18BEFE1}"/>
               </a:ext>
             </a:extLst>
           </p:cNvPr>
@@ -9762,7 +9762,7 @@
           <p:cNvPr id="9" name="">
             <a:extLst xmlns:a="http://schemas.openxmlformats.org/drawingml/2006/main">
               <a:ext uri="{FF2B5EF4-FFF2-40B4-BE49-F238E27FC236}">
-                <a16:creationId xmlns:a16="http://schemas.microsoft.com/office/drawing/2014/main" id="{AF57AAAD-F41D-48C4-A37C-BDDF2F52E58B}"/>
+                <a16:creationId xmlns:a16="http://schemas.microsoft.com/office/drawing/2014/main" id="{A9139329-BD56-4EEB-A92F-DD2749ACE916}"/>
               </a:ext>
             </a:extLst>
           </p:cNvPr>
@@ -9819,7 +9819,7 @@
           <p:cNvPr id="10" name="">
             <a:extLst xmlns:a="http://schemas.openxmlformats.org/drawingml/2006/main">
               <a:ext uri="{FF2B5EF4-FFF2-40B4-BE49-F238E27FC236}">
-                <a16:creationId xmlns:a16="http://schemas.microsoft.com/office/drawing/2014/main" id="{CFC929E6-E84B-4CFE-A44B-1BAB7F8BCABC}"/>
+                <a16:creationId xmlns:a16="http://schemas.microsoft.com/office/drawing/2014/main" id="{6B75D627-77C1-4C07-AE56-D44AF8245B22}"/>
               </a:ext>
             </a:extLst>
           </p:cNvPr>
@@ -9876,7 +9876,7 @@
           <p:cNvPr id="11" name="">
             <a:extLst xmlns:a="http://schemas.openxmlformats.org/drawingml/2006/main">
               <a:ext uri="{FF2B5EF4-FFF2-40B4-BE49-F238E27FC236}">
-                <a16:creationId xmlns:a16="http://schemas.microsoft.com/office/drawing/2014/main" id="{A2D69B9D-0595-4AAA-AFEB-E79FF880EE3F}"/>
+                <a16:creationId xmlns:a16="http://schemas.microsoft.com/office/drawing/2014/main" id="{59D5E5EC-9BB2-4809-A628-5F63DE53E813}"/>
               </a:ext>
             </a:extLst>
           </p:cNvPr>
@@ -9931,7 +9931,7 @@
     </p:spTree>
     <p:extLst>
       <p:ext uri="{BB962C8B-B14F-4D97-AF65-F5344CB8AC3E}">
-        <p14:creationId xmlns:p14="http://schemas.microsoft.com/office/powerpoint/2010/main" val="651977194"/>
+        <p14:creationId xmlns:p14="http://schemas.microsoft.com/office/powerpoint/2010/main" val="457913810"/>
       </p:ext>
     </p:extLst>
   </p:cSld>
@@ -9962,7 +9962,7 @@
           <p:cNvPr id="15" name="">
             <a:extLst xmlns:a="http://schemas.openxmlformats.org/drawingml/2006/main">
               <a:ext uri="{FF2B5EF4-FFF2-40B4-BE49-F238E27FC236}">
-                <a16:creationId xmlns:a16="http://schemas.microsoft.com/office/drawing/2014/main" id="{64CA3DA0-0AB8-4C20-894E-CB8ACF3FDD5F}"/>
+                <a16:creationId xmlns:a16="http://schemas.microsoft.com/office/drawing/2014/main" id="{4466BF2E-F1DE-45B8-BCDA-1556F6157594}"/>
               </a:ext>
             </a:extLst>
           </p:cNvPr>
@@ -10019,7 +10019,7 @@
           <p:cNvPr id="2" name="">
             <a:extLst xmlns:a="http://schemas.openxmlformats.org/drawingml/2006/main">
               <a:ext uri="{FF2B5EF4-FFF2-40B4-BE49-F238E27FC236}">
-                <a16:creationId xmlns:a16="http://schemas.microsoft.com/office/drawing/2014/main" id="{F1F425B4-B1B6-43BF-B2C2-0FE7A094373E}"/>
+                <a16:creationId xmlns:a16="http://schemas.microsoft.com/office/drawing/2014/main" id="{2EC9EC55-88AE-4A59-8FCF-763AC23842B1}"/>
               </a:ext>
             </a:extLst>
           </p:cNvPr>
@@ -10076,7 +10076,7 @@
           <p:cNvPr id="3" name="">
             <a:extLst xmlns:a="http://schemas.openxmlformats.org/drawingml/2006/main">
               <a:ext uri="{FF2B5EF4-FFF2-40B4-BE49-F238E27FC236}">
-                <a16:creationId xmlns:a16="http://schemas.microsoft.com/office/drawing/2014/main" id="{7E31F2CB-3208-4CAB-B2D4-CD47C3034365}"/>
+                <a16:creationId xmlns:a16="http://schemas.microsoft.com/office/drawing/2014/main" id="{1BC7F1E7-545A-452A-847F-944481C50AF0}"/>
               </a:ext>
             </a:extLst>
           </p:cNvPr>
@@ -10133,7 +10133,7 @@
           <p:cNvPr id="4" name="">
             <a:extLst xmlns:a="http://schemas.openxmlformats.org/drawingml/2006/main">
               <a:ext uri="{FF2B5EF4-FFF2-40B4-BE49-F238E27FC236}">
-                <a16:creationId xmlns:a16="http://schemas.microsoft.com/office/drawing/2014/main" id="{D533A1DA-B729-4A76-ADCF-561AFEE81438}"/>
+                <a16:creationId xmlns:a16="http://schemas.microsoft.com/office/drawing/2014/main" id="{26B7DFD3-B09F-4787-BCBB-2965A9A18B7C}"/>
               </a:ext>
             </a:extLst>
           </p:cNvPr>
@@ -10190,7 +10190,7 @@
           <p:cNvPr id="5" name="">
             <a:extLst xmlns:a="http://schemas.openxmlformats.org/drawingml/2006/main">
               <a:ext uri="{FF2B5EF4-FFF2-40B4-BE49-F238E27FC236}">
-                <a16:creationId xmlns:a16="http://schemas.microsoft.com/office/drawing/2014/main" id="{32C3DB2E-CEA0-42C8-8F16-F000C677E385}"/>
+                <a16:creationId xmlns:a16="http://schemas.microsoft.com/office/drawing/2014/main" id="{B4D096D1-C947-4F5C-A971-D646D4D9AE27}"/>
               </a:ext>
             </a:extLst>
           </p:cNvPr>
@@ -10247,7 +10247,7 @@
           <p:cNvPr id="6" name="">
             <a:extLst xmlns:a="http://schemas.openxmlformats.org/drawingml/2006/main">
               <a:ext uri="{FF2B5EF4-FFF2-40B4-BE49-F238E27FC236}">
-                <a16:creationId xmlns:a16="http://schemas.microsoft.com/office/drawing/2014/main" id="{3C20D341-4874-4483-87B8-FF506CB515D7}"/>
+                <a16:creationId xmlns:a16="http://schemas.microsoft.com/office/drawing/2014/main" id="{E6119A6D-F59E-4021-8013-EA53C0AA0324}"/>
               </a:ext>
             </a:extLst>
           </p:cNvPr>
@@ -10294,7 +10294,7 @@
                 <a:ea typeface="Arial"/>
                 <a:cs typeface="Arial"/>
               </a:rPr>
-              <a:t>m = 2: about 2 more marks per extra hour</a:t>
+              <a:t>In this model, m = 2 marks per extra hour</a:t>
             </a:r>
           </a:p>
         </p:txBody>
@@ -10304,7 +10304,7 @@
           <p:cNvPr id="7" name="">
             <a:extLst xmlns:a="http://schemas.openxmlformats.org/drawingml/2006/main">
               <a:ext uri="{FF2B5EF4-FFF2-40B4-BE49-F238E27FC236}">
-                <a16:creationId xmlns:a16="http://schemas.microsoft.com/office/drawing/2014/main" id="{3F801363-A6FC-408E-81C0-9E781EEA3E3E}"/>
+                <a16:creationId xmlns:a16="http://schemas.microsoft.com/office/drawing/2014/main" id="{2EA57632-2557-431D-BB76-A7E22B5768F3}"/>
               </a:ext>
             </a:extLst>
           </p:cNvPr>
@@ -10361,7 +10361,7 @@
           <p:cNvPr id="8" name="">
             <a:extLst xmlns:a="http://schemas.openxmlformats.org/drawingml/2006/main">
               <a:ext uri="{FF2B5EF4-FFF2-40B4-BE49-F238E27FC236}">
-                <a16:creationId xmlns:a16="http://schemas.microsoft.com/office/drawing/2014/main" id="{A4E8B400-2D01-419B-90C2-E61D8F9DCB65}"/>
+                <a16:creationId xmlns:a16="http://schemas.microsoft.com/office/drawing/2014/main" id="{B9BBF76A-A319-4292-B928-9C36DBA6E37E}"/>
               </a:ext>
             </a:extLst>
           </p:cNvPr>
@@ -10418,7 +10418,7 @@
           <p:cNvPr id="9" name="">
             <a:extLst xmlns:a="http://schemas.openxmlformats.org/drawingml/2006/main">
               <a:ext uri="{FF2B5EF4-FFF2-40B4-BE49-F238E27FC236}">
-                <a16:creationId xmlns:a16="http://schemas.microsoft.com/office/drawing/2014/main" id="{8AB9928E-161E-4ECB-AF9B-14A602AAB5C1}"/>
+                <a16:creationId xmlns:a16="http://schemas.microsoft.com/office/drawing/2014/main" id="{0C78E2DA-B396-4620-9212-A70439E84988}"/>
               </a:ext>
             </a:extLst>
           </p:cNvPr>
@@ -10475,7 +10475,7 @@
           <p:cNvPr id="10" name="">
             <a:extLst xmlns:a="http://schemas.openxmlformats.org/drawingml/2006/main">
               <a:ext uri="{FF2B5EF4-FFF2-40B4-BE49-F238E27FC236}">
-                <a16:creationId xmlns:a16="http://schemas.microsoft.com/office/drawing/2014/main" id="{BDF9EB15-F4CF-4A0E-9199-03D2F20615D8}"/>
+                <a16:creationId xmlns:a16="http://schemas.microsoft.com/office/drawing/2014/main" id="{CDEF4228-4D19-44C6-BD40-0FC5B01BB250}"/>
               </a:ext>
             </a:extLst>
           </p:cNvPr>
@@ -10532,7 +10532,7 @@
           <p:cNvPr id="11" name="">
             <a:extLst xmlns:a="http://schemas.openxmlformats.org/drawingml/2006/main">
               <a:ext uri="{FF2B5EF4-FFF2-40B4-BE49-F238E27FC236}">
-                <a16:creationId xmlns:a16="http://schemas.microsoft.com/office/drawing/2014/main" id="{AB530495-445B-4D96-8619-FD319876366B}"/>
+                <a16:creationId xmlns:a16="http://schemas.microsoft.com/office/drawing/2014/main" id="{5E8C01E5-19DC-4EF3-ADFA-BE57413C8AF1}"/>
               </a:ext>
             </a:extLst>
           </p:cNvPr>
@@ -10589,7 +10589,7 @@
           <p:cNvPr id="12" name="">
             <a:extLst xmlns:a="http://schemas.openxmlformats.org/drawingml/2006/main">
               <a:ext uri="{FF2B5EF4-FFF2-40B4-BE49-F238E27FC236}">
-                <a16:creationId xmlns:a16="http://schemas.microsoft.com/office/drawing/2014/main" id="{4F2D89CE-A2B4-4D33-84D2-9B6C4B8B612A}"/>
+                <a16:creationId xmlns:a16="http://schemas.microsoft.com/office/drawing/2014/main" id="{0978DFED-C6DE-461A-985D-E3A8D4B35599}"/>
               </a:ext>
             </a:extLst>
           </p:cNvPr>
@@ -10646,7 +10646,7 @@
           <p:cNvPr id="13" name="">
             <a:extLst xmlns:a="http://schemas.openxmlformats.org/drawingml/2006/main">
               <a:ext uri="{FF2B5EF4-FFF2-40B4-BE49-F238E27FC236}">
-                <a16:creationId xmlns:a16="http://schemas.microsoft.com/office/drawing/2014/main" id="{CE10EDA2-02C3-46F2-BCA7-323BC18C4610}"/>
+                <a16:creationId xmlns:a16="http://schemas.microsoft.com/office/drawing/2014/main" id="{62C250AA-E2EF-47D8-AAFD-303F5323C6A2}"/>
               </a:ext>
             </a:extLst>
           </p:cNvPr>
@@ -10693,7 +10693,7 @@
                 <a:ea typeface="Heiti TC"/>
                 <a:cs typeface="Heiti TC"/>
               </a:rPr>
-              <a:t>10 超出觀察範圍，可能較不可靠。趨勢不保證個別結果。</a:t>
+              <a:t>10 小時超出觀察範圍。這些數據也不能證明，溫習會令分數上升。</a:t>
             </a:r>
           </a:p>
         </p:txBody>
@@ -10703,7 +10703,7 @@
           <p:cNvPr id="14" name="">
             <a:extLst xmlns:a="http://schemas.openxmlformats.org/drawingml/2006/main">
               <a:ext uri="{FF2B5EF4-FFF2-40B4-BE49-F238E27FC236}">
-                <a16:creationId xmlns:a16="http://schemas.microsoft.com/office/drawing/2014/main" id="{E40AFA05-865F-4C9D-A46A-228C271CEF62}"/>
+                <a16:creationId xmlns:a16="http://schemas.microsoft.com/office/drawing/2014/main" id="{91827B3E-7CFF-4E03-A174-B2269AA00D03}"/>
               </a:ext>
             </a:extLst>
           </p:cNvPr>
@@ -10750,7 +10750,7 @@
                 <a:ea typeface="Arial"/>
                 <a:cs typeface="Arial"/>
               </a:rPr>
-              <a:t>10 is outside the observed range. The trend does not guarantee an individual result.</a:t>
+              <a:t>10 hours is outside the data range. The data does not prove cause and effect.</a:t>
             </a:r>
           </a:p>
         </p:txBody>
@@ -10758,7 +10758,7 @@
     </p:spTree>
     <p:extLst>
       <p:ext uri="{BB962C8B-B14F-4D97-AF65-F5344CB8AC3E}">
-        <p14:creationId xmlns:p14="http://schemas.microsoft.com/office/powerpoint/2010/main" val="1655985118"/>
+        <p14:creationId xmlns:p14="http://schemas.microsoft.com/office/powerpoint/2010/main" val="1458926338"/>
       </p:ext>
     </p:extLst>
   </p:cSld>

--- a/teacher-slides.pptx
+++ b/teacher-slides.pptx
@@ -2,22 +2,25 @@
 <file path=ppt/presentation.xml><?xml version="1.0" encoding="utf-8"?>
 <p:presentation xmlns:p="http://schemas.openxmlformats.org/presentationml/2006/main">
   <p:sldMasterIdLst>
-    <p:sldMasterId xmlns:r="http://schemas.openxmlformats.org/officeDocument/2006/relationships" id="2147483648" r:id="Rb55f726044294dd2"/>
+    <p:sldMasterId xmlns:r="http://schemas.openxmlformats.org/officeDocument/2006/relationships" id="2147483648" r:id="Re7ac0da436ea4e50"/>
   </p:sldMasterIdLst>
   <p:notesMasterIdLst>
-    <p:notesMasterId xmlns:r="http://schemas.openxmlformats.org/officeDocument/2006/relationships" r:id="R43d2231ef32b4834"/>
+    <p:notesMasterId xmlns:r="http://schemas.openxmlformats.org/officeDocument/2006/relationships" r:id="R9faf2428b4d94bb8"/>
   </p:notesMasterIdLst>
   <p:sldIdLst>
-    <p:sldId xmlns:r="http://schemas.openxmlformats.org/officeDocument/2006/relationships" id="256" r:id="R9eeb596dd618401f"/>
-    <p:sldId xmlns:r="http://schemas.openxmlformats.org/officeDocument/2006/relationships" id="257" r:id="R6b17db8c0c084bd6"/>
-    <p:sldId xmlns:r="http://schemas.openxmlformats.org/officeDocument/2006/relationships" id="258" r:id="R5cc6cd62321b49eb"/>
-    <p:sldId xmlns:r="http://schemas.openxmlformats.org/officeDocument/2006/relationships" id="259" r:id="Rceaea2d0ddc84b88"/>
-    <p:sldId xmlns:r="http://schemas.openxmlformats.org/officeDocument/2006/relationships" id="260" r:id="Rf40f9121cd854655"/>
-    <p:sldId xmlns:r="http://schemas.openxmlformats.org/officeDocument/2006/relationships" id="261" r:id="R0fdc9f88cfe6451f"/>
-    <p:sldId xmlns:r="http://schemas.openxmlformats.org/officeDocument/2006/relationships" id="262" r:id="Rc503c2a19276432c"/>
-    <p:sldId xmlns:r="http://schemas.openxmlformats.org/officeDocument/2006/relationships" id="263" r:id="Rf7e0003446c8413d"/>
-    <p:sldId xmlns:r="http://schemas.openxmlformats.org/officeDocument/2006/relationships" id="264" r:id="Re5782a9b40f24c0c"/>
-    <p:sldId xmlns:r="http://schemas.openxmlformats.org/officeDocument/2006/relationships" id="265" r:id="R8a382e59d5fa4da3"/>
+    <p:sldId xmlns:r="http://schemas.openxmlformats.org/officeDocument/2006/relationships" id="256" r:id="R52fd9ce97ad34602"/>
+    <p:sldId xmlns:r="http://schemas.openxmlformats.org/officeDocument/2006/relationships" id="257" r:id="Rad116241efec49af"/>
+    <p:sldId xmlns:r="http://schemas.openxmlformats.org/officeDocument/2006/relationships" id="258" r:id="Rf25faecb9a3c4a29"/>
+    <p:sldId xmlns:r="http://schemas.openxmlformats.org/officeDocument/2006/relationships" id="259" r:id="R77fc7907063c4f47"/>
+    <p:sldId xmlns:r="http://schemas.openxmlformats.org/officeDocument/2006/relationships" id="260" r:id="Re9b54175590c43f2"/>
+    <p:sldId xmlns:r="http://schemas.openxmlformats.org/officeDocument/2006/relationships" id="261" r:id="R40a6da4fc05e41db"/>
+    <p:sldId xmlns:r="http://schemas.openxmlformats.org/officeDocument/2006/relationships" id="262" r:id="R5ab300ba79b54d4e"/>
+    <p:sldId xmlns:r="http://schemas.openxmlformats.org/officeDocument/2006/relationships" id="263" r:id="R1b655e49cb554ee1"/>
+    <p:sldId xmlns:r="http://schemas.openxmlformats.org/officeDocument/2006/relationships" id="264" r:id="Rc63fdd3cd2c94873"/>
+    <p:sldId xmlns:r="http://schemas.openxmlformats.org/officeDocument/2006/relationships" id="265" r:id="R9179710d8f94441e"/>
+    <p:sldId xmlns:r="http://schemas.openxmlformats.org/officeDocument/2006/relationships" id="266" r:id="R723eb1c2e9a34f10"/>
+    <p:sldId xmlns:r="http://schemas.openxmlformats.org/officeDocument/2006/relationships" id="267" r:id="R678a0e2c22f64d93"/>
+    <p:sldId xmlns:r="http://schemas.openxmlformats.org/officeDocument/2006/relationships" id="268" r:id="R1b152f4cf25d4c8a"/>
   </p:sldIdLst>
   <p:sldSz cx="12192000" cy="6858000"/>
   <p:notesSz cx="6858000" cy="9144000"/>
@@ -521,6 +524,216 @@
           <a:lstStyle xmlns:a="http://schemas.openxmlformats.org/drawingml/2006/main"/>
           <a:p xmlns:a="http://schemas.openxmlformats.org/drawingml/2006/main">
             <a:r>
+              <a:t>Start Step 2. Students keep their selected dataset and click or tap the graph. Ask them to predict first, compare m and c, and use Undo or Reset between experiments. Have students undo after each trial before comparing a different new point.</a:t>
+            </a:r>
+          </a:p>
+        </p:txBody>
+      </p:sp>
+      <p:sp>
+        <p:nvSpPr>
+          <p:cNvPr id="4" name="Slide Number Placeholder 3"/>
+          <p:cNvSpPr>
+            <a:spLocks xmlns:a="http://schemas.openxmlformats.org/drawingml/2006/main" noGrp="1"/>
+          </p:cNvSpPr>
+          <p:nvPr>
+            <p:ph type="sldNum" idx="5"/>
+          </p:nvPr>
+        </p:nvSpPr>
+        <p:spPr/>
+        <p:txBody>
+          <a:bodyPr xmlns:a="http://schemas.openxmlformats.org/drawingml/2006/main"/>
+          <a:lstStyle xmlns:a="http://schemas.openxmlformats.org/drawingml/2006/main"/>
+          <a:p xmlns:a="http://schemas.openxmlformats.org/drawingml/2006/main"/>
+        </p:txBody>
+      </p:sp>
+    </p:spTree>
+  </p:cSld>
+  <p:clrMapOvr>
+    <a:masterClrMapping xmlns:a="http://schemas.openxmlformats.org/drawingml/2006/main"/>
+  </p:clrMapOvr>
+</p:notes>
+</file>
+
+<file path=ppt/notesSlides/notesSlide11.xml><?xml version="1.0" encoding="utf-8"?>
+<p:notes xmlns:p="http://schemas.openxmlformats.org/presentationml/2006/main">
+  <p:cSld>
+    <p:spTree>
+      <p:nvGrpSpPr>
+        <p:cNvPr id="1" name=""/>
+        <p:cNvGrpSpPr/>
+        <p:nvPr/>
+      </p:nvGrpSpPr>
+      <p:grpSpPr>
+        <a:xfrm xmlns:a="http://schemas.openxmlformats.org/drawingml/2006/main"/>
+      </p:grpSpPr>
+      <p:sp>
+        <p:nvSpPr>
+          <p:cNvPr id="2" name="Slide Image Placeholder 1"/>
+          <p:cNvSpPr>
+            <a:spLocks xmlns:a="http://schemas.openxmlformats.org/drawingml/2006/main" noGrp="1"/>
+          </p:cNvSpPr>
+          <p:nvPr>
+            <p:ph type="sldImg" idx="0"/>
+          </p:nvPr>
+        </p:nvSpPr>
+        <p:spPr/>
+      </p:sp>
+      <p:sp>
+        <p:nvSpPr>
+          <p:cNvPr id="3" name="Notes Placeholder 2"/>
+          <p:cNvSpPr>
+            <a:spLocks xmlns:a="http://schemas.openxmlformats.org/drawingml/2006/main" noGrp="1"/>
+          </p:cNvSpPr>
+          <p:nvPr>
+            <p:ph type="body" idx="1"/>
+          </p:nvPr>
+        </p:nvSpPr>
+        <p:spPr/>
+        <p:txBody>
+          <a:bodyPr xmlns:a="http://schemas.openxmlformats.org/drawingml/2006/main"/>
+          <a:lstStyle xmlns:a="http://schemas.openxmlformats.org/drawingml/2006/main"/>
+          <a:p xmlns:a="http://schemas.openxmlformats.org/drawingml/2006/main">
+            <a:r>
+              <a:t>Start Step 3. Each dot represents simulated observations from a different student. Students first draw an intuitive straight line on the worksheet, then estimate the score for 3.5 hours per day and record it before checking the page. Axes are fixed at 0–24 hours and 0–100 marks. A trend does not prove that more study guarantees a score.</a:t>
+            </a:r>
+          </a:p>
+        </p:txBody>
+      </p:sp>
+      <p:sp>
+        <p:nvSpPr>
+          <p:cNvPr id="4" name="Slide Number Placeholder 3"/>
+          <p:cNvSpPr>
+            <a:spLocks xmlns:a="http://schemas.openxmlformats.org/drawingml/2006/main" noGrp="1"/>
+          </p:cNvSpPr>
+          <p:nvPr>
+            <p:ph type="sldNum" idx="5"/>
+          </p:nvPr>
+        </p:nvSpPr>
+        <p:spPr/>
+        <p:txBody>
+          <a:bodyPr xmlns:a="http://schemas.openxmlformats.org/drawingml/2006/main"/>
+          <a:lstStyle xmlns:a="http://schemas.openxmlformats.org/drawingml/2006/main"/>
+          <a:p xmlns:a="http://schemas.openxmlformats.org/drawingml/2006/main"/>
+        </p:txBody>
+      </p:sp>
+    </p:spTree>
+  </p:cSld>
+  <p:clrMapOvr>
+    <a:masterClrMapping xmlns:a="http://schemas.openxmlformats.org/drawingml/2006/main"/>
+  </p:clrMapOvr>
+</p:notes>
+</file>
+
+<file path=ppt/notesSlides/notesSlide12.xml><?xml version="1.0" encoding="utf-8"?>
+<p:notes xmlns:p="http://schemas.openxmlformats.org/presentationml/2006/main">
+  <p:cSld>
+    <p:spTree>
+      <p:nvGrpSpPr>
+        <p:cNvPr id="1" name=""/>
+        <p:cNvGrpSpPr/>
+        <p:nvPr/>
+      </p:nvGrpSpPr>
+      <p:grpSpPr>
+        <a:xfrm xmlns:a="http://schemas.openxmlformats.org/drawingml/2006/main"/>
+      </p:grpSpPr>
+      <p:sp>
+        <p:nvSpPr>
+          <p:cNvPr id="2" name="Slide Image Placeholder 1"/>
+          <p:cNvSpPr>
+            <a:spLocks xmlns:a="http://schemas.openxmlformats.org/drawingml/2006/main" noGrp="1"/>
+          </p:cNvSpPr>
+          <p:nvPr>
+            <p:ph type="sldImg" idx="0"/>
+          </p:nvPr>
+        </p:nvSpPr>
+        <p:spPr/>
+      </p:sp>
+      <p:sp>
+        <p:nvSpPr>
+          <p:cNvPr id="3" name="Notes Placeholder 2"/>
+          <p:cNvSpPr>
+            <a:spLocks xmlns:a="http://schemas.openxmlformats.org/drawingml/2006/main" noGrp="1"/>
+          </p:cNvSpPr>
+          <p:nvPr>
+            <p:ph type="body" idx="1"/>
+          </p:nvPr>
+        </p:nvSpPr>
+        <p:spPr/>
+        <p:txBody>
+          <a:bodyPr xmlns:a="http://schemas.openxmlformats.org/drawingml/2006/main"/>
+          <a:lstStyle xmlns:a="http://schemas.openxmlformats.org/drawingml/2006/main"/>
+          <a:p xmlns:a="http://schemas.openxmlformats.org/drawingml/2006/main">
+            <a:r>
+              <a:t>After written predictions. The fitted line is y=2x+50. m is about 2 marks per extra study hour in this model. c is the estimated score at zero hours. 3.5 hours is within the observed 0–6-hour range. 10 hours is outside. At 24 hours the model gives 98 marks, but this remains far outside the observed range and cannot guarantee a result. Discuss how other factors influence scores. Say: 這些數據不能證明，多溫習一小時就會令成績增加兩分。 These data do not show that an extra study hour causes a two-mark increase.</a:t>
+            </a:r>
+          </a:p>
+        </p:txBody>
+      </p:sp>
+      <p:sp>
+        <p:nvSpPr>
+          <p:cNvPr id="4" name="Slide Number Placeholder 3"/>
+          <p:cNvSpPr>
+            <a:spLocks xmlns:a="http://schemas.openxmlformats.org/drawingml/2006/main" noGrp="1"/>
+          </p:cNvSpPr>
+          <p:nvPr>
+            <p:ph type="sldNum" idx="5"/>
+          </p:nvPr>
+        </p:nvSpPr>
+        <p:spPr/>
+        <p:txBody>
+          <a:bodyPr xmlns:a="http://schemas.openxmlformats.org/drawingml/2006/main"/>
+          <a:lstStyle xmlns:a="http://schemas.openxmlformats.org/drawingml/2006/main"/>
+          <a:p xmlns:a="http://schemas.openxmlformats.org/drawingml/2006/main"/>
+        </p:txBody>
+      </p:sp>
+    </p:spTree>
+  </p:cSld>
+  <p:clrMapOvr>
+    <a:masterClrMapping xmlns:a="http://schemas.openxmlformats.org/drawingml/2006/main"/>
+  </p:clrMapOvr>
+</p:notes>
+</file>
+
+<file path=ppt/notesSlides/notesSlide13.xml><?xml version="1.0" encoding="utf-8"?>
+<p:notes xmlns:p="http://schemas.openxmlformats.org/presentationml/2006/main">
+  <p:cSld>
+    <p:spTree>
+      <p:nvGrpSpPr>
+        <p:cNvPr id="1" name=""/>
+        <p:cNvGrpSpPr/>
+        <p:nvPr/>
+      </p:nvGrpSpPr>
+      <p:grpSpPr>
+        <a:xfrm xmlns:a="http://schemas.openxmlformats.org/drawingml/2006/main"/>
+      </p:grpSpPr>
+      <p:sp>
+        <p:nvSpPr>
+          <p:cNvPr id="2" name="Slide Image Placeholder 1"/>
+          <p:cNvSpPr>
+            <a:spLocks xmlns:a="http://schemas.openxmlformats.org/drawingml/2006/main" noGrp="1"/>
+          </p:cNvSpPr>
+          <p:nvPr>
+            <p:ph type="sldImg" idx="0"/>
+          </p:nvPr>
+        </p:nvSpPr>
+        <p:spPr/>
+      </p:sp>
+      <p:sp>
+        <p:nvSpPr>
+          <p:cNvPr id="3" name="Notes Placeholder 2"/>
+          <p:cNvSpPr>
+            <a:spLocks xmlns:a="http://schemas.openxmlformats.org/drawingml/2006/main" noGrp="1"/>
+          </p:cNvSpPr>
+          <p:nvPr>
+            <p:ph type="body" idx="1"/>
+          </p:nvPr>
+        </p:nvSpPr>
+        <p:spPr/>
+        <p:txBody>
+          <a:bodyPr xmlns:a="http://schemas.openxmlformats.org/drawingml/2006/main"/>
+          <a:lstStyle xmlns:a="http://schemas.openxmlformats.org/drawingml/2006/main"/>
+          <a:p xmlns:a="http://schemas.openxmlformats.org/drawingml/2006/main">
+            <a:r>
               <a:t>Final 5 minutes. Students complete the last worksheet section. Ask pairs to share one observation. Review initial value and rate of change without proof or rigorous mathematics.</a:t>
             </a:r>
           </a:p>
@@ -941,7 +1154,7 @@
           <a:lstStyle xmlns:a="http://schemas.openxmlformats.org/drawingml/2006/main"/>
           <a:p xmlns:a="http://schemas.openxmlformats.org/drawingml/2006/main">
             <a:r>
-              <a:t>Start Step 2. Students keep their selected dataset and click or tap the graph. Ask them to predict first, compare m and c, and use Undo or Reset between experiments. Have students undo after each trial before comparing a different new point.</a:t>
+              <a:t>Allow about 40 seconds. A supervised model learns from examples of inputs and observed outputs. Here the computer selects the line from the data, rather than a person specifying its final slope and starting value. The left line is an illustrative starting guess, not a recorded training run. The right line summarises the data better. Do not introduce loss, gradients or manual calculations. Source: https://developers.google.com/machine-learning/crash-course/linear-regression</a:t>
             </a:r>
           </a:p>
         </p:txBody>
@@ -1011,7 +1224,7 @@
           <a:lstStyle xmlns:a="http://schemas.openxmlformats.org/drawingml/2006/main"/>
           <a:p xmlns:a="http://schemas.openxmlformats.org/drawingml/2006/main">
             <a:r>
-              <a:t>Start Step 3. Each dot represents simulated observations from a different student. Students first draw an intuitive straight line on the worksheet, then estimate the score for 3.5 hours per day and record it before checking the page. Axes are fixed at 0–24 hours and 0–100 marks. A trend does not prove that more study guarantees a score.</a:t>
+              <a:t>Allow about 40 seconds. Linear regression is a simple window into machine learning, not a claim that every AI system is a straight line. Many modern AI systems use neural networks, which can model nonlinear patterns from richer inputs. Use image recognition or a text model as familiar examples. Text language models predict a next token from context; say next piece of text rather than teaching tokenization. Sources: https://developers.google.com/machine-learning/crash-course/neural-networks and https://developers.google.com/machine-learning/crash-course/llm</a:t>
             </a:r>
           </a:p>
         </p:txBody>
@@ -1081,7 +1294,7 @@
           <a:lstStyle xmlns:a="http://schemas.openxmlformats.org/drawingml/2006/main"/>
           <a:p xmlns:a="http://schemas.openxmlformats.org/drawingml/2006/main">
             <a:r>
-              <a:t>After written predictions. The fitted line is y=2x+50. m is about 2 marks per extra study hour in this model. c is the estimated score at zero hours. 3.5 hours is within the observed 0–6-hour range. 10 hours is outside. At 24 hours the model gives 98 marks, but this remains far outside the observed range and cannot guarantee a result. Discuss how other factors influence scores. Say: 這些數據不能證明，多溫習一小時就會令成績增加兩分。 These data do not show that an extra study hour causes a two-mark increase.</a:t>
+              <a:t>Allow about 40 seconds. Fitting the examples is not sufficient: test predictions on new examples withheld during learning. This gives evidence about generalization, not a guarantee. To check a model, predict outcomes for examples it did not learn from, then compare with their actual outcomes. Today, comparing a student line with the browser line helps discuss different models; it does not establish their real-world accuracy. Data quality also matters, as one unusual point in the activity can change the fitted line. Keep training/test terminology optional. Source: https://developers.google.com/machine-learning/crash-course/overfitting/generalization</a:t>
             </a:r>
           </a:p>
         </p:txBody>
@@ -1149,7 +1362,7 @@
   </p:cSld>
   <p:clrMap bg1="lt1" tx1="dk1" bg2="lt2" tx2="dk2" accent1="accent1" accent2="accent2" accent3="accent3" accent4="accent4" accent5="accent5" accent6="accent6" hlink="hlink" folHlink="folHlink"/>
   <p:sldLayoutIdLst>
-    <p:sldLayoutId xmlns:r="http://schemas.openxmlformats.org/officeDocument/2006/relationships" id="2147483649" r:id="Rf63da96829ba4fa7"/>
+    <p:sldLayoutId xmlns:r="http://schemas.openxmlformats.org/officeDocument/2006/relationships" id="2147483649" r:id="Read5b99529b34d17"/>
   </p:sldLayoutIdLst>
   <p:txStyles>
     <p:titleStyle>
@@ -1986,6 +2199,308 @@
 </c:chartSpace>
 </file>
 
+<file path=ppt/slides/charts/chart10.xml><?xml version="1.0" encoding="utf-8"?>
+<c:chartSpace xmlns:c="http://schemas.openxmlformats.org/drawingml/2006/chart">
+  <c:lang val="en-US"/>
+  <c:chart>
+    <c:plotArea>
+      <c:scatterChart>
+        <c:scatterStyle val="lineMarker"/>
+        <c:ser>
+          <c:idx val="0"/>
+          <c:order val="0"/>
+          <c:tx>
+            <c:v>模擬學生 / Simulated students</c:v>
+          </c:tx>
+          <c:spPr>
+            <a:solidFill xmlns:a="http://schemas.openxmlformats.org/drawingml/2006/main">
+              <a:srgbClr val="086C61"/>
+            </a:solidFill>
+            <a:ln xmlns:a="http://schemas.openxmlformats.org/drawingml/2006/main" w="0">
+              <a:noFill/>
+            </a:ln>
+          </c:spPr>
+          <c:marker>
+            <c:symbol val="circle"/>
+            <c:size val="9"/>
+            <c:spPr>
+              <a:noFill xmlns:a="http://schemas.openxmlformats.org/drawingml/2006/main"/>
+            </c:spPr>
+          </c:marker>
+          <c:xVal>
+            <c:numLit>
+              <c:formatCode>General</c:formatCode>
+              <c:ptCount val="7"/>
+              <c:pt idx="0">
+                <c:v>0</c:v>
+              </c:pt>
+              <c:pt idx="1">
+                <c:v>1</c:v>
+              </c:pt>
+              <c:pt idx="2">
+                <c:v>2</c:v>
+              </c:pt>
+              <c:pt idx="3">
+                <c:v>3</c:v>
+              </c:pt>
+              <c:pt idx="4">
+                <c:v>4</c:v>
+              </c:pt>
+              <c:pt idx="5">
+                <c:v>5</c:v>
+              </c:pt>
+              <c:pt idx="6">
+                <c:v>6</c:v>
+              </c:pt>
+            </c:numLit>
+          </c:xVal>
+          <c:yVal>
+            <c:numLit>
+              <c:formatCode>0</c:formatCode>
+              <c:ptCount val="7"/>
+              <c:pt idx="0">
+                <c:v>53</c:v>
+              </c:pt>
+              <c:pt idx="1">
+                <c:v>46</c:v>
+              </c:pt>
+              <c:pt idx="2">
+                <c:v>59</c:v>
+              </c:pt>
+              <c:pt idx="3">
+                <c:v>52</c:v>
+              </c:pt>
+              <c:pt idx="4">
+                <c:v>63</c:v>
+              </c:pt>
+              <c:pt idx="5">
+                <c:v>54</c:v>
+              </c:pt>
+              <c:pt idx="6">
+                <c:v>65</c:v>
+              </c:pt>
+            </c:numLit>
+          </c:yVal>
+        </c:ser>
+        <c:dLbls>
+          <c:txPr>
+            <a:bodyPr xmlns:a="http://schemas.openxmlformats.org/drawingml/2006/main" anchorCtr="1"/>
+            <a:lstStyle xmlns:a="http://schemas.openxmlformats.org/drawingml/2006/main"/>
+            <a:p xmlns:a="http://schemas.openxmlformats.org/drawingml/2006/main">
+              <a:pPr>
+                <a:defRPr>
+                  <a:latin typeface="Heiti TC"/>
+                  <a:ea typeface="Heiti TC"/>
+                  <a:cs typeface="Heiti TC"/>
+                </a:defRPr>
+              </a:pPr>
+            </a:p>
+          </c:txPr>
+          <c:showLegendKey val="0"/>
+          <c:showVal val="0"/>
+          <c:showCatName val="0"/>
+          <c:showSerName val="0"/>
+          <c:showPercent val="0"/>
+          <c:showBubbleSize val="0"/>
+          <c:showLeaderLines val="0"/>
+        </c:dLbls>
+        <c:axId val="48650112"/>
+        <c:axId val="48672768"/>
+      </c:scatterChart>
+      <c:valAx>
+        <c:axId val="48672768"/>
+        <c:scaling>
+          <c:orientation val="minMax"/>
+          <c:max val="100"/>
+          <c:min val="0"/>
+        </c:scaling>
+        <c:delete val="0"/>
+        <c:axPos val="l"/>
+        <c:majorGridlines>
+          <c:spPr>
+            <a:ln xmlns:a="http://schemas.openxmlformats.org/drawingml/2006/main" w="9525">
+              <a:solidFill>
+                <a:srgbClr val="D8E4DF"/>
+              </a:solidFill>
+            </a:ln>
+          </c:spPr>
+        </c:majorGridlines>
+        <c:title>
+          <c:tx>
+            <c:rich>
+              <a:bodyPr xmlns:a="http://schemas.openxmlformats.org/drawingml/2006/main"/>
+              <a:lstStyle xmlns:a="http://schemas.openxmlformats.org/drawingml/2006/main"/>
+              <a:p xmlns:a="http://schemas.openxmlformats.org/drawingml/2006/main">
+                <a:r>
+                  <a:rPr sz="1650">
+                    <a:solidFill>
+                      <a:srgbClr val="173C43"/>
+                    </a:solidFill>
+                    <a:latin typeface="Heiti TC"/>
+                    <a:ea typeface="Heiti TC"/>
+                    <a:cs typeface="Heiti TC"/>
+                  </a:rPr>
+                  <a:t>考試成績 / Exam score</a:t>
+                </a:r>
+              </a:p>
+            </c:rich>
+          </c:tx>
+          <c:overlay val="0"/>
+          <c:txPr>
+            <a:bodyPr xmlns:a="http://schemas.openxmlformats.org/drawingml/2006/main" anchorCtr="1"/>
+            <a:lstStyle xmlns:a="http://schemas.openxmlformats.org/drawingml/2006/main"/>
+            <a:p xmlns:a="http://schemas.openxmlformats.org/drawingml/2006/main">
+              <a:pPr>
+                <a:defRPr sz="1650">
+                  <a:solidFill>
+                    <a:srgbClr val="173C43"/>
+                  </a:solidFill>
+                  <a:latin typeface="Heiti TC"/>
+                  <a:ea typeface="Heiti TC"/>
+                  <a:cs typeface="Heiti TC"/>
+                </a:defRPr>
+              </a:pPr>
+            </a:p>
+          </c:txPr>
+        </c:title>
+        <c:numFmt formatCode="0"/>
+        <c:majorTickMark val="none"/>
+        <c:minorTickMark val="none"/>
+        <c:spPr>
+          <a:ln xmlns:a="http://schemas.openxmlformats.org/drawingml/2006/main" w="9525">
+            <a:solidFill>
+              <a:srgbClr val="526B70"/>
+            </a:solidFill>
+          </a:ln>
+        </c:spPr>
+        <c:txPr>
+          <a:bodyPr xmlns:a="http://schemas.openxmlformats.org/drawingml/2006/main" anchorCtr="1"/>
+          <a:lstStyle xmlns:a="http://schemas.openxmlformats.org/drawingml/2006/main"/>
+          <a:p xmlns:a="http://schemas.openxmlformats.org/drawingml/2006/main">
+            <a:pPr>
+              <a:defRPr sz="1500">
+                <a:solidFill>
+                  <a:srgbClr val="526B70"/>
+                </a:solidFill>
+                <a:latin typeface="Heiti TC"/>
+                <a:ea typeface="Heiti TC"/>
+                <a:cs typeface="Heiti TC"/>
+              </a:defRPr>
+            </a:pPr>
+          </a:p>
+        </c:txPr>
+        <c:crossAx val="48650112"/>
+        <c:majorUnit val="20"/>
+      </c:valAx>
+      <c:valAx>
+        <c:axId val="48650112"/>
+        <c:scaling>
+          <c:orientation val="minMax"/>
+          <c:max val="24"/>
+          <c:min val="0"/>
+        </c:scaling>
+        <c:delete val="0"/>
+        <c:axPos val="b"/>
+        <c:majorGridlines>
+          <c:spPr>
+            <a:ln xmlns:a="http://schemas.openxmlformats.org/drawingml/2006/main" w="9525">
+              <a:solidFill>
+                <a:srgbClr val="D8E4DF"/>
+              </a:solidFill>
+            </a:ln>
+          </c:spPr>
+        </c:majorGridlines>
+        <c:title>
+          <c:tx>
+            <c:rich>
+              <a:bodyPr xmlns:a="http://schemas.openxmlformats.org/drawingml/2006/main"/>
+              <a:lstStyle xmlns:a="http://schemas.openxmlformats.org/drawingml/2006/main"/>
+              <a:p xmlns:a="http://schemas.openxmlformats.org/drawingml/2006/main">
+                <a:r>
+                  <a:rPr sz="1650">
+                    <a:solidFill>
+                      <a:srgbClr val="173C43"/>
+                    </a:solidFill>
+                    <a:latin typeface="Heiti TC"/>
+                    <a:ea typeface="Heiti TC"/>
+                    <a:cs typeface="Heiti TC"/>
+                  </a:rPr>
+                  <a:t>每天溫習時間 / Daily study time (h)</a:t>
+                </a:r>
+              </a:p>
+            </c:rich>
+          </c:tx>
+          <c:overlay val="0"/>
+          <c:txPr>
+            <a:bodyPr xmlns:a="http://schemas.openxmlformats.org/drawingml/2006/main" anchorCtr="1"/>
+            <a:lstStyle xmlns:a="http://schemas.openxmlformats.org/drawingml/2006/main"/>
+            <a:p xmlns:a="http://schemas.openxmlformats.org/drawingml/2006/main">
+              <a:pPr>
+                <a:defRPr sz="1650">
+                  <a:solidFill>
+                    <a:srgbClr val="173C43"/>
+                  </a:solidFill>
+                  <a:latin typeface="Heiti TC"/>
+                  <a:ea typeface="Heiti TC"/>
+                  <a:cs typeface="Heiti TC"/>
+                </a:defRPr>
+              </a:pPr>
+            </a:p>
+          </c:txPr>
+        </c:title>
+        <c:numFmt formatCode="0"/>
+        <c:majorTickMark val="none"/>
+        <c:minorTickMark val="none"/>
+        <c:spPr>
+          <a:ln xmlns:a="http://schemas.openxmlformats.org/drawingml/2006/main" w="9525">
+            <a:solidFill>
+              <a:srgbClr val="526B70"/>
+            </a:solidFill>
+          </a:ln>
+        </c:spPr>
+        <c:txPr>
+          <a:bodyPr xmlns:a="http://schemas.openxmlformats.org/drawingml/2006/main" anchorCtr="1"/>
+          <a:lstStyle xmlns:a="http://schemas.openxmlformats.org/drawingml/2006/main"/>
+          <a:p xmlns:a="http://schemas.openxmlformats.org/drawingml/2006/main">
+            <a:pPr>
+              <a:defRPr sz="1500">
+                <a:solidFill>
+                  <a:srgbClr val="526B70"/>
+                </a:solidFill>
+                <a:latin typeface="Heiti TC"/>
+                <a:ea typeface="Heiti TC"/>
+                <a:cs typeface="Heiti TC"/>
+              </a:defRPr>
+            </a:pPr>
+          </a:p>
+        </c:txPr>
+        <c:crossAx val="48672768"/>
+        <c:majorUnit val="6"/>
+      </c:valAx>
+      <c:spPr>
+        <a:solidFill xmlns:a="http://schemas.openxmlformats.org/drawingml/2006/main">
+          <a:srgbClr val="FFFFFF"/>
+        </a:solidFill>
+        <a:ln xmlns:a="http://schemas.openxmlformats.org/drawingml/2006/main" w="9525">
+          <a:solidFill>
+            <a:srgbClr val="D8E4DF"/>
+          </a:solidFill>
+        </a:ln>
+      </c:spPr>
+    </c:plotArea>
+    <c:plotVisOnly val="1"/>
+  </c:chart>
+  <c:spPr>
+    <a:solidFill xmlns:a="http://schemas.openxmlformats.org/drawingml/2006/main">
+      <a:srgbClr val="F5F7F4"/>
+    </a:solidFill>
+    <a:ln xmlns:a="http://schemas.openxmlformats.org/drawingml/2006/main" w="0">
+      <a:noFill/>
+    </a:ln>
+  </c:spPr>
+</c:chartSpace>
+</file>
+
 <file path=ppt/slides/charts/chart2.xml><?xml version="1.0" encoding="utf-8"?>
 <c:chartSpace xmlns:c="http://schemas.openxmlformats.org/drawingml/2006/chart">
   <c:lang val="en-US"/>
@@ -3843,7 +4358,7 @@
           <c:idx val="0"/>
           <c:order val="0"/>
           <c:tx>
-            <c:v>模擬學生 / Simulated students</c:v>
+            <c:v>數據 / Data</c:v>
           </c:tx>
           <c:spPr>
             <a:solidFill xmlns:a="http://schemas.openxmlformats.org/drawingml/2006/main">
@@ -3863,7 +4378,7 @@
           <c:xVal>
             <c:numLit>
               <c:formatCode>General</c:formatCode>
-              <c:ptCount val="7"/>
+              <c:ptCount val="11"/>
               <c:pt idx="0">
                 <c:v>0</c:v>
               </c:pt>
@@ -3884,33 +4399,101 @@
               </c:pt>
               <c:pt idx="6">
                 <c:v>6</c:v>
+              </c:pt>
+              <c:pt idx="7">
+                <c:v>7</c:v>
+              </c:pt>
+              <c:pt idx="8">
+                <c:v>8</c:v>
+              </c:pt>
+              <c:pt idx="9">
+                <c:v>9</c:v>
+              </c:pt>
+              <c:pt idx="10">
+                <c:v>10</c:v>
               </c:pt>
             </c:numLit>
           </c:xVal>
           <c:yVal>
             <c:numLit>
               <c:formatCode>0</c:formatCode>
-              <c:ptCount val="7"/>
+              <c:ptCount val="11"/>
               <c:pt idx="0">
-                <c:v>53</c:v>
+                <c:v>12</c:v>
               </c:pt>
               <c:pt idx="1">
-                <c:v>46</c:v>
+                <c:v>9</c:v>
               </c:pt>
               <c:pt idx="2">
-                <c:v>59</c:v>
+                <c:v>22</c:v>
               </c:pt>
               <c:pt idx="3">
-                <c:v>52</c:v>
+                <c:v>13</c:v>
               </c:pt>
               <c:pt idx="4">
-                <c:v>63</c:v>
+                <c:v>26</c:v>
               </c:pt>
               <c:pt idx="5">
-                <c:v>54</c:v>
+                <c:v>22</c:v>
               </c:pt>
               <c:pt idx="6">
-                <c:v>65</c:v>
+                <c:v>35</c:v>
+              </c:pt>
+              <c:pt idx="7">
+                <c:v>26</c:v>
+              </c:pt>
+              <c:pt idx="8">
+                <c:v>42</c:v>
+              </c:pt>
+              <c:pt idx="9">
+                <c:v>34</c:v>
+              </c:pt>
+              <c:pt idx="10">
+                <c:v>43</c:v>
+              </c:pt>
+            </c:numLit>
+          </c:yVal>
+        </c:ser>
+        <c:ser>
+          <c:idx val="1"/>
+          <c:order val="1"/>
+          <c:tx>
+            <c:v>初步猜測 / Initial guess</c:v>
+          </c:tx>
+          <c:spPr>
+            <a:solidFill xmlns:a="http://schemas.openxmlformats.org/drawingml/2006/main">
+              <a:srgbClr val="B65320"/>
+            </a:solidFill>
+            <a:ln xmlns:a="http://schemas.openxmlformats.org/drawingml/2006/main" w="28575">
+              <a:solidFill>
+                <a:srgbClr val="B65320"/>
+              </a:solidFill>
+            </a:ln>
+          </c:spPr>
+          <c:marker>
+            <c:symbol val="none"/>
+          </c:marker>
+          <c:xVal>
+            <c:numLit>
+              <c:formatCode>General</c:formatCode>
+              <c:ptCount val="2"/>
+              <c:pt idx="0">
+                <c:v>0</c:v>
+              </c:pt>
+              <c:pt idx="1">
+                <c:v>10</c:v>
+              </c:pt>
+            </c:numLit>
+          </c:xVal>
+          <c:yVal>
+            <c:numLit>
+              <c:formatCode>0</c:formatCode>
+              <c:ptCount val="2"/>
+              <c:pt idx="0">
+                <c:v>12</c:v>
+              </c:pt>
+              <c:pt idx="1">
+                <c:v>25</c:v>
               </c:pt>
             </c:numLit>
           </c:yVal>
@@ -3944,7 +4527,7 @@
         <c:axId val="48672768"/>
         <c:scaling>
           <c:orientation val="minMax"/>
-          <c:max val="100"/>
+          <c:max val="50"/>
           <c:min val="0"/>
         </c:scaling>
         <c:delete val="0"/>
@@ -3973,7 +4556,7 @@
                     <a:ea typeface="Heiti TC"/>
                     <a:cs typeface="Heiti TC"/>
                   </a:rPr>
-                  <a:t>考試成績 / Exam score</a:t>
+                  <a:t>y</a:t>
                 </a:r>
               </a:p>
             </c:rich>
@@ -4023,13 +4606,13 @@
           </a:p>
         </c:txPr>
         <c:crossAx val="48650112"/>
-        <c:majorUnit val="20"/>
+        <c:majorUnit val="10"/>
       </c:valAx>
       <c:valAx>
         <c:axId val="48650112"/>
         <c:scaling>
           <c:orientation val="minMax"/>
-          <c:max val="24"/>
+          <c:max val="10"/>
           <c:min val="0"/>
         </c:scaling>
         <c:delete val="0"/>
@@ -4058,7 +4641,7 @@
                     <a:ea typeface="Heiti TC"/>
                     <a:cs typeface="Heiti TC"/>
                   </a:rPr>
-                  <a:t>每天溫習時間 / Daily study time (h)</a:t>
+                  <a:t>x</a:t>
                 </a:r>
               </a:p>
             </c:rich>
@@ -4108,7 +4691,377 @@
           </a:p>
         </c:txPr>
         <c:crossAx val="48672768"/>
-        <c:majorUnit val="6"/>
+        <c:majorUnit val="5"/>
+      </c:valAx>
+      <c:spPr>
+        <a:solidFill xmlns:a="http://schemas.openxmlformats.org/drawingml/2006/main">
+          <a:srgbClr val="FFFFFF"/>
+        </a:solidFill>
+        <a:ln xmlns:a="http://schemas.openxmlformats.org/drawingml/2006/main" w="9525">
+          <a:solidFill>
+            <a:srgbClr val="D8E4DF"/>
+          </a:solidFill>
+        </a:ln>
+      </c:spPr>
+    </c:plotArea>
+    <c:plotVisOnly val="1"/>
+  </c:chart>
+  <c:spPr>
+    <a:solidFill xmlns:a="http://schemas.openxmlformats.org/drawingml/2006/main">
+      <a:srgbClr val="F5F7F4"/>
+    </a:solidFill>
+    <a:ln xmlns:a="http://schemas.openxmlformats.org/drawingml/2006/main" w="0">
+      <a:noFill/>
+    </a:ln>
+  </c:spPr>
+</c:chartSpace>
+</file>
+
+<file path=ppt/slides/charts/chart9.xml><?xml version="1.0" encoding="utf-8"?>
+<c:chartSpace xmlns:c="http://schemas.openxmlformats.org/drawingml/2006/chart">
+  <c:lang val="en-US"/>
+  <c:chart>
+    <c:plotArea>
+      <c:scatterChart>
+        <c:scatterStyle val="lineMarker"/>
+        <c:ser>
+          <c:idx val="0"/>
+          <c:order val="0"/>
+          <c:tx>
+            <c:v>數據 / Data</c:v>
+          </c:tx>
+          <c:spPr>
+            <a:solidFill xmlns:a="http://schemas.openxmlformats.org/drawingml/2006/main">
+              <a:srgbClr val="086C61"/>
+            </a:solidFill>
+            <a:ln xmlns:a="http://schemas.openxmlformats.org/drawingml/2006/main" w="0">
+              <a:noFill/>
+            </a:ln>
+          </c:spPr>
+          <c:marker>
+            <c:symbol val="circle"/>
+            <c:size val="9"/>
+            <c:spPr>
+              <a:noFill xmlns:a="http://schemas.openxmlformats.org/drawingml/2006/main"/>
+            </c:spPr>
+          </c:marker>
+          <c:xVal>
+            <c:numLit>
+              <c:formatCode>General</c:formatCode>
+              <c:ptCount val="11"/>
+              <c:pt idx="0">
+                <c:v>0</c:v>
+              </c:pt>
+              <c:pt idx="1">
+                <c:v>1</c:v>
+              </c:pt>
+              <c:pt idx="2">
+                <c:v>2</c:v>
+              </c:pt>
+              <c:pt idx="3">
+                <c:v>3</c:v>
+              </c:pt>
+              <c:pt idx="4">
+                <c:v>4</c:v>
+              </c:pt>
+              <c:pt idx="5">
+                <c:v>5</c:v>
+              </c:pt>
+              <c:pt idx="6">
+                <c:v>6</c:v>
+              </c:pt>
+              <c:pt idx="7">
+                <c:v>7</c:v>
+              </c:pt>
+              <c:pt idx="8">
+                <c:v>8</c:v>
+              </c:pt>
+              <c:pt idx="9">
+                <c:v>9</c:v>
+              </c:pt>
+              <c:pt idx="10">
+                <c:v>10</c:v>
+              </c:pt>
+            </c:numLit>
+          </c:xVal>
+          <c:yVal>
+            <c:numLit>
+              <c:formatCode>0</c:formatCode>
+              <c:ptCount val="11"/>
+              <c:pt idx="0">
+                <c:v>12</c:v>
+              </c:pt>
+              <c:pt idx="1">
+                <c:v>9</c:v>
+              </c:pt>
+              <c:pt idx="2">
+                <c:v>22</c:v>
+              </c:pt>
+              <c:pt idx="3">
+                <c:v>13</c:v>
+              </c:pt>
+              <c:pt idx="4">
+                <c:v>26</c:v>
+              </c:pt>
+              <c:pt idx="5">
+                <c:v>22</c:v>
+              </c:pt>
+              <c:pt idx="6">
+                <c:v>35</c:v>
+              </c:pt>
+              <c:pt idx="7">
+                <c:v>26</c:v>
+              </c:pt>
+              <c:pt idx="8">
+                <c:v>42</c:v>
+              </c:pt>
+              <c:pt idx="9">
+                <c:v>34</c:v>
+              </c:pt>
+              <c:pt idx="10">
+                <c:v>43</c:v>
+              </c:pt>
+            </c:numLit>
+          </c:yVal>
+        </c:ser>
+        <c:ser>
+          <c:idx val="1"/>
+          <c:order val="1"/>
+          <c:tx>
+            <c:v>較合適的直線 / Better fit</c:v>
+          </c:tx>
+          <c:spPr>
+            <a:solidFill xmlns:a="http://schemas.openxmlformats.org/drawingml/2006/main">
+              <a:srgbClr val="B65320"/>
+            </a:solidFill>
+            <a:ln xmlns:a="http://schemas.openxmlformats.org/drawingml/2006/main" w="28575">
+              <a:solidFill>
+                <a:srgbClr val="B65320"/>
+              </a:solidFill>
+            </a:ln>
+          </c:spPr>
+          <c:marker>
+            <c:symbol val="none"/>
+          </c:marker>
+          <c:xVal>
+            <c:numLit>
+              <c:formatCode>General</c:formatCode>
+              <c:ptCount val="2"/>
+              <c:pt idx="0">
+                <c:v>0</c:v>
+              </c:pt>
+              <c:pt idx="1">
+                <c:v>10</c:v>
+              </c:pt>
+            </c:numLit>
+          </c:xVal>
+          <c:yVal>
+            <c:numLit>
+              <c:formatCode>0</c:formatCode>
+              <c:ptCount val="2"/>
+              <c:pt idx="0">
+                <c:v>9.9090909091</c:v>
+              </c:pt>
+              <c:pt idx="1">
+                <c:v>41.7272727273</c:v>
+              </c:pt>
+            </c:numLit>
+          </c:yVal>
+        </c:ser>
+        <c:dLbls>
+          <c:txPr>
+            <a:bodyPr xmlns:a="http://schemas.openxmlformats.org/drawingml/2006/main" anchorCtr="1"/>
+            <a:lstStyle xmlns:a="http://schemas.openxmlformats.org/drawingml/2006/main"/>
+            <a:p xmlns:a="http://schemas.openxmlformats.org/drawingml/2006/main">
+              <a:pPr>
+                <a:defRPr>
+                  <a:latin typeface="Heiti TC"/>
+                  <a:ea typeface="Heiti TC"/>
+                  <a:cs typeface="Heiti TC"/>
+                </a:defRPr>
+              </a:pPr>
+            </a:p>
+          </c:txPr>
+          <c:showLegendKey val="0"/>
+          <c:showVal val="0"/>
+          <c:showCatName val="0"/>
+          <c:showSerName val="0"/>
+          <c:showPercent val="0"/>
+          <c:showBubbleSize val="0"/>
+          <c:showLeaderLines val="0"/>
+        </c:dLbls>
+        <c:axId val="48650112"/>
+        <c:axId val="48672768"/>
+      </c:scatterChart>
+      <c:valAx>
+        <c:axId val="48672768"/>
+        <c:scaling>
+          <c:orientation val="minMax"/>
+          <c:max val="50"/>
+          <c:min val="0"/>
+        </c:scaling>
+        <c:delete val="0"/>
+        <c:axPos val="l"/>
+        <c:majorGridlines>
+          <c:spPr>
+            <a:ln xmlns:a="http://schemas.openxmlformats.org/drawingml/2006/main" w="9525">
+              <a:solidFill>
+                <a:srgbClr val="D8E4DF"/>
+              </a:solidFill>
+            </a:ln>
+          </c:spPr>
+        </c:majorGridlines>
+        <c:title>
+          <c:tx>
+            <c:rich>
+              <a:bodyPr xmlns:a="http://schemas.openxmlformats.org/drawingml/2006/main"/>
+              <a:lstStyle xmlns:a="http://schemas.openxmlformats.org/drawingml/2006/main"/>
+              <a:p xmlns:a="http://schemas.openxmlformats.org/drawingml/2006/main">
+                <a:r>
+                  <a:rPr sz="1650">
+                    <a:solidFill>
+                      <a:srgbClr val="173C43"/>
+                    </a:solidFill>
+                    <a:latin typeface="Heiti TC"/>
+                    <a:ea typeface="Heiti TC"/>
+                    <a:cs typeface="Heiti TC"/>
+                  </a:rPr>
+                  <a:t>y</a:t>
+                </a:r>
+              </a:p>
+            </c:rich>
+          </c:tx>
+          <c:overlay val="0"/>
+          <c:txPr>
+            <a:bodyPr xmlns:a="http://schemas.openxmlformats.org/drawingml/2006/main" anchorCtr="1"/>
+            <a:lstStyle xmlns:a="http://schemas.openxmlformats.org/drawingml/2006/main"/>
+            <a:p xmlns:a="http://schemas.openxmlformats.org/drawingml/2006/main">
+              <a:pPr>
+                <a:defRPr sz="1650">
+                  <a:solidFill>
+                    <a:srgbClr val="173C43"/>
+                  </a:solidFill>
+                  <a:latin typeface="Heiti TC"/>
+                  <a:ea typeface="Heiti TC"/>
+                  <a:cs typeface="Heiti TC"/>
+                </a:defRPr>
+              </a:pPr>
+            </a:p>
+          </c:txPr>
+        </c:title>
+        <c:numFmt formatCode="0"/>
+        <c:majorTickMark val="none"/>
+        <c:minorTickMark val="none"/>
+        <c:spPr>
+          <a:ln xmlns:a="http://schemas.openxmlformats.org/drawingml/2006/main" w="9525">
+            <a:solidFill>
+              <a:srgbClr val="526B70"/>
+            </a:solidFill>
+          </a:ln>
+        </c:spPr>
+        <c:txPr>
+          <a:bodyPr xmlns:a="http://schemas.openxmlformats.org/drawingml/2006/main" anchorCtr="1"/>
+          <a:lstStyle xmlns:a="http://schemas.openxmlformats.org/drawingml/2006/main"/>
+          <a:p xmlns:a="http://schemas.openxmlformats.org/drawingml/2006/main">
+            <a:pPr>
+              <a:defRPr sz="1500">
+                <a:solidFill>
+                  <a:srgbClr val="526B70"/>
+                </a:solidFill>
+                <a:latin typeface="Heiti TC"/>
+                <a:ea typeface="Heiti TC"/>
+                <a:cs typeface="Heiti TC"/>
+              </a:defRPr>
+            </a:pPr>
+          </a:p>
+        </c:txPr>
+        <c:crossAx val="48650112"/>
+        <c:majorUnit val="10"/>
+      </c:valAx>
+      <c:valAx>
+        <c:axId val="48650112"/>
+        <c:scaling>
+          <c:orientation val="minMax"/>
+          <c:max val="10"/>
+          <c:min val="0"/>
+        </c:scaling>
+        <c:delete val="0"/>
+        <c:axPos val="b"/>
+        <c:majorGridlines>
+          <c:spPr>
+            <a:ln xmlns:a="http://schemas.openxmlformats.org/drawingml/2006/main" w="9525">
+              <a:solidFill>
+                <a:srgbClr val="D8E4DF"/>
+              </a:solidFill>
+            </a:ln>
+          </c:spPr>
+        </c:majorGridlines>
+        <c:title>
+          <c:tx>
+            <c:rich>
+              <a:bodyPr xmlns:a="http://schemas.openxmlformats.org/drawingml/2006/main"/>
+              <a:lstStyle xmlns:a="http://schemas.openxmlformats.org/drawingml/2006/main"/>
+              <a:p xmlns:a="http://schemas.openxmlformats.org/drawingml/2006/main">
+                <a:r>
+                  <a:rPr sz="1650">
+                    <a:solidFill>
+                      <a:srgbClr val="173C43"/>
+                    </a:solidFill>
+                    <a:latin typeface="Heiti TC"/>
+                    <a:ea typeface="Heiti TC"/>
+                    <a:cs typeface="Heiti TC"/>
+                  </a:rPr>
+                  <a:t>x</a:t>
+                </a:r>
+              </a:p>
+            </c:rich>
+          </c:tx>
+          <c:overlay val="0"/>
+          <c:txPr>
+            <a:bodyPr xmlns:a="http://schemas.openxmlformats.org/drawingml/2006/main" anchorCtr="1"/>
+            <a:lstStyle xmlns:a="http://schemas.openxmlformats.org/drawingml/2006/main"/>
+            <a:p xmlns:a="http://schemas.openxmlformats.org/drawingml/2006/main">
+              <a:pPr>
+                <a:defRPr sz="1650">
+                  <a:solidFill>
+                    <a:srgbClr val="173C43"/>
+                  </a:solidFill>
+                  <a:latin typeface="Heiti TC"/>
+                  <a:ea typeface="Heiti TC"/>
+                  <a:cs typeface="Heiti TC"/>
+                </a:defRPr>
+              </a:pPr>
+            </a:p>
+          </c:txPr>
+        </c:title>
+        <c:numFmt formatCode="0"/>
+        <c:majorTickMark val="none"/>
+        <c:minorTickMark val="none"/>
+        <c:spPr>
+          <a:ln xmlns:a="http://schemas.openxmlformats.org/drawingml/2006/main" w="9525">
+            <a:solidFill>
+              <a:srgbClr val="526B70"/>
+            </a:solidFill>
+          </a:ln>
+        </c:spPr>
+        <c:txPr>
+          <a:bodyPr xmlns:a="http://schemas.openxmlformats.org/drawingml/2006/main" anchorCtr="1"/>
+          <a:lstStyle xmlns:a="http://schemas.openxmlformats.org/drawingml/2006/main"/>
+          <a:p xmlns:a="http://schemas.openxmlformats.org/drawingml/2006/main">
+            <a:pPr>
+              <a:defRPr sz="1500">
+                <a:solidFill>
+                  <a:srgbClr val="526B70"/>
+                </a:solidFill>
+                <a:latin typeface="Heiti TC"/>
+                <a:ea typeface="Heiti TC"/>
+                <a:cs typeface="Heiti TC"/>
+              </a:defRPr>
+            </a:pPr>
+          </a:p>
+        </c:txPr>
+        <c:crossAx val="48672768"/>
+        <c:majorUnit val="5"/>
       </c:valAx>
       <c:spPr>
         <a:solidFill xmlns:a="http://schemas.openxmlformats.org/drawingml/2006/main">
@@ -4158,7 +5111,7 @@
           <p:cNvPr id="13" name="">
             <a:extLst xmlns:a="http://schemas.openxmlformats.org/drawingml/2006/main">
               <a:ext uri="{FF2B5EF4-FFF2-40B4-BE49-F238E27FC236}">
-                <a16:creationId xmlns:a16="http://schemas.microsoft.com/office/drawing/2014/main" id="{FBC4E45C-020A-4461-96AC-B78784899A1E}"/>
+                <a16:creationId xmlns:a16="http://schemas.microsoft.com/office/drawing/2014/main" id="{629A9878-827E-4BB9-9095-D8C8F4F2117C}"/>
               </a:ext>
             </a:extLst>
           </p:cNvPr>
@@ -4215,7 +5168,7 @@
           <p:cNvPr id="2" name="">
             <a:extLst xmlns:a="http://schemas.openxmlformats.org/drawingml/2006/main">
               <a:ext uri="{FF2B5EF4-FFF2-40B4-BE49-F238E27FC236}">
-                <a16:creationId xmlns:a16="http://schemas.microsoft.com/office/drawing/2014/main" id="{74E28F95-1A3A-4579-B32D-E67465FE6A00}"/>
+                <a16:creationId xmlns:a16="http://schemas.microsoft.com/office/drawing/2014/main" id="{B8CD5FBD-EC45-45CC-9E7D-AD18CA286A66}"/>
               </a:ext>
             </a:extLst>
           </p:cNvPr>
@@ -4272,7 +5225,7 @@
           <p:cNvPr id="3" name="">
             <a:extLst xmlns:a="http://schemas.openxmlformats.org/drawingml/2006/main">
               <a:ext uri="{FF2B5EF4-FFF2-40B4-BE49-F238E27FC236}">
-                <a16:creationId xmlns:a16="http://schemas.microsoft.com/office/drawing/2014/main" id="{D4371079-CB6A-4559-88A0-C3818DC65A87}"/>
+                <a16:creationId xmlns:a16="http://schemas.microsoft.com/office/drawing/2014/main" id="{223C43C6-D81C-424E-9750-2923AF5B866C}"/>
               </a:ext>
             </a:extLst>
           </p:cNvPr>
@@ -4329,7 +5282,7 @@
           <p:cNvPr id="4" name="">
             <a:extLst xmlns:a="http://schemas.openxmlformats.org/drawingml/2006/main">
               <a:ext uri="{FF2B5EF4-FFF2-40B4-BE49-F238E27FC236}">
-                <a16:creationId xmlns:a16="http://schemas.microsoft.com/office/drawing/2014/main" id="{9EA19486-F92C-4D38-A76D-8281F4348645}"/>
+                <a16:creationId xmlns:a16="http://schemas.microsoft.com/office/drawing/2014/main" id="{49F8B74F-AE51-4A78-AA8F-020E897D57DE}"/>
               </a:ext>
             </a:extLst>
           </p:cNvPr>
@@ -4386,7 +5339,7 @@
           <p:cNvPr id="5" name="">
             <a:extLst xmlns:a="http://schemas.openxmlformats.org/drawingml/2006/main">
               <a:ext uri="{FF2B5EF4-FFF2-40B4-BE49-F238E27FC236}">
-                <a16:creationId xmlns:a16="http://schemas.microsoft.com/office/drawing/2014/main" id="{8AA4C5CF-955B-4C20-A6E1-1AB382E864A3}"/>
+                <a16:creationId xmlns:a16="http://schemas.microsoft.com/office/drawing/2014/main" id="{6EEC34B9-86D7-4C97-B8A6-D5312665DA79}"/>
               </a:ext>
             </a:extLst>
           </p:cNvPr>
@@ -4443,7 +5396,7 @@
           <p:cNvPr id="6" name="">
             <a:extLst xmlns:a="http://schemas.openxmlformats.org/drawingml/2006/main">
               <a:ext uri="{FF2B5EF4-FFF2-40B4-BE49-F238E27FC236}">
-                <a16:creationId xmlns:a16="http://schemas.microsoft.com/office/drawing/2014/main" id="{434EEE81-537A-4A8B-A208-FF508DA1A767}"/>
+                <a16:creationId xmlns:a16="http://schemas.microsoft.com/office/drawing/2014/main" id="{89724479-00EC-44A5-9670-A1CB8B7D5DDC}"/>
               </a:ext>
             </a:extLst>
           </p:cNvPr>
@@ -4500,7 +5453,7 @@
           <p:cNvPr id="7" name="">
             <a:extLst xmlns:a="http://schemas.openxmlformats.org/drawingml/2006/main">
               <a:ext uri="{FF2B5EF4-FFF2-40B4-BE49-F238E27FC236}">
-                <a16:creationId xmlns:a16="http://schemas.microsoft.com/office/drawing/2014/main" id="{1A9E2CB2-3A05-4051-93E2-27F2E5128AB3}"/>
+                <a16:creationId xmlns:a16="http://schemas.microsoft.com/office/drawing/2014/main" id="{1ACD86A1-D26E-4737-B50B-74290B101B41}"/>
               </a:ext>
             </a:extLst>
           </p:cNvPr>
@@ -4557,7 +5510,7 @@
           <p:cNvPr id="8" name="">
             <a:extLst xmlns:a="http://schemas.openxmlformats.org/drawingml/2006/main">
               <a:ext uri="{FF2B5EF4-FFF2-40B4-BE49-F238E27FC236}">
-                <a16:creationId xmlns:a16="http://schemas.microsoft.com/office/drawing/2014/main" id="{E8A90252-DBEB-4D11-8130-8E9C850931B6}"/>
+                <a16:creationId xmlns:a16="http://schemas.microsoft.com/office/drawing/2014/main" id="{1F23CAA0-A725-4A96-AF86-16A8A0E44AF8}"/>
               </a:ext>
             </a:extLst>
           </p:cNvPr>
@@ -4614,7 +5567,7 @@
           <p:cNvPr id="9" name="">
             <a:extLst xmlns:a="http://schemas.openxmlformats.org/drawingml/2006/main">
               <a:ext uri="{FF2B5EF4-FFF2-40B4-BE49-F238E27FC236}">
-                <a16:creationId xmlns:a16="http://schemas.microsoft.com/office/drawing/2014/main" id="{F6E015F5-A9A5-45BB-98D4-A4B9057772C4}"/>
+                <a16:creationId xmlns:a16="http://schemas.microsoft.com/office/drawing/2014/main" id="{8B00CB54-2B7A-4E27-9DAE-EF4B3460528C}"/>
               </a:ext>
             </a:extLst>
           </p:cNvPr>
@@ -4671,7 +5624,7 @@
           <p:cNvPr id="10" name="">
             <a:extLst xmlns:a="http://schemas.openxmlformats.org/drawingml/2006/main">
               <a:ext uri="{FF2B5EF4-FFF2-40B4-BE49-F238E27FC236}">
-                <a16:creationId xmlns:a16="http://schemas.microsoft.com/office/drawing/2014/main" id="{F8BA13E2-F6FE-4C65-B6AC-5F6FFCC1BED1}"/>
+                <a16:creationId xmlns:a16="http://schemas.microsoft.com/office/drawing/2014/main" id="{F7728A3B-2398-436A-B1A4-F8E06839B2F6}"/>
               </a:ext>
             </a:extLst>
           </p:cNvPr>
@@ -4728,7 +5681,7 @@
           <p:cNvPr id="11" name="">
             <a:extLst xmlns:a="http://schemas.openxmlformats.org/drawingml/2006/main">
               <a:ext uri="{FF2B5EF4-FFF2-40B4-BE49-F238E27FC236}">
-                <a16:creationId xmlns:a16="http://schemas.microsoft.com/office/drawing/2014/main" id="{4CD84A27-CAED-43B5-9E5E-A1171C1E7785}"/>
+                <a16:creationId xmlns:a16="http://schemas.microsoft.com/office/drawing/2014/main" id="{1C2786CD-EB97-4F06-8387-84B517CFAD01}"/>
               </a:ext>
             </a:extLst>
           </p:cNvPr>
@@ -4785,7 +5738,7 @@
           <p:cNvPr id="12" name="">
             <a:extLst xmlns:a="http://schemas.openxmlformats.org/drawingml/2006/main">
               <a:ext uri="{FF2B5EF4-FFF2-40B4-BE49-F238E27FC236}">
-                <a16:creationId xmlns:a16="http://schemas.microsoft.com/office/drawing/2014/main" id="{80540ADD-05D3-4818-925B-7ECD4EA372A6}"/>
+                <a16:creationId xmlns:a16="http://schemas.microsoft.com/office/drawing/2014/main" id="{26BA6CA9-72D2-4AA6-89D7-A07A4382FC83}"/>
               </a:ext>
             </a:extLst>
           </p:cNvPr>
@@ -4840,7 +5793,7 @@
     </p:spTree>
     <p:extLst>
       <p:ext uri="{BB962C8B-B14F-4D97-AF65-F5344CB8AC3E}">
-        <p14:creationId xmlns:p14="http://schemas.microsoft.com/office/powerpoint/2010/main" val="970504407"/>
+        <p14:creationId xmlns:p14="http://schemas.microsoft.com/office/powerpoint/2010/main" val="226677942"/>
       </p:ext>
     </p:extLst>
   </p:cSld>
@@ -4868,10 +5821,10 @@
       </p:grpSpPr>
       <p:sp>
         <p:nvSpPr>
-          <p:cNvPr id="11" name="">
-            <a:extLst xmlns:a="http://schemas.openxmlformats.org/drawingml/2006/main">
-              <a:ext uri="{FF2B5EF4-FFF2-40B4-BE49-F238E27FC236}">
-                <a16:creationId xmlns:a16="http://schemas.microsoft.com/office/drawing/2014/main" id="{F42AF76C-948D-4064-9F0B-9F70E4B71AE0}"/>
+          <p:cNvPr id="12" name="">
+            <a:extLst xmlns:a="http://schemas.openxmlformats.org/drawingml/2006/main">
+              <a:ext uri="{FF2B5EF4-FFF2-40B4-BE49-F238E27FC236}">
+                <a16:creationId xmlns:a16="http://schemas.microsoft.com/office/drawing/2014/main" id="{6CAC527D-E0FF-4918-BFA8-18CA9FF5E8FE}"/>
               </a:ext>
             </a:extLst>
           </p:cNvPr>
@@ -4918,7 +5871,7 @@
                 <a:ea typeface="Heiti TC"/>
                 <a:cs typeface="Heiti TC"/>
               </a:rPr>
-              <a:t>你的預測與觀察</a:t>
+              <a:t>加入新點，觀察直線</a:t>
             </a:r>
           </a:p>
         </p:txBody>
@@ -4928,7 +5881,7 @@
           <p:cNvPr id="2" name="">
             <a:extLst xmlns:a="http://schemas.openxmlformats.org/drawingml/2006/main">
               <a:ext uri="{FF2B5EF4-FFF2-40B4-BE49-F238E27FC236}">
-                <a16:creationId xmlns:a16="http://schemas.microsoft.com/office/drawing/2014/main" id="{112E62E0-6B13-4A48-AA7E-66B362168E3B}"/>
+                <a16:creationId xmlns:a16="http://schemas.microsoft.com/office/drawing/2014/main" id="{5A7E5274-A689-4967-84E3-675E904DF570}"/>
               </a:ext>
             </a:extLst>
           </p:cNvPr>
@@ -4975,7 +5928,7 @@
                 <a:ea typeface="Arial"/>
                 <a:cs typeface="Arial"/>
               </a:rPr>
-              <a:t>Your prediction and observation</a:t>
+              <a:t>Add points and observe the line</a:t>
             </a:r>
           </a:p>
         </p:txBody>
@@ -4985,7 +5938,7 @@
           <p:cNvPr id="3" name="">
             <a:extLst xmlns:a="http://schemas.openxmlformats.org/drawingml/2006/main">
               <a:ext uri="{FF2B5EF4-FFF2-40B4-BE49-F238E27FC236}">
-                <a16:creationId xmlns:a16="http://schemas.microsoft.com/office/drawing/2014/main" id="{63AA8F74-4054-4A2E-AFD9-DC4DEE193903}"/>
+                <a16:creationId xmlns:a16="http://schemas.microsoft.com/office/drawing/2014/main" id="{ABCDDC74-83AF-4255-858E-5F043C676FDF}"/>
               </a:ext>
             </a:extLst>
           </p:cNvPr>
@@ -5042,36 +5995,36 @@
           <p:cNvPr id="4" name="">
             <a:extLst xmlns:a="http://schemas.openxmlformats.org/drawingml/2006/main">
               <a:ext uri="{FF2B5EF4-FFF2-40B4-BE49-F238E27FC236}">
-                <a16:creationId xmlns:a16="http://schemas.microsoft.com/office/drawing/2014/main" id="{9E47C040-B861-4AF3-8A96-DD3D13A76116}"/>
-              </a:ext>
-            </a:extLst>
-          </p:cNvPr>
-          <p:cNvSpPr>
-            <a:spLocks xmlns:a="http://schemas.openxmlformats.org/drawingml/2006/main" noGrp="1"/>
-          </p:cNvSpPr>
-          <p:nvPr/>
-        </p:nvSpPr>
-        <p:spPr>
-          <a:xfrm xmlns:a="http://schemas.openxmlformats.org/drawingml/2006/main">
-            <a:off x="609600" y="1762125"/>
-            <a:ext cx="10668000" cy="495300"/>
-          </a:xfrm>
-          <a:prstGeom xmlns:a="http://schemas.openxmlformats.org/drawingml/2006/main" prst="rect">
-            <a:avLst/>
-          </a:prstGeom>
-          <a:noFill xmlns:a="http://schemas.openxmlformats.org/drawingml/2006/main"/>
-          <a:ln xmlns:a="http://schemas.openxmlformats.org/drawingml/2006/main" w="0">
-            <a:noFill/>
-          </a:ln>
-        </p:spPr>
-        <p:txBody>
-          <a:bodyPr xmlns:a="http://schemas.openxmlformats.org/drawingml/2006/main">
-            <a:noAutofit/>
-          </a:bodyPr>
-          <a:lstStyle xmlns:a="http://schemas.openxmlformats.org/drawingml/2006/main"/>
-          <a:p xmlns:a="http://schemas.openxmlformats.org/drawingml/2006/main">
-            <a:pPr>
-              <a:defRPr sz="2550" b="0">
+                <a16:creationId xmlns:a16="http://schemas.microsoft.com/office/drawing/2014/main" id="{5348D218-0885-4787-947F-4A8B1D38DCCE}"/>
+              </a:ext>
+            </a:extLst>
+          </p:cNvPr>
+          <p:cNvSpPr>
+            <a:spLocks xmlns:a="http://schemas.openxmlformats.org/drawingml/2006/main" noGrp="1"/>
+          </p:cNvSpPr>
+          <p:nvPr/>
+        </p:nvSpPr>
+        <p:spPr>
+          <a:xfrm xmlns:a="http://schemas.openxmlformats.org/drawingml/2006/main">
+            <a:off x="609600" y="1714500"/>
+            <a:ext cx="10572750" cy="495300"/>
+          </a:xfrm>
+          <a:prstGeom xmlns:a="http://schemas.openxmlformats.org/drawingml/2006/main" prst="rect">
+            <a:avLst/>
+          </a:prstGeom>
+          <a:noFill xmlns:a="http://schemas.openxmlformats.org/drawingml/2006/main"/>
+          <a:ln xmlns:a="http://schemas.openxmlformats.org/drawingml/2006/main" w="0">
+            <a:noFill/>
+          </a:ln>
+        </p:spPr>
+        <p:txBody>
+          <a:bodyPr xmlns:a="http://schemas.openxmlformats.org/drawingml/2006/main">
+            <a:noAutofit/>
+          </a:bodyPr>
+          <a:lstStyle xmlns:a="http://schemas.openxmlformats.org/drawingml/2006/main"/>
+          <a:p xmlns:a="http://schemas.openxmlformats.org/drawingml/2006/main">
+            <a:pPr>
+              <a:defRPr sz="2625" b="0">
                 <a:solidFill>
                   <a:srgbClr val="173C43"/>
                 </a:solidFill>
@@ -5081,7 +6034,7 @@
               </a:defRPr>
             </a:pPr>
             <a:r>
-              <a:rPr sz="2550" b="0">
+              <a:rPr sz="2625" b="0">
                 <a:solidFill>
                   <a:srgbClr val="173C43"/>
                 </a:solidFill>
@@ -5089,7 +6042,7 @@
                 <a:ea typeface="Heiti TC"/>
                 <a:cs typeface="Heiti TC"/>
               </a:rPr>
-              <a:t>你的估計與網頁的預測接近嗎？</a:t>
+              <a:t>在圖上點一下，加入一個數據點</a:t>
             </a:r>
           </a:p>
         </p:txBody>
@@ -5099,54 +6052,54 @@
           <p:cNvPr id="5" name="">
             <a:extLst xmlns:a="http://schemas.openxmlformats.org/drawingml/2006/main">
               <a:ext uri="{FF2B5EF4-FFF2-40B4-BE49-F238E27FC236}">
-                <a16:creationId xmlns:a16="http://schemas.microsoft.com/office/drawing/2014/main" id="{FFFC84D4-7520-41A9-84AD-73492F0291A6}"/>
-              </a:ext>
-            </a:extLst>
-          </p:cNvPr>
-          <p:cNvSpPr>
-            <a:spLocks xmlns:a="http://schemas.openxmlformats.org/drawingml/2006/main" noGrp="1"/>
-          </p:cNvSpPr>
-          <p:nvPr/>
-        </p:nvSpPr>
-        <p:spPr>
-          <a:xfrm xmlns:a="http://schemas.openxmlformats.org/drawingml/2006/main">
-            <a:off x="609600" y="2228850"/>
-            <a:ext cx="10668000" cy="457200"/>
-          </a:xfrm>
-          <a:prstGeom xmlns:a="http://schemas.openxmlformats.org/drawingml/2006/main" prst="rect">
-            <a:avLst/>
-          </a:prstGeom>
-          <a:noFill xmlns:a="http://schemas.openxmlformats.org/drawingml/2006/main"/>
-          <a:ln xmlns:a="http://schemas.openxmlformats.org/drawingml/2006/main" w="0">
-            <a:noFill/>
-          </a:ln>
-        </p:spPr>
-        <p:txBody>
-          <a:bodyPr xmlns:a="http://schemas.openxmlformats.org/drawingml/2006/main">
-            <a:noAutofit/>
-          </a:bodyPr>
-          <a:lstStyle xmlns:a="http://schemas.openxmlformats.org/drawingml/2006/main"/>
-          <a:p xmlns:a="http://schemas.openxmlformats.org/drawingml/2006/main">
-            <a:pPr>
-              <a:defRPr sz="1950" b="0">
-                <a:solidFill>
-                  <a:srgbClr val="526B70"/>
-                </a:solidFill>
-                <a:latin typeface="Arial"/>
-                <a:ea typeface="Arial"/>
-                <a:cs typeface="Arial"/>
-              </a:defRPr>
-            </a:pPr>
-            <a:r>
-              <a:rPr sz="1950" b="0">
-                <a:solidFill>
-                  <a:srgbClr val="526B70"/>
-                </a:solidFill>
-                <a:latin typeface="Arial"/>
-                <a:ea typeface="Arial"/>
-                <a:cs typeface="Arial"/>
-              </a:rPr>
-              <a:t>Was your estimate close to the page’s prediction?</a:t>
+                <a16:creationId xmlns:a16="http://schemas.microsoft.com/office/drawing/2014/main" id="{CECD2D7B-8436-4716-956F-A04B692C0CA8}"/>
+              </a:ext>
+            </a:extLst>
+          </p:cNvPr>
+          <p:cNvSpPr>
+            <a:spLocks xmlns:a="http://schemas.openxmlformats.org/drawingml/2006/main" noGrp="1"/>
+          </p:cNvSpPr>
+          <p:nvPr/>
+        </p:nvSpPr>
+        <p:spPr>
+          <a:xfrm xmlns:a="http://schemas.openxmlformats.org/drawingml/2006/main">
+            <a:off x="609600" y="2181225"/>
+            <a:ext cx="10572750" cy="457200"/>
+          </a:xfrm>
+          <a:prstGeom xmlns:a="http://schemas.openxmlformats.org/drawingml/2006/main" prst="rect">
+            <a:avLst/>
+          </a:prstGeom>
+          <a:noFill xmlns:a="http://schemas.openxmlformats.org/drawingml/2006/main"/>
+          <a:ln xmlns:a="http://schemas.openxmlformats.org/drawingml/2006/main" w="0">
+            <a:noFill/>
+          </a:ln>
+        </p:spPr>
+        <p:txBody>
+          <a:bodyPr xmlns:a="http://schemas.openxmlformats.org/drawingml/2006/main">
+            <a:noAutofit/>
+          </a:bodyPr>
+          <a:lstStyle xmlns:a="http://schemas.openxmlformats.org/drawingml/2006/main"/>
+          <a:p xmlns:a="http://schemas.openxmlformats.org/drawingml/2006/main">
+            <a:pPr>
+              <a:defRPr sz="2025" b="0">
+                <a:solidFill>
+                  <a:srgbClr val="526B70"/>
+                </a:solidFill>
+                <a:latin typeface="Arial"/>
+                <a:ea typeface="Arial"/>
+                <a:cs typeface="Arial"/>
+              </a:defRPr>
+            </a:pPr>
+            <a:r>
+              <a:rPr sz="2025" b="0">
+                <a:solidFill>
+                  <a:srgbClr val="526B70"/>
+                </a:solidFill>
+                <a:latin typeface="Arial"/>
+                <a:ea typeface="Arial"/>
+                <a:cs typeface="Arial"/>
+              </a:rPr>
+              <a:t>Click or tap the graph to add a data point</a:t>
             </a:r>
           </a:p>
         </p:txBody>
@@ -5156,36 +6109,36 @@
           <p:cNvPr id="6" name="">
             <a:extLst xmlns:a="http://schemas.openxmlformats.org/drawingml/2006/main">
               <a:ext uri="{FF2B5EF4-FFF2-40B4-BE49-F238E27FC236}">
-                <a16:creationId xmlns:a16="http://schemas.microsoft.com/office/drawing/2014/main" id="{048CA853-7080-4F2F-836C-2FD1F0E135F5}"/>
-              </a:ext>
-            </a:extLst>
-          </p:cNvPr>
-          <p:cNvSpPr>
-            <a:spLocks xmlns:a="http://schemas.openxmlformats.org/drawingml/2006/main" noGrp="1"/>
-          </p:cNvSpPr>
-          <p:nvPr/>
-        </p:nvSpPr>
-        <p:spPr>
-          <a:xfrm xmlns:a="http://schemas.openxmlformats.org/drawingml/2006/main">
-            <a:off x="609600" y="3095625"/>
-            <a:ext cx="10668000" cy="495300"/>
-          </a:xfrm>
-          <a:prstGeom xmlns:a="http://schemas.openxmlformats.org/drawingml/2006/main" prst="rect">
-            <a:avLst/>
-          </a:prstGeom>
-          <a:noFill xmlns:a="http://schemas.openxmlformats.org/drawingml/2006/main"/>
-          <a:ln xmlns:a="http://schemas.openxmlformats.org/drawingml/2006/main" w="0">
-            <a:noFill/>
-          </a:ln>
-        </p:spPr>
-        <p:txBody>
-          <a:bodyPr xmlns:a="http://schemas.openxmlformats.org/drawingml/2006/main">
-            <a:noAutofit/>
-          </a:bodyPr>
-          <a:lstStyle xmlns:a="http://schemas.openxmlformats.org/drawingml/2006/main"/>
-          <a:p xmlns:a="http://schemas.openxmlformats.org/drawingml/2006/main">
-            <a:pPr>
-              <a:defRPr sz="2550" b="0">
+                <a16:creationId xmlns:a16="http://schemas.microsoft.com/office/drawing/2014/main" id="{4D4F53A9-C4B2-47A3-9BD9-85E870F6199A}"/>
+              </a:ext>
+            </a:extLst>
+          </p:cNvPr>
+          <p:cNvSpPr>
+            <a:spLocks xmlns:a="http://schemas.openxmlformats.org/drawingml/2006/main" noGrp="1"/>
+          </p:cNvSpPr>
+          <p:nvPr/>
+        </p:nvSpPr>
+        <p:spPr>
+          <a:xfrm xmlns:a="http://schemas.openxmlformats.org/drawingml/2006/main">
+            <a:off x="609600" y="2952750"/>
+            <a:ext cx="10572750" cy="495300"/>
+          </a:xfrm>
+          <a:prstGeom xmlns:a="http://schemas.openxmlformats.org/drawingml/2006/main" prst="rect">
+            <a:avLst/>
+          </a:prstGeom>
+          <a:noFill xmlns:a="http://schemas.openxmlformats.org/drawingml/2006/main"/>
+          <a:ln xmlns:a="http://schemas.openxmlformats.org/drawingml/2006/main" w="0">
+            <a:noFill/>
+          </a:ln>
+        </p:spPr>
+        <p:txBody>
+          <a:bodyPr xmlns:a="http://schemas.openxmlformats.org/drawingml/2006/main">
+            <a:noAutofit/>
+          </a:bodyPr>
+          <a:lstStyle xmlns:a="http://schemas.openxmlformats.org/drawingml/2006/main"/>
+          <a:p xmlns:a="http://schemas.openxmlformats.org/drawingml/2006/main">
+            <a:pPr>
+              <a:defRPr sz="2625" b="0">
                 <a:solidFill>
                   <a:srgbClr val="173C43"/>
                 </a:solidFill>
@@ -5195,7 +6148,7 @@
               </a:defRPr>
             </a:pPr>
             <a:r>
-              <a:rPr sz="2550" b="0">
+              <a:rPr sz="2625" b="0">
                 <a:solidFill>
                   <a:srgbClr val="173C43"/>
                 </a:solidFill>
@@ -5203,7 +6156,7 @@
                 <a:ea typeface="Heiti TC"/>
                 <a:cs typeface="Heiti TC"/>
               </a:rPr>
-              <a:t>你畫的直線與網頁的直線有甚麼分別？</a:t>
+              <a:t>比較加入點前後的 m 和 c</a:t>
             </a:r>
           </a:p>
         </p:txBody>
@@ -5213,54 +6166,54 @@
           <p:cNvPr id="7" name="">
             <a:extLst xmlns:a="http://schemas.openxmlformats.org/drawingml/2006/main">
               <a:ext uri="{FF2B5EF4-FFF2-40B4-BE49-F238E27FC236}">
-                <a16:creationId xmlns:a16="http://schemas.microsoft.com/office/drawing/2014/main" id="{B510A1B2-650F-483A-8F5D-242B02334DD6}"/>
-              </a:ext>
-            </a:extLst>
-          </p:cNvPr>
-          <p:cNvSpPr>
-            <a:spLocks xmlns:a="http://schemas.openxmlformats.org/drawingml/2006/main" noGrp="1"/>
-          </p:cNvSpPr>
-          <p:nvPr/>
-        </p:nvSpPr>
-        <p:spPr>
-          <a:xfrm xmlns:a="http://schemas.openxmlformats.org/drawingml/2006/main">
-            <a:off x="609600" y="3562350"/>
-            <a:ext cx="10668000" cy="457200"/>
-          </a:xfrm>
-          <a:prstGeom xmlns:a="http://schemas.openxmlformats.org/drawingml/2006/main" prst="rect">
-            <a:avLst/>
-          </a:prstGeom>
-          <a:noFill xmlns:a="http://schemas.openxmlformats.org/drawingml/2006/main"/>
-          <a:ln xmlns:a="http://schemas.openxmlformats.org/drawingml/2006/main" w="0">
-            <a:noFill/>
-          </a:ln>
-        </p:spPr>
-        <p:txBody>
-          <a:bodyPr xmlns:a="http://schemas.openxmlformats.org/drawingml/2006/main">
-            <a:noAutofit/>
-          </a:bodyPr>
-          <a:lstStyle xmlns:a="http://schemas.openxmlformats.org/drawingml/2006/main"/>
-          <a:p xmlns:a="http://schemas.openxmlformats.org/drawingml/2006/main">
-            <a:pPr>
-              <a:defRPr sz="1950" b="0">
-                <a:solidFill>
-                  <a:srgbClr val="526B70"/>
-                </a:solidFill>
-                <a:latin typeface="Arial"/>
-                <a:ea typeface="Arial"/>
-                <a:cs typeface="Arial"/>
-              </a:defRPr>
-            </a:pPr>
-            <a:r>
-              <a:rPr sz="1950" b="0">
-                <a:solidFill>
-                  <a:srgbClr val="526B70"/>
-                </a:solidFill>
-                <a:latin typeface="Arial"/>
-                <a:ea typeface="Arial"/>
-                <a:cs typeface="Arial"/>
-              </a:rPr>
-              <a:t>How does your own line compare with the line on the page?</a:t>
+                <a16:creationId xmlns:a16="http://schemas.microsoft.com/office/drawing/2014/main" id="{031CBC36-2443-4FAA-8A0F-55C7F19E5813}"/>
+              </a:ext>
+            </a:extLst>
+          </p:cNvPr>
+          <p:cNvSpPr>
+            <a:spLocks xmlns:a="http://schemas.openxmlformats.org/drawingml/2006/main" noGrp="1"/>
+          </p:cNvSpPr>
+          <p:nvPr/>
+        </p:nvSpPr>
+        <p:spPr>
+          <a:xfrm xmlns:a="http://schemas.openxmlformats.org/drawingml/2006/main">
+            <a:off x="609600" y="3419475"/>
+            <a:ext cx="10572750" cy="457200"/>
+          </a:xfrm>
+          <a:prstGeom xmlns:a="http://schemas.openxmlformats.org/drawingml/2006/main" prst="rect">
+            <a:avLst/>
+          </a:prstGeom>
+          <a:noFill xmlns:a="http://schemas.openxmlformats.org/drawingml/2006/main"/>
+          <a:ln xmlns:a="http://schemas.openxmlformats.org/drawingml/2006/main" w="0">
+            <a:noFill/>
+          </a:ln>
+        </p:spPr>
+        <p:txBody>
+          <a:bodyPr xmlns:a="http://schemas.openxmlformats.org/drawingml/2006/main">
+            <a:noAutofit/>
+          </a:bodyPr>
+          <a:lstStyle xmlns:a="http://schemas.openxmlformats.org/drawingml/2006/main"/>
+          <a:p xmlns:a="http://schemas.openxmlformats.org/drawingml/2006/main">
+            <a:pPr>
+              <a:defRPr sz="2025" b="0">
+                <a:solidFill>
+                  <a:srgbClr val="526B70"/>
+                </a:solidFill>
+                <a:latin typeface="Arial"/>
+                <a:ea typeface="Arial"/>
+                <a:cs typeface="Arial"/>
+              </a:defRPr>
+            </a:pPr>
+            <a:r>
+              <a:rPr sz="2025" b="0">
+                <a:solidFill>
+                  <a:srgbClr val="526B70"/>
+                </a:solidFill>
+                <a:latin typeface="Arial"/>
+                <a:ea typeface="Arial"/>
+                <a:cs typeface="Arial"/>
+              </a:rPr>
+              <a:t>Compare m and c before and after adding the point</a:t>
             </a:r>
           </a:p>
         </p:txBody>
@@ -5270,36 +6223,36 @@
           <p:cNvPr id="8" name="">
             <a:extLst xmlns:a="http://schemas.openxmlformats.org/drawingml/2006/main">
               <a:ext uri="{FF2B5EF4-FFF2-40B4-BE49-F238E27FC236}">
-                <a16:creationId xmlns:a16="http://schemas.microsoft.com/office/drawing/2014/main" id="{A1FACA54-38B6-4A99-9760-AF8FC0D3EB1F}"/>
-              </a:ext>
-            </a:extLst>
-          </p:cNvPr>
-          <p:cNvSpPr>
-            <a:spLocks xmlns:a="http://schemas.openxmlformats.org/drawingml/2006/main" noGrp="1"/>
-          </p:cNvSpPr>
-          <p:nvPr/>
-        </p:nvSpPr>
-        <p:spPr>
-          <a:xfrm xmlns:a="http://schemas.openxmlformats.org/drawingml/2006/main">
-            <a:off x="609600" y="4429125"/>
-            <a:ext cx="10668000" cy="495300"/>
-          </a:xfrm>
-          <a:prstGeom xmlns:a="http://schemas.openxmlformats.org/drawingml/2006/main" prst="rect">
-            <a:avLst/>
-          </a:prstGeom>
-          <a:noFill xmlns:a="http://schemas.openxmlformats.org/drawingml/2006/main"/>
-          <a:ln xmlns:a="http://schemas.openxmlformats.org/drawingml/2006/main" w="0">
-            <a:noFill/>
-          </a:ln>
-        </p:spPr>
-        <p:txBody>
-          <a:bodyPr xmlns:a="http://schemas.openxmlformats.org/drawingml/2006/main">
-            <a:noAutofit/>
-          </a:bodyPr>
-          <a:lstStyle xmlns:a="http://schemas.openxmlformats.org/drawingml/2006/main"/>
-          <a:p xmlns:a="http://schemas.openxmlformats.org/drawingml/2006/main">
-            <a:pPr>
-              <a:defRPr sz="2550" b="0">
+                <a16:creationId xmlns:a16="http://schemas.microsoft.com/office/drawing/2014/main" id="{041152B1-991E-4AE2-A4AE-725A1D958CA8}"/>
+              </a:ext>
+            </a:extLst>
+          </p:cNvPr>
+          <p:cNvSpPr>
+            <a:spLocks xmlns:a="http://schemas.openxmlformats.org/drawingml/2006/main" noGrp="1"/>
+          </p:cNvSpPr>
+          <p:nvPr/>
+        </p:nvSpPr>
+        <p:spPr>
+          <a:xfrm xmlns:a="http://schemas.openxmlformats.org/drawingml/2006/main">
+            <a:off x="609600" y="4191000"/>
+            <a:ext cx="10572750" cy="495300"/>
+          </a:xfrm>
+          <a:prstGeom xmlns:a="http://schemas.openxmlformats.org/drawingml/2006/main" prst="rect">
+            <a:avLst/>
+          </a:prstGeom>
+          <a:noFill xmlns:a="http://schemas.openxmlformats.org/drawingml/2006/main"/>
+          <a:ln xmlns:a="http://schemas.openxmlformats.org/drawingml/2006/main" w="0">
+            <a:noFill/>
+          </a:ln>
+        </p:spPr>
+        <p:txBody>
+          <a:bodyPr xmlns:a="http://schemas.openxmlformats.org/drawingml/2006/main">
+            <a:noAutofit/>
+          </a:bodyPr>
+          <a:lstStyle xmlns:a="http://schemas.openxmlformats.org/drawingml/2006/main"/>
+          <a:p xmlns:a="http://schemas.openxmlformats.org/drawingml/2006/main">
+            <a:pPr>
+              <a:defRPr sz="2625" b="0">
                 <a:solidFill>
                   <a:srgbClr val="173C43"/>
                 </a:solidFill>
@@ -5309,7 +6262,7 @@
               </a:defRPr>
             </a:pPr>
             <a:r>
-              <a:rPr sz="2550" b="0">
+              <a:rPr sz="2625" b="0">
                 <a:solidFill>
                   <a:srgbClr val="173C43"/>
                 </a:solidFill>
@@ -5317,7 +6270,7 @@
                 <a:ea typeface="Heiti TC"/>
                 <a:cs typeface="Heiti TC"/>
               </a:rPr>
-              <a:t>你會較信賴哪個預測？為甚麼？</a:t>
+              <a:t>試一個遠離其他點的新點</a:t>
             </a:r>
           </a:p>
         </p:txBody>
@@ -5327,54 +6280,54 @@
           <p:cNvPr id="9" name="">
             <a:extLst xmlns:a="http://schemas.openxmlformats.org/drawingml/2006/main">
               <a:ext uri="{FF2B5EF4-FFF2-40B4-BE49-F238E27FC236}">
-                <a16:creationId xmlns:a16="http://schemas.microsoft.com/office/drawing/2014/main" id="{397AA35F-16E8-4434-A539-58ED4DE5724D}"/>
-              </a:ext>
-            </a:extLst>
-          </p:cNvPr>
-          <p:cNvSpPr>
-            <a:spLocks xmlns:a="http://schemas.openxmlformats.org/drawingml/2006/main" noGrp="1"/>
-          </p:cNvSpPr>
-          <p:nvPr/>
-        </p:nvSpPr>
-        <p:spPr>
-          <a:xfrm xmlns:a="http://schemas.openxmlformats.org/drawingml/2006/main">
-            <a:off x="609600" y="4895850"/>
-            <a:ext cx="10668000" cy="457200"/>
-          </a:xfrm>
-          <a:prstGeom xmlns:a="http://schemas.openxmlformats.org/drawingml/2006/main" prst="rect">
-            <a:avLst/>
-          </a:prstGeom>
-          <a:noFill xmlns:a="http://schemas.openxmlformats.org/drawingml/2006/main"/>
-          <a:ln xmlns:a="http://schemas.openxmlformats.org/drawingml/2006/main" w="0">
-            <a:noFill/>
-          </a:ln>
-        </p:spPr>
-        <p:txBody>
-          <a:bodyPr xmlns:a="http://schemas.openxmlformats.org/drawingml/2006/main">
-            <a:noAutofit/>
-          </a:bodyPr>
-          <a:lstStyle xmlns:a="http://schemas.openxmlformats.org/drawingml/2006/main"/>
-          <a:p xmlns:a="http://schemas.openxmlformats.org/drawingml/2006/main">
-            <a:pPr>
-              <a:defRPr sz="1950" b="0">
-                <a:solidFill>
-                  <a:srgbClr val="526B70"/>
-                </a:solidFill>
-                <a:latin typeface="Arial"/>
-                <a:ea typeface="Arial"/>
-                <a:cs typeface="Arial"/>
-              </a:defRPr>
-            </a:pPr>
-            <a:r>
-              <a:rPr sz="1950" b="0">
-                <a:solidFill>
-                  <a:srgbClr val="526B70"/>
-                </a:solidFill>
-                <a:latin typeface="Arial"/>
-                <a:ea typeface="Arial"/>
-                <a:cs typeface="Arial"/>
-              </a:rPr>
-              <a:t>Which prediction would you trust more? Why?</a:t>
+                <a16:creationId xmlns:a16="http://schemas.microsoft.com/office/drawing/2014/main" id="{34210EE9-680B-43AB-8829-27B342FBDA17}"/>
+              </a:ext>
+            </a:extLst>
+          </p:cNvPr>
+          <p:cNvSpPr>
+            <a:spLocks xmlns:a="http://schemas.openxmlformats.org/drawingml/2006/main" noGrp="1"/>
+          </p:cNvSpPr>
+          <p:nvPr/>
+        </p:nvSpPr>
+        <p:spPr>
+          <a:xfrm xmlns:a="http://schemas.openxmlformats.org/drawingml/2006/main">
+            <a:off x="609600" y="4657725"/>
+            <a:ext cx="10572750" cy="457200"/>
+          </a:xfrm>
+          <a:prstGeom xmlns:a="http://schemas.openxmlformats.org/drawingml/2006/main" prst="rect">
+            <a:avLst/>
+          </a:prstGeom>
+          <a:noFill xmlns:a="http://schemas.openxmlformats.org/drawingml/2006/main"/>
+          <a:ln xmlns:a="http://schemas.openxmlformats.org/drawingml/2006/main" w="0">
+            <a:noFill/>
+          </a:ln>
+        </p:spPr>
+        <p:txBody>
+          <a:bodyPr xmlns:a="http://schemas.openxmlformats.org/drawingml/2006/main">
+            <a:noAutofit/>
+          </a:bodyPr>
+          <a:lstStyle xmlns:a="http://schemas.openxmlformats.org/drawingml/2006/main"/>
+          <a:p xmlns:a="http://schemas.openxmlformats.org/drawingml/2006/main">
+            <a:pPr>
+              <a:defRPr sz="2025" b="0">
+                <a:solidFill>
+                  <a:srgbClr val="526B70"/>
+                </a:solidFill>
+                <a:latin typeface="Arial"/>
+                <a:ea typeface="Arial"/>
+                <a:cs typeface="Arial"/>
+              </a:defRPr>
+            </a:pPr>
+            <a:r>
+              <a:rPr sz="2025" b="0">
+                <a:solidFill>
+                  <a:srgbClr val="526B70"/>
+                </a:solidFill>
+                <a:latin typeface="Arial"/>
+                <a:ea typeface="Arial"/>
+                <a:cs typeface="Arial"/>
+              </a:rPr>
+              <a:t>Try a point far from the other dots</a:t>
             </a:r>
           </a:p>
         </p:txBody>
@@ -5384,54 +6337,111 @@
           <p:cNvPr id="10" name="">
             <a:extLst xmlns:a="http://schemas.openxmlformats.org/drawingml/2006/main">
               <a:ext uri="{FF2B5EF4-FFF2-40B4-BE49-F238E27FC236}">
-                <a16:creationId xmlns:a16="http://schemas.microsoft.com/office/drawing/2014/main" id="{8059C805-D4A2-4204-8179-26B758D77970}"/>
-              </a:ext>
-            </a:extLst>
-          </p:cNvPr>
-          <p:cNvSpPr>
-            <a:spLocks xmlns:a="http://schemas.openxmlformats.org/drawingml/2006/main" noGrp="1"/>
-          </p:cNvSpPr>
-          <p:nvPr/>
-        </p:nvSpPr>
-        <p:spPr>
-          <a:xfrm xmlns:a="http://schemas.openxmlformats.org/drawingml/2006/main">
-            <a:off x="609600" y="5838825"/>
-            <a:ext cx="10572750" cy="381000"/>
-          </a:xfrm>
-          <a:prstGeom xmlns:a="http://schemas.openxmlformats.org/drawingml/2006/main" prst="rect">
-            <a:avLst/>
-          </a:prstGeom>
-          <a:noFill xmlns:a="http://schemas.openxmlformats.org/drawingml/2006/main"/>
-          <a:ln xmlns:a="http://schemas.openxmlformats.org/drawingml/2006/main" w="0">
-            <a:noFill/>
-          </a:ln>
-        </p:spPr>
-        <p:txBody>
-          <a:bodyPr xmlns:a="http://schemas.openxmlformats.org/drawingml/2006/main">
-            <a:noAutofit/>
-          </a:bodyPr>
-          <a:lstStyle xmlns:a="http://schemas.openxmlformats.org/drawingml/2006/main"/>
-          <a:p xmlns:a="http://schemas.openxmlformats.org/drawingml/2006/main">
-            <a:pPr>
-              <a:defRPr sz="1725" b="0">
-                <a:solidFill>
-                  <a:srgbClr val="086C61"/>
-                </a:solidFill>
-                <a:latin typeface="Heiti TC"/>
-                <a:ea typeface="Heiti TC"/>
-                <a:cs typeface="Heiti TC"/>
-              </a:defRPr>
-            </a:pPr>
-            <a:r>
-              <a:rPr sz="1725" b="0">
-                <a:solidFill>
-                  <a:srgbClr val="086C61"/>
-                </a:solidFill>
-                <a:latin typeface="Heiti TC"/>
-                <a:ea typeface="Heiti TC"/>
-                <a:cs typeface="Heiti TC"/>
-              </a:rPr>
-              <a:t>工作紙最後一節 / Final section of the worksheet</a:t>
+                <a16:creationId xmlns:a16="http://schemas.microsoft.com/office/drawing/2014/main" id="{651EA85A-6722-4FD9-88B9-0ED4352F81B0}"/>
+              </a:ext>
+            </a:extLst>
+          </p:cNvPr>
+          <p:cNvSpPr>
+            <a:spLocks xmlns:a="http://schemas.openxmlformats.org/drawingml/2006/main" noGrp="1"/>
+          </p:cNvSpPr>
+          <p:nvPr/>
+        </p:nvSpPr>
+        <p:spPr>
+          <a:xfrm xmlns:a="http://schemas.openxmlformats.org/drawingml/2006/main">
+            <a:off x="609600" y="5362575"/>
+            <a:ext cx="10572750" cy="495300"/>
+          </a:xfrm>
+          <a:prstGeom xmlns:a="http://schemas.openxmlformats.org/drawingml/2006/main" prst="rect">
+            <a:avLst/>
+          </a:prstGeom>
+          <a:noFill xmlns:a="http://schemas.openxmlformats.org/drawingml/2006/main"/>
+          <a:ln xmlns:a="http://schemas.openxmlformats.org/drawingml/2006/main" w="0">
+            <a:noFill/>
+          </a:ln>
+        </p:spPr>
+        <p:txBody>
+          <a:bodyPr xmlns:a="http://schemas.openxmlformats.org/drawingml/2006/main">
+            <a:noAutofit/>
+          </a:bodyPr>
+          <a:lstStyle xmlns:a="http://schemas.openxmlformats.org/drawingml/2006/main"/>
+          <a:p xmlns:a="http://schemas.openxmlformats.org/drawingml/2006/main">
+            <a:pPr>
+              <a:defRPr sz="2025" b="0">
+                <a:solidFill>
+                  <a:srgbClr val="173C43"/>
+                </a:solidFill>
+                <a:latin typeface="Heiti TC"/>
+                <a:ea typeface="Heiti TC"/>
+                <a:cs typeface="Heiti TC"/>
+              </a:defRPr>
+            </a:pPr>
+            <a:r>
+              <a:rPr sz="2025" b="0">
+                <a:solidFill>
+                  <a:srgbClr val="173C43"/>
+                </a:solidFill>
+                <a:latin typeface="Heiti TC"/>
+                <a:ea typeface="Heiti TC"/>
+                <a:cs typeface="Heiti TC"/>
+              </a:rPr>
+              <a:t>先預測，再觀察。把結果寫在工作紙上。</a:t>
+            </a:r>
+          </a:p>
+        </p:txBody>
+      </p:sp>
+      <p:sp>
+        <p:nvSpPr>
+          <p:cNvPr id="11" name="">
+            <a:extLst xmlns:a="http://schemas.openxmlformats.org/drawingml/2006/main">
+              <a:ext uri="{FF2B5EF4-FFF2-40B4-BE49-F238E27FC236}">
+                <a16:creationId xmlns:a16="http://schemas.microsoft.com/office/drawing/2014/main" id="{BF034632-9390-4A19-98E5-12986A21EE03}"/>
+              </a:ext>
+            </a:extLst>
+          </p:cNvPr>
+          <p:cNvSpPr>
+            <a:spLocks xmlns:a="http://schemas.openxmlformats.org/drawingml/2006/main" noGrp="1"/>
+          </p:cNvSpPr>
+          <p:nvPr/>
+        </p:nvSpPr>
+        <p:spPr>
+          <a:xfrm xmlns:a="http://schemas.openxmlformats.org/drawingml/2006/main">
+            <a:off x="609600" y="5829300"/>
+            <a:ext cx="10572750" cy="457200"/>
+          </a:xfrm>
+          <a:prstGeom xmlns:a="http://schemas.openxmlformats.org/drawingml/2006/main" prst="rect">
+            <a:avLst/>
+          </a:prstGeom>
+          <a:noFill xmlns:a="http://schemas.openxmlformats.org/drawingml/2006/main"/>
+          <a:ln xmlns:a="http://schemas.openxmlformats.org/drawingml/2006/main" w="0">
+            <a:noFill/>
+          </a:ln>
+        </p:spPr>
+        <p:txBody>
+          <a:bodyPr xmlns:a="http://schemas.openxmlformats.org/drawingml/2006/main">
+            <a:noAutofit/>
+          </a:bodyPr>
+          <a:lstStyle xmlns:a="http://schemas.openxmlformats.org/drawingml/2006/main"/>
+          <a:p xmlns:a="http://schemas.openxmlformats.org/drawingml/2006/main">
+            <a:pPr>
+              <a:defRPr sz="1800" b="0">
+                <a:solidFill>
+                  <a:srgbClr val="526B70"/>
+                </a:solidFill>
+                <a:latin typeface="Arial"/>
+                <a:ea typeface="Arial"/>
+                <a:cs typeface="Arial"/>
+              </a:defRPr>
+            </a:pPr>
+            <a:r>
+              <a:rPr sz="1800" b="0">
+                <a:solidFill>
+                  <a:srgbClr val="526B70"/>
+                </a:solidFill>
+                <a:latin typeface="Arial"/>
+                <a:ea typeface="Arial"/>
+                <a:cs typeface="Arial"/>
+              </a:rPr>
+              <a:t>Predict first, then observe. Record the result on your worksheet.</a:t>
             </a:r>
           </a:p>
         </p:txBody>
@@ -5439,7 +6449,2048 @@
     </p:spTree>
     <p:extLst>
       <p:ext uri="{BB962C8B-B14F-4D97-AF65-F5344CB8AC3E}">
-        <p14:creationId xmlns:p14="http://schemas.microsoft.com/office/powerpoint/2010/main" val="1974640751"/>
+        <p14:creationId xmlns:p14="http://schemas.microsoft.com/office/powerpoint/2010/main" val="845821297"/>
+      </p:ext>
+    </p:extLst>
+  </p:cSld>
+</p:sld>
+</file>
+
+<file path=ppt/slides/slide11.xml><?xml version="1.0" encoding="utf-8"?>
+<p:sld xmlns:p="http://schemas.openxmlformats.org/presentationml/2006/main">
+  <p:cSld>
+    <p:bg>
+      <p:bgPr>
+        <a:solidFill xmlns:a="http://schemas.openxmlformats.org/drawingml/2006/main">
+          <a:srgbClr val="F5F7F4"/>
+        </a:solidFill>
+      </p:bgPr>
+    </p:bg>
+    <p:spTree>
+      <p:nvGrpSpPr>
+        <p:cNvPr id="1" name=""/>
+        <p:cNvGrpSpPr/>
+        <p:nvPr/>
+      </p:nvGrpSpPr>
+      <p:grpSpPr>
+        <a:xfrm xmlns:a="http://schemas.openxmlformats.org/drawingml/2006/main"/>
+      </p:grpSpPr>
+      <p:sp>
+        <p:nvSpPr>
+          <p:cNvPr id="12" name="">
+            <a:extLst xmlns:a="http://schemas.openxmlformats.org/drawingml/2006/main">
+              <a:ext uri="{FF2B5EF4-FFF2-40B4-BE49-F238E27FC236}">
+                <a16:creationId xmlns:a16="http://schemas.microsoft.com/office/drawing/2014/main" id="{EC591FEA-7A17-4B60-9687-1058F382F15A}"/>
+              </a:ext>
+            </a:extLst>
+          </p:cNvPr>
+          <p:cNvSpPr>
+            <a:spLocks xmlns:a="http://schemas.openxmlformats.org/drawingml/2006/main" noGrp="1"/>
+          </p:cNvSpPr>
+          <p:nvPr/>
+        </p:nvSpPr>
+        <p:spPr>
+          <a:xfrm xmlns:a="http://schemas.openxmlformats.org/drawingml/2006/main">
+            <a:off x="609600" y="400050"/>
+            <a:ext cx="10972800" cy="495300"/>
+          </a:xfrm>
+          <a:prstGeom xmlns:a="http://schemas.openxmlformats.org/drawingml/2006/main" prst="rect">
+            <a:avLst/>
+          </a:prstGeom>
+          <a:noFill xmlns:a="http://schemas.openxmlformats.org/drawingml/2006/main"/>
+          <a:ln xmlns:a="http://schemas.openxmlformats.org/drawingml/2006/main" w="0">
+            <a:noFill/>
+          </a:ln>
+        </p:spPr>
+        <p:txBody>
+          <a:bodyPr xmlns:a="http://schemas.openxmlformats.org/drawingml/2006/main">
+            <a:noAutofit/>
+          </a:bodyPr>
+          <a:lstStyle xmlns:a="http://schemas.openxmlformats.org/drawingml/2006/main"/>
+          <a:p xmlns:a="http://schemas.openxmlformats.org/drawingml/2006/main">
+            <a:pPr>
+              <a:defRPr sz="3300" b="0">
+                <a:solidFill>
+                  <a:srgbClr val="173C43"/>
+                </a:solidFill>
+                <a:latin typeface="Heiti TC"/>
+                <a:ea typeface="Heiti TC"/>
+                <a:cs typeface="Heiti TC"/>
+              </a:defRPr>
+            </a:pPr>
+            <a:r>
+              <a:rPr sz="3300" b="0">
+                <a:solidFill>
+                  <a:srgbClr val="173C43"/>
+                </a:solidFill>
+                <a:latin typeface="Heiti TC"/>
+                <a:ea typeface="Heiti TC"/>
+                <a:cs typeface="Heiti TC"/>
+              </a:rPr>
+              <a:t>每天溫習時間與考試成績</a:t>
+            </a:r>
+          </a:p>
+        </p:txBody>
+      </p:sp>
+      <p:sp>
+        <p:nvSpPr>
+          <p:cNvPr id="2" name="">
+            <a:extLst xmlns:a="http://schemas.openxmlformats.org/drawingml/2006/main">
+              <a:ext uri="{FF2B5EF4-FFF2-40B4-BE49-F238E27FC236}">
+                <a16:creationId xmlns:a16="http://schemas.microsoft.com/office/drawing/2014/main" id="{EACBB419-0F46-4E5C-980B-025C7D78DF4B}"/>
+              </a:ext>
+            </a:extLst>
+          </p:cNvPr>
+          <p:cNvSpPr>
+            <a:spLocks xmlns:a="http://schemas.openxmlformats.org/drawingml/2006/main" noGrp="1"/>
+          </p:cNvSpPr>
+          <p:nvPr/>
+        </p:nvSpPr>
+        <p:spPr>
+          <a:xfrm xmlns:a="http://schemas.openxmlformats.org/drawingml/2006/main">
+            <a:off x="609600" y="866775"/>
+            <a:ext cx="10972800" cy="457200"/>
+          </a:xfrm>
+          <a:prstGeom xmlns:a="http://schemas.openxmlformats.org/drawingml/2006/main" prst="rect">
+            <a:avLst/>
+          </a:prstGeom>
+          <a:noFill xmlns:a="http://schemas.openxmlformats.org/drawingml/2006/main"/>
+          <a:ln xmlns:a="http://schemas.openxmlformats.org/drawingml/2006/main" w="0">
+            <a:noFill/>
+          </a:ln>
+        </p:spPr>
+        <p:txBody>
+          <a:bodyPr xmlns:a="http://schemas.openxmlformats.org/drawingml/2006/main">
+            <a:noAutofit/>
+          </a:bodyPr>
+          <a:lstStyle xmlns:a="http://schemas.openxmlformats.org/drawingml/2006/main"/>
+          <a:p xmlns:a="http://schemas.openxmlformats.org/drawingml/2006/main">
+            <a:pPr>
+              <a:defRPr sz="2700" b="0">
+                <a:solidFill>
+                  <a:srgbClr val="526B70"/>
+                </a:solidFill>
+                <a:latin typeface="Arial"/>
+                <a:ea typeface="Arial"/>
+                <a:cs typeface="Arial"/>
+              </a:defRPr>
+            </a:pPr>
+            <a:r>
+              <a:rPr sz="2700" b="0">
+                <a:solidFill>
+                  <a:srgbClr val="526B70"/>
+                </a:solidFill>
+                <a:latin typeface="Arial"/>
+                <a:ea typeface="Arial"/>
+                <a:cs typeface="Arial"/>
+              </a:rPr>
+              <a:t>Daily study time and exam score</a:t>
+            </a:r>
+          </a:p>
+        </p:txBody>
+      </p:sp>
+      <p:sp>
+        <p:nvSpPr>
+          <p:cNvPr id="3" name="">
+            <a:extLst xmlns:a="http://schemas.openxmlformats.org/drawingml/2006/main">
+              <a:ext uri="{FF2B5EF4-FFF2-40B4-BE49-F238E27FC236}">
+                <a16:creationId xmlns:a16="http://schemas.microsoft.com/office/drawing/2014/main" id="{6E76B808-8F5C-4C8C-AA9A-42A8830C9E47}"/>
+              </a:ext>
+            </a:extLst>
+          </p:cNvPr>
+          <p:cNvSpPr>
+            <a:spLocks xmlns:a="http://schemas.openxmlformats.org/drawingml/2006/main" noGrp="1"/>
+          </p:cNvSpPr>
+          <p:nvPr/>
+        </p:nvSpPr>
+        <p:spPr>
+          <a:xfrm xmlns:a="http://schemas.openxmlformats.org/drawingml/2006/main">
+            <a:off x="11144250" y="6381750"/>
+            <a:ext cx="523875" cy="266700"/>
+          </a:xfrm>
+          <a:prstGeom xmlns:a="http://schemas.openxmlformats.org/drawingml/2006/main" prst="rect">
+            <a:avLst/>
+          </a:prstGeom>
+          <a:noFill xmlns:a="http://schemas.openxmlformats.org/drawingml/2006/main"/>
+          <a:ln xmlns:a="http://schemas.openxmlformats.org/drawingml/2006/main" w="0">
+            <a:noFill/>
+          </a:ln>
+        </p:spPr>
+        <p:txBody>
+          <a:bodyPr xmlns:a="http://schemas.openxmlformats.org/drawingml/2006/main">
+            <a:noAutofit/>
+          </a:bodyPr>
+          <a:lstStyle xmlns:a="http://schemas.openxmlformats.org/drawingml/2006/main"/>
+          <a:p xmlns:a="http://schemas.openxmlformats.org/drawingml/2006/main">
+            <a:pPr>
+              <a:defRPr sz="1350" b="0">
+                <a:solidFill>
+                  <a:srgbClr val="526B70"/>
+                </a:solidFill>
+                <a:latin typeface="Arial"/>
+                <a:ea typeface="Arial"/>
+                <a:cs typeface="Arial"/>
+              </a:defRPr>
+            </a:pPr>
+            <a:r>
+              <a:rPr sz="1350" b="0">
+                <a:solidFill>
+                  <a:srgbClr val="526B70"/>
+                </a:solidFill>
+                <a:latin typeface="Arial"/>
+                <a:ea typeface="Arial"/>
+                <a:cs typeface="Arial"/>
+              </a:rPr>
+              <a:t>11</a:t>
+            </a:r>
+          </a:p>
+        </p:txBody>
+      </p:sp>
+      <p:graphicFrame>
+        <p:nvGraphicFramePr>
+          <p:cNvPr id="15" name="Chart"/>
+          <p:cNvGraphicFramePr/>
+          <p:nvPr/>
+        </p:nvGraphicFramePr>
+        <p:xfrm>
+          <a:off xmlns:a="http://schemas.openxmlformats.org/drawingml/2006/main" x="609600" y="1647825"/>
+          <a:ext xmlns:a="http://schemas.openxmlformats.org/drawingml/2006/main" cx="6905625" cy="4286250"/>
+        </p:xfrm>
+        <a:graphic xmlns:a="http://schemas.openxmlformats.org/drawingml/2006/main">
+          <a:graphicData uri="http://schemas.openxmlformats.org/drawingml/2006/chart">
+            <c:chart xmlns:r="http://schemas.openxmlformats.org/officeDocument/2006/relationships" xmlns:c="http://schemas.openxmlformats.org/drawingml/2006/chart" r:id="R82f1c2d76fe746ee"/>
+          </a:graphicData>
+        </a:graphic>
+      </p:graphicFrame>
+      <p:sp>
+        <p:nvSpPr>
+          <p:cNvPr id="5" name="">
+            <a:extLst xmlns:a="http://schemas.openxmlformats.org/drawingml/2006/main">
+              <a:ext uri="{FF2B5EF4-FFF2-40B4-BE49-F238E27FC236}">
+                <a16:creationId xmlns:a16="http://schemas.microsoft.com/office/drawing/2014/main" id="{F1DD6528-73BB-44BE-AB51-B8F35B060247}"/>
+              </a:ext>
+            </a:extLst>
+          </p:cNvPr>
+          <p:cNvSpPr>
+            <a:spLocks xmlns:a="http://schemas.openxmlformats.org/drawingml/2006/main" noGrp="1"/>
+          </p:cNvSpPr>
+          <p:nvPr/>
+        </p:nvSpPr>
+        <p:spPr>
+          <a:xfrm xmlns:a="http://schemas.openxmlformats.org/drawingml/2006/main">
+            <a:off x="8020050" y="1819275"/>
+            <a:ext cx="3571875" cy="495300"/>
+          </a:xfrm>
+          <a:prstGeom xmlns:a="http://schemas.openxmlformats.org/drawingml/2006/main" prst="rect">
+            <a:avLst/>
+          </a:prstGeom>
+          <a:noFill xmlns:a="http://schemas.openxmlformats.org/drawingml/2006/main"/>
+          <a:ln xmlns:a="http://schemas.openxmlformats.org/drawingml/2006/main" w="0">
+            <a:noFill/>
+          </a:ln>
+        </p:spPr>
+        <p:txBody>
+          <a:bodyPr xmlns:a="http://schemas.openxmlformats.org/drawingml/2006/main">
+            <a:noAutofit/>
+          </a:bodyPr>
+          <a:lstStyle xmlns:a="http://schemas.openxmlformats.org/drawingml/2006/main"/>
+          <a:p xmlns:a="http://schemas.openxmlformats.org/drawingml/2006/main">
+            <a:pPr>
+              <a:defRPr sz="2100" b="0">
+                <a:solidFill>
+                  <a:srgbClr val="173C43"/>
+                </a:solidFill>
+                <a:latin typeface="Heiti TC"/>
+                <a:ea typeface="Heiti TC"/>
+                <a:cs typeface="Heiti TC"/>
+              </a:defRPr>
+            </a:pPr>
+            <a:r>
+              <a:rPr sz="2100" b="0">
+                <a:solidFill>
+                  <a:srgbClr val="173C43"/>
+                </a:solidFill>
+                <a:latin typeface="Heiti TC"/>
+                <a:ea typeface="Heiti TC"/>
+                <a:cs typeface="Heiti TC"/>
+              </a:rPr>
+              <a:t>3.5 小時的預測成績？</a:t>
+            </a:r>
+          </a:p>
+        </p:txBody>
+      </p:sp>
+      <p:sp>
+        <p:nvSpPr>
+          <p:cNvPr id="6" name="">
+            <a:extLst xmlns:a="http://schemas.openxmlformats.org/drawingml/2006/main">
+              <a:ext uri="{FF2B5EF4-FFF2-40B4-BE49-F238E27FC236}">
+                <a16:creationId xmlns:a16="http://schemas.microsoft.com/office/drawing/2014/main" id="{0D85CA6C-1E0C-4DC5-ADC3-7DD4626D6788}"/>
+              </a:ext>
+            </a:extLst>
+          </p:cNvPr>
+          <p:cNvSpPr>
+            <a:spLocks xmlns:a="http://schemas.openxmlformats.org/drawingml/2006/main" noGrp="1"/>
+          </p:cNvSpPr>
+          <p:nvPr/>
+        </p:nvSpPr>
+        <p:spPr>
+          <a:xfrm xmlns:a="http://schemas.openxmlformats.org/drawingml/2006/main">
+            <a:off x="8020050" y="2286000"/>
+            <a:ext cx="3571875" cy="457200"/>
+          </a:xfrm>
+          <a:prstGeom xmlns:a="http://schemas.openxmlformats.org/drawingml/2006/main" prst="rect">
+            <a:avLst/>
+          </a:prstGeom>
+          <a:noFill xmlns:a="http://schemas.openxmlformats.org/drawingml/2006/main"/>
+          <a:ln xmlns:a="http://schemas.openxmlformats.org/drawingml/2006/main" w="0">
+            <a:noFill/>
+          </a:ln>
+        </p:spPr>
+        <p:txBody>
+          <a:bodyPr xmlns:a="http://schemas.openxmlformats.org/drawingml/2006/main">
+            <a:noAutofit/>
+          </a:bodyPr>
+          <a:lstStyle xmlns:a="http://schemas.openxmlformats.org/drawingml/2006/main"/>
+          <a:p xmlns:a="http://schemas.openxmlformats.org/drawingml/2006/main">
+            <a:pPr>
+              <a:defRPr sz="1800" b="0">
+                <a:solidFill>
+                  <a:srgbClr val="526B70"/>
+                </a:solidFill>
+                <a:latin typeface="Arial"/>
+                <a:ea typeface="Arial"/>
+                <a:cs typeface="Arial"/>
+              </a:defRPr>
+            </a:pPr>
+            <a:r>
+              <a:rPr sz="1800" b="0">
+                <a:solidFill>
+                  <a:srgbClr val="526B70"/>
+                </a:solidFill>
+                <a:latin typeface="Arial"/>
+                <a:ea typeface="Arial"/>
+                <a:cs typeface="Arial"/>
+              </a:rPr>
+              <a:t>Score for 3.5 hours a day?</a:t>
+            </a:r>
+          </a:p>
+        </p:txBody>
+      </p:sp>
+      <p:sp>
+        <p:nvSpPr>
+          <p:cNvPr id="7" name="">
+            <a:extLst xmlns:a="http://schemas.openxmlformats.org/drawingml/2006/main">
+              <a:ext uri="{FF2B5EF4-FFF2-40B4-BE49-F238E27FC236}">
+                <a16:creationId xmlns:a16="http://schemas.microsoft.com/office/drawing/2014/main" id="{2EFE58B8-3F3C-460F-9147-AE49FADBBB20}"/>
+              </a:ext>
+            </a:extLst>
+          </p:cNvPr>
+          <p:cNvSpPr>
+            <a:spLocks xmlns:a="http://schemas.openxmlformats.org/drawingml/2006/main" noGrp="1"/>
+          </p:cNvSpPr>
+          <p:nvPr/>
+        </p:nvSpPr>
+        <p:spPr>
+          <a:xfrm xmlns:a="http://schemas.openxmlformats.org/drawingml/2006/main">
+            <a:off x="8020050" y="3390900"/>
+            <a:ext cx="3571875" cy="495300"/>
+          </a:xfrm>
+          <a:prstGeom xmlns:a="http://schemas.openxmlformats.org/drawingml/2006/main" prst="rect">
+            <a:avLst/>
+          </a:prstGeom>
+          <a:noFill xmlns:a="http://schemas.openxmlformats.org/drawingml/2006/main"/>
+          <a:ln xmlns:a="http://schemas.openxmlformats.org/drawingml/2006/main" w="0">
+            <a:noFill/>
+          </a:ln>
+        </p:spPr>
+        <p:txBody>
+          <a:bodyPr xmlns:a="http://schemas.openxmlformats.org/drawingml/2006/main">
+            <a:noAutofit/>
+          </a:bodyPr>
+          <a:lstStyle xmlns:a="http://schemas.openxmlformats.org/drawingml/2006/main"/>
+          <a:p xmlns:a="http://schemas.openxmlformats.org/drawingml/2006/main">
+            <a:pPr>
+              <a:defRPr sz="2175" b="0">
+                <a:solidFill>
+                  <a:srgbClr val="173C43"/>
+                </a:solidFill>
+                <a:latin typeface="Heiti TC"/>
+                <a:ea typeface="Heiti TC"/>
+                <a:cs typeface="Heiti TC"/>
+              </a:defRPr>
+            </a:pPr>
+            <a:r>
+              <a:rPr sz="2175" b="0">
+                <a:solidFill>
+                  <a:srgbClr val="173C43"/>
+                </a:solidFill>
+                <a:latin typeface="Heiti TC"/>
+                <a:ea typeface="Heiti TC"/>
+                <a:cs typeface="Heiti TC"/>
+              </a:rPr>
+              <a:t>先畫直線，再估計</a:t>
+            </a:r>
+          </a:p>
+        </p:txBody>
+      </p:sp>
+      <p:sp>
+        <p:nvSpPr>
+          <p:cNvPr id="8" name="">
+            <a:extLst xmlns:a="http://schemas.openxmlformats.org/drawingml/2006/main">
+              <a:ext uri="{FF2B5EF4-FFF2-40B4-BE49-F238E27FC236}">
+                <a16:creationId xmlns:a16="http://schemas.microsoft.com/office/drawing/2014/main" id="{581F2996-DC2F-4115-9542-1731FB6E7782}"/>
+              </a:ext>
+            </a:extLst>
+          </p:cNvPr>
+          <p:cNvSpPr>
+            <a:spLocks xmlns:a="http://schemas.openxmlformats.org/drawingml/2006/main" noGrp="1"/>
+          </p:cNvSpPr>
+          <p:nvPr/>
+        </p:nvSpPr>
+        <p:spPr>
+          <a:xfrm xmlns:a="http://schemas.openxmlformats.org/drawingml/2006/main">
+            <a:off x="8020050" y="3857625"/>
+            <a:ext cx="3571875" cy="457200"/>
+          </a:xfrm>
+          <a:prstGeom xmlns:a="http://schemas.openxmlformats.org/drawingml/2006/main" prst="rect">
+            <a:avLst/>
+          </a:prstGeom>
+          <a:noFill xmlns:a="http://schemas.openxmlformats.org/drawingml/2006/main"/>
+          <a:ln xmlns:a="http://schemas.openxmlformats.org/drawingml/2006/main" w="0">
+            <a:noFill/>
+          </a:ln>
+        </p:spPr>
+        <p:txBody>
+          <a:bodyPr xmlns:a="http://schemas.openxmlformats.org/drawingml/2006/main">
+            <a:noAutofit/>
+          </a:bodyPr>
+          <a:lstStyle xmlns:a="http://schemas.openxmlformats.org/drawingml/2006/main"/>
+          <a:p xmlns:a="http://schemas.openxmlformats.org/drawingml/2006/main">
+            <a:pPr>
+              <a:defRPr sz="1800" b="0">
+                <a:solidFill>
+                  <a:srgbClr val="526B70"/>
+                </a:solidFill>
+                <a:latin typeface="Arial"/>
+                <a:ea typeface="Arial"/>
+                <a:cs typeface="Arial"/>
+              </a:defRPr>
+            </a:pPr>
+            <a:r>
+              <a:rPr sz="1800" b="0">
+                <a:solidFill>
+                  <a:srgbClr val="526B70"/>
+                </a:solidFill>
+                <a:latin typeface="Arial"/>
+                <a:ea typeface="Arial"/>
+                <a:cs typeface="Arial"/>
+              </a:rPr>
+              <a:t>Draw your line, then estimate</a:t>
+            </a:r>
+          </a:p>
+        </p:txBody>
+      </p:sp>
+      <p:sp>
+        <p:nvSpPr>
+          <p:cNvPr id="9" name="">
+            <a:extLst xmlns:a="http://schemas.openxmlformats.org/drawingml/2006/main">
+              <a:ext uri="{FF2B5EF4-FFF2-40B4-BE49-F238E27FC236}">
+                <a16:creationId xmlns:a16="http://schemas.microsoft.com/office/drawing/2014/main" id="{B6B79907-C73A-423A-9771-5274CDEC8E96}"/>
+              </a:ext>
+            </a:extLst>
+          </p:cNvPr>
+          <p:cNvSpPr>
+            <a:spLocks xmlns:a="http://schemas.openxmlformats.org/drawingml/2006/main" noGrp="1"/>
+          </p:cNvSpPr>
+          <p:nvPr/>
+        </p:nvSpPr>
+        <p:spPr>
+          <a:xfrm xmlns:a="http://schemas.openxmlformats.org/drawingml/2006/main">
+            <a:off x="8020050" y="4819650"/>
+            <a:ext cx="3571875" cy="495300"/>
+          </a:xfrm>
+          <a:prstGeom xmlns:a="http://schemas.openxmlformats.org/drawingml/2006/main" prst="rect">
+            <a:avLst/>
+          </a:prstGeom>
+          <a:noFill xmlns:a="http://schemas.openxmlformats.org/drawingml/2006/main"/>
+          <a:ln xmlns:a="http://schemas.openxmlformats.org/drawingml/2006/main" w="0">
+            <a:noFill/>
+          </a:ln>
+        </p:spPr>
+        <p:txBody>
+          <a:bodyPr xmlns:a="http://schemas.openxmlformats.org/drawingml/2006/main">
+            <a:noAutofit/>
+          </a:bodyPr>
+          <a:lstStyle xmlns:a="http://schemas.openxmlformats.org/drawingml/2006/main"/>
+          <a:p xmlns:a="http://schemas.openxmlformats.org/drawingml/2006/main">
+            <a:pPr>
+              <a:defRPr sz="2100" b="0">
+                <a:solidFill>
+                  <a:srgbClr val="173C43"/>
+                </a:solidFill>
+                <a:latin typeface="Heiti TC"/>
+                <a:ea typeface="Heiti TC"/>
+                <a:cs typeface="Heiti TC"/>
+              </a:defRPr>
+            </a:pPr>
+            <a:r>
+              <a:rPr sz="2100" b="0">
+                <a:solidFill>
+                  <a:srgbClr val="173C43"/>
+                </a:solidFill>
+                <a:latin typeface="Heiti TC"/>
+                <a:ea typeface="Heiti TC"/>
+                <a:cs typeface="Heiti TC"/>
+              </a:rPr>
+              <a:t>10 小時的預測可信嗎？</a:t>
+            </a:r>
+          </a:p>
+        </p:txBody>
+      </p:sp>
+      <p:sp>
+        <p:nvSpPr>
+          <p:cNvPr id="10" name="">
+            <a:extLst xmlns:a="http://schemas.openxmlformats.org/drawingml/2006/main">
+              <a:ext uri="{FF2B5EF4-FFF2-40B4-BE49-F238E27FC236}">
+                <a16:creationId xmlns:a16="http://schemas.microsoft.com/office/drawing/2014/main" id="{7A6132E6-A92F-403A-9047-7D3B5563961D}"/>
+              </a:ext>
+            </a:extLst>
+          </p:cNvPr>
+          <p:cNvSpPr>
+            <a:spLocks xmlns:a="http://schemas.openxmlformats.org/drawingml/2006/main" noGrp="1"/>
+          </p:cNvSpPr>
+          <p:nvPr/>
+        </p:nvSpPr>
+        <p:spPr>
+          <a:xfrm xmlns:a="http://schemas.openxmlformats.org/drawingml/2006/main">
+            <a:off x="8020050" y="5286375"/>
+            <a:ext cx="3571875" cy="457200"/>
+          </a:xfrm>
+          <a:prstGeom xmlns:a="http://schemas.openxmlformats.org/drawingml/2006/main" prst="rect">
+            <a:avLst/>
+          </a:prstGeom>
+          <a:noFill xmlns:a="http://schemas.openxmlformats.org/drawingml/2006/main"/>
+          <a:ln xmlns:a="http://schemas.openxmlformats.org/drawingml/2006/main" w="0">
+            <a:noFill/>
+          </a:ln>
+        </p:spPr>
+        <p:txBody>
+          <a:bodyPr xmlns:a="http://schemas.openxmlformats.org/drawingml/2006/main">
+            <a:noAutofit/>
+          </a:bodyPr>
+          <a:lstStyle xmlns:a="http://schemas.openxmlformats.org/drawingml/2006/main"/>
+          <a:p xmlns:a="http://schemas.openxmlformats.org/drawingml/2006/main">
+            <a:pPr>
+              <a:defRPr sz="1800" b="0">
+                <a:solidFill>
+                  <a:srgbClr val="526B70"/>
+                </a:solidFill>
+                <a:latin typeface="Arial"/>
+                <a:ea typeface="Arial"/>
+                <a:cs typeface="Arial"/>
+              </a:defRPr>
+            </a:pPr>
+            <a:r>
+              <a:rPr sz="1800" b="0">
+                <a:solidFill>
+                  <a:srgbClr val="526B70"/>
+                </a:solidFill>
+                <a:latin typeface="Arial"/>
+                <a:ea typeface="Arial"/>
+                <a:cs typeface="Arial"/>
+              </a:rPr>
+              <a:t>How reliable is a prediction for 10 hours?</a:t>
+            </a:r>
+          </a:p>
+        </p:txBody>
+      </p:sp>
+      <p:sp>
+        <p:nvSpPr>
+          <p:cNvPr id="11" name="">
+            <a:extLst xmlns:a="http://schemas.openxmlformats.org/drawingml/2006/main">
+              <a:ext uri="{FF2B5EF4-FFF2-40B4-BE49-F238E27FC236}">
+                <a16:creationId xmlns:a16="http://schemas.microsoft.com/office/drawing/2014/main" id="{749583AE-7D63-4955-9BC7-E72867AD51F0}"/>
+              </a:ext>
+            </a:extLst>
+          </p:cNvPr>
+          <p:cNvSpPr>
+            <a:spLocks xmlns:a="http://schemas.openxmlformats.org/drawingml/2006/main" noGrp="1"/>
+          </p:cNvSpPr>
+          <p:nvPr/>
+        </p:nvSpPr>
+        <p:spPr>
+          <a:xfrm xmlns:a="http://schemas.openxmlformats.org/drawingml/2006/main">
+            <a:off x="609600" y="6191250"/>
+            <a:ext cx="9048750" cy="285750"/>
+          </a:xfrm>
+          <a:prstGeom xmlns:a="http://schemas.openxmlformats.org/drawingml/2006/main" prst="rect">
+            <a:avLst/>
+          </a:prstGeom>
+          <a:noFill xmlns:a="http://schemas.openxmlformats.org/drawingml/2006/main"/>
+          <a:ln xmlns:a="http://schemas.openxmlformats.org/drawingml/2006/main" w="0">
+            <a:noFill/>
+          </a:ln>
+        </p:spPr>
+        <p:txBody>
+          <a:bodyPr xmlns:a="http://schemas.openxmlformats.org/drawingml/2006/main">
+            <a:noAutofit/>
+          </a:bodyPr>
+          <a:lstStyle xmlns:a="http://schemas.openxmlformats.org/drawingml/2006/main"/>
+          <a:p xmlns:a="http://schemas.openxmlformats.org/drawingml/2006/main">
+            <a:pPr>
+              <a:defRPr sz="1350" b="0">
+                <a:solidFill>
+                  <a:srgbClr val="526B70"/>
+                </a:solidFill>
+                <a:latin typeface="Heiti TC"/>
+                <a:ea typeface="Heiti TC"/>
+                <a:cs typeface="Heiti TC"/>
+              </a:defRPr>
+            </a:pPr>
+            <a:r>
+              <a:rPr sz="1350" b="0">
+                <a:solidFill>
+                  <a:srgbClr val="526B70"/>
+                </a:solidFill>
+                <a:latin typeface="Heiti TC"/>
+                <a:ea typeface="Heiti TC"/>
+                <a:cs typeface="Heiti TC"/>
+              </a:rPr>
+              <a:t>不同學生的模擬數據 / Simulated data for different students</a:t>
+            </a:r>
+          </a:p>
+        </p:txBody>
+      </p:sp>
+    </p:spTree>
+    <p:extLst>
+      <p:ext uri="{BB962C8B-B14F-4D97-AF65-F5344CB8AC3E}">
+        <p14:creationId xmlns:p14="http://schemas.microsoft.com/office/powerpoint/2010/main" val="555583163"/>
+      </p:ext>
+    </p:extLst>
+  </p:cSld>
+</p:sld>
+</file>
+
+<file path=ppt/slides/slide12.xml><?xml version="1.0" encoding="utf-8"?>
+<p:sld xmlns:p="http://schemas.openxmlformats.org/presentationml/2006/main">
+  <p:cSld>
+    <p:bg>
+      <p:bgPr>
+        <a:solidFill xmlns:a="http://schemas.openxmlformats.org/drawingml/2006/main">
+          <a:srgbClr val="F5F7F4"/>
+        </a:solidFill>
+      </p:bgPr>
+    </p:bg>
+    <p:spTree>
+      <p:nvGrpSpPr>
+        <p:cNvPr id="1" name=""/>
+        <p:cNvGrpSpPr/>
+        <p:nvPr/>
+      </p:nvGrpSpPr>
+      <p:grpSpPr>
+        <a:xfrm xmlns:a="http://schemas.openxmlformats.org/drawingml/2006/main"/>
+      </p:grpSpPr>
+      <p:sp>
+        <p:nvSpPr>
+          <p:cNvPr id="15" name="">
+            <a:extLst xmlns:a="http://schemas.openxmlformats.org/drawingml/2006/main">
+              <a:ext uri="{FF2B5EF4-FFF2-40B4-BE49-F238E27FC236}">
+                <a16:creationId xmlns:a16="http://schemas.microsoft.com/office/drawing/2014/main" id="{E7AE7847-C6C4-4789-8823-599110E58C1A}"/>
+              </a:ext>
+            </a:extLst>
+          </p:cNvPr>
+          <p:cNvSpPr>
+            <a:spLocks xmlns:a="http://schemas.openxmlformats.org/drawingml/2006/main" noGrp="1"/>
+          </p:cNvSpPr>
+          <p:nvPr/>
+        </p:nvSpPr>
+        <p:spPr>
+          <a:xfrm xmlns:a="http://schemas.openxmlformats.org/drawingml/2006/main">
+            <a:off x="609600" y="400050"/>
+            <a:ext cx="10972800" cy="495300"/>
+          </a:xfrm>
+          <a:prstGeom xmlns:a="http://schemas.openxmlformats.org/drawingml/2006/main" prst="rect">
+            <a:avLst/>
+          </a:prstGeom>
+          <a:noFill xmlns:a="http://schemas.openxmlformats.org/drawingml/2006/main"/>
+          <a:ln xmlns:a="http://schemas.openxmlformats.org/drawingml/2006/main" w="0">
+            <a:noFill/>
+          </a:ln>
+        </p:spPr>
+        <p:txBody>
+          <a:bodyPr xmlns:a="http://schemas.openxmlformats.org/drawingml/2006/main">
+            <a:noAutofit/>
+          </a:bodyPr>
+          <a:lstStyle xmlns:a="http://schemas.openxmlformats.org/drawingml/2006/main"/>
+          <a:p xmlns:a="http://schemas.openxmlformats.org/drawingml/2006/main">
+            <a:pPr>
+              <a:defRPr sz="3300" b="0">
+                <a:solidFill>
+                  <a:srgbClr val="173C43"/>
+                </a:solidFill>
+                <a:latin typeface="Heiti TC"/>
+                <a:ea typeface="Heiti TC"/>
+                <a:cs typeface="Heiti TC"/>
+              </a:defRPr>
+            </a:pPr>
+            <a:r>
+              <a:rPr sz="3300" b="0">
+                <a:solidFill>
+                  <a:srgbClr val="173C43"/>
+                </a:solidFill>
+                <a:latin typeface="Heiti TC"/>
+                <a:ea typeface="Heiti TC"/>
+                <a:cs typeface="Heiti TC"/>
+              </a:rPr>
+              <a:t>預測結果與模型的限制</a:t>
+            </a:r>
+          </a:p>
+        </p:txBody>
+      </p:sp>
+      <p:sp>
+        <p:nvSpPr>
+          <p:cNvPr id="2" name="">
+            <a:extLst xmlns:a="http://schemas.openxmlformats.org/drawingml/2006/main">
+              <a:ext uri="{FF2B5EF4-FFF2-40B4-BE49-F238E27FC236}">
+                <a16:creationId xmlns:a16="http://schemas.microsoft.com/office/drawing/2014/main" id="{D7767000-F58A-4C7F-847B-302D9327D304}"/>
+              </a:ext>
+            </a:extLst>
+          </p:cNvPr>
+          <p:cNvSpPr>
+            <a:spLocks xmlns:a="http://schemas.openxmlformats.org/drawingml/2006/main" noGrp="1"/>
+          </p:cNvSpPr>
+          <p:nvPr/>
+        </p:nvSpPr>
+        <p:spPr>
+          <a:xfrm xmlns:a="http://schemas.openxmlformats.org/drawingml/2006/main">
+            <a:off x="609600" y="866775"/>
+            <a:ext cx="10972800" cy="457200"/>
+          </a:xfrm>
+          <a:prstGeom xmlns:a="http://schemas.openxmlformats.org/drawingml/2006/main" prst="rect">
+            <a:avLst/>
+          </a:prstGeom>
+          <a:noFill xmlns:a="http://schemas.openxmlformats.org/drawingml/2006/main"/>
+          <a:ln xmlns:a="http://schemas.openxmlformats.org/drawingml/2006/main" w="0">
+            <a:noFill/>
+          </a:ln>
+        </p:spPr>
+        <p:txBody>
+          <a:bodyPr xmlns:a="http://schemas.openxmlformats.org/drawingml/2006/main">
+            <a:noAutofit/>
+          </a:bodyPr>
+          <a:lstStyle xmlns:a="http://schemas.openxmlformats.org/drawingml/2006/main"/>
+          <a:p xmlns:a="http://schemas.openxmlformats.org/drawingml/2006/main">
+            <a:pPr>
+              <a:defRPr sz="2700" b="0">
+                <a:solidFill>
+                  <a:srgbClr val="526B70"/>
+                </a:solidFill>
+                <a:latin typeface="Arial"/>
+                <a:ea typeface="Arial"/>
+                <a:cs typeface="Arial"/>
+              </a:defRPr>
+            </a:pPr>
+            <a:r>
+              <a:rPr sz="2700" b="0">
+                <a:solidFill>
+                  <a:srgbClr val="526B70"/>
+                </a:solidFill>
+                <a:latin typeface="Arial"/>
+                <a:ea typeface="Arial"/>
+                <a:cs typeface="Arial"/>
+              </a:rPr>
+              <a:t>Prediction results and limits of the model</a:t>
+            </a:r>
+          </a:p>
+        </p:txBody>
+      </p:sp>
+      <p:sp>
+        <p:nvSpPr>
+          <p:cNvPr id="3" name="">
+            <a:extLst xmlns:a="http://schemas.openxmlformats.org/drawingml/2006/main">
+              <a:ext uri="{FF2B5EF4-FFF2-40B4-BE49-F238E27FC236}">
+                <a16:creationId xmlns:a16="http://schemas.microsoft.com/office/drawing/2014/main" id="{AD9CDFC9-6EEB-4D32-81D4-1D035A60472B}"/>
+              </a:ext>
+            </a:extLst>
+          </p:cNvPr>
+          <p:cNvSpPr>
+            <a:spLocks xmlns:a="http://schemas.openxmlformats.org/drawingml/2006/main" noGrp="1"/>
+          </p:cNvSpPr>
+          <p:nvPr/>
+        </p:nvSpPr>
+        <p:spPr>
+          <a:xfrm xmlns:a="http://schemas.openxmlformats.org/drawingml/2006/main">
+            <a:off x="11144250" y="6381750"/>
+            <a:ext cx="523875" cy="266700"/>
+          </a:xfrm>
+          <a:prstGeom xmlns:a="http://schemas.openxmlformats.org/drawingml/2006/main" prst="rect">
+            <a:avLst/>
+          </a:prstGeom>
+          <a:noFill xmlns:a="http://schemas.openxmlformats.org/drawingml/2006/main"/>
+          <a:ln xmlns:a="http://schemas.openxmlformats.org/drawingml/2006/main" w="0">
+            <a:noFill/>
+          </a:ln>
+        </p:spPr>
+        <p:txBody>
+          <a:bodyPr xmlns:a="http://schemas.openxmlformats.org/drawingml/2006/main">
+            <a:noAutofit/>
+          </a:bodyPr>
+          <a:lstStyle xmlns:a="http://schemas.openxmlformats.org/drawingml/2006/main"/>
+          <a:p xmlns:a="http://schemas.openxmlformats.org/drawingml/2006/main">
+            <a:pPr>
+              <a:defRPr sz="1350" b="0">
+                <a:solidFill>
+                  <a:srgbClr val="526B70"/>
+                </a:solidFill>
+                <a:latin typeface="Arial"/>
+                <a:ea typeface="Arial"/>
+                <a:cs typeface="Arial"/>
+              </a:defRPr>
+            </a:pPr>
+            <a:r>
+              <a:rPr sz="1350" b="0">
+                <a:solidFill>
+                  <a:srgbClr val="526B70"/>
+                </a:solidFill>
+                <a:latin typeface="Arial"/>
+                <a:ea typeface="Arial"/>
+                <a:cs typeface="Arial"/>
+              </a:rPr>
+              <a:t>12</a:t>
+            </a:r>
+          </a:p>
+        </p:txBody>
+      </p:sp>
+      <p:sp>
+        <p:nvSpPr>
+          <p:cNvPr id="4" name="">
+            <a:extLst xmlns:a="http://schemas.openxmlformats.org/drawingml/2006/main">
+              <a:ext uri="{FF2B5EF4-FFF2-40B4-BE49-F238E27FC236}">
+                <a16:creationId xmlns:a16="http://schemas.microsoft.com/office/drawing/2014/main" id="{CF11B496-E1B3-4DB9-B282-BE6AA05099F7}"/>
+              </a:ext>
+            </a:extLst>
+          </p:cNvPr>
+          <p:cNvSpPr>
+            <a:spLocks xmlns:a="http://schemas.openxmlformats.org/drawingml/2006/main" noGrp="1"/>
+          </p:cNvSpPr>
+          <p:nvPr/>
+        </p:nvSpPr>
+        <p:spPr>
+          <a:xfrm xmlns:a="http://schemas.openxmlformats.org/drawingml/2006/main">
+            <a:off x="609600" y="1657350"/>
+            <a:ext cx="10477500" cy="742950"/>
+          </a:xfrm>
+          <a:prstGeom xmlns:a="http://schemas.openxmlformats.org/drawingml/2006/main" prst="rect">
+            <a:avLst/>
+          </a:prstGeom>
+          <a:noFill xmlns:a="http://schemas.openxmlformats.org/drawingml/2006/main"/>
+          <a:ln xmlns:a="http://schemas.openxmlformats.org/drawingml/2006/main" w="0">
+            <a:noFill/>
+          </a:ln>
+        </p:spPr>
+        <p:txBody>
+          <a:bodyPr xmlns:a="http://schemas.openxmlformats.org/drawingml/2006/main">
+            <a:noAutofit/>
+          </a:bodyPr>
+          <a:lstStyle xmlns:a="http://schemas.openxmlformats.org/drawingml/2006/main"/>
+          <a:p xmlns:a="http://schemas.openxmlformats.org/drawingml/2006/main">
+            <a:pPr>
+              <a:defRPr sz="4350" b="1">
+                <a:solidFill>
+                  <a:srgbClr val="086C61"/>
+                </a:solidFill>
+                <a:latin typeface="Arial"/>
+                <a:ea typeface="Arial"/>
+                <a:cs typeface="Arial"/>
+              </a:defRPr>
+            </a:pPr>
+            <a:r>
+              <a:rPr sz="4350" b="1">
+                <a:solidFill>
+                  <a:srgbClr val="086C61"/>
+                </a:solidFill>
+                <a:latin typeface="Arial"/>
+                <a:ea typeface="Arial"/>
+                <a:cs typeface="Arial"/>
+              </a:rPr>
+              <a:t>y = 2x + 50</a:t>
+            </a:r>
+          </a:p>
+        </p:txBody>
+      </p:sp>
+      <p:sp>
+        <p:nvSpPr>
+          <p:cNvPr id="5" name="">
+            <a:extLst xmlns:a="http://schemas.openxmlformats.org/drawingml/2006/main">
+              <a:ext uri="{FF2B5EF4-FFF2-40B4-BE49-F238E27FC236}">
+                <a16:creationId xmlns:a16="http://schemas.microsoft.com/office/drawing/2014/main" id="{A5E0532E-CC38-4599-8965-ABBC219F68B0}"/>
+              </a:ext>
+            </a:extLst>
+          </p:cNvPr>
+          <p:cNvSpPr>
+            <a:spLocks xmlns:a="http://schemas.openxmlformats.org/drawingml/2006/main" noGrp="1"/>
+          </p:cNvSpPr>
+          <p:nvPr/>
+        </p:nvSpPr>
+        <p:spPr>
+          <a:xfrm xmlns:a="http://schemas.openxmlformats.org/drawingml/2006/main">
+            <a:off x="609600" y="2743200"/>
+            <a:ext cx="5143500" cy="495300"/>
+          </a:xfrm>
+          <a:prstGeom xmlns:a="http://schemas.openxmlformats.org/drawingml/2006/main" prst="rect">
+            <a:avLst/>
+          </a:prstGeom>
+          <a:noFill xmlns:a="http://schemas.openxmlformats.org/drawingml/2006/main"/>
+          <a:ln xmlns:a="http://schemas.openxmlformats.org/drawingml/2006/main" w="0">
+            <a:noFill/>
+          </a:ln>
+        </p:spPr>
+        <p:txBody>
+          <a:bodyPr xmlns:a="http://schemas.openxmlformats.org/drawingml/2006/main">
+            <a:noAutofit/>
+          </a:bodyPr>
+          <a:lstStyle xmlns:a="http://schemas.openxmlformats.org/drawingml/2006/main"/>
+          <a:p xmlns:a="http://schemas.openxmlformats.org/drawingml/2006/main">
+            <a:pPr>
+              <a:defRPr sz="2025" b="0">
+                <a:solidFill>
+                  <a:srgbClr val="173C43"/>
+                </a:solidFill>
+                <a:latin typeface="Heiti TC"/>
+                <a:ea typeface="Heiti TC"/>
+                <a:cs typeface="Heiti TC"/>
+              </a:defRPr>
+            </a:pPr>
+            <a:r>
+              <a:rPr sz="2025" b="0">
+                <a:solidFill>
+                  <a:srgbClr val="173C43"/>
+                </a:solidFill>
+                <a:latin typeface="Heiti TC"/>
+                <a:ea typeface="Heiti TC"/>
+                <a:cs typeface="Heiti TC"/>
+              </a:rPr>
+              <a:t>m = 2：模型中每小時約多 2 分</a:t>
+            </a:r>
+          </a:p>
+        </p:txBody>
+      </p:sp>
+      <p:sp>
+        <p:nvSpPr>
+          <p:cNvPr id="6" name="">
+            <a:extLst xmlns:a="http://schemas.openxmlformats.org/drawingml/2006/main">
+              <a:ext uri="{FF2B5EF4-FFF2-40B4-BE49-F238E27FC236}">
+                <a16:creationId xmlns:a16="http://schemas.microsoft.com/office/drawing/2014/main" id="{FCE7D09D-50E2-4598-88EA-57851FCA4AD7}"/>
+              </a:ext>
+            </a:extLst>
+          </p:cNvPr>
+          <p:cNvSpPr>
+            <a:spLocks xmlns:a="http://schemas.openxmlformats.org/drawingml/2006/main" noGrp="1"/>
+          </p:cNvSpPr>
+          <p:nvPr/>
+        </p:nvSpPr>
+        <p:spPr>
+          <a:xfrm xmlns:a="http://schemas.openxmlformats.org/drawingml/2006/main">
+            <a:off x="609600" y="3209925"/>
+            <a:ext cx="5143500" cy="457200"/>
+          </a:xfrm>
+          <a:prstGeom xmlns:a="http://schemas.openxmlformats.org/drawingml/2006/main" prst="rect">
+            <a:avLst/>
+          </a:prstGeom>
+          <a:noFill xmlns:a="http://schemas.openxmlformats.org/drawingml/2006/main"/>
+          <a:ln xmlns:a="http://schemas.openxmlformats.org/drawingml/2006/main" w="0">
+            <a:noFill/>
+          </a:ln>
+        </p:spPr>
+        <p:txBody>
+          <a:bodyPr xmlns:a="http://schemas.openxmlformats.org/drawingml/2006/main">
+            <a:noAutofit/>
+          </a:bodyPr>
+          <a:lstStyle xmlns:a="http://schemas.openxmlformats.org/drawingml/2006/main"/>
+          <a:p xmlns:a="http://schemas.openxmlformats.org/drawingml/2006/main">
+            <a:pPr>
+              <a:defRPr sz="1800" b="0">
+                <a:solidFill>
+                  <a:srgbClr val="526B70"/>
+                </a:solidFill>
+                <a:latin typeface="Arial"/>
+                <a:ea typeface="Arial"/>
+                <a:cs typeface="Arial"/>
+              </a:defRPr>
+            </a:pPr>
+            <a:r>
+              <a:rPr sz="1800" b="0">
+                <a:solidFill>
+                  <a:srgbClr val="526B70"/>
+                </a:solidFill>
+                <a:latin typeface="Arial"/>
+                <a:ea typeface="Arial"/>
+                <a:cs typeface="Arial"/>
+              </a:rPr>
+              <a:t>In this model, m = 2 marks per extra hour</a:t>
+            </a:r>
+          </a:p>
+        </p:txBody>
+      </p:sp>
+      <p:sp>
+        <p:nvSpPr>
+          <p:cNvPr id="7" name="">
+            <a:extLst xmlns:a="http://schemas.openxmlformats.org/drawingml/2006/main">
+              <a:ext uri="{FF2B5EF4-FFF2-40B4-BE49-F238E27FC236}">
+                <a16:creationId xmlns:a16="http://schemas.microsoft.com/office/drawing/2014/main" id="{D173F4B4-0520-4042-82BA-F51DC5BAC971}"/>
+              </a:ext>
+            </a:extLst>
+          </p:cNvPr>
+          <p:cNvSpPr>
+            <a:spLocks xmlns:a="http://schemas.openxmlformats.org/drawingml/2006/main" noGrp="1"/>
+          </p:cNvSpPr>
+          <p:nvPr/>
+        </p:nvSpPr>
+        <p:spPr>
+          <a:xfrm xmlns:a="http://schemas.openxmlformats.org/drawingml/2006/main">
+            <a:off x="6381750" y="2743200"/>
+            <a:ext cx="5143500" cy="495300"/>
+          </a:xfrm>
+          <a:prstGeom xmlns:a="http://schemas.openxmlformats.org/drawingml/2006/main" prst="rect">
+            <a:avLst/>
+          </a:prstGeom>
+          <a:noFill xmlns:a="http://schemas.openxmlformats.org/drawingml/2006/main"/>
+          <a:ln xmlns:a="http://schemas.openxmlformats.org/drawingml/2006/main" w="0">
+            <a:noFill/>
+          </a:ln>
+        </p:spPr>
+        <p:txBody>
+          <a:bodyPr xmlns:a="http://schemas.openxmlformats.org/drawingml/2006/main">
+            <a:noAutofit/>
+          </a:bodyPr>
+          <a:lstStyle xmlns:a="http://schemas.openxmlformats.org/drawingml/2006/main"/>
+          <a:p xmlns:a="http://schemas.openxmlformats.org/drawingml/2006/main">
+            <a:pPr>
+              <a:defRPr sz="2025" b="0">
+                <a:solidFill>
+                  <a:srgbClr val="173C43"/>
+                </a:solidFill>
+                <a:latin typeface="Heiti TC"/>
+                <a:ea typeface="Heiti TC"/>
+                <a:cs typeface="Heiti TC"/>
+              </a:defRPr>
+            </a:pPr>
+            <a:r>
+              <a:rPr sz="2025" b="0">
+                <a:solidFill>
+                  <a:srgbClr val="173C43"/>
+                </a:solidFill>
+                <a:latin typeface="Heiti TC"/>
+                <a:ea typeface="Heiti TC"/>
+                <a:cs typeface="Heiti TC"/>
+              </a:rPr>
+              <a:t>c = 50：0 小時時估計的成績</a:t>
+            </a:r>
+          </a:p>
+        </p:txBody>
+      </p:sp>
+      <p:sp>
+        <p:nvSpPr>
+          <p:cNvPr id="8" name="">
+            <a:extLst xmlns:a="http://schemas.openxmlformats.org/drawingml/2006/main">
+              <a:ext uri="{FF2B5EF4-FFF2-40B4-BE49-F238E27FC236}">
+                <a16:creationId xmlns:a16="http://schemas.microsoft.com/office/drawing/2014/main" id="{3F725F27-5E1B-48FC-AA69-5CAD492D84B9}"/>
+              </a:ext>
+            </a:extLst>
+          </p:cNvPr>
+          <p:cNvSpPr>
+            <a:spLocks xmlns:a="http://schemas.openxmlformats.org/drawingml/2006/main" noGrp="1"/>
+          </p:cNvSpPr>
+          <p:nvPr/>
+        </p:nvSpPr>
+        <p:spPr>
+          <a:xfrm xmlns:a="http://schemas.openxmlformats.org/drawingml/2006/main">
+            <a:off x="6381750" y="3209925"/>
+            <a:ext cx="5143500" cy="457200"/>
+          </a:xfrm>
+          <a:prstGeom xmlns:a="http://schemas.openxmlformats.org/drawingml/2006/main" prst="rect">
+            <a:avLst/>
+          </a:prstGeom>
+          <a:noFill xmlns:a="http://schemas.openxmlformats.org/drawingml/2006/main"/>
+          <a:ln xmlns:a="http://schemas.openxmlformats.org/drawingml/2006/main" w="0">
+            <a:noFill/>
+          </a:ln>
+        </p:spPr>
+        <p:txBody>
+          <a:bodyPr xmlns:a="http://schemas.openxmlformats.org/drawingml/2006/main">
+            <a:noAutofit/>
+          </a:bodyPr>
+          <a:lstStyle xmlns:a="http://schemas.openxmlformats.org/drawingml/2006/main"/>
+          <a:p xmlns:a="http://schemas.openxmlformats.org/drawingml/2006/main">
+            <a:pPr>
+              <a:defRPr sz="1800" b="0">
+                <a:solidFill>
+                  <a:srgbClr val="526B70"/>
+                </a:solidFill>
+                <a:latin typeface="Arial"/>
+                <a:ea typeface="Arial"/>
+                <a:cs typeface="Arial"/>
+              </a:defRPr>
+            </a:pPr>
+            <a:r>
+              <a:rPr sz="1800" b="0">
+                <a:solidFill>
+                  <a:srgbClr val="526B70"/>
+                </a:solidFill>
+                <a:latin typeface="Arial"/>
+                <a:ea typeface="Arial"/>
+                <a:cs typeface="Arial"/>
+              </a:rPr>
+              <a:t>c = 50: estimated score at 0 hours</a:t>
+            </a:r>
+          </a:p>
+        </p:txBody>
+      </p:sp>
+      <p:sp>
+        <p:nvSpPr>
+          <p:cNvPr id="9" name="">
+            <a:extLst xmlns:a="http://schemas.openxmlformats.org/drawingml/2006/main">
+              <a:ext uri="{FF2B5EF4-FFF2-40B4-BE49-F238E27FC236}">
+                <a16:creationId xmlns:a16="http://schemas.microsoft.com/office/drawing/2014/main" id="{08681AC7-71DE-443B-8113-D46EAA901535}"/>
+              </a:ext>
+            </a:extLst>
+          </p:cNvPr>
+          <p:cNvSpPr>
+            <a:spLocks xmlns:a="http://schemas.openxmlformats.org/drawingml/2006/main" noGrp="1"/>
+          </p:cNvSpPr>
+          <p:nvPr/>
+        </p:nvSpPr>
+        <p:spPr>
+          <a:xfrm xmlns:a="http://schemas.openxmlformats.org/drawingml/2006/main">
+            <a:off x="609600" y="3952875"/>
+            <a:ext cx="5143500" cy="495300"/>
+          </a:xfrm>
+          <a:prstGeom xmlns:a="http://schemas.openxmlformats.org/drawingml/2006/main" prst="rect">
+            <a:avLst/>
+          </a:prstGeom>
+          <a:noFill xmlns:a="http://schemas.openxmlformats.org/drawingml/2006/main"/>
+          <a:ln xmlns:a="http://schemas.openxmlformats.org/drawingml/2006/main" w="0">
+            <a:noFill/>
+          </a:ln>
+        </p:spPr>
+        <p:txBody>
+          <a:bodyPr xmlns:a="http://schemas.openxmlformats.org/drawingml/2006/main">
+            <a:noAutofit/>
+          </a:bodyPr>
+          <a:lstStyle xmlns:a="http://schemas.openxmlformats.org/drawingml/2006/main"/>
+          <a:p xmlns:a="http://schemas.openxmlformats.org/drawingml/2006/main">
+            <a:pPr>
+              <a:defRPr sz="2400" b="0">
+                <a:solidFill>
+                  <a:srgbClr val="173C43"/>
+                </a:solidFill>
+                <a:latin typeface="Heiti TC"/>
+                <a:ea typeface="Heiti TC"/>
+                <a:cs typeface="Heiti TC"/>
+              </a:defRPr>
+            </a:pPr>
+            <a:r>
+              <a:rPr sz="2400" b="0">
+                <a:solidFill>
+                  <a:srgbClr val="173C43"/>
+                </a:solidFill>
+                <a:latin typeface="Heiti TC"/>
+                <a:ea typeface="Heiti TC"/>
+                <a:cs typeface="Heiti TC"/>
+              </a:rPr>
+              <a:t>3.5 小時：約 57 分</a:t>
+            </a:r>
+          </a:p>
+        </p:txBody>
+      </p:sp>
+      <p:sp>
+        <p:nvSpPr>
+          <p:cNvPr id="10" name="">
+            <a:extLst xmlns:a="http://schemas.openxmlformats.org/drawingml/2006/main">
+              <a:ext uri="{FF2B5EF4-FFF2-40B4-BE49-F238E27FC236}">
+                <a16:creationId xmlns:a16="http://schemas.microsoft.com/office/drawing/2014/main" id="{5E7864DA-FEE3-4DF3-B572-F9C57857107B}"/>
+              </a:ext>
+            </a:extLst>
+          </p:cNvPr>
+          <p:cNvSpPr>
+            <a:spLocks xmlns:a="http://schemas.openxmlformats.org/drawingml/2006/main" noGrp="1"/>
+          </p:cNvSpPr>
+          <p:nvPr/>
+        </p:nvSpPr>
+        <p:spPr>
+          <a:xfrm xmlns:a="http://schemas.openxmlformats.org/drawingml/2006/main">
+            <a:off x="609600" y="4419600"/>
+            <a:ext cx="5143500" cy="457200"/>
+          </a:xfrm>
+          <a:prstGeom xmlns:a="http://schemas.openxmlformats.org/drawingml/2006/main" prst="rect">
+            <a:avLst/>
+          </a:prstGeom>
+          <a:noFill xmlns:a="http://schemas.openxmlformats.org/drawingml/2006/main"/>
+          <a:ln xmlns:a="http://schemas.openxmlformats.org/drawingml/2006/main" w="0">
+            <a:noFill/>
+          </a:ln>
+        </p:spPr>
+        <p:txBody>
+          <a:bodyPr xmlns:a="http://schemas.openxmlformats.org/drawingml/2006/main">
+            <a:noAutofit/>
+          </a:bodyPr>
+          <a:lstStyle xmlns:a="http://schemas.openxmlformats.org/drawingml/2006/main"/>
+          <a:p xmlns:a="http://schemas.openxmlformats.org/drawingml/2006/main">
+            <a:pPr>
+              <a:defRPr sz="1800" b="0">
+                <a:solidFill>
+                  <a:srgbClr val="526B70"/>
+                </a:solidFill>
+                <a:latin typeface="Arial"/>
+                <a:ea typeface="Arial"/>
+                <a:cs typeface="Arial"/>
+              </a:defRPr>
+            </a:pPr>
+            <a:r>
+              <a:rPr sz="1800" b="0">
+                <a:solidFill>
+                  <a:srgbClr val="526B70"/>
+                </a:solidFill>
+                <a:latin typeface="Arial"/>
+                <a:ea typeface="Arial"/>
+                <a:cs typeface="Arial"/>
+              </a:rPr>
+              <a:t>3.5 hours: about 57 marks</a:t>
+            </a:r>
+          </a:p>
+        </p:txBody>
+      </p:sp>
+      <p:sp>
+        <p:nvSpPr>
+          <p:cNvPr id="11" name="">
+            <a:extLst xmlns:a="http://schemas.openxmlformats.org/drawingml/2006/main">
+              <a:ext uri="{FF2B5EF4-FFF2-40B4-BE49-F238E27FC236}">
+                <a16:creationId xmlns:a16="http://schemas.microsoft.com/office/drawing/2014/main" id="{9BF7286A-4F9D-46BE-BBF8-C8990A034204}"/>
+              </a:ext>
+            </a:extLst>
+          </p:cNvPr>
+          <p:cNvSpPr>
+            <a:spLocks xmlns:a="http://schemas.openxmlformats.org/drawingml/2006/main" noGrp="1"/>
+          </p:cNvSpPr>
+          <p:nvPr/>
+        </p:nvSpPr>
+        <p:spPr>
+          <a:xfrm xmlns:a="http://schemas.openxmlformats.org/drawingml/2006/main">
+            <a:off x="6381750" y="3952875"/>
+            <a:ext cx="5143500" cy="495300"/>
+          </a:xfrm>
+          <a:prstGeom xmlns:a="http://schemas.openxmlformats.org/drawingml/2006/main" prst="rect">
+            <a:avLst/>
+          </a:prstGeom>
+          <a:noFill xmlns:a="http://schemas.openxmlformats.org/drawingml/2006/main"/>
+          <a:ln xmlns:a="http://schemas.openxmlformats.org/drawingml/2006/main" w="0">
+            <a:noFill/>
+          </a:ln>
+        </p:spPr>
+        <p:txBody>
+          <a:bodyPr xmlns:a="http://schemas.openxmlformats.org/drawingml/2006/main">
+            <a:noAutofit/>
+          </a:bodyPr>
+          <a:lstStyle xmlns:a="http://schemas.openxmlformats.org/drawingml/2006/main"/>
+          <a:p xmlns:a="http://schemas.openxmlformats.org/drawingml/2006/main">
+            <a:pPr>
+              <a:defRPr sz="2400" b="0">
+                <a:solidFill>
+                  <a:srgbClr val="173C43"/>
+                </a:solidFill>
+                <a:latin typeface="Heiti TC"/>
+                <a:ea typeface="Heiti TC"/>
+                <a:cs typeface="Heiti TC"/>
+              </a:defRPr>
+            </a:pPr>
+            <a:r>
+              <a:rPr sz="2400" b="0">
+                <a:solidFill>
+                  <a:srgbClr val="173C43"/>
+                </a:solidFill>
+                <a:latin typeface="Heiti TC"/>
+                <a:ea typeface="Heiti TC"/>
+                <a:cs typeface="Heiti TC"/>
+              </a:rPr>
+              <a:t>10 小時：約 70 分</a:t>
+            </a:r>
+          </a:p>
+        </p:txBody>
+      </p:sp>
+      <p:sp>
+        <p:nvSpPr>
+          <p:cNvPr id="12" name="">
+            <a:extLst xmlns:a="http://schemas.openxmlformats.org/drawingml/2006/main">
+              <a:ext uri="{FF2B5EF4-FFF2-40B4-BE49-F238E27FC236}">
+                <a16:creationId xmlns:a16="http://schemas.microsoft.com/office/drawing/2014/main" id="{91A7E199-2435-45B8-B1C6-EEEED4BB650E}"/>
+              </a:ext>
+            </a:extLst>
+          </p:cNvPr>
+          <p:cNvSpPr>
+            <a:spLocks xmlns:a="http://schemas.openxmlformats.org/drawingml/2006/main" noGrp="1"/>
+          </p:cNvSpPr>
+          <p:nvPr/>
+        </p:nvSpPr>
+        <p:spPr>
+          <a:xfrm xmlns:a="http://schemas.openxmlformats.org/drawingml/2006/main">
+            <a:off x="6381750" y="4419600"/>
+            <a:ext cx="5143500" cy="457200"/>
+          </a:xfrm>
+          <a:prstGeom xmlns:a="http://schemas.openxmlformats.org/drawingml/2006/main" prst="rect">
+            <a:avLst/>
+          </a:prstGeom>
+          <a:noFill xmlns:a="http://schemas.openxmlformats.org/drawingml/2006/main"/>
+          <a:ln xmlns:a="http://schemas.openxmlformats.org/drawingml/2006/main" w="0">
+            <a:noFill/>
+          </a:ln>
+        </p:spPr>
+        <p:txBody>
+          <a:bodyPr xmlns:a="http://schemas.openxmlformats.org/drawingml/2006/main">
+            <a:noAutofit/>
+          </a:bodyPr>
+          <a:lstStyle xmlns:a="http://schemas.openxmlformats.org/drawingml/2006/main"/>
+          <a:p xmlns:a="http://schemas.openxmlformats.org/drawingml/2006/main">
+            <a:pPr>
+              <a:defRPr sz="1800" b="0">
+                <a:solidFill>
+                  <a:srgbClr val="526B70"/>
+                </a:solidFill>
+                <a:latin typeface="Arial"/>
+                <a:ea typeface="Arial"/>
+                <a:cs typeface="Arial"/>
+              </a:defRPr>
+            </a:pPr>
+            <a:r>
+              <a:rPr sz="1800" b="0">
+                <a:solidFill>
+                  <a:srgbClr val="526B70"/>
+                </a:solidFill>
+                <a:latin typeface="Arial"/>
+                <a:ea typeface="Arial"/>
+                <a:cs typeface="Arial"/>
+              </a:rPr>
+              <a:t>10 hours: about 70 marks</a:t>
+            </a:r>
+          </a:p>
+        </p:txBody>
+      </p:sp>
+      <p:sp>
+        <p:nvSpPr>
+          <p:cNvPr id="13" name="">
+            <a:extLst xmlns:a="http://schemas.openxmlformats.org/drawingml/2006/main">
+              <a:ext uri="{FF2B5EF4-FFF2-40B4-BE49-F238E27FC236}">
+                <a16:creationId xmlns:a16="http://schemas.microsoft.com/office/drawing/2014/main" id="{7212D5C4-C3A9-4D88-B4B3-71BA3D211017}"/>
+              </a:ext>
+            </a:extLst>
+          </p:cNvPr>
+          <p:cNvSpPr>
+            <a:spLocks xmlns:a="http://schemas.openxmlformats.org/drawingml/2006/main" noGrp="1"/>
+          </p:cNvSpPr>
+          <p:nvPr/>
+        </p:nvSpPr>
+        <p:spPr>
+          <a:xfrm xmlns:a="http://schemas.openxmlformats.org/drawingml/2006/main">
+            <a:off x="609600" y="5162550"/>
+            <a:ext cx="10763250" cy="495300"/>
+          </a:xfrm>
+          <a:prstGeom xmlns:a="http://schemas.openxmlformats.org/drawingml/2006/main" prst="rect">
+            <a:avLst/>
+          </a:prstGeom>
+          <a:noFill xmlns:a="http://schemas.openxmlformats.org/drawingml/2006/main"/>
+          <a:ln xmlns:a="http://schemas.openxmlformats.org/drawingml/2006/main" w="0">
+            <a:noFill/>
+          </a:ln>
+        </p:spPr>
+        <p:txBody>
+          <a:bodyPr xmlns:a="http://schemas.openxmlformats.org/drawingml/2006/main">
+            <a:noAutofit/>
+          </a:bodyPr>
+          <a:lstStyle xmlns:a="http://schemas.openxmlformats.org/drawingml/2006/main"/>
+          <a:p xmlns:a="http://schemas.openxmlformats.org/drawingml/2006/main">
+            <a:pPr>
+              <a:defRPr sz="1950" b="0">
+                <a:solidFill>
+                  <a:srgbClr val="173C43"/>
+                </a:solidFill>
+                <a:latin typeface="Heiti TC"/>
+                <a:ea typeface="Heiti TC"/>
+                <a:cs typeface="Heiti TC"/>
+              </a:defRPr>
+            </a:pPr>
+            <a:r>
+              <a:rPr sz="1950" b="0">
+                <a:solidFill>
+                  <a:srgbClr val="173C43"/>
+                </a:solidFill>
+                <a:latin typeface="Heiti TC"/>
+                <a:ea typeface="Heiti TC"/>
+                <a:cs typeface="Heiti TC"/>
+              </a:rPr>
+              <a:t>10 小時超出觀察範圍。這些數據也不能證明，溫習會令分數上升。</a:t>
+            </a:r>
+          </a:p>
+        </p:txBody>
+      </p:sp>
+      <p:sp>
+        <p:nvSpPr>
+          <p:cNvPr id="14" name="">
+            <a:extLst xmlns:a="http://schemas.openxmlformats.org/drawingml/2006/main">
+              <a:ext uri="{FF2B5EF4-FFF2-40B4-BE49-F238E27FC236}">
+                <a16:creationId xmlns:a16="http://schemas.microsoft.com/office/drawing/2014/main" id="{DA7F76F3-0329-426E-A497-5135AF34BB8C}"/>
+              </a:ext>
+            </a:extLst>
+          </p:cNvPr>
+          <p:cNvSpPr>
+            <a:spLocks xmlns:a="http://schemas.openxmlformats.org/drawingml/2006/main" noGrp="1"/>
+          </p:cNvSpPr>
+          <p:nvPr/>
+        </p:nvSpPr>
+        <p:spPr>
+          <a:xfrm xmlns:a="http://schemas.openxmlformats.org/drawingml/2006/main">
+            <a:off x="609600" y="5629275"/>
+            <a:ext cx="10763250" cy="457200"/>
+          </a:xfrm>
+          <a:prstGeom xmlns:a="http://schemas.openxmlformats.org/drawingml/2006/main" prst="rect">
+            <a:avLst/>
+          </a:prstGeom>
+          <a:noFill xmlns:a="http://schemas.openxmlformats.org/drawingml/2006/main"/>
+          <a:ln xmlns:a="http://schemas.openxmlformats.org/drawingml/2006/main" w="0">
+            <a:noFill/>
+          </a:ln>
+        </p:spPr>
+        <p:txBody>
+          <a:bodyPr xmlns:a="http://schemas.openxmlformats.org/drawingml/2006/main">
+            <a:noAutofit/>
+          </a:bodyPr>
+          <a:lstStyle xmlns:a="http://schemas.openxmlformats.org/drawingml/2006/main"/>
+          <a:p xmlns:a="http://schemas.openxmlformats.org/drawingml/2006/main">
+            <a:pPr>
+              <a:defRPr sz="1800" b="0">
+                <a:solidFill>
+                  <a:srgbClr val="526B70"/>
+                </a:solidFill>
+                <a:latin typeface="Arial"/>
+                <a:ea typeface="Arial"/>
+                <a:cs typeface="Arial"/>
+              </a:defRPr>
+            </a:pPr>
+            <a:r>
+              <a:rPr sz="1800" b="0">
+                <a:solidFill>
+                  <a:srgbClr val="526B70"/>
+                </a:solidFill>
+                <a:latin typeface="Arial"/>
+                <a:ea typeface="Arial"/>
+                <a:cs typeface="Arial"/>
+              </a:rPr>
+              <a:t>10 hours is outside the data range. The data does not prove cause and effect.</a:t>
+            </a:r>
+          </a:p>
+        </p:txBody>
+      </p:sp>
+    </p:spTree>
+    <p:extLst>
+      <p:ext uri="{BB962C8B-B14F-4D97-AF65-F5344CB8AC3E}">
+        <p14:creationId xmlns:p14="http://schemas.microsoft.com/office/powerpoint/2010/main" val="1852769017"/>
+      </p:ext>
+    </p:extLst>
+  </p:cSld>
+</p:sld>
+</file>
+
+<file path=ppt/slides/slide13.xml><?xml version="1.0" encoding="utf-8"?>
+<p:sld xmlns:p="http://schemas.openxmlformats.org/presentationml/2006/main">
+  <p:cSld>
+    <p:bg>
+      <p:bgPr>
+        <a:solidFill xmlns:a="http://schemas.openxmlformats.org/drawingml/2006/main">
+          <a:srgbClr val="F5F7F4"/>
+        </a:solidFill>
+      </p:bgPr>
+    </p:bg>
+    <p:spTree>
+      <p:nvGrpSpPr>
+        <p:cNvPr id="1" name=""/>
+        <p:cNvGrpSpPr/>
+        <p:nvPr/>
+      </p:nvGrpSpPr>
+      <p:grpSpPr>
+        <a:xfrm xmlns:a="http://schemas.openxmlformats.org/drawingml/2006/main"/>
+      </p:grpSpPr>
+      <p:sp>
+        <p:nvSpPr>
+          <p:cNvPr id="11" name="">
+            <a:extLst xmlns:a="http://schemas.openxmlformats.org/drawingml/2006/main">
+              <a:ext uri="{FF2B5EF4-FFF2-40B4-BE49-F238E27FC236}">
+                <a16:creationId xmlns:a16="http://schemas.microsoft.com/office/drawing/2014/main" id="{C5DA0834-CA88-40DE-99EA-23BCF630D5AA}"/>
+              </a:ext>
+            </a:extLst>
+          </p:cNvPr>
+          <p:cNvSpPr>
+            <a:spLocks xmlns:a="http://schemas.openxmlformats.org/drawingml/2006/main" noGrp="1"/>
+          </p:cNvSpPr>
+          <p:nvPr/>
+        </p:nvSpPr>
+        <p:spPr>
+          <a:xfrm xmlns:a="http://schemas.openxmlformats.org/drawingml/2006/main">
+            <a:off x="609600" y="400050"/>
+            <a:ext cx="10972800" cy="495300"/>
+          </a:xfrm>
+          <a:prstGeom xmlns:a="http://schemas.openxmlformats.org/drawingml/2006/main" prst="rect">
+            <a:avLst/>
+          </a:prstGeom>
+          <a:noFill xmlns:a="http://schemas.openxmlformats.org/drawingml/2006/main"/>
+          <a:ln xmlns:a="http://schemas.openxmlformats.org/drawingml/2006/main" w="0">
+            <a:noFill/>
+          </a:ln>
+        </p:spPr>
+        <p:txBody>
+          <a:bodyPr xmlns:a="http://schemas.openxmlformats.org/drawingml/2006/main">
+            <a:noAutofit/>
+          </a:bodyPr>
+          <a:lstStyle xmlns:a="http://schemas.openxmlformats.org/drawingml/2006/main"/>
+          <a:p xmlns:a="http://schemas.openxmlformats.org/drawingml/2006/main">
+            <a:pPr>
+              <a:defRPr sz="3300" b="0">
+                <a:solidFill>
+                  <a:srgbClr val="173C43"/>
+                </a:solidFill>
+                <a:latin typeface="Heiti TC"/>
+                <a:ea typeface="Heiti TC"/>
+                <a:cs typeface="Heiti TC"/>
+              </a:defRPr>
+            </a:pPr>
+            <a:r>
+              <a:rPr sz="3300" b="0">
+                <a:solidFill>
+                  <a:srgbClr val="173C43"/>
+                </a:solidFill>
+                <a:latin typeface="Heiti TC"/>
+                <a:ea typeface="Heiti TC"/>
+                <a:cs typeface="Heiti TC"/>
+              </a:rPr>
+              <a:t>你的預測與觀察</a:t>
+            </a:r>
+          </a:p>
+        </p:txBody>
+      </p:sp>
+      <p:sp>
+        <p:nvSpPr>
+          <p:cNvPr id="2" name="">
+            <a:extLst xmlns:a="http://schemas.openxmlformats.org/drawingml/2006/main">
+              <a:ext uri="{FF2B5EF4-FFF2-40B4-BE49-F238E27FC236}">
+                <a16:creationId xmlns:a16="http://schemas.microsoft.com/office/drawing/2014/main" id="{8DD4D23F-2A44-440F-88F6-5DCCCF3978FF}"/>
+              </a:ext>
+            </a:extLst>
+          </p:cNvPr>
+          <p:cNvSpPr>
+            <a:spLocks xmlns:a="http://schemas.openxmlformats.org/drawingml/2006/main" noGrp="1"/>
+          </p:cNvSpPr>
+          <p:nvPr/>
+        </p:nvSpPr>
+        <p:spPr>
+          <a:xfrm xmlns:a="http://schemas.openxmlformats.org/drawingml/2006/main">
+            <a:off x="609600" y="866775"/>
+            <a:ext cx="10972800" cy="457200"/>
+          </a:xfrm>
+          <a:prstGeom xmlns:a="http://schemas.openxmlformats.org/drawingml/2006/main" prst="rect">
+            <a:avLst/>
+          </a:prstGeom>
+          <a:noFill xmlns:a="http://schemas.openxmlformats.org/drawingml/2006/main"/>
+          <a:ln xmlns:a="http://schemas.openxmlformats.org/drawingml/2006/main" w="0">
+            <a:noFill/>
+          </a:ln>
+        </p:spPr>
+        <p:txBody>
+          <a:bodyPr xmlns:a="http://schemas.openxmlformats.org/drawingml/2006/main">
+            <a:noAutofit/>
+          </a:bodyPr>
+          <a:lstStyle xmlns:a="http://schemas.openxmlformats.org/drawingml/2006/main"/>
+          <a:p xmlns:a="http://schemas.openxmlformats.org/drawingml/2006/main">
+            <a:pPr>
+              <a:defRPr sz="2700" b="0">
+                <a:solidFill>
+                  <a:srgbClr val="526B70"/>
+                </a:solidFill>
+                <a:latin typeface="Arial"/>
+                <a:ea typeface="Arial"/>
+                <a:cs typeface="Arial"/>
+              </a:defRPr>
+            </a:pPr>
+            <a:r>
+              <a:rPr sz="2700" b="0">
+                <a:solidFill>
+                  <a:srgbClr val="526B70"/>
+                </a:solidFill>
+                <a:latin typeface="Arial"/>
+                <a:ea typeface="Arial"/>
+                <a:cs typeface="Arial"/>
+              </a:rPr>
+              <a:t>Your prediction and observation</a:t>
+            </a:r>
+          </a:p>
+        </p:txBody>
+      </p:sp>
+      <p:sp>
+        <p:nvSpPr>
+          <p:cNvPr id="3" name="">
+            <a:extLst xmlns:a="http://schemas.openxmlformats.org/drawingml/2006/main">
+              <a:ext uri="{FF2B5EF4-FFF2-40B4-BE49-F238E27FC236}">
+                <a16:creationId xmlns:a16="http://schemas.microsoft.com/office/drawing/2014/main" id="{DE1504F3-FAE0-4BEC-B275-D34402E5F9BB}"/>
+              </a:ext>
+            </a:extLst>
+          </p:cNvPr>
+          <p:cNvSpPr>
+            <a:spLocks xmlns:a="http://schemas.openxmlformats.org/drawingml/2006/main" noGrp="1"/>
+          </p:cNvSpPr>
+          <p:nvPr/>
+        </p:nvSpPr>
+        <p:spPr>
+          <a:xfrm xmlns:a="http://schemas.openxmlformats.org/drawingml/2006/main">
+            <a:off x="11144250" y="6381750"/>
+            <a:ext cx="523875" cy="266700"/>
+          </a:xfrm>
+          <a:prstGeom xmlns:a="http://schemas.openxmlformats.org/drawingml/2006/main" prst="rect">
+            <a:avLst/>
+          </a:prstGeom>
+          <a:noFill xmlns:a="http://schemas.openxmlformats.org/drawingml/2006/main"/>
+          <a:ln xmlns:a="http://schemas.openxmlformats.org/drawingml/2006/main" w="0">
+            <a:noFill/>
+          </a:ln>
+        </p:spPr>
+        <p:txBody>
+          <a:bodyPr xmlns:a="http://schemas.openxmlformats.org/drawingml/2006/main">
+            <a:noAutofit/>
+          </a:bodyPr>
+          <a:lstStyle xmlns:a="http://schemas.openxmlformats.org/drawingml/2006/main"/>
+          <a:p xmlns:a="http://schemas.openxmlformats.org/drawingml/2006/main">
+            <a:pPr>
+              <a:defRPr sz="1350" b="0">
+                <a:solidFill>
+                  <a:srgbClr val="526B70"/>
+                </a:solidFill>
+                <a:latin typeface="Arial"/>
+                <a:ea typeface="Arial"/>
+                <a:cs typeface="Arial"/>
+              </a:defRPr>
+            </a:pPr>
+            <a:r>
+              <a:rPr sz="1350" b="0">
+                <a:solidFill>
+                  <a:srgbClr val="526B70"/>
+                </a:solidFill>
+                <a:latin typeface="Arial"/>
+                <a:ea typeface="Arial"/>
+                <a:cs typeface="Arial"/>
+              </a:rPr>
+              <a:t>13</a:t>
+            </a:r>
+          </a:p>
+        </p:txBody>
+      </p:sp>
+      <p:sp>
+        <p:nvSpPr>
+          <p:cNvPr id="4" name="">
+            <a:extLst xmlns:a="http://schemas.openxmlformats.org/drawingml/2006/main">
+              <a:ext uri="{FF2B5EF4-FFF2-40B4-BE49-F238E27FC236}">
+                <a16:creationId xmlns:a16="http://schemas.microsoft.com/office/drawing/2014/main" id="{A1105F7D-712A-4F95-A754-1EB1EC135779}"/>
+              </a:ext>
+            </a:extLst>
+          </p:cNvPr>
+          <p:cNvSpPr>
+            <a:spLocks xmlns:a="http://schemas.openxmlformats.org/drawingml/2006/main" noGrp="1"/>
+          </p:cNvSpPr>
+          <p:nvPr/>
+        </p:nvSpPr>
+        <p:spPr>
+          <a:xfrm xmlns:a="http://schemas.openxmlformats.org/drawingml/2006/main">
+            <a:off x="609600" y="1762125"/>
+            <a:ext cx="10668000" cy="495300"/>
+          </a:xfrm>
+          <a:prstGeom xmlns:a="http://schemas.openxmlformats.org/drawingml/2006/main" prst="rect">
+            <a:avLst/>
+          </a:prstGeom>
+          <a:noFill xmlns:a="http://schemas.openxmlformats.org/drawingml/2006/main"/>
+          <a:ln xmlns:a="http://schemas.openxmlformats.org/drawingml/2006/main" w="0">
+            <a:noFill/>
+          </a:ln>
+        </p:spPr>
+        <p:txBody>
+          <a:bodyPr xmlns:a="http://schemas.openxmlformats.org/drawingml/2006/main">
+            <a:noAutofit/>
+          </a:bodyPr>
+          <a:lstStyle xmlns:a="http://schemas.openxmlformats.org/drawingml/2006/main"/>
+          <a:p xmlns:a="http://schemas.openxmlformats.org/drawingml/2006/main">
+            <a:pPr>
+              <a:defRPr sz="2550" b="0">
+                <a:solidFill>
+                  <a:srgbClr val="173C43"/>
+                </a:solidFill>
+                <a:latin typeface="Heiti TC"/>
+                <a:ea typeface="Heiti TC"/>
+                <a:cs typeface="Heiti TC"/>
+              </a:defRPr>
+            </a:pPr>
+            <a:r>
+              <a:rPr sz="2550" b="0">
+                <a:solidFill>
+                  <a:srgbClr val="173C43"/>
+                </a:solidFill>
+                <a:latin typeface="Heiti TC"/>
+                <a:ea typeface="Heiti TC"/>
+                <a:cs typeface="Heiti TC"/>
+              </a:rPr>
+              <a:t>你的估計與網頁的預測接近嗎？</a:t>
+            </a:r>
+          </a:p>
+        </p:txBody>
+      </p:sp>
+      <p:sp>
+        <p:nvSpPr>
+          <p:cNvPr id="5" name="">
+            <a:extLst xmlns:a="http://schemas.openxmlformats.org/drawingml/2006/main">
+              <a:ext uri="{FF2B5EF4-FFF2-40B4-BE49-F238E27FC236}">
+                <a16:creationId xmlns:a16="http://schemas.microsoft.com/office/drawing/2014/main" id="{95467AC7-08D8-4315-874C-574114EA5550}"/>
+              </a:ext>
+            </a:extLst>
+          </p:cNvPr>
+          <p:cNvSpPr>
+            <a:spLocks xmlns:a="http://schemas.openxmlformats.org/drawingml/2006/main" noGrp="1"/>
+          </p:cNvSpPr>
+          <p:nvPr/>
+        </p:nvSpPr>
+        <p:spPr>
+          <a:xfrm xmlns:a="http://schemas.openxmlformats.org/drawingml/2006/main">
+            <a:off x="609600" y="2228850"/>
+            <a:ext cx="10668000" cy="457200"/>
+          </a:xfrm>
+          <a:prstGeom xmlns:a="http://schemas.openxmlformats.org/drawingml/2006/main" prst="rect">
+            <a:avLst/>
+          </a:prstGeom>
+          <a:noFill xmlns:a="http://schemas.openxmlformats.org/drawingml/2006/main"/>
+          <a:ln xmlns:a="http://schemas.openxmlformats.org/drawingml/2006/main" w="0">
+            <a:noFill/>
+          </a:ln>
+        </p:spPr>
+        <p:txBody>
+          <a:bodyPr xmlns:a="http://schemas.openxmlformats.org/drawingml/2006/main">
+            <a:noAutofit/>
+          </a:bodyPr>
+          <a:lstStyle xmlns:a="http://schemas.openxmlformats.org/drawingml/2006/main"/>
+          <a:p xmlns:a="http://schemas.openxmlformats.org/drawingml/2006/main">
+            <a:pPr>
+              <a:defRPr sz="1950" b="0">
+                <a:solidFill>
+                  <a:srgbClr val="526B70"/>
+                </a:solidFill>
+                <a:latin typeface="Arial"/>
+                <a:ea typeface="Arial"/>
+                <a:cs typeface="Arial"/>
+              </a:defRPr>
+            </a:pPr>
+            <a:r>
+              <a:rPr sz="1950" b="0">
+                <a:solidFill>
+                  <a:srgbClr val="526B70"/>
+                </a:solidFill>
+                <a:latin typeface="Arial"/>
+                <a:ea typeface="Arial"/>
+                <a:cs typeface="Arial"/>
+              </a:rPr>
+              <a:t>Was your estimate close to the page’s prediction?</a:t>
+            </a:r>
+          </a:p>
+        </p:txBody>
+      </p:sp>
+      <p:sp>
+        <p:nvSpPr>
+          <p:cNvPr id="6" name="">
+            <a:extLst xmlns:a="http://schemas.openxmlformats.org/drawingml/2006/main">
+              <a:ext uri="{FF2B5EF4-FFF2-40B4-BE49-F238E27FC236}">
+                <a16:creationId xmlns:a16="http://schemas.microsoft.com/office/drawing/2014/main" id="{794F17AE-49DF-434C-BF43-0D21EF824DD3}"/>
+              </a:ext>
+            </a:extLst>
+          </p:cNvPr>
+          <p:cNvSpPr>
+            <a:spLocks xmlns:a="http://schemas.openxmlformats.org/drawingml/2006/main" noGrp="1"/>
+          </p:cNvSpPr>
+          <p:nvPr/>
+        </p:nvSpPr>
+        <p:spPr>
+          <a:xfrm xmlns:a="http://schemas.openxmlformats.org/drawingml/2006/main">
+            <a:off x="609600" y="3095625"/>
+            <a:ext cx="10668000" cy="495300"/>
+          </a:xfrm>
+          <a:prstGeom xmlns:a="http://schemas.openxmlformats.org/drawingml/2006/main" prst="rect">
+            <a:avLst/>
+          </a:prstGeom>
+          <a:noFill xmlns:a="http://schemas.openxmlformats.org/drawingml/2006/main"/>
+          <a:ln xmlns:a="http://schemas.openxmlformats.org/drawingml/2006/main" w="0">
+            <a:noFill/>
+          </a:ln>
+        </p:spPr>
+        <p:txBody>
+          <a:bodyPr xmlns:a="http://schemas.openxmlformats.org/drawingml/2006/main">
+            <a:noAutofit/>
+          </a:bodyPr>
+          <a:lstStyle xmlns:a="http://schemas.openxmlformats.org/drawingml/2006/main"/>
+          <a:p xmlns:a="http://schemas.openxmlformats.org/drawingml/2006/main">
+            <a:pPr>
+              <a:defRPr sz="2550" b="0">
+                <a:solidFill>
+                  <a:srgbClr val="173C43"/>
+                </a:solidFill>
+                <a:latin typeface="Heiti TC"/>
+                <a:ea typeface="Heiti TC"/>
+                <a:cs typeface="Heiti TC"/>
+              </a:defRPr>
+            </a:pPr>
+            <a:r>
+              <a:rPr sz="2550" b="0">
+                <a:solidFill>
+                  <a:srgbClr val="173C43"/>
+                </a:solidFill>
+                <a:latin typeface="Heiti TC"/>
+                <a:ea typeface="Heiti TC"/>
+                <a:cs typeface="Heiti TC"/>
+              </a:rPr>
+              <a:t>你畫的直線與網頁的直線有甚麼分別？</a:t>
+            </a:r>
+          </a:p>
+        </p:txBody>
+      </p:sp>
+      <p:sp>
+        <p:nvSpPr>
+          <p:cNvPr id="7" name="">
+            <a:extLst xmlns:a="http://schemas.openxmlformats.org/drawingml/2006/main">
+              <a:ext uri="{FF2B5EF4-FFF2-40B4-BE49-F238E27FC236}">
+                <a16:creationId xmlns:a16="http://schemas.microsoft.com/office/drawing/2014/main" id="{11A3B465-B482-40E7-AD07-BBBB95572337}"/>
+              </a:ext>
+            </a:extLst>
+          </p:cNvPr>
+          <p:cNvSpPr>
+            <a:spLocks xmlns:a="http://schemas.openxmlformats.org/drawingml/2006/main" noGrp="1"/>
+          </p:cNvSpPr>
+          <p:nvPr/>
+        </p:nvSpPr>
+        <p:spPr>
+          <a:xfrm xmlns:a="http://schemas.openxmlformats.org/drawingml/2006/main">
+            <a:off x="609600" y="3562350"/>
+            <a:ext cx="10668000" cy="457200"/>
+          </a:xfrm>
+          <a:prstGeom xmlns:a="http://schemas.openxmlformats.org/drawingml/2006/main" prst="rect">
+            <a:avLst/>
+          </a:prstGeom>
+          <a:noFill xmlns:a="http://schemas.openxmlformats.org/drawingml/2006/main"/>
+          <a:ln xmlns:a="http://schemas.openxmlformats.org/drawingml/2006/main" w="0">
+            <a:noFill/>
+          </a:ln>
+        </p:spPr>
+        <p:txBody>
+          <a:bodyPr xmlns:a="http://schemas.openxmlformats.org/drawingml/2006/main">
+            <a:noAutofit/>
+          </a:bodyPr>
+          <a:lstStyle xmlns:a="http://schemas.openxmlformats.org/drawingml/2006/main"/>
+          <a:p xmlns:a="http://schemas.openxmlformats.org/drawingml/2006/main">
+            <a:pPr>
+              <a:defRPr sz="1950" b="0">
+                <a:solidFill>
+                  <a:srgbClr val="526B70"/>
+                </a:solidFill>
+                <a:latin typeface="Arial"/>
+                <a:ea typeface="Arial"/>
+                <a:cs typeface="Arial"/>
+              </a:defRPr>
+            </a:pPr>
+            <a:r>
+              <a:rPr sz="1950" b="0">
+                <a:solidFill>
+                  <a:srgbClr val="526B70"/>
+                </a:solidFill>
+                <a:latin typeface="Arial"/>
+                <a:ea typeface="Arial"/>
+                <a:cs typeface="Arial"/>
+              </a:rPr>
+              <a:t>How does your own line compare with the line on the page?</a:t>
+            </a:r>
+          </a:p>
+        </p:txBody>
+      </p:sp>
+      <p:sp>
+        <p:nvSpPr>
+          <p:cNvPr id="8" name="">
+            <a:extLst xmlns:a="http://schemas.openxmlformats.org/drawingml/2006/main">
+              <a:ext uri="{FF2B5EF4-FFF2-40B4-BE49-F238E27FC236}">
+                <a16:creationId xmlns:a16="http://schemas.microsoft.com/office/drawing/2014/main" id="{1C875EEF-C92D-452A-8241-BF47A04D4063}"/>
+              </a:ext>
+            </a:extLst>
+          </p:cNvPr>
+          <p:cNvSpPr>
+            <a:spLocks xmlns:a="http://schemas.openxmlformats.org/drawingml/2006/main" noGrp="1"/>
+          </p:cNvSpPr>
+          <p:nvPr/>
+        </p:nvSpPr>
+        <p:spPr>
+          <a:xfrm xmlns:a="http://schemas.openxmlformats.org/drawingml/2006/main">
+            <a:off x="609600" y="4429125"/>
+            <a:ext cx="10668000" cy="495300"/>
+          </a:xfrm>
+          <a:prstGeom xmlns:a="http://schemas.openxmlformats.org/drawingml/2006/main" prst="rect">
+            <a:avLst/>
+          </a:prstGeom>
+          <a:noFill xmlns:a="http://schemas.openxmlformats.org/drawingml/2006/main"/>
+          <a:ln xmlns:a="http://schemas.openxmlformats.org/drawingml/2006/main" w="0">
+            <a:noFill/>
+          </a:ln>
+        </p:spPr>
+        <p:txBody>
+          <a:bodyPr xmlns:a="http://schemas.openxmlformats.org/drawingml/2006/main">
+            <a:noAutofit/>
+          </a:bodyPr>
+          <a:lstStyle xmlns:a="http://schemas.openxmlformats.org/drawingml/2006/main"/>
+          <a:p xmlns:a="http://schemas.openxmlformats.org/drawingml/2006/main">
+            <a:pPr>
+              <a:defRPr sz="2550" b="0">
+                <a:solidFill>
+                  <a:srgbClr val="173C43"/>
+                </a:solidFill>
+                <a:latin typeface="Heiti TC"/>
+                <a:ea typeface="Heiti TC"/>
+                <a:cs typeface="Heiti TC"/>
+              </a:defRPr>
+            </a:pPr>
+            <a:r>
+              <a:rPr sz="2550" b="0">
+                <a:solidFill>
+                  <a:srgbClr val="173C43"/>
+                </a:solidFill>
+                <a:latin typeface="Heiti TC"/>
+                <a:ea typeface="Heiti TC"/>
+                <a:cs typeface="Heiti TC"/>
+              </a:rPr>
+              <a:t>你會較信賴哪個預測？為甚麼？</a:t>
+            </a:r>
+          </a:p>
+        </p:txBody>
+      </p:sp>
+      <p:sp>
+        <p:nvSpPr>
+          <p:cNvPr id="9" name="">
+            <a:extLst xmlns:a="http://schemas.openxmlformats.org/drawingml/2006/main">
+              <a:ext uri="{FF2B5EF4-FFF2-40B4-BE49-F238E27FC236}">
+                <a16:creationId xmlns:a16="http://schemas.microsoft.com/office/drawing/2014/main" id="{88991232-600D-4BD0-B534-CB94A8934B35}"/>
+              </a:ext>
+            </a:extLst>
+          </p:cNvPr>
+          <p:cNvSpPr>
+            <a:spLocks xmlns:a="http://schemas.openxmlformats.org/drawingml/2006/main" noGrp="1"/>
+          </p:cNvSpPr>
+          <p:nvPr/>
+        </p:nvSpPr>
+        <p:spPr>
+          <a:xfrm xmlns:a="http://schemas.openxmlformats.org/drawingml/2006/main">
+            <a:off x="609600" y="4895850"/>
+            <a:ext cx="10668000" cy="457200"/>
+          </a:xfrm>
+          <a:prstGeom xmlns:a="http://schemas.openxmlformats.org/drawingml/2006/main" prst="rect">
+            <a:avLst/>
+          </a:prstGeom>
+          <a:noFill xmlns:a="http://schemas.openxmlformats.org/drawingml/2006/main"/>
+          <a:ln xmlns:a="http://schemas.openxmlformats.org/drawingml/2006/main" w="0">
+            <a:noFill/>
+          </a:ln>
+        </p:spPr>
+        <p:txBody>
+          <a:bodyPr xmlns:a="http://schemas.openxmlformats.org/drawingml/2006/main">
+            <a:noAutofit/>
+          </a:bodyPr>
+          <a:lstStyle xmlns:a="http://schemas.openxmlformats.org/drawingml/2006/main"/>
+          <a:p xmlns:a="http://schemas.openxmlformats.org/drawingml/2006/main">
+            <a:pPr>
+              <a:defRPr sz="1950" b="0">
+                <a:solidFill>
+                  <a:srgbClr val="526B70"/>
+                </a:solidFill>
+                <a:latin typeface="Arial"/>
+                <a:ea typeface="Arial"/>
+                <a:cs typeface="Arial"/>
+              </a:defRPr>
+            </a:pPr>
+            <a:r>
+              <a:rPr sz="1950" b="0">
+                <a:solidFill>
+                  <a:srgbClr val="526B70"/>
+                </a:solidFill>
+                <a:latin typeface="Arial"/>
+                <a:ea typeface="Arial"/>
+                <a:cs typeface="Arial"/>
+              </a:rPr>
+              <a:t>Which prediction would you trust more? Why?</a:t>
+            </a:r>
+          </a:p>
+        </p:txBody>
+      </p:sp>
+      <p:sp>
+        <p:nvSpPr>
+          <p:cNvPr id="10" name="">
+            <a:extLst xmlns:a="http://schemas.openxmlformats.org/drawingml/2006/main">
+              <a:ext uri="{FF2B5EF4-FFF2-40B4-BE49-F238E27FC236}">
+                <a16:creationId xmlns:a16="http://schemas.microsoft.com/office/drawing/2014/main" id="{9F3900B7-38AF-4088-A675-28C48A82A9A7}"/>
+              </a:ext>
+            </a:extLst>
+          </p:cNvPr>
+          <p:cNvSpPr>
+            <a:spLocks xmlns:a="http://schemas.openxmlformats.org/drawingml/2006/main" noGrp="1"/>
+          </p:cNvSpPr>
+          <p:nvPr/>
+        </p:nvSpPr>
+        <p:spPr>
+          <a:xfrm xmlns:a="http://schemas.openxmlformats.org/drawingml/2006/main">
+            <a:off x="609600" y="5838825"/>
+            <a:ext cx="10572750" cy="381000"/>
+          </a:xfrm>
+          <a:prstGeom xmlns:a="http://schemas.openxmlformats.org/drawingml/2006/main" prst="rect">
+            <a:avLst/>
+          </a:prstGeom>
+          <a:noFill xmlns:a="http://schemas.openxmlformats.org/drawingml/2006/main"/>
+          <a:ln xmlns:a="http://schemas.openxmlformats.org/drawingml/2006/main" w="0">
+            <a:noFill/>
+          </a:ln>
+        </p:spPr>
+        <p:txBody>
+          <a:bodyPr xmlns:a="http://schemas.openxmlformats.org/drawingml/2006/main">
+            <a:noAutofit/>
+          </a:bodyPr>
+          <a:lstStyle xmlns:a="http://schemas.openxmlformats.org/drawingml/2006/main"/>
+          <a:p xmlns:a="http://schemas.openxmlformats.org/drawingml/2006/main">
+            <a:pPr>
+              <a:defRPr sz="1725" b="0">
+                <a:solidFill>
+                  <a:srgbClr val="086C61"/>
+                </a:solidFill>
+                <a:latin typeface="Heiti TC"/>
+                <a:ea typeface="Heiti TC"/>
+                <a:cs typeface="Heiti TC"/>
+              </a:defRPr>
+            </a:pPr>
+            <a:r>
+              <a:rPr sz="1725" b="0">
+                <a:solidFill>
+                  <a:srgbClr val="086C61"/>
+                </a:solidFill>
+                <a:latin typeface="Heiti TC"/>
+                <a:ea typeface="Heiti TC"/>
+                <a:cs typeface="Heiti TC"/>
+              </a:rPr>
+              <a:t>工作紙最後一節 / Final section of the worksheet</a:t>
+            </a:r>
+          </a:p>
+        </p:txBody>
+      </p:sp>
+    </p:spTree>
+    <p:extLst>
+      <p:ext uri="{BB962C8B-B14F-4D97-AF65-F5344CB8AC3E}">
+        <p14:creationId xmlns:p14="http://schemas.microsoft.com/office/powerpoint/2010/main" val="134240142"/>
       </p:ext>
     </p:extLst>
   </p:cSld>
@@ -5470,7 +8521,7 @@
           <p:cNvPr id="12" name="">
             <a:extLst xmlns:a="http://schemas.openxmlformats.org/drawingml/2006/main">
               <a:ext uri="{FF2B5EF4-FFF2-40B4-BE49-F238E27FC236}">
-                <a16:creationId xmlns:a16="http://schemas.microsoft.com/office/drawing/2014/main" id="{D1524F16-BA38-46E3-BD74-0403C2648D01}"/>
+                <a16:creationId xmlns:a16="http://schemas.microsoft.com/office/drawing/2014/main" id="{CD92D57C-AA22-4832-A1DE-F56ECC6BE53E}"/>
               </a:ext>
             </a:extLst>
           </p:cNvPr>
@@ -5527,7 +8578,7 @@
           <p:cNvPr id="2" name="">
             <a:extLst xmlns:a="http://schemas.openxmlformats.org/drawingml/2006/main">
               <a:ext uri="{FF2B5EF4-FFF2-40B4-BE49-F238E27FC236}">
-                <a16:creationId xmlns:a16="http://schemas.microsoft.com/office/drawing/2014/main" id="{D44CE3A9-DE42-4107-B67C-BAA709FBD139}"/>
+                <a16:creationId xmlns:a16="http://schemas.microsoft.com/office/drawing/2014/main" id="{F0B5D8FC-7C8D-4DF8-AC70-72FE68576B19}"/>
               </a:ext>
             </a:extLst>
           </p:cNvPr>
@@ -5584,7 +8635,7 @@
           <p:cNvPr id="3" name="">
             <a:extLst xmlns:a="http://schemas.openxmlformats.org/drawingml/2006/main">
               <a:ext uri="{FF2B5EF4-FFF2-40B4-BE49-F238E27FC236}">
-                <a16:creationId xmlns:a16="http://schemas.microsoft.com/office/drawing/2014/main" id="{9CE0D380-CEC8-4A10-B3A6-EF7C0AEAC6FB}"/>
+                <a16:creationId xmlns:a16="http://schemas.microsoft.com/office/drawing/2014/main" id="{39D104FB-A54C-4741-852B-1DE133C9045D}"/>
               </a:ext>
             </a:extLst>
           </p:cNvPr>
@@ -5641,7 +8692,7 @@
           <p:cNvPr id="4" name="">
             <a:extLst xmlns:a="http://schemas.openxmlformats.org/drawingml/2006/main">
               <a:ext uri="{FF2B5EF4-FFF2-40B4-BE49-F238E27FC236}">
-                <a16:creationId xmlns:a16="http://schemas.microsoft.com/office/drawing/2014/main" id="{0E67F8C8-3FEE-4A9B-A0B2-2A80D6B29C93}"/>
+                <a16:creationId xmlns:a16="http://schemas.microsoft.com/office/drawing/2014/main" id="{6FE49618-9665-48A8-9C66-BDA91BC0B3D0}"/>
               </a:ext>
             </a:extLst>
           </p:cNvPr>
@@ -5698,7 +8749,7 @@
           <p:cNvPr id="5" name="">
             <a:extLst xmlns:a="http://schemas.openxmlformats.org/drawingml/2006/main">
               <a:ext uri="{FF2B5EF4-FFF2-40B4-BE49-F238E27FC236}">
-                <a16:creationId xmlns:a16="http://schemas.microsoft.com/office/drawing/2014/main" id="{BCF90E76-0CE9-450C-A68E-ABFAECFFB6A8}"/>
+                <a16:creationId xmlns:a16="http://schemas.microsoft.com/office/drawing/2014/main" id="{BFE845B0-98C4-499E-B4FA-5F8C68475909}"/>
               </a:ext>
             </a:extLst>
           </p:cNvPr>
@@ -5755,7 +8806,7 @@
           <p:cNvPr id="6" name="">
             <a:extLst xmlns:a="http://schemas.openxmlformats.org/drawingml/2006/main">
               <a:ext uri="{FF2B5EF4-FFF2-40B4-BE49-F238E27FC236}">
-                <a16:creationId xmlns:a16="http://schemas.microsoft.com/office/drawing/2014/main" id="{E0DBE46D-D35C-4AA4-B265-96AAA4D92730}"/>
+                <a16:creationId xmlns:a16="http://schemas.microsoft.com/office/drawing/2014/main" id="{732756EF-0D15-4C15-9331-262844418046}"/>
               </a:ext>
             </a:extLst>
           </p:cNvPr>
@@ -5812,7 +8863,7 @@
           <p:cNvPr id="7" name="">
             <a:extLst xmlns:a="http://schemas.openxmlformats.org/drawingml/2006/main">
               <a:ext uri="{FF2B5EF4-FFF2-40B4-BE49-F238E27FC236}">
-                <a16:creationId xmlns:a16="http://schemas.microsoft.com/office/drawing/2014/main" id="{ADCA5E8C-6F7B-4DC0-95DC-7194A380B171}"/>
+                <a16:creationId xmlns:a16="http://schemas.microsoft.com/office/drawing/2014/main" id="{DECA16E1-B56D-4F39-B4AC-921DBC63E504}"/>
               </a:ext>
             </a:extLst>
           </p:cNvPr>
@@ -5869,7 +8920,7 @@
           <p:cNvPr id="8" name="">
             <a:extLst xmlns:a="http://schemas.openxmlformats.org/drawingml/2006/main">
               <a:ext uri="{FF2B5EF4-FFF2-40B4-BE49-F238E27FC236}">
-                <a16:creationId xmlns:a16="http://schemas.microsoft.com/office/drawing/2014/main" id="{1F754ABE-5062-4486-9465-88BD46185AB6}"/>
+                <a16:creationId xmlns:a16="http://schemas.microsoft.com/office/drawing/2014/main" id="{69D6CEAB-A74E-4897-805E-14F97F2A0929}"/>
               </a:ext>
             </a:extLst>
           </p:cNvPr>
@@ -5926,7 +8977,7 @@
           <p:cNvPr id="9" name="">
             <a:extLst xmlns:a="http://schemas.openxmlformats.org/drawingml/2006/main">
               <a:ext uri="{FF2B5EF4-FFF2-40B4-BE49-F238E27FC236}">
-                <a16:creationId xmlns:a16="http://schemas.microsoft.com/office/drawing/2014/main" id="{65183C44-CC26-43EB-AFDA-974E7A5A484C}"/>
+                <a16:creationId xmlns:a16="http://schemas.microsoft.com/office/drawing/2014/main" id="{5AB19A7E-2954-40BF-9BE1-FB9E86FF9B13}"/>
               </a:ext>
             </a:extLst>
           </p:cNvPr>
@@ -5983,7 +9034,7 @@
           <p:cNvPr id="10" name="">
             <a:extLst xmlns:a="http://schemas.openxmlformats.org/drawingml/2006/main">
               <a:ext uri="{FF2B5EF4-FFF2-40B4-BE49-F238E27FC236}">
-                <a16:creationId xmlns:a16="http://schemas.microsoft.com/office/drawing/2014/main" id="{97DDCEE0-6601-43D8-8B0D-985D2166ABC5}"/>
+                <a16:creationId xmlns:a16="http://schemas.microsoft.com/office/drawing/2014/main" id="{4502405C-2C9D-4542-9432-E3DBE164A172}"/>
               </a:ext>
             </a:extLst>
           </p:cNvPr>
@@ -6047,14 +9098,14 @@
         </p:xfrm>
         <a:graphic xmlns:a="http://schemas.openxmlformats.org/drawingml/2006/main">
           <a:graphicData uri="http://schemas.openxmlformats.org/drawingml/2006/chart">
-            <c:chart xmlns:r="http://schemas.openxmlformats.org/officeDocument/2006/relationships" xmlns:c="http://schemas.openxmlformats.org/drawingml/2006/chart" r:id="Rd081612c49e146ad"/>
+            <c:chart xmlns:r="http://schemas.openxmlformats.org/officeDocument/2006/relationships" xmlns:c="http://schemas.openxmlformats.org/drawingml/2006/chart" r:id="R2440f0c797294dfb"/>
           </a:graphicData>
         </a:graphic>
       </p:graphicFrame>
     </p:spTree>
     <p:extLst>
       <p:ext uri="{BB962C8B-B14F-4D97-AF65-F5344CB8AC3E}">
-        <p14:creationId xmlns:p14="http://schemas.microsoft.com/office/powerpoint/2010/main" val="756316432"/>
+        <p14:creationId xmlns:p14="http://schemas.microsoft.com/office/powerpoint/2010/main" val="1351270572"/>
       </p:ext>
     </p:extLst>
   </p:cSld>
@@ -6085,7 +9136,7 @@
           <p:cNvPr id="12" name="">
             <a:extLst xmlns:a="http://schemas.openxmlformats.org/drawingml/2006/main">
               <a:ext uri="{FF2B5EF4-FFF2-40B4-BE49-F238E27FC236}">
-                <a16:creationId xmlns:a16="http://schemas.microsoft.com/office/drawing/2014/main" id="{1FBD8026-2590-4828-8CAA-E5DA4C88BE03}"/>
+                <a16:creationId xmlns:a16="http://schemas.microsoft.com/office/drawing/2014/main" id="{7B26ACF8-56CB-4892-A145-DD48CE3B3C96}"/>
               </a:ext>
             </a:extLst>
           </p:cNvPr>
@@ -6142,7 +9193,7 @@
           <p:cNvPr id="2" name="">
             <a:extLst xmlns:a="http://schemas.openxmlformats.org/drawingml/2006/main">
               <a:ext uri="{FF2B5EF4-FFF2-40B4-BE49-F238E27FC236}">
-                <a16:creationId xmlns:a16="http://schemas.microsoft.com/office/drawing/2014/main" id="{EC8AA16F-55D6-49F6-A9B7-ED1443655EA5}"/>
+                <a16:creationId xmlns:a16="http://schemas.microsoft.com/office/drawing/2014/main" id="{895377DE-4979-46B8-8F5C-62F2EFCFEFDE}"/>
               </a:ext>
             </a:extLst>
           </p:cNvPr>
@@ -6199,7 +9250,7 @@
           <p:cNvPr id="3" name="">
             <a:extLst xmlns:a="http://schemas.openxmlformats.org/drawingml/2006/main">
               <a:ext uri="{FF2B5EF4-FFF2-40B4-BE49-F238E27FC236}">
-                <a16:creationId xmlns:a16="http://schemas.microsoft.com/office/drawing/2014/main" id="{BD81314F-28EC-480C-B0BF-9DF681C13870}"/>
+                <a16:creationId xmlns:a16="http://schemas.microsoft.com/office/drawing/2014/main" id="{2A3A6051-45EF-4B41-9E41-6F6514044B3F}"/>
               </a:ext>
             </a:extLst>
           </p:cNvPr>
@@ -6256,7 +9307,7 @@
           <p:cNvPr id="4" name="">
             <a:extLst xmlns:a="http://schemas.openxmlformats.org/drawingml/2006/main">
               <a:ext uri="{FF2B5EF4-FFF2-40B4-BE49-F238E27FC236}">
-                <a16:creationId xmlns:a16="http://schemas.microsoft.com/office/drawing/2014/main" id="{45A90282-230E-448D-85D6-211AEFF61C1D}"/>
+                <a16:creationId xmlns:a16="http://schemas.microsoft.com/office/drawing/2014/main" id="{EED2C8C6-668C-4E8F-8D51-958C4623369B}"/>
               </a:ext>
             </a:extLst>
           </p:cNvPr>
@@ -6313,7 +9364,7 @@
           <p:cNvPr id="5" name="">
             <a:extLst xmlns:a="http://schemas.openxmlformats.org/drawingml/2006/main">
               <a:ext uri="{FF2B5EF4-FFF2-40B4-BE49-F238E27FC236}">
-                <a16:creationId xmlns:a16="http://schemas.microsoft.com/office/drawing/2014/main" id="{E2FA75E4-E97A-473C-A133-D5D69993A43A}"/>
+                <a16:creationId xmlns:a16="http://schemas.microsoft.com/office/drawing/2014/main" id="{071773D9-7D79-4EC1-B5FA-DA05F6AA31AE}"/>
               </a:ext>
             </a:extLst>
           </p:cNvPr>
@@ -6370,7 +9421,7 @@
           <p:cNvPr id="6" name="">
             <a:extLst xmlns:a="http://schemas.openxmlformats.org/drawingml/2006/main">
               <a:ext uri="{FF2B5EF4-FFF2-40B4-BE49-F238E27FC236}">
-                <a16:creationId xmlns:a16="http://schemas.microsoft.com/office/drawing/2014/main" id="{C0E548CB-7761-4BA4-A6E0-8E2C84CCEA48}"/>
+                <a16:creationId xmlns:a16="http://schemas.microsoft.com/office/drawing/2014/main" id="{33224D4E-BB46-4CA0-A6EB-5B1DC28AB48A}"/>
               </a:ext>
             </a:extLst>
           </p:cNvPr>
@@ -6427,7 +9478,7 @@
           <p:cNvPr id="7" name="">
             <a:extLst xmlns:a="http://schemas.openxmlformats.org/drawingml/2006/main">
               <a:ext uri="{FF2B5EF4-FFF2-40B4-BE49-F238E27FC236}">
-                <a16:creationId xmlns:a16="http://schemas.microsoft.com/office/drawing/2014/main" id="{BC2F1513-900F-4FD3-813D-7414882D6098}"/>
+                <a16:creationId xmlns:a16="http://schemas.microsoft.com/office/drawing/2014/main" id="{93D39629-E332-4A3B-BB15-94E124B1E2F8}"/>
               </a:ext>
             </a:extLst>
           </p:cNvPr>
@@ -6484,7 +9535,7 @@
           <p:cNvPr id="8" name="">
             <a:extLst xmlns:a="http://schemas.openxmlformats.org/drawingml/2006/main">
               <a:ext uri="{FF2B5EF4-FFF2-40B4-BE49-F238E27FC236}">
-                <a16:creationId xmlns:a16="http://schemas.microsoft.com/office/drawing/2014/main" id="{2B667EB9-CCA1-4F60-A705-A484C0F3BFD0}"/>
+                <a16:creationId xmlns:a16="http://schemas.microsoft.com/office/drawing/2014/main" id="{8A4CE5A5-8CB4-4741-BEE2-F48C98E47EA2}"/>
               </a:ext>
             </a:extLst>
           </p:cNvPr>
@@ -6541,7 +9592,7 @@
           <p:cNvPr id="9" name="">
             <a:extLst xmlns:a="http://schemas.openxmlformats.org/drawingml/2006/main">
               <a:ext uri="{FF2B5EF4-FFF2-40B4-BE49-F238E27FC236}">
-                <a16:creationId xmlns:a16="http://schemas.microsoft.com/office/drawing/2014/main" id="{6EFE1752-D90B-46FD-9401-D7155DBF55B5}"/>
+                <a16:creationId xmlns:a16="http://schemas.microsoft.com/office/drawing/2014/main" id="{DD70A8B5-157E-4435-8E4C-AB0D03E2E87E}"/>
               </a:ext>
             </a:extLst>
           </p:cNvPr>
@@ -6598,7 +9649,7 @@
           <p:cNvPr id="10" name="">
             <a:extLst xmlns:a="http://schemas.openxmlformats.org/drawingml/2006/main">
               <a:ext uri="{FF2B5EF4-FFF2-40B4-BE49-F238E27FC236}">
-                <a16:creationId xmlns:a16="http://schemas.microsoft.com/office/drawing/2014/main" id="{03517748-4B63-453C-A15A-A7B8C8729DBA}"/>
+                <a16:creationId xmlns:a16="http://schemas.microsoft.com/office/drawing/2014/main" id="{1B4EE5DE-BBE1-4721-8741-0178F5091D20}"/>
               </a:ext>
             </a:extLst>
           </p:cNvPr>
@@ -6662,14 +9713,14 @@
         </p:xfrm>
         <a:graphic xmlns:a="http://schemas.openxmlformats.org/drawingml/2006/main">
           <a:graphicData uri="http://schemas.openxmlformats.org/drawingml/2006/chart">
-            <c:chart xmlns:r="http://schemas.openxmlformats.org/officeDocument/2006/relationships" xmlns:c="http://schemas.openxmlformats.org/drawingml/2006/chart" r:id="Rdf89ecd57f694c0a"/>
+            <c:chart xmlns:r="http://schemas.openxmlformats.org/officeDocument/2006/relationships" xmlns:c="http://schemas.openxmlformats.org/drawingml/2006/chart" r:id="R0a3c220adddc4040"/>
           </a:graphicData>
         </a:graphic>
       </p:graphicFrame>
     </p:spTree>
     <p:extLst>
       <p:ext uri="{BB962C8B-B14F-4D97-AF65-F5344CB8AC3E}">
-        <p14:creationId xmlns:p14="http://schemas.microsoft.com/office/powerpoint/2010/main" val="1559652239"/>
+        <p14:creationId xmlns:p14="http://schemas.microsoft.com/office/powerpoint/2010/main" val="494049664"/>
       </p:ext>
     </p:extLst>
   </p:cSld>
@@ -6700,7 +9751,7 @@
           <p:cNvPr id="16" name="">
             <a:extLst xmlns:a="http://schemas.openxmlformats.org/drawingml/2006/main">
               <a:ext uri="{FF2B5EF4-FFF2-40B4-BE49-F238E27FC236}">
-                <a16:creationId xmlns:a16="http://schemas.microsoft.com/office/drawing/2014/main" id="{F465F83B-EFBD-4A92-A9DE-650B1EB43C60}"/>
+                <a16:creationId xmlns:a16="http://schemas.microsoft.com/office/drawing/2014/main" id="{C9083FED-E633-4743-878E-1ABA981CF43D}"/>
               </a:ext>
             </a:extLst>
           </p:cNvPr>
@@ -6757,7 +9808,7 @@
           <p:cNvPr id="2" name="">
             <a:extLst xmlns:a="http://schemas.openxmlformats.org/drawingml/2006/main">
               <a:ext uri="{FF2B5EF4-FFF2-40B4-BE49-F238E27FC236}">
-                <a16:creationId xmlns:a16="http://schemas.microsoft.com/office/drawing/2014/main" id="{59933248-A45A-42A0-A48E-7F316CF9AA2C}"/>
+                <a16:creationId xmlns:a16="http://schemas.microsoft.com/office/drawing/2014/main" id="{5389E267-BF7F-4063-B03E-7C39BBE51D33}"/>
               </a:ext>
             </a:extLst>
           </p:cNvPr>
@@ -6814,7 +9865,7 @@
           <p:cNvPr id="3" name="">
             <a:extLst xmlns:a="http://schemas.openxmlformats.org/drawingml/2006/main">
               <a:ext uri="{FF2B5EF4-FFF2-40B4-BE49-F238E27FC236}">
-                <a16:creationId xmlns:a16="http://schemas.microsoft.com/office/drawing/2014/main" id="{D8CEEC41-09CE-4FD7-BD7F-F504081C604A}"/>
+                <a16:creationId xmlns:a16="http://schemas.microsoft.com/office/drawing/2014/main" id="{03759171-F6E0-4601-BAF0-3F2895D149DA}"/>
               </a:ext>
             </a:extLst>
           </p:cNvPr>
@@ -6871,7 +9922,7 @@
           <p:cNvPr id="4" name="">
             <a:extLst xmlns:a="http://schemas.openxmlformats.org/drawingml/2006/main">
               <a:ext uri="{FF2B5EF4-FFF2-40B4-BE49-F238E27FC236}">
-                <a16:creationId xmlns:a16="http://schemas.microsoft.com/office/drawing/2014/main" id="{E8D9E126-B578-4BEC-9AE7-F0BF6423B5E6}"/>
+                <a16:creationId xmlns:a16="http://schemas.microsoft.com/office/drawing/2014/main" id="{A35A5502-D49F-45B9-9032-4BD985493AFE}"/>
               </a:ext>
             </a:extLst>
           </p:cNvPr>
@@ -6935,7 +9986,7 @@
         </p:xfrm>
         <a:graphic xmlns:a="http://schemas.openxmlformats.org/drawingml/2006/main">
           <a:graphicData uri="http://schemas.openxmlformats.org/drawingml/2006/chart">
-            <c:chart xmlns:r="http://schemas.openxmlformats.org/officeDocument/2006/relationships" xmlns:c="http://schemas.openxmlformats.org/drawingml/2006/chart" r:id="Rbce2f6d43e9a4704"/>
+            <c:chart xmlns:r="http://schemas.openxmlformats.org/officeDocument/2006/relationships" xmlns:c="http://schemas.openxmlformats.org/drawingml/2006/chart" r:id="R780ffc06a9d44de4"/>
           </a:graphicData>
         </a:graphic>
       </p:graphicFrame>
@@ -6944,7 +9995,7 @@
           <p:cNvPr id="6" name="">
             <a:extLst xmlns:a="http://schemas.openxmlformats.org/drawingml/2006/main">
               <a:ext uri="{FF2B5EF4-FFF2-40B4-BE49-F238E27FC236}">
-                <a16:creationId xmlns:a16="http://schemas.microsoft.com/office/drawing/2014/main" id="{1EE9FEC8-4275-4B1D-BCCB-B31445495DFD}"/>
+                <a16:creationId xmlns:a16="http://schemas.microsoft.com/office/drawing/2014/main" id="{3D120585-FE3C-43F1-AC6B-92C0F4D72C0D}"/>
               </a:ext>
             </a:extLst>
           </p:cNvPr>
@@ -7001,7 +10052,7 @@
           <p:cNvPr id="7" name="">
             <a:extLst xmlns:a="http://schemas.openxmlformats.org/drawingml/2006/main">
               <a:ext uri="{FF2B5EF4-FFF2-40B4-BE49-F238E27FC236}">
-                <a16:creationId xmlns:a16="http://schemas.microsoft.com/office/drawing/2014/main" id="{956C7538-5DEE-481E-A07B-7CF38096474C}"/>
+                <a16:creationId xmlns:a16="http://schemas.microsoft.com/office/drawing/2014/main" id="{69E764C0-246D-4613-8CC4-7C026483D64B}"/>
               </a:ext>
             </a:extLst>
           </p:cNvPr>
@@ -7058,7 +10109,7 @@
           <p:cNvPr id="8" name="">
             <a:extLst xmlns:a="http://schemas.openxmlformats.org/drawingml/2006/main">
               <a:ext uri="{FF2B5EF4-FFF2-40B4-BE49-F238E27FC236}">
-                <a16:creationId xmlns:a16="http://schemas.microsoft.com/office/drawing/2014/main" id="{70598DEF-051A-46DB-BB14-9D792D23B36F}"/>
+                <a16:creationId xmlns:a16="http://schemas.microsoft.com/office/drawing/2014/main" id="{7EA3EB4D-5660-4349-BDEF-6EEDD75FCFF4}"/>
               </a:ext>
             </a:extLst>
           </p:cNvPr>
@@ -7122,7 +10173,7 @@
         </p:xfrm>
         <a:graphic xmlns:a="http://schemas.openxmlformats.org/drawingml/2006/main">
           <a:graphicData uri="http://schemas.openxmlformats.org/drawingml/2006/chart">
-            <c:chart xmlns:r="http://schemas.openxmlformats.org/officeDocument/2006/relationships" xmlns:c="http://schemas.openxmlformats.org/drawingml/2006/chart" r:id="Rbb77ad60d249471d"/>
+            <c:chart xmlns:r="http://schemas.openxmlformats.org/officeDocument/2006/relationships" xmlns:c="http://schemas.openxmlformats.org/drawingml/2006/chart" r:id="Rd1110e2726fd4e68"/>
           </a:graphicData>
         </a:graphic>
       </p:graphicFrame>
@@ -7131,7 +10182,7 @@
           <p:cNvPr id="10" name="">
             <a:extLst xmlns:a="http://schemas.openxmlformats.org/drawingml/2006/main">
               <a:ext uri="{FF2B5EF4-FFF2-40B4-BE49-F238E27FC236}">
-                <a16:creationId xmlns:a16="http://schemas.microsoft.com/office/drawing/2014/main" id="{EBBF604D-0FD6-4B0F-B2E0-08EB13570835}"/>
+                <a16:creationId xmlns:a16="http://schemas.microsoft.com/office/drawing/2014/main" id="{F4B66B5D-A50A-4EB6-96E6-EFB25AA0A600}"/>
               </a:ext>
             </a:extLst>
           </p:cNvPr>
@@ -7188,7 +10239,7 @@
           <p:cNvPr id="11" name="">
             <a:extLst xmlns:a="http://schemas.openxmlformats.org/drawingml/2006/main">
               <a:ext uri="{FF2B5EF4-FFF2-40B4-BE49-F238E27FC236}">
-                <a16:creationId xmlns:a16="http://schemas.microsoft.com/office/drawing/2014/main" id="{0D89643F-837E-4DF0-9B40-7CC4B8A56866}"/>
+                <a16:creationId xmlns:a16="http://schemas.microsoft.com/office/drawing/2014/main" id="{BF9C9D8E-F4FF-48A3-91D1-68D89D29FBB1}"/>
               </a:ext>
             </a:extLst>
           </p:cNvPr>
@@ -7245,7 +10296,7 @@
           <p:cNvPr id="12" name="">
             <a:extLst xmlns:a="http://schemas.openxmlformats.org/drawingml/2006/main">
               <a:ext uri="{FF2B5EF4-FFF2-40B4-BE49-F238E27FC236}">
-                <a16:creationId xmlns:a16="http://schemas.microsoft.com/office/drawing/2014/main" id="{AF3D9E7A-CB7F-4FFC-BD68-6EC1F1A3A7AB}"/>
+                <a16:creationId xmlns:a16="http://schemas.microsoft.com/office/drawing/2014/main" id="{FB21D827-BB62-4EC0-9CF4-6BB45D57E40A}"/>
               </a:ext>
             </a:extLst>
           </p:cNvPr>
@@ -7309,7 +10360,7 @@
         </p:xfrm>
         <a:graphic xmlns:a="http://schemas.openxmlformats.org/drawingml/2006/main">
           <a:graphicData uri="http://schemas.openxmlformats.org/drawingml/2006/chart">
-            <c:chart xmlns:r="http://schemas.openxmlformats.org/officeDocument/2006/relationships" xmlns:c="http://schemas.openxmlformats.org/drawingml/2006/chart" r:id="R7d4bd9560a0d45af"/>
+            <c:chart xmlns:r="http://schemas.openxmlformats.org/officeDocument/2006/relationships" xmlns:c="http://schemas.openxmlformats.org/drawingml/2006/chart" r:id="R787b9b2aa6524252"/>
           </a:graphicData>
         </a:graphic>
       </p:graphicFrame>
@@ -7318,7 +10369,7 @@
           <p:cNvPr id="14" name="">
             <a:extLst xmlns:a="http://schemas.openxmlformats.org/drawingml/2006/main">
               <a:ext uri="{FF2B5EF4-FFF2-40B4-BE49-F238E27FC236}">
-                <a16:creationId xmlns:a16="http://schemas.microsoft.com/office/drawing/2014/main" id="{227DB007-0E19-42E1-8EE7-C87D59CB99AD}"/>
+                <a16:creationId xmlns:a16="http://schemas.microsoft.com/office/drawing/2014/main" id="{6DA92B64-A198-447A-BA18-62D6E2336ABB}"/>
               </a:ext>
             </a:extLst>
           </p:cNvPr>
@@ -7375,7 +10426,7 @@
           <p:cNvPr id="15" name="">
             <a:extLst xmlns:a="http://schemas.openxmlformats.org/drawingml/2006/main">
               <a:ext uri="{FF2B5EF4-FFF2-40B4-BE49-F238E27FC236}">
-                <a16:creationId xmlns:a16="http://schemas.microsoft.com/office/drawing/2014/main" id="{384F2C32-5D8B-4F69-8B78-98A50D26A40B}"/>
+                <a16:creationId xmlns:a16="http://schemas.microsoft.com/office/drawing/2014/main" id="{40994769-35ED-4DA0-A473-0F1B64429DD9}"/>
               </a:ext>
             </a:extLst>
           </p:cNvPr>
@@ -7430,7 +10481,7 @@
     </p:spTree>
     <p:extLst>
       <p:ext uri="{BB962C8B-B14F-4D97-AF65-F5344CB8AC3E}">
-        <p14:creationId xmlns:p14="http://schemas.microsoft.com/office/powerpoint/2010/main" val="729908660"/>
+        <p14:creationId xmlns:p14="http://schemas.microsoft.com/office/powerpoint/2010/main" val="1454736181"/>
       </p:ext>
     </p:extLst>
   </p:cSld>
@@ -7461,7 +10512,7 @@
           <p:cNvPr id="12" name="">
             <a:extLst xmlns:a="http://schemas.openxmlformats.org/drawingml/2006/main">
               <a:ext uri="{FF2B5EF4-FFF2-40B4-BE49-F238E27FC236}">
-                <a16:creationId xmlns:a16="http://schemas.microsoft.com/office/drawing/2014/main" id="{CB91964F-02C5-42B7-BE1A-6C967C8ABB41}"/>
+                <a16:creationId xmlns:a16="http://schemas.microsoft.com/office/drawing/2014/main" id="{75AC8AA6-042C-4132-8F7B-533FBE779E3D}"/>
               </a:ext>
             </a:extLst>
           </p:cNvPr>
@@ -7518,7 +10569,7 @@
           <p:cNvPr id="2" name="">
             <a:extLst xmlns:a="http://schemas.openxmlformats.org/drawingml/2006/main">
               <a:ext uri="{FF2B5EF4-FFF2-40B4-BE49-F238E27FC236}">
-                <a16:creationId xmlns:a16="http://schemas.microsoft.com/office/drawing/2014/main" id="{86885D8E-934A-4A1F-AFB6-4AC0880D8649}"/>
+                <a16:creationId xmlns:a16="http://schemas.microsoft.com/office/drawing/2014/main" id="{039B9C06-A284-420F-BC99-9E086127A0C8}"/>
               </a:ext>
             </a:extLst>
           </p:cNvPr>
@@ -7575,7 +10626,7 @@
           <p:cNvPr id="3" name="">
             <a:extLst xmlns:a="http://schemas.openxmlformats.org/drawingml/2006/main">
               <a:ext uri="{FF2B5EF4-FFF2-40B4-BE49-F238E27FC236}">
-                <a16:creationId xmlns:a16="http://schemas.microsoft.com/office/drawing/2014/main" id="{9BAAE1AA-B8F1-4E16-8D7F-2EC02F971551}"/>
+                <a16:creationId xmlns:a16="http://schemas.microsoft.com/office/drawing/2014/main" id="{277CBA03-9668-4437-A78C-3EC6C7834857}"/>
               </a:ext>
             </a:extLst>
           </p:cNvPr>
@@ -7639,7 +10690,7 @@
         </p:xfrm>
         <a:graphic xmlns:a="http://schemas.openxmlformats.org/drawingml/2006/main">
           <a:graphicData uri="http://schemas.openxmlformats.org/drawingml/2006/chart">
-            <c:chart xmlns:r="http://schemas.openxmlformats.org/officeDocument/2006/relationships" xmlns:c="http://schemas.openxmlformats.org/drawingml/2006/chart" r:id="Rd69588eb4c88401e"/>
+            <c:chart xmlns:r="http://schemas.openxmlformats.org/officeDocument/2006/relationships" xmlns:c="http://schemas.openxmlformats.org/drawingml/2006/chart" r:id="R44348e451a714ba1"/>
           </a:graphicData>
         </a:graphic>
       </p:graphicFrame>
@@ -7648,7 +10699,7 @@
           <p:cNvPr id="5" name="">
             <a:extLst xmlns:a="http://schemas.openxmlformats.org/drawingml/2006/main">
               <a:ext uri="{FF2B5EF4-FFF2-40B4-BE49-F238E27FC236}">
-                <a16:creationId xmlns:a16="http://schemas.microsoft.com/office/drawing/2014/main" id="{65664E81-3162-40DD-A3C3-47ABF521D70F}"/>
+                <a16:creationId xmlns:a16="http://schemas.microsoft.com/office/drawing/2014/main" id="{3052CB9F-7940-4AD6-961A-B61BB7BF904E}"/>
               </a:ext>
             </a:extLst>
           </p:cNvPr>
@@ -7705,7 +10756,7 @@
           <p:cNvPr id="6" name="">
             <a:extLst xmlns:a="http://schemas.openxmlformats.org/drawingml/2006/main">
               <a:ext uri="{FF2B5EF4-FFF2-40B4-BE49-F238E27FC236}">
-                <a16:creationId xmlns:a16="http://schemas.microsoft.com/office/drawing/2014/main" id="{C90463C8-3725-46CB-A8DA-49C485E8837F}"/>
+                <a16:creationId xmlns:a16="http://schemas.microsoft.com/office/drawing/2014/main" id="{24CEF92B-A725-4548-8AC1-744B72B023F6}"/>
               </a:ext>
             </a:extLst>
           </p:cNvPr>
@@ -7762,7 +10813,7 @@
           <p:cNvPr id="7" name="">
             <a:extLst xmlns:a="http://schemas.openxmlformats.org/drawingml/2006/main">
               <a:ext uri="{FF2B5EF4-FFF2-40B4-BE49-F238E27FC236}">
-                <a16:creationId xmlns:a16="http://schemas.microsoft.com/office/drawing/2014/main" id="{3FF0F457-850C-4828-8181-ED7360A645E4}"/>
+                <a16:creationId xmlns:a16="http://schemas.microsoft.com/office/drawing/2014/main" id="{EAB3A9C2-238D-4AC1-8E9D-81BAB2051BA9}"/>
               </a:ext>
             </a:extLst>
           </p:cNvPr>
@@ -7819,7 +10870,7 @@
           <p:cNvPr id="8" name="">
             <a:extLst xmlns:a="http://schemas.openxmlformats.org/drawingml/2006/main">
               <a:ext uri="{FF2B5EF4-FFF2-40B4-BE49-F238E27FC236}">
-                <a16:creationId xmlns:a16="http://schemas.microsoft.com/office/drawing/2014/main" id="{F0777A6C-D779-4C3C-BB50-15390E3C9FA1}"/>
+                <a16:creationId xmlns:a16="http://schemas.microsoft.com/office/drawing/2014/main" id="{23382E9F-8741-44CD-AF3D-7399F0467FEF}"/>
               </a:ext>
             </a:extLst>
           </p:cNvPr>
@@ -7876,7 +10927,7 @@
           <p:cNvPr id="9" name="">
             <a:extLst xmlns:a="http://schemas.openxmlformats.org/drawingml/2006/main">
               <a:ext uri="{FF2B5EF4-FFF2-40B4-BE49-F238E27FC236}">
-                <a16:creationId xmlns:a16="http://schemas.microsoft.com/office/drawing/2014/main" id="{642A0C54-7040-47D8-B62E-09F89A8025A6}"/>
+                <a16:creationId xmlns:a16="http://schemas.microsoft.com/office/drawing/2014/main" id="{FFA4C75E-F775-48E1-80A1-15D5623A6FB8}"/>
               </a:ext>
             </a:extLst>
           </p:cNvPr>
@@ -7933,7 +10984,7 @@
           <p:cNvPr id="10" name="">
             <a:extLst xmlns:a="http://schemas.openxmlformats.org/drawingml/2006/main">
               <a:ext uri="{FF2B5EF4-FFF2-40B4-BE49-F238E27FC236}">
-                <a16:creationId xmlns:a16="http://schemas.microsoft.com/office/drawing/2014/main" id="{875F9C19-9EDA-4D70-A973-63A84E4C7F16}"/>
+                <a16:creationId xmlns:a16="http://schemas.microsoft.com/office/drawing/2014/main" id="{6FC15E72-A0D4-411D-9F79-ED93A7890717}"/>
               </a:ext>
             </a:extLst>
           </p:cNvPr>
@@ -7990,7 +11041,7 @@
           <p:cNvPr id="11" name="">
             <a:extLst xmlns:a="http://schemas.openxmlformats.org/drawingml/2006/main">
               <a:ext uri="{FF2B5EF4-FFF2-40B4-BE49-F238E27FC236}">
-                <a16:creationId xmlns:a16="http://schemas.microsoft.com/office/drawing/2014/main" id="{A99C36B5-84DE-45AA-BA2A-BFEDB090A1E7}"/>
+                <a16:creationId xmlns:a16="http://schemas.microsoft.com/office/drawing/2014/main" id="{D451B8CD-AA62-48C6-9DF2-9857BDAE18B1}"/>
               </a:ext>
             </a:extLst>
           </p:cNvPr>
@@ -8045,7 +11096,7 @@
     </p:spTree>
     <p:extLst>
       <p:ext uri="{BB962C8B-B14F-4D97-AF65-F5344CB8AC3E}">
-        <p14:creationId xmlns:p14="http://schemas.microsoft.com/office/powerpoint/2010/main" val="622732196"/>
+        <p14:creationId xmlns:p14="http://schemas.microsoft.com/office/powerpoint/2010/main" val="652386521"/>
       </p:ext>
     </p:extLst>
   </p:cSld>
@@ -8076,7 +11127,7 @@
           <p:cNvPr id="12" name="">
             <a:extLst xmlns:a="http://schemas.openxmlformats.org/drawingml/2006/main">
               <a:ext uri="{FF2B5EF4-FFF2-40B4-BE49-F238E27FC236}">
-                <a16:creationId xmlns:a16="http://schemas.microsoft.com/office/drawing/2014/main" id="{F33AAA4C-A100-47B1-85D6-9B8473B69219}"/>
+                <a16:creationId xmlns:a16="http://schemas.microsoft.com/office/drawing/2014/main" id="{0B20E056-84FB-43E6-8AC6-49C684B778B8}"/>
               </a:ext>
             </a:extLst>
           </p:cNvPr>
@@ -8133,7 +11184,7 @@
           <p:cNvPr id="2" name="">
             <a:extLst xmlns:a="http://schemas.openxmlformats.org/drawingml/2006/main">
               <a:ext uri="{FF2B5EF4-FFF2-40B4-BE49-F238E27FC236}">
-                <a16:creationId xmlns:a16="http://schemas.microsoft.com/office/drawing/2014/main" id="{5E45DDA1-4D1F-4AEF-8A75-3332A7B10E41}"/>
+                <a16:creationId xmlns:a16="http://schemas.microsoft.com/office/drawing/2014/main" id="{420B35DE-3C9D-490D-A8C7-1EF0C8A742D7}"/>
               </a:ext>
             </a:extLst>
           </p:cNvPr>
@@ -8190,7 +11241,7 @@
           <p:cNvPr id="3" name="">
             <a:extLst xmlns:a="http://schemas.openxmlformats.org/drawingml/2006/main">
               <a:ext uri="{FF2B5EF4-FFF2-40B4-BE49-F238E27FC236}">
-                <a16:creationId xmlns:a16="http://schemas.microsoft.com/office/drawing/2014/main" id="{8E9A4095-87C2-46A0-8D24-92AB69478C5F}"/>
+                <a16:creationId xmlns:a16="http://schemas.microsoft.com/office/drawing/2014/main" id="{A7A656C2-EEA3-4BE4-99A9-D605777843B4}"/>
               </a:ext>
             </a:extLst>
           </p:cNvPr>
@@ -8254,7 +11305,7 @@
         </p:xfrm>
         <a:graphic xmlns:a="http://schemas.openxmlformats.org/drawingml/2006/main">
           <a:graphicData uri="http://schemas.openxmlformats.org/drawingml/2006/chart">
-            <c:chart xmlns:r="http://schemas.openxmlformats.org/officeDocument/2006/relationships" xmlns:c="http://schemas.openxmlformats.org/drawingml/2006/chart" r:id="R374444d5c20b4b55"/>
+            <c:chart xmlns:r="http://schemas.openxmlformats.org/officeDocument/2006/relationships" xmlns:c="http://schemas.openxmlformats.org/drawingml/2006/chart" r:id="Ra3c5d93630d740e1"/>
           </a:graphicData>
         </a:graphic>
       </p:graphicFrame>
@@ -8263,7 +11314,7 @@
           <p:cNvPr id="5" name="">
             <a:extLst xmlns:a="http://schemas.openxmlformats.org/drawingml/2006/main">
               <a:ext uri="{FF2B5EF4-FFF2-40B4-BE49-F238E27FC236}">
-                <a16:creationId xmlns:a16="http://schemas.microsoft.com/office/drawing/2014/main" id="{8A2FCB5D-F9D5-46DC-A09D-AD4F2E8630A0}"/>
+                <a16:creationId xmlns:a16="http://schemas.microsoft.com/office/drawing/2014/main" id="{8D2EA3BC-A967-4EAF-A630-61C4CE86DAEA}"/>
               </a:ext>
             </a:extLst>
           </p:cNvPr>
@@ -8320,7 +11371,7 @@
           <p:cNvPr id="6" name="">
             <a:extLst xmlns:a="http://schemas.openxmlformats.org/drawingml/2006/main">
               <a:ext uri="{FF2B5EF4-FFF2-40B4-BE49-F238E27FC236}">
-                <a16:creationId xmlns:a16="http://schemas.microsoft.com/office/drawing/2014/main" id="{49B12DA0-E639-48E3-A645-9AA68A765724}"/>
+                <a16:creationId xmlns:a16="http://schemas.microsoft.com/office/drawing/2014/main" id="{5954ECDE-DF7B-40D1-84E0-A4668932E134}"/>
               </a:ext>
             </a:extLst>
           </p:cNvPr>
@@ -8377,7 +11428,7 @@
           <p:cNvPr id="7" name="">
             <a:extLst xmlns:a="http://schemas.openxmlformats.org/drawingml/2006/main">
               <a:ext uri="{FF2B5EF4-FFF2-40B4-BE49-F238E27FC236}">
-                <a16:creationId xmlns:a16="http://schemas.microsoft.com/office/drawing/2014/main" id="{17270E97-A127-4D6A-A11A-9CDB4E0F8A2C}"/>
+                <a16:creationId xmlns:a16="http://schemas.microsoft.com/office/drawing/2014/main" id="{D31DE9A4-1E50-4E65-9CC3-772B364465A0}"/>
               </a:ext>
             </a:extLst>
           </p:cNvPr>
@@ -8434,7 +11485,7 @@
           <p:cNvPr id="8" name="">
             <a:extLst xmlns:a="http://schemas.openxmlformats.org/drawingml/2006/main">
               <a:ext uri="{FF2B5EF4-FFF2-40B4-BE49-F238E27FC236}">
-                <a16:creationId xmlns:a16="http://schemas.microsoft.com/office/drawing/2014/main" id="{CB02927B-7217-4474-BE86-EF6D4B8FE737}"/>
+                <a16:creationId xmlns:a16="http://schemas.microsoft.com/office/drawing/2014/main" id="{A1BF1E32-91FD-473F-A1AD-1A12FF46FD62}"/>
               </a:ext>
             </a:extLst>
           </p:cNvPr>
@@ -8491,7 +11542,7 @@
           <p:cNvPr id="9" name="">
             <a:extLst xmlns:a="http://schemas.openxmlformats.org/drawingml/2006/main">
               <a:ext uri="{FF2B5EF4-FFF2-40B4-BE49-F238E27FC236}">
-                <a16:creationId xmlns:a16="http://schemas.microsoft.com/office/drawing/2014/main" id="{763A8ACE-651B-4614-9F1A-D420346B2993}"/>
+                <a16:creationId xmlns:a16="http://schemas.microsoft.com/office/drawing/2014/main" id="{71D96549-6892-4718-A221-AD55681468E7}"/>
               </a:ext>
             </a:extLst>
           </p:cNvPr>
@@ -8548,7 +11599,7 @@
           <p:cNvPr id="10" name="">
             <a:extLst xmlns:a="http://schemas.openxmlformats.org/drawingml/2006/main">
               <a:ext uri="{FF2B5EF4-FFF2-40B4-BE49-F238E27FC236}">
-                <a16:creationId xmlns:a16="http://schemas.microsoft.com/office/drawing/2014/main" id="{66585A27-06B2-452E-B43B-540BBCF6BDA8}"/>
+                <a16:creationId xmlns:a16="http://schemas.microsoft.com/office/drawing/2014/main" id="{D338B2D3-7D4B-4B16-99B4-01B182007D2A}"/>
               </a:ext>
             </a:extLst>
           </p:cNvPr>
@@ -8605,7 +11656,7 @@
           <p:cNvPr id="11" name="">
             <a:extLst xmlns:a="http://schemas.openxmlformats.org/drawingml/2006/main">
               <a:ext uri="{FF2B5EF4-FFF2-40B4-BE49-F238E27FC236}">
-                <a16:creationId xmlns:a16="http://schemas.microsoft.com/office/drawing/2014/main" id="{7243442C-F84B-411C-9AD4-D67E9180CBD8}"/>
+                <a16:creationId xmlns:a16="http://schemas.microsoft.com/office/drawing/2014/main" id="{9DCD4591-B9F9-4E60-8245-84C1ECF895E3}"/>
               </a:ext>
             </a:extLst>
           </p:cNvPr>
@@ -8660,7 +11711,7 @@
     </p:spTree>
     <p:extLst>
       <p:ext uri="{BB962C8B-B14F-4D97-AF65-F5344CB8AC3E}">
-        <p14:creationId xmlns:p14="http://schemas.microsoft.com/office/powerpoint/2010/main" val="1046792545"/>
+        <p14:creationId xmlns:p14="http://schemas.microsoft.com/office/powerpoint/2010/main" val="2076311318"/>
       </p:ext>
     </p:extLst>
   </p:cSld>
@@ -8688,10 +11739,10 @@
       </p:grpSpPr>
       <p:sp>
         <p:nvSpPr>
-          <p:cNvPr id="12" name="">
-            <a:extLst xmlns:a="http://schemas.openxmlformats.org/drawingml/2006/main">
-              <a:ext uri="{FF2B5EF4-FFF2-40B4-BE49-F238E27FC236}">
-                <a16:creationId xmlns:a16="http://schemas.microsoft.com/office/drawing/2014/main" id="{E4853508-A120-43D2-AF14-48474E08D374}"/>
+          <p:cNvPr id="13" name="">
+            <a:extLst xmlns:a="http://schemas.openxmlformats.org/drawingml/2006/main">
+              <a:ext uri="{FF2B5EF4-FFF2-40B4-BE49-F238E27FC236}">
+                <a16:creationId xmlns:a16="http://schemas.microsoft.com/office/drawing/2014/main" id="{5B88A07F-EE07-485F-AAEB-18EBA0185D39}"/>
               </a:ext>
             </a:extLst>
           </p:cNvPr>
@@ -8738,7 +11789,7 @@
                 <a:ea typeface="Heiti TC"/>
                 <a:cs typeface="Heiti TC"/>
               </a:rPr>
-              <a:t>加入新點，觀察直線</a:t>
+              <a:t>線性回歸是一種簡單的機器學習</a:t>
             </a:r>
           </a:p>
         </p:txBody>
@@ -8748,7 +11799,7 @@
           <p:cNvPr id="2" name="">
             <a:extLst xmlns:a="http://schemas.openxmlformats.org/drawingml/2006/main">
               <a:ext uri="{FF2B5EF4-FFF2-40B4-BE49-F238E27FC236}">
-                <a16:creationId xmlns:a16="http://schemas.microsoft.com/office/drawing/2014/main" id="{E26C3A5C-1EBA-41FC-9314-1C4A4E3E3F2C}"/>
+                <a16:creationId xmlns:a16="http://schemas.microsoft.com/office/drawing/2014/main" id="{5012F7F7-A9F2-4FDB-8891-3B628A2CEED3}"/>
               </a:ext>
             </a:extLst>
           </p:cNvPr>
@@ -8795,7 +11846,7 @@
                 <a:ea typeface="Arial"/>
                 <a:cs typeface="Arial"/>
               </a:rPr>
-              <a:t>Add points and observe the line</a:t>
+              <a:t>Linear regression is a simple form of machine learning</a:t>
             </a:r>
           </a:p>
         </p:txBody>
@@ -8805,7 +11856,7 @@
           <p:cNvPr id="3" name="">
             <a:extLst xmlns:a="http://schemas.openxmlformats.org/drawingml/2006/main">
               <a:ext uri="{FF2B5EF4-FFF2-40B4-BE49-F238E27FC236}">
-                <a16:creationId xmlns:a16="http://schemas.microsoft.com/office/drawing/2014/main" id="{F7DAE845-2A9C-4824-80AE-8F7A1720FA7D}"/>
+                <a16:creationId xmlns:a16="http://schemas.microsoft.com/office/drawing/2014/main" id="{57D1489F-3BE8-43D3-B477-C18B142A8C1E}"/>
               </a:ext>
             </a:extLst>
           </p:cNvPr>
@@ -8862,36 +11913,36 @@
           <p:cNvPr id="4" name="">
             <a:extLst xmlns:a="http://schemas.openxmlformats.org/drawingml/2006/main">
               <a:ext uri="{FF2B5EF4-FFF2-40B4-BE49-F238E27FC236}">
-                <a16:creationId xmlns:a16="http://schemas.microsoft.com/office/drawing/2014/main" id="{ABEFDF6A-E65C-4A5A-9EE9-A88E6FA5EB09}"/>
-              </a:ext>
-            </a:extLst>
-          </p:cNvPr>
-          <p:cNvSpPr>
-            <a:spLocks xmlns:a="http://schemas.openxmlformats.org/drawingml/2006/main" noGrp="1"/>
-          </p:cNvSpPr>
-          <p:nvPr/>
-        </p:nvSpPr>
-        <p:spPr>
-          <a:xfrm xmlns:a="http://schemas.openxmlformats.org/drawingml/2006/main">
-            <a:off x="609600" y="1714500"/>
-            <a:ext cx="10572750" cy="495300"/>
-          </a:xfrm>
-          <a:prstGeom xmlns:a="http://schemas.openxmlformats.org/drawingml/2006/main" prst="rect">
-            <a:avLst/>
-          </a:prstGeom>
-          <a:noFill xmlns:a="http://schemas.openxmlformats.org/drawingml/2006/main"/>
-          <a:ln xmlns:a="http://schemas.openxmlformats.org/drawingml/2006/main" w="0">
-            <a:noFill/>
-          </a:ln>
-        </p:spPr>
-        <p:txBody>
-          <a:bodyPr xmlns:a="http://schemas.openxmlformats.org/drawingml/2006/main">
-            <a:noAutofit/>
-          </a:bodyPr>
-          <a:lstStyle xmlns:a="http://schemas.openxmlformats.org/drawingml/2006/main"/>
-          <a:p xmlns:a="http://schemas.openxmlformats.org/drawingml/2006/main">
-            <a:pPr>
-              <a:defRPr sz="2625" b="0">
+                <a16:creationId xmlns:a16="http://schemas.microsoft.com/office/drawing/2014/main" id="{3EDF681E-178C-409E-920B-A863F43C2052}"/>
+              </a:ext>
+            </a:extLst>
+          </p:cNvPr>
+          <p:cNvSpPr>
+            <a:spLocks xmlns:a="http://schemas.openxmlformats.org/drawingml/2006/main" noGrp="1"/>
+          </p:cNvSpPr>
+          <p:nvPr/>
+        </p:nvSpPr>
+        <p:spPr>
+          <a:xfrm xmlns:a="http://schemas.openxmlformats.org/drawingml/2006/main">
+            <a:off x="609600" y="1638300"/>
+            <a:ext cx="5048250" cy="495300"/>
+          </a:xfrm>
+          <a:prstGeom xmlns:a="http://schemas.openxmlformats.org/drawingml/2006/main" prst="rect">
+            <a:avLst/>
+          </a:prstGeom>
+          <a:noFill xmlns:a="http://schemas.openxmlformats.org/drawingml/2006/main"/>
+          <a:ln xmlns:a="http://schemas.openxmlformats.org/drawingml/2006/main" w="0">
+            <a:noFill/>
+          </a:ln>
+        </p:spPr>
+        <p:txBody>
+          <a:bodyPr xmlns:a="http://schemas.openxmlformats.org/drawingml/2006/main">
+            <a:noAutofit/>
+          </a:bodyPr>
+          <a:lstStyle xmlns:a="http://schemas.openxmlformats.org/drawingml/2006/main"/>
+          <a:p xmlns:a="http://schemas.openxmlformats.org/drawingml/2006/main">
+            <a:pPr>
+              <a:defRPr sz="2175" b="0">
                 <a:solidFill>
                   <a:srgbClr val="173C43"/>
                 </a:solidFill>
@@ -8901,7 +11952,7 @@
               </a:defRPr>
             </a:pPr>
             <a:r>
-              <a:rPr sz="2625" b="0">
+              <a:rPr sz="2175" b="0">
                 <a:solidFill>
                   <a:srgbClr val="173C43"/>
                 </a:solidFill>
@@ -8909,7 +11960,7 @@
                 <a:ea typeface="Heiti TC"/>
                 <a:cs typeface="Heiti TC"/>
               </a:rPr>
-              <a:t>在圖上點一下，加入一個數據點</a:t>
+              <a:t>調整前的猜測（示意）</a:t>
             </a:r>
           </a:p>
         </p:txBody>
@@ -8919,54 +11970,54 @@
           <p:cNvPr id="5" name="">
             <a:extLst xmlns:a="http://schemas.openxmlformats.org/drawingml/2006/main">
               <a:ext uri="{FF2B5EF4-FFF2-40B4-BE49-F238E27FC236}">
-                <a16:creationId xmlns:a16="http://schemas.microsoft.com/office/drawing/2014/main" id="{28EF7F48-78F2-48C5-970D-043087E2B5BA}"/>
-              </a:ext>
-            </a:extLst>
-          </p:cNvPr>
-          <p:cNvSpPr>
-            <a:spLocks xmlns:a="http://schemas.openxmlformats.org/drawingml/2006/main" noGrp="1"/>
-          </p:cNvSpPr>
-          <p:nvPr/>
-        </p:nvSpPr>
-        <p:spPr>
-          <a:xfrm xmlns:a="http://schemas.openxmlformats.org/drawingml/2006/main">
-            <a:off x="609600" y="2181225"/>
-            <a:ext cx="10572750" cy="457200"/>
-          </a:xfrm>
-          <a:prstGeom xmlns:a="http://schemas.openxmlformats.org/drawingml/2006/main" prst="rect">
-            <a:avLst/>
-          </a:prstGeom>
-          <a:noFill xmlns:a="http://schemas.openxmlformats.org/drawingml/2006/main"/>
-          <a:ln xmlns:a="http://schemas.openxmlformats.org/drawingml/2006/main" w="0">
-            <a:noFill/>
-          </a:ln>
-        </p:spPr>
-        <p:txBody>
-          <a:bodyPr xmlns:a="http://schemas.openxmlformats.org/drawingml/2006/main">
-            <a:noAutofit/>
-          </a:bodyPr>
-          <a:lstStyle xmlns:a="http://schemas.openxmlformats.org/drawingml/2006/main"/>
-          <a:p xmlns:a="http://schemas.openxmlformats.org/drawingml/2006/main">
-            <a:pPr>
-              <a:defRPr sz="2025" b="0">
-                <a:solidFill>
-                  <a:srgbClr val="526B70"/>
-                </a:solidFill>
-                <a:latin typeface="Arial"/>
-                <a:ea typeface="Arial"/>
-                <a:cs typeface="Arial"/>
-              </a:defRPr>
-            </a:pPr>
-            <a:r>
-              <a:rPr sz="2025" b="0">
-                <a:solidFill>
-                  <a:srgbClr val="526B70"/>
-                </a:solidFill>
-                <a:latin typeface="Arial"/>
-                <a:ea typeface="Arial"/>
-                <a:cs typeface="Arial"/>
-              </a:rPr>
-              <a:t>Click or tap the graph to add a data point</a:t>
+                <a16:creationId xmlns:a16="http://schemas.microsoft.com/office/drawing/2014/main" id="{B169CED5-140F-4DA7-9EAF-3E4DD94A0C18}"/>
+              </a:ext>
+            </a:extLst>
+          </p:cNvPr>
+          <p:cNvSpPr>
+            <a:spLocks xmlns:a="http://schemas.openxmlformats.org/drawingml/2006/main" noGrp="1"/>
+          </p:cNvSpPr>
+          <p:nvPr/>
+        </p:nvSpPr>
+        <p:spPr>
+          <a:xfrm xmlns:a="http://schemas.openxmlformats.org/drawingml/2006/main">
+            <a:off x="609600" y="2105025"/>
+            <a:ext cx="5048250" cy="457200"/>
+          </a:xfrm>
+          <a:prstGeom xmlns:a="http://schemas.openxmlformats.org/drawingml/2006/main" prst="rect">
+            <a:avLst/>
+          </a:prstGeom>
+          <a:noFill xmlns:a="http://schemas.openxmlformats.org/drawingml/2006/main"/>
+          <a:ln xmlns:a="http://schemas.openxmlformats.org/drawingml/2006/main" w="0">
+            <a:noFill/>
+          </a:ln>
+        </p:spPr>
+        <p:txBody>
+          <a:bodyPr xmlns:a="http://schemas.openxmlformats.org/drawingml/2006/main">
+            <a:noAutofit/>
+          </a:bodyPr>
+          <a:lstStyle xmlns:a="http://schemas.openxmlformats.org/drawingml/2006/main"/>
+          <a:p xmlns:a="http://schemas.openxmlformats.org/drawingml/2006/main">
+            <a:pPr>
+              <a:defRPr sz="1800" b="0">
+                <a:solidFill>
+                  <a:srgbClr val="526B70"/>
+                </a:solidFill>
+                <a:latin typeface="Arial"/>
+                <a:ea typeface="Arial"/>
+                <a:cs typeface="Arial"/>
+              </a:defRPr>
+            </a:pPr>
+            <a:r>
+              <a:rPr sz="1800" b="0">
+                <a:solidFill>
+                  <a:srgbClr val="526B70"/>
+                </a:solidFill>
+                <a:latin typeface="Arial"/>
+                <a:ea typeface="Arial"/>
+                <a:cs typeface="Arial"/>
+              </a:rPr>
+              <a:t>An initial guess (illustration)</a:t>
             </a:r>
           </a:p>
         </p:txBody>
@@ -8976,36 +12027,36 @@
           <p:cNvPr id="6" name="">
             <a:extLst xmlns:a="http://schemas.openxmlformats.org/drawingml/2006/main">
               <a:ext uri="{FF2B5EF4-FFF2-40B4-BE49-F238E27FC236}">
-                <a16:creationId xmlns:a16="http://schemas.microsoft.com/office/drawing/2014/main" id="{E5D47DF3-17CE-4E2C-8BA8-46E82836A202}"/>
-              </a:ext>
-            </a:extLst>
-          </p:cNvPr>
-          <p:cNvSpPr>
-            <a:spLocks xmlns:a="http://schemas.openxmlformats.org/drawingml/2006/main" noGrp="1"/>
-          </p:cNvSpPr>
-          <p:nvPr/>
-        </p:nvSpPr>
-        <p:spPr>
-          <a:xfrm xmlns:a="http://schemas.openxmlformats.org/drawingml/2006/main">
-            <a:off x="609600" y="2952750"/>
-            <a:ext cx="10572750" cy="495300"/>
-          </a:xfrm>
-          <a:prstGeom xmlns:a="http://schemas.openxmlformats.org/drawingml/2006/main" prst="rect">
-            <a:avLst/>
-          </a:prstGeom>
-          <a:noFill xmlns:a="http://schemas.openxmlformats.org/drawingml/2006/main"/>
-          <a:ln xmlns:a="http://schemas.openxmlformats.org/drawingml/2006/main" w="0">
-            <a:noFill/>
-          </a:ln>
-        </p:spPr>
-        <p:txBody>
-          <a:bodyPr xmlns:a="http://schemas.openxmlformats.org/drawingml/2006/main">
-            <a:noAutofit/>
-          </a:bodyPr>
-          <a:lstStyle xmlns:a="http://schemas.openxmlformats.org/drawingml/2006/main"/>
-          <a:p xmlns:a="http://schemas.openxmlformats.org/drawingml/2006/main">
-            <a:pPr>
-              <a:defRPr sz="2625" b="0">
+                <a16:creationId xmlns:a16="http://schemas.microsoft.com/office/drawing/2014/main" id="{7F06B2B1-CF61-4536-B68F-8CF77AC212FD}"/>
+              </a:ext>
+            </a:extLst>
+          </p:cNvPr>
+          <p:cNvSpPr>
+            <a:spLocks xmlns:a="http://schemas.openxmlformats.org/drawingml/2006/main" noGrp="1"/>
+          </p:cNvSpPr>
+          <p:nvPr/>
+        </p:nvSpPr>
+        <p:spPr>
+          <a:xfrm xmlns:a="http://schemas.openxmlformats.org/drawingml/2006/main">
+            <a:off x="6429375" y="1638300"/>
+            <a:ext cx="5048250" cy="495300"/>
+          </a:xfrm>
+          <a:prstGeom xmlns:a="http://schemas.openxmlformats.org/drawingml/2006/main" prst="rect">
+            <a:avLst/>
+          </a:prstGeom>
+          <a:noFill xmlns:a="http://schemas.openxmlformats.org/drawingml/2006/main"/>
+          <a:ln xmlns:a="http://schemas.openxmlformats.org/drawingml/2006/main" w="0">
+            <a:noFill/>
+          </a:ln>
+        </p:spPr>
+        <p:txBody>
+          <a:bodyPr xmlns:a="http://schemas.openxmlformats.org/drawingml/2006/main">
+            <a:noAutofit/>
+          </a:bodyPr>
+          <a:lstStyle xmlns:a="http://schemas.openxmlformats.org/drawingml/2006/main"/>
+          <a:p xmlns:a="http://schemas.openxmlformats.org/drawingml/2006/main">
+            <a:pPr>
+              <a:defRPr sz="2175" b="0">
                 <a:solidFill>
                   <a:srgbClr val="173C43"/>
                 </a:solidFill>
@@ -9015,7 +12066,7 @@
               </a:defRPr>
             </a:pPr>
             <a:r>
-              <a:rPr sz="2625" b="0">
+              <a:rPr sz="2175" b="0">
                 <a:solidFill>
                   <a:srgbClr val="173C43"/>
                 </a:solidFill>
@@ -9023,7 +12074,7 @@
                 <a:ea typeface="Heiti TC"/>
                 <a:cs typeface="Heiti TC"/>
               </a:rPr>
-              <a:t>比較加入點前後的 m 和 c</a:t>
+              <a:t>根據例子，找出較合適的直線</a:t>
             </a:r>
           </a:p>
         </p:txBody>
@@ -9033,93 +12084,125 @@
           <p:cNvPr id="7" name="">
             <a:extLst xmlns:a="http://schemas.openxmlformats.org/drawingml/2006/main">
               <a:ext uri="{FF2B5EF4-FFF2-40B4-BE49-F238E27FC236}">
-                <a16:creationId xmlns:a16="http://schemas.microsoft.com/office/drawing/2014/main" id="{302424EB-8C6F-4F84-A111-7789F36B3626}"/>
-              </a:ext>
-            </a:extLst>
-          </p:cNvPr>
-          <p:cNvSpPr>
-            <a:spLocks xmlns:a="http://schemas.openxmlformats.org/drawingml/2006/main" noGrp="1"/>
-          </p:cNvSpPr>
-          <p:nvPr/>
-        </p:nvSpPr>
-        <p:spPr>
-          <a:xfrm xmlns:a="http://schemas.openxmlformats.org/drawingml/2006/main">
-            <a:off x="609600" y="3419475"/>
-            <a:ext cx="10572750" cy="457200"/>
-          </a:xfrm>
-          <a:prstGeom xmlns:a="http://schemas.openxmlformats.org/drawingml/2006/main" prst="rect">
-            <a:avLst/>
-          </a:prstGeom>
-          <a:noFill xmlns:a="http://schemas.openxmlformats.org/drawingml/2006/main"/>
-          <a:ln xmlns:a="http://schemas.openxmlformats.org/drawingml/2006/main" w="0">
-            <a:noFill/>
-          </a:ln>
-        </p:spPr>
-        <p:txBody>
-          <a:bodyPr xmlns:a="http://schemas.openxmlformats.org/drawingml/2006/main">
-            <a:noAutofit/>
-          </a:bodyPr>
-          <a:lstStyle xmlns:a="http://schemas.openxmlformats.org/drawingml/2006/main"/>
-          <a:p xmlns:a="http://schemas.openxmlformats.org/drawingml/2006/main">
-            <a:pPr>
-              <a:defRPr sz="2025" b="0">
-                <a:solidFill>
-                  <a:srgbClr val="526B70"/>
-                </a:solidFill>
-                <a:latin typeface="Arial"/>
-                <a:ea typeface="Arial"/>
-                <a:cs typeface="Arial"/>
-              </a:defRPr>
-            </a:pPr>
-            <a:r>
-              <a:rPr sz="2025" b="0">
-                <a:solidFill>
-                  <a:srgbClr val="526B70"/>
-                </a:solidFill>
-                <a:latin typeface="Arial"/>
-                <a:ea typeface="Arial"/>
-                <a:cs typeface="Arial"/>
-              </a:rPr>
-              <a:t>Compare m and c before and after adding the point</a:t>
-            </a:r>
-          </a:p>
-        </p:txBody>
-      </p:sp>
-      <p:sp>
-        <p:nvSpPr>
-          <p:cNvPr id="8" name="">
-            <a:extLst xmlns:a="http://schemas.openxmlformats.org/drawingml/2006/main">
-              <a:ext uri="{FF2B5EF4-FFF2-40B4-BE49-F238E27FC236}">
-                <a16:creationId xmlns:a16="http://schemas.microsoft.com/office/drawing/2014/main" id="{A1AAF799-48C5-46CB-A509-D61D680FC6B9}"/>
-              </a:ext>
-            </a:extLst>
-          </p:cNvPr>
-          <p:cNvSpPr>
-            <a:spLocks xmlns:a="http://schemas.openxmlformats.org/drawingml/2006/main" noGrp="1"/>
-          </p:cNvSpPr>
-          <p:nvPr/>
-        </p:nvSpPr>
-        <p:spPr>
-          <a:xfrm xmlns:a="http://schemas.openxmlformats.org/drawingml/2006/main">
-            <a:off x="609600" y="4191000"/>
-            <a:ext cx="10572750" cy="495300"/>
-          </a:xfrm>
-          <a:prstGeom xmlns:a="http://schemas.openxmlformats.org/drawingml/2006/main" prst="rect">
-            <a:avLst/>
-          </a:prstGeom>
-          <a:noFill xmlns:a="http://schemas.openxmlformats.org/drawingml/2006/main"/>
-          <a:ln xmlns:a="http://schemas.openxmlformats.org/drawingml/2006/main" w="0">
-            <a:noFill/>
-          </a:ln>
-        </p:spPr>
-        <p:txBody>
-          <a:bodyPr xmlns:a="http://schemas.openxmlformats.org/drawingml/2006/main">
-            <a:noAutofit/>
-          </a:bodyPr>
-          <a:lstStyle xmlns:a="http://schemas.openxmlformats.org/drawingml/2006/main"/>
-          <a:p xmlns:a="http://schemas.openxmlformats.org/drawingml/2006/main">
-            <a:pPr>
-              <a:defRPr sz="2625" b="0">
+                <a16:creationId xmlns:a16="http://schemas.microsoft.com/office/drawing/2014/main" id="{08A953D3-7878-4375-A75A-63C3E3244F9D}"/>
+              </a:ext>
+            </a:extLst>
+          </p:cNvPr>
+          <p:cNvSpPr>
+            <a:spLocks xmlns:a="http://schemas.openxmlformats.org/drawingml/2006/main" noGrp="1"/>
+          </p:cNvSpPr>
+          <p:nvPr/>
+        </p:nvSpPr>
+        <p:spPr>
+          <a:xfrm xmlns:a="http://schemas.openxmlformats.org/drawingml/2006/main">
+            <a:off x="6429375" y="2105025"/>
+            <a:ext cx="5048250" cy="457200"/>
+          </a:xfrm>
+          <a:prstGeom xmlns:a="http://schemas.openxmlformats.org/drawingml/2006/main" prst="rect">
+            <a:avLst/>
+          </a:prstGeom>
+          <a:noFill xmlns:a="http://schemas.openxmlformats.org/drawingml/2006/main"/>
+          <a:ln xmlns:a="http://schemas.openxmlformats.org/drawingml/2006/main" w="0">
+            <a:noFill/>
+          </a:ln>
+        </p:spPr>
+        <p:txBody>
+          <a:bodyPr xmlns:a="http://schemas.openxmlformats.org/drawingml/2006/main">
+            <a:noAutofit/>
+          </a:bodyPr>
+          <a:lstStyle xmlns:a="http://schemas.openxmlformats.org/drawingml/2006/main"/>
+          <a:p xmlns:a="http://schemas.openxmlformats.org/drawingml/2006/main">
+            <a:pPr>
+              <a:defRPr sz="1800" b="0">
+                <a:solidFill>
+                  <a:srgbClr val="526B70"/>
+                </a:solidFill>
+                <a:latin typeface="Arial"/>
+                <a:ea typeface="Arial"/>
+                <a:cs typeface="Arial"/>
+              </a:defRPr>
+            </a:pPr>
+            <a:r>
+              <a:rPr sz="1800" b="0">
+                <a:solidFill>
+                  <a:srgbClr val="526B70"/>
+                </a:solidFill>
+                <a:latin typeface="Arial"/>
+                <a:ea typeface="Arial"/>
+                <a:cs typeface="Arial"/>
+              </a:rPr>
+              <a:t>The examples guide a better-fitting line</a:t>
+            </a:r>
+          </a:p>
+        </p:txBody>
+      </p:sp>
+      <p:graphicFrame>
+        <p:nvGraphicFramePr>
+          <p:cNvPr id="20" name="Chart"/>
+          <p:cNvGraphicFramePr/>
+          <p:nvPr/>
+        </p:nvGraphicFramePr>
+        <p:xfrm>
+          <a:off xmlns:a="http://schemas.openxmlformats.org/drawingml/2006/main" x="609600" y="2590800"/>
+          <a:ext xmlns:a="http://schemas.openxmlformats.org/drawingml/2006/main" cx="5286375" cy="2857500"/>
+        </p:xfrm>
+        <a:graphic xmlns:a="http://schemas.openxmlformats.org/drawingml/2006/main">
+          <a:graphicData uri="http://schemas.openxmlformats.org/drawingml/2006/chart">
+            <c:chart xmlns:r="http://schemas.openxmlformats.org/officeDocument/2006/relationships" xmlns:c="http://schemas.openxmlformats.org/drawingml/2006/chart" r:id="R2825f5ccf5d647cf"/>
+          </a:graphicData>
+        </a:graphic>
+      </p:graphicFrame>
+      <p:graphicFrame>
+        <p:nvGraphicFramePr>
+          <p:cNvPr id="21" name="Chart"/>
+          <p:cNvGraphicFramePr/>
+          <p:nvPr/>
+        </p:nvGraphicFramePr>
+        <p:xfrm>
+          <a:off xmlns:a="http://schemas.openxmlformats.org/drawingml/2006/main" x="6429375" y="2590800"/>
+          <a:ext xmlns:a="http://schemas.openxmlformats.org/drawingml/2006/main" cx="5286375" cy="2857500"/>
+        </p:xfrm>
+        <a:graphic xmlns:a="http://schemas.openxmlformats.org/drawingml/2006/main">
+          <a:graphicData uri="http://schemas.openxmlformats.org/drawingml/2006/chart">
+            <c:chart xmlns:r="http://schemas.openxmlformats.org/officeDocument/2006/relationships" xmlns:c="http://schemas.openxmlformats.org/drawingml/2006/chart" r:id="R417a67b4c32946d2"/>
+          </a:graphicData>
+        </a:graphic>
+      </p:graphicFrame>
+      <p:sp>
+        <p:nvSpPr>
+          <p:cNvPr id="10" name="">
+            <a:extLst xmlns:a="http://schemas.openxmlformats.org/drawingml/2006/main">
+              <a:ext uri="{FF2B5EF4-FFF2-40B4-BE49-F238E27FC236}">
+                <a16:creationId xmlns:a16="http://schemas.microsoft.com/office/drawing/2014/main" id="{7E4E18DC-54A0-4EFA-B568-5BD56EC1C177}"/>
+              </a:ext>
+            </a:extLst>
+          </p:cNvPr>
+          <p:cNvSpPr>
+            <a:spLocks xmlns:a="http://schemas.openxmlformats.org/drawingml/2006/main" noGrp="1"/>
+          </p:cNvSpPr>
+          <p:nvPr/>
+        </p:nvSpPr>
+        <p:spPr>
+          <a:xfrm xmlns:a="http://schemas.openxmlformats.org/drawingml/2006/main">
+            <a:off x="609600" y="5524500"/>
+            <a:ext cx="10858500" cy="495300"/>
+          </a:xfrm>
+          <a:prstGeom xmlns:a="http://schemas.openxmlformats.org/drawingml/2006/main" prst="rect">
+            <a:avLst/>
+          </a:prstGeom>
+          <a:noFill xmlns:a="http://schemas.openxmlformats.org/drawingml/2006/main"/>
+          <a:ln xmlns:a="http://schemas.openxmlformats.org/drawingml/2006/main" w="0">
+            <a:noFill/>
+          </a:ln>
+        </p:spPr>
+        <p:txBody>
+          <a:bodyPr xmlns:a="http://schemas.openxmlformats.org/drawingml/2006/main">
+            <a:noAutofit/>
+          </a:bodyPr>
+          <a:lstStyle xmlns:a="http://schemas.openxmlformats.org/drawingml/2006/main"/>
+          <a:p xmlns:a="http://schemas.openxmlformats.org/drawingml/2006/main">
+            <a:pPr>
+              <a:defRPr sz="2100" b="0">
                 <a:solidFill>
                   <a:srgbClr val="173C43"/>
                 </a:solidFill>
@@ -9129,7 +12212,7 @@
               </a:defRPr>
             </a:pPr>
             <a:r>
-              <a:rPr sz="2625" b="0">
+              <a:rPr sz="2100" b="0">
                 <a:solidFill>
                   <a:srgbClr val="173C43"/>
                 </a:solidFill>
@@ -9137,121 +12220,7 @@
                 <a:ea typeface="Heiti TC"/>
                 <a:cs typeface="Heiti TC"/>
               </a:rPr>
-              <a:t>試一個遠離其他點的新點</a:t>
-            </a:r>
-          </a:p>
-        </p:txBody>
-      </p:sp>
-      <p:sp>
-        <p:nvSpPr>
-          <p:cNvPr id="9" name="">
-            <a:extLst xmlns:a="http://schemas.openxmlformats.org/drawingml/2006/main">
-              <a:ext uri="{FF2B5EF4-FFF2-40B4-BE49-F238E27FC236}">
-                <a16:creationId xmlns:a16="http://schemas.microsoft.com/office/drawing/2014/main" id="{4D15F433-63C0-43C2-939C-8E5AE9199530}"/>
-              </a:ext>
-            </a:extLst>
-          </p:cNvPr>
-          <p:cNvSpPr>
-            <a:spLocks xmlns:a="http://schemas.openxmlformats.org/drawingml/2006/main" noGrp="1"/>
-          </p:cNvSpPr>
-          <p:nvPr/>
-        </p:nvSpPr>
-        <p:spPr>
-          <a:xfrm xmlns:a="http://schemas.openxmlformats.org/drawingml/2006/main">
-            <a:off x="609600" y="4657725"/>
-            <a:ext cx="10572750" cy="457200"/>
-          </a:xfrm>
-          <a:prstGeom xmlns:a="http://schemas.openxmlformats.org/drawingml/2006/main" prst="rect">
-            <a:avLst/>
-          </a:prstGeom>
-          <a:noFill xmlns:a="http://schemas.openxmlformats.org/drawingml/2006/main"/>
-          <a:ln xmlns:a="http://schemas.openxmlformats.org/drawingml/2006/main" w="0">
-            <a:noFill/>
-          </a:ln>
-        </p:spPr>
-        <p:txBody>
-          <a:bodyPr xmlns:a="http://schemas.openxmlformats.org/drawingml/2006/main">
-            <a:noAutofit/>
-          </a:bodyPr>
-          <a:lstStyle xmlns:a="http://schemas.openxmlformats.org/drawingml/2006/main"/>
-          <a:p xmlns:a="http://schemas.openxmlformats.org/drawingml/2006/main">
-            <a:pPr>
-              <a:defRPr sz="2025" b="0">
-                <a:solidFill>
-                  <a:srgbClr val="526B70"/>
-                </a:solidFill>
-                <a:latin typeface="Arial"/>
-                <a:ea typeface="Arial"/>
-                <a:cs typeface="Arial"/>
-              </a:defRPr>
-            </a:pPr>
-            <a:r>
-              <a:rPr sz="2025" b="0">
-                <a:solidFill>
-                  <a:srgbClr val="526B70"/>
-                </a:solidFill>
-                <a:latin typeface="Arial"/>
-                <a:ea typeface="Arial"/>
-                <a:cs typeface="Arial"/>
-              </a:rPr>
-              <a:t>Try a point far from the other dots</a:t>
-            </a:r>
-          </a:p>
-        </p:txBody>
-      </p:sp>
-      <p:sp>
-        <p:nvSpPr>
-          <p:cNvPr id="10" name="">
-            <a:extLst xmlns:a="http://schemas.openxmlformats.org/drawingml/2006/main">
-              <a:ext uri="{FF2B5EF4-FFF2-40B4-BE49-F238E27FC236}">
-                <a16:creationId xmlns:a16="http://schemas.microsoft.com/office/drawing/2014/main" id="{1CFD6E0A-6949-44BA-B3F6-87FBC4FA7E7D}"/>
-              </a:ext>
-            </a:extLst>
-          </p:cNvPr>
-          <p:cNvSpPr>
-            <a:spLocks xmlns:a="http://schemas.openxmlformats.org/drawingml/2006/main" noGrp="1"/>
-          </p:cNvSpPr>
-          <p:nvPr/>
-        </p:nvSpPr>
-        <p:spPr>
-          <a:xfrm xmlns:a="http://schemas.openxmlformats.org/drawingml/2006/main">
-            <a:off x="609600" y="5362575"/>
-            <a:ext cx="10572750" cy="495300"/>
-          </a:xfrm>
-          <a:prstGeom xmlns:a="http://schemas.openxmlformats.org/drawingml/2006/main" prst="rect">
-            <a:avLst/>
-          </a:prstGeom>
-          <a:noFill xmlns:a="http://schemas.openxmlformats.org/drawingml/2006/main"/>
-          <a:ln xmlns:a="http://schemas.openxmlformats.org/drawingml/2006/main" w="0">
-            <a:noFill/>
-          </a:ln>
-        </p:spPr>
-        <p:txBody>
-          <a:bodyPr xmlns:a="http://schemas.openxmlformats.org/drawingml/2006/main">
-            <a:noAutofit/>
-          </a:bodyPr>
-          <a:lstStyle xmlns:a="http://schemas.openxmlformats.org/drawingml/2006/main"/>
-          <a:p xmlns:a="http://schemas.openxmlformats.org/drawingml/2006/main">
-            <a:pPr>
-              <a:defRPr sz="2025" b="0">
-                <a:solidFill>
-                  <a:srgbClr val="173C43"/>
-                </a:solidFill>
-                <a:latin typeface="Heiti TC"/>
-                <a:ea typeface="Heiti TC"/>
-                <a:cs typeface="Heiti TC"/>
-              </a:defRPr>
-            </a:pPr>
-            <a:r>
-              <a:rPr sz="2025" b="0">
-                <a:solidFill>
-                  <a:srgbClr val="173C43"/>
-                </a:solidFill>
-                <a:latin typeface="Heiti TC"/>
-                <a:ea typeface="Heiti TC"/>
-                <a:cs typeface="Heiti TC"/>
-              </a:rPr>
-              <a:t>先預測，再觀察。把結果寫在工作紙上。</a:t>
+              <a:t>電腦從數據學習，然後用學到的模式作預測</a:t>
             </a:r>
           </a:p>
         </p:txBody>
@@ -9261,19 +12230,19 @@
           <p:cNvPr id="11" name="">
             <a:extLst xmlns:a="http://schemas.openxmlformats.org/drawingml/2006/main">
               <a:ext uri="{FF2B5EF4-FFF2-40B4-BE49-F238E27FC236}">
-                <a16:creationId xmlns:a16="http://schemas.microsoft.com/office/drawing/2014/main" id="{BD3C3F9B-5BEA-42FB-8E89-C99D55DE7DE1}"/>
-              </a:ext>
-            </a:extLst>
-          </p:cNvPr>
-          <p:cNvSpPr>
-            <a:spLocks xmlns:a="http://schemas.openxmlformats.org/drawingml/2006/main" noGrp="1"/>
-          </p:cNvSpPr>
-          <p:nvPr/>
-        </p:nvSpPr>
-        <p:spPr>
-          <a:xfrm xmlns:a="http://schemas.openxmlformats.org/drawingml/2006/main">
-            <a:off x="609600" y="5829300"/>
-            <a:ext cx="10572750" cy="457200"/>
+                <a16:creationId xmlns:a16="http://schemas.microsoft.com/office/drawing/2014/main" id="{80FB6F5E-FBCE-4B4E-9E93-579F6A2D40AD}"/>
+              </a:ext>
+            </a:extLst>
+          </p:cNvPr>
+          <p:cNvSpPr>
+            <a:spLocks xmlns:a="http://schemas.openxmlformats.org/drawingml/2006/main" noGrp="1"/>
+          </p:cNvSpPr>
+          <p:nvPr/>
+        </p:nvSpPr>
+        <p:spPr>
+          <a:xfrm xmlns:a="http://schemas.openxmlformats.org/drawingml/2006/main">
+            <a:off x="609600" y="5991225"/>
+            <a:ext cx="10858500" cy="457200"/>
           </a:xfrm>
           <a:prstGeom xmlns:a="http://schemas.openxmlformats.org/drawingml/2006/main" prst="rect">
             <a:avLst/>
@@ -9308,7 +12277,64 @@
                 <a:ea typeface="Arial"/>
                 <a:cs typeface="Arial"/>
               </a:rPr>
-              <a:t>Predict first, then observe. Record the result on your worksheet.</a:t>
+              <a:t>The computer learns from data, then uses the pattern to predict</a:t>
+            </a:r>
+          </a:p>
+        </p:txBody>
+      </p:sp>
+      <p:sp>
+        <p:nvSpPr>
+          <p:cNvPr id="12" name="">
+            <a:extLst xmlns:a="http://schemas.openxmlformats.org/drawingml/2006/main">
+              <a:ext uri="{FF2B5EF4-FFF2-40B4-BE49-F238E27FC236}">
+                <a16:creationId xmlns:a16="http://schemas.microsoft.com/office/drawing/2014/main" id="{F3A63788-46B4-4277-B7DB-8D5B0CB46140}"/>
+              </a:ext>
+            </a:extLst>
+          </p:cNvPr>
+          <p:cNvSpPr>
+            <a:spLocks xmlns:a="http://schemas.openxmlformats.org/drawingml/2006/main" noGrp="1"/>
+          </p:cNvSpPr>
+          <p:nvPr/>
+        </p:nvSpPr>
+        <p:spPr>
+          <a:xfrm xmlns:a="http://schemas.openxmlformats.org/drawingml/2006/main">
+            <a:off x="609600" y="6419850"/>
+            <a:ext cx="10096500" cy="238125"/>
+          </a:xfrm>
+          <a:prstGeom xmlns:a="http://schemas.openxmlformats.org/drawingml/2006/main" prst="rect">
+            <a:avLst/>
+          </a:prstGeom>
+          <a:noFill xmlns:a="http://schemas.openxmlformats.org/drawingml/2006/main"/>
+          <a:ln xmlns:a="http://schemas.openxmlformats.org/drawingml/2006/main" w="0">
+            <a:noFill/>
+          </a:ln>
+        </p:spPr>
+        <p:txBody>
+          <a:bodyPr xmlns:a="http://schemas.openxmlformats.org/drawingml/2006/main">
+            <a:noAutofit/>
+          </a:bodyPr>
+          <a:lstStyle xmlns:a="http://schemas.openxmlformats.org/drawingml/2006/main"/>
+          <a:p xmlns:a="http://schemas.openxmlformats.org/drawingml/2006/main">
+            <a:pPr>
+              <a:defRPr sz="1200" b="0">
+                <a:solidFill>
+                  <a:srgbClr val="526B70"/>
+                </a:solidFill>
+                <a:latin typeface="Heiti TC"/>
+                <a:ea typeface="Heiti TC"/>
+                <a:cs typeface="Heiti TC"/>
+              </a:defRPr>
+            </a:pPr>
+            <a:r>
+              <a:rPr sz="1200" b="0">
+                <a:solidFill>
+                  <a:srgbClr val="526B70"/>
+                </a:solidFill>
+                <a:latin typeface="Heiti TC"/>
+                <a:ea typeface="Heiti TC"/>
+                <a:cs typeface="Heiti TC"/>
+              </a:rPr>
+              <a:t>參考 / Source: Google Machine Learning Crash Course</a:t>
             </a:r>
           </a:p>
         </p:txBody>
@@ -9316,7 +12342,7 @@
     </p:spTree>
     <p:extLst>
       <p:ext uri="{BB962C8B-B14F-4D97-AF65-F5344CB8AC3E}">
-        <p14:creationId xmlns:p14="http://schemas.microsoft.com/office/powerpoint/2010/main" val="1283191213"/>
+        <p14:creationId xmlns:p14="http://schemas.microsoft.com/office/powerpoint/2010/main" val="1768695143"/>
       </p:ext>
     </p:extLst>
   </p:cSld>
@@ -9344,10 +12370,10 @@
       </p:grpSpPr>
       <p:sp>
         <p:nvSpPr>
-          <p:cNvPr id="12" name="">
-            <a:extLst xmlns:a="http://schemas.openxmlformats.org/drawingml/2006/main">
-              <a:ext uri="{FF2B5EF4-FFF2-40B4-BE49-F238E27FC236}">
-                <a16:creationId xmlns:a16="http://schemas.microsoft.com/office/drawing/2014/main" id="{E3DC4E9F-9A0E-4BDA-9E7A-1DFCC7E60567}"/>
+          <p:cNvPr id="13" name="">
+            <a:extLst xmlns:a="http://schemas.openxmlformats.org/drawingml/2006/main">
+              <a:ext uri="{FF2B5EF4-FFF2-40B4-BE49-F238E27FC236}">
+                <a16:creationId xmlns:a16="http://schemas.microsoft.com/office/drawing/2014/main" id="{3D4ED496-68D8-49F8-B139-D647E0FB8420}"/>
               </a:ext>
             </a:extLst>
           </p:cNvPr>
@@ -9394,7 +12420,7 @@
                 <a:ea typeface="Heiti TC"/>
                 <a:cs typeface="Heiti TC"/>
               </a:rPr>
-              <a:t>每天溫習時間與考試成績</a:t>
+              <a:t>現代 AI 能學習更複雜的模式</a:t>
             </a:r>
           </a:p>
         </p:txBody>
@@ -9404,7 +12430,7 @@
           <p:cNvPr id="2" name="">
             <a:extLst xmlns:a="http://schemas.openxmlformats.org/drawingml/2006/main">
               <a:ext uri="{FF2B5EF4-FFF2-40B4-BE49-F238E27FC236}">
-                <a16:creationId xmlns:a16="http://schemas.microsoft.com/office/drawing/2014/main" id="{9956538E-8B20-4E90-8AD2-48945CFC0D18}"/>
+                <a16:creationId xmlns:a16="http://schemas.microsoft.com/office/drawing/2014/main" id="{DD5E2003-DFAA-4FBC-961B-A580C46B8D86}"/>
               </a:ext>
             </a:extLst>
           </p:cNvPr>
@@ -9451,7 +12477,7 @@
                 <a:ea typeface="Arial"/>
                 <a:cs typeface="Arial"/>
               </a:rPr>
-              <a:t>Daily study time and exam score</a:t>
+              <a:t>Modern AI can learn more complex patterns</a:t>
             </a:r>
           </a:p>
         </p:txBody>
@@ -9461,7 +12487,7 @@
           <p:cNvPr id="3" name="">
             <a:extLst xmlns:a="http://schemas.openxmlformats.org/drawingml/2006/main">
               <a:ext uri="{FF2B5EF4-FFF2-40B4-BE49-F238E27FC236}">
-                <a16:creationId xmlns:a16="http://schemas.microsoft.com/office/drawing/2014/main" id="{9CD6CA66-FACB-4E6D-B62A-8F73BEB12F4A}"/>
+                <a16:creationId xmlns:a16="http://schemas.microsoft.com/office/drawing/2014/main" id="{E53E8AAA-6B39-4CB5-89F9-DC21B739BEB0}"/>
               </a:ext>
             </a:extLst>
           </p:cNvPr>
@@ -9513,57 +12539,155 @@
           </a:p>
         </p:txBody>
       </p:sp>
-      <p:graphicFrame>
-        <p:nvGraphicFramePr>
-          <p:cNvPr id="15" name="Chart"/>
-          <p:cNvGraphicFramePr/>
-          <p:nvPr/>
-        </p:nvGraphicFramePr>
-        <p:xfrm>
-          <a:off xmlns:a="http://schemas.openxmlformats.org/drawingml/2006/main" x="609600" y="1647825"/>
-          <a:ext xmlns:a="http://schemas.openxmlformats.org/drawingml/2006/main" cx="6905625" cy="4286250"/>
-        </p:xfrm>
-        <a:graphic xmlns:a="http://schemas.openxmlformats.org/drawingml/2006/main">
-          <a:graphicData uri="http://schemas.openxmlformats.org/drawingml/2006/chart">
-            <c:chart xmlns:r="http://schemas.openxmlformats.org/officeDocument/2006/relationships" xmlns:c="http://schemas.openxmlformats.org/drawingml/2006/chart" r:id="Rd9c2f89c20144c5f"/>
-          </a:graphicData>
-        </a:graphic>
-      </p:graphicFrame>
+      <p:sp>
+        <p:nvSpPr>
+          <p:cNvPr id="4" name="">
+            <a:extLst xmlns:a="http://schemas.openxmlformats.org/drawingml/2006/main">
+              <a:ext uri="{FF2B5EF4-FFF2-40B4-BE49-F238E27FC236}">
+                <a16:creationId xmlns:a16="http://schemas.microsoft.com/office/drawing/2014/main" id="{2D3D1050-DBC9-408E-B33B-892100E4ED9A}"/>
+              </a:ext>
+            </a:extLst>
+          </p:cNvPr>
+          <p:cNvSpPr>
+            <a:spLocks xmlns:a="http://schemas.openxmlformats.org/drawingml/2006/main" noGrp="1"/>
+          </p:cNvSpPr>
+          <p:nvPr/>
+        </p:nvSpPr>
+        <p:spPr>
+          <a:xfrm xmlns:a="http://schemas.openxmlformats.org/drawingml/2006/main">
+            <a:off x="609600" y="1666875"/>
+            <a:ext cx="10763250" cy="495300"/>
+          </a:xfrm>
+          <a:prstGeom xmlns:a="http://schemas.openxmlformats.org/drawingml/2006/main" prst="rect">
+            <a:avLst/>
+          </a:prstGeom>
+          <a:noFill xmlns:a="http://schemas.openxmlformats.org/drawingml/2006/main"/>
+          <a:ln xmlns:a="http://schemas.openxmlformats.org/drawingml/2006/main" w="0">
+            <a:noFill/>
+          </a:ln>
+        </p:spPr>
+        <p:txBody>
+          <a:bodyPr xmlns:a="http://schemas.openxmlformats.org/drawingml/2006/main">
+            <a:noAutofit/>
+          </a:bodyPr>
+          <a:lstStyle xmlns:a="http://schemas.openxmlformats.org/drawingml/2006/main"/>
+          <a:p xmlns:a="http://schemas.openxmlformats.org/drawingml/2006/main">
+            <a:pPr>
+              <a:defRPr sz="2400" b="0">
+                <a:solidFill>
+                  <a:srgbClr val="173C43"/>
+                </a:solidFill>
+                <a:latin typeface="Heiti TC"/>
+                <a:ea typeface="Heiti TC"/>
+                <a:cs typeface="Heiti TC"/>
+              </a:defRPr>
+            </a:pPr>
+            <a:r>
+              <a:rPr sz="2400" b="0">
+                <a:solidFill>
+                  <a:srgbClr val="173C43"/>
+                </a:solidFill>
+                <a:latin typeface="Heiti TC"/>
+                <a:ea typeface="Heiti TC"/>
+                <a:cs typeface="Heiti TC"/>
+              </a:rPr>
+              <a:t>今天：從數字的例子，學習一條直線</a:t>
+            </a:r>
+          </a:p>
+        </p:txBody>
+      </p:sp>
       <p:sp>
         <p:nvSpPr>
           <p:cNvPr id="5" name="">
             <a:extLst xmlns:a="http://schemas.openxmlformats.org/drawingml/2006/main">
               <a:ext uri="{FF2B5EF4-FFF2-40B4-BE49-F238E27FC236}">
-                <a16:creationId xmlns:a16="http://schemas.microsoft.com/office/drawing/2014/main" id="{65D0F19A-7038-4958-830E-32A1FDF829D8}"/>
-              </a:ext>
-            </a:extLst>
-          </p:cNvPr>
-          <p:cNvSpPr>
-            <a:spLocks xmlns:a="http://schemas.openxmlformats.org/drawingml/2006/main" noGrp="1"/>
-          </p:cNvSpPr>
-          <p:nvPr/>
-        </p:nvSpPr>
-        <p:spPr>
-          <a:xfrm xmlns:a="http://schemas.openxmlformats.org/drawingml/2006/main">
-            <a:off x="8020050" y="1819275"/>
-            <a:ext cx="3571875" cy="495300"/>
-          </a:xfrm>
-          <a:prstGeom xmlns:a="http://schemas.openxmlformats.org/drawingml/2006/main" prst="rect">
-            <a:avLst/>
-          </a:prstGeom>
-          <a:noFill xmlns:a="http://schemas.openxmlformats.org/drawingml/2006/main"/>
-          <a:ln xmlns:a="http://schemas.openxmlformats.org/drawingml/2006/main" w="0">
-            <a:noFill/>
-          </a:ln>
-        </p:spPr>
-        <p:txBody>
-          <a:bodyPr xmlns:a="http://schemas.openxmlformats.org/drawingml/2006/main">
-            <a:noAutofit/>
-          </a:bodyPr>
-          <a:lstStyle xmlns:a="http://schemas.openxmlformats.org/drawingml/2006/main"/>
-          <a:p xmlns:a="http://schemas.openxmlformats.org/drawingml/2006/main">
-            <a:pPr>
-              <a:defRPr sz="2100" b="0">
+                <a16:creationId xmlns:a16="http://schemas.microsoft.com/office/drawing/2014/main" id="{6BF755FF-0287-4985-8E1F-D4CCAC1438D0}"/>
+              </a:ext>
+            </a:extLst>
+          </p:cNvPr>
+          <p:cNvSpPr>
+            <a:spLocks xmlns:a="http://schemas.openxmlformats.org/drawingml/2006/main" noGrp="1"/>
+          </p:cNvSpPr>
+          <p:nvPr/>
+        </p:nvSpPr>
+        <p:spPr>
+          <a:xfrm xmlns:a="http://schemas.openxmlformats.org/drawingml/2006/main">
+            <a:off x="609600" y="2133600"/>
+            <a:ext cx="10763250" cy="457200"/>
+          </a:xfrm>
+          <a:prstGeom xmlns:a="http://schemas.openxmlformats.org/drawingml/2006/main" prst="rect">
+            <a:avLst/>
+          </a:prstGeom>
+          <a:noFill xmlns:a="http://schemas.openxmlformats.org/drawingml/2006/main"/>
+          <a:ln xmlns:a="http://schemas.openxmlformats.org/drawingml/2006/main" w="0">
+            <a:noFill/>
+          </a:ln>
+        </p:spPr>
+        <p:txBody>
+          <a:bodyPr xmlns:a="http://schemas.openxmlformats.org/drawingml/2006/main">
+            <a:noAutofit/>
+          </a:bodyPr>
+          <a:lstStyle xmlns:a="http://schemas.openxmlformats.org/drawingml/2006/main"/>
+          <a:p xmlns:a="http://schemas.openxmlformats.org/drawingml/2006/main">
+            <a:pPr>
+              <a:defRPr sz="1800" b="0">
+                <a:solidFill>
+                  <a:srgbClr val="526B70"/>
+                </a:solidFill>
+                <a:latin typeface="Arial"/>
+                <a:ea typeface="Arial"/>
+                <a:cs typeface="Arial"/>
+              </a:defRPr>
+            </a:pPr>
+            <a:r>
+              <a:rPr sz="1800" b="0">
+                <a:solidFill>
+                  <a:srgbClr val="526B70"/>
+                </a:solidFill>
+                <a:latin typeface="Arial"/>
+                <a:ea typeface="Arial"/>
+                <a:cs typeface="Arial"/>
+              </a:rPr>
+              <a:t>Today: learn a straight line from numerical examples</a:t>
+            </a:r>
+          </a:p>
+        </p:txBody>
+      </p:sp>
+      <p:sp>
+        <p:nvSpPr>
+          <p:cNvPr id="6" name="">
+            <a:extLst xmlns:a="http://schemas.openxmlformats.org/drawingml/2006/main">
+              <a:ext uri="{FF2B5EF4-FFF2-40B4-BE49-F238E27FC236}">
+                <a16:creationId xmlns:a16="http://schemas.microsoft.com/office/drawing/2014/main" id="{C230C942-7F13-4042-BC90-9101F0EFA061}"/>
+              </a:ext>
+            </a:extLst>
+          </p:cNvPr>
+          <p:cNvSpPr>
+            <a:spLocks xmlns:a="http://schemas.openxmlformats.org/drawingml/2006/main" noGrp="1"/>
+          </p:cNvSpPr>
+          <p:nvPr/>
+        </p:nvSpPr>
+        <p:spPr>
+          <a:xfrm xmlns:a="http://schemas.openxmlformats.org/drawingml/2006/main">
+            <a:off x="609600" y="2819400"/>
+            <a:ext cx="10763250" cy="495300"/>
+          </a:xfrm>
+          <a:prstGeom xmlns:a="http://schemas.openxmlformats.org/drawingml/2006/main" prst="rect">
+            <a:avLst/>
+          </a:prstGeom>
+          <a:noFill xmlns:a="http://schemas.openxmlformats.org/drawingml/2006/main"/>
+          <a:ln xmlns:a="http://schemas.openxmlformats.org/drawingml/2006/main" w="0">
+            <a:noFill/>
+          </a:ln>
+        </p:spPr>
+        <p:txBody>
+          <a:bodyPr xmlns:a="http://schemas.openxmlformats.org/drawingml/2006/main">
+            <a:noAutofit/>
+          </a:bodyPr>
+          <a:lstStyle xmlns:a="http://schemas.openxmlformats.org/drawingml/2006/main"/>
+          <a:p xmlns:a="http://schemas.openxmlformats.org/drawingml/2006/main">
+            <a:pPr>
+              <a:defRPr sz="2250" b="0">
                 <a:solidFill>
                   <a:srgbClr val="173C43"/>
                 </a:solidFill>
@@ -9573,7 +12697,7 @@
               </a:defRPr>
             </a:pPr>
             <a:r>
-              <a:rPr sz="2100" b="0">
+              <a:rPr sz="2250" b="0">
                 <a:solidFill>
                   <a:srgbClr val="173C43"/>
                 </a:solidFill>
@@ -9581,29 +12705,29 @@
                 <a:ea typeface="Heiti TC"/>
                 <a:cs typeface="Heiti TC"/>
               </a:rPr>
-              <a:t>3.5 小時的預測成績？</a:t>
-            </a:r>
-          </a:p>
-        </p:txBody>
-      </p:sp>
-      <p:sp>
-        <p:nvSpPr>
-          <p:cNvPr id="6" name="">
-            <a:extLst xmlns:a="http://schemas.openxmlformats.org/drawingml/2006/main">
-              <a:ext uri="{FF2B5EF4-FFF2-40B4-BE49-F238E27FC236}">
-                <a16:creationId xmlns:a16="http://schemas.microsoft.com/office/drawing/2014/main" id="{8093FFD8-E1E5-469D-AAB9-C4CDD1B653D3}"/>
-              </a:ext>
-            </a:extLst>
-          </p:cNvPr>
-          <p:cNvSpPr>
-            <a:spLocks xmlns:a="http://schemas.openxmlformats.org/drawingml/2006/main" noGrp="1"/>
-          </p:cNvSpPr>
-          <p:nvPr/>
-        </p:nvSpPr>
-        <p:spPr>
-          <a:xfrm xmlns:a="http://schemas.openxmlformats.org/drawingml/2006/main">
-            <a:off x="8020050" y="2286000"/>
-            <a:ext cx="3571875" cy="457200"/>
+              <a:t>許多現代 AI 使用神經網絡，學習更複雜的模式</a:t>
+            </a:r>
+          </a:p>
+        </p:txBody>
+      </p:sp>
+      <p:sp>
+        <p:nvSpPr>
+          <p:cNvPr id="7" name="">
+            <a:extLst xmlns:a="http://schemas.openxmlformats.org/drawingml/2006/main">
+              <a:ext uri="{FF2B5EF4-FFF2-40B4-BE49-F238E27FC236}">
+                <a16:creationId xmlns:a16="http://schemas.microsoft.com/office/drawing/2014/main" id="{B4FA016A-F8DA-437B-A537-0CC5594845A0}"/>
+              </a:ext>
+            </a:extLst>
+          </p:cNvPr>
+          <p:cNvSpPr>
+            <a:spLocks xmlns:a="http://schemas.openxmlformats.org/drawingml/2006/main" noGrp="1"/>
+          </p:cNvSpPr>
+          <p:nvPr/>
+        </p:nvSpPr>
+        <p:spPr>
+          <a:xfrm xmlns:a="http://schemas.openxmlformats.org/drawingml/2006/main">
+            <a:off x="609600" y="3286125"/>
+            <a:ext cx="10763250" cy="457200"/>
           </a:xfrm>
           <a:prstGeom xmlns:a="http://schemas.openxmlformats.org/drawingml/2006/main" prst="rect">
             <a:avLst/>
@@ -9638,46 +12762,46 @@
                 <a:ea typeface="Arial"/>
                 <a:cs typeface="Arial"/>
               </a:rPr>
-              <a:t>Score for 3.5 hours a day?</a:t>
-            </a:r>
-          </a:p>
-        </p:txBody>
-      </p:sp>
-      <p:sp>
-        <p:nvSpPr>
-          <p:cNvPr id="7" name="">
-            <a:extLst xmlns:a="http://schemas.openxmlformats.org/drawingml/2006/main">
-              <a:ext uri="{FF2B5EF4-FFF2-40B4-BE49-F238E27FC236}">
-                <a16:creationId xmlns:a16="http://schemas.microsoft.com/office/drawing/2014/main" id="{955F88C6-3ED1-47E6-82AC-468FD32F3D0E}"/>
-              </a:ext>
-            </a:extLst>
-          </p:cNvPr>
-          <p:cNvSpPr>
-            <a:spLocks xmlns:a="http://schemas.openxmlformats.org/drawingml/2006/main" noGrp="1"/>
-          </p:cNvSpPr>
-          <p:nvPr/>
-        </p:nvSpPr>
-        <p:spPr>
-          <a:xfrm xmlns:a="http://schemas.openxmlformats.org/drawingml/2006/main">
-            <a:off x="8020050" y="3390900"/>
-            <a:ext cx="3571875" cy="495300"/>
-          </a:xfrm>
-          <a:prstGeom xmlns:a="http://schemas.openxmlformats.org/drawingml/2006/main" prst="rect">
-            <a:avLst/>
-          </a:prstGeom>
-          <a:noFill xmlns:a="http://schemas.openxmlformats.org/drawingml/2006/main"/>
-          <a:ln xmlns:a="http://schemas.openxmlformats.org/drawingml/2006/main" w="0">
-            <a:noFill/>
-          </a:ln>
-        </p:spPr>
-        <p:txBody>
-          <a:bodyPr xmlns:a="http://schemas.openxmlformats.org/drawingml/2006/main">
-            <a:noAutofit/>
-          </a:bodyPr>
-          <a:lstStyle xmlns:a="http://schemas.openxmlformats.org/drawingml/2006/main"/>
-          <a:p xmlns:a="http://schemas.openxmlformats.org/drawingml/2006/main">
-            <a:pPr>
-              <a:defRPr sz="2175" b="0">
+              <a:t>Many modern AI systems use neural networks to learn more complex patterns</a:t>
+            </a:r>
+          </a:p>
+        </p:txBody>
+      </p:sp>
+      <p:sp>
+        <p:nvSpPr>
+          <p:cNvPr id="8" name="">
+            <a:extLst xmlns:a="http://schemas.openxmlformats.org/drawingml/2006/main">
+              <a:ext uri="{FF2B5EF4-FFF2-40B4-BE49-F238E27FC236}">
+                <a16:creationId xmlns:a16="http://schemas.microsoft.com/office/drawing/2014/main" id="{6810384D-4B45-40CB-B60B-A6041E3DC32A}"/>
+              </a:ext>
+            </a:extLst>
+          </p:cNvPr>
+          <p:cNvSpPr>
+            <a:spLocks xmlns:a="http://schemas.openxmlformats.org/drawingml/2006/main" noGrp="1"/>
+          </p:cNvSpPr>
+          <p:nvPr/>
+        </p:nvSpPr>
+        <p:spPr>
+          <a:xfrm xmlns:a="http://schemas.openxmlformats.org/drawingml/2006/main">
+            <a:off x="609600" y="3981450"/>
+            <a:ext cx="10763250" cy="495300"/>
+          </a:xfrm>
+          <a:prstGeom xmlns:a="http://schemas.openxmlformats.org/drawingml/2006/main" prst="rect">
+            <a:avLst/>
+          </a:prstGeom>
+          <a:noFill xmlns:a="http://schemas.openxmlformats.org/drawingml/2006/main"/>
+          <a:ln xmlns:a="http://schemas.openxmlformats.org/drawingml/2006/main" w="0">
+            <a:noFill/>
+          </a:ln>
+        </p:spPr>
+        <p:txBody>
+          <a:bodyPr xmlns:a="http://schemas.openxmlformats.org/drawingml/2006/main">
+            <a:noAutofit/>
+          </a:bodyPr>
+          <a:lstStyle xmlns:a="http://schemas.openxmlformats.org/drawingml/2006/main"/>
+          <a:p xmlns:a="http://schemas.openxmlformats.org/drawingml/2006/main">
+            <a:pPr>
+              <a:defRPr sz="2250" b="0">
                 <a:solidFill>
                   <a:srgbClr val="173C43"/>
                 </a:solidFill>
@@ -9687,7 +12811,7 @@
               </a:defRPr>
             </a:pPr>
             <a:r>
-              <a:rPr sz="2175" b="0">
+              <a:rPr sz="2250" b="0">
                 <a:solidFill>
                   <a:srgbClr val="173C43"/>
                 </a:solidFill>
@@ -9695,29 +12819,29 @@
                 <a:ea typeface="Heiti TC"/>
                 <a:cs typeface="Heiti TC"/>
               </a:rPr>
-              <a:t>先畫直線，再估計</a:t>
-            </a:r>
-          </a:p>
-        </p:txBody>
-      </p:sp>
-      <p:sp>
-        <p:nvSpPr>
-          <p:cNvPr id="8" name="">
-            <a:extLst xmlns:a="http://schemas.openxmlformats.org/drawingml/2006/main">
-              <a:ext uri="{FF2B5EF4-FFF2-40B4-BE49-F238E27FC236}">
-                <a16:creationId xmlns:a16="http://schemas.microsoft.com/office/drawing/2014/main" id="{3C085E7E-8F6B-4EB9-8656-A9D8F18BEFE1}"/>
-              </a:ext>
-            </a:extLst>
-          </p:cNvPr>
-          <p:cNvSpPr>
-            <a:spLocks xmlns:a="http://schemas.openxmlformats.org/drawingml/2006/main" noGrp="1"/>
-          </p:cNvSpPr>
-          <p:nvPr/>
-        </p:nvSpPr>
-        <p:spPr>
-          <a:xfrm xmlns:a="http://schemas.openxmlformats.org/drawingml/2006/main">
-            <a:off x="8020050" y="3857625"/>
-            <a:ext cx="3571875" cy="457200"/>
+              <a:t>例子：辨認照片中的物件，或預測下一小段文字</a:t>
+            </a:r>
+          </a:p>
+        </p:txBody>
+      </p:sp>
+      <p:sp>
+        <p:nvSpPr>
+          <p:cNvPr id="9" name="">
+            <a:extLst xmlns:a="http://schemas.openxmlformats.org/drawingml/2006/main">
+              <a:ext uri="{FF2B5EF4-FFF2-40B4-BE49-F238E27FC236}">
+                <a16:creationId xmlns:a16="http://schemas.microsoft.com/office/drawing/2014/main" id="{9030989A-D2ED-44F6-9BB1-A034FD0129C9}"/>
+              </a:ext>
+            </a:extLst>
+          </p:cNvPr>
+          <p:cNvSpPr>
+            <a:spLocks xmlns:a="http://schemas.openxmlformats.org/drawingml/2006/main" noGrp="1"/>
+          </p:cNvSpPr>
+          <p:nvPr/>
+        </p:nvSpPr>
+        <p:spPr>
+          <a:xfrm xmlns:a="http://schemas.openxmlformats.org/drawingml/2006/main">
+            <a:off x="609600" y="4448175"/>
+            <a:ext cx="10763250" cy="457200"/>
           </a:xfrm>
           <a:prstGeom xmlns:a="http://schemas.openxmlformats.org/drawingml/2006/main" prst="rect">
             <a:avLst/>
@@ -9752,46 +12876,46 @@
                 <a:ea typeface="Arial"/>
                 <a:cs typeface="Arial"/>
               </a:rPr>
-              <a:t>Draw your line, then estimate</a:t>
-            </a:r>
-          </a:p>
-        </p:txBody>
-      </p:sp>
-      <p:sp>
-        <p:nvSpPr>
-          <p:cNvPr id="9" name="">
-            <a:extLst xmlns:a="http://schemas.openxmlformats.org/drawingml/2006/main">
-              <a:ext uri="{FF2B5EF4-FFF2-40B4-BE49-F238E27FC236}">
-                <a16:creationId xmlns:a16="http://schemas.microsoft.com/office/drawing/2014/main" id="{A9139329-BD56-4EEB-A92F-DD2749ACE916}"/>
-              </a:ext>
-            </a:extLst>
-          </p:cNvPr>
-          <p:cNvSpPr>
-            <a:spLocks xmlns:a="http://schemas.openxmlformats.org/drawingml/2006/main" noGrp="1"/>
-          </p:cNvSpPr>
-          <p:nvPr/>
-        </p:nvSpPr>
-        <p:spPr>
-          <a:xfrm xmlns:a="http://schemas.openxmlformats.org/drawingml/2006/main">
-            <a:off x="8020050" y="4819650"/>
-            <a:ext cx="3571875" cy="495300"/>
-          </a:xfrm>
-          <a:prstGeom xmlns:a="http://schemas.openxmlformats.org/drawingml/2006/main" prst="rect">
-            <a:avLst/>
-          </a:prstGeom>
-          <a:noFill xmlns:a="http://schemas.openxmlformats.org/drawingml/2006/main"/>
-          <a:ln xmlns:a="http://schemas.openxmlformats.org/drawingml/2006/main" w="0">
-            <a:noFill/>
-          </a:ln>
-        </p:spPr>
-        <p:txBody>
-          <a:bodyPr xmlns:a="http://schemas.openxmlformats.org/drawingml/2006/main">
-            <a:noAutofit/>
-          </a:bodyPr>
-          <a:lstStyle xmlns:a="http://schemas.openxmlformats.org/drawingml/2006/main"/>
-          <a:p xmlns:a="http://schemas.openxmlformats.org/drawingml/2006/main">
-            <a:pPr>
-              <a:defRPr sz="2100" b="0">
+              <a:t>Examples: recognise objects in photos, or predict the next piece of text</a:t>
+            </a:r>
+          </a:p>
+        </p:txBody>
+      </p:sp>
+      <p:sp>
+        <p:nvSpPr>
+          <p:cNvPr id="10" name="">
+            <a:extLst xmlns:a="http://schemas.openxmlformats.org/drawingml/2006/main">
+              <a:ext uri="{FF2B5EF4-FFF2-40B4-BE49-F238E27FC236}">
+                <a16:creationId xmlns:a16="http://schemas.microsoft.com/office/drawing/2014/main" id="{EDCEC9C3-55FA-4169-A52B-2D850C5049E9}"/>
+              </a:ext>
+            </a:extLst>
+          </p:cNvPr>
+          <p:cNvSpPr>
+            <a:spLocks xmlns:a="http://schemas.openxmlformats.org/drawingml/2006/main" noGrp="1"/>
+          </p:cNvSpPr>
+          <p:nvPr/>
+        </p:nvSpPr>
+        <p:spPr>
+          <a:xfrm xmlns:a="http://schemas.openxmlformats.org/drawingml/2006/main">
+            <a:off x="609600" y="5153025"/>
+            <a:ext cx="10763250" cy="495300"/>
+          </a:xfrm>
+          <a:prstGeom xmlns:a="http://schemas.openxmlformats.org/drawingml/2006/main" prst="rect">
+            <a:avLst/>
+          </a:prstGeom>
+          <a:noFill xmlns:a="http://schemas.openxmlformats.org/drawingml/2006/main"/>
+          <a:ln xmlns:a="http://schemas.openxmlformats.org/drawingml/2006/main" w="0">
+            <a:noFill/>
+          </a:ln>
+        </p:spPr>
+        <p:txBody>
+          <a:bodyPr xmlns:a="http://schemas.openxmlformats.org/drawingml/2006/main">
+            <a:noAutofit/>
+          </a:bodyPr>
+          <a:lstStyle xmlns:a="http://schemas.openxmlformats.org/drawingml/2006/main"/>
+          <a:p xmlns:a="http://schemas.openxmlformats.org/drawingml/2006/main">
+            <a:pPr>
+              <a:defRPr sz="2250" b="0">
                 <a:solidFill>
                   <a:srgbClr val="173C43"/>
                 </a:solidFill>
@@ -9801,7 +12925,7 @@
               </a:defRPr>
             </a:pPr>
             <a:r>
-              <a:rPr sz="2100" b="0">
+              <a:rPr sz="2250" b="0">
                 <a:solidFill>
                   <a:srgbClr val="173C43"/>
                 </a:solidFill>
@@ -9809,29 +12933,29 @@
                 <a:ea typeface="Heiti TC"/>
                 <a:cs typeface="Heiti TC"/>
               </a:rPr>
-              <a:t>10 小時的預測可信嗎？</a:t>
-            </a:r>
-          </a:p>
-        </p:txBody>
-      </p:sp>
-      <p:sp>
-        <p:nvSpPr>
-          <p:cNvPr id="10" name="">
-            <a:extLst xmlns:a="http://schemas.openxmlformats.org/drawingml/2006/main">
-              <a:ext uri="{FF2B5EF4-FFF2-40B4-BE49-F238E27FC236}">
-                <a16:creationId xmlns:a16="http://schemas.microsoft.com/office/drawing/2014/main" id="{6B75D627-77C1-4C07-AE56-D44AF8245B22}"/>
-              </a:ext>
-            </a:extLst>
-          </p:cNvPr>
-          <p:cNvSpPr>
-            <a:spLocks xmlns:a="http://schemas.openxmlformats.org/drawingml/2006/main" noGrp="1"/>
-          </p:cNvSpPr>
-          <p:nvPr/>
-        </p:nvSpPr>
-        <p:spPr>
-          <a:xfrm xmlns:a="http://schemas.openxmlformats.org/drawingml/2006/main">
-            <a:off x="8020050" y="5286375"/>
-            <a:ext cx="3571875" cy="457200"/>
+              <a:t>共同想法：從例子學習，再應用於新的情況</a:t>
+            </a:r>
+          </a:p>
+        </p:txBody>
+      </p:sp>
+      <p:sp>
+        <p:nvSpPr>
+          <p:cNvPr id="11" name="">
+            <a:extLst xmlns:a="http://schemas.openxmlformats.org/drawingml/2006/main">
+              <a:ext uri="{FF2B5EF4-FFF2-40B4-BE49-F238E27FC236}">
+                <a16:creationId xmlns:a16="http://schemas.microsoft.com/office/drawing/2014/main" id="{5A8AC487-7401-4663-8801-00F556CE5ACD}"/>
+              </a:ext>
+            </a:extLst>
+          </p:cNvPr>
+          <p:cNvSpPr>
+            <a:spLocks xmlns:a="http://schemas.openxmlformats.org/drawingml/2006/main" noGrp="1"/>
+          </p:cNvSpPr>
+          <p:nvPr/>
+        </p:nvSpPr>
+        <p:spPr>
+          <a:xfrm xmlns:a="http://schemas.openxmlformats.org/drawingml/2006/main">
+            <a:off x="609600" y="5619750"/>
+            <a:ext cx="10763250" cy="457200"/>
           </a:xfrm>
           <a:prstGeom xmlns:a="http://schemas.openxmlformats.org/drawingml/2006/main" prst="rect">
             <a:avLst/>
@@ -9866,64 +12990,64 @@
                 <a:ea typeface="Arial"/>
                 <a:cs typeface="Arial"/>
               </a:rPr>
-              <a:t>How reliable is a prediction for 10 hours?</a:t>
-            </a:r>
-          </a:p>
-        </p:txBody>
-      </p:sp>
-      <p:sp>
-        <p:nvSpPr>
-          <p:cNvPr id="11" name="">
-            <a:extLst xmlns:a="http://schemas.openxmlformats.org/drawingml/2006/main">
-              <a:ext uri="{FF2B5EF4-FFF2-40B4-BE49-F238E27FC236}">
-                <a16:creationId xmlns:a16="http://schemas.microsoft.com/office/drawing/2014/main" id="{59D5E5EC-9BB2-4809-A628-5F63DE53E813}"/>
-              </a:ext>
-            </a:extLst>
-          </p:cNvPr>
-          <p:cNvSpPr>
-            <a:spLocks xmlns:a="http://schemas.openxmlformats.org/drawingml/2006/main" noGrp="1"/>
-          </p:cNvSpPr>
-          <p:nvPr/>
-        </p:nvSpPr>
-        <p:spPr>
-          <a:xfrm xmlns:a="http://schemas.openxmlformats.org/drawingml/2006/main">
-            <a:off x="609600" y="6191250"/>
-            <a:ext cx="9048750" cy="285750"/>
-          </a:xfrm>
-          <a:prstGeom xmlns:a="http://schemas.openxmlformats.org/drawingml/2006/main" prst="rect">
-            <a:avLst/>
-          </a:prstGeom>
-          <a:noFill xmlns:a="http://schemas.openxmlformats.org/drawingml/2006/main"/>
-          <a:ln xmlns:a="http://schemas.openxmlformats.org/drawingml/2006/main" w="0">
-            <a:noFill/>
-          </a:ln>
-        </p:spPr>
-        <p:txBody>
-          <a:bodyPr xmlns:a="http://schemas.openxmlformats.org/drawingml/2006/main">
-            <a:noAutofit/>
-          </a:bodyPr>
-          <a:lstStyle xmlns:a="http://schemas.openxmlformats.org/drawingml/2006/main"/>
-          <a:p xmlns:a="http://schemas.openxmlformats.org/drawingml/2006/main">
-            <a:pPr>
-              <a:defRPr sz="1350" b="0">
-                <a:solidFill>
-                  <a:srgbClr val="526B70"/>
-                </a:solidFill>
-                <a:latin typeface="Heiti TC"/>
-                <a:ea typeface="Heiti TC"/>
-                <a:cs typeface="Heiti TC"/>
-              </a:defRPr>
-            </a:pPr>
-            <a:r>
-              <a:rPr sz="1350" b="0">
-                <a:solidFill>
-                  <a:srgbClr val="526B70"/>
-                </a:solidFill>
-                <a:latin typeface="Heiti TC"/>
-                <a:ea typeface="Heiti TC"/>
-                <a:cs typeface="Heiti TC"/>
-              </a:rPr>
-              <a:t>不同學生的模擬數據 / Simulated data for different students</a:t>
+              <a:t>Shared idea: learn from examples, then apply the learning to new cases</a:t>
+            </a:r>
+          </a:p>
+        </p:txBody>
+      </p:sp>
+      <p:sp>
+        <p:nvSpPr>
+          <p:cNvPr id="12" name="">
+            <a:extLst xmlns:a="http://schemas.openxmlformats.org/drawingml/2006/main">
+              <a:ext uri="{FF2B5EF4-FFF2-40B4-BE49-F238E27FC236}">
+                <a16:creationId xmlns:a16="http://schemas.microsoft.com/office/drawing/2014/main" id="{3E261005-EC3B-4D66-A8CB-99DD723BE381}"/>
+              </a:ext>
+            </a:extLst>
+          </p:cNvPr>
+          <p:cNvSpPr>
+            <a:spLocks xmlns:a="http://schemas.openxmlformats.org/drawingml/2006/main" noGrp="1"/>
+          </p:cNvSpPr>
+          <p:nvPr/>
+        </p:nvSpPr>
+        <p:spPr>
+          <a:xfrm xmlns:a="http://schemas.openxmlformats.org/drawingml/2006/main">
+            <a:off x="609600" y="6419850"/>
+            <a:ext cx="10096500" cy="238125"/>
+          </a:xfrm>
+          <a:prstGeom xmlns:a="http://schemas.openxmlformats.org/drawingml/2006/main" prst="rect">
+            <a:avLst/>
+          </a:prstGeom>
+          <a:noFill xmlns:a="http://schemas.openxmlformats.org/drawingml/2006/main"/>
+          <a:ln xmlns:a="http://schemas.openxmlformats.org/drawingml/2006/main" w="0">
+            <a:noFill/>
+          </a:ln>
+        </p:spPr>
+        <p:txBody>
+          <a:bodyPr xmlns:a="http://schemas.openxmlformats.org/drawingml/2006/main">
+            <a:noAutofit/>
+          </a:bodyPr>
+          <a:lstStyle xmlns:a="http://schemas.openxmlformats.org/drawingml/2006/main"/>
+          <a:p xmlns:a="http://schemas.openxmlformats.org/drawingml/2006/main">
+            <a:pPr>
+              <a:defRPr sz="1200" b="0">
+                <a:solidFill>
+                  <a:srgbClr val="526B70"/>
+                </a:solidFill>
+                <a:latin typeface="Heiti TC"/>
+                <a:ea typeface="Heiti TC"/>
+                <a:cs typeface="Heiti TC"/>
+              </a:defRPr>
+            </a:pPr>
+            <a:r>
+              <a:rPr sz="1200" b="0">
+                <a:solidFill>
+                  <a:srgbClr val="526B70"/>
+                </a:solidFill>
+                <a:latin typeface="Heiti TC"/>
+                <a:ea typeface="Heiti TC"/>
+                <a:cs typeface="Heiti TC"/>
+              </a:rPr>
+              <a:t>參考 / Source: Google Machine Learning Crash Course</a:t>
             </a:r>
           </a:p>
         </p:txBody>
@@ -9931,7 +13055,7 @@
     </p:spTree>
     <p:extLst>
       <p:ext uri="{BB962C8B-B14F-4D97-AF65-F5344CB8AC3E}">
-        <p14:creationId xmlns:p14="http://schemas.microsoft.com/office/powerpoint/2010/main" val="457913810"/>
+        <p14:creationId xmlns:p14="http://schemas.microsoft.com/office/powerpoint/2010/main" val="1143376812"/>
       </p:ext>
     </p:extLst>
   </p:cSld>
@@ -9959,10 +13083,10 @@
       </p:grpSpPr>
       <p:sp>
         <p:nvSpPr>
-          <p:cNvPr id="15" name="">
-            <a:extLst xmlns:a="http://schemas.openxmlformats.org/drawingml/2006/main">
-              <a:ext uri="{FF2B5EF4-FFF2-40B4-BE49-F238E27FC236}">
-                <a16:creationId xmlns:a16="http://schemas.microsoft.com/office/drawing/2014/main" id="{4466BF2E-F1DE-45B8-BCDA-1556F6157594}"/>
+          <p:cNvPr id="11" name="">
+            <a:extLst xmlns:a="http://schemas.openxmlformats.org/drawingml/2006/main">
+              <a:ext uri="{FF2B5EF4-FFF2-40B4-BE49-F238E27FC236}">
+                <a16:creationId xmlns:a16="http://schemas.microsoft.com/office/drawing/2014/main" id="{A7CA1BEB-23D1-4E57-9540-9E8F013D7AC1}"/>
               </a:ext>
             </a:extLst>
           </p:cNvPr>
@@ -10009,7 +13133,7 @@
                 <a:ea typeface="Heiti TC"/>
                 <a:cs typeface="Heiti TC"/>
               </a:rPr>
-              <a:t>預測結果與模型的限制</a:t>
+              <a:t>學會模式，還是只記住例子？</a:t>
             </a:r>
           </a:p>
         </p:txBody>
@@ -10019,7 +13143,7 @@
           <p:cNvPr id="2" name="">
             <a:extLst xmlns:a="http://schemas.openxmlformats.org/drawingml/2006/main">
               <a:ext uri="{FF2B5EF4-FFF2-40B4-BE49-F238E27FC236}">
-                <a16:creationId xmlns:a16="http://schemas.microsoft.com/office/drawing/2014/main" id="{2EC9EC55-88AE-4A59-8FCF-763AC23842B1}"/>
+                <a16:creationId xmlns:a16="http://schemas.microsoft.com/office/drawing/2014/main" id="{B52CC19F-B7C2-4E1F-ADB5-53219E182413}"/>
               </a:ext>
             </a:extLst>
           </p:cNvPr>
@@ -10066,7 +13190,7 @@
                 <a:ea typeface="Arial"/>
                 <a:cs typeface="Arial"/>
               </a:rPr>
-              <a:t>Prediction results and limits of the model</a:t>
+              <a:t>Learning a pattern, or only remembering examples?</a:t>
             </a:r>
           </a:p>
         </p:txBody>
@@ -10076,7 +13200,7 @@
           <p:cNvPr id="3" name="">
             <a:extLst xmlns:a="http://schemas.openxmlformats.org/drawingml/2006/main">
               <a:ext uri="{FF2B5EF4-FFF2-40B4-BE49-F238E27FC236}">
-                <a16:creationId xmlns:a16="http://schemas.microsoft.com/office/drawing/2014/main" id="{1BC7F1E7-545A-452A-847F-944481C50AF0}"/>
+                <a16:creationId xmlns:a16="http://schemas.microsoft.com/office/drawing/2014/main" id="{00D5E17C-6BC2-4ACA-9463-038C0C607000}"/>
               </a:ext>
             </a:extLst>
           </p:cNvPr>
@@ -10133,54 +13257,54 @@
           <p:cNvPr id="4" name="">
             <a:extLst xmlns:a="http://schemas.openxmlformats.org/drawingml/2006/main">
               <a:ext uri="{FF2B5EF4-FFF2-40B4-BE49-F238E27FC236}">
-                <a16:creationId xmlns:a16="http://schemas.microsoft.com/office/drawing/2014/main" id="{26B7DFD3-B09F-4787-BCBB-2965A9A18B7C}"/>
-              </a:ext>
-            </a:extLst>
-          </p:cNvPr>
-          <p:cNvSpPr>
-            <a:spLocks xmlns:a="http://schemas.openxmlformats.org/drawingml/2006/main" noGrp="1"/>
-          </p:cNvSpPr>
-          <p:nvPr/>
-        </p:nvSpPr>
-        <p:spPr>
-          <a:xfrm xmlns:a="http://schemas.openxmlformats.org/drawingml/2006/main">
-            <a:off x="609600" y="1657350"/>
-            <a:ext cx="10477500" cy="742950"/>
-          </a:xfrm>
-          <a:prstGeom xmlns:a="http://schemas.openxmlformats.org/drawingml/2006/main" prst="rect">
-            <a:avLst/>
-          </a:prstGeom>
-          <a:noFill xmlns:a="http://schemas.openxmlformats.org/drawingml/2006/main"/>
-          <a:ln xmlns:a="http://schemas.openxmlformats.org/drawingml/2006/main" w="0">
-            <a:noFill/>
-          </a:ln>
-        </p:spPr>
-        <p:txBody>
-          <a:bodyPr xmlns:a="http://schemas.openxmlformats.org/drawingml/2006/main">
-            <a:noAutofit/>
-          </a:bodyPr>
-          <a:lstStyle xmlns:a="http://schemas.openxmlformats.org/drawingml/2006/main"/>
-          <a:p xmlns:a="http://schemas.openxmlformats.org/drawingml/2006/main">
-            <a:pPr>
-              <a:defRPr sz="4350" b="1">
-                <a:solidFill>
-                  <a:srgbClr val="086C61"/>
-                </a:solidFill>
-                <a:latin typeface="Arial"/>
-                <a:ea typeface="Arial"/>
-                <a:cs typeface="Arial"/>
-              </a:defRPr>
-            </a:pPr>
-            <a:r>
-              <a:rPr sz="4350" b="1">
-                <a:solidFill>
-                  <a:srgbClr val="086C61"/>
-                </a:solidFill>
-                <a:latin typeface="Arial"/>
-                <a:ea typeface="Arial"/>
-                <a:cs typeface="Arial"/>
-              </a:rPr>
-              <a:t>y = 2x + 50</a:t>
+                <a16:creationId xmlns:a16="http://schemas.microsoft.com/office/drawing/2014/main" id="{F8182933-B887-417A-B021-A4A393A17AB6}"/>
+              </a:ext>
+            </a:extLst>
+          </p:cNvPr>
+          <p:cNvSpPr>
+            <a:spLocks xmlns:a="http://schemas.openxmlformats.org/drawingml/2006/main" noGrp="1"/>
+          </p:cNvSpPr>
+          <p:nvPr/>
+        </p:nvSpPr>
+        <p:spPr>
+          <a:xfrm xmlns:a="http://schemas.openxmlformats.org/drawingml/2006/main">
+            <a:off x="609600" y="1714500"/>
+            <a:ext cx="10763250" cy="495300"/>
+          </a:xfrm>
+          <a:prstGeom xmlns:a="http://schemas.openxmlformats.org/drawingml/2006/main" prst="rect">
+            <a:avLst/>
+          </a:prstGeom>
+          <a:noFill xmlns:a="http://schemas.openxmlformats.org/drawingml/2006/main"/>
+          <a:ln xmlns:a="http://schemas.openxmlformats.org/drawingml/2006/main" w="0">
+            <a:noFill/>
+          </a:ln>
+        </p:spPr>
+        <p:txBody>
+          <a:bodyPr xmlns:a="http://schemas.openxmlformats.org/drawingml/2006/main">
+            <a:noAutofit/>
+          </a:bodyPr>
+          <a:lstStyle xmlns:a="http://schemas.openxmlformats.org/drawingml/2006/main"/>
+          <a:p xmlns:a="http://schemas.openxmlformats.org/drawingml/2006/main">
+            <a:pPr>
+              <a:defRPr sz="2550" b="0">
+                <a:solidFill>
+                  <a:srgbClr val="173C43"/>
+                </a:solidFill>
+                <a:latin typeface="Heiti TC"/>
+                <a:ea typeface="Heiti TC"/>
+                <a:cs typeface="Heiti TC"/>
+              </a:defRPr>
+            </a:pPr>
+            <a:r>
+              <a:rPr sz="2550" b="0">
+                <a:solidFill>
+                  <a:srgbClr val="173C43"/>
+                </a:solidFill>
+                <a:latin typeface="Heiti TC"/>
+                <a:ea typeface="Heiti TC"/>
+                <a:cs typeface="Heiti TC"/>
+              </a:rPr>
+              <a:t>學習時：用一些例子找出模式</a:t>
             </a:r>
           </a:p>
         </p:txBody>
@@ -10190,36 +13314,93 @@
           <p:cNvPr id="5" name="">
             <a:extLst xmlns:a="http://schemas.openxmlformats.org/drawingml/2006/main">
               <a:ext uri="{FF2B5EF4-FFF2-40B4-BE49-F238E27FC236}">
-                <a16:creationId xmlns:a16="http://schemas.microsoft.com/office/drawing/2014/main" id="{B4D096D1-C947-4F5C-A971-D646D4D9AE27}"/>
-              </a:ext>
-            </a:extLst>
-          </p:cNvPr>
-          <p:cNvSpPr>
-            <a:spLocks xmlns:a="http://schemas.openxmlformats.org/drawingml/2006/main" noGrp="1"/>
-          </p:cNvSpPr>
-          <p:nvPr/>
-        </p:nvSpPr>
-        <p:spPr>
-          <a:xfrm xmlns:a="http://schemas.openxmlformats.org/drawingml/2006/main">
-            <a:off x="609600" y="2743200"/>
-            <a:ext cx="5143500" cy="495300"/>
-          </a:xfrm>
-          <a:prstGeom xmlns:a="http://schemas.openxmlformats.org/drawingml/2006/main" prst="rect">
-            <a:avLst/>
-          </a:prstGeom>
-          <a:noFill xmlns:a="http://schemas.openxmlformats.org/drawingml/2006/main"/>
-          <a:ln xmlns:a="http://schemas.openxmlformats.org/drawingml/2006/main" w="0">
-            <a:noFill/>
-          </a:ln>
-        </p:spPr>
-        <p:txBody>
-          <a:bodyPr xmlns:a="http://schemas.openxmlformats.org/drawingml/2006/main">
-            <a:noAutofit/>
-          </a:bodyPr>
-          <a:lstStyle xmlns:a="http://schemas.openxmlformats.org/drawingml/2006/main"/>
-          <a:p xmlns:a="http://schemas.openxmlformats.org/drawingml/2006/main">
-            <a:pPr>
-              <a:defRPr sz="2025" b="0">
+                <a16:creationId xmlns:a16="http://schemas.microsoft.com/office/drawing/2014/main" id="{B54E52E0-5578-4C4B-A232-7E363C557D10}"/>
+              </a:ext>
+            </a:extLst>
+          </p:cNvPr>
+          <p:cNvSpPr>
+            <a:spLocks xmlns:a="http://schemas.openxmlformats.org/drawingml/2006/main" noGrp="1"/>
+          </p:cNvSpPr>
+          <p:nvPr/>
+        </p:nvSpPr>
+        <p:spPr>
+          <a:xfrm xmlns:a="http://schemas.openxmlformats.org/drawingml/2006/main">
+            <a:off x="609600" y="2181225"/>
+            <a:ext cx="10763250" cy="457200"/>
+          </a:xfrm>
+          <a:prstGeom xmlns:a="http://schemas.openxmlformats.org/drawingml/2006/main" prst="rect">
+            <a:avLst/>
+          </a:prstGeom>
+          <a:noFill xmlns:a="http://schemas.openxmlformats.org/drawingml/2006/main"/>
+          <a:ln xmlns:a="http://schemas.openxmlformats.org/drawingml/2006/main" w="0">
+            <a:noFill/>
+          </a:ln>
+        </p:spPr>
+        <p:txBody>
+          <a:bodyPr xmlns:a="http://schemas.openxmlformats.org/drawingml/2006/main">
+            <a:noAutofit/>
+          </a:bodyPr>
+          <a:lstStyle xmlns:a="http://schemas.openxmlformats.org/drawingml/2006/main"/>
+          <a:p xmlns:a="http://schemas.openxmlformats.org/drawingml/2006/main">
+            <a:pPr>
+              <a:defRPr sz="1950" b="0">
+                <a:solidFill>
+                  <a:srgbClr val="526B70"/>
+                </a:solidFill>
+                <a:latin typeface="Arial"/>
+                <a:ea typeface="Arial"/>
+                <a:cs typeface="Arial"/>
+              </a:defRPr>
+            </a:pPr>
+            <a:r>
+              <a:rPr sz="1950" b="0">
+                <a:solidFill>
+                  <a:srgbClr val="526B70"/>
+                </a:solidFill>
+                <a:latin typeface="Arial"/>
+                <a:ea typeface="Arial"/>
+                <a:cs typeface="Arial"/>
+              </a:rPr>
+              <a:t>During learning: use some examples to find a pattern</a:t>
+            </a:r>
+          </a:p>
+        </p:txBody>
+      </p:sp>
+      <p:sp>
+        <p:nvSpPr>
+          <p:cNvPr id="6" name="">
+            <a:extLst xmlns:a="http://schemas.openxmlformats.org/drawingml/2006/main">
+              <a:ext uri="{FF2B5EF4-FFF2-40B4-BE49-F238E27FC236}">
+                <a16:creationId xmlns:a16="http://schemas.microsoft.com/office/drawing/2014/main" id="{44DB1A13-5DBB-450C-A1B2-BB29A688E04E}"/>
+              </a:ext>
+            </a:extLst>
+          </p:cNvPr>
+          <p:cNvSpPr>
+            <a:spLocks xmlns:a="http://schemas.openxmlformats.org/drawingml/2006/main" noGrp="1"/>
+          </p:cNvSpPr>
+          <p:nvPr/>
+        </p:nvSpPr>
+        <p:spPr>
+          <a:xfrm xmlns:a="http://schemas.openxmlformats.org/drawingml/2006/main">
+            <a:off x="609600" y="3133725"/>
+            <a:ext cx="10763250" cy="495300"/>
+          </a:xfrm>
+          <a:prstGeom xmlns:a="http://schemas.openxmlformats.org/drawingml/2006/main" prst="rect">
+            <a:avLst/>
+          </a:prstGeom>
+          <a:noFill xmlns:a="http://schemas.openxmlformats.org/drawingml/2006/main"/>
+          <a:ln xmlns:a="http://schemas.openxmlformats.org/drawingml/2006/main" w="0">
+            <a:noFill/>
+          </a:ln>
+        </p:spPr>
+        <p:txBody>
+          <a:bodyPr xmlns:a="http://schemas.openxmlformats.org/drawingml/2006/main">
+            <a:noAutofit/>
+          </a:bodyPr>
+          <a:lstStyle xmlns:a="http://schemas.openxmlformats.org/drawingml/2006/main"/>
+          <a:p xmlns:a="http://schemas.openxmlformats.org/drawingml/2006/main">
+            <a:pPr>
+              <a:defRPr sz="2550" b="0">
                 <a:solidFill>
                   <a:srgbClr val="173C43"/>
                 </a:solidFill>
@@ -10229,7 +13410,7 @@
               </a:defRPr>
             </a:pPr>
             <a:r>
-              <a:rPr sz="2025" b="0">
+              <a:rPr sz="2550" b="0">
                 <a:solidFill>
                   <a:srgbClr val="173C43"/>
                 </a:solidFill>
@@ -10237,29 +13418,143 @@
                 <a:ea typeface="Heiti TC"/>
                 <a:cs typeface="Heiti TC"/>
               </a:rPr>
-              <a:t>m = 2：模型中每小時約多 2 分</a:t>
-            </a:r>
-          </a:p>
-        </p:txBody>
-      </p:sp>
-      <p:sp>
-        <p:nvSpPr>
-          <p:cNvPr id="6" name="">
-            <a:extLst xmlns:a="http://schemas.openxmlformats.org/drawingml/2006/main">
-              <a:ext uri="{FF2B5EF4-FFF2-40B4-BE49-F238E27FC236}">
-                <a16:creationId xmlns:a16="http://schemas.microsoft.com/office/drawing/2014/main" id="{E6119A6D-F59E-4021-8013-EA53C0AA0324}"/>
-              </a:ext>
-            </a:extLst>
-          </p:cNvPr>
-          <p:cNvSpPr>
-            <a:spLocks xmlns:a="http://schemas.openxmlformats.org/drawingml/2006/main" noGrp="1"/>
-          </p:cNvSpPr>
-          <p:nvPr/>
-        </p:nvSpPr>
-        <p:spPr>
-          <a:xfrm xmlns:a="http://schemas.openxmlformats.org/drawingml/2006/main">
-            <a:off x="609600" y="3209925"/>
-            <a:ext cx="5143500" cy="457200"/>
+              <a:t>檢查時：用新例子，比較預測與實際結果</a:t>
+            </a:r>
+          </a:p>
+        </p:txBody>
+      </p:sp>
+      <p:sp>
+        <p:nvSpPr>
+          <p:cNvPr id="7" name="">
+            <a:extLst xmlns:a="http://schemas.openxmlformats.org/drawingml/2006/main">
+              <a:ext uri="{FF2B5EF4-FFF2-40B4-BE49-F238E27FC236}">
+                <a16:creationId xmlns:a16="http://schemas.microsoft.com/office/drawing/2014/main" id="{D9862FA2-2556-4C5B-B1BC-262607A84EB1}"/>
+              </a:ext>
+            </a:extLst>
+          </p:cNvPr>
+          <p:cNvSpPr>
+            <a:spLocks xmlns:a="http://schemas.openxmlformats.org/drawingml/2006/main" noGrp="1"/>
+          </p:cNvSpPr>
+          <p:nvPr/>
+        </p:nvSpPr>
+        <p:spPr>
+          <a:xfrm xmlns:a="http://schemas.openxmlformats.org/drawingml/2006/main">
+            <a:off x="609600" y="3600450"/>
+            <a:ext cx="10763250" cy="457200"/>
+          </a:xfrm>
+          <a:prstGeom xmlns:a="http://schemas.openxmlformats.org/drawingml/2006/main" prst="rect">
+            <a:avLst/>
+          </a:prstGeom>
+          <a:noFill xmlns:a="http://schemas.openxmlformats.org/drawingml/2006/main"/>
+          <a:ln xmlns:a="http://schemas.openxmlformats.org/drawingml/2006/main" w="0">
+            <a:noFill/>
+          </a:ln>
+        </p:spPr>
+        <p:txBody>
+          <a:bodyPr xmlns:a="http://schemas.openxmlformats.org/drawingml/2006/main">
+            <a:noAutofit/>
+          </a:bodyPr>
+          <a:lstStyle xmlns:a="http://schemas.openxmlformats.org/drawingml/2006/main"/>
+          <a:p xmlns:a="http://schemas.openxmlformats.org/drawingml/2006/main">
+            <a:pPr>
+              <a:defRPr sz="1950" b="0">
+                <a:solidFill>
+                  <a:srgbClr val="526B70"/>
+                </a:solidFill>
+                <a:latin typeface="Arial"/>
+                <a:ea typeface="Arial"/>
+                <a:cs typeface="Arial"/>
+              </a:defRPr>
+            </a:pPr>
+            <a:r>
+              <a:rPr sz="1950" b="0">
+                <a:solidFill>
+                  <a:srgbClr val="526B70"/>
+                </a:solidFill>
+                <a:latin typeface="Arial"/>
+                <a:ea typeface="Arial"/>
+                <a:cs typeface="Arial"/>
+              </a:rPr>
+              <a:t>During checking: compare predictions with actual outcomes on new examples</a:t>
+            </a:r>
+          </a:p>
+        </p:txBody>
+      </p:sp>
+      <p:sp>
+        <p:nvSpPr>
+          <p:cNvPr id="8" name="">
+            <a:extLst xmlns:a="http://schemas.openxmlformats.org/drawingml/2006/main">
+              <a:ext uri="{FF2B5EF4-FFF2-40B4-BE49-F238E27FC236}">
+                <a16:creationId xmlns:a16="http://schemas.microsoft.com/office/drawing/2014/main" id="{29A5530F-1090-45A8-BCC0-FCCAD12DC254}"/>
+              </a:ext>
+            </a:extLst>
+          </p:cNvPr>
+          <p:cNvSpPr>
+            <a:spLocks xmlns:a="http://schemas.openxmlformats.org/drawingml/2006/main" noGrp="1"/>
+          </p:cNvSpPr>
+          <p:nvPr/>
+        </p:nvSpPr>
+        <p:spPr>
+          <a:xfrm xmlns:a="http://schemas.openxmlformats.org/drawingml/2006/main">
+            <a:off x="609600" y="4552950"/>
+            <a:ext cx="10763250" cy="495300"/>
+          </a:xfrm>
+          <a:prstGeom xmlns:a="http://schemas.openxmlformats.org/drawingml/2006/main" prst="rect">
+            <a:avLst/>
+          </a:prstGeom>
+          <a:noFill xmlns:a="http://schemas.openxmlformats.org/drawingml/2006/main"/>
+          <a:ln xmlns:a="http://schemas.openxmlformats.org/drawingml/2006/main" w="0">
+            <a:noFill/>
+          </a:ln>
+        </p:spPr>
+        <p:txBody>
+          <a:bodyPr xmlns:a="http://schemas.openxmlformats.org/drawingml/2006/main">
+            <a:noAutofit/>
+          </a:bodyPr>
+          <a:lstStyle xmlns:a="http://schemas.openxmlformats.org/drawingml/2006/main"/>
+          <a:p xmlns:a="http://schemas.openxmlformats.org/drawingml/2006/main">
+            <a:pPr>
+              <a:defRPr sz="2400" b="0">
+                <a:solidFill>
+                  <a:srgbClr val="173C43"/>
+                </a:solidFill>
+                <a:latin typeface="Heiti TC"/>
+                <a:ea typeface="Heiti TC"/>
+                <a:cs typeface="Heiti TC"/>
+              </a:defRPr>
+            </a:pPr>
+            <a:r>
+              <a:rPr sz="2400" b="0">
+                <a:solidFill>
+                  <a:srgbClr val="173C43"/>
+                </a:solidFill>
+                <a:latin typeface="Heiti TC"/>
+                <a:ea typeface="Heiti TC"/>
+                <a:cs typeface="Heiti TC"/>
+              </a:rPr>
+              <a:t>數據的品質會影響預測；模型的答案也可能有誤</a:t>
+            </a:r>
+          </a:p>
+        </p:txBody>
+      </p:sp>
+      <p:sp>
+        <p:nvSpPr>
+          <p:cNvPr id="9" name="">
+            <a:extLst xmlns:a="http://schemas.openxmlformats.org/drawingml/2006/main">
+              <a:ext uri="{FF2B5EF4-FFF2-40B4-BE49-F238E27FC236}">
+                <a16:creationId xmlns:a16="http://schemas.microsoft.com/office/drawing/2014/main" id="{47D7AFC1-7E3D-4F22-B7F0-24BF35705E8A}"/>
+              </a:ext>
+            </a:extLst>
+          </p:cNvPr>
+          <p:cNvSpPr>
+            <a:spLocks xmlns:a="http://schemas.openxmlformats.org/drawingml/2006/main" noGrp="1"/>
+          </p:cNvSpPr>
+          <p:nvPr/>
+        </p:nvSpPr>
+        <p:spPr>
+          <a:xfrm xmlns:a="http://schemas.openxmlformats.org/drawingml/2006/main">
+            <a:off x="609600" y="5019675"/>
+            <a:ext cx="10763250" cy="457200"/>
           </a:xfrm>
           <a:prstGeom xmlns:a="http://schemas.openxmlformats.org/drawingml/2006/main" prst="rect">
             <a:avLst/>
@@ -10294,178 +13589,7 @@
                 <a:ea typeface="Arial"/>
                 <a:cs typeface="Arial"/>
               </a:rPr>
-              <a:t>In this model, m = 2 marks per extra hour</a:t>
-            </a:r>
-          </a:p>
-        </p:txBody>
-      </p:sp>
-      <p:sp>
-        <p:nvSpPr>
-          <p:cNvPr id="7" name="">
-            <a:extLst xmlns:a="http://schemas.openxmlformats.org/drawingml/2006/main">
-              <a:ext uri="{FF2B5EF4-FFF2-40B4-BE49-F238E27FC236}">
-                <a16:creationId xmlns:a16="http://schemas.microsoft.com/office/drawing/2014/main" id="{2EA57632-2557-431D-BB76-A7E22B5768F3}"/>
-              </a:ext>
-            </a:extLst>
-          </p:cNvPr>
-          <p:cNvSpPr>
-            <a:spLocks xmlns:a="http://schemas.openxmlformats.org/drawingml/2006/main" noGrp="1"/>
-          </p:cNvSpPr>
-          <p:nvPr/>
-        </p:nvSpPr>
-        <p:spPr>
-          <a:xfrm xmlns:a="http://schemas.openxmlformats.org/drawingml/2006/main">
-            <a:off x="6381750" y="2743200"/>
-            <a:ext cx="5143500" cy="495300"/>
-          </a:xfrm>
-          <a:prstGeom xmlns:a="http://schemas.openxmlformats.org/drawingml/2006/main" prst="rect">
-            <a:avLst/>
-          </a:prstGeom>
-          <a:noFill xmlns:a="http://schemas.openxmlformats.org/drawingml/2006/main"/>
-          <a:ln xmlns:a="http://schemas.openxmlformats.org/drawingml/2006/main" w="0">
-            <a:noFill/>
-          </a:ln>
-        </p:spPr>
-        <p:txBody>
-          <a:bodyPr xmlns:a="http://schemas.openxmlformats.org/drawingml/2006/main">
-            <a:noAutofit/>
-          </a:bodyPr>
-          <a:lstStyle xmlns:a="http://schemas.openxmlformats.org/drawingml/2006/main"/>
-          <a:p xmlns:a="http://schemas.openxmlformats.org/drawingml/2006/main">
-            <a:pPr>
-              <a:defRPr sz="2025" b="0">
-                <a:solidFill>
-                  <a:srgbClr val="173C43"/>
-                </a:solidFill>
-                <a:latin typeface="Heiti TC"/>
-                <a:ea typeface="Heiti TC"/>
-                <a:cs typeface="Heiti TC"/>
-              </a:defRPr>
-            </a:pPr>
-            <a:r>
-              <a:rPr sz="2025" b="0">
-                <a:solidFill>
-                  <a:srgbClr val="173C43"/>
-                </a:solidFill>
-                <a:latin typeface="Heiti TC"/>
-                <a:ea typeface="Heiti TC"/>
-                <a:cs typeface="Heiti TC"/>
-              </a:rPr>
-              <a:t>c = 50：0 小時時估計的成績</a:t>
-            </a:r>
-          </a:p>
-        </p:txBody>
-      </p:sp>
-      <p:sp>
-        <p:nvSpPr>
-          <p:cNvPr id="8" name="">
-            <a:extLst xmlns:a="http://schemas.openxmlformats.org/drawingml/2006/main">
-              <a:ext uri="{FF2B5EF4-FFF2-40B4-BE49-F238E27FC236}">
-                <a16:creationId xmlns:a16="http://schemas.microsoft.com/office/drawing/2014/main" id="{B9BBF76A-A319-4292-B928-9C36DBA6E37E}"/>
-              </a:ext>
-            </a:extLst>
-          </p:cNvPr>
-          <p:cNvSpPr>
-            <a:spLocks xmlns:a="http://schemas.openxmlformats.org/drawingml/2006/main" noGrp="1"/>
-          </p:cNvSpPr>
-          <p:nvPr/>
-        </p:nvSpPr>
-        <p:spPr>
-          <a:xfrm xmlns:a="http://schemas.openxmlformats.org/drawingml/2006/main">
-            <a:off x="6381750" y="3209925"/>
-            <a:ext cx="5143500" cy="457200"/>
-          </a:xfrm>
-          <a:prstGeom xmlns:a="http://schemas.openxmlformats.org/drawingml/2006/main" prst="rect">
-            <a:avLst/>
-          </a:prstGeom>
-          <a:noFill xmlns:a="http://schemas.openxmlformats.org/drawingml/2006/main"/>
-          <a:ln xmlns:a="http://schemas.openxmlformats.org/drawingml/2006/main" w="0">
-            <a:noFill/>
-          </a:ln>
-        </p:spPr>
-        <p:txBody>
-          <a:bodyPr xmlns:a="http://schemas.openxmlformats.org/drawingml/2006/main">
-            <a:noAutofit/>
-          </a:bodyPr>
-          <a:lstStyle xmlns:a="http://schemas.openxmlformats.org/drawingml/2006/main"/>
-          <a:p xmlns:a="http://schemas.openxmlformats.org/drawingml/2006/main">
-            <a:pPr>
-              <a:defRPr sz="1800" b="0">
-                <a:solidFill>
-                  <a:srgbClr val="526B70"/>
-                </a:solidFill>
-                <a:latin typeface="Arial"/>
-                <a:ea typeface="Arial"/>
-                <a:cs typeface="Arial"/>
-              </a:defRPr>
-            </a:pPr>
-            <a:r>
-              <a:rPr sz="1800" b="0">
-                <a:solidFill>
-                  <a:srgbClr val="526B70"/>
-                </a:solidFill>
-                <a:latin typeface="Arial"/>
-                <a:ea typeface="Arial"/>
-                <a:cs typeface="Arial"/>
-              </a:rPr>
-              <a:t>c = 50: estimated score at 0 hours</a:t>
-            </a:r>
-          </a:p>
-        </p:txBody>
-      </p:sp>
-      <p:sp>
-        <p:nvSpPr>
-          <p:cNvPr id="9" name="">
-            <a:extLst xmlns:a="http://schemas.openxmlformats.org/drawingml/2006/main">
-              <a:ext uri="{FF2B5EF4-FFF2-40B4-BE49-F238E27FC236}">
-                <a16:creationId xmlns:a16="http://schemas.microsoft.com/office/drawing/2014/main" id="{0C78E2DA-B396-4620-9212-A70439E84988}"/>
-              </a:ext>
-            </a:extLst>
-          </p:cNvPr>
-          <p:cNvSpPr>
-            <a:spLocks xmlns:a="http://schemas.openxmlformats.org/drawingml/2006/main" noGrp="1"/>
-          </p:cNvSpPr>
-          <p:nvPr/>
-        </p:nvSpPr>
-        <p:spPr>
-          <a:xfrm xmlns:a="http://schemas.openxmlformats.org/drawingml/2006/main">
-            <a:off x="609600" y="3952875"/>
-            <a:ext cx="5143500" cy="495300"/>
-          </a:xfrm>
-          <a:prstGeom xmlns:a="http://schemas.openxmlformats.org/drawingml/2006/main" prst="rect">
-            <a:avLst/>
-          </a:prstGeom>
-          <a:noFill xmlns:a="http://schemas.openxmlformats.org/drawingml/2006/main"/>
-          <a:ln xmlns:a="http://schemas.openxmlformats.org/drawingml/2006/main" w="0">
-            <a:noFill/>
-          </a:ln>
-        </p:spPr>
-        <p:txBody>
-          <a:bodyPr xmlns:a="http://schemas.openxmlformats.org/drawingml/2006/main">
-            <a:noAutofit/>
-          </a:bodyPr>
-          <a:lstStyle xmlns:a="http://schemas.openxmlformats.org/drawingml/2006/main"/>
-          <a:p xmlns:a="http://schemas.openxmlformats.org/drawingml/2006/main">
-            <a:pPr>
-              <a:defRPr sz="2400" b="0">
-                <a:solidFill>
-                  <a:srgbClr val="173C43"/>
-                </a:solidFill>
-                <a:latin typeface="Heiti TC"/>
-                <a:ea typeface="Heiti TC"/>
-                <a:cs typeface="Heiti TC"/>
-              </a:defRPr>
-            </a:pPr>
-            <a:r>
-              <a:rPr sz="2400" b="0">
-                <a:solidFill>
-                  <a:srgbClr val="173C43"/>
-                </a:solidFill>
-                <a:latin typeface="Heiti TC"/>
-                <a:ea typeface="Heiti TC"/>
-                <a:cs typeface="Heiti TC"/>
-              </a:rPr>
-              <a:t>3.5 小時：約 57 分</a:t>
+              <a:t>Data quality affects predictions. A model can still give a wrong answer.</a:t>
             </a:r>
           </a:p>
         </p:txBody>
@@ -10475,282 +13599,54 @@
           <p:cNvPr id="10" name="">
             <a:extLst xmlns:a="http://schemas.openxmlformats.org/drawingml/2006/main">
               <a:ext uri="{FF2B5EF4-FFF2-40B4-BE49-F238E27FC236}">
-                <a16:creationId xmlns:a16="http://schemas.microsoft.com/office/drawing/2014/main" id="{CDEF4228-4D19-44C6-BD40-0FC5B01BB250}"/>
-              </a:ext>
-            </a:extLst>
-          </p:cNvPr>
-          <p:cNvSpPr>
-            <a:spLocks xmlns:a="http://schemas.openxmlformats.org/drawingml/2006/main" noGrp="1"/>
-          </p:cNvSpPr>
-          <p:nvPr/>
-        </p:nvSpPr>
-        <p:spPr>
-          <a:xfrm xmlns:a="http://schemas.openxmlformats.org/drawingml/2006/main">
-            <a:off x="609600" y="4419600"/>
-            <a:ext cx="5143500" cy="457200"/>
-          </a:xfrm>
-          <a:prstGeom xmlns:a="http://schemas.openxmlformats.org/drawingml/2006/main" prst="rect">
-            <a:avLst/>
-          </a:prstGeom>
-          <a:noFill xmlns:a="http://schemas.openxmlformats.org/drawingml/2006/main"/>
-          <a:ln xmlns:a="http://schemas.openxmlformats.org/drawingml/2006/main" w="0">
-            <a:noFill/>
-          </a:ln>
-        </p:spPr>
-        <p:txBody>
-          <a:bodyPr xmlns:a="http://schemas.openxmlformats.org/drawingml/2006/main">
-            <a:noAutofit/>
-          </a:bodyPr>
-          <a:lstStyle xmlns:a="http://schemas.openxmlformats.org/drawingml/2006/main"/>
-          <a:p xmlns:a="http://schemas.openxmlformats.org/drawingml/2006/main">
-            <a:pPr>
-              <a:defRPr sz="1800" b="0">
-                <a:solidFill>
-                  <a:srgbClr val="526B70"/>
-                </a:solidFill>
-                <a:latin typeface="Arial"/>
-                <a:ea typeface="Arial"/>
-                <a:cs typeface="Arial"/>
-              </a:defRPr>
-            </a:pPr>
-            <a:r>
-              <a:rPr sz="1800" b="0">
-                <a:solidFill>
-                  <a:srgbClr val="526B70"/>
-                </a:solidFill>
-                <a:latin typeface="Arial"/>
-                <a:ea typeface="Arial"/>
-                <a:cs typeface="Arial"/>
-              </a:rPr>
-              <a:t>3.5 hours: about 57 marks</a:t>
-            </a:r>
-          </a:p>
-        </p:txBody>
-      </p:sp>
-      <p:sp>
-        <p:nvSpPr>
-          <p:cNvPr id="11" name="">
-            <a:extLst xmlns:a="http://schemas.openxmlformats.org/drawingml/2006/main">
-              <a:ext uri="{FF2B5EF4-FFF2-40B4-BE49-F238E27FC236}">
-                <a16:creationId xmlns:a16="http://schemas.microsoft.com/office/drawing/2014/main" id="{5E8C01E5-19DC-4EF3-ADFA-BE57413C8AF1}"/>
-              </a:ext>
-            </a:extLst>
-          </p:cNvPr>
-          <p:cNvSpPr>
-            <a:spLocks xmlns:a="http://schemas.openxmlformats.org/drawingml/2006/main" noGrp="1"/>
-          </p:cNvSpPr>
-          <p:nvPr/>
-        </p:nvSpPr>
-        <p:spPr>
-          <a:xfrm xmlns:a="http://schemas.openxmlformats.org/drawingml/2006/main">
-            <a:off x="6381750" y="3952875"/>
-            <a:ext cx="5143500" cy="495300"/>
-          </a:xfrm>
-          <a:prstGeom xmlns:a="http://schemas.openxmlformats.org/drawingml/2006/main" prst="rect">
-            <a:avLst/>
-          </a:prstGeom>
-          <a:noFill xmlns:a="http://schemas.openxmlformats.org/drawingml/2006/main"/>
-          <a:ln xmlns:a="http://schemas.openxmlformats.org/drawingml/2006/main" w="0">
-            <a:noFill/>
-          </a:ln>
-        </p:spPr>
-        <p:txBody>
-          <a:bodyPr xmlns:a="http://schemas.openxmlformats.org/drawingml/2006/main">
-            <a:noAutofit/>
-          </a:bodyPr>
-          <a:lstStyle xmlns:a="http://schemas.openxmlformats.org/drawingml/2006/main"/>
-          <a:p xmlns:a="http://schemas.openxmlformats.org/drawingml/2006/main">
-            <a:pPr>
-              <a:defRPr sz="2400" b="0">
-                <a:solidFill>
-                  <a:srgbClr val="173C43"/>
-                </a:solidFill>
-                <a:latin typeface="Heiti TC"/>
-                <a:ea typeface="Heiti TC"/>
-                <a:cs typeface="Heiti TC"/>
-              </a:defRPr>
-            </a:pPr>
-            <a:r>
-              <a:rPr sz="2400" b="0">
-                <a:solidFill>
-                  <a:srgbClr val="173C43"/>
-                </a:solidFill>
-                <a:latin typeface="Heiti TC"/>
-                <a:ea typeface="Heiti TC"/>
-                <a:cs typeface="Heiti TC"/>
-              </a:rPr>
-              <a:t>10 小時：約 70 分</a:t>
-            </a:r>
-          </a:p>
-        </p:txBody>
-      </p:sp>
-      <p:sp>
-        <p:nvSpPr>
-          <p:cNvPr id="12" name="">
-            <a:extLst xmlns:a="http://schemas.openxmlformats.org/drawingml/2006/main">
-              <a:ext uri="{FF2B5EF4-FFF2-40B4-BE49-F238E27FC236}">
-                <a16:creationId xmlns:a16="http://schemas.microsoft.com/office/drawing/2014/main" id="{0978DFED-C6DE-461A-985D-E3A8D4B35599}"/>
-              </a:ext>
-            </a:extLst>
-          </p:cNvPr>
-          <p:cNvSpPr>
-            <a:spLocks xmlns:a="http://schemas.openxmlformats.org/drawingml/2006/main" noGrp="1"/>
-          </p:cNvSpPr>
-          <p:nvPr/>
-        </p:nvSpPr>
-        <p:spPr>
-          <a:xfrm xmlns:a="http://schemas.openxmlformats.org/drawingml/2006/main">
-            <a:off x="6381750" y="4419600"/>
-            <a:ext cx="5143500" cy="457200"/>
-          </a:xfrm>
-          <a:prstGeom xmlns:a="http://schemas.openxmlformats.org/drawingml/2006/main" prst="rect">
-            <a:avLst/>
-          </a:prstGeom>
-          <a:noFill xmlns:a="http://schemas.openxmlformats.org/drawingml/2006/main"/>
-          <a:ln xmlns:a="http://schemas.openxmlformats.org/drawingml/2006/main" w="0">
-            <a:noFill/>
-          </a:ln>
-        </p:spPr>
-        <p:txBody>
-          <a:bodyPr xmlns:a="http://schemas.openxmlformats.org/drawingml/2006/main">
-            <a:noAutofit/>
-          </a:bodyPr>
-          <a:lstStyle xmlns:a="http://schemas.openxmlformats.org/drawingml/2006/main"/>
-          <a:p xmlns:a="http://schemas.openxmlformats.org/drawingml/2006/main">
-            <a:pPr>
-              <a:defRPr sz="1800" b="0">
-                <a:solidFill>
-                  <a:srgbClr val="526B70"/>
-                </a:solidFill>
-                <a:latin typeface="Arial"/>
-                <a:ea typeface="Arial"/>
-                <a:cs typeface="Arial"/>
-              </a:defRPr>
-            </a:pPr>
-            <a:r>
-              <a:rPr sz="1800" b="0">
-                <a:solidFill>
-                  <a:srgbClr val="526B70"/>
-                </a:solidFill>
-                <a:latin typeface="Arial"/>
-                <a:ea typeface="Arial"/>
-                <a:cs typeface="Arial"/>
-              </a:rPr>
-              <a:t>10 hours: about 70 marks</a:t>
-            </a:r>
-          </a:p>
-        </p:txBody>
-      </p:sp>
-      <p:sp>
-        <p:nvSpPr>
-          <p:cNvPr id="13" name="">
-            <a:extLst xmlns:a="http://schemas.openxmlformats.org/drawingml/2006/main">
-              <a:ext uri="{FF2B5EF4-FFF2-40B4-BE49-F238E27FC236}">
-                <a16:creationId xmlns:a16="http://schemas.microsoft.com/office/drawing/2014/main" id="{62C250AA-E2EF-47D8-AAFD-303F5323C6A2}"/>
-              </a:ext>
-            </a:extLst>
-          </p:cNvPr>
-          <p:cNvSpPr>
-            <a:spLocks xmlns:a="http://schemas.openxmlformats.org/drawingml/2006/main" noGrp="1"/>
-          </p:cNvSpPr>
-          <p:nvPr/>
-        </p:nvSpPr>
-        <p:spPr>
-          <a:xfrm xmlns:a="http://schemas.openxmlformats.org/drawingml/2006/main">
-            <a:off x="609600" y="5162550"/>
-            <a:ext cx="10763250" cy="495300"/>
-          </a:xfrm>
-          <a:prstGeom xmlns:a="http://schemas.openxmlformats.org/drawingml/2006/main" prst="rect">
-            <a:avLst/>
-          </a:prstGeom>
-          <a:noFill xmlns:a="http://schemas.openxmlformats.org/drawingml/2006/main"/>
-          <a:ln xmlns:a="http://schemas.openxmlformats.org/drawingml/2006/main" w="0">
-            <a:noFill/>
-          </a:ln>
-        </p:spPr>
-        <p:txBody>
-          <a:bodyPr xmlns:a="http://schemas.openxmlformats.org/drawingml/2006/main">
-            <a:noAutofit/>
-          </a:bodyPr>
-          <a:lstStyle xmlns:a="http://schemas.openxmlformats.org/drawingml/2006/main"/>
-          <a:p xmlns:a="http://schemas.openxmlformats.org/drawingml/2006/main">
-            <a:pPr>
-              <a:defRPr sz="1950" b="0">
-                <a:solidFill>
-                  <a:srgbClr val="173C43"/>
-                </a:solidFill>
-                <a:latin typeface="Heiti TC"/>
-                <a:ea typeface="Heiti TC"/>
-                <a:cs typeface="Heiti TC"/>
-              </a:defRPr>
-            </a:pPr>
-            <a:r>
-              <a:rPr sz="1950" b="0">
-                <a:solidFill>
-                  <a:srgbClr val="173C43"/>
-                </a:solidFill>
-                <a:latin typeface="Heiti TC"/>
-                <a:ea typeface="Heiti TC"/>
-                <a:cs typeface="Heiti TC"/>
-              </a:rPr>
-              <a:t>10 小時超出觀察範圍。這些數據也不能證明，溫習會令分數上升。</a:t>
-            </a:r>
-          </a:p>
-        </p:txBody>
-      </p:sp>
-      <p:sp>
-        <p:nvSpPr>
-          <p:cNvPr id="14" name="">
-            <a:extLst xmlns:a="http://schemas.openxmlformats.org/drawingml/2006/main">
-              <a:ext uri="{FF2B5EF4-FFF2-40B4-BE49-F238E27FC236}">
-                <a16:creationId xmlns:a16="http://schemas.microsoft.com/office/drawing/2014/main" id="{91827B3E-7CFF-4E03-A174-B2269AA00D03}"/>
-              </a:ext>
-            </a:extLst>
-          </p:cNvPr>
-          <p:cNvSpPr>
-            <a:spLocks xmlns:a="http://schemas.openxmlformats.org/drawingml/2006/main" noGrp="1"/>
-          </p:cNvSpPr>
-          <p:nvPr/>
-        </p:nvSpPr>
-        <p:spPr>
-          <a:xfrm xmlns:a="http://schemas.openxmlformats.org/drawingml/2006/main">
-            <a:off x="609600" y="5629275"/>
-            <a:ext cx="10763250" cy="457200"/>
-          </a:xfrm>
-          <a:prstGeom xmlns:a="http://schemas.openxmlformats.org/drawingml/2006/main" prst="rect">
-            <a:avLst/>
-          </a:prstGeom>
-          <a:noFill xmlns:a="http://schemas.openxmlformats.org/drawingml/2006/main"/>
-          <a:ln xmlns:a="http://schemas.openxmlformats.org/drawingml/2006/main" w="0">
-            <a:noFill/>
-          </a:ln>
-        </p:spPr>
-        <p:txBody>
-          <a:bodyPr xmlns:a="http://schemas.openxmlformats.org/drawingml/2006/main">
-            <a:noAutofit/>
-          </a:bodyPr>
-          <a:lstStyle xmlns:a="http://schemas.openxmlformats.org/drawingml/2006/main"/>
-          <a:p xmlns:a="http://schemas.openxmlformats.org/drawingml/2006/main">
-            <a:pPr>
-              <a:defRPr sz="1800" b="0">
-                <a:solidFill>
-                  <a:srgbClr val="526B70"/>
-                </a:solidFill>
-                <a:latin typeface="Arial"/>
-                <a:ea typeface="Arial"/>
-                <a:cs typeface="Arial"/>
-              </a:defRPr>
-            </a:pPr>
-            <a:r>
-              <a:rPr sz="1800" b="0">
-                <a:solidFill>
-                  <a:srgbClr val="526B70"/>
-                </a:solidFill>
-                <a:latin typeface="Arial"/>
-                <a:ea typeface="Arial"/>
-                <a:cs typeface="Arial"/>
-              </a:rPr>
-              <a:t>10 hours is outside the data range. The data does not prove cause and effect.</a:t>
+                <a16:creationId xmlns:a16="http://schemas.microsoft.com/office/drawing/2014/main" id="{29192E6F-A6C9-4EE2-9794-3D5C1FC1A63F}"/>
+              </a:ext>
+            </a:extLst>
+          </p:cNvPr>
+          <p:cNvSpPr>
+            <a:spLocks xmlns:a="http://schemas.openxmlformats.org/drawingml/2006/main" noGrp="1"/>
+          </p:cNvSpPr>
+          <p:nvPr/>
+        </p:nvSpPr>
+        <p:spPr>
+          <a:xfrm xmlns:a="http://schemas.openxmlformats.org/drawingml/2006/main">
+            <a:off x="609600" y="6419850"/>
+            <a:ext cx="10096500" cy="238125"/>
+          </a:xfrm>
+          <a:prstGeom xmlns:a="http://schemas.openxmlformats.org/drawingml/2006/main" prst="rect">
+            <a:avLst/>
+          </a:prstGeom>
+          <a:noFill xmlns:a="http://schemas.openxmlformats.org/drawingml/2006/main"/>
+          <a:ln xmlns:a="http://schemas.openxmlformats.org/drawingml/2006/main" w="0">
+            <a:noFill/>
+          </a:ln>
+        </p:spPr>
+        <p:txBody>
+          <a:bodyPr xmlns:a="http://schemas.openxmlformats.org/drawingml/2006/main">
+            <a:noAutofit/>
+          </a:bodyPr>
+          <a:lstStyle xmlns:a="http://schemas.openxmlformats.org/drawingml/2006/main"/>
+          <a:p xmlns:a="http://schemas.openxmlformats.org/drawingml/2006/main">
+            <a:pPr>
+              <a:defRPr sz="1200" b="0">
+                <a:solidFill>
+                  <a:srgbClr val="526B70"/>
+                </a:solidFill>
+                <a:latin typeface="Heiti TC"/>
+                <a:ea typeface="Heiti TC"/>
+                <a:cs typeface="Heiti TC"/>
+              </a:defRPr>
+            </a:pPr>
+            <a:r>
+              <a:rPr sz="1200" b="0">
+                <a:solidFill>
+                  <a:srgbClr val="526B70"/>
+                </a:solidFill>
+                <a:latin typeface="Heiti TC"/>
+                <a:ea typeface="Heiti TC"/>
+                <a:cs typeface="Heiti TC"/>
+              </a:rPr>
+              <a:t>參考 / Source: Google Machine Learning Crash Course</a:t>
             </a:r>
           </a:p>
         </p:txBody>
@@ -10758,7 +13654,7 @@
     </p:spTree>
     <p:extLst>
       <p:ext uri="{BB962C8B-B14F-4D97-AF65-F5344CB8AC3E}">
-        <p14:creationId xmlns:p14="http://schemas.microsoft.com/office/powerpoint/2010/main" val="1458926338"/>
+        <p14:creationId xmlns:p14="http://schemas.microsoft.com/office/powerpoint/2010/main" val="1318492615"/>
       </p:ext>
     </p:extLst>
   </p:cSld>

--- a/teacher-slides.pptx
+++ b/teacher-slides.pptx
@@ -2,27 +2,27 @@
 <file path=ppt/presentation.xml><?xml version="1.0" encoding="utf-8"?>
 <p:presentation xmlns:p="http://schemas.openxmlformats.org/presentationml/2006/main">
   <p:sldMasterIdLst>
-    <p:sldMasterId xmlns:r="http://schemas.openxmlformats.org/officeDocument/2006/relationships" id="2147483648" r:id="R8b2b6973a6194ccc"/>
+    <p:sldMasterId xmlns:r="http://schemas.openxmlformats.org/officeDocument/2006/relationships" id="2147483648" r:id="R5355fdf339fc48fa"/>
   </p:sldMasterIdLst>
   <p:notesMasterIdLst>
-    <p:notesMasterId xmlns:r="http://schemas.openxmlformats.org/officeDocument/2006/relationships" r:id="R70d924927c3448d7"/>
+    <p:notesMasterId xmlns:r="http://schemas.openxmlformats.org/officeDocument/2006/relationships" r:id="Rc041bd9a86bc45a1"/>
   </p:notesMasterIdLst>
   <p:sldIdLst>
-    <p:sldId xmlns:r="http://schemas.openxmlformats.org/officeDocument/2006/relationships" id="256" r:id="R6fc25627157f4b3b"/>
-    <p:sldId xmlns:r="http://schemas.openxmlformats.org/officeDocument/2006/relationships" id="257" r:id="R660c569f90b04691"/>
-    <p:sldId xmlns:r="http://schemas.openxmlformats.org/officeDocument/2006/relationships" id="258" r:id="R445086742cff4074"/>
-    <p:sldId xmlns:r="http://schemas.openxmlformats.org/officeDocument/2006/relationships" id="259" r:id="R4af8f6a4ef1a4a3e"/>
-    <p:sldId xmlns:r="http://schemas.openxmlformats.org/officeDocument/2006/relationships" id="260" r:id="R20ff67b2e8b040a9"/>
-    <p:sldId xmlns:r="http://schemas.openxmlformats.org/officeDocument/2006/relationships" id="261" r:id="Rde126d0e84394854"/>
-    <p:sldId xmlns:r="http://schemas.openxmlformats.org/officeDocument/2006/relationships" id="262" r:id="R1509253132e945ab"/>
-    <p:sldId xmlns:r="http://schemas.openxmlformats.org/officeDocument/2006/relationships" id="263" r:id="Ref9167b7fcde4964"/>
-    <p:sldId xmlns:r="http://schemas.openxmlformats.org/officeDocument/2006/relationships" id="264" r:id="R54f819b9dae14beb"/>
-    <p:sldId xmlns:r="http://schemas.openxmlformats.org/officeDocument/2006/relationships" id="265" r:id="R0c7373a18a3b47c0"/>
-    <p:sldId xmlns:r="http://schemas.openxmlformats.org/officeDocument/2006/relationships" id="266" r:id="R24cf6ae54cd64626"/>
-    <p:sldId xmlns:r="http://schemas.openxmlformats.org/officeDocument/2006/relationships" id="267" r:id="Rae6b15e0a427437d"/>
-    <p:sldId xmlns:r="http://schemas.openxmlformats.org/officeDocument/2006/relationships" id="268" r:id="R717e7555380e4b7e"/>
-    <p:sldId xmlns:r="http://schemas.openxmlformats.org/officeDocument/2006/relationships" id="269" r:id="R84548005d36d4db2"/>
-    <p:sldId xmlns:r="http://schemas.openxmlformats.org/officeDocument/2006/relationships" id="270" r:id="R1ab07eba1747497d"/>
+    <p:sldId xmlns:r="http://schemas.openxmlformats.org/officeDocument/2006/relationships" id="256" r:id="R0dab8c3bc7064c43"/>
+    <p:sldId xmlns:r="http://schemas.openxmlformats.org/officeDocument/2006/relationships" id="257" r:id="R843816962d1d4fe3"/>
+    <p:sldId xmlns:r="http://schemas.openxmlformats.org/officeDocument/2006/relationships" id="258" r:id="Rbbec94c517b54c37"/>
+    <p:sldId xmlns:r="http://schemas.openxmlformats.org/officeDocument/2006/relationships" id="259" r:id="R31dbb3ab4a3547e6"/>
+    <p:sldId xmlns:r="http://schemas.openxmlformats.org/officeDocument/2006/relationships" id="260" r:id="R693e6475e0e54417"/>
+    <p:sldId xmlns:r="http://schemas.openxmlformats.org/officeDocument/2006/relationships" id="261" r:id="Rb916893111e84059"/>
+    <p:sldId xmlns:r="http://schemas.openxmlformats.org/officeDocument/2006/relationships" id="262" r:id="R980eda0b7ed54946"/>
+    <p:sldId xmlns:r="http://schemas.openxmlformats.org/officeDocument/2006/relationships" id="263" r:id="R90164378a8ab4fd4"/>
+    <p:sldId xmlns:r="http://schemas.openxmlformats.org/officeDocument/2006/relationships" id="264" r:id="Ra200848de6234ddc"/>
+    <p:sldId xmlns:r="http://schemas.openxmlformats.org/officeDocument/2006/relationships" id="265" r:id="R37bbe844d4fc4a2f"/>
+    <p:sldId xmlns:r="http://schemas.openxmlformats.org/officeDocument/2006/relationships" id="266" r:id="R4412764619ef4e79"/>
+    <p:sldId xmlns:r="http://schemas.openxmlformats.org/officeDocument/2006/relationships" id="267" r:id="R9a6404cf758f4be6"/>
+    <p:sldId xmlns:r="http://schemas.openxmlformats.org/officeDocument/2006/relationships" id="268" r:id="R3fb849a2cc964e7a"/>
+    <p:sldId xmlns:r="http://schemas.openxmlformats.org/officeDocument/2006/relationships" id="269" r:id="R63f7e42f85304225"/>
+    <p:sldId xmlns:r="http://schemas.openxmlformats.org/officeDocument/2006/relationships" id="270" r:id="R87cde623a7834aa6"/>
   </p:sldIdLst>
   <p:sldSz cx="12192000" cy="6858000"/>
   <p:notesSz cx="6858000" cy="9144000"/>
@@ -596,7 +596,7 @@
           <a:lstStyle xmlns:a="http://schemas.openxmlformats.org/drawingml/2006/main"/>
           <a:p xmlns:a="http://schemas.openxmlformats.org/drawingml/2006/main">
             <a:r>
-              <a:t>Allow about 40 seconds. Fitting the examples is not sufficient: test predictions on new examples withheld during learning. This gives evidence about generalization, not a guarantee. To check a model, predict outcomes for examples it did not learn from, then compare with their actual outcomes. Today, comparing a student line with the browser line helps discuss different models; it does not establish their real-world accuracy. Data quality also matters, as one unusual point in the activity can change the fitted line. Keep training/test terminology optional. Source: https://developers.google.com/machine-learning/crash-course/overfitting/generalization</a:t>
+              <a:t>Start Step 2. Students keep their selected dataset and click or tap the graph. Ask them to predict first and describe the line change, and use Undo or Reset between experiments. Have students undo after each trial before comparing a different new point.</a:t>
             </a:r>
           </a:p>
         </p:txBody>
@@ -666,7 +666,7 @@
           <a:lstStyle xmlns:a="http://schemas.openxmlformats.org/drawingml/2006/main"/>
           <a:p xmlns:a="http://schemas.openxmlformats.org/drawingml/2006/main">
             <a:r>
-              <a:t>Start Step 2. Students keep their selected dataset and click or tap the graph. Ask them to predict first, compare m and c, and use Undo or Reset between experiments. Have students undo after each trial before comparing a different new point.</a:t>
+              <a:t>Start Step 3. Each dot represents simulated observations from a different student. Students first draw an intuitive straight line on the worksheet, then estimate the score for 3.5 hours per day and record it before checking the page. Axes are fixed at 0–24 hours and 0–100 marks. A trend does not prove that more study guarantees a score.</a:t>
             </a:r>
           </a:p>
         </p:txBody>
@@ -736,7 +736,7 @@
           <a:lstStyle xmlns:a="http://schemas.openxmlformats.org/drawingml/2006/main"/>
           <a:p xmlns:a="http://schemas.openxmlformats.org/drawingml/2006/main">
             <a:r>
-              <a:t>Start Step 3. Each dot represents simulated observations from a different student. Students first draw an intuitive straight line on the worksheet, then estimate the score for 3.5 hours per day and record it before checking the page. Axes are fixed at 0–24 hours and 0–100 marks. A trend does not prove that more study guarantees a score.</a:t>
+              <a:t>After written predictions. The fitted line is y=2x+50. m is about 2 marks per extra study hour in this model. c is the estimated score at zero hours. 3.5 hours is within the observed 0–6-hour range. 10 hours is outside. At 24 hours the model gives 98 marks, but this remains far outside the observed range and cannot guarantee a result. Discuss how other factors influence scores. Say: 這些數據不能證明，多溫習一小時就會令成績增加兩分。 These data do not show that an extra study hour causes a two-mark increase.</a:t>
             </a:r>
           </a:p>
         </p:txBody>
@@ -806,7 +806,7 @@
           <a:lstStyle xmlns:a="http://schemas.openxmlformats.org/drawingml/2006/main"/>
           <a:p xmlns:a="http://schemas.openxmlformats.org/drawingml/2006/main">
             <a:r>
-              <a:t>After written predictions. The fitted line is y=2x+50. m is about 2 marks per extra study hour in this model. c is the estimated score at zero hours. 3.5 hours is within the observed 0–6-hour range. 10 hours is outside. At 24 hours the model gives 98 marks, but this remains far outside the observed range and cannot guarantee a result. Discuss how other factors influence scores. Say: 這些數據不能證明，多溫習一小時就會令成績增加兩分。 These data do not show that an extra study hour causes a two-mark increase.</a:t>
+              <a:t>Allow about 40 seconds. Fitting the examples is not sufficient: test predictions on new examples withheld during learning. This gives evidence about generalization, not a guarantee. To check a model, predict outcomes for examples it did not learn from, then compare with their actual outcomes. Today, comparing a student line with the browser line helps discuss different models; it does not establish their real-world accuracy. Data quality also matters, as one unusual point in the activity can change the fitted line. Keep training/test terminology optional. Source: https://developers.google.com/machine-learning/crash-course/overfitting/generalization</a:t>
             </a:r>
           </a:p>
         </p:txBody>
@@ -1016,7 +1016,7 @@
           <a:lstStyle xmlns:a="http://schemas.openxmlformats.org/drawingml/2006/main"/>
           <a:p xmlns:a="http://schemas.openxmlformats.org/drawingml/2006/main">
             <a:r>
-              <a:t>Opening, about 20 seconds. Start with the equation. Ask students which part describes the starting amount and which part describes the change. No proof or derivation.</a:t>
+              <a:t>Opening, about 40 seconds. Explain the water tank scenario. At time zero it already holds 5 litres. Point to the intercept and ask for c.</a:t>
             </a:r>
           </a:p>
         </p:txBody>
@@ -1086,7 +1086,7 @@
           <a:lstStyle xmlns:a="http://schemas.openxmlformats.org/drawingml/2006/main"/>
           <a:p xmlns:a="http://schemas.openxmlformats.org/drawingml/2006/main">
             <a:r>
-              <a:t>Opening, about 40 seconds. Explain the water tank scenario. At time zero it already holds 5 litres. Point to the intercept and ask for c.</a:t>
+              <a:t>Opening, about 45 seconds. Each minute adds 2 litres. Show the points (1,7) and (2,9). Increase x by 1, y by 2. Units of m are litres per minute.</a:t>
             </a:r>
           </a:p>
         </p:txBody>
@@ -1156,7 +1156,7 @@
           <a:lstStyle xmlns:a="http://schemas.openxmlformats.org/drawingml/2006/main"/>
           <a:p xmlns:a="http://schemas.openxmlformats.org/drawingml/2006/main">
             <a:r>
-              <a:t>Opening, about 45 seconds. Each minute adds 2 litres. Show the points (1,7) and (2,9). Increase x by 1, y by 2. Units of m are litres per minute.</a:t>
+              <a:t>Opening, about 20 seconds. Start with the equation. Ask students which part describes the starting amount and which part describes the change. No proof or derivation.</a:t>
             </a:r>
           </a:p>
         </p:txBody>
@@ -1504,7 +1504,7 @@
   </p:cSld>
   <p:clrMap bg1="lt1" tx1="dk1" bg2="lt2" tx2="dk2" accent1="accent1" accent2="accent2" accent3="accent3" accent4="accent4" accent5="accent5" accent6="accent6" hlink="hlink" folHlink="folHlink"/>
   <p:sldLayoutIdLst>
-    <p:sldLayoutId xmlns:r="http://schemas.openxmlformats.org/officeDocument/2006/relationships" id="2147483649" r:id="R1b8bd899ec014c3e"/>
+    <p:sldLayoutId xmlns:r="http://schemas.openxmlformats.org/officeDocument/2006/relationships" id="2147483649" r:id="Rf0fd2003663a4bb6"/>
   </p:sldLayoutIdLst>
   <p:txStyles>
     <p:titleStyle>
@@ -2196,7 +2196,7 @@
                     <a:ea typeface="Heiti TC"/>
                     <a:cs typeface="Heiti TC"/>
                   </a:rPr>
-                  <a:t>Fee (HK$)</a:t>
+                  <a:t>收費 / Fee (HK$)</a:t>
                 </a:r>
               </a:p>
             </c:rich>
@@ -2281,7 +2281,7 @@
                     <a:ea typeface="Heiti TC"/>
                     <a:cs typeface="Heiti TC"/>
                   </a:rPr>
-                  <a:t>Distance (km)</a:t>
+                  <a:t>距離 / Distance (km)</a:t>
                 </a:r>
               </a:p>
             </c:rich>
@@ -5576,10 +5576,10 @@
       </p:grpSpPr>
       <p:sp>
         <p:nvSpPr>
-          <p:cNvPr id="9" name="">
-            <a:extLst xmlns:a="http://schemas.openxmlformats.org/drawingml/2006/main">
-              <a:ext uri="{FF2B5EF4-FFF2-40B4-BE49-F238E27FC236}">
-                <a16:creationId xmlns:a16="http://schemas.microsoft.com/office/drawing/2014/main" id="{236A6B13-B268-4317-8205-08E673C9714A}"/>
+          <p:cNvPr id="11" name="">
+            <a:extLst xmlns:a="http://schemas.openxmlformats.org/drawingml/2006/main">
+              <a:ext uri="{FF2B5EF4-FFF2-40B4-BE49-F238E27FC236}">
+                <a16:creationId xmlns:a16="http://schemas.microsoft.com/office/drawing/2014/main" id="{BBA3B173-DDA7-41DC-A8BA-6925D4D1BC9B}"/>
               </a:ext>
             </a:extLst>
           </p:cNvPr>
@@ -5636,7 +5636,7 @@
           <p:cNvPr id="2" name="">
             <a:extLst xmlns:a="http://schemas.openxmlformats.org/drawingml/2006/main">
               <a:ext uri="{FF2B5EF4-FFF2-40B4-BE49-F238E27FC236}">
-                <a16:creationId xmlns:a16="http://schemas.microsoft.com/office/drawing/2014/main" id="{F4ED2651-2B6F-40DD-BEAD-567BE8D4208F}"/>
+                <a16:creationId xmlns:a16="http://schemas.microsoft.com/office/drawing/2014/main" id="{35AD2CEB-DE18-4ACE-8C9E-FB1E89B16EF6}"/>
               </a:ext>
             </a:extLst>
           </p:cNvPr>
@@ -5693,7 +5693,7 @@
           <p:cNvPr id="3" name="">
             <a:extLst xmlns:a="http://schemas.openxmlformats.org/drawingml/2006/main">
               <a:ext uri="{FF2B5EF4-FFF2-40B4-BE49-F238E27FC236}">
-                <a16:creationId xmlns:a16="http://schemas.microsoft.com/office/drawing/2014/main" id="{02AB62A7-658C-4E0D-B27F-AD6A00E5E0EF}"/>
+                <a16:creationId xmlns:a16="http://schemas.microsoft.com/office/drawing/2014/main" id="{D1C21D2B-4783-4811-A996-9709DF0A03FB}"/>
               </a:ext>
             </a:extLst>
           </p:cNvPr>
@@ -5747,7 +5747,7 @@
       </p:sp>
       <p:graphicFrame>
         <p:nvGraphicFramePr>
-          <p:cNvPr id="12" name="Chart"/>
+          <p:cNvPr id="14" name="Chart"/>
           <p:cNvGraphicFramePr/>
           <p:nvPr/>
         </p:nvGraphicFramePr>
@@ -5757,7 +5757,7 @@
         </p:xfrm>
         <a:graphic xmlns:a="http://schemas.openxmlformats.org/drawingml/2006/main">
           <a:graphicData uri="http://schemas.openxmlformats.org/drawingml/2006/chart">
-            <c:chart xmlns:r="http://schemas.openxmlformats.org/officeDocument/2006/relationships" xmlns:c="http://schemas.openxmlformats.org/drawingml/2006/chart" r:id="R4098624365a84013"/>
+            <c:chart xmlns:r="http://schemas.openxmlformats.org/officeDocument/2006/relationships" xmlns:c="http://schemas.openxmlformats.org/drawingml/2006/chart" r:id="R6ced1aeffe6c46aa"/>
           </a:graphicData>
         </a:graphic>
       </p:graphicFrame>
@@ -5766,18 +5766,18 @@
           <p:cNvPr id="5" name="">
             <a:extLst xmlns:a="http://schemas.openxmlformats.org/drawingml/2006/main">
               <a:ext uri="{FF2B5EF4-FFF2-40B4-BE49-F238E27FC236}">
-                <a16:creationId xmlns:a16="http://schemas.microsoft.com/office/drawing/2014/main" id="{94429B72-2F9F-44A0-B72D-0A468343FCDE}"/>
-              </a:ext>
-            </a:extLst>
-          </p:cNvPr>
-          <p:cNvSpPr>
-            <a:spLocks xmlns:a="http://schemas.openxmlformats.org/drawingml/2006/main" noGrp="1"/>
-          </p:cNvSpPr>
-          <p:nvPr/>
-        </p:nvSpPr>
-        <p:spPr>
-          <a:xfrm xmlns:a="http://schemas.openxmlformats.org/drawingml/2006/main">
-            <a:off x="8096250" y="2066925"/>
+                <a16:creationId xmlns:a16="http://schemas.microsoft.com/office/drawing/2014/main" id="{29E3B6CE-74C9-410E-8576-29027E6D456C}"/>
+              </a:ext>
+            </a:extLst>
+          </p:cNvPr>
+          <p:cNvSpPr>
+            <a:spLocks xmlns:a="http://schemas.openxmlformats.org/drawingml/2006/main" noGrp="1"/>
+          </p:cNvSpPr>
+          <p:nvPr/>
+        </p:nvSpPr>
+        <p:spPr>
+          <a:xfrm xmlns:a="http://schemas.openxmlformats.org/drawingml/2006/main">
+            <a:off x="8096250" y="1857375"/>
             <a:ext cx="3381375" cy="495300"/>
           </a:xfrm>
           <a:prstGeom xmlns:a="http://schemas.openxmlformats.org/drawingml/2006/main" prst="rect">
@@ -5813,7 +5813,7 @@
                 <a:ea typeface="Heiti TC"/>
                 <a:cs typeface="Heiti TC"/>
               </a:rPr>
-              <a:t>5.5 公里，大約幾多錢？</a:t>
+              <a:t>每點是一筆紀錄</a:t>
             </a:r>
           </a:p>
         </p:txBody>
@@ -5823,18 +5823,18 @@
           <p:cNvPr id="6" name="">
             <a:extLst xmlns:a="http://schemas.openxmlformats.org/drawingml/2006/main">
               <a:ext uri="{FF2B5EF4-FFF2-40B4-BE49-F238E27FC236}">
-                <a16:creationId xmlns:a16="http://schemas.microsoft.com/office/drawing/2014/main" id="{DE5BD4C1-683D-499B-9232-5403C5720038}"/>
-              </a:ext>
-            </a:extLst>
-          </p:cNvPr>
-          <p:cNvSpPr>
-            <a:spLocks xmlns:a="http://schemas.openxmlformats.org/drawingml/2006/main" noGrp="1"/>
-          </p:cNvSpPr>
-          <p:nvPr/>
-        </p:nvSpPr>
-        <p:spPr>
-          <a:xfrm xmlns:a="http://schemas.openxmlformats.org/drawingml/2006/main">
-            <a:off x="8096250" y="2533650"/>
+                <a16:creationId xmlns:a16="http://schemas.microsoft.com/office/drawing/2014/main" id="{6A09974C-FF31-443E-ABA6-3E078D2F1D83}"/>
+              </a:ext>
+            </a:extLst>
+          </p:cNvPr>
+          <p:cNvSpPr>
+            <a:spLocks xmlns:a="http://schemas.openxmlformats.org/drawingml/2006/main" noGrp="1"/>
+          </p:cNvSpPr>
+          <p:nvPr/>
+        </p:nvSpPr>
+        <p:spPr>
+          <a:xfrm xmlns:a="http://schemas.openxmlformats.org/drawingml/2006/main">
+            <a:off x="8096250" y="2324100"/>
             <a:ext cx="3381375" cy="457200"/>
           </a:xfrm>
           <a:prstGeom xmlns:a="http://schemas.openxmlformats.org/drawingml/2006/main" prst="rect">
@@ -5870,7 +5870,7 @@
                 <a:ea typeface="Arial"/>
                 <a:cs typeface="Arial"/>
               </a:rPr>
-              <a:t>About how much for 5.5 km?</a:t>
+              <a:t>Each dot is one record</a:t>
             </a:r>
           </a:p>
         </p:txBody>
@@ -5880,18 +5880,18 @@
           <p:cNvPr id="7" name="">
             <a:extLst xmlns:a="http://schemas.openxmlformats.org/drawingml/2006/main">
               <a:ext uri="{FF2B5EF4-FFF2-40B4-BE49-F238E27FC236}">
-                <a16:creationId xmlns:a16="http://schemas.microsoft.com/office/drawing/2014/main" id="{218276CA-1074-47EE-9A0F-52C82A710B76}"/>
-              </a:ext>
-            </a:extLst>
-          </p:cNvPr>
-          <p:cNvSpPr>
-            <a:spLocks xmlns:a="http://schemas.openxmlformats.org/drawingml/2006/main" noGrp="1"/>
-          </p:cNvSpPr>
-          <p:nvPr/>
-        </p:nvSpPr>
-        <p:spPr>
-          <a:xfrm xmlns:a="http://schemas.openxmlformats.org/drawingml/2006/main">
-            <a:off x="8096250" y="3752850"/>
+                <a16:creationId xmlns:a16="http://schemas.microsoft.com/office/drawing/2014/main" id="{6487078A-2378-43BD-8EB2-9CBD55CB905E}"/>
+              </a:ext>
+            </a:extLst>
+          </p:cNvPr>
+          <p:cNvSpPr>
+            <a:spLocks xmlns:a="http://schemas.openxmlformats.org/drawingml/2006/main" noGrp="1"/>
+          </p:cNvSpPr>
+          <p:nvPr/>
+        </p:nvSpPr>
+        <p:spPr>
+          <a:xfrm xmlns:a="http://schemas.openxmlformats.org/drawingml/2006/main">
+            <a:off x="8096250" y="3400425"/>
             <a:ext cx="3381375" cy="495300"/>
           </a:xfrm>
           <a:prstGeom xmlns:a="http://schemas.openxmlformats.org/drawingml/2006/main" prst="rect">
@@ -5927,6 +5927,120 @@
                 <a:ea typeface="Heiti TC"/>
                 <a:cs typeface="Heiti TC"/>
               </a:rPr>
+              <a:t>5.5 公里，約幾多錢？</a:t>
+            </a:r>
+          </a:p>
+        </p:txBody>
+      </p:sp>
+      <p:sp>
+        <p:nvSpPr>
+          <p:cNvPr id="8" name="">
+            <a:extLst xmlns:a="http://schemas.openxmlformats.org/drawingml/2006/main">
+              <a:ext uri="{FF2B5EF4-FFF2-40B4-BE49-F238E27FC236}">
+                <a16:creationId xmlns:a16="http://schemas.microsoft.com/office/drawing/2014/main" id="{3D1E4FFD-427F-42E5-A5FD-FA23AC9E0661}"/>
+              </a:ext>
+            </a:extLst>
+          </p:cNvPr>
+          <p:cNvSpPr>
+            <a:spLocks xmlns:a="http://schemas.openxmlformats.org/drawingml/2006/main" noGrp="1"/>
+          </p:cNvSpPr>
+          <p:nvPr/>
+        </p:nvSpPr>
+        <p:spPr>
+          <a:xfrm xmlns:a="http://schemas.openxmlformats.org/drawingml/2006/main">
+            <a:off x="8096250" y="3867150"/>
+            <a:ext cx="3381375" cy="457200"/>
+          </a:xfrm>
+          <a:prstGeom xmlns:a="http://schemas.openxmlformats.org/drawingml/2006/main" prst="rect">
+            <a:avLst/>
+          </a:prstGeom>
+          <a:noFill xmlns:a="http://schemas.openxmlformats.org/drawingml/2006/main"/>
+          <a:ln xmlns:a="http://schemas.openxmlformats.org/drawingml/2006/main" w="0">
+            <a:noFill/>
+          </a:ln>
+        </p:spPr>
+        <p:txBody>
+          <a:bodyPr xmlns:a="http://schemas.openxmlformats.org/drawingml/2006/main">
+            <a:noAutofit/>
+          </a:bodyPr>
+          <a:lstStyle xmlns:a="http://schemas.openxmlformats.org/drawingml/2006/main"/>
+          <a:p xmlns:a="http://schemas.openxmlformats.org/drawingml/2006/main">
+            <a:pPr>
+              <a:defRPr sz="1800" b="0">
+                <a:solidFill>
+                  <a:srgbClr val="526B70"/>
+                </a:solidFill>
+                <a:latin typeface="Arial"/>
+                <a:ea typeface="Arial"/>
+                <a:cs typeface="Arial"/>
+              </a:defRPr>
+            </a:pPr>
+            <a:r>
+              <a:rPr sz="1800" b="0">
+                <a:solidFill>
+                  <a:srgbClr val="526B70"/>
+                </a:solidFill>
+                <a:latin typeface="Arial"/>
+                <a:ea typeface="Arial"/>
+                <a:cs typeface="Arial"/>
+              </a:rPr>
+              <a:t>Guess the fee at 5.5 km</a:t>
+            </a:r>
+          </a:p>
+        </p:txBody>
+      </p:sp>
+      <p:sp>
+        <p:nvSpPr>
+          <p:cNvPr id="9" name="">
+            <a:extLst xmlns:a="http://schemas.openxmlformats.org/drawingml/2006/main">
+              <a:ext uri="{FF2B5EF4-FFF2-40B4-BE49-F238E27FC236}">
+                <a16:creationId xmlns:a16="http://schemas.microsoft.com/office/drawing/2014/main" id="{D12962EA-1DF6-4894-8E7A-ECBD97234F9B}"/>
+              </a:ext>
+            </a:extLst>
+          </p:cNvPr>
+          <p:cNvSpPr>
+            <a:spLocks xmlns:a="http://schemas.openxmlformats.org/drawingml/2006/main" noGrp="1"/>
+          </p:cNvSpPr>
+          <p:nvPr/>
+        </p:nvSpPr>
+        <p:spPr>
+          <a:xfrm xmlns:a="http://schemas.openxmlformats.org/drawingml/2006/main">
+            <a:off x="8096250" y="4895850"/>
+            <a:ext cx="3381375" cy="495300"/>
+          </a:xfrm>
+          <a:prstGeom xmlns:a="http://schemas.openxmlformats.org/drawingml/2006/main" prst="rect">
+            <a:avLst/>
+          </a:prstGeom>
+          <a:noFill xmlns:a="http://schemas.openxmlformats.org/drawingml/2006/main"/>
+          <a:ln xmlns:a="http://schemas.openxmlformats.org/drawingml/2006/main" w="0">
+            <a:noFill/>
+          </a:ln>
+        </p:spPr>
+        <p:txBody>
+          <a:bodyPr xmlns:a="http://schemas.openxmlformats.org/drawingml/2006/main">
+            <a:noAutofit/>
+          </a:bodyPr>
+          <a:lstStyle xmlns:a="http://schemas.openxmlformats.org/drawingml/2006/main"/>
+          <a:p xmlns:a="http://schemas.openxmlformats.org/drawingml/2006/main">
+            <a:pPr>
+              <a:defRPr sz="2100" b="0">
+                <a:solidFill>
+                  <a:srgbClr val="173C43"/>
+                </a:solidFill>
+                <a:latin typeface="Heiti TC"/>
+                <a:ea typeface="Heiti TC"/>
+                <a:cs typeface="Heiti TC"/>
+              </a:defRPr>
+            </a:pPr>
+            <a:r>
+              <a:rPr sz="2100" b="0">
+                <a:solidFill>
+                  <a:srgbClr val="173C43"/>
+                </a:solidFill>
+                <a:latin typeface="Heiti TC"/>
+                <a:ea typeface="Heiti TC"/>
+                <a:cs typeface="Heiti TC"/>
+              </a:rPr>
               <a:t>先猜，不需算公式</a:t>
             </a:r>
           </a:p>
@@ -5934,21 +6048,21 @@
       </p:sp>
       <p:sp>
         <p:nvSpPr>
-          <p:cNvPr id="8" name="">
-            <a:extLst xmlns:a="http://schemas.openxmlformats.org/drawingml/2006/main">
-              <a:ext uri="{FF2B5EF4-FFF2-40B4-BE49-F238E27FC236}">
-                <a16:creationId xmlns:a16="http://schemas.microsoft.com/office/drawing/2014/main" id="{956830B5-022B-4075-8673-6451F0D17A55}"/>
-              </a:ext>
-            </a:extLst>
-          </p:cNvPr>
-          <p:cNvSpPr>
-            <a:spLocks xmlns:a="http://schemas.openxmlformats.org/drawingml/2006/main" noGrp="1"/>
-          </p:cNvSpPr>
-          <p:nvPr/>
-        </p:nvSpPr>
-        <p:spPr>
-          <a:xfrm xmlns:a="http://schemas.openxmlformats.org/drawingml/2006/main">
-            <a:off x="8096250" y="4219575"/>
+          <p:cNvPr id="10" name="">
+            <a:extLst xmlns:a="http://schemas.openxmlformats.org/drawingml/2006/main">
+              <a:ext uri="{FF2B5EF4-FFF2-40B4-BE49-F238E27FC236}">
+                <a16:creationId xmlns:a16="http://schemas.microsoft.com/office/drawing/2014/main" id="{50D9A285-BA86-4BDF-A50C-23560D2D9C32}"/>
+              </a:ext>
+            </a:extLst>
+          </p:cNvPr>
+          <p:cNvSpPr>
+            <a:spLocks xmlns:a="http://schemas.openxmlformats.org/drawingml/2006/main" noGrp="1"/>
+          </p:cNvSpPr>
+          <p:nvPr/>
+        </p:nvSpPr>
+        <p:spPr>
+          <a:xfrm xmlns:a="http://schemas.openxmlformats.org/drawingml/2006/main">
+            <a:off x="8096250" y="5362575"/>
             <a:ext cx="3381375" cy="457200"/>
           </a:xfrm>
           <a:prstGeom xmlns:a="http://schemas.openxmlformats.org/drawingml/2006/main" prst="rect">
@@ -5984,7 +6098,7 @@
                 <a:ea typeface="Arial"/>
                 <a:cs typeface="Arial"/>
               </a:rPr>
-              <a:t>Guess first. No formula needed</a:t>
+              <a:t>No formula needed</a:t>
             </a:r>
           </a:p>
         </p:txBody>
@@ -5992,7 +6106,7 @@
     </p:spTree>
     <p:extLst>
       <p:ext uri="{BB962C8B-B14F-4D97-AF65-F5344CB8AC3E}">
-        <p14:creationId xmlns:p14="http://schemas.microsoft.com/office/powerpoint/2010/main" val="1743401741"/>
+        <p14:creationId xmlns:p14="http://schemas.microsoft.com/office/powerpoint/2010/main" val="415931227"/>
       </p:ext>
     </p:extLst>
   </p:cSld>
@@ -6023,7 +6137,7 @@
           <p:cNvPr id="13" name="">
             <a:extLst xmlns:a="http://schemas.openxmlformats.org/drawingml/2006/main">
               <a:ext uri="{FF2B5EF4-FFF2-40B4-BE49-F238E27FC236}">
-                <a16:creationId xmlns:a16="http://schemas.microsoft.com/office/drawing/2014/main" id="{A695A61F-E399-4098-B28B-4230D5934316}"/>
+                <a16:creationId xmlns:a16="http://schemas.microsoft.com/office/drawing/2014/main" id="{97D9CD16-98C2-4516-8F10-5308B30D58AF}"/>
               </a:ext>
             </a:extLst>
           </p:cNvPr>
@@ -6080,7 +6194,7 @@
           <p:cNvPr id="2" name="">
             <a:extLst xmlns:a="http://schemas.openxmlformats.org/drawingml/2006/main">
               <a:ext uri="{FF2B5EF4-FFF2-40B4-BE49-F238E27FC236}">
-                <a16:creationId xmlns:a16="http://schemas.microsoft.com/office/drawing/2014/main" id="{8C8AFCFC-29BE-48D8-B5C8-58506F1FF83F}"/>
+                <a16:creationId xmlns:a16="http://schemas.microsoft.com/office/drawing/2014/main" id="{2E4045D4-F738-44B9-A281-A409DB4106B6}"/>
               </a:ext>
             </a:extLst>
           </p:cNvPr>
@@ -6137,7 +6251,7 @@
           <p:cNvPr id="3" name="">
             <a:extLst xmlns:a="http://schemas.openxmlformats.org/drawingml/2006/main">
               <a:ext uri="{FF2B5EF4-FFF2-40B4-BE49-F238E27FC236}">
-                <a16:creationId xmlns:a16="http://schemas.microsoft.com/office/drawing/2014/main" id="{D0966460-CB89-469E-A1AB-7F62486DE228}"/>
+                <a16:creationId xmlns:a16="http://schemas.microsoft.com/office/drawing/2014/main" id="{F4721B45-805D-4986-AE24-317FA47BA0D6}"/>
               </a:ext>
             </a:extLst>
           </p:cNvPr>
@@ -6194,7 +6308,7 @@
           <p:cNvPr id="4" name="">
             <a:extLst xmlns:a="http://schemas.openxmlformats.org/drawingml/2006/main">
               <a:ext uri="{FF2B5EF4-FFF2-40B4-BE49-F238E27FC236}">
-                <a16:creationId xmlns:a16="http://schemas.microsoft.com/office/drawing/2014/main" id="{07168BB2-8B3D-4309-9DB5-04D61D360D65}"/>
+                <a16:creationId xmlns:a16="http://schemas.microsoft.com/office/drawing/2014/main" id="{60454C4A-063A-4B42-88B1-9C61E4A895D7}"/>
               </a:ext>
             </a:extLst>
           </p:cNvPr>
@@ -6251,7 +6365,7 @@
           <p:cNvPr id="5" name="">
             <a:extLst xmlns:a="http://schemas.openxmlformats.org/drawingml/2006/main">
               <a:ext uri="{FF2B5EF4-FFF2-40B4-BE49-F238E27FC236}">
-                <a16:creationId xmlns:a16="http://schemas.microsoft.com/office/drawing/2014/main" id="{A4EDD5F7-0D58-422A-8B09-929D2C959659}"/>
+                <a16:creationId xmlns:a16="http://schemas.microsoft.com/office/drawing/2014/main" id="{781AFFA3-F6F1-4FB6-8AEF-4B221FEE1AA5}"/>
               </a:ext>
             </a:extLst>
           </p:cNvPr>
@@ -6308,7 +6422,7 @@
           <p:cNvPr id="6" name="">
             <a:extLst xmlns:a="http://schemas.openxmlformats.org/drawingml/2006/main">
               <a:ext uri="{FF2B5EF4-FFF2-40B4-BE49-F238E27FC236}">
-                <a16:creationId xmlns:a16="http://schemas.microsoft.com/office/drawing/2014/main" id="{0651A7A2-DD41-4496-89EC-597D6BA3AD5F}"/>
+                <a16:creationId xmlns:a16="http://schemas.microsoft.com/office/drawing/2014/main" id="{B9C9C630-C20C-4610-A4DC-B0EDA073AF17}"/>
               </a:ext>
             </a:extLst>
           </p:cNvPr>
@@ -6365,7 +6479,7 @@
           <p:cNvPr id="7" name="">
             <a:extLst xmlns:a="http://schemas.openxmlformats.org/drawingml/2006/main">
               <a:ext uri="{FF2B5EF4-FFF2-40B4-BE49-F238E27FC236}">
-                <a16:creationId xmlns:a16="http://schemas.microsoft.com/office/drawing/2014/main" id="{49071059-434E-4DA2-9B78-08EDC1C6C8D6}"/>
+                <a16:creationId xmlns:a16="http://schemas.microsoft.com/office/drawing/2014/main" id="{61E6AA60-C04D-4276-971E-8876DE051FCB}"/>
               </a:ext>
             </a:extLst>
           </p:cNvPr>
@@ -6422,7 +6536,7 @@
           <p:cNvPr id="8" name="">
             <a:extLst xmlns:a="http://schemas.openxmlformats.org/drawingml/2006/main">
               <a:ext uri="{FF2B5EF4-FFF2-40B4-BE49-F238E27FC236}">
-                <a16:creationId xmlns:a16="http://schemas.microsoft.com/office/drawing/2014/main" id="{8C762CE5-EB5E-4508-94BB-87E3231F7FA7}"/>
+                <a16:creationId xmlns:a16="http://schemas.microsoft.com/office/drawing/2014/main" id="{1BCC9FEC-D8D0-457C-B444-F349DC289492}"/>
               </a:ext>
             </a:extLst>
           </p:cNvPr>
@@ -6479,7 +6593,7 @@
           <p:cNvPr id="9" name="">
             <a:extLst xmlns:a="http://schemas.openxmlformats.org/drawingml/2006/main">
               <a:ext uri="{FF2B5EF4-FFF2-40B4-BE49-F238E27FC236}">
-                <a16:creationId xmlns:a16="http://schemas.microsoft.com/office/drawing/2014/main" id="{7EC1ECAC-5DDE-4A4C-BC73-0230B19E155C}"/>
+                <a16:creationId xmlns:a16="http://schemas.microsoft.com/office/drawing/2014/main" id="{2AE3B479-2184-4C35-BEC1-C44BFA29FEAD}"/>
               </a:ext>
             </a:extLst>
           </p:cNvPr>
@@ -6536,7 +6650,7 @@
           <p:cNvPr id="10" name="">
             <a:extLst xmlns:a="http://schemas.openxmlformats.org/drawingml/2006/main">
               <a:ext uri="{FF2B5EF4-FFF2-40B4-BE49-F238E27FC236}">
-                <a16:creationId xmlns:a16="http://schemas.microsoft.com/office/drawing/2014/main" id="{51FC691D-95E8-4373-8043-038BDBD98744}"/>
+                <a16:creationId xmlns:a16="http://schemas.microsoft.com/office/drawing/2014/main" id="{16AC27C4-6946-4DB9-BADE-D0872FF4032E}"/>
               </a:ext>
             </a:extLst>
           </p:cNvPr>
@@ -6593,7 +6707,7 @@
           <p:cNvPr id="11" name="">
             <a:extLst xmlns:a="http://schemas.openxmlformats.org/drawingml/2006/main">
               <a:ext uri="{FF2B5EF4-FFF2-40B4-BE49-F238E27FC236}">
-                <a16:creationId xmlns:a16="http://schemas.microsoft.com/office/drawing/2014/main" id="{4F385D45-9D68-4C1B-A852-B9BF49049CB5}"/>
+                <a16:creationId xmlns:a16="http://schemas.microsoft.com/office/drawing/2014/main" id="{794243EF-80B3-4515-A03F-4EF72320D86C}"/>
               </a:ext>
             </a:extLst>
           </p:cNvPr>
@@ -6650,7 +6764,7 @@
           <p:cNvPr id="12" name="">
             <a:extLst xmlns:a="http://schemas.openxmlformats.org/drawingml/2006/main">
               <a:ext uri="{FF2B5EF4-FFF2-40B4-BE49-F238E27FC236}">
-                <a16:creationId xmlns:a16="http://schemas.microsoft.com/office/drawing/2014/main" id="{FB2973DB-3E4F-46E7-A2E7-5087800E5961}"/>
+                <a16:creationId xmlns:a16="http://schemas.microsoft.com/office/drawing/2014/main" id="{79A21BE2-29BE-45A1-9B88-90144A3534AB}"/>
               </a:ext>
             </a:extLst>
           </p:cNvPr>
@@ -6705,7 +6819,7 @@
     </p:spTree>
     <p:extLst>
       <p:ext uri="{BB962C8B-B14F-4D97-AF65-F5344CB8AC3E}">
-        <p14:creationId xmlns:p14="http://schemas.microsoft.com/office/powerpoint/2010/main" val="835853755"/>
+        <p14:creationId xmlns:p14="http://schemas.microsoft.com/office/powerpoint/2010/main" val="1953328897"/>
       </p:ext>
     </p:extLst>
   </p:cSld>
@@ -6733,10 +6847,10 @@
       </p:grpSpPr>
       <p:sp>
         <p:nvSpPr>
-          <p:cNvPr id="11" name="">
-            <a:extLst xmlns:a="http://schemas.openxmlformats.org/drawingml/2006/main">
-              <a:ext uri="{FF2B5EF4-FFF2-40B4-BE49-F238E27FC236}">
-                <a16:creationId xmlns:a16="http://schemas.microsoft.com/office/drawing/2014/main" id="{00528B13-788F-416B-A4BC-0E2770007351}"/>
+          <p:cNvPr id="12" name="">
+            <a:extLst xmlns:a="http://schemas.openxmlformats.org/drawingml/2006/main">
+              <a:ext uri="{FF2B5EF4-FFF2-40B4-BE49-F238E27FC236}">
+                <a16:creationId xmlns:a16="http://schemas.microsoft.com/office/drawing/2014/main" id="{E6D14D45-36E1-41B9-A643-D40D00C73CB2}"/>
               </a:ext>
             </a:extLst>
           </p:cNvPr>
@@ -6783,7 +6897,7 @@
                 <a:ea typeface="Heiti TC"/>
                 <a:cs typeface="Heiti TC"/>
               </a:rPr>
-              <a:t>學會模式，還是只記住例子？</a:t>
+              <a:t>加入新點，觀察直線</a:t>
             </a:r>
           </a:p>
         </p:txBody>
@@ -6793,7 +6907,7 @@
           <p:cNvPr id="2" name="">
             <a:extLst xmlns:a="http://schemas.openxmlformats.org/drawingml/2006/main">
               <a:ext uri="{FF2B5EF4-FFF2-40B4-BE49-F238E27FC236}">
-                <a16:creationId xmlns:a16="http://schemas.microsoft.com/office/drawing/2014/main" id="{4F3461E2-0E59-4A60-AC20-CC4E87A6C92B}"/>
+                <a16:creationId xmlns:a16="http://schemas.microsoft.com/office/drawing/2014/main" id="{6373A707-440A-44D2-96B6-E311008121E3}"/>
               </a:ext>
             </a:extLst>
           </p:cNvPr>
@@ -6840,7 +6954,7 @@
                 <a:ea typeface="Arial"/>
                 <a:cs typeface="Arial"/>
               </a:rPr>
-              <a:t>Learning a pattern, or only remembering examples?</a:t>
+              <a:t>Add points and observe the line</a:t>
             </a:r>
           </a:p>
         </p:txBody>
@@ -6850,7 +6964,7 @@
           <p:cNvPr id="3" name="">
             <a:extLst xmlns:a="http://schemas.openxmlformats.org/drawingml/2006/main">
               <a:ext uri="{FF2B5EF4-FFF2-40B4-BE49-F238E27FC236}">
-                <a16:creationId xmlns:a16="http://schemas.microsoft.com/office/drawing/2014/main" id="{DD4889CC-0352-47CC-8C58-7EFE53CD420D}"/>
+                <a16:creationId xmlns:a16="http://schemas.microsoft.com/office/drawing/2014/main" id="{04ECAEE7-9747-43C8-8DD9-252893E5502D}"/>
               </a:ext>
             </a:extLst>
           </p:cNvPr>
@@ -6907,7 +7021,7 @@
           <p:cNvPr id="4" name="">
             <a:extLst xmlns:a="http://schemas.openxmlformats.org/drawingml/2006/main">
               <a:ext uri="{FF2B5EF4-FFF2-40B4-BE49-F238E27FC236}">
-                <a16:creationId xmlns:a16="http://schemas.microsoft.com/office/drawing/2014/main" id="{6F5B432E-7803-4089-8540-850AA2A8F008}"/>
+                <a16:creationId xmlns:a16="http://schemas.microsoft.com/office/drawing/2014/main" id="{A10E88D0-8480-4BC5-AFF8-AE5B5B2D741D}"/>
               </a:ext>
             </a:extLst>
           </p:cNvPr>
@@ -6919,24 +7033,24 @@
         <p:spPr>
           <a:xfrm xmlns:a="http://schemas.openxmlformats.org/drawingml/2006/main">
             <a:off x="609600" y="1714500"/>
-            <a:ext cx="10763250" cy="495300"/>
-          </a:xfrm>
-          <a:prstGeom xmlns:a="http://schemas.openxmlformats.org/drawingml/2006/main" prst="rect">
-            <a:avLst/>
-          </a:prstGeom>
-          <a:noFill xmlns:a="http://schemas.openxmlformats.org/drawingml/2006/main"/>
-          <a:ln xmlns:a="http://schemas.openxmlformats.org/drawingml/2006/main" w="0">
-            <a:noFill/>
-          </a:ln>
-        </p:spPr>
-        <p:txBody>
-          <a:bodyPr xmlns:a="http://schemas.openxmlformats.org/drawingml/2006/main">
-            <a:noAutofit/>
-          </a:bodyPr>
-          <a:lstStyle xmlns:a="http://schemas.openxmlformats.org/drawingml/2006/main"/>
-          <a:p xmlns:a="http://schemas.openxmlformats.org/drawingml/2006/main">
-            <a:pPr>
-              <a:defRPr sz="2550" b="0">
+            <a:ext cx="10572750" cy="495300"/>
+          </a:xfrm>
+          <a:prstGeom xmlns:a="http://schemas.openxmlformats.org/drawingml/2006/main" prst="rect">
+            <a:avLst/>
+          </a:prstGeom>
+          <a:noFill xmlns:a="http://schemas.openxmlformats.org/drawingml/2006/main"/>
+          <a:ln xmlns:a="http://schemas.openxmlformats.org/drawingml/2006/main" w="0">
+            <a:noFill/>
+          </a:ln>
+        </p:spPr>
+        <p:txBody>
+          <a:bodyPr xmlns:a="http://schemas.openxmlformats.org/drawingml/2006/main">
+            <a:noAutofit/>
+          </a:bodyPr>
+          <a:lstStyle xmlns:a="http://schemas.openxmlformats.org/drawingml/2006/main"/>
+          <a:p xmlns:a="http://schemas.openxmlformats.org/drawingml/2006/main">
+            <a:pPr>
+              <a:defRPr sz="2625" b="0">
                 <a:solidFill>
                   <a:srgbClr val="173C43"/>
                 </a:solidFill>
@@ -6946,7 +7060,7 @@
               </a:defRPr>
             </a:pPr>
             <a:r>
-              <a:rPr sz="2550" b="0">
+              <a:rPr sz="2625" b="0">
                 <a:solidFill>
                   <a:srgbClr val="173C43"/>
                 </a:solidFill>
@@ -6954,7 +7068,7 @@
                 <a:ea typeface="Heiti TC"/>
                 <a:cs typeface="Heiti TC"/>
               </a:rPr>
-              <a:t>學習時：用一些例子找出模式</a:t>
+              <a:t>在圖上點一下，加入一個數據點</a:t>
             </a:r>
           </a:p>
         </p:txBody>
@@ -6964,7 +7078,7 @@
           <p:cNvPr id="5" name="">
             <a:extLst xmlns:a="http://schemas.openxmlformats.org/drawingml/2006/main">
               <a:ext uri="{FF2B5EF4-FFF2-40B4-BE49-F238E27FC236}">
-                <a16:creationId xmlns:a16="http://schemas.microsoft.com/office/drawing/2014/main" id="{63B0CF02-1FCF-4638-80F7-01158357CA33}"/>
+                <a16:creationId xmlns:a16="http://schemas.microsoft.com/office/drawing/2014/main" id="{C33996AA-13E2-420B-AAAC-BA33B4565822}"/>
               </a:ext>
             </a:extLst>
           </p:cNvPr>
@@ -6976,42 +7090,42 @@
         <p:spPr>
           <a:xfrm xmlns:a="http://schemas.openxmlformats.org/drawingml/2006/main">
             <a:off x="609600" y="2181225"/>
-            <a:ext cx="10763250" cy="457200"/>
-          </a:xfrm>
-          <a:prstGeom xmlns:a="http://schemas.openxmlformats.org/drawingml/2006/main" prst="rect">
-            <a:avLst/>
-          </a:prstGeom>
-          <a:noFill xmlns:a="http://schemas.openxmlformats.org/drawingml/2006/main"/>
-          <a:ln xmlns:a="http://schemas.openxmlformats.org/drawingml/2006/main" w="0">
-            <a:noFill/>
-          </a:ln>
-        </p:spPr>
-        <p:txBody>
-          <a:bodyPr xmlns:a="http://schemas.openxmlformats.org/drawingml/2006/main">
-            <a:noAutofit/>
-          </a:bodyPr>
-          <a:lstStyle xmlns:a="http://schemas.openxmlformats.org/drawingml/2006/main"/>
-          <a:p xmlns:a="http://schemas.openxmlformats.org/drawingml/2006/main">
-            <a:pPr>
-              <a:defRPr sz="1950" b="0">
-                <a:solidFill>
-                  <a:srgbClr val="526B70"/>
-                </a:solidFill>
-                <a:latin typeface="Arial"/>
-                <a:ea typeface="Arial"/>
-                <a:cs typeface="Arial"/>
-              </a:defRPr>
-            </a:pPr>
-            <a:r>
-              <a:rPr sz="1950" b="0">
-                <a:solidFill>
-                  <a:srgbClr val="526B70"/>
-                </a:solidFill>
-                <a:latin typeface="Arial"/>
-                <a:ea typeface="Arial"/>
-                <a:cs typeface="Arial"/>
-              </a:rPr>
-              <a:t>During learning: use some examples to find a pattern</a:t>
+            <a:ext cx="10572750" cy="457200"/>
+          </a:xfrm>
+          <a:prstGeom xmlns:a="http://schemas.openxmlformats.org/drawingml/2006/main" prst="rect">
+            <a:avLst/>
+          </a:prstGeom>
+          <a:noFill xmlns:a="http://schemas.openxmlformats.org/drawingml/2006/main"/>
+          <a:ln xmlns:a="http://schemas.openxmlformats.org/drawingml/2006/main" w="0">
+            <a:noFill/>
+          </a:ln>
+        </p:spPr>
+        <p:txBody>
+          <a:bodyPr xmlns:a="http://schemas.openxmlformats.org/drawingml/2006/main">
+            <a:noAutofit/>
+          </a:bodyPr>
+          <a:lstStyle xmlns:a="http://schemas.openxmlformats.org/drawingml/2006/main"/>
+          <a:p xmlns:a="http://schemas.openxmlformats.org/drawingml/2006/main">
+            <a:pPr>
+              <a:defRPr sz="2025" b="0">
+                <a:solidFill>
+                  <a:srgbClr val="526B70"/>
+                </a:solidFill>
+                <a:latin typeface="Arial"/>
+                <a:ea typeface="Arial"/>
+                <a:cs typeface="Arial"/>
+              </a:defRPr>
+            </a:pPr>
+            <a:r>
+              <a:rPr sz="2025" b="0">
+                <a:solidFill>
+                  <a:srgbClr val="526B70"/>
+                </a:solidFill>
+                <a:latin typeface="Arial"/>
+                <a:ea typeface="Arial"/>
+                <a:cs typeface="Arial"/>
+              </a:rPr>
+              <a:t>Click or tap the graph to add a data point</a:t>
             </a:r>
           </a:p>
         </p:txBody>
@@ -7021,36 +7135,36 @@
           <p:cNvPr id="6" name="">
             <a:extLst xmlns:a="http://schemas.openxmlformats.org/drawingml/2006/main">
               <a:ext uri="{FF2B5EF4-FFF2-40B4-BE49-F238E27FC236}">
-                <a16:creationId xmlns:a16="http://schemas.microsoft.com/office/drawing/2014/main" id="{A40AF608-CF21-49D1-AA57-CCDFB3625B3F}"/>
-              </a:ext>
-            </a:extLst>
-          </p:cNvPr>
-          <p:cNvSpPr>
-            <a:spLocks xmlns:a="http://schemas.openxmlformats.org/drawingml/2006/main" noGrp="1"/>
-          </p:cNvSpPr>
-          <p:nvPr/>
-        </p:nvSpPr>
-        <p:spPr>
-          <a:xfrm xmlns:a="http://schemas.openxmlformats.org/drawingml/2006/main">
-            <a:off x="609600" y="3133725"/>
-            <a:ext cx="10763250" cy="495300"/>
-          </a:xfrm>
-          <a:prstGeom xmlns:a="http://schemas.openxmlformats.org/drawingml/2006/main" prst="rect">
-            <a:avLst/>
-          </a:prstGeom>
-          <a:noFill xmlns:a="http://schemas.openxmlformats.org/drawingml/2006/main"/>
-          <a:ln xmlns:a="http://schemas.openxmlformats.org/drawingml/2006/main" w="0">
-            <a:noFill/>
-          </a:ln>
-        </p:spPr>
-        <p:txBody>
-          <a:bodyPr xmlns:a="http://schemas.openxmlformats.org/drawingml/2006/main">
-            <a:noAutofit/>
-          </a:bodyPr>
-          <a:lstStyle xmlns:a="http://schemas.openxmlformats.org/drawingml/2006/main"/>
-          <a:p xmlns:a="http://schemas.openxmlformats.org/drawingml/2006/main">
-            <a:pPr>
-              <a:defRPr sz="2550" b="0">
+                <a16:creationId xmlns:a16="http://schemas.microsoft.com/office/drawing/2014/main" id="{6C8FAD7C-4C13-4986-90C9-BAAC369475C0}"/>
+              </a:ext>
+            </a:extLst>
+          </p:cNvPr>
+          <p:cNvSpPr>
+            <a:spLocks xmlns:a="http://schemas.openxmlformats.org/drawingml/2006/main" noGrp="1"/>
+          </p:cNvSpPr>
+          <p:nvPr/>
+        </p:nvSpPr>
+        <p:spPr>
+          <a:xfrm xmlns:a="http://schemas.openxmlformats.org/drawingml/2006/main">
+            <a:off x="609600" y="2952750"/>
+            <a:ext cx="10572750" cy="495300"/>
+          </a:xfrm>
+          <a:prstGeom xmlns:a="http://schemas.openxmlformats.org/drawingml/2006/main" prst="rect">
+            <a:avLst/>
+          </a:prstGeom>
+          <a:noFill xmlns:a="http://schemas.openxmlformats.org/drawingml/2006/main"/>
+          <a:ln xmlns:a="http://schemas.openxmlformats.org/drawingml/2006/main" w="0">
+            <a:noFill/>
+          </a:ln>
+        </p:spPr>
+        <p:txBody>
+          <a:bodyPr xmlns:a="http://schemas.openxmlformats.org/drawingml/2006/main">
+            <a:noAutofit/>
+          </a:bodyPr>
+          <a:lstStyle xmlns:a="http://schemas.openxmlformats.org/drawingml/2006/main"/>
+          <a:p xmlns:a="http://schemas.openxmlformats.org/drawingml/2006/main">
+            <a:pPr>
+              <a:defRPr sz="2625" b="0">
                 <a:solidFill>
                   <a:srgbClr val="173C43"/>
                 </a:solidFill>
@@ -7060,7 +7174,7 @@
               </a:defRPr>
             </a:pPr>
             <a:r>
-              <a:rPr sz="2550" b="0">
+              <a:rPr sz="2625" b="0">
                 <a:solidFill>
                   <a:srgbClr val="173C43"/>
                 </a:solidFill>
@@ -7068,7 +7182,7 @@
                 <a:ea typeface="Heiti TC"/>
                 <a:cs typeface="Heiti TC"/>
               </a:rPr>
-              <a:t>檢查時：用新例子，比較預測與實際結果</a:t>
+              <a:t>比較加入點前後的直線</a:t>
             </a:r>
           </a:p>
         </p:txBody>
@@ -7078,54 +7192,54 @@
           <p:cNvPr id="7" name="">
             <a:extLst xmlns:a="http://schemas.openxmlformats.org/drawingml/2006/main">
               <a:ext uri="{FF2B5EF4-FFF2-40B4-BE49-F238E27FC236}">
-                <a16:creationId xmlns:a16="http://schemas.microsoft.com/office/drawing/2014/main" id="{1B722019-EA02-45D5-9558-B8B68916DDB1}"/>
-              </a:ext>
-            </a:extLst>
-          </p:cNvPr>
-          <p:cNvSpPr>
-            <a:spLocks xmlns:a="http://schemas.openxmlformats.org/drawingml/2006/main" noGrp="1"/>
-          </p:cNvSpPr>
-          <p:nvPr/>
-        </p:nvSpPr>
-        <p:spPr>
-          <a:xfrm xmlns:a="http://schemas.openxmlformats.org/drawingml/2006/main">
-            <a:off x="609600" y="3600450"/>
-            <a:ext cx="10763250" cy="457200"/>
-          </a:xfrm>
-          <a:prstGeom xmlns:a="http://schemas.openxmlformats.org/drawingml/2006/main" prst="rect">
-            <a:avLst/>
-          </a:prstGeom>
-          <a:noFill xmlns:a="http://schemas.openxmlformats.org/drawingml/2006/main"/>
-          <a:ln xmlns:a="http://schemas.openxmlformats.org/drawingml/2006/main" w="0">
-            <a:noFill/>
-          </a:ln>
-        </p:spPr>
-        <p:txBody>
-          <a:bodyPr xmlns:a="http://schemas.openxmlformats.org/drawingml/2006/main">
-            <a:noAutofit/>
-          </a:bodyPr>
-          <a:lstStyle xmlns:a="http://schemas.openxmlformats.org/drawingml/2006/main"/>
-          <a:p xmlns:a="http://schemas.openxmlformats.org/drawingml/2006/main">
-            <a:pPr>
-              <a:defRPr sz="1950" b="0">
-                <a:solidFill>
-                  <a:srgbClr val="526B70"/>
-                </a:solidFill>
-                <a:latin typeface="Arial"/>
-                <a:ea typeface="Arial"/>
-                <a:cs typeface="Arial"/>
-              </a:defRPr>
-            </a:pPr>
-            <a:r>
-              <a:rPr sz="1950" b="0">
-                <a:solidFill>
-                  <a:srgbClr val="526B70"/>
-                </a:solidFill>
-                <a:latin typeface="Arial"/>
-                <a:ea typeface="Arial"/>
-                <a:cs typeface="Arial"/>
-              </a:rPr>
-              <a:t>During checking: compare predictions with actual outcomes on new examples</a:t>
+                <a16:creationId xmlns:a16="http://schemas.microsoft.com/office/drawing/2014/main" id="{04A359E6-C462-47C0-8006-C0901FC8F2FB}"/>
+              </a:ext>
+            </a:extLst>
+          </p:cNvPr>
+          <p:cNvSpPr>
+            <a:spLocks xmlns:a="http://schemas.openxmlformats.org/drawingml/2006/main" noGrp="1"/>
+          </p:cNvSpPr>
+          <p:nvPr/>
+        </p:nvSpPr>
+        <p:spPr>
+          <a:xfrm xmlns:a="http://schemas.openxmlformats.org/drawingml/2006/main">
+            <a:off x="609600" y="3419475"/>
+            <a:ext cx="10572750" cy="457200"/>
+          </a:xfrm>
+          <a:prstGeom xmlns:a="http://schemas.openxmlformats.org/drawingml/2006/main" prst="rect">
+            <a:avLst/>
+          </a:prstGeom>
+          <a:noFill xmlns:a="http://schemas.openxmlformats.org/drawingml/2006/main"/>
+          <a:ln xmlns:a="http://schemas.openxmlformats.org/drawingml/2006/main" w="0">
+            <a:noFill/>
+          </a:ln>
+        </p:spPr>
+        <p:txBody>
+          <a:bodyPr xmlns:a="http://schemas.openxmlformats.org/drawingml/2006/main">
+            <a:noAutofit/>
+          </a:bodyPr>
+          <a:lstStyle xmlns:a="http://schemas.openxmlformats.org/drawingml/2006/main"/>
+          <a:p xmlns:a="http://schemas.openxmlformats.org/drawingml/2006/main">
+            <a:pPr>
+              <a:defRPr sz="2025" b="0">
+                <a:solidFill>
+                  <a:srgbClr val="526B70"/>
+                </a:solidFill>
+                <a:latin typeface="Arial"/>
+                <a:ea typeface="Arial"/>
+                <a:cs typeface="Arial"/>
+              </a:defRPr>
+            </a:pPr>
+            <a:r>
+              <a:rPr sz="2025" b="0">
+                <a:solidFill>
+                  <a:srgbClr val="526B70"/>
+                </a:solidFill>
+                <a:latin typeface="Arial"/>
+                <a:ea typeface="Arial"/>
+                <a:cs typeface="Arial"/>
+              </a:rPr>
+              <a:t>Compare the line before and after adding the point</a:t>
             </a:r>
           </a:p>
         </p:txBody>
@@ -7135,36 +7249,36 @@
           <p:cNvPr id="8" name="">
             <a:extLst xmlns:a="http://schemas.openxmlformats.org/drawingml/2006/main">
               <a:ext uri="{FF2B5EF4-FFF2-40B4-BE49-F238E27FC236}">
-                <a16:creationId xmlns:a16="http://schemas.microsoft.com/office/drawing/2014/main" id="{C9F1E89A-0CD2-4C94-A534-572CD02D0063}"/>
-              </a:ext>
-            </a:extLst>
-          </p:cNvPr>
-          <p:cNvSpPr>
-            <a:spLocks xmlns:a="http://schemas.openxmlformats.org/drawingml/2006/main" noGrp="1"/>
-          </p:cNvSpPr>
-          <p:nvPr/>
-        </p:nvSpPr>
-        <p:spPr>
-          <a:xfrm xmlns:a="http://schemas.openxmlformats.org/drawingml/2006/main">
-            <a:off x="609600" y="4552950"/>
-            <a:ext cx="10763250" cy="495300"/>
-          </a:xfrm>
-          <a:prstGeom xmlns:a="http://schemas.openxmlformats.org/drawingml/2006/main" prst="rect">
-            <a:avLst/>
-          </a:prstGeom>
-          <a:noFill xmlns:a="http://schemas.openxmlformats.org/drawingml/2006/main"/>
-          <a:ln xmlns:a="http://schemas.openxmlformats.org/drawingml/2006/main" w="0">
-            <a:noFill/>
-          </a:ln>
-        </p:spPr>
-        <p:txBody>
-          <a:bodyPr xmlns:a="http://schemas.openxmlformats.org/drawingml/2006/main">
-            <a:noAutofit/>
-          </a:bodyPr>
-          <a:lstStyle xmlns:a="http://schemas.openxmlformats.org/drawingml/2006/main"/>
-          <a:p xmlns:a="http://schemas.openxmlformats.org/drawingml/2006/main">
-            <a:pPr>
-              <a:defRPr sz="2400" b="0">
+                <a16:creationId xmlns:a16="http://schemas.microsoft.com/office/drawing/2014/main" id="{9A3871ED-9B10-479F-A32B-F9EBB4455582}"/>
+              </a:ext>
+            </a:extLst>
+          </p:cNvPr>
+          <p:cNvSpPr>
+            <a:spLocks xmlns:a="http://schemas.openxmlformats.org/drawingml/2006/main" noGrp="1"/>
+          </p:cNvSpPr>
+          <p:nvPr/>
+        </p:nvSpPr>
+        <p:spPr>
+          <a:xfrm xmlns:a="http://schemas.openxmlformats.org/drawingml/2006/main">
+            <a:off x="609600" y="4191000"/>
+            <a:ext cx="10572750" cy="495300"/>
+          </a:xfrm>
+          <a:prstGeom xmlns:a="http://schemas.openxmlformats.org/drawingml/2006/main" prst="rect">
+            <a:avLst/>
+          </a:prstGeom>
+          <a:noFill xmlns:a="http://schemas.openxmlformats.org/drawingml/2006/main"/>
+          <a:ln xmlns:a="http://schemas.openxmlformats.org/drawingml/2006/main" w="0">
+            <a:noFill/>
+          </a:ln>
+        </p:spPr>
+        <p:txBody>
+          <a:bodyPr xmlns:a="http://schemas.openxmlformats.org/drawingml/2006/main">
+            <a:noAutofit/>
+          </a:bodyPr>
+          <a:lstStyle xmlns:a="http://schemas.openxmlformats.org/drawingml/2006/main"/>
+          <a:p xmlns:a="http://schemas.openxmlformats.org/drawingml/2006/main">
+            <a:pPr>
+              <a:defRPr sz="2625" b="0">
                 <a:solidFill>
                   <a:srgbClr val="173C43"/>
                 </a:solidFill>
@@ -7174,7 +7288,7 @@
               </a:defRPr>
             </a:pPr>
             <a:r>
-              <a:rPr sz="2400" b="0">
+              <a:rPr sz="2625" b="0">
                 <a:solidFill>
                   <a:srgbClr val="173C43"/>
                 </a:solidFill>
@@ -7182,7 +7296,7 @@
                 <a:ea typeface="Heiti TC"/>
                 <a:cs typeface="Heiti TC"/>
               </a:rPr>
-              <a:t>數據的品質會影響預測；模型的答案也可能有誤</a:t>
+              <a:t>試一個遠離其他點的新點</a:t>
             </a:r>
           </a:p>
         </p:txBody>
@@ -7192,19 +7306,133 @@
           <p:cNvPr id="9" name="">
             <a:extLst xmlns:a="http://schemas.openxmlformats.org/drawingml/2006/main">
               <a:ext uri="{FF2B5EF4-FFF2-40B4-BE49-F238E27FC236}">
-                <a16:creationId xmlns:a16="http://schemas.microsoft.com/office/drawing/2014/main" id="{810C6EAB-A4DD-4671-9D10-2DC38856321A}"/>
-              </a:ext>
-            </a:extLst>
-          </p:cNvPr>
-          <p:cNvSpPr>
-            <a:spLocks xmlns:a="http://schemas.openxmlformats.org/drawingml/2006/main" noGrp="1"/>
-          </p:cNvSpPr>
-          <p:nvPr/>
-        </p:nvSpPr>
-        <p:spPr>
-          <a:xfrm xmlns:a="http://schemas.openxmlformats.org/drawingml/2006/main">
-            <a:off x="609600" y="5019675"/>
-            <a:ext cx="10763250" cy="457200"/>
+                <a16:creationId xmlns:a16="http://schemas.microsoft.com/office/drawing/2014/main" id="{3785DC09-3250-43CF-AF24-B8E32AB13453}"/>
+              </a:ext>
+            </a:extLst>
+          </p:cNvPr>
+          <p:cNvSpPr>
+            <a:spLocks xmlns:a="http://schemas.openxmlformats.org/drawingml/2006/main" noGrp="1"/>
+          </p:cNvSpPr>
+          <p:nvPr/>
+        </p:nvSpPr>
+        <p:spPr>
+          <a:xfrm xmlns:a="http://schemas.openxmlformats.org/drawingml/2006/main">
+            <a:off x="609600" y="4657725"/>
+            <a:ext cx="10572750" cy="457200"/>
+          </a:xfrm>
+          <a:prstGeom xmlns:a="http://schemas.openxmlformats.org/drawingml/2006/main" prst="rect">
+            <a:avLst/>
+          </a:prstGeom>
+          <a:noFill xmlns:a="http://schemas.openxmlformats.org/drawingml/2006/main"/>
+          <a:ln xmlns:a="http://schemas.openxmlformats.org/drawingml/2006/main" w="0">
+            <a:noFill/>
+          </a:ln>
+        </p:spPr>
+        <p:txBody>
+          <a:bodyPr xmlns:a="http://schemas.openxmlformats.org/drawingml/2006/main">
+            <a:noAutofit/>
+          </a:bodyPr>
+          <a:lstStyle xmlns:a="http://schemas.openxmlformats.org/drawingml/2006/main"/>
+          <a:p xmlns:a="http://schemas.openxmlformats.org/drawingml/2006/main">
+            <a:pPr>
+              <a:defRPr sz="2025" b="0">
+                <a:solidFill>
+                  <a:srgbClr val="526B70"/>
+                </a:solidFill>
+                <a:latin typeface="Arial"/>
+                <a:ea typeface="Arial"/>
+                <a:cs typeface="Arial"/>
+              </a:defRPr>
+            </a:pPr>
+            <a:r>
+              <a:rPr sz="2025" b="0">
+                <a:solidFill>
+                  <a:srgbClr val="526B70"/>
+                </a:solidFill>
+                <a:latin typeface="Arial"/>
+                <a:ea typeface="Arial"/>
+                <a:cs typeface="Arial"/>
+              </a:rPr>
+              <a:t>Try a point far from the other dots</a:t>
+            </a:r>
+          </a:p>
+        </p:txBody>
+      </p:sp>
+      <p:sp>
+        <p:nvSpPr>
+          <p:cNvPr id="10" name="">
+            <a:extLst xmlns:a="http://schemas.openxmlformats.org/drawingml/2006/main">
+              <a:ext uri="{FF2B5EF4-FFF2-40B4-BE49-F238E27FC236}">
+                <a16:creationId xmlns:a16="http://schemas.microsoft.com/office/drawing/2014/main" id="{610F88DA-CA1B-49FB-BBAD-780CECBF4869}"/>
+              </a:ext>
+            </a:extLst>
+          </p:cNvPr>
+          <p:cNvSpPr>
+            <a:spLocks xmlns:a="http://schemas.openxmlformats.org/drawingml/2006/main" noGrp="1"/>
+          </p:cNvSpPr>
+          <p:nvPr/>
+        </p:nvSpPr>
+        <p:spPr>
+          <a:xfrm xmlns:a="http://schemas.openxmlformats.org/drawingml/2006/main">
+            <a:off x="609600" y="5362575"/>
+            <a:ext cx="10572750" cy="495300"/>
+          </a:xfrm>
+          <a:prstGeom xmlns:a="http://schemas.openxmlformats.org/drawingml/2006/main" prst="rect">
+            <a:avLst/>
+          </a:prstGeom>
+          <a:noFill xmlns:a="http://schemas.openxmlformats.org/drawingml/2006/main"/>
+          <a:ln xmlns:a="http://schemas.openxmlformats.org/drawingml/2006/main" w="0">
+            <a:noFill/>
+          </a:ln>
+        </p:spPr>
+        <p:txBody>
+          <a:bodyPr xmlns:a="http://schemas.openxmlformats.org/drawingml/2006/main">
+            <a:noAutofit/>
+          </a:bodyPr>
+          <a:lstStyle xmlns:a="http://schemas.openxmlformats.org/drawingml/2006/main"/>
+          <a:p xmlns:a="http://schemas.openxmlformats.org/drawingml/2006/main">
+            <a:pPr>
+              <a:defRPr sz="2025" b="0">
+                <a:solidFill>
+                  <a:srgbClr val="173C43"/>
+                </a:solidFill>
+                <a:latin typeface="Heiti TC"/>
+                <a:ea typeface="Heiti TC"/>
+                <a:cs typeface="Heiti TC"/>
+              </a:defRPr>
+            </a:pPr>
+            <a:r>
+              <a:rPr sz="2025" b="0">
+                <a:solidFill>
+                  <a:srgbClr val="173C43"/>
+                </a:solidFill>
+                <a:latin typeface="Heiti TC"/>
+                <a:ea typeface="Heiti TC"/>
+                <a:cs typeface="Heiti TC"/>
+              </a:rPr>
+              <a:t>先預測，再觀察。把結果寫在工作紙上。</a:t>
+            </a:r>
+          </a:p>
+        </p:txBody>
+      </p:sp>
+      <p:sp>
+        <p:nvSpPr>
+          <p:cNvPr id="11" name="">
+            <a:extLst xmlns:a="http://schemas.openxmlformats.org/drawingml/2006/main">
+              <a:ext uri="{FF2B5EF4-FFF2-40B4-BE49-F238E27FC236}">
+                <a16:creationId xmlns:a16="http://schemas.microsoft.com/office/drawing/2014/main" id="{5D97DCFB-2A80-4469-9D1D-84C015E87260}"/>
+              </a:ext>
+            </a:extLst>
+          </p:cNvPr>
+          <p:cNvSpPr>
+            <a:spLocks xmlns:a="http://schemas.openxmlformats.org/drawingml/2006/main" noGrp="1"/>
+          </p:cNvSpPr>
+          <p:nvPr/>
+        </p:nvSpPr>
+        <p:spPr>
+          <a:xfrm xmlns:a="http://schemas.openxmlformats.org/drawingml/2006/main">
+            <a:off x="609600" y="5829300"/>
+            <a:ext cx="10572750" cy="457200"/>
           </a:xfrm>
           <a:prstGeom xmlns:a="http://schemas.openxmlformats.org/drawingml/2006/main" prst="rect">
             <a:avLst/>
@@ -7239,64 +7467,7 @@
                 <a:ea typeface="Arial"/>
                 <a:cs typeface="Arial"/>
               </a:rPr>
-              <a:t>Data quality affects predictions. A model can still give a wrong answer.</a:t>
-            </a:r>
-          </a:p>
-        </p:txBody>
-      </p:sp>
-      <p:sp>
-        <p:nvSpPr>
-          <p:cNvPr id="10" name="">
-            <a:extLst xmlns:a="http://schemas.openxmlformats.org/drawingml/2006/main">
-              <a:ext uri="{FF2B5EF4-FFF2-40B4-BE49-F238E27FC236}">
-                <a16:creationId xmlns:a16="http://schemas.microsoft.com/office/drawing/2014/main" id="{397B7A77-AD80-416B-82FA-8CB07F531ABA}"/>
-              </a:ext>
-            </a:extLst>
-          </p:cNvPr>
-          <p:cNvSpPr>
-            <a:spLocks xmlns:a="http://schemas.openxmlformats.org/drawingml/2006/main" noGrp="1"/>
-          </p:cNvSpPr>
-          <p:nvPr/>
-        </p:nvSpPr>
-        <p:spPr>
-          <a:xfrm xmlns:a="http://schemas.openxmlformats.org/drawingml/2006/main">
-            <a:off x="609600" y="6419850"/>
-            <a:ext cx="10096500" cy="238125"/>
-          </a:xfrm>
-          <a:prstGeom xmlns:a="http://schemas.openxmlformats.org/drawingml/2006/main" prst="rect">
-            <a:avLst/>
-          </a:prstGeom>
-          <a:noFill xmlns:a="http://schemas.openxmlformats.org/drawingml/2006/main"/>
-          <a:ln xmlns:a="http://schemas.openxmlformats.org/drawingml/2006/main" w="0">
-            <a:noFill/>
-          </a:ln>
-        </p:spPr>
-        <p:txBody>
-          <a:bodyPr xmlns:a="http://schemas.openxmlformats.org/drawingml/2006/main">
-            <a:noAutofit/>
-          </a:bodyPr>
-          <a:lstStyle xmlns:a="http://schemas.openxmlformats.org/drawingml/2006/main"/>
-          <a:p xmlns:a="http://schemas.openxmlformats.org/drawingml/2006/main">
-            <a:pPr>
-              <a:defRPr sz="1200" b="0">
-                <a:solidFill>
-                  <a:srgbClr val="526B70"/>
-                </a:solidFill>
-                <a:latin typeface="Heiti TC"/>
-                <a:ea typeface="Heiti TC"/>
-                <a:cs typeface="Heiti TC"/>
-              </a:defRPr>
-            </a:pPr>
-            <a:r>
-              <a:rPr sz="1200" b="0">
-                <a:solidFill>
-                  <a:srgbClr val="526B70"/>
-                </a:solidFill>
-                <a:latin typeface="Heiti TC"/>
-                <a:ea typeface="Heiti TC"/>
-                <a:cs typeface="Heiti TC"/>
-              </a:rPr>
-              <a:t>參考 / Source: Google Machine Learning Crash Course</a:t>
+              <a:t>Predict first, then observe. Record the result on your worksheet.</a:t>
             </a:r>
           </a:p>
         </p:txBody>
@@ -7304,7 +7475,7 @@
     </p:spTree>
     <p:extLst>
       <p:ext uri="{BB962C8B-B14F-4D97-AF65-F5344CB8AC3E}">
-        <p14:creationId xmlns:p14="http://schemas.microsoft.com/office/powerpoint/2010/main" val="1269326950"/>
+        <p14:creationId xmlns:p14="http://schemas.microsoft.com/office/powerpoint/2010/main" val="197663298"/>
       </p:ext>
     </p:extLst>
   </p:cSld>
@@ -7335,7 +7506,7 @@
           <p:cNvPr id="12" name="">
             <a:extLst xmlns:a="http://schemas.openxmlformats.org/drawingml/2006/main">
               <a:ext uri="{FF2B5EF4-FFF2-40B4-BE49-F238E27FC236}">
-                <a16:creationId xmlns:a16="http://schemas.microsoft.com/office/drawing/2014/main" id="{AEBF8CFC-D9DB-47A3-A4A2-21FF75BF8F61}"/>
+                <a16:creationId xmlns:a16="http://schemas.microsoft.com/office/drawing/2014/main" id="{319D9CF1-4C2E-4311-B202-47A6AB79BEBA}"/>
               </a:ext>
             </a:extLst>
           </p:cNvPr>
@@ -7382,7 +7553,7 @@
                 <a:ea typeface="Heiti TC"/>
                 <a:cs typeface="Heiti TC"/>
               </a:rPr>
-              <a:t>加入新點，觀察直線</a:t>
+              <a:t>每天溫習時間與考試成績</a:t>
             </a:r>
           </a:p>
         </p:txBody>
@@ -7392,7 +7563,7 @@
           <p:cNvPr id="2" name="">
             <a:extLst xmlns:a="http://schemas.openxmlformats.org/drawingml/2006/main">
               <a:ext uri="{FF2B5EF4-FFF2-40B4-BE49-F238E27FC236}">
-                <a16:creationId xmlns:a16="http://schemas.microsoft.com/office/drawing/2014/main" id="{AE90A079-5BBC-465A-A7E4-7AA6FEEA4908}"/>
+                <a16:creationId xmlns:a16="http://schemas.microsoft.com/office/drawing/2014/main" id="{02AB5536-E9F5-4127-BB6E-26D14CD8E1D9}"/>
               </a:ext>
             </a:extLst>
           </p:cNvPr>
@@ -7439,7 +7610,7 @@
                 <a:ea typeface="Arial"/>
                 <a:cs typeface="Arial"/>
               </a:rPr>
-              <a:t>Add points and observe the line</a:t>
+              <a:t>Daily study time and exam score</a:t>
             </a:r>
           </a:p>
         </p:txBody>
@@ -7449,7 +7620,7 @@
           <p:cNvPr id="3" name="">
             <a:extLst xmlns:a="http://schemas.openxmlformats.org/drawingml/2006/main">
               <a:ext uri="{FF2B5EF4-FFF2-40B4-BE49-F238E27FC236}">
-                <a16:creationId xmlns:a16="http://schemas.microsoft.com/office/drawing/2014/main" id="{DCA4CC95-3E8B-41FA-AB81-25C5CA263F63}"/>
+                <a16:creationId xmlns:a16="http://schemas.microsoft.com/office/drawing/2014/main" id="{7BC72C60-002C-4E39-8283-6C1447BAF481}"/>
               </a:ext>
             </a:extLst>
           </p:cNvPr>
@@ -7501,41 +7672,57 @@
           </a:p>
         </p:txBody>
       </p:sp>
-      <p:sp>
-        <p:nvSpPr>
-          <p:cNvPr id="4" name="">
-            <a:extLst xmlns:a="http://schemas.openxmlformats.org/drawingml/2006/main">
-              <a:ext uri="{FF2B5EF4-FFF2-40B4-BE49-F238E27FC236}">
-                <a16:creationId xmlns:a16="http://schemas.microsoft.com/office/drawing/2014/main" id="{EECEC7A7-18AE-44CE-B69B-DF01C1D0950D}"/>
-              </a:ext>
-            </a:extLst>
-          </p:cNvPr>
-          <p:cNvSpPr>
-            <a:spLocks xmlns:a="http://schemas.openxmlformats.org/drawingml/2006/main" noGrp="1"/>
-          </p:cNvSpPr>
-          <p:nvPr/>
-        </p:nvSpPr>
-        <p:spPr>
-          <a:xfrm xmlns:a="http://schemas.openxmlformats.org/drawingml/2006/main">
-            <a:off x="609600" y="1714500"/>
-            <a:ext cx="10572750" cy="495300"/>
-          </a:xfrm>
-          <a:prstGeom xmlns:a="http://schemas.openxmlformats.org/drawingml/2006/main" prst="rect">
-            <a:avLst/>
-          </a:prstGeom>
-          <a:noFill xmlns:a="http://schemas.openxmlformats.org/drawingml/2006/main"/>
-          <a:ln xmlns:a="http://schemas.openxmlformats.org/drawingml/2006/main" w="0">
-            <a:noFill/>
-          </a:ln>
-        </p:spPr>
-        <p:txBody>
-          <a:bodyPr xmlns:a="http://schemas.openxmlformats.org/drawingml/2006/main">
-            <a:noAutofit/>
-          </a:bodyPr>
-          <a:lstStyle xmlns:a="http://schemas.openxmlformats.org/drawingml/2006/main"/>
-          <a:p xmlns:a="http://schemas.openxmlformats.org/drawingml/2006/main">
-            <a:pPr>
-              <a:defRPr sz="2625" b="0">
+      <p:graphicFrame>
+        <p:nvGraphicFramePr>
+          <p:cNvPr id="15" name="Chart"/>
+          <p:cNvGraphicFramePr/>
+          <p:nvPr/>
+        </p:nvGraphicFramePr>
+        <p:xfrm>
+          <a:off xmlns:a="http://schemas.openxmlformats.org/drawingml/2006/main" x="609600" y="1647825"/>
+          <a:ext xmlns:a="http://schemas.openxmlformats.org/drawingml/2006/main" cx="6905625" cy="4286250"/>
+        </p:xfrm>
+        <a:graphic xmlns:a="http://schemas.openxmlformats.org/drawingml/2006/main">
+          <a:graphicData uri="http://schemas.openxmlformats.org/drawingml/2006/chart">
+            <c:chart xmlns:r="http://schemas.openxmlformats.org/officeDocument/2006/relationships" xmlns:c="http://schemas.openxmlformats.org/drawingml/2006/chart" r:id="Rfa6c8ce4dbcb4eab"/>
+          </a:graphicData>
+        </a:graphic>
+      </p:graphicFrame>
+      <p:sp>
+        <p:nvSpPr>
+          <p:cNvPr id="5" name="">
+            <a:extLst xmlns:a="http://schemas.openxmlformats.org/drawingml/2006/main">
+              <a:ext uri="{FF2B5EF4-FFF2-40B4-BE49-F238E27FC236}">
+                <a16:creationId xmlns:a16="http://schemas.microsoft.com/office/drawing/2014/main" id="{A0CDBCE9-F086-4F8B-B6CF-80712A9B4D19}"/>
+              </a:ext>
+            </a:extLst>
+          </p:cNvPr>
+          <p:cNvSpPr>
+            <a:spLocks xmlns:a="http://schemas.openxmlformats.org/drawingml/2006/main" noGrp="1"/>
+          </p:cNvSpPr>
+          <p:nvPr/>
+        </p:nvSpPr>
+        <p:spPr>
+          <a:xfrm xmlns:a="http://schemas.openxmlformats.org/drawingml/2006/main">
+            <a:off x="8020050" y="1819275"/>
+            <a:ext cx="3571875" cy="495300"/>
+          </a:xfrm>
+          <a:prstGeom xmlns:a="http://schemas.openxmlformats.org/drawingml/2006/main" prst="rect">
+            <a:avLst/>
+          </a:prstGeom>
+          <a:noFill xmlns:a="http://schemas.openxmlformats.org/drawingml/2006/main"/>
+          <a:ln xmlns:a="http://schemas.openxmlformats.org/drawingml/2006/main" w="0">
+            <a:noFill/>
+          </a:ln>
+        </p:spPr>
+        <p:txBody>
+          <a:bodyPr xmlns:a="http://schemas.openxmlformats.org/drawingml/2006/main">
+            <a:noAutofit/>
+          </a:bodyPr>
+          <a:lstStyle xmlns:a="http://schemas.openxmlformats.org/drawingml/2006/main"/>
+          <a:p xmlns:a="http://schemas.openxmlformats.org/drawingml/2006/main">
+            <a:pPr>
+              <a:defRPr sz="2100" b="0">
                 <a:solidFill>
                   <a:srgbClr val="173C43"/>
                 </a:solidFill>
@@ -7545,7 +7732,7 @@
               </a:defRPr>
             </a:pPr>
             <a:r>
-              <a:rPr sz="2625" b="0">
+              <a:rPr sz="2100" b="0">
                 <a:solidFill>
                   <a:srgbClr val="173C43"/>
                 </a:solidFill>
@@ -7553,64 +7740,7 @@
                 <a:ea typeface="Heiti TC"/>
                 <a:cs typeface="Heiti TC"/>
               </a:rPr>
-              <a:t>在圖上點一下，加入一個數據點</a:t>
-            </a:r>
-          </a:p>
-        </p:txBody>
-      </p:sp>
-      <p:sp>
-        <p:nvSpPr>
-          <p:cNvPr id="5" name="">
-            <a:extLst xmlns:a="http://schemas.openxmlformats.org/drawingml/2006/main">
-              <a:ext uri="{FF2B5EF4-FFF2-40B4-BE49-F238E27FC236}">
-                <a16:creationId xmlns:a16="http://schemas.microsoft.com/office/drawing/2014/main" id="{EE5EB6F3-C2CF-4B2C-9D8A-E34D166FA891}"/>
-              </a:ext>
-            </a:extLst>
-          </p:cNvPr>
-          <p:cNvSpPr>
-            <a:spLocks xmlns:a="http://schemas.openxmlformats.org/drawingml/2006/main" noGrp="1"/>
-          </p:cNvSpPr>
-          <p:nvPr/>
-        </p:nvSpPr>
-        <p:spPr>
-          <a:xfrm xmlns:a="http://schemas.openxmlformats.org/drawingml/2006/main">
-            <a:off x="609600" y="2181225"/>
-            <a:ext cx="10572750" cy="457200"/>
-          </a:xfrm>
-          <a:prstGeom xmlns:a="http://schemas.openxmlformats.org/drawingml/2006/main" prst="rect">
-            <a:avLst/>
-          </a:prstGeom>
-          <a:noFill xmlns:a="http://schemas.openxmlformats.org/drawingml/2006/main"/>
-          <a:ln xmlns:a="http://schemas.openxmlformats.org/drawingml/2006/main" w="0">
-            <a:noFill/>
-          </a:ln>
-        </p:spPr>
-        <p:txBody>
-          <a:bodyPr xmlns:a="http://schemas.openxmlformats.org/drawingml/2006/main">
-            <a:noAutofit/>
-          </a:bodyPr>
-          <a:lstStyle xmlns:a="http://schemas.openxmlformats.org/drawingml/2006/main"/>
-          <a:p xmlns:a="http://schemas.openxmlformats.org/drawingml/2006/main">
-            <a:pPr>
-              <a:defRPr sz="2025" b="0">
-                <a:solidFill>
-                  <a:srgbClr val="526B70"/>
-                </a:solidFill>
-                <a:latin typeface="Arial"/>
-                <a:ea typeface="Arial"/>
-                <a:cs typeface="Arial"/>
-              </a:defRPr>
-            </a:pPr>
-            <a:r>
-              <a:rPr sz="2025" b="0">
-                <a:solidFill>
-                  <a:srgbClr val="526B70"/>
-                </a:solidFill>
-                <a:latin typeface="Arial"/>
-                <a:ea typeface="Arial"/>
-                <a:cs typeface="Arial"/>
-              </a:rPr>
-              <a:t>Click or tap the graph to add a data point</a:t>
+              <a:t>3.5 小時的預測成績？</a:t>
             </a:r>
           </a:p>
         </p:txBody>
@@ -7620,36 +7750,93 @@
           <p:cNvPr id="6" name="">
             <a:extLst xmlns:a="http://schemas.openxmlformats.org/drawingml/2006/main">
               <a:ext uri="{FF2B5EF4-FFF2-40B4-BE49-F238E27FC236}">
-                <a16:creationId xmlns:a16="http://schemas.microsoft.com/office/drawing/2014/main" id="{02146206-5A72-4BAC-8602-CE077BCE8BD4}"/>
-              </a:ext>
-            </a:extLst>
-          </p:cNvPr>
-          <p:cNvSpPr>
-            <a:spLocks xmlns:a="http://schemas.openxmlformats.org/drawingml/2006/main" noGrp="1"/>
-          </p:cNvSpPr>
-          <p:nvPr/>
-        </p:nvSpPr>
-        <p:spPr>
-          <a:xfrm xmlns:a="http://schemas.openxmlformats.org/drawingml/2006/main">
-            <a:off x="609600" y="2952750"/>
-            <a:ext cx="10572750" cy="495300"/>
-          </a:xfrm>
-          <a:prstGeom xmlns:a="http://schemas.openxmlformats.org/drawingml/2006/main" prst="rect">
-            <a:avLst/>
-          </a:prstGeom>
-          <a:noFill xmlns:a="http://schemas.openxmlformats.org/drawingml/2006/main"/>
-          <a:ln xmlns:a="http://schemas.openxmlformats.org/drawingml/2006/main" w="0">
-            <a:noFill/>
-          </a:ln>
-        </p:spPr>
-        <p:txBody>
-          <a:bodyPr xmlns:a="http://schemas.openxmlformats.org/drawingml/2006/main">
-            <a:noAutofit/>
-          </a:bodyPr>
-          <a:lstStyle xmlns:a="http://schemas.openxmlformats.org/drawingml/2006/main"/>
-          <a:p xmlns:a="http://schemas.openxmlformats.org/drawingml/2006/main">
-            <a:pPr>
-              <a:defRPr sz="2625" b="0">
+                <a16:creationId xmlns:a16="http://schemas.microsoft.com/office/drawing/2014/main" id="{61BA3AEF-F765-431C-8E30-992410B6DF4A}"/>
+              </a:ext>
+            </a:extLst>
+          </p:cNvPr>
+          <p:cNvSpPr>
+            <a:spLocks xmlns:a="http://schemas.openxmlformats.org/drawingml/2006/main" noGrp="1"/>
+          </p:cNvSpPr>
+          <p:nvPr/>
+        </p:nvSpPr>
+        <p:spPr>
+          <a:xfrm xmlns:a="http://schemas.openxmlformats.org/drawingml/2006/main">
+            <a:off x="8020050" y="2286000"/>
+            <a:ext cx="3571875" cy="457200"/>
+          </a:xfrm>
+          <a:prstGeom xmlns:a="http://schemas.openxmlformats.org/drawingml/2006/main" prst="rect">
+            <a:avLst/>
+          </a:prstGeom>
+          <a:noFill xmlns:a="http://schemas.openxmlformats.org/drawingml/2006/main"/>
+          <a:ln xmlns:a="http://schemas.openxmlformats.org/drawingml/2006/main" w="0">
+            <a:noFill/>
+          </a:ln>
+        </p:spPr>
+        <p:txBody>
+          <a:bodyPr xmlns:a="http://schemas.openxmlformats.org/drawingml/2006/main">
+            <a:noAutofit/>
+          </a:bodyPr>
+          <a:lstStyle xmlns:a="http://schemas.openxmlformats.org/drawingml/2006/main"/>
+          <a:p xmlns:a="http://schemas.openxmlformats.org/drawingml/2006/main">
+            <a:pPr>
+              <a:defRPr sz="1800" b="0">
+                <a:solidFill>
+                  <a:srgbClr val="526B70"/>
+                </a:solidFill>
+                <a:latin typeface="Arial"/>
+                <a:ea typeface="Arial"/>
+                <a:cs typeface="Arial"/>
+              </a:defRPr>
+            </a:pPr>
+            <a:r>
+              <a:rPr sz="1800" b="0">
+                <a:solidFill>
+                  <a:srgbClr val="526B70"/>
+                </a:solidFill>
+                <a:latin typeface="Arial"/>
+                <a:ea typeface="Arial"/>
+                <a:cs typeface="Arial"/>
+              </a:rPr>
+              <a:t>Score for 3.5 hours a day?</a:t>
+            </a:r>
+          </a:p>
+        </p:txBody>
+      </p:sp>
+      <p:sp>
+        <p:nvSpPr>
+          <p:cNvPr id="7" name="">
+            <a:extLst xmlns:a="http://schemas.openxmlformats.org/drawingml/2006/main">
+              <a:ext uri="{FF2B5EF4-FFF2-40B4-BE49-F238E27FC236}">
+                <a16:creationId xmlns:a16="http://schemas.microsoft.com/office/drawing/2014/main" id="{1E819DFD-6558-4D07-80A2-403242A8AFBC}"/>
+              </a:ext>
+            </a:extLst>
+          </p:cNvPr>
+          <p:cNvSpPr>
+            <a:spLocks xmlns:a="http://schemas.openxmlformats.org/drawingml/2006/main" noGrp="1"/>
+          </p:cNvSpPr>
+          <p:nvPr/>
+        </p:nvSpPr>
+        <p:spPr>
+          <a:xfrm xmlns:a="http://schemas.openxmlformats.org/drawingml/2006/main">
+            <a:off x="8020050" y="3390900"/>
+            <a:ext cx="3571875" cy="495300"/>
+          </a:xfrm>
+          <a:prstGeom xmlns:a="http://schemas.openxmlformats.org/drawingml/2006/main" prst="rect">
+            <a:avLst/>
+          </a:prstGeom>
+          <a:noFill xmlns:a="http://schemas.openxmlformats.org/drawingml/2006/main"/>
+          <a:ln xmlns:a="http://schemas.openxmlformats.org/drawingml/2006/main" w="0">
+            <a:noFill/>
+          </a:ln>
+        </p:spPr>
+        <p:txBody>
+          <a:bodyPr xmlns:a="http://schemas.openxmlformats.org/drawingml/2006/main">
+            <a:noAutofit/>
+          </a:bodyPr>
+          <a:lstStyle xmlns:a="http://schemas.openxmlformats.org/drawingml/2006/main"/>
+          <a:p xmlns:a="http://schemas.openxmlformats.org/drawingml/2006/main">
+            <a:pPr>
+              <a:defRPr sz="2175" b="0">
                 <a:solidFill>
                   <a:srgbClr val="173C43"/>
                 </a:solidFill>
@@ -7659,7 +7846,7 @@
               </a:defRPr>
             </a:pPr>
             <a:r>
-              <a:rPr sz="2625" b="0">
+              <a:rPr sz="2175" b="0">
                 <a:solidFill>
                   <a:srgbClr val="173C43"/>
                 </a:solidFill>
@@ -7667,64 +7854,7 @@
                 <a:ea typeface="Heiti TC"/>
                 <a:cs typeface="Heiti TC"/>
               </a:rPr>
-              <a:t>比較加入點前後的 m 和 c</a:t>
-            </a:r>
-          </a:p>
-        </p:txBody>
-      </p:sp>
-      <p:sp>
-        <p:nvSpPr>
-          <p:cNvPr id="7" name="">
-            <a:extLst xmlns:a="http://schemas.openxmlformats.org/drawingml/2006/main">
-              <a:ext uri="{FF2B5EF4-FFF2-40B4-BE49-F238E27FC236}">
-                <a16:creationId xmlns:a16="http://schemas.microsoft.com/office/drawing/2014/main" id="{AC0EE1BD-CAA1-400F-8218-D92CCCB1FB43}"/>
-              </a:ext>
-            </a:extLst>
-          </p:cNvPr>
-          <p:cNvSpPr>
-            <a:spLocks xmlns:a="http://schemas.openxmlformats.org/drawingml/2006/main" noGrp="1"/>
-          </p:cNvSpPr>
-          <p:nvPr/>
-        </p:nvSpPr>
-        <p:spPr>
-          <a:xfrm xmlns:a="http://schemas.openxmlformats.org/drawingml/2006/main">
-            <a:off x="609600" y="3419475"/>
-            <a:ext cx="10572750" cy="457200"/>
-          </a:xfrm>
-          <a:prstGeom xmlns:a="http://schemas.openxmlformats.org/drawingml/2006/main" prst="rect">
-            <a:avLst/>
-          </a:prstGeom>
-          <a:noFill xmlns:a="http://schemas.openxmlformats.org/drawingml/2006/main"/>
-          <a:ln xmlns:a="http://schemas.openxmlformats.org/drawingml/2006/main" w="0">
-            <a:noFill/>
-          </a:ln>
-        </p:spPr>
-        <p:txBody>
-          <a:bodyPr xmlns:a="http://schemas.openxmlformats.org/drawingml/2006/main">
-            <a:noAutofit/>
-          </a:bodyPr>
-          <a:lstStyle xmlns:a="http://schemas.openxmlformats.org/drawingml/2006/main"/>
-          <a:p xmlns:a="http://schemas.openxmlformats.org/drawingml/2006/main">
-            <a:pPr>
-              <a:defRPr sz="2025" b="0">
-                <a:solidFill>
-                  <a:srgbClr val="526B70"/>
-                </a:solidFill>
-                <a:latin typeface="Arial"/>
-                <a:ea typeface="Arial"/>
-                <a:cs typeface="Arial"/>
-              </a:defRPr>
-            </a:pPr>
-            <a:r>
-              <a:rPr sz="2025" b="0">
-                <a:solidFill>
-                  <a:srgbClr val="526B70"/>
-                </a:solidFill>
-                <a:latin typeface="Arial"/>
-                <a:ea typeface="Arial"/>
-                <a:cs typeface="Arial"/>
-              </a:rPr>
-              <a:t>Compare m and c before and after adding the point</a:t>
+              <a:t>先畫直線，再估計</a:t>
             </a:r>
           </a:p>
         </p:txBody>
@@ -7734,36 +7864,93 @@
           <p:cNvPr id="8" name="">
             <a:extLst xmlns:a="http://schemas.openxmlformats.org/drawingml/2006/main">
               <a:ext uri="{FF2B5EF4-FFF2-40B4-BE49-F238E27FC236}">
-                <a16:creationId xmlns:a16="http://schemas.microsoft.com/office/drawing/2014/main" id="{F6D6AD99-74C0-411C-897B-FE5873CA4BA4}"/>
-              </a:ext>
-            </a:extLst>
-          </p:cNvPr>
-          <p:cNvSpPr>
-            <a:spLocks xmlns:a="http://schemas.openxmlformats.org/drawingml/2006/main" noGrp="1"/>
-          </p:cNvSpPr>
-          <p:nvPr/>
-        </p:nvSpPr>
-        <p:spPr>
-          <a:xfrm xmlns:a="http://schemas.openxmlformats.org/drawingml/2006/main">
-            <a:off x="609600" y="4191000"/>
-            <a:ext cx="10572750" cy="495300"/>
-          </a:xfrm>
-          <a:prstGeom xmlns:a="http://schemas.openxmlformats.org/drawingml/2006/main" prst="rect">
-            <a:avLst/>
-          </a:prstGeom>
-          <a:noFill xmlns:a="http://schemas.openxmlformats.org/drawingml/2006/main"/>
-          <a:ln xmlns:a="http://schemas.openxmlformats.org/drawingml/2006/main" w="0">
-            <a:noFill/>
-          </a:ln>
-        </p:spPr>
-        <p:txBody>
-          <a:bodyPr xmlns:a="http://schemas.openxmlformats.org/drawingml/2006/main">
-            <a:noAutofit/>
-          </a:bodyPr>
-          <a:lstStyle xmlns:a="http://schemas.openxmlformats.org/drawingml/2006/main"/>
-          <a:p xmlns:a="http://schemas.openxmlformats.org/drawingml/2006/main">
-            <a:pPr>
-              <a:defRPr sz="2625" b="0">
+                <a16:creationId xmlns:a16="http://schemas.microsoft.com/office/drawing/2014/main" id="{8B1C4A9D-DCF2-421F-AAD8-F7137ABBD909}"/>
+              </a:ext>
+            </a:extLst>
+          </p:cNvPr>
+          <p:cNvSpPr>
+            <a:spLocks xmlns:a="http://schemas.openxmlformats.org/drawingml/2006/main" noGrp="1"/>
+          </p:cNvSpPr>
+          <p:nvPr/>
+        </p:nvSpPr>
+        <p:spPr>
+          <a:xfrm xmlns:a="http://schemas.openxmlformats.org/drawingml/2006/main">
+            <a:off x="8020050" y="3857625"/>
+            <a:ext cx="3571875" cy="457200"/>
+          </a:xfrm>
+          <a:prstGeom xmlns:a="http://schemas.openxmlformats.org/drawingml/2006/main" prst="rect">
+            <a:avLst/>
+          </a:prstGeom>
+          <a:noFill xmlns:a="http://schemas.openxmlformats.org/drawingml/2006/main"/>
+          <a:ln xmlns:a="http://schemas.openxmlformats.org/drawingml/2006/main" w="0">
+            <a:noFill/>
+          </a:ln>
+        </p:spPr>
+        <p:txBody>
+          <a:bodyPr xmlns:a="http://schemas.openxmlformats.org/drawingml/2006/main">
+            <a:noAutofit/>
+          </a:bodyPr>
+          <a:lstStyle xmlns:a="http://schemas.openxmlformats.org/drawingml/2006/main"/>
+          <a:p xmlns:a="http://schemas.openxmlformats.org/drawingml/2006/main">
+            <a:pPr>
+              <a:defRPr sz="1800" b="0">
+                <a:solidFill>
+                  <a:srgbClr val="526B70"/>
+                </a:solidFill>
+                <a:latin typeface="Arial"/>
+                <a:ea typeface="Arial"/>
+                <a:cs typeface="Arial"/>
+              </a:defRPr>
+            </a:pPr>
+            <a:r>
+              <a:rPr sz="1800" b="0">
+                <a:solidFill>
+                  <a:srgbClr val="526B70"/>
+                </a:solidFill>
+                <a:latin typeface="Arial"/>
+                <a:ea typeface="Arial"/>
+                <a:cs typeface="Arial"/>
+              </a:rPr>
+              <a:t>Draw your line, then estimate</a:t>
+            </a:r>
+          </a:p>
+        </p:txBody>
+      </p:sp>
+      <p:sp>
+        <p:nvSpPr>
+          <p:cNvPr id="9" name="">
+            <a:extLst xmlns:a="http://schemas.openxmlformats.org/drawingml/2006/main">
+              <a:ext uri="{FF2B5EF4-FFF2-40B4-BE49-F238E27FC236}">
+                <a16:creationId xmlns:a16="http://schemas.microsoft.com/office/drawing/2014/main" id="{0E623A31-F768-4432-B8FC-B3DDFBDEF4F8}"/>
+              </a:ext>
+            </a:extLst>
+          </p:cNvPr>
+          <p:cNvSpPr>
+            <a:spLocks xmlns:a="http://schemas.openxmlformats.org/drawingml/2006/main" noGrp="1"/>
+          </p:cNvSpPr>
+          <p:nvPr/>
+        </p:nvSpPr>
+        <p:spPr>
+          <a:xfrm xmlns:a="http://schemas.openxmlformats.org/drawingml/2006/main">
+            <a:off x="8020050" y="4819650"/>
+            <a:ext cx="3571875" cy="495300"/>
+          </a:xfrm>
+          <a:prstGeom xmlns:a="http://schemas.openxmlformats.org/drawingml/2006/main" prst="rect">
+            <a:avLst/>
+          </a:prstGeom>
+          <a:noFill xmlns:a="http://schemas.openxmlformats.org/drawingml/2006/main"/>
+          <a:ln xmlns:a="http://schemas.openxmlformats.org/drawingml/2006/main" w="0">
+            <a:noFill/>
+          </a:ln>
+        </p:spPr>
+        <p:txBody>
+          <a:bodyPr xmlns:a="http://schemas.openxmlformats.org/drawingml/2006/main">
+            <a:noAutofit/>
+          </a:bodyPr>
+          <a:lstStyle xmlns:a="http://schemas.openxmlformats.org/drawingml/2006/main"/>
+          <a:p xmlns:a="http://schemas.openxmlformats.org/drawingml/2006/main">
+            <a:pPr>
+              <a:defRPr sz="2100" b="0">
                 <a:solidFill>
                   <a:srgbClr val="173C43"/>
                 </a:solidFill>
@@ -7773,7 +7960,7 @@
               </a:defRPr>
             </a:pPr>
             <a:r>
-              <a:rPr sz="2625" b="0">
+              <a:rPr sz="2100" b="0">
                 <a:solidFill>
                   <a:srgbClr val="173C43"/>
                 </a:solidFill>
@@ -7781,64 +7968,7 @@
                 <a:ea typeface="Heiti TC"/>
                 <a:cs typeface="Heiti TC"/>
               </a:rPr>
-              <a:t>試一個遠離其他點的新點</a:t>
-            </a:r>
-          </a:p>
-        </p:txBody>
-      </p:sp>
-      <p:sp>
-        <p:nvSpPr>
-          <p:cNvPr id="9" name="">
-            <a:extLst xmlns:a="http://schemas.openxmlformats.org/drawingml/2006/main">
-              <a:ext uri="{FF2B5EF4-FFF2-40B4-BE49-F238E27FC236}">
-                <a16:creationId xmlns:a16="http://schemas.microsoft.com/office/drawing/2014/main" id="{94A206B8-4D80-44E7-851D-D5787A499D0A}"/>
-              </a:ext>
-            </a:extLst>
-          </p:cNvPr>
-          <p:cNvSpPr>
-            <a:spLocks xmlns:a="http://schemas.openxmlformats.org/drawingml/2006/main" noGrp="1"/>
-          </p:cNvSpPr>
-          <p:nvPr/>
-        </p:nvSpPr>
-        <p:spPr>
-          <a:xfrm xmlns:a="http://schemas.openxmlformats.org/drawingml/2006/main">
-            <a:off x="609600" y="4657725"/>
-            <a:ext cx="10572750" cy="457200"/>
-          </a:xfrm>
-          <a:prstGeom xmlns:a="http://schemas.openxmlformats.org/drawingml/2006/main" prst="rect">
-            <a:avLst/>
-          </a:prstGeom>
-          <a:noFill xmlns:a="http://schemas.openxmlformats.org/drawingml/2006/main"/>
-          <a:ln xmlns:a="http://schemas.openxmlformats.org/drawingml/2006/main" w="0">
-            <a:noFill/>
-          </a:ln>
-        </p:spPr>
-        <p:txBody>
-          <a:bodyPr xmlns:a="http://schemas.openxmlformats.org/drawingml/2006/main">
-            <a:noAutofit/>
-          </a:bodyPr>
-          <a:lstStyle xmlns:a="http://schemas.openxmlformats.org/drawingml/2006/main"/>
-          <a:p xmlns:a="http://schemas.openxmlformats.org/drawingml/2006/main">
-            <a:pPr>
-              <a:defRPr sz="2025" b="0">
-                <a:solidFill>
-                  <a:srgbClr val="526B70"/>
-                </a:solidFill>
-                <a:latin typeface="Arial"/>
-                <a:ea typeface="Arial"/>
-                <a:cs typeface="Arial"/>
-              </a:defRPr>
-            </a:pPr>
-            <a:r>
-              <a:rPr sz="2025" b="0">
-                <a:solidFill>
-                  <a:srgbClr val="526B70"/>
-                </a:solidFill>
-                <a:latin typeface="Arial"/>
-                <a:ea typeface="Arial"/>
-                <a:cs typeface="Arial"/>
-              </a:rPr>
-              <a:t>Try a point far from the other dots</a:t>
+              <a:t>10 小時的預測可信嗎？</a:t>
             </a:r>
           </a:p>
         </p:txBody>
@@ -7848,54 +7978,54 @@
           <p:cNvPr id="10" name="">
             <a:extLst xmlns:a="http://schemas.openxmlformats.org/drawingml/2006/main">
               <a:ext uri="{FF2B5EF4-FFF2-40B4-BE49-F238E27FC236}">
-                <a16:creationId xmlns:a16="http://schemas.microsoft.com/office/drawing/2014/main" id="{92D3527C-5003-4260-A777-52B4A7C72C41}"/>
-              </a:ext>
-            </a:extLst>
-          </p:cNvPr>
-          <p:cNvSpPr>
-            <a:spLocks xmlns:a="http://schemas.openxmlformats.org/drawingml/2006/main" noGrp="1"/>
-          </p:cNvSpPr>
-          <p:nvPr/>
-        </p:nvSpPr>
-        <p:spPr>
-          <a:xfrm xmlns:a="http://schemas.openxmlformats.org/drawingml/2006/main">
-            <a:off x="609600" y="5362575"/>
-            <a:ext cx="10572750" cy="495300"/>
-          </a:xfrm>
-          <a:prstGeom xmlns:a="http://schemas.openxmlformats.org/drawingml/2006/main" prst="rect">
-            <a:avLst/>
-          </a:prstGeom>
-          <a:noFill xmlns:a="http://schemas.openxmlformats.org/drawingml/2006/main"/>
-          <a:ln xmlns:a="http://schemas.openxmlformats.org/drawingml/2006/main" w="0">
-            <a:noFill/>
-          </a:ln>
-        </p:spPr>
-        <p:txBody>
-          <a:bodyPr xmlns:a="http://schemas.openxmlformats.org/drawingml/2006/main">
-            <a:noAutofit/>
-          </a:bodyPr>
-          <a:lstStyle xmlns:a="http://schemas.openxmlformats.org/drawingml/2006/main"/>
-          <a:p xmlns:a="http://schemas.openxmlformats.org/drawingml/2006/main">
-            <a:pPr>
-              <a:defRPr sz="2025" b="0">
-                <a:solidFill>
-                  <a:srgbClr val="173C43"/>
-                </a:solidFill>
-                <a:latin typeface="Heiti TC"/>
-                <a:ea typeface="Heiti TC"/>
-                <a:cs typeface="Heiti TC"/>
-              </a:defRPr>
-            </a:pPr>
-            <a:r>
-              <a:rPr sz="2025" b="0">
-                <a:solidFill>
-                  <a:srgbClr val="173C43"/>
-                </a:solidFill>
-                <a:latin typeface="Heiti TC"/>
-                <a:ea typeface="Heiti TC"/>
-                <a:cs typeface="Heiti TC"/>
-              </a:rPr>
-              <a:t>先預測，再觀察。把結果寫在工作紙上。</a:t>
+                <a16:creationId xmlns:a16="http://schemas.microsoft.com/office/drawing/2014/main" id="{2EC3E67C-8B1F-4370-B65F-82FA44246249}"/>
+              </a:ext>
+            </a:extLst>
+          </p:cNvPr>
+          <p:cNvSpPr>
+            <a:spLocks xmlns:a="http://schemas.openxmlformats.org/drawingml/2006/main" noGrp="1"/>
+          </p:cNvSpPr>
+          <p:nvPr/>
+        </p:nvSpPr>
+        <p:spPr>
+          <a:xfrm xmlns:a="http://schemas.openxmlformats.org/drawingml/2006/main">
+            <a:off x="8020050" y="5286375"/>
+            <a:ext cx="3571875" cy="457200"/>
+          </a:xfrm>
+          <a:prstGeom xmlns:a="http://schemas.openxmlformats.org/drawingml/2006/main" prst="rect">
+            <a:avLst/>
+          </a:prstGeom>
+          <a:noFill xmlns:a="http://schemas.openxmlformats.org/drawingml/2006/main"/>
+          <a:ln xmlns:a="http://schemas.openxmlformats.org/drawingml/2006/main" w="0">
+            <a:noFill/>
+          </a:ln>
+        </p:spPr>
+        <p:txBody>
+          <a:bodyPr xmlns:a="http://schemas.openxmlformats.org/drawingml/2006/main">
+            <a:noAutofit/>
+          </a:bodyPr>
+          <a:lstStyle xmlns:a="http://schemas.openxmlformats.org/drawingml/2006/main"/>
+          <a:p xmlns:a="http://schemas.openxmlformats.org/drawingml/2006/main">
+            <a:pPr>
+              <a:defRPr sz="1800" b="0">
+                <a:solidFill>
+                  <a:srgbClr val="526B70"/>
+                </a:solidFill>
+                <a:latin typeface="Arial"/>
+                <a:ea typeface="Arial"/>
+                <a:cs typeface="Arial"/>
+              </a:defRPr>
+            </a:pPr>
+            <a:r>
+              <a:rPr sz="1800" b="0">
+                <a:solidFill>
+                  <a:srgbClr val="526B70"/>
+                </a:solidFill>
+                <a:latin typeface="Arial"/>
+                <a:ea typeface="Arial"/>
+                <a:cs typeface="Arial"/>
+              </a:rPr>
+              <a:t>How reliable is a prediction for 10 hours?</a:t>
             </a:r>
           </a:p>
         </p:txBody>
@@ -7905,54 +8035,54 @@
           <p:cNvPr id="11" name="">
             <a:extLst xmlns:a="http://schemas.openxmlformats.org/drawingml/2006/main">
               <a:ext uri="{FF2B5EF4-FFF2-40B4-BE49-F238E27FC236}">
-                <a16:creationId xmlns:a16="http://schemas.microsoft.com/office/drawing/2014/main" id="{05E81699-FA99-4CFD-B398-7DA9A39E9A30}"/>
-              </a:ext>
-            </a:extLst>
-          </p:cNvPr>
-          <p:cNvSpPr>
-            <a:spLocks xmlns:a="http://schemas.openxmlformats.org/drawingml/2006/main" noGrp="1"/>
-          </p:cNvSpPr>
-          <p:nvPr/>
-        </p:nvSpPr>
-        <p:spPr>
-          <a:xfrm xmlns:a="http://schemas.openxmlformats.org/drawingml/2006/main">
-            <a:off x="609600" y="5829300"/>
-            <a:ext cx="10572750" cy="457200"/>
-          </a:xfrm>
-          <a:prstGeom xmlns:a="http://schemas.openxmlformats.org/drawingml/2006/main" prst="rect">
-            <a:avLst/>
-          </a:prstGeom>
-          <a:noFill xmlns:a="http://schemas.openxmlformats.org/drawingml/2006/main"/>
-          <a:ln xmlns:a="http://schemas.openxmlformats.org/drawingml/2006/main" w="0">
-            <a:noFill/>
-          </a:ln>
-        </p:spPr>
-        <p:txBody>
-          <a:bodyPr xmlns:a="http://schemas.openxmlformats.org/drawingml/2006/main">
-            <a:noAutofit/>
-          </a:bodyPr>
-          <a:lstStyle xmlns:a="http://schemas.openxmlformats.org/drawingml/2006/main"/>
-          <a:p xmlns:a="http://schemas.openxmlformats.org/drawingml/2006/main">
-            <a:pPr>
-              <a:defRPr sz="1800" b="0">
-                <a:solidFill>
-                  <a:srgbClr val="526B70"/>
-                </a:solidFill>
-                <a:latin typeface="Arial"/>
-                <a:ea typeface="Arial"/>
-                <a:cs typeface="Arial"/>
-              </a:defRPr>
-            </a:pPr>
-            <a:r>
-              <a:rPr sz="1800" b="0">
-                <a:solidFill>
-                  <a:srgbClr val="526B70"/>
-                </a:solidFill>
-                <a:latin typeface="Arial"/>
-                <a:ea typeface="Arial"/>
-                <a:cs typeface="Arial"/>
-              </a:rPr>
-              <a:t>Predict first, then observe. Record the result on your worksheet.</a:t>
+                <a16:creationId xmlns:a16="http://schemas.microsoft.com/office/drawing/2014/main" id="{1A3DDA66-4621-45C8-9565-FB5512D08E4A}"/>
+              </a:ext>
+            </a:extLst>
+          </p:cNvPr>
+          <p:cNvSpPr>
+            <a:spLocks xmlns:a="http://schemas.openxmlformats.org/drawingml/2006/main" noGrp="1"/>
+          </p:cNvSpPr>
+          <p:nvPr/>
+        </p:nvSpPr>
+        <p:spPr>
+          <a:xfrm xmlns:a="http://schemas.openxmlformats.org/drawingml/2006/main">
+            <a:off x="609600" y="6191250"/>
+            <a:ext cx="9048750" cy="285750"/>
+          </a:xfrm>
+          <a:prstGeom xmlns:a="http://schemas.openxmlformats.org/drawingml/2006/main" prst="rect">
+            <a:avLst/>
+          </a:prstGeom>
+          <a:noFill xmlns:a="http://schemas.openxmlformats.org/drawingml/2006/main"/>
+          <a:ln xmlns:a="http://schemas.openxmlformats.org/drawingml/2006/main" w="0">
+            <a:noFill/>
+          </a:ln>
+        </p:spPr>
+        <p:txBody>
+          <a:bodyPr xmlns:a="http://schemas.openxmlformats.org/drawingml/2006/main">
+            <a:noAutofit/>
+          </a:bodyPr>
+          <a:lstStyle xmlns:a="http://schemas.openxmlformats.org/drawingml/2006/main"/>
+          <a:p xmlns:a="http://schemas.openxmlformats.org/drawingml/2006/main">
+            <a:pPr>
+              <a:defRPr sz="1350" b="0">
+                <a:solidFill>
+                  <a:srgbClr val="526B70"/>
+                </a:solidFill>
+                <a:latin typeface="Heiti TC"/>
+                <a:ea typeface="Heiti TC"/>
+                <a:cs typeface="Heiti TC"/>
+              </a:defRPr>
+            </a:pPr>
+            <a:r>
+              <a:rPr sz="1350" b="0">
+                <a:solidFill>
+                  <a:srgbClr val="526B70"/>
+                </a:solidFill>
+                <a:latin typeface="Heiti TC"/>
+                <a:ea typeface="Heiti TC"/>
+                <a:cs typeface="Heiti TC"/>
+              </a:rPr>
+              <a:t>不同學生的模擬數據 / Simulated data for different students</a:t>
             </a:r>
           </a:p>
         </p:txBody>
@@ -7960,7 +8090,7 @@
     </p:spTree>
     <p:extLst>
       <p:ext uri="{BB962C8B-B14F-4D97-AF65-F5344CB8AC3E}">
-        <p14:creationId xmlns:p14="http://schemas.microsoft.com/office/powerpoint/2010/main" val="176448993"/>
+        <p14:creationId xmlns:p14="http://schemas.microsoft.com/office/powerpoint/2010/main" val="1661130808"/>
       </p:ext>
     </p:extLst>
   </p:cSld>
@@ -7988,10 +8118,10 @@
       </p:grpSpPr>
       <p:sp>
         <p:nvSpPr>
-          <p:cNvPr id="12" name="">
-            <a:extLst xmlns:a="http://schemas.openxmlformats.org/drawingml/2006/main">
-              <a:ext uri="{FF2B5EF4-FFF2-40B4-BE49-F238E27FC236}">
-                <a16:creationId xmlns:a16="http://schemas.microsoft.com/office/drawing/2014/main" id="{964AA8BD-F2AC-4451-88FF-4F52D10B3731}"/>
+          <p:cNvPr id="15" name="">
+            <a:extLst xmlns:a="http://schemas.openxmlformats.org/drawingml/2006/main">
+              <a:ext uri="{FF2B5EF4-FFF2-40B4-BE49-F238E27FC236}">
+                <a16:creationId xmlns:a16="http://schemas.microsoft.com/office/drawing/2014/main" id="{32161FD6-28F6-4020-BBE3-B266248D243A}"/>
               </a:ext>
             </a:extLst>
           </p:cNvPr>
@@ -8038,7 +8168,7 @@
                 <a:ea typeface="Heiti TC"/>
                 <a:cs typeface="Heiti TC"/>
               </a:rPr>
-              <a:t>每天溫習時間與考試成績</a:t>
+              <a:t>預測結果與模型的限制</a:t>
             </a:r>
           </a:p>
         </p:txBody>
@@ -8048,7 +8178,7 @@
           <p:cNvPr id="2" name="">
             <a:extLst xmlns:a="http://schemas.openxmlformats.org/drawingml/2006/main">
               <a:ext uri="{FF2B5EF4-FFF2-40B4-BE49-F238E27FC236}">
-                <a16:creationId xmlns:a16="http://schemas.microsoft.com/office/drawing/2014/main" id="{4B50B3F2-4B62-440E-B37C-393A3FAAC517}"/>
+                <a16:creationId xmlns:a16="http://schemas.microsoft.com/office/drawing/2014/main" id="{7E124814-8B18-48AB-A78D-B8E3E6E6359E}"/>
               </a:ext>
             </a:extLst>
           </p:cNvPr>
@@ -8095,7 +8225,7 @@
                 <a:ea typeface="Arial"/>
                 <a:cs typeface="Arial"/>
               </a:rPr>
-              <a:t>Daily study time and exam score</a:t>
+              <a:t>Prediction results and limits of the model</a:t>
             </a:r>
           </a:p>
         </p:txBody>
@@ -8105,7 +8235,7 @@
           <p:cNvPr id="3" name="">
             <a:extLst xmlns:a="http://schemas.openxmlformats.org/drawingml/2006/main">
               <a:ext uri="{FF2B5EF4-FFF2-40B4-BE49-F238E27FC236}">
-                <a16:creationId xmlns:a16="http://schemas.microsoft.com/office/drawing/2014/main" id="{CE570DD3-6279-4295-921E-C011E2DC1335}"/>
+                <a16:creationId xmlns:a16="http://schemas.microsoft.com/office/drawing/2014/main" id="{9A398317-A36B-48C8-9F7A-1993DAF23D3C}"/>
               </a:ext>
             </a:extLst>
           </p:cNvPr>
@@ -8157,57 +8287,98 @@
           </a:p>
         </p:txBody>
       </p:sp>
-      <p:graphicFrame>
-        <p:nvGraphicFramePr>
-          <p:cNvPr id="15" name="Chart"/>
-          <p:cNvGraphicFramePr/>
-          <p:nvPr/>
-        </p:nvGraphicFramePr>
-        <p:xfrm>
-          <a:off xmlns:a="http://schemas.openxmlformats.org/drawingml/2006/main" x="609600" y="1647825"/>
-          <a:ext xmlns:a="http://schemas.openxmlformats.org/drawingml/2006/main" cx="6905625" cy="4286250"/>
-        </p:xfrm>
-        <a:graphic xmlns:a="http://schemas.openxmlformats.org/drawingml/2006/main">
-          <a:graphicData uri="http://schemas.openxmlformats.org/drawingml/2006/chart">
-            <c:chart xmlns:r="http://schemas.openxmlformats.org/officeDocument/2006/relationships" xmlns:c="http://schemas.openxmlformats.org/drawingml/2006/chart" r:id="R17c7a67ba22547e0"/>
-          </a:graphicData>
-        </a:graphic>
-      </p:graphicFrame>
+      <p:sp>
+        <p:nvSpPr>
+          <p:cNvPr id="4" name="">
+            <a:extLst xmlns:a="http://schemas.openxmlformats.org/drawingml/2006/main">
+              <a:ext uri="{FF2B5EF4-FFF2-40B4-BE49-F238E27FC236}">
+                <a16:creationId xmlns:a16="http://schemas.microsoft.com/office/drawing/2014/main" id="{0E6B0FD2-8F5A-410D-8B26-06E7F6B29C5E}"/>
+              </a:ext>
+            </a:extLst>
+          </p:cNvPr>
+          <p:cNvSpPr>
+            <a:spLocks xmlns:a="http://schemas.openxmlformats.org/drawingml/2006/main" noGrp="1"/>
+          </p:cNvSpPr>
+          <p:nvPr/>
+        </p:nvSpPr>
+        <p:spPr>
+          <a:xfrm xmlns:a="http://schemas.openxmlformats.org/drawingml/2006/main">
+            <a:off x="609600" y="1657350"/>
+            <a:ext cx="10477500" cy="742950"/>
+          </a:xfrm>
+          <a:prstGeom xmlns:a="http://schemas.openxmlformats.org/drawingml/2006/main" prst="rect">
+            <a:avLst/>
+          </a:prstGeom>
+          <a:noFill xmlns:a="http://schemas.openxmlformats.org/drawingml/2006/main"/>
+          <a:ln xmlns:a="http://schemas.openxmlformats.org/drawingml/2006/main" w="0">
+            <a:noFill/>
+          </a:ln>
+        </p:spPr>
+        <p:txBody>
+          <a:bodyPr xmlns:a="http://schemas.openxmlformats.org/drawingml/2006/main">
+            <a:noAutofit/>
+          </a:bodyPr>
+          <a:lstStyle xmlns:a="http://schemas.openxmlformats.org/drawingml/2006/main"/>
+          <a:p xmlns:a="http://schemas.openxmlformats.org/drawingml/2006/main">
+            <a:pPr>
+              <a:defRPr sz="4350" b="1">
+                <a:solidFill>
+                  <a:srgbClr val="086C61"/>
+                </a:solidFill>
+                <a:latin typeface="Arial"/>
+                <a:ea typeface="Arial"/>
+                <a:cs typeface="Arial"/>
+              </a:defRPr>
+            </a:pPr>
+            <a:r>
+              <a:rPr sz="4350" b="1">
+                <a:solidFill>
+                  <a:srgbClr val="086C61"/>
+                </a:solidFill>
+                <a:latin typeface="Arial"/>
+                <a:ea typeface="Arial"/>
+                <a:cs typeface="Arial"/>
+              </a:rPr>
+              <a:t>y = 2x + 50</a:t>
+            </a:r>
+          </a:p>
+        </p:txBody>
+      </p:sp>
       <p:sp>
         <p:nvSpPr>
           <p:cNvPr id="5" name="">
             <a:extLst xmlns:a="http://schemas.openxmlformats.org/drawingml/2006/main">
               <a:ext uri="{FF2B5EF4-FFF2-40B4-BE49-F238E27FC236}">
-                <a16:creationId xmlns:a16="http://schemas.microsoft.com/office/drawing/2014/main" id="{7D996E34-B905-4F29-8EFC-995F4FFBCCA2}"/>
-              </a:ext>
-            </a:extLst>
-          </p:cNvPr>
-          <p:cNvSpPr>
-            <a:spLocks xmlns:a="http://schemas.openxmlformats.org/drawingml/2006/main" noGrp="1"/>
-          </p:cNvSpPr>
-          <p:nvPr/>
-        </p:nvSpPr>
-        <p:spPr>
-          <a:xfrm xmlns:a="http://schemas.openxmlformats.org/drawingml/2006/main">
-            <a:off x="8020050" y="1819275"/>
-            <a:ext cx="3571875" cy="495300"/>
-          </a:xfrm>
-          <a:prstGeom xmlns:a="http://schemas.openxmlformats.org/drawingml/2006/main" prst="rect">
-            <a:avLst/>
-          </a:prstGeom>
-          <a:noFill xmlns:a="http://schemas.openxmlformats.org/drawingml/2006/main"/>
-          <a:ln xmlns:a="http://schemas.openxmlformats.org/drawingml/2006/main" w="0">
-            <a:noFill/>
-          </a:ln>
-        </p:spPr>
-        <p:txBody>
-          <a:bodyPr xmlns:a="http://schemas.openxmlformats.org/drawingml/2006/main">
-            <a:noAutofit/>
-          </a:bodyPr>
-          <a:lstStyle xmlns:a="http://schemas.openxmlformats.org/drawingml/2006/main"/>
-          <a:p xmlns:a="http://schemas.openxmlformats.org/drawingml/2006/main">
-            <a:pPr>
-              <a:defRPr sz="2100" b="0">
+                <a16:creationId xmlns:a16="http://schemas.microsoft.com/office/drawing/2014/main" id="{14CE1101-2274-4E82-AC2D-004FED3D3AAD}"/>
+              </a:ext>
+            </a:extLst>
+          </p:cNvPr>
+          <p:cNvSpPr>
+            <a:spLocks xmlns:a="http://schemas.openxmlformats.org/drawingml/2006/main" noGrp="1"/>
+          </p:cNvSpPr>
+          <p:nvPr/>
+        </p:nvSpPr>
+        <p:spPr>
+          <a:xfrm xmlns:a="http://schemas.openxmlformats.org/drawingml/2006/main">
+            <a:off x="609600" y="2743200"/>
+            <a:ext cx="5143500" cy="495300"/>
+          </a:xfrm>
+          <a:prstGeom xmlns:a="http://schemas.openxmlformats.org/drawingml/2006/main" prst="rect">
+            <a:avLst/>
+          </a:prstGeom>
+          <a:noFill xmlns:a="http://schemas.openxmlformats.org/drawingml/2006/main"/>
+          <a:ln xmlns:a="http://schemas.openxmlformats.org/drawingml/2006/main" w="0">
+            <a:noFill/>
+          </a:ln>
+        </p:spPr>
+        <p:txBody>
+          <a:bodyPr xmlns:a="http://schemas.openxmlformats.org/drawingml/2006/main">
+            <a:noAutofit/>
+          </a:bodyPr>
+          <a:lstStyle xmlns:a="http://schemas.openxmlformats.org/drawingml/2006/main"/>
+          <a:p xmlns:a="http://schemas.openxmlformats.org/drawingml/2006/main">
+            <a:pPr>
+              <a:defRPr sz="2025" b="0">
                 <a:solidFill>
                   <a:srgbClr val="173C43"/>
                 </a:solidFill>
@@ -8217,7 +8388,7 @@
               </a:defRPr>
             </a:pPr>
             <a:r>
-              <a:rPr sz="2100" b="0">
+              <a:rPr sz="2025" b="0">
                 <a:solidFill>
                   <a:srgbClr val="173C43"/>
                 </a:solidFill>
@@ -8225,7 +8396,7 @@
                 <a:ea typeface="Heiti TC"/>
                 <a:cs typeface="Heiti TC"/>
               </a:rPr>
-              <a:t>3.5 小時的預測成績？</a:t>
+              <a:t>m = 2：模型中每小時約多 2 分</a:t>
             </a:r>
           </a:p>
         </p:txBody>
@@ -8235,19 +8406,19 @@
           <p:cNvPr id="6" name="">
             <a:extLst xmlns:a="http://schemas.openxmlformats.org/drawingml/2006/main">
               <a:ext uri="{FF2B5EF4-FFF2-40B4-BE49-F238E27FC236}">
-                <a16:creationId xmlns:a16="http://schemas.microsoft.com/office/drawing/2014/main" id="{F245E9FA-A43F-4477-934A-6E736C0B726F}"/>
-              </a:ext>
-            </a:extLst>
-          </p:cNvPr>
-          <p:cNvSpPr>
-            <a:spLocks xmlns:a="http://schemas.openxmlformats.org/drawingml/2006/main" noGrp="1"/>
-          </p:cNvSpPr>
-          <p:nvPr/>
-        </p:nvSpPr>
-        <p:spPr>
-          <a:xfrm xmlns:a="http://schemas.openxmlformats.org/drawingml/2006/main">
-            <a:off x="8020050" y="2286000"/>
-            <a:ext cx="3571875" cy="457200"/>
+                <a16:creationId xmlns:a16="http://schemas.microsoft.com/office/drawing/2014/main" id="{D051B4ED-7826-4515-A8DD-31A73684D4FE}"/>
+              </a:ext>
+            </a:extLst>
+          </p:cNvPr>
+          <p:cNvSpPr>
+            <a:spLocks xmlns:a="http://schemas.openxmlformats.org/drawingml/2006/main" noGrp="1"/>
+          </p:cNvSpPr>
+          <p:nvPr/>
+        </p:nvSpPr>
+        <p:spPr>
+          <a:xfrm xmlns:a="http://schemas.openxmlformats.org/drawingml/2006/main">
+            <a:off x="609600" y="3209925"/>
+            <a:ext cx="5143500" cy="457200"/>
           </a:xfrm>
           <a:prstGeom xmlns:a="http://schemas.openxmlformats.org/drawingml/2006/main" prst="rect">
             <a:avLst/>
@@ -8282,7 +8453,7 @@
                 <a:ea typeface="Arial"/>
                 <a:cs typeface="Arial"/>
               </a:rPr>
-              <a:t>Score for 3.5 hours a day?</a:t>
+              <a:t>In this model, m = 2 marks per extra hour</a:t>
             </a:r>
           </a:p>
         </p:txBody>
@@ -8292,36 +8463,36 @@
           <p:cNvPr id="7" name="">
             <a:extLst xmlns:a="http://schemas.openxmlformats.org/drawingml/2006/main">
               <a:ext uri="{FF2B5EF4-FFF2-40B4-BE49-F238E27FC236}">
-                <a16:creationId xmlns:a16="http://schemas.microsoft.com/office/drawing/2014/main" id="{16D1F827-77DF-4608-9FDA-9FE8D135B5FC}"/>
-              </a:ext>
-            </a:extLst>
-          </p:cNvPr>
-          <p:cNvSpPr>
-            <a:spLocks xmlns:a="http://schemas.openxmlformats.org/drawingml/2006/main" noGrp="1"/>
-          </p:cNvSpPr>
-          <p:nvPr/>
-        </p:nvSpPr>
-        <p:spPr>
-          <a:xfrm xmlns:a="http://schemas.openxmlformats.org/drawingml/2006/main">
-            <a:off x="8020050" y="3390900"/>
-            <a:ext cx="3571875" cy="495300"/>
-          </a:xfrm>
-          <a:prstGeom xmlns:a="http://schemas.openxmlformats.org/drawingml/2006/main" prst="rect">
-            <a:avLst/>
-          </a:prstGeom>
-          <a:noFill xmlns:a="http://schemas.openxmlformats.org/drawingml/2006/main"/>
-          <a:ln xmlns:a="http://schemas.openxmlformats.org/drawingml/2006/main" w="0">
-            <a:noFill/>
-          </a:ln>
-        </p:spPr>
-        <p:txBody>
-          <a:bodyPr xmlns:a="http://schemas.openxmlformats.org/drawingml/2006/main">
-            <a:noAutofit/>
-          </a:bodyPr>
-          <a:lstStyle xmlns:a="http://schemas.openxmlformats.org/drawingml/2006/main"/>
-          <a:p xmlns:a="http://schemas.openxmlformats.org/drawingml/2006/main">
-            <a:pPr>
-              <a:defRPr sz="2175" b="0">
+                <a16:creationId xmlns:a16="http://schemas.microsoft.com/office/drawing/2014/main" id="{983E4CDA-1383-4DDC-818C-283FA03C9E6B}"/>
+              </a:ext>
+            </a:extLst>
+          </p:cNvPr>
+          <p:cNvSpPr>
+            <a:spLocks xmlns:a="http://schemas.openxmlformats.org/drawingml/2006/main" noGrp="1"/>
+          </p:cNvSpPr>
+          <p:nvPr/>
+        </p:nvSpPr>
+        <p:spPr>
+          <a:xfrm xmlns:a="http://schemas.openxmlformats.org/drawingml/2006/main">
+            <a:off x="6381750" y="2743200"/>
+            <a:ext cx="5143500" cy="495300"/>
+          </a:xfrm>
+          <a:prstGeom xmlns:a="http://schemas.openxmlformats.org/drawingml/2006/main" prst="rect">
+            <a:avLst/>
+          </a:prstGeom>
+          <a:noFill xmlns:a="http://schemas.openxmlformats.org/drawingml/2006/main"/>
+          <a:ln xmlns:a="http://schemas.openxmlformats.org/drawingml/2006/main" w="0">
+            <a:noFill/>
+          </a:ln>
+        </p:spPr>
+        <p:txBody>
+          <a:bodyPr xmlns:a="http://schemas.openxmlformats.org/drawingml/2006/main">
+            <a:noAutofit/>
+          </a:bodyPr>
+          <a:lstStyle xmlns:a="http://schemas.openxmlformats.org/drawingml/2006/main"/>
+          <a:p xmlns:a="http://schemas.openxmlformats.org/drawingml/2006/main">
+            <a:pPr>
+              <a:defRPr sz="2025" b="0">
                 <a:solidFill>
                   <a:srgbClr val="173C43"/>
                 </a:solidFill>
@@ -8331,7 +8502,7 @@
               </a:defRPr>
             </a:pPr>
             <a:r>
-              <a:rPr sz="2175" b="0">
+              <a:rPr sz="2025" b="0">
                 <a:solidFill>
                   <a:srgbClr val="173C43"/>
                 </a:solidFill>
@@ -8339,7 +8510,7 @@
                 <a:ea typeface="Heiti TC"/>
                 <a:cs typeface="Heiti TC"/>
               </a:rPr>
-              <a:t>先畫直線，再估計</a:t>
+              <a:t>c = 50：0 小時時估計的成績</a:t>
             </a:r>
           </a:p>
         </p:txBody>
@@ -8349,19 +8520,19 @@
           <p:cNvPr id="8" name="">
             <a:extLst xmlns:a="http://schemas.openxmlformats.org/drawingml/2006/main">
               <a:ext uri="{FF2B5EF4-FFF2-40B4-BE49-F238E27FC236}">
-                <a16:creationId xmlns:a16="http://schemas.microsoft.com/office/drawing/2014/main" id="{84410C72-E626-437F-B0CF-B24F73857A46}"/>
-              </a:ext>
-            </a:extLst>
-          </p:cNvPr>
-          <p:cNvSpPr>
-            <a:spLocks xmlns:a="http://schemas.openxmlformats.org/drawingml/2006/main" noGrp="1"/>
-          </p:cNvSpPr>
-          <p:nvPr/>
-        </p:nvSpPr>
-        <p:spPr>
-          <a:xfrm xmlns:a="http://schemas.openxmlformats.org/drawingml/2006/main">
-            <a:off x="8020050" y="3857625"/>
-            <a:ext cx="3571875" cy="457200"/>
+                <a16:creationId xmlns:a16="http://schemas.microsoft.com/office/drawing/2014/main" id="{468A1038-CA4F-4946-A632-6803013C9EA3}"/>
+              </a:ext>
+            </a:extLst>
+          </p:cNvPr>
+          <p:cNvSpPr>
+            <a:spLocks xmlns:a="http://schemas.openxmlformats.org/drawingml/2006/main" noGrp="1"/>
+          </p:cNvSpPr>
+          <p:nvPr/>
+        </p:nvSpPr>
+        <p:spPr>
+          <a:xfrm xmlns:a="http://schemas.openxmlformats.org/drawingml/2006/main">
+            <a:off x="6381750" y="3209925"/>
+            <a:ext cx="5143500" cy="457200"/>
           </a:xfrm>
           <a:prstGeom xmlns:a="http://schemas.openxmlformats.org/drawingml/2006/main" prst="rect">
             <a:avLst/>
@@ -8396,7 +8567,7 @@
                 <a:ea typeface="Arial"/>
                 <a:cs typeface="Arial"/>
               </a:rPr>
-              <a:t>Draw your line, then estimate</a:t>
+              <a:t>c = 50: estimated score at 0 hours</a:t>
             </a:r>
           </a:p>
         </p:txBody>
@@ -8406,36 +8577,36 @@
           <p:cNvPr id="9" name="">
             <a:extLst xmlns:a="http://schemas.openxmlformats.org/drawingml/2006/main">
               <a:ext uri="{FF2B5EF4-FFF2-40B4-BE49-F238E27FC236}">
-                <a16:creationId xmlns:a16="http://schemas.microsoft.com/office/drawing/2014/main" id="{D75A799C-31B6-4D94-A524-C329864C9120}"/>
-              </a:ext>
-            </a:extLst>
-          </p:cNvPr>
-          <p:cNvSpPr>
-            <a:spLocks xmlns:a="http://schemas.openxmlformats.org/drawingml/2006/main" noGrp="1"/>
-          </p:cNvSpPr>
-          <p:nvPr/>
-        </p:nvSpPr>
-        <p:spPr>
-          <a:xfrm xmlns:a="http://schemas.openxmlformats.org/drawingml/2006/main">
-            <a:off x="8020050" y="4819650"/>
-            <a:ext cx="3571875" cy="495300"/>
-          </a:xfrm>
-          <a:prstGeom xmlns:a="http://schemas.openxmlformats.org/drawingml/2006/main" prst="rect">
-            <a:avLst/>
-          </a:prstGeom>
-          <a:noFill xmlns:a="http://schemas.openxmlformats.org/drawingml/2006/main"/>
-          <a:ln xmlns:a="http://schemas.openxmlformats.org/drawingml/2006/main" w="0">
-            <a:noFill/>
-          </a:ln>
-        </p:spPr>
-        <p:txBody>
-          <a:bodyPr xmlns:a="http://schemas.openxmlformats.org/drawingml/2006/main">
-            <a:noAutofit/>
-          </a:bodyPr>
-          <a:lstStyle xmlns:a="http://schemas.openxmlformats.org/drawingml/2006/main"/>
-          <a:p xmlns:a="http://schemas.openxmlformats.org/drawingml/2006/main">
-            <a:pPr>
-              <a:defRPr sz="2100" b="0">
+                <a16:creationId xmlns:a16="http://schemas.microsoft.com/office/drawing/2014/main" id="{101623EF-CE61-4B6C-8601-09D3FEBF7D3F}"/>
+              </a:ext>
+            </a:extLst>
+          </p:cNvPr>
+          <p:cNvSpPr>
+            <a:spLocks xmlns:a="http://schemas.openxmlformats.org/drawingml/2006/main" noGrp="1"/>
+          </p:cNvSpPr>
+          <p:nvPr/>
+        </p:nvSpPr>
+        <p:spPr>
+          <a:xfrm xmlns:a="http://schemas.openxmlformats.org/drawingml/2006/main">
+            <a:off x="609600" y="3952875"/>
+            <a:ext cx="5143500" cy="495300"/>
+          </a:xfrm>
+          <a:prstGeom xmlns:a="http://schemas.openxmlformats.org/drawingml/2006/main" prst="rect">
+            <a:avLst/>
+          </a:prstGeom>
+          <a:noFill xmlns:a="http://schemas.openxmlformats.org/drawingml/2006/main"/>
+          <a:ln xmlns:a="http://schemas.openxmlformats.org/drawingml/2006/main" w="0">
+            <a:noFill/>
+          </a:ln>
+        </p:spPr>
+        <p:txBody>
+          <a:bodyPr xmlns:a="http://schemas.openxmlformats.org/drawingml/2006/main">
+            <a:noAutofit/>
+          </a:bodyPr>
+          <a:lstStyle xmlns:a="http://schemas.openxmlformats.org/drawingml/2006/main"/>
+          <a:p xmlns:a="http://schemas.openxmlformats.org/drawingml/2006/main">
+            <a:pPr>
+              <a:defRPr sz="2400" b="0">
                 <a:solidFill>
                   <a:srgbClr val="173C43"/>
                 </a:solidFill>
@@ -8445,7 +8616,7 @@
               </a:defRPr>
             </a:pPr>
             <a:r>
-              <a:rPr sz="2100" b="0">
+              <a:rPr sz="2400" b="0">
                 <a:solidFill>
                   <a:srgbClr val="173C43"/>
                 </a:solidFill>
@@ -8453,7 +8624,7 @@
                 <a:ea typeface="Heiti TC"/>
                 <a:cs typeface="Heiti TC"/>
               </a:rPr>
-              <a:t>10 小時的預測可信嗎？</a:t>
+              <a:t>3.5 小時：約 57 分</a:t>
             </a:r>
           </a:p>
         </p:txBody>
@@ -8463,19 +8634,19 @@
           <p:cNvPr id="10" name="">
             <a:extLst xmlns:a="http://schemas.openxmlformats.org/drawingml/2006/main">
               <a:ext uri="{FF2B5EF4-FFF2-40B4-BE49-F238E27FC236}">
-                <a16:creationId xmlns:a16="http://schemas.microsoft.com/office/drawing/2014/main" id="{A5C48AB6-F31A-4B41-9E0A-A36136D0133C}"/>
-              </a:ext>
-            </a:extLst>
-          </p:cNvPr>
-          <p:cNvSpPr>
-            <a:spLocks xmlns:a="http://schemas.openxmlformats.org/drawingml/2006/main" noGrp="1"/>
-          </p:cNvSpPr>
-          <p:nvPr/>
-        </p:nvSpPr>
-        <p:spPr>
-          <a:xfrm xmlns:a="http://schemas.openxmlformats.org/drawingml/2006/main">
-            <a:off x="8020050" y="5286375"/>
-            <a:ext cx="3571875" cy="457200"/>
+                <a16:creationId xmlns:a16="http://schemas.microsoft.com/office/drawing/2014/main" id="{3FB705FA-2E9B-420B-A1CC-4BFEB408E314}"/>
+              </a:ext>
+            </a:extLst>
+          </p:cNvPr>
+          <p:cNvSpPr>
+            <a:spLocks xmlns:a="http://schemas.openxmlformats.org/drawingml/2006/main" noGrp="1"/>
+          </p:cNvSpPr>
+          <p:nvPr/>
+        </p:nvSpPr>
+        <p:spPr>
+          <a:xfrm xmlns:a="http://schemas.openxmlformats.org/drawingml/2006/main">
+            <a:off x="609600" y="4419600"/>
+            <a:ext cx="5143500" cy="457200"/>
           </a:xfrm>
           <a:prstGeom xmlns:a="http://schemas.openxmlformats.org/drawingml/2006/main" prst="rect">
             <a:avLst/>
@@ -8510,7 +8681,7 @@
                 <a:ea typeface="Arial"/>
                 <a:cs typeface="Arial"/>
               </a:rPr>
-              <a:t>How reliable is a prediction for 10 hours?</a:t>
+              <a:t>3.5 hours: about 57 marks</a:t>
             </a:r>
           </a:p>
         </p:txBody>
@@ -8520,54 +8691,225 @@
           <p:cNvPr id="11" name="">
             <a:extLst xmlns:a="http://schemas.openxmlformats.org/drawingml/2006/main">
               <a:ext uri="{FF2B5EF4-FFF2-40B4-BE49-F238E27FC236}">
-                <a16:creationId xmlns:a16="http://schemas.microsoft.com/office/drawing/2014/main" id="{29A82052-4849-4670-A985-A7D746CA424A}"/>
-              </a:ext>
-            </a:extLst>
-          </p:cNvPr>
-          <p:cNvSpPr>
-            <a:spLocks xmlns:a="http://schemas.openxmlformats.org/drawingml/2006/main" noGrp="1"/>
-          </p:cNvSpPr>
-          <p:nvPr/>
-        </p:nvSpPr>
-        <p:spPr>
-          <a:xfrm xmlns:a="http://schemas.openxmlformats.org/drawingml/2006/main">
-            <a:off x="609600" y="6191250"/>
-            <a:ext cx="9048750" cy="285750"/>
-          </a:xfrm>
-          <a:prstGeom xmlns:a="http://schemas.openxmlformats.org/drawingml/2006/main" prst="rect">
-            <a:avLst/>
-          </a:prstGeom>
-          <a:noFill xmlns:a="http://schemas.openxmlformats.org/drawingml/2006/main"/>
-          <a:ln xmlns:a="http://schemas.openxmlformats.org/drawingml/2006/main" w="0">
-            <a:noFill/>
-          </a:ln>
-        </p:spPr>
-        <p:txBody>
-          <a:bodyPr xmlns:a="http://schemas.openxmlformats.org/drawingml/2006/main">
-            <a:noAutofit/>
-          </a:bodyPr>
-          <a:lstStyle xmlns:a="http://schemas.openxmlformats.org/drawingml/2006/main"/>
-          <a:p xmlns:a="http://schemas.openxmlformats.org/drawingml/2006/main">
-            <a:pPr>
-              <a:defRPr sz="1350" b="0">
-                <a:solidFill>
-                  <a:srgbClr val="526B70"/>
-                </a:solidFill>
-                <a:latin typeface="Heiti TC"/>
-                <a:ea typeface="Heiti TC"/>
-                <a:cs typeface="Heiti TC"/>
-              </a:defRPr>
-            </a:pPr>
-            <a:r>
-              <a:rPr sz="1350" b="0">
-                <a:solidFill>
-                  <a:srgbClr val="526B70"/>
-                </a:solidFill>
-                <a:latin typeface="Heiti TC"/>
-                <a:ea typeface="Heiti TC"/>
-                <a:cs typeface="Heiti TC"/>
-              </a:rPr>
-              <a:t>不同學生的模擬數據 / Simulated data for different students</a:t>
+                <a16:creationId xmlns:a16="http://schemas.microsoft.com/office/drawing/2014/main" id="{01873668-1B25-4B8B-B48A-6BB88E4300F7}"/>
+              </a:ext>
+            </a:extLst>
+          </p:cNvPr>
+          <p:cNvSpPr>
+            <a:spLocks xmlns:a="http://schemas.openxmlformats.org/drawingml/2006/main" noGrp="1"/>
+          </p:cNvSpPr>
+          <p:nvPr/>
+        </p:nvSpPr>
+        <p:spPr>
+          <a:xfrm xmlns:a="http://schemas.openxmlformats.org/drawingml/2006/main">
+            <a:off x="6381750" y="3952875"/>
+            <a:ext cx="5143500" cy="495300"/>
+          </a:xfrm>
+          <a:prstGeom xmlns:a="http://schemas.openxmlformats.org/drawingml/2006/main" prst="rect">
+            <a:avLst/>
+          </a:prstGeom>
+          <a:noFill xmlns:a="http://schemas.openxmlformats.org/drawingml/2006/main"/>
+          <a:ln xmlns:a="http://schemas.openxmlformats.org/drawingml/2006/main" w="0">
+            <a:noFill/>
+          </a:ln>
+        </p:spPr>
+        <p:txBody>
+          <a:bodyPr xmlns:a="http://schemas.openxmlformats.org/drawingml/2006/main">
+            <a:noAutofit/>
+          </a:bodyPr>
+          <a:lstStyle xmlns:a="http://schemas.openxmlformats.org/drawingml/2006/main"/>
+          <a:p xmlns:a="http://schemas.openxmlformats.org/drawingml/2006/main">
+            <a:pPr>
+              <a:defRPr sz="2400" b="0">
+                <a:solidFill>
+                  <a:srgbClr val="173C43"/>
+                </a:solidFill>
+                <a:latin typeface="Heiti TC"/>
+                <a:ea typeface="Heiti TC"/>
+                <a:cs typeface="Heiti TC"/>
+              </a:defRPr>
+            </a:pPr>
+            <a:r>
+              <a:rPr sz="2400" b="0">
+                <a:solidFill>
+                  <a:srgbClr val="173C43"/>
+                </a:solidFill>
+                <a:latin typeface="Heiti TC"/>
+                <a:ea typeface="Heiti TC"/>
+                <a:cs typeface="Heiti TC"/>
+              </a:rPr>
+              <a:t>10 小時：約 70 分</a:t>
+            </a:r>
+          </a:p>
+        </p:txBody>
+      </p:sp>
+      <p:sp>
+        <p:nvSpPr>
+          <p:cNvPr id="12" name="">
+            <a:extLst xmlns:a="http://schemas.openxmlformats.org/drawingml/2006/main">
+              <a:ext uri="{FF2B5EF4-FFF2-40B4-BE49-F238E27FC236}">
+                <a16:creationId xmlns:a16="http://schemas.microsoft.com/office/drawing/2014/main" id="{4801B487-6840-4D21-902F-B918F9499448}"/>
+              </a:ext>
+            </a:extLst>
+          </p:cNvPr>
+          <p:cNvSpPr>
+            <a:spLocks xmlns:a="http://schemas.openxmlformats.org/drawingml/2006/main" noGrp="1"/>
+          </p:cNvSpPr>
+          <p:nvPr/>
+        </p:nvSpPr>
+        <p:spPr>
+          <a:xfrm xmlns:a="http://schemas.openxmlformats.org/drawingml/2006/main">
+            <a:off x="6381750" y="4419600"/>
+            <a:ext cx="5143500" cy="457200"/>
+          </a:xfrm>
+          <a:prstGeom xmlns:a="http://schemas.openxmlformats.org/drawingml/2006/main" prst="rect">
+            <a:avLst/>
+          </a:prstGeom>
+          <a:noFill xmlns:a="http://schemas.openxmlformats.org/drawingml/2006/main"/>
+          <a:ln xmlns:a="http://schemas.openxmlformats.org/drawingml/2006/main" w="0">
+            <a:noFill/>
+          </a:ln>
+        </p:spPr>
+        <p:txBody>
+          <a:bodyPr xmlns:a="http://schemas.openxmlformats.org/drawingml/2006/main">
+            <a:noAutofit/>
+          </a:bodyPr>
+          <a:lstStyle xmlns:a="http://schemas.openxmlformats.org/drawingml/2006/main"/>
+          <a:p xmlns:a="http://schemas.openxmlformats.org/drawingml/2006/main">
+            <a:pPr>
+              <a:defRPr sz="1800" b="0">
+                <a:solidFill>
+                  <a:srgbClr val="526B70"/>
+                </a:solidFill>
+                <a:latin typeface="Arial"/>
+                <a:ea typeface="Arial"/>
+                <a:cs typeface="Arial"/>
+              </a:defRPr>
+            </a:pPr>
+            <a:r>
+              <a:rPr sz="1800" b="0">
+                <a:solidFill>
+                  <a:srgbClr val="526B70"/>
+                </a:solidFill>
+                <a:latin typeface="Arial"/>
+                <a:ea typeface="Arial"/>
+                <a:cs typeface="Arial"/>
+              </a:rPr>
+              <a:t>10 hours: about 70 marks</a:t>
+            </a:r>
+          </a:p>
+        </p:txBody>
+      </p:sp>
+      <p:sp>
+        <p:nvSpPr>
+          <p:cNvPr id="13" name="">
+            <a:extLst xmlns:a="http://schemas.openxmlformats.org/drawingml/2006/main">
+              <a:ext uri="{FF2B5EF4-FFF2-40B4-BE49-F238E27FC236}">
+                <a16:creationId xmlns:a16="http://schemas.microsoft.com/office/drawing/2014/main" id="{384A7E3F-2E30-41D7-A931-9B6A855A13E9}"/>
+              </a:ext>
+            </a:extLst>
+          </p:cNvPr>
+          <p:cNvSpPr>
+            <a:spLocks xmlns:a="http://schemas.openxmlformats.org/drawingml/2006/main" noGrp="1"/>
+          </p:cNvSpPr>
+          <p:nvPr/>
+        </p:nvSpPr>
+        <p:spPr>
+          <a:xfrm xmlns:a="http://schemas.openxmlformats.org/drawingml/2006/main">
+            <a:off x="609600" y="5162550"/>
+            <a:ext cx="10763250" cy="495300"/>
+          </a:xfrm>
+          <a:prstGeom xmlns:a="http://schemas.openxmlformats.org/drawingml/2006/main" prst="rect">
+            <a:avLst/>
+          </a:prstGeom>
+          <a:noFill xmlns:a="http://schemas.openxmlformats.org/drawingml/2006/main"/>
+          <a:ln xmlns:a="http://schemas.openxmlformats.org/drawingml/2006/main" w="0">
+            <a:noFill/>
+          </a:ln>
+        </p:spPr>
+        <p:txBody>
+          <a:bodyPr xmlns:a="http://schemas.openxmlformats.org/drawingml/2006/main">
+            <a:noAutofit/>
+          </a:bodyPr>
+          <a:lstStyle xmlns:a="http://schemas.openxmlformats.org/drawingml/2006/main"/>
+          <a:p xmlns:a="http://schemas.openxmlformats.org/drawingml/2006/main">
+            <a:pPr>
+              <a:defRPr sz="1950" b="0">
+                <a:solidFill>
+                  <a:srgbClr val="173C43"/>
+                </a:solidFill>
+                <a:latin typeface="Heiti TC"/>
+                <a:ea typeface="Heiti TC"/>
+                <a:cs typeface="Heiti TC"/>
+              </a:defRPr>
+            </a:pPr>
+            <a:r>
+              <a:rPr sz="1950" b="0">
+                <a:solidFill>
+                  <a:srgbClr val="173C43"/>
+                </a:solidFill>
+                <a:latin typeface="Heiti TC"/>
+                <a:ea typeface="Heiti TC"/>
+                <a:cs typeface="Heiti TC"/>
+              </a:rPr>
+              <a:t>10 小時超出觀察範圍。這些數據也不能證明，溫習會令分數上升。</a:t>
+            </a:r>
+          </a:p>
+        </p:txBody>
+      </p:sp>
+      <p:sp>
+        <p:nvSpPr>
+          <p:cNvPr id="14" name="">
+            <a:extLst xmlns:a="http://schemas.openxmlformats.org/drawingml/2006/main">
+              <a:ext uri="{FF2B5EF4-FFF2-40B4-BE49-F238E27FC236}">
+                <a16:creationId xmlns:a16="http://schemas.microsoft.com/office/drawing/2014/main" id="{92A0F192-A83E-4E5E-99E6-BC307142FD9D}"/>
+              </a:ext>
+            </a:extLst>
+          </p:cNvPr>
+          <p:cNvSpPr>
+            <a:spLocks xmlns:a="http://schemas.openxmlformats.org/drawingml/2006/main" noGrp="1"/>
+          </p:cNvSpPr>
+          <p:nvPr/>
+        </p:nvSpPr>
+        <p:spPr>
+          <a:xfrm xmlns:a="http://schemas.openxmlformats.org/drawingml/2006/main">
+            <a:off x="609600" y="5629275"/>
+            <a:ext cx="10763250" cy="457200"/>
+          </a:xfrm>
+          <a:prstGeom xmlns:a="http://schemas.openxmlformats.org/drawingml/2006/main" prst="rect">
+            <a:avLst/>
+          </a:prstGeom>
+          <a:noFill xmlns:a="http://schemas.openxmlformats.org/drawingml/2006/main"/>
+          <a:ln xmlns:a="http://schemas.openxmlformats.org/drawingml/2006/main" w="0">
+            <a:noFill/>
+          </a:ln>
+        </p:spPr>
+        <p:txBody>
+          <a:bodyPr xmlns:a="http://schemas.openxmlformats.org/drawingml/2006/main">
+            <a:noAutofit/>
+          </a:bodyPr>
+          <a:lstStyle xmlns:a="http://schemas.openxmlformats.org/drawingml/2006/main"/>
+          <a:p xmlns:a="http://schemas.openxmlformats.org/drawingml/2006/main">
+            <a:pPr>
+              <a:defRPr sz="1800" b="0">
+                <a:solidFill>
+                  <a:srgbClr val="526B70"/>
+                </a:solidFill>
+                <a:latin typeface="Arial"/>
+                <a:ea typeface="Arial"/>
+                <a:cs typeface="Arial"/>
+              </a:defRPr>
+            </a:pPr>
+            <a:r>
+              <a:rPr sz="1800" b="0">
+                <a:solidFill>
+                  <a:srgbClr val="526B70"/>
+                </a:solidFill>
+                <a:latin typeface="Arial"/>
+                <a:ea typeface="Arial"/>
+                <a:cs typeface="Arial"/>
+              </a:rPr>
+              <a:t>10 hours is outside the data range. The data does not prove cause and effect.</a:t>
             </a:r>
           </a:p>
         </p:txBody>
@@ -8575,7 +8917,7 @@
     </p:spTree>
     <p:extLst>
       <p:ext uri="{BB962C8B-B14F-4D97-AF65-F5344CB8AC3E}">
-        <p14:creationId xmlns:p14="http://schemas.microsoft.com/office/powerpoint/2010/main" val="1271092245"/>
+        <p14:creationId xmlns:p14="http://schemas.microsoft.com/office/powerpoint/2010/main" val="1683766552"/>
       </p:ext>
     </p:extLst>
   </p:cSld>
@@ -8603,10 +8945,10 @@
       </p:grpSpPr>
       <p:sp>
         <p:nvSpPr>
-          <p:cNvPr id="15" name="">
-            <a:extLst xmlns:a="http://schemas.openxmlformats.org/drawingml/2006/main">
-              <a:ext uri="{FF2B5EF4-FFF2-40B4-BE49-F238E27FC236}">
-                <a16:creationId xmlns:a16="http://schemas.microsoft.com/office/drawing/2014/main" id="{A3E96F8C-651C-47C4-B36D-9D0637F01275}"/>
+          <p:cNvPr id="11" name="">
+            <a:extLst xmlns:a="http://schemas.openxmlformats.org/drawingml/2006/main">
+              <a:ext uri="{FF2B5EF4-FFF2-40B4-BE49-F238E27FC236}">
+                <a16:creationId xmlns:a16="http://schemas.microsoft.com/office/drawing/2014/main" id="{0706C34F-17E6-41E4-8F45-92D41A793FF7}"/>
               </a:ext>
             </a:extLst>
           </p:cNvPr>
@@ -8653,7 +8995,7 @@
                 <a:ea typeface="Heiti TC"/>
                 <a:cs typeface="Heiti TC"/>
               </a:rPr>
-              <a:t>預測結果與模型的限制</a:t>
+              <a:t>學會模式，還是只記住例子？</a:t>
             </a:r>
           </a:p>
         </p:txBody>
@@ -8663,7 +9005,7 @@
           <p:cNvPr id="2" name="">
             <a:extLst xmlns:a="http://schemas.openxmlformats.org/drawingml/2006/main">
               <a:ext uri="{FF2B5EF4-FFF2-40B4-BE49-F238E27FC236}">
-                <a16:creationId xmlns:a16="http://schemas.microsoft.com/office/drawing/2014/main" id="{6E574D39-3AFD-4C23-B2C7-A56609C7A6A9}"/>
+                <a16:creationId xmlns:a16="http://schemas.microsoft.com/office/drawing/2014/main" id="{67A71C4E-1D86-4CDB-8CD2-0C9EF1BBF9EE}"/>
               </a:ext>
             </a:extLst>
           </p:cNvPr>
@@ -8710,7 +9052,7 @@
                 <a:ea typeface="Arial"/>
                 <a:cs typeface="Arial"/>
               </a:rPr>
-              <a:t>Prediction results and limits of the model</a:t>
+              <a:t>Learning a pattern, or only remembering examples?</a:t>
             </a:r>
           </a:p>
         </p:txBody>
@@ -8720,7 +9062,7 @@
           <p:cNvPr id="3" name="">
             <a:extLst xmlns:a="http://schemas.openxmlformats.org/drawingml/2006/main">
               <a:ext uri="{FF2B5EF4-FFF2-40B4-BE49-F238E27FC236}">
-                <a16:creationId xmlns:a16="http://schemas.microsoft.com/office/drawing/2014/main" id="{7F148D9F-6A3C-49FC-8067-35AEB8460E39}"/>
+                <a16:creationId xmlns:a16="http://schemas.microsoft.com/office/drawing/2014/main" id="{D70B0C41-E243-41D4-BDD1-404C9EBA7967}"/>
               </a:ext>
             </a:extLst>
           </p:cNvPr>
@@ -8777,54 +9119,54 @@
           <p:cNvPr id="4" name="">
             <a:extLst xmlns:a="http://schemas.openxmlformats.org/drawingml/2006/main">
               <a:ext uri="{FF2B5EF4-FFF2-40B4-BE49-F238E27FC236}">
-                <a16:creationId xmlns:a16="http://schemas.microsoft.com/office/drawing/2014/main" id="{A135DF09-F368-4B46-969C-5DE70EF586B0}"/>
-              </a:ext>
-            </a:extLst>
-          </p:cNvPr>
-          <p:cNvSpPr>
-            <a:spLocks xmlns:a="http://schemas.openxmlformats.org/drawingml/2006/main" noGrp="1"/>
-          </p:cNvSpPr>
-          <p:nvPr/>
-        </p:nvSpPr>
-        <p:spPr>
-          <a:xfrm xmlns:a="http://schemas.openxmlformats.org/drawingml/2006/main">
-            <a:off x="609600" y="1657350"/>
-            <a:ext cx="10477500" cy="742950"/>
-          </a:xfrm>
-          <a:prstGeom xmlns:a="http://schemas.openxmlformats.org/drawingml/2006/main" prst="rect">
-            <a:avLst/>
-          </a:prstGeom>
-          <a:noFill xmlns:a="http://schemas.openxmlformats.org/drawingml/2006/main"/>
-          <a:ln xmlns:a="http://schemas.openxmlformats.org/drawingml/2006/main" w="0">
-            <a:noFill/>
-          </a:ln>
-        </p:spPr>
-        <p:txBody>
-          <a:bodyPr xmlns:a="http://schemas.openxmlformats.org/drawingml/2006/main">
-            <a:noAutofit/>
-          </a:bodyPr>
-          <a:lstStyle xmlns:a="http://schemas.openxmlformats.org/drawingml/2006/main"/>
-          <a:p xmlns:a="http://schemas.openxmlformats.org/drawingml/2006/main">
-            <a:pPr>
-              <a:defRPr sz="4350" b="1">
-                <a:solidFill>
-                  <a:srgbClr val="086C61"/>
-                </a:solidFill>
-                <a:latin typeface="Arial"/>
-                <a:ea typeface="Arial"/>
-                <a:cs typeface="Arial"/>
-              </a:defRPr>
-            </a:pPr>
-            <a:r>
-              <a:rPr sz="4350" b="1">
-                <a:solidFill>
-                  <a:srgbClr val="086C61"/>
-                </a:solidFill>
-                <a:latin typeface="Arial"/>
-                <a:ea typeface="Arial"/>
-                <a:cs typeface="Arial"/>
-              </a:rPr>
-              <a:t>y = 2x + 50</a:t>
+                <a16:creationId xmlns:a16="http://schemas.microsoft.com/office/drawing/2014/main" id="{6C4585FA-5B6B-4B40-9F46-DBED879907B4}"/>
+              </a:ext>
+            </a:extLst>
+          </p:cNvPr>
+          <p:cNvSpPr>
+            <a:spLocks xmlns:a="http://schemas.openxmlformats.org/drawingml/2006/main" noGrp="1"/>
+          </p:cNvSpPr>
+          <p:nvPr/>
+        </p:nvSpPr>
+        <p:spPr>
+          <a:xfrm xmlns:a="http://schemas.openxmlformats.org/drawingml/2006/main">
+            <a:off x="609600" y="1714500"/>
+            <a:ext cx="10763250" cy="495300"/>
+          </a:xfrm>
+          <a:prstGeom xmlns:a="http://schemas.openxmlformats.org/drawingml/2006/main" prst="rect">
+            <a:avLst/>
+          </a:prstGeom>
+          <a:noFill xmlns:a="http://schemas.openxmlformats.org/drawingml/2006/main"/>
+          <a:ln xmlns:a="http://schemas.openxmlformats.org/drawingml/2006/main" w="0">
+            <a:noFill/>
+          </a:ln>
+        </p:spPr>
+        <p:txBody>
+          <a:bodyPr xmlns:a="http://schemas.openxmlformats.org/drawingml/2006/main">
+            <a:noAutofit/>
+          </a:bodyPr>
+          <a:lstStyle xmlns:a="http://schemas.openxmlformats.org/drawingml/2006/main"/>
+          <a:p xmlns:a="http://schemas.openxmlformats.org/drawingml/2006/main">
+            <a:pPr>
+              <a:defRPr sz="2550" b="0">
+                <a:solidFill>
+                  <a:srgbClr val="173C43"/>
+                </a:solidFill>
+                <a:latin typeface="Heiti TC"/>
+                <a:ea typeface="Heiti TC"/>
+                <a:cs typeface="Heiti TC"/>
+              </a:defRPr>
+            </a:pPr>
+            <a:r>
+              <a:rPr sz="2550" b="0">
+                <a:solidFill>
+                  <a:srgbClr val="173C43"/>
+                </a:solidFill>
+                <a:latin typeface="Heiti TC"/>
+                <a:ea typeface="Heiti TC"/>
+                <a:cs typeface="Heiti TC"/>
+              </a:rPr>
+              <a:t>學習時：用一些例子找出模式</a:t>
             </a:r>
           </a:p>
         </p:txBody>
@@ -8834,36 +9176,93 @@
           <p:cNvPr id="5" name="">
             <a:extLst xmlns:a="http://schemas.openxmlformats.org/drawingml/2006/main">
               <a:ext uri="{FF2B5EF4-FFF2-40B4-BE49-F238E27FC236}">
-                <a16:creationId xmlns:a16="http://schemas.microsoft.com/office/drawing/2014/main" id="{EBDC5206-9EC1-4598-9B01-035A8B68A8E3}"/>
-              </a:ext>
-            </a:extLst>
-          </p:cNvPr>
-          <p:cNvSpPr>
-            <a:spLocks xmlns:a="http://schemas.openxmlformats.org/drawingml/2006/main" noGrp="1"/>
-          </p:cNvSpPr>
-          <p:nvPr/>
-        </p:nvSpPr>
-        <p:spPr>
-          <a:xfrm xmlns:a="http://schemas.openxmlformats.org/drawingml/2006/main">
-            <a:off x="609600" y="2743200"/>
-            <a:ext cx="5143500" cy="495300"/>
-          </a:xfrm>
-          <a:prstGeom xmlns:a="http://schemas.openxmlformats.org/drawingml/2006/main" prst="rect">
-            <a:avLst/>
-          </a:prstGeom>
-          <a:noFill xmlns:a="http://schemas.openxmlformats.org/drawingml/2006/main"/>
-          <a:ln xmlns:a="http://schemas.openxmlformats.org/drawingml/2006/main" w="0">
-            <a:noFill/>
-          </a:ln>
-        </p:spPr>
-        <p:txBody>
-          <a:bodyPr xmlns:a="http://schemas.openxmlformats.org/drawingml/2006/main">
-            <a:noAutofit/>
-          </a:bodyPr>
-          <a:lstStyle xmlns:a="http://schemas.openxmlformats.org/drawingml/2006/main"/>
-          <a:p xmlns:a="http://schemas.openxmlformats.org/drawingml/2006/main">
-            <a:pPr>
-              <a:defRPr sz="2025" b="0">
+                <a16:creationId xmlns:a16="http://schemas.microsoft.com/office/drawing/2014/main" id="{6CED6E62-8574-41BD-AECB-3B15DBD6DCDC}"/>
+              </a:ext>
+            </a:extLst>
+          </p:cNvPr>
+          <p:cNvSpPr>
+            <a:spLocks xmlns:a="http://schemas.openxmlformats.org/drawingml/2006/main" noGrp="1"/>
+          </p:cNvSpPr>
+          <p:nvPr/>
+        </p:nvSpPr>
+        <p:spPr>
+          <a:xfrm xmlns:a="http://schemas.openxmlformats.org/drawingml/2006/main">
+            <a:off x="609600" y="2181225"/>
+            <a:ext cx="10763250" cy="457200"/>
+          </a:xfrm>
+          <a:prstGeom xmlns:a="http://schemas.openxmlformats.org/drawingml/2006/main" prst="rect">
+            <a:avLst/>
+          </a:prstGeom>
+          <a:noFill xmlns:a="http://schemas.openxmlformats.org/drawingml/2006/main"/>
+          <a:ln xmlns:a="http://schemas.openxmlformats.org/drawingml/2006/main" w="0">
+            <a:noFill/>
+          </a:ln>
+        </p:spPr>
+        <p:txBody>
+          <a:bodyPr xmlns:a="http://schemas.openxmlformats.org/drawingml/2006/main">
+            <a:noAutofit/>
+          </a:bodyPr>
+          <a:lstStyle xmlns:a="http://schemas.openxmlformats.org/drawingml/2006/main"/>
+          <a:p xmlns:a="http://schemas.openxmlformats.org/drawingml/2006/main">
+            <a:pPr>
+              <a:defRPr sz="1950" b="0">
+                <a:solidFill>
+                  <a:srgbClr val="526B70"/>
+                </a:solidFill>
+                <a:latin typeface="Arial"/>
+                <a:ea typeface="Arial"/>
+                <a:cs typeface="Arial"/>
+              </a:defRPr>
+            </a:pPr>
+            <a:r>
+              <a:rPr sz="1950" b="0">
+                <a:solidFill>
+                  <a:srgbClr val="526B70"/>
+                </a:solidFill>
+                <a:latin typeface="Arial"/>
+                <a:ea typeface="Arial"/>
+                <a:cs typeface="Arial"/>
+              </a:rPr>
+              <a:t>During learning: use some examples to find a pattern</a:t>
+            </a:r>
+          </a:p>
+        </p:txBody>
+      </p:sp>
+      <p:sp>
+        <p:nvSpPr>
+          <p:cNvPr id="6" name="">
+            <a:extLst xmlns:a="http://schemas.openxmlformats.org/drawingml/2006/main">
+              <a:ext uri="{FF2B5EF4-FFF2-40B4-BE49-F238E27FC236}">
+                <a16:creationId xmlns:a16="http://schemas.microsoft.com/office/drawing/2014/main" id="{16CFCD72-2BA5-4869-B26C-DD339C6C3672}"/>
+              </a:ext>
+            </a:extLst>
+          </p:cNvPr>
+          <p:cNvSpPr>
+            <a:spLocks xmlns:a="http://schemas.openxmlformats.org/drawingml/2006/main" noGrp="1"/>
+          </p:cNvSpPr>
+          <p:nvPr/>
+        </p:nvSpPr>
+        <p:spPr>
+          <a:xfrm xmlns:a="http://schemas.openxmlformats.org/drawingml/2006/main">
+            <a:off x="609600" y="3133725"/>
+            <a:ext cx="10763250" cy="495300"/>
+          </a:xfrm>
+          <a:prstGeom xmlns:a="http://schemas.openxmlformats.org/drawingml/2006/main" prst="rect">
+            <a:avLst/>
+          </a:prstGeom>
+          <a:noFill xmlns:a="http://schemas.openxmlformats.org/drawingml/2006/main"/>
+          <a:ln xmlns:a="http://schemas.openxmlformats.org/drawingml/2006/main" w="0">
+            <a:noFill/>
+          </a:ln>
+        </p:spPr>
+        <p:txBody>
+          <a:bodyPr xmlns:a="http://schemas.openxmlformats.org/drawingml/2006/main">
+            <a:noAutofit/>
+          </a:bodyPr>
+          <a:lstStyle xmlns:a="http://schemas.openxmlformats.org/drawingml/2006/main"/>
+          <a:p xmlns:a="http://schemas.openxmlformats.org/drawingml/2006/main">
+            <a:pPr>
+              <a:defRPr sz="2550" b="0">
                 <a:solidFill>
                   <a:srgbClr val="173C43"/>
                 </a:solidFill>
@@ -8873,7 +9272,7 @@
               </a:defRPr>
             </a:pPr>
             <a:r>
-              <a:rPr sz="2025" b="0">
+              <a:rPr sz="2550" b="0">
                 <a:solidFill>
                   <a:srgbClr val="173C43"/>
                 </a:solidFill>
@@ -8881,29 +9280,143 @@
                 <a:ea typeface="Heiti TC"/>
                 <a:cs typeface="Heiti TC"/>
               </a:rPr>
-              <a:t>m = 2：模型中每小時約多 2 分</a:t>
-            </a:r>
-          </a:p>
-        </p:txBody>
-      </p:sp>
-      <p:sp>
-        <p:nvSpPr>
-          <p:cNvPr id="6" name="">
-            <a:extLst xmlns:a="http://schemas.openxmlformats.org/drawingml/2006/main">
-              <a:ext uri="{FF2B5EF4-FFF2-40B4-BE49-F238E27FC236}">
-                <a16:creationId xmlns:a16="http://schemas.microsoft.com/office/drawing/2014/main" id="{F31F20CE-579F-4F76-A2B9-C20A9CF02E69}"/>
-              </a:ext>
-            </a:extLst>
-          </p:cNvPr>
-          <p:cNvSpPr>
-            <a:spLocks xmlns:a="http://schemas.openxmlformats.org/drawingml/2006/main" noGrp="1"/>
-          </p:cNvSpPr>
-          <p:nvPr/>
-        </p:nvSpPr>
-        <p:spPr>
-          <a:xfrm xmlns:a="http://schemas.openxmlformats.org/drawingml/2006/main">
-            <a:off x="609600" y="3209925"/>
-            <a:ext cx="5143500" cy="457200"/>
+              <a:t>檢查時：用新例子，比較預測與實際結果</a:t>
+            </a:r>
+          </a:p>
+        </p:txBody>
+      </p:sp>
+      <p:sp>
+        <p:nvSpPr>
+          <p:cNvPr id="7" name="">
+            <a:extLst xmlns:a="http://schemas.openxmlformats.org/drawingml/2006/main">
+              <a:ext uri="{FF2B5EF4-FFF2-40B4-BE49-F238E27FC236}">
+                <a16:creationId xmlns:a16="http://schemas.microsoft.com/office/drawing/2014/main" id="{8AF675F6-E8D4-40B7-9E40-B1112A1D2A34}"/>
+              </a:ext>
+            </a:extLst>
+          </p:cNvPr>
+          <p:cNvSpPr>
+            <a:spLocks xmlns:a="http://schemas.openxmlformats.org/drawingml/2006/main" noGrp="1"/>
+          </p:cNvSpPr>
+          <p:nvPr/>
+        </p:nvSpPr>
+        <p:spPr>
+          <a:xfrm xmlns:a="http://schemas.openxmlformats.org/drawingml/2006/main">
+            <a:off x="609600" y="3600450"/>
+            <a:ext cx="10763250" cy="457200"/>
+          </a:xfrm>
+          <a:prstGeom xmlns:a="http://schemas.openxmlformats.org/drawingml/2006/main" prst="rect">
+            <a:avLst/>
+          </a:prstGeom>
+          <a:noFill xmlns:a="http://schemas.openxmlformats.org/drawingml/2006/main"/>
+          <a:ln xmlns:a="http://schemas.openxmlformats.org/drawingml/2006/main" w="0">
+            <a:noFill/>
+          </a:ln>
+        </p:spPr>
+        <p:txBody>
+          <a:bodyPr xmlns:a="http://schemas.openxmlformats.org/drawingml/2006/main">
+            <a:noAutofit/>
+          </a:bodyPr>
+          <a:lstStyle xmlns:a="http://schemas.openxmlformats.org/drawingml/2006/main"/>
+          <a:p xmlns:a="http://schemas.openxmlformats.org/drawingml/2006/main">
+            <a:pPr>
+              <a:defRPr sz="1950" b="0">
+                <a:solidFill>
+                  <a:srgbClr val="526B70"/>
+                </a:solidFill>
+                <a:latin typeface="Arial"/>
+                <a:ea typeface="Arial"/>
+                <a:cs typeface="Arial"/>
+              </a:defRPr>
+            </a:pPr>
+            <a:r>
+              <a:rPr sz="1950" b="0">
+                <a:solidFill>
+                  <a:srgbClr val="526B70"/>
+                </a:solidFill>
+                <a:latin typeface="Arial"/>
+                <a:ea typeface="Arial"/>
+                <a:cs typeface="Arial"/>
+              </a:rPr>
+              <a:t>During checking: compare predictions with actual outcomes on new examples</a:t>
+            </a:r>
+          </a:p>
+        </p:txBody>
+      </p:sp>
+      <p:sp>
+        <p:nvSpPr>
+          <p:cNvPr id="8" name="">
+            <a:extLst xmlns:a="http://schemas.openxmlformats.org/drawingml/2006/main">
+              <a:ext uri="{FF2B5EF4-FFF2-40B4-BE49-F238E27FC236}">
+                <a16:creationId xmlns:a16="http://schemas.microsoft.com/office/drawing/2014/main" id="{BFE6B7F3-E466-47A1-94B8-DBBE03DCCB7A}"/>
+              </a:ext>
+            </a:extLst>
+          </p:cNvPr>
+          <p:cNvSpPr>
+            <a:spLocks xmlns:a="http://schemas.openxmlformats.org/drawingml/2006/main" noGrp="1"/>
+          </p:cNvSpPr>
+          <p:nvPr/>
+        </p:nvSpPr>
+        <p:spPr>
+          <a:xfrm xmlns:a="http://schemas.openxmlformats.org/drawingml/2006/main">
+            <a:off x="609600" y="4552950"/>
+            <a:ext cx="10763250" cy="495300"/>
+          </a:xfrm>
+          <a:prstGeom xmlns:a="http://schemas.openxmlformats.org/drawingml/2006/main" prst="rect">
+            <a:avLst/>
+          </a:prstGeom>
+          <a:noFill xmlns:a="http://schemas.openxmlformats.org/drawingml/2006/main"/>
+          <a:ln xmlns:a="http://schemas.openxmlformats.org/drawingml/2006/main" w="0">
+            <a:noFill/>
+          </a:ln>
+        </p:spPr>
+        <p:txBody>
+          <a:bodyPr xmlns:a="http://schemas.openxmlformats.org/drawingml/2006/main">
+            <a:noAutofit/>
+          </a:bodyPr>
+          <a:lstStyle xmlns:a="http://schemas.openxmlformats.org/drawingml/2006/main"/>
+          <a:p xmlns:a="http://schemas.openxmlformats.org/drawingml/2006/main">
+            <a:pPr>
+              <a:defRPr sz="2400" b="0">
+                <a:solidFill>
+                  <a:srgbClr val="173C43"/>
+                </a:solidFill>
+                <a:latin typeface="Heiti TC"/>
+                <a:ea typeface="Heiti TC"/>
+                <a:cs typeface="Heiti TC"/>
+              </a:defRPr>
+            </a:pPr>
+            <a:r>
+              <a:rPr sz="2400" b="0">
+                <a:solidFill>
+                  <a:srgbClr val="173C43"/>
+                </a:solidFill>
+                <a:latin typeface="Heiti TC"/>
+                <a:ea typeface="Heiti TC"/>
+                <a:cs typeface="Heiti TC"/>
+              </a:rPr>
+              <a:t>數據的品質會影響預測；模型的答案也可能有誤</a:t>
+            </a:r>
+          </a:p>
+        </p:txBody>
+      </p:sp>
+      <p:sp>
+        <p:nvSpPr>
+          <p:cNvPr id="9" name="">
+            <a:extLst xmlns:a="http://schemas.openxmlformats.org/drawingml/2006/main">
+              <a:ext uri="{FF2B5EF4-FFF2-40B4-BE49-F238E27FC236}">
+                <a16:creationId xmlns:a16="http://schemas.microsoft.com/office/drawing/2014/main" id="{8690FC6C-0C1F-4616-A90F-D23B79B1AA23}"/>
+              </a:ext>
+            </a:extLst>
+          </p:cNvPr>
+          <p:cNvSpPr>
+            <a:spLocks xmlns:a="http://schemas.openxmlformats.org/drawingml/2006/main" noGrp="1"/>
+          </p:cNvSpPr>
+          <p:nvPr/>
+        </p:nvSpPr>
+        <p:spPr>
+          <a:xfrm xmlns:a="http://schemas.openxmlformats.org/drawingml/2006/main">
+            <a:off x="609600" y="5019675"/>
+            <a:ext cx="10763250" cy="457200"/>
           </a:xfrm>
           <a:prstGeom xmlns:a="http://schemas.openxmlformats.org/drawingml/2006/main" prst="rect">
             <a:avLst/>
@@ -8938,178 +9451,7 @@
                 <a:ea typeface="Arial"/>
                 <a:cs typeface="Arial"/>
               </a:rPr>
-              <a:t>In this model, m = 2 marks per extra hour</a:t>
-            </a:r>
-          </a:p>
-        </p:txBody>
-      </p:sp>
-      <p:sp>
-        <p:nvSpPr>
-          <p:cNvPr id="7" name="">
-            <a:extLst xmlns:a="http://schemas.openxmlformats.org/drawingml/2006/main">
-              <a:ext uri="{FF2B5EF4-FFF2-40B4-BE49-F238E27FC236}">
-                <a16:creationId xmlns:a16="http://schemas.microsoft.com/office/drawing/2014/main" id="{6BB04D22-A620-4A75-9F89-CD5E4C91F1C4}"/>
-              </a:ext>
-            </a:extLst>
-          </p:cNvPr>
-          <p:cNvSpPr>
-            <a:spLocks xmlns:a="http://schemas.openxmlformats.org/drawingml/2006/main" noGrp="1"/>
-          </p:cNvSpPr>
-          <p:nvPr/>
-        </p:nvSpPr>
-        <p:spPr>
-          <a:xfrm xmlns:a="http://schemas.openxmlformats.org/drawingml/2006/main">
-            <a:off x="6381750" y="2743200"/>
-            <a:ext cx="5143500" cy="495300"/>
-          </a:xfrm>
-          <a:prstGeom xmlns:a="http://schemas.openxmlformats.org/drawingml/2006/main" prst="rect">
-            <a:avLst/>
-          </a:prstGeom>
-          <a:noFill xmlns:a="http://schemas.openxmlformats.org/drawingml/2006/main"/>
-          <a:ln xmlns:a="http://schemas.openxmlformats.org/drawingml/2006/main" w="0">
-            <a:noFill/>
-          </a:ln>
-        </p:spPr>
-        <p:txBody>
-          <a:bodyPr xmlns:a="http://schemas.openxmlformats.org/drawingml/2006/main">
-            <a:noAutofit/>
-          </a:bodyPr>
-          <a:lstStyle xmlns:a="http://schemas.openxmlformats.org/drawingml/2006/main"/>
-          <a:p xmlns:a="http://schemas.openxmlformats.org/drawingml/2006/main">
-            <a:pPr>
-              <a:defRPr sz="2025" b="0">
-                <a:solidFill>
-                  <a:srgbClr val="173C43"/>
-                </a:solidFill>
-                <a:latin typeface="Heiti TC"/>
-                <a:ea typeface="Heiti TC"/>
-                <a:cs typeface="Heiti TC"/>
-              </a:defRPr>
-            </a:pPr>
-            <a:r>
-              <a:rPr sz="2025" b="0">
-                <a:solidFill>
-                  <a:srgbClr val="173C43"/>
-                </a:solidFill>
-                <a:latin typeface="Heiti TC"/>
-                <a:ea typeface="Heiti TC"/>
-                <a:cs typeface="Heiti TC"/>
-              </a:rPr>
-              <a:t>c = 50：0 小時時估計的成績</a:t>
-            </a:r>
-          </a:p>
-        </p:txBody>
-      </p:sp>
-      <p:sp>
-        <p:nvSpPr>
-          <p:cNvPr id="8" name="">
-            <a:extLst xmlns:a="http://schemas.openxmlformats.org/drawingml/2006/main">
-              <a:ext uri="{FF2B5EF4-FFF2-40B4-BE49-F238E27FC236}">
-                <a16:creationId xmlns:a16="http://schemas.microsoft.com/office/drawing/2014/main" id="{5748D0D9-B038-4644-B319-46948614D3C3}"/>
-              </a:ext>
-            </a:extLst>
-          </p:cNvPr>
-          <p:cNvSpPr>
-            <a:spLocks xmlns:a="http://schemas.openxmlformats.org/drawingml/2006/main" noGrp="1"/>
-          </p:cNvSpPr>
-          <p:nvPr/>
-        </p:nvSpPr>
-        <p:spPr>
-          <a:xfrm xmlns:a="http://schemas.openxmlformats.org/drawingml/2006/main">
-            <a:off x="6381750" y="3209925"/>
-            <a:ext cx="5143500" cy="457200"/>
-          </a:xfrm>
-          <a:prstGeom xmlns:a="http://schemas.openxmlformats.org/drawingml/2006/main" prst="rect">
-            <a:avLst/>
-          </a:prstGeom>
-          <a:noFill xmlns:a="http://schemas.openxmlformats.org/drawingml/2006/main"/>
-          <a:ln xmlns:a="http://schemas.openxmlformats.org/drawingml/2006/main" w="0">
-            <a:noFill/>
-          </a:ln>
-        </p:spPr>
-        <p:txBody>
-          <a:bodyPr xmlns:a="http://schemas.openxmlformats.org/drawingml/2006/main">
-            <a:noAutofit/>
-          </a:bodyPr>
-          <a:lstStyle xmlns:a="http://schemas.openxmlformats.org/drawingml/2006/main"/>
-          <a:p xmlns:a="http://schemas.openxmlformats.org/drawingml/2006/main">
-            <a:pPr>
-              <a:defRPr sz="1800" b="0">
-                <a:solidFill>
-                  <a:srgbClr val="526B70"/>
-                </a:solidFill>
-                <a:latin typeface="Arial"/>
-                <a:ea typeface="Arial"/>
-                <a:cs typeface="Arial"/>
-              </a:defRPr>
-            </a:pPr>
-            <a:r>
-              <a:rPr sz="1800" b="0">
-                <a:solidFill>
-                  <a:srgbClr val="526B70"/>
-                </a:solidFill>
-                <a:latin typeface="Arial"/>
-                <a:ea typeface="Arial"/>
-                <a:cs typeface="Arial"/>
-              </a:rPr>
-              <a:t>c = 50: estimated score at 0 hours</a:t>
-            </a:r>
-          </a:p>
-        </p:txBody>
-      </p:sp>
-      <p:sp>
-        <p:nvSpPr>
-          <p:cNvPr id="9" name="">
-            <a:extLst xmlns:a="http://schemas.openxmlformats.org/drawingml/2006/main">
-              <a:ext uri="{FF2B5EF4-FFF2-40B4-BE49-F238E27FC236}">
-                <a16:creationId xmlns:a16="http://schemas.microsoft.com/office/drawing/2014/main" id="{2B4C08A3-0059-40EF-AF3D-E8F1A47BABC2}"/>
-              </a:ext>
-            </a:extLst>
-          </p:cNvPr>
-          <p:cNvSpPr>
-            <a:spLocks xmlns:a="http://schemas.openxmlformats.org/drawingml/2006/main" noGrp="1"/>
-          </p:cNvSpPr>
-          <p:nvPr/>
-        </p:nvSpPr>
-        <p:spPr>
-          <a:xfrm xmlns:a="http://schemas.openxmlformats.org/drawingml/2006/main">
-            <a:off x="609600" y="3952875"/>
-            <a:ext cx="5143500" cy="495300"/>
-          </a:xfrm>
-          <a:prstGeom xmlns:a="http://schemas.openxmlformats.org/drawingml/2006/main" prst="rect">
-            <a:avLst/>
-          </a:prstGeom>
-          <a:noFill xmlns:a="http://schemas.openxmlformats.org/drawingml/2006/main"/>
-          <a:ln xmlns:a="http://schemas.openxmlformats.org/drawingml/2006/main" w="0">
-            <a:noFill/>
-          </a:ln>
-        </p:spPr>
-        <p:txBody>
-          <a:bodyPr xmlns:a="http://schemas.openxmlformats.org/drawingml/2006/main">
-            <a:noAutofit/>
-          </a:bodyPr>
-          <a:lstStyle xmlns:a="http://schemas.openxmlformats.org/drawingml/2006/main"/>
-          <a:p xmlns:a="http://schemas.openxmlformats.org/drawingml/2006/main">
-            <a:pPr>
-              <a:defRPr sz="2400" b="0">
-                <a:solidFill>
-                  <a:srgbClr val="173C43"/>
-                </a:solidFill>
-                <a:latin typeface="Heiti TC"/>
-                <a:ea typeface="Heiti TC"/>
-                <a:cs typeface="Heiti TC"/>
-              </a:defRPr>
-            </a:pPr>
-            <a:r>
-              <a:rPr sz="2400" b="0">
-                <a:solidFill>
-                  <a:srgbClr val="173C43"/>
-                </a:solidFill>
-                <a:latin typeface="Heiti TC"/>
-                <a:ea typeface="Heiti TC"/>
-                <a:cs typeface="Heiti TC"/>
-              </a:rPr>
-              <a:t>3.5 小時：約 57 分</a:t>
+              <a:t>Data quality affects predictions. A model can still give a wrong answer.</a:t>
             </a:r>
           </a:p>
         </p:txBody>
@@ -9119,282 +9461,54 @@
           <p:cNvPr id="10" name="">
             <a:extLst xmlns:a="http://schemas.openxmlformats.org/drawingml/2006/main">
               <a:ext uri="{FF2B5EF4-FFF2-40B4-BE49-F238E27FC236}">
-                <a16:creationId xmlns:a16="http://schemas.microsoft.com/office/drawing/2014/main" id="{61BBFD26-D2FD-4040-A498-7E8F7FF8D7AE}"/>
-              </a:ext>
-            </a:extLst>
-          </p:cNvPr>
-          <p:cNvSpPr>
-            <a:spLocks xmlns:a="http://schemas.openxmlformats.org/drawingml/2006/main" noGrp="1"/>
-          </p:cNvSpPr>
-          <p:nvPr/>
-        </p:nvSpPr>
-        <p:spPr>
-          <a:xfrm xmlns:a="http://schemas.openxmlformats.org/drawingml/2006/main">
-            <a:off x="609600" y="4419600"/>
-            <a:ext cx="5143500" cy="457200"/>
-          </a:xfrm>
-          <a:prstGeom xmlns:a="http://schemas.openxmlformats.org/drawingml/2006/main" prst="rect">
-            <a:avLst/>
-          </a:prstGeom>
-          <a:noFill xmlns:a="http://schemas.openxmlformats.org/drawingml/2006/main"/>
-          <a:ln xmlns:a="http://schemas.openxmlformats.org/drawingml/2006/main" w="0">
-            <a:noFill/>
-          </a:ln>
-        </p:spPr>
-        <p:txBody>
-          <a:bodyPr xmlns:a="http://schemas.openxmlformats.org/drawingml/2006/main">
-            <a:noAutofit/>
-          </a:bodyPr>
-          <a:lstStyle xmlns:a="http://schemas.openxmlformats.org/drawingml/2006/main"/>
-          <a:p xmlns:a="http://schemas.openxmlformats.org/drawingml/2006/main">
-            <a:pPr>
-              <a:defRPr sz="1800" b="0">
-                <a:solidFill>
-                  <a:srgbClr val="526B70"/>
-                </a:solidFill>
-                <a:latin typeface="Arial"/>
-                <a:ea typeface="Arial"/>
-                <a:cs typeface="Arial"/>
-              </a:defRPr>
-            </a:pPr>
-            <a:r>
-              <a:rPr sz="1800" b="0">
-                <a:solidFill>
-                  <a:srgbClr val="526B70"/>
-                </a:solidFill>
-                <a:latin typeface="Arial"/>
-                <a:ea typeface="Arial"/>
-                <a:cs typeface="Arial"/>
-              </a:rPr>
-              <a:t>3.5 hours: about 57 marks</a:t>
-            </a:r>
-          </a:p>
-        </p:txBody>
-      </p:sp>
-      <p:sp>
-        <p:nvSpPr>
-          <p:cNvPr id="11" name="">
-            <a:extLst xmlns:a="http://schemas.openxmlformats.org/drawingml/2006/main">
-              <a:ext uri="{FF2B5EF4-FFF2-40B4-BE49-F238E27FC236}">
-                <a16:creationId xmlns:a16="http://schemas.microsoft.com/office/drawing/2014/main" id="{E4815236-8BF2-46D8-9A87-DC66DC202609}"/>
-              </a:ext>
-            </a:extLst>
-          </p:cNvPr>
-          <p:cNvSpPr>
-            <a:spLocks xmlns:a="http://schemas.openxmlformats.org/drawingml/2006/main" noGrp="1"/>
-          </p:cNvSpPr>
-          <p:nvPr/>
-        </p:nvSpPr>
-        <p:spPr>
-          <a:xfrm xmlns:a="http://schemas.openxmlformats.org/drawingml/2006/main">
-            <a:off x="6381750" y="3952875"/>
-            <a:ext cx="5143500" cy="495300"/>
-          </a:xfrm>
-          <a:prstGeom xmlns:a="http://schemas.openxmlformats.org/drawingml/2006/main" prst="rect">
-            <a:avLst/>
-          </a:prstGeom>
-          <a:noFill xmlns:a="http://schemas.openxmlformats.org/drawingml/2006/main"/>
-          <a:ln xmlns:a="http://schemas.openxmlformats.org/drawingml/2006/main" w="0">
-            <a:noFill/>
-          </a:ln>
-        </p:spPr>
-        <p:txBody>
-          <a:bodyPr xmlns:a="http://schemas.openxmlformats.org/drawingml/2006/main">
-            <a:noAutofit/>
-          </a:bodyPr>
-          <a:lstStyle xmlns:a="http://schemas.openxmlformats.org/drawingml/2006/main"/>
-          <a:p xmlns:a="http://schemas.openxmlformats.org/drawingml/2006/main">
-            <a:pPr>
-              <a:defRPr sz="2400" b="0">
-                <a:solidFill>
-                  <a:srgbClr val="173C43"/>
-                </a:solidFill>
-                <a:latin typeface="Heiti TC"/>
-                <a:ea typeface="Heiti TC"/>
-                <a:cs typeface="Heiti TC"/>
-              </a:defRPr>
-            </a:pPr>
-            <a:r>
-              <a:rPr sz="2400" b="0">
-                <a:solidFill>
-                  <a:srgbClr val="173C43"/>
-                </a:solidFill>
-                <a:latin typeface="Heiti TC"/>
-                <a:ea typeface="Heiti TC"/>
-                <a:cs typeface="Heiti TC"/>
-              </a:rPr>
-              <a:t>10 小時：約 70 分</a:t>
-            </a:r>
-          </a:p>
-        </p:txBody>
-      </p:sp>
-      <p:sp>
-        <p:nvSpPr>
-          <p:cNvPr id="12" name="">
-            <a:extLst xmlns:a="http://schemas.openxmlformats.org/drawingml/2006/main">
-              <a:ext uri="{FF2B5EF4-FFF2-40B4-BE49-F238E27FC236}">
-                <a16:creationId xmlns:a16="http://schemas.microsoft.com/office/drawing/2014/main" id="{76C7B4F1-4702-4550-B2F3-40F5ABC20658}"/>
-              </a:ext>
-            </a:extLst>
-          </p:cNvPr>
-          <p:cNvSpPr>
-            <a:spLocks xmlns:a="http://schemas.openxmlformats.org/drawingml/2006/main" noGrp="1"/>
-          </p:cNvSpPr>
-          <p:nvPr/>
-        </p:nvSpPr>
-        <p:spPr>
-          <a:xfrm xmlns:a="http://schemas.openxmlformats.org/drawingml/2006/main">
-            <a:off x="6381750" y="4419600"/>
-            <a:ext cx="5143500" cy="457200"/>
-          </a:xfrm>
-          <a:prstGeom xmlns:a="http://schemas.openxmlformats.org/drawingml/2006/main" prst="rect">
-            <a:avLst/>
-          </a:prstGeom>
-          <a:noFill xmlns:a="http://schemas.openxmlformats.org/drawingml/2006/main"/>
-          <a:ln xmlns:a="http://schemas.openxmlformats.org/drawingml/2006/main" w="0">
-            <a:noFill/>
-          </a:ln>
-        </p:spPr>
-        <p:txBody>
-          <a:bodyPr xmlns:a="http://schemas.openxmlformats.org/drawingml/2006/main">
-            <a:noAutofit/>
-          </a:bodyPr>
-          <a:lstStyle xmlns:a="http://schemas.openxmlformats.org/drawingml/2006/main"/>
-          <a:p xmlns:a="http://schemas.openxmlformats.org/drawingml/2006/main">
-            <a:pPr>
-              <a:defRPr sz="1800" b="0">
-                <a:solidFill>
-                  <a:srgbClr val="526B70"/>
-                </a:solidFill>
-                <a:latin typeface="Arial"/>
-                <a:ea typeface="Arial"/>
-                <a:cs typeface="Arial"/>
-              </a:defRPr>
-            </a:pPr>
-            <a:r>
-              <a:rPr sz="1800" b="0">
-                <a:solidFill>
-                  <a:srgbClr val="526B70"/>
-                </a:solidFill>
-                <a:latin typeface="Arial"/>
-                <a:ea typeface="Arial"/>
-                <a:cs typeface="Arial"/>
-              </a:rPr>
-              <a:t>10 hours: about 70 marks</a:t>
-            </a:r>
-          </a:p>
-        </p:txBody>
-      </p:sp>
-      <p:sp>
-        <p:nvSpPr>
-          <p:cNvPr id="13" name="">
-            <a:extLst xmlns:a="http://schemas.openxmlformats.org/drawingml/2006/main">
-              <a:ext uri="{FF2B5EF4-FFF2-40B4-BE49-F238E27FC236}">
-                <a16:creationId xmlns:a16="http://schemas.microsoft.com/office/drawing/2014/main" id="{10C7B2C4-0378-4251-97B2-291759133577}"/>
-              </a:ext>
-            </a:extLst>
-          </p:cNvPr>
-          <p:cNvSpPr>
-            <a:spLocks xmlns:a="http://schemas.openxmlformats.org/drawingml/2006/main" noGrp="1"/>
-          </p:cNvSpPr>
-          <p:nvPr/>
-        </p:nvSpPr>
-        <p:spPr>
-          <a:xfrm xmlns:a="http://schemas.openxmlformats.org/drawingml/2006/main">
-            <a:off x="609600" y="5162550"/>
-            <a:ext cx="10763250" cy="495300"/>
-          </a:xfrm>
-          <a:prstGeom xmlns:a="http://schemas.openxmlformats.org/drawingml/2006/main" prst="rect">
-            <a:avLst/>
-          </a:prstGeom>
-          <a:noFill xmlns:a="http://schemas.openxmlformats.org/drawingml/2006/main"/>
-          <a:ln xmlns:a="http://schemas.openxmlformats.org/drawingml/2006/main" w="0">
-            <a:noFill/>
-          </a:ln>
-        </p:spPr>
-        <p:txBody>
-          <a:bodyPr xmlns:a="http://schemas.openxmlformats.org/drawingml/2006/main">
-            <a:noAutofit/>
-          </a:bodyPr>
-          <a:lstStyle xmlns:a="http://schemas.openxmlformats.org/drawingml/2006/main"/>
-          <a:p xmlns:a="http://schemas.openxmlformats.org/drawingml/2006/main">
-            <a:pPr>
-              <a:defRPr sz="1950" b="0">
-                <a:solidFill>
-                  <a:srgbClr val="173C43"/>
-                </a:solidFill>
-                <a:latin typeface="Heiti TC"/>
-                <a:ea typeface="Heiti TC"/>
-                <a:cs typeface="Heiti TC"/>
-              </a:defRPr>
-            </a:pPr>
-            <a:r>
-              <a:rPr sz="1950" b="0">
-                <a:solidFill>
-                  <a:srgbClr val="173C43"/>
-                </a:solidFill>
-                <a:latin typeface="Heiti TC"/>
-                <a:ea typeface="Heiti TC"/>
-                <a:cs typeface="Heiti TC"/>
-              </a:rPr>
-              <a:t>10 小時超出觀察範圍。這些數據也不能證明，溫習會令分數上升。</a:t>
-            </a:r>
-          </a:p>
-        </p:txBody>
-      </p:sp>
-      <p:sp>
-        <p:nvSpPr>
-          <p:cNvPr id="14" name="">
-            <a:extLst xmlns:a="http://schemas.openxmlformats.org/drawingml/2006/main">
-              <a:ext uri="{FF2B5EF4-FFF2-40B4-BE49-F238E27FC236}">
-                <a16:creationId xmlns:a16="http://schemas.microsoft.com/office/drawing/2014/main" id="{359919B3-B271-461C-9532-549B52A1657D}"/>
-              </a:ext>
-            </a:extLst>
-          </p:cNvPr>
-          <p:cNvSpPr>
-            <a:spLocks xmlns:a="http://schemas.openxmlformats.org/drawingml/2006/main" noGrp="1"/>
-          </p:cNvSpPr>
-          <p:nvPr/>
-        </p:nvSpPr>
-        <p:spPr>
-          <a:xfrm xmlns:a="http://schemas.openxmlformats.org/drawingml/2006/main">
-            <a:off x="609600" y="5629275"/>
-            <a:ext cx="10763250" cy="457200"/>
-          </a:xfrm>
-          <a:prstGeom xmlns:a="http://schemas.openxmlformats.org/drawingml/2006/main" prst="rect">
-            <a:avLst/>
-          </a:prstGeom>
-          <a:noFill xmlns:a="http://schemas.openxmlformats.org/drawingml/2006/main"/>
-          <a:ln xmlns:a="http://schemas.openxmlformats.org/drawingml/2006/main" w="0">
-            <a:noFill/>
-          </a:ln>
-        </p:spPr>
-        <p:txBody>
-          <a:bodyPr xmlns:a="http://schemas.openxmlformats.org/drawingml/2006/main">
-            <a:noAutofit/>
-          </a:bodyPr>
-          <a:lstStyle xmlns:a="http://schemas.openxmlformats.org/drawingml/2006/main"/>
-          <a:p xmlns:a="http://schemas.openxmlformats.org/drawingml/2006/main">
-            <a:pPr>
-              <a:defRPr sz="1800" b="0">
-                <a:solidFill>
-                  <a:srgbClr val="526B70"/>
-                </a:solidFill>
-                <a:latin typeface="Arial"/>
-                <a:ea typeface="Arial"/>
-                <a:cs typeface="Arial"/>
-              </a:defRPr>
-            </a:pPr>
-            <a:r>
-              <a:rPr sz="1800" b="0">
-                <a:solidFill>
-                  <a:srgbClr val="526B70"/>
-                </a:solidFill>
-                <a:latin typeface="Arial"/>
-                <a:ea typeface="Arial"/>
-                <a:cs typeface="Arial"/>
-              </a:rPr>
-              <a:t>10 hours is outside the data range. The data does not prove cause and effect.</a:t>
+                <a16:creationId xmlns:a16="http://schemas.microsoft.com/office/drawing/2014/main" id="{CE54A8B4-5E0C-4741-8780-18D1FB5F7590}"/>
+              </a:ext>
+            </a:extLst>
+          </p:cNvPr>
+          <p:cNvSpPr>
+            <a:spLocks xmlns:a="http://schemas.openxmlformats.org/drawingml/2006/main" noGrp="1"/>
+          </p:cNvSpPr>
+          <p:nvPr/>
+        </p:nvSpPr>
+        <p:spPr>
+          <a:xfrm xmlns:a="http://schemas.openxmlformats.org/drawingml/2006/main">
+            <a:off x="609600" y="6419850"/>
+            <a:ext cx="10096500" cy="238125"/>
+          </a:xfrm>
+          <a:prstGeom xmlns:a="http://schemas.openxmlformats.org/drawingml/2006/main" prst="rect">
+            <a:avLst/>
+          </a:prstGeom>
+          <a:noFill xmlns:a="http://schemas.openxmlformats.org/drawingml/2006/main"/>
+          <a:ln xmlns:a="http://schemas.openxmlformats.org/drawingml/2006/main" w="0">
+            <a:noFill/>
+          </a:ln>
+        </p:spPr>
+        <p:txBody>
+          <a:bodyPr xmlns:a="http://schemas.openxmlformats.org/drawingml/2006/main">
+            <a:noAutofit/>
+          </a:bodyPr>
+          <a:lstStyle xmlns:a="http://schemas.openxmlformats.org/drawingml/2006/main"/>
+          <a:p xmlns:a="http://schemas.openxmlformats.org/drawingml/2006/main">
+            <a:pPr>
+              <a:defRPr sz="1200" b="0">
+                <a:solidFill>
+                  <a:srgbClr val="526B70"/>
+                </a:solidFill>
+                <a:latin typeface="Heiti TC"/>
+                <a:ea typeface="Heiti TC"/>
+                <a:cs typeface="Heiti TC"/>
+              </a:defRPr>
+            </a:pPr>
+            <a:r>
+              <a:rPr sz="1200" b="0">
+                <a:solidFill>
+                  <a:srgbClr val="526B70"/>
+                </a:solidFill>
+                <a:latin typeface="Heiti TC"/>
+                <a:ea typeface="Heiti TC"/>
+                <a:cs typeface="Heiti TC"/>
+              </a:rPr>
+              <a:t>參考 / Source: Google Machine Learning Crash Course</a:t>
             </a:r>
           </a:p>
         </p:txBody>
@@ -9402,7 +9516,7 @@
     </p:spTree>
     <p:extLst>
       <p:ext uri="{BB962C8B-B14F-4D97-AF65-F5344CB8AC3E}">
-        <p14:creationId xmlns:p14="http://schemas.microsoft.com/office/powerpoint/2010/main" val="55271044"/>
+        <p14:creationId xmlns:p14="http://schemas.microsoft.com/office/powerpoint/2010/main" val="106151170"/>
       </p:ext>
     </p:extLst>
   </p:cSld>
@@ -9433,7 +9547,7 @@
           <p:cNvPr id="11" name="">
             <a:extLst xmlns:a="http://schemas.openxmlformats.org/drawingml/2006/main">
               <a:ext uri="{FF2B5EF4-FFF2-40B4-BE49-F238E27FC236}">
-                <a16:creationId xmlns:a16="http://schemas.microsoft.com/office/drawing/2014/main" id="{207309A9-21C8-401D-B97E-1036CE7A46A4}"/>
+                <a16:creationId xmlns:a16="http://schemas.microsoft.com/office/drawing/2014/main" id="{B28C99C8-2908-409B-9C0D-EC8943A0FF31}"/>
               </a:ext>
             </a:extLst>
           </p:cNvPr>
@@ -9490,7 +9604,7 @@
           <p:cNvPr id="2" name="">
             <a:extLst xmlns:a="http://schemas.openxmlformats.org/drawingml/2006/main">
               <a:ext uri="{FF2B5EF4-FFF2-40B4-BE49-F238E27FC236}">
-                <a16:creationId xmlns:a16="http://schemas.microsoft.com/office/drawing/2014/main" id="{2752E5B4-E2B2-4D8F-A5AA-2B49C080E6CB}"/>
+                <a16:creationId xmlns:a16="http://schemas.microsoft.com/office/drawing/2014/main" id="{E45B0B8B-9539-4BA9-A3B9-19DC7890C5BF}"/>
               </a:ext>
             </a:extLst>
           </p:cNvPr>
@@ -9547,7 +9661,7 @@
           <p:cNvPr id="3" name="">
             <a:extLst xmlns:a="http://schemas.openxmlformats.org/drawingml/2006/main">
               <a:ext uri="{FF2B5EF4-FFF2-40B4-BE49-F238E27FC236}">
-                <a16:creationId xmlns:a16="http://schemas.microsoft.com/office/drawing/2014/main" id="{E0FD936A-A943-4063-9909-A32D8B8464E1}"/>
+                <a16:creationId xmlns:a16="http://schemas.microsoft.com/office/drawing/2014/main" id="{CD1C47D7-3E97-41F1-A19A-6BEB199E78DA}"/>
               </a:ext>
             </a:extLst>
           </p:cNvPr>
@@ -9604,7 +9718,7 @@
           <p:cNvPr id="4" name="">
             <a:extLst xmlns:a="http://schemas.openxmlformats.org/drawingml/2006/main">
               <a:ext uri="{FF2B5EF4-FFF2-40B4-BE49-F238E27FC236}">
-                <a16:creationId xmlns:a16="http://schemas.microsoft.com/office/drawing/2014/main" id="{8F8F66EA-7A36-48F4-B0B9-D27692176868}"/>
+                <a16:creationId xmlns:a16="http://schemas.microsoft.com/office/drawing/2014/main" id="{83CA84FC-FE14-4EE4-9903-6DC9C234DA08}"/>
               </a:ext>
             </a:extLst>
           </p:cNvPr>
@@ -9661,7 +9775,7 @@
           <p:cNvPr id="5" name="">
             <a:extLst xmlns:a="http://schemas.openxmlformats.org/drawingml/2006/main">
               <a:ext uri="{FF2B5EF4-FFF2-40B4-BE49-F238E27FC236}">
-                <a16:creationId xmlns:a16="http://schemas.microsoft.com/office/drawing/2014/main" id="{43DE64DD-F03B-4A45-B2C8-1F848AD8E96B}"/>
+                <a16:creationId xmlns:a16="http://schemas.microsoft.com/office/drawing/2014/main" id="{800D59E9-CE64-4A2A-B899-E258574EDE76}"/>
               </a:ext>
             </a:extLst>
           </p:cNvPr>
@@ -9718,7 +9832,7 @@
           <p:cNvPr id="6" name="">
             <a:extLst xmlns:a="http://schemas.openxmlformats.org/drawingml/2006/main">
               <a:ext uri="{FF2B5EF4-FFF2-40B4-BE49-F238E27FC236}">
-                <a16:creationId xmlns:a16="http://schemas.microsoft.com/office/drawing/2014/main" id="{63FC105B-6BA9-4A92-98C8-93FE2F7CEA14}"/>
+                <a16:creationId xmlns:a16="http://schemas.microsoft.com/office/drawing/2014/main" id="{124BD22B-D7FC-45F5-A1A7-3A6A60297E38}"/>
               </a:ext>
             </a:extLst>
           </p:cNvPr>
@@ -9775,7 +9889,7 @@
           <p:cNvPr id="7" name="">
             <a:extLst xmlns:a="http://schemas.openxmlformats.org/drawingml/2006/main">
               <a:ext uri="{FF2B5EF4-FFF2-40B4-BE49-F238E27FC236}">
-                <a16:creationId xmlns:a16="http://schemas.microsoft.com/office/drawing/2014/main" id="{90CF0C8A-907E-46B2-932A-59C5D5F5F6DB}"/>
+                <a16:creationId xmlns:a16="http://schemas.microsoft.com/office/drawing/2014/main" id="{04C03D8B-A833-424F-A3C4-A0E42DEA17E0}"/>
               </a:ext>
             </a:extLst>
           </p:cNvPr>
@@ -9832,7 +9946,7 @@
           <p:cNvPr id="8" name="">
             <a:extLst xmlns:a="http://schemas.openxmlformats.org/drawingml/2006/main">
               <a:ext uri="{FF2B5EF4-FFF2-40B4-BE49-F238E27FC236}">
-                <a16:creationId xmlns:a16="http://schemas.microsoft.com/office/drawing/2014/main" id="{53393D66-6874-4B52-86E3-69BEC5457572}"/>
+                <a16:creationId xmlns:a16="http://schemas.microsoft.com/office/drawing/2014/main" id="{268C197C-725D-498F-8956-C94DD31C9DEF}"/>
               </a:ext>
             </a:extLst>
           </p:cNvPr>
@@ -9879,7 +9993,7 @@
                 <a:ea typeface="Heiti TC"/>
                 <a:cs typeface="Heiti TC"/>
               </a:rPr>
-              <a:t>你會較信賴哪個預測？為甚麼？</a:t>
+              <a:t>每天 3.5 小時和 10 小時的預測，哪個較值得信賴？</a:t>
             </a:r>
           </a:p>
         </p:txBody>
@@ -9889,7 +10003,7 @@
           <p:cNvPr id="9" name="">
             <a:extLst xmlns:a="http://schemas.openxmlformats.org/drawingml/2006/main">
               <a:ext uri="{FF2B5EF4-FFF2-40B4-BE49-F238E27FC236}">
-                <a16:creationId xmlns:a16="http://schemas.microsoft.com/office/drawing/2014/main" id="{E26DE810-1761-4712-BABF-3996EA3F068F}"/>
+                <a16:creationId xmlns:a16="http://schemas.microsoft.com/office/drawing/2014/main" id="{05361253-33FC-4F0B-A5F6-39F19C9AA10F}"/>
               </a:ext>
             </a:extLst>
           </p:cNvPr>
@@ -9936,7 +10050,7 @@
                 <a:ea typeface="Arial"/>
                 <a:cs typeface="Arial"/>
               </a:rPr>
-              <a:t>Which prediction would you trust more? Why?</a:t>
+              <a:t>Which prediction is more trustworthy: 3.5 or 10 hours a day?</a:t>
             </a:r>
           </a:p>
         </p:txBody>
@@ -9946,7 +10060,7 @@
           <p:cNvPr id="10" name="">
             <a:extLst xmlns:a="http://schemas.openxmlformats.org/drawingml/2006/main">
               <a:ext uri="{FF2B5EF4-FFF2-40B4-BE49-F238E27FC236}">
-                <a16:creationId xmlns:a16="http://schemas.microsoft.com/office/drawing/2014/main" id="{8F9B5B4B-1418-4447-BD6D-2875147D72C6}"/>
+                <a16:creationId xmlns:a16="http://schemas.microsoft.com/office/drawing/2014/main" id="{0712D98F-E2A5-4A1A-9AD9-8CA68297849D}"/>
               </a:ext>
             </a:extLst>
           </p:cNvPr>
@@ -10001,7 +10115,7 @@
     </p:spTree>
     <p:extLst>
       <p:ext uri="{BB962C8B-B14F-4D97-AF65-F5344CB8AC3E}">
-        <p14:creationId xmlns:p14="http://schemas.microsoft.com/office/powerpoint/2010/main" val="156666499"/>
+        <p14:creationId xmlns:p14="http://schemas.microsoft.com/office/powerpoint/2010/main" val="1447866727"/>
       </p:ext>
     </p:extLst>
   </p:cSld>
@@ -10032,7 +10146,7 @@
           <p:cNvPr id="10" name="">
             <a:extLst xmlns:a="http://schemas.openxmlformats.org/drawingml/2006/main">
               <a:ext uri="{FF2B5EF4-FFF2-40B4-BE49-F238E27FC236}">
-                <a16:creationId xmlns:a16="http://schemas.microsoft.com/office/drawing/2014/main" id="{25D5233F-04F0-4946-8FDE-AB6A6A29A60D}"/>
+                <a16:creationId xmlns:a16="http://schemas.microsoft.com/office/drawing/2014/main" id="{DB6D7822-037E-4370-B9D5-85845B50668B}"/>
               </a:ext>
             </a:extLst>
           </p:cNvPr>
@@ -10089,7 +10203,7 @@
           <p:cNvPr id="2" name="">
             <a:extLst xmlns:a="http://schemas.openxmlformats.org/drawingml/2006/main">
               <a:ext uri="{FF2B5EF4-FFF2-40B4-BE49-F238E27FC236}">
-                <a16:creationId xmlns:a16="http://schemas.microsoft.com/office/drawing/2014/main" id="{E647C9EA-C49A-4EF0-939C-234D1C8EB2E5}"/>
+                <a16:creationId xmlns:a16="http://schemas.microsoft.com/office/drawing/2014/main" id="{999BED0C-9CE7-42BC-B4CA-23D90006F5A5}"/>
               </a:ext>
             </a:extLst>
           </p:cNvPr>
@@ -10146,7 +10260,7 @@
           <p:cNvPr id="3" name="">
             <a:extLst xmlns:a="http://schemas.openxmlformats.org/drawingml/2006/main">
               <a:ext uri="{FF2B5EF4-FFF2-40B4-BE49-F238E27FC236}">
-                <a16:creationId xmlns:a16="http://schemas.microsoft.com/office/drawing/2014/main" id="{16A7E3A6-30B3-4E93-A9F2-58C62001C5DE}"/>
+                <a16:creationId xmlns:a16="http://schemas.microsoft.com/office/drawing/2014/main" id="{8B4399C6-B4E3-46E3-91A4-AF218DC2825A}"/>
               </a:ext>
             </a:extLst>
           </p:cNvPr>
@@ -10203,7 +10317,7 @@
           <p:cNvPr id="4" name="">
             <a:extLst xmlns:a="http://schemas.openxmlformats.org/drawingml/2006/main">
               <a:ext uri="{FF2B5EF4-FFF2-40B4-BE49-F238E27FC236}">
-                <a16:creationId xmlns:a16="http://schemas.microsoft.com/office/drawing/2014/main" id="{F399605B-A041-41C9-957D-C5C67896C870}"/>
+                <a16:creationId xmlns:a16="http://schemas.microsoft.com/office/drawing/2014/main" id="{57667B53-64E6-46C6-BD9C-5CC76F3A3C13}"/>
               </a:ext>
             </a:extLst>
           </p:cNvPr>
@@ -10260,7 +10374,7 @@
           <p:cNvPr id="5" name="">
             <a:extLst xmlns:a="http://schemas.openxmlformats.org/drawingml/2006/main">
               <a:ext uri="{FF2B5EF4-FFF2-40B4-BE49-F238E27FC236}">
-                <a16:creationId xmlns:a16="http://schemas.microsoft.com/office/drawing/2014/main" id="{F0419833-8257-40B2-A74C-D51E28180002}"/>
+                <a16:creationId xmlns:a16="http://schemas.microsoft.com/office/drawing/2014/main" id="{0C2A4C08-F806-4752-9EFD-83C07C0B28B3}"/>
               </a:ext>
             </a:extLst>
           </p:cNvPr>
@@ -10317,7 +10431,7 @@
           <p:cNvPr id="6" name="">
             <a:extLst xmlns:a="http://schemas.openxmlformats.org/drawingml/2006/main">
               <a:ext uri="{FF2B5EF4-FFF2-40B4-BE49-F238E27FC236}">
-                <a16:creationId xmlns:a16="http://schemas.microsoft.com/office/drawing/2014/main" id="{28EA4D6B-5EFE-48AB-BF29-CA4503C04331}"/>
+                <a16:creationId xmlns:a16="http://schemas.microsoft.com/office/drawing/2014/main" id="{C5E589A3-66F1-418F-B50F-F2F741DE2FFE}"/>
               </a:ext>
             </a:extLst>
           </p:cNvPr>
@@ -10364,7 +10478,7 @@
                 <a:ea typeface="Heiti TC"/>
                 <a:cs typeface="Heiti TC"/>
               </a:rPr>
-              <a:t>我們用一條直線，概括大家的整體趨勢</a:t>
+              <a:t>我們用一條直線，概括數據的整體趨勢</a:t>
             </a:r>
           </a:p>
         </p:txBody>
@@ -10374,7 +10488,7 @@
           <p:cNvPr id="7" name="">
             <a:extLst xmlns:a="http://schemas.openxmlformats.org/drawingml/2006/main">
               <a:ext uri="{FF2B5EF4-FFF2-40B4-BE49-F238E27FC236}">
-                <a16:creationId xmlns:a16="http://schemas.microsoft.com/office/drawing/2014/main" id="{C9DBFBEA-3737-4EA0-BC31-60809FC4EA80}"/>
+                <a16:creationId xmlns:a16="http://schemas.microsoft.com/office/drawing/2014/main" id="{13570C1F-11AA-4CA1-B8AE-A04A889AF4E1}"/>
               </a:ext>
             </a:extLst>
           </p:cNvPr>
@@ -10421,7 +10535,7 @@
                 <a:ea typeface="Arial"/>
                 <a:cs typeface="Arial"/>
               </a:rPr>
-              <a:t>A straight line can summarise the overall trend</a:t>
+              <a:t>A straight line can summarise the overall trend of the data</a:t>
             </a:r>
           </a:p>
         </p:txBody>
@@ -10431,7 +10545,7 @@
           <p:cNvPr id="8" name="">
             <a:extLst xmlns:a="http://schemas.openxmlformats.org/drawingml/2006/main">
               <a:ext uri="{FF2B5EF4-FFF2-40B4-BE49-F238E27FC236}">
-                <a16:creationId xmlns:a16="http://schemas.microsoft.com/office/drawing/2014/main" id="{C62C4387-2495-4AA1-98F3-AF3DE64CE0C4}"/>
+                <a16:creationId xmlns:a16="http://schemas.microsoft.com/office/drawing/2014/main" id="{797DE1BC-27C8-44F7-914C-AB7BC3910469}"/>
               </a:ext>
             </a:extLst>
           </p:cNvPr>
@@ -10478,7 +10592,7 @@
                 <a:ea typeface="Heiti TC"/>
                 <a:cs typeface="Heiti TC"/>
               </a:rPr>
-              <a:t>像一張簡單地圖：有用，但不是每個細節都準確</a:t>
+              <a:t>這條用來概括數據、作出估計的直線，就是我們的模型</a:t>
             </a:r>
           </a:p>
         </p:txBody>
@@ -10488,7 +10602,7 @@
           <p:cNvPr id="9" name="">
             <a:extLst xmlns:a="http://schemas.openxmlformats.org/drawingml/2006/main">
               <a:ext uri="{FF2B5EF4-FFF2-40B4-BE49-F238E27FC236}">
-                <a16:creationId xmlns:a16="http://schemas.microsoft.com/office/drawing/2014/main" id="{D462CDDB-37A3-4061-B0BB-03CF45EA330E}"/>
+                <a16:creationId xmlns:a16="http://schemas.microsoft.com/office/drawing/2014/main" id="{0D066CA5-7263-4E7F-A0A3-6D573E8D0702}"/>
               </a:ext>
             </a:extLst>
           </p:cNvPr>
@@ -10535,7 +10649,7 @@
                 <a:ea typeface="Arial"/>
                 <a:cs typeface="Arial"/>
               </a:rPr>
-              <a:t>Like a simple map: useful, without every detail being exact</a:t>
+              <a:t>This line summarises the data and helps us estimate. It is our model</a:t>
             </a:r>
           </a:p>
         </p:txBody>
@@ -10543,7 +10657,7 @@
     </p:spTree>
     <p:extLst>
       <p:ext uri="{BB962C8B-B14F-4D97-AF65-F5344CB8AC3E}">
-        <p14:creationId xmlns:p14="http://schemas.microsoft.com/office/powerpoint/2010/main" val="624124160"/>
+        <p14:creationId xmlns:p14="http://schemas.microsoft.com/office/powerpoint/2010/main" val="1550365176"/>
       </p:ext>
     </p:extLst>
   </p:cSld>
@@ -10571,57 +10685,57 @@
       </p:grpSpPr>
       <p:sp>
         <p:nvSpPr>
-          <p:cNvPr id="13" name="">
-            <a:extLst xmlns:a="http://schemas.openxmlformats.org/drawingml/2006/main">
-              <a:ext uri="{FF2B5EF4-FFF2-40B4-BE49-F238E27FC236}">
-                <a16:creationId xmlns:a16="http://schemas.microsoft.com/office/drawing/2014/main" id="{96337E04-7673-4C24-8D42-6456EDA04C2C}"/>
-              </a:ext>
-            </a:extLst>
-          </p:cNvPr>
-          <p:cNvSpPr>
-            <a:spLocks xmlns:a="http://schemas.openxmlformats.org/drawingml/2006/main" noGrp="1"/>
-          </p:cNvSpPr>
-          <p:nvPr/>
-        </p:nvSpPr>
-        <p:spPr>
-          <a:xfrm xmlns:a="http://schemas.openxmlformats.org/drawingml/2006/main">
-            <a:off x="609600" y="552450"/>
-            <a:ext cx="10953750" cy="1428750"/>
-          </a:xfrm>
-          <a:prstGeom xmlns:a="http://schemas.openxmlformats.org/drawingml/2006/main" prst="rect">
-            <a:avLst/>
-          </a:prstGeom>
-          <a:noFill xmlns:a="http://schemas.openxmlformats.org/drawingml/2006/main"/>
-          <a:ln xmlns:a="http://schemas.openxmlformats.org/drawingml/2006/main" w="0">
-            <a:noFill/>
-          </a:ln>
-        </p:spPr>
-        <p:txBody>
-          <a:bodyPr xmlns:a="http://schemas.openxmlformats.org/drawingml/2006/main">
-            <a:noAutofit/>
-          </a:bodyPr>
-          <a:lstStyle xmlns:a="http://schemas.openxmlformats.org/drawingml/2006/main"/>
-          <a:p xmlns:a="http://schemas.openxmlformats.org/drawingml/2006/main">
-            <a:pPr>
-              <a:defRPr sz="8700" b="1">
-                <a:solidFill>
-                  <a:srgbClr val="086C61"/>
-                </a:solidFill>
-                <a:latin typeface="Arial"/>
-                <a:ea typeface="Arial"/>
-                <a:cs typeface="Arial"/>
-              </a:defRPr>
-            </a:pPr>
-            <a:r>
-              <a:rPr sz="8700" b="1">
-                <a:solidFill>
-                  <a:srgbClr val="086C61"/>
-                </a:solidFill>
-                <a:latin typeface="Arial"/>
-                <a:ea typeface="Arial"/>
-                <a:cs typeface="Arial"/>
-              </a:rPr>
-              <a:t>y = mx + c</a:t>
+          <p:cNvPr id="12" name="">
+            <a:extLst xmlns:a="http://schemas.openxmlformats.org/drawingml/2006/main">
+              <a:ext uri="{FF2B5EF4-FFF2-40B4-BE49-F238E27FC236}">
+                <a16:creationId xmlns:a16="http://schemas.microsoft.com/office/drawing/2014/main" id="{A803BD6F-1883-4040-B1B8-1C82FDB9E732}"/>
+              </a:ext>
+            </a:extLst>
+          </p:cNvPr>
+          <p:cNvSpPr>
+            <a:spLocks xmlns:a="http://schemas.openxmlformats.org/drawingml/2006/main" noGrp="1"/>
+          </p:cNvSpPr>
+          <p:nvPr/>
+        </p:nvSpPr>
+        <p:spPr>
+          <a:xfrm xmlns:a="http://schemas.openxmlformats.org/drawingml/2006/main">
+            <a:off x="609600" y="400050"/>
+            <a:ext cx="10972800" cy="495300"/>
+          </a:xfrm>
+          <a:prstGeom xmlns:a="http://schemas.openxmlformats.org/drawingml/2006/main" prst="rect">
+            <a:avLst/>
+          </a:prstGeom>
+          <a:noFill xmlns:a="http://schemas.openxmlformats.org/drawingml/2006/main"/>
+          <a:ln xmlns:a="http://schemas.openxmlformats.org/drawingml/2006/main" w="0">
+            <a:noFill/>
+          </a:ln>
+        </p:spPr>
+        <p:txBody>
+          <a:bodyPr xmlns:a="http://schemas.openxmlformats.org/drawingml/2006/main">
+            <a:noAutofit/>
+          </a:bodyPr>
+          <a:lstStyle xmlns:a="http://schemas.openxmlformats.org/drawingml/2006/main"/>
+          <a:p xmlns:a="http://schemas.openxmlformats.org/drawingml/2006/main">
+            <a:pPr>
+              <a:defRPr sz="3300" b="0">
+                <a:solidFill>
+                  <a:srgbClr val="173C43"/>
+                </a:solidFill>
+                <a:latin typeface="Heiti TC"/>
+                <a:ea typeface="Heiti TC"/>
+                <a:cs typeface="Heiti TC"/>
+              </a:defRPr>
+            </a:pPr>
+            <a:r>
+              <a:rPr sz="3300" b="0">
+                <a:solidFill>
+                  <a:srgbClr val="173C43"/>
+                </a:solidFill>
+                <a:latin typeface="Heiti TC"/>
+                <a:ea typeface="Heiti TC"/>
+                <a:cs typeface="Heiti TC"/>
+              </a:rPr>
+              <a:t>開始時有多少水？</a:t>
             </a:r>
           </a:p>
         </p:txBody>
@@ -10631,54 +10745,54 @@
           <p:cNvPr id="2" name="">
             <a:extLst xmlns:a="http://schemas.openxmlformats.org/drawingml/2006/main">
               <a:ext uri="{FF2B5EF4-FFF2-40B4-BE49-F238E27FC236}">
-                <a16:creationId xmlns:a16="http://schemas.microsoft.com/office/drawing/2014/main" id="{AC1769C2-8708-4EC7-9226-940D2FED9BC5}"/>
-              </a:ext>
-            </a:extLst>
-          </p:cNvPr>
-          <p:cNvSpPr>
-            <a:spLocks xmlns:a="http://schemas.openxmlformats.org/drawingml/2006/main" noGrp="1"/>
-          </p:cNvSpPr>
-          <p:nvPr/>
-        </p:nvSpPr>
-        <p:spPr>
-          <a:xfrm xmlns:a="http://schemas.openxmlformats.org/drawingml/2006/main">
-            <a:off x="609600" y="2276475"/>
-            <a:ext cx="5238750" cy="495300"/>
-          </a:xfrm>
-          <a:prstGeom xmlns:a="http://schemas.openxmlformats.org/drawingml/2006/main" prst="rect">
-            <a:avLst/>
-          </a:prstGeom>
-          <a:noFill xmlns:a="http://schemas.openxmlformats.org/drawingml/2006/main"/>
-          <a:ln xmlns:a="http://schemas.openxmlformats.org/drawingml/2006/main" w="0">
-            <a:noFill/>
-          </a:ln>
-        </p:spPr>
-        <p:txBody>
-          <a:bodyPr xmlns:a="http://schemas.openxmlformats.org/drawingml/2006/main">
-            <a:noAutofit/>
-          </a:bodyPr>
-          <a:lstStyle xmlns:a="http://schemas.openxmlformats.org/drawingml/2006/main"/>
-          <a:p xmlns:a="http://schemas.openxmlformats.org/drawingml/2006/main">
-            <a:pPr>
-              <a:defRPr sz="3000" b="0">
-                <a:solidFill>
-                  <a:srgbClr val="173C43"/>
-                </a:solidFill>
-                <a:latin typeface="Heiti TC"/>
-                <a:ea typeface="Heiti TC"/>
-                <a:cs typeface="Heiti TC"/>
-              </a:defRPr>
-            </a:pPr>
-            <a:r>
-              <a:rPr sz="3000" b="0">
-                <a:solidFill>
-                  <a:srgbClr val="173C43"/>
-                </a:solidFill>
-                <a:latin typeface="Heiti TC"/>
-                <a:ea typeface="Heiti TC"/>
-                <a:cs typeface="Heiti TC"/>
-              </a:rPr>
-              <a:t>m：變化率</a:t>
+                <a16:creationId xmlns:a16="http://schemas.microsoft.com/office/drawing/2014/main" id="{799C0B9F-961A-493D-8CB5-FBF7AA8D048A}"/>
+              </a:ext>
+            </a:extLst>
+          </p:cNvPr>
+          <p:cNvSpPr>
+            <a:spLocks xmlns:a="http://schemas.openxmlformats.org/drawingml/2006/main" noGrp="1"/>
+          </p:cNvSpPr>
+          <p:nvPr/>
+        </p:nvSpPr>
+        <p:spPr>
+          <a:xfrm xmlns:a="http://schemas.openxmlformats.org/drawingml/2006/main">
+            <a:off x="609600" y="866775"/>
+            <a:ext cx="10972800" cy="457200"/>
+          </a:xfrm>
+          <a:prstGeom xmlns:a="http://schemas.openxmlformats.org/drawingml/2006/main" prst="rect">
+            <a:avLst/>
+          </a:prstGeom>
+          <a:noFill xmlns:a="http://schemas.openxmlformats.org/drawingml/2006/main"/>
+          <a:ln xmlns:a="http://schemas.openxmlformats.org/drawingml/2006/main" w="0">
+            <a:noFill/>
+          </a:ln>
+        </p:spPr>
+        <p:txBody>
+          <a:bodyPr xmlns:a="http://schemas.openxmlformats.org/drawingml/2006/main">
+            <a:noAutofit/>
+          </a:bodyPr>
+          <a:lstStyle xmlns:a="http://schemas.openxmlformats.org/drawingml/2006/main"/>
+          <a:p xmlns:a="http://schemas.openxmlformats.org/drawingml/2006/main">
+            <a:pPr>
+              <a:defRPr sz="2700" b="0">
+                <a:solidFill>
+                  <a:srgbClr val="526B70"/>
+                </a:solidFill>
+                <a:latin typeface="Arial"/>
+                <a:ea typeface="Arial"/>
+                <a:cs typeface="Arial"/>
+              </a:defRPr>
+            </a:pPr>
+            <a:r>
+              <a:rPr sz="2700" b="0">
+                <a:solidFill>
+                  <a:srgbClr val="526B70"/>
+                </a:solidFill>
+                <a:latin typeface="Arial"/>
+                <a:ea typeface="Arial"/>
+                <a:cs typeface="Arial"/>
+              </a:rPr>
+              <a:t>How much water is there at the start?</a:t>
             </a:r>
           </a:p>
         </p:txBody>
@@ -10688,520 +10802,7 @@
           <p:cNvPr id="3" name="">
             <a:extLst xmlns:a="http://schemas.openxmlformats.org/drawingml/2006/main">
               <a:ext uri="{FF2B5EF4-FFF2-40B4-BE49-F238E27FC236}">
-                <a16:creationId xmlns:a16="http://schemas.microsoft.com/office/drawing/2014/main" id="{7B3299EF-862D-4ABD-957A-1F2734BDE2DA}"/>
-              </a:ext>
-            </a:extLst>
-          </p:cNvPr>
-          <p:cNvSpPr>
-            <a:spLocks xmlns:a="http://schemas.openxmlformats.org/drawingml/2006/main" noGrp="1"/>
-          </p:cNvSpPr>
-          <p:nvPr/>
-        </p:nvSpPr>
-        <p:spPr>
-          <a:xfrm xmlns:a="http://schemas.openxmlformats.org/drawingml/2006/main">
-            <a:off x="609600" y="2743200"/>
-            <a:ext cx="5238750" cy="457200"/>
-          </a:xfrm>
-          <a:prstGeom xmlns:a="http://schemas.openxmlformats.org/drawingml/2006/main" prst="rect">
-            <a:avLst/>
-          </a:prstGeom>
-          <a:noFill xmlns:a="http://schemas.openxmlformats.org/drawingml/2006/main"/>
-          <a:ln xmlns:a="http://schemas.openxmlformats.org/drawingml/2006/main" w="0">
-            <a:noFill/>
-          </a:ln>
-        </p:spPr>
-        <p:txBody>
-          <a:bodyPr xmlns:a="http://schemas.openxmlformats.org/drawingml/2006/main">
-            <a:noAutofit/>
-          </a:bodyPr>
-          <a:lstStyle xmlns:a="http://schemas.openxmlformats.org/drawingml/2006/main"/>
-          <a:p xmlns:a="http://schemas.openxmlformats.org/drawingml/2006/main">
-            <a:pPr>
-              <a:defRPr sz="2400" b="0">
-                <a:solidFill>
-                  <a:srgbClr val="526B70"/>
-                </a:solidFill>
-                <a:latin typeface="Arial"/>
-                <a:ea typeface="Arial"/>
-                <a:cs typeface="Arial"/>
-              </a:defRPr>
-            </a:pPr>
-            <a:r>
-              <a:rPr sz="2400" b="0">
-                <a:solidFill>
-                  <a:srgbClr val="526B70"/>
-                </a:solidFill>
-                <a:latin typeface="Arial"/>
-                <a:ea typeface="Arial"/>
-                <a:cs typeface="Arial"/>
-              </a:rPr>
-              <a:t>m: rate of change</a:t>
-            </a:r>
-          </a:p>
-        </p:txBody>
-      </p:sp>
-      <p:sp>
-        <p:nvSpPr>
-          <p:cNvPr id="4" name="">
-            <a:extLst xmlns:a="http://schemas.openxmlformats.org/drawingml/2006/main">
-              <a:ext uri="{FF2B5EF4-FFF2-40B4-BE49-F238E27FC236}">
-                <a16:creationId xmlns:a16="http://schemas.microsoft.com/office/drawing/2014/main" id="{6D270525-DCD9-4DED-8824-2D7E509EB82A}"/>
-              </a:ext>
-            </a:extLst>
-          </p:cNvPr>
-          <p:cNvSpPr>
-            <a:spLocks xmlns:a="http://schemas.openxmlformats.org/drawingml/2006/main" noGrp="1"/>
-          </p:cNvSpPr>
-          <p:nvPr/>
-        </p:nvSpPr>
-        <p:spPr>
-          <a:xfrm xmlns:a="http://schemas.openxmlformats.org/drawingml/2006/main">
-            <a:off x="6334125" y="2276475"/>
-            <a:ext cx="5238750" cy="495300"/>
-          </a:xfrm>
-          <a:prstGeom xmlns:a="http://schemas.openxmlformats.org/drawingml/2006/main" prst="rect">
-            <a:avLst/>
-          </a:prstGeom>
-          <a:noFill xmlns:a="http://schemas.openxmlformats.org/drawingml/2006/main"/>
-          <a:ln xmlns:a="http://schemas.openxmlformats.org/drawingml/2006/main" w="0">
-            <a:noFill/>
-          </a:ln>
-        </p:spPr>
-        <p:txBody>
-          <a:bodyPr xmlns:a="http://schemas.openxmlformats.org/drawingml/2006/main">
-            <a:noAutofit/>
-          </a:bodyPr>
-          <a:lstStyle xmlns:a="http://schemas.openxmlformats.org/drawingml/2006/main"/>
-          <a:p xmlns:a="http://schemas.openxmlformats.org/drawingml/2006/main">
-            <a:pPr>
-              <a:defRPr sz="3000" b="0">
-                <a:solidFill>
-                  <a:srgbClr val="173C43"/>
-                </a:solidFill>
-                <a:latin typeface="Heiti TC"/>
-                <a:ea typeface="Heiti TC"/>
-                <a:cs typeface="Heiti TC"/>
-              </a:defRPr>
-            </a:pPr>
-            <a:r>
-              <a:rPr sz="3000" b="0">
-                <a:solidFill>
-                  <a:srgbClr val="173C43"/>
-                </a:solidFill>
-                <a:latin typeface="Heiti TC"/>
-                <a:ea typeface="Heiti TC"/>
-                <a:cs typeface="Heiti TC"/>
-              </a:rPr>
-              <a:t>c：初始值</a:t>
-            </a:r>
-          </a:p>
-        </p:txBody>
-      </p:sp>
-      <p:sp>
-        <p:nvSpPr>
-          <p:cNvPr id="5" name="">
-            <a:extLst xmlns:a="http://schemas.openxmlformats.org/drawingml/2006/main">
-              <a:ext uri="{FF2B5EF4-FFF2-40B4-BE49-F238E27FC236}">
-                <a16:creationId xmlns:a16="http://schemas.microsoft.com/office/drawing/2014/main" id="{00115EE9-1BCF-476B-B616-9C1E358FB953}"/>
-              </a:ext>
-            </a:extLst>
-          </p:cNvPr>
-          <p:cNvSpPr>
-            <a:spLocks xmlns:a="http://schemas.openxmlformats.org/drawingml/2006/main" noGrp="1"/>
-          </p:cNvSpPr>
-          <p:nvPr/>
-        </p:nvSpPr>
-        <p:spPr>
-          <a:xfrm xmlns:a="http://schemas.openxmlformats.org/drawingml/2006/main">
-            <a:off x="6334125" y="2743200"/>
-            <a:ext cx="5238750" cy="457200"/>
-          </a:xfrm>
-          <a:prstGeom xmlns:a="http://schemas.openxmlformats.org/drawingml/2006/main" prst="rect">
-            <a:avLst/>
-          </a:prstGeom>
-          <a:noFill xmlns:a="http://schemas.openxmlformats.org/drawingml/2006/main"/>
-          <a:ln xmlns:a="http://schemas.openxmlformats.org/drawingml/2006/main" w="0">
-            <a:noFill/>
-          </a:ln>
-        </p:spPr>
-        <p:txBody>
-          <a:bodyPr xmlns:a="http://schemas.openxmlformats.org/drawingml/2006/main">
-            <a:noAutofit/>
-          </a:bodyPr>
-          <a:lstStyle xmlns:a="http://schemas.openxmlformats.org/drawingml/2006/main"/>
-          <a:p xmlns:a="http://schemas.openxmlformats.org/drawingml/2006/main">
-            <a:pPr>
-              <a:defRPr sz="2400" b="0">
-                <a:solidFill>
-                  <a:srgbClr val="526B70"/>
-                </a:solidFill>
-                <a:latin typeface="Arial"/>
-                <a:ea typeface="Arial"/>
-                <a:cs typeface="Arial"/>
-              </a:defRPr>
-            </a:pPr>
-            <a:r>
-              <a:rPr sz="2400" b="0">
-                <a:solidFill>
-                  <a:srgbClr val="526B70"/>
-                </a:solidFill>
-                <a:latin typeface="Arial"/>
-                <a:ea typeface="Arial"/>
-                <a:cs typeface="Arial"/>
-              </a:rPr>
-              <a:t>c: initial value</a:t>
-            </a:r>
-          </a:p>
-        </p:txBody>
-      </p:sp>
-      <p:sp>
-        <p:nvSpPr>
-          <p:cNvPr id="6" name="">
-            <a:extLst xmlns:a="http://schemas.openxmlformats.org/drawingml/2006/main">
-              <a:ext uri="{FF2B5EF4-FFF2-40B4-BE49-F238E27FC236}">
-                <a16:creationId xmlns:a16="http://schemas.microsoft.com/office/drawing/2014/main" id="{C6664E3E-FE8C-40D8-8A1A-1C46F6AE1CF1}"/>
-              </a:ext>
-            </a:extLst>
-          </p:cNvPr>
-          <p:cNvSpPr>
-            <a:spLocks xmlns:a="http://schemas.openxmlformats.org/drawingml/2006/main" noGrp="1"/>
-          </p:cNvSpPr>
-          <p:nvPr/>
-        </p:nvSpPr>
-        <p:spPr>
-          <a:xfrm xmlns:a="http://schemas.openxmlformats.org/drawingml/2006/main">
-            <a:off x="609600" y="3495675"/>
-            <a:ext cx="5238750" cy="495300"/>
-          </a:xfrm>
-          <a:prstGeom xmlns:a="http://schemas.openxmlformats.org/drawingml/2006/main" prst="rect">
-            <a:avLst/>
-          </a:prstGeom>
-          <a:noFill xmlns:a="http://schemas.openxmlformats.org/drawingml/2006/main"/>
-          <a:ln xmlns:a="http://schemas.openxmlformats.org/drawingml/2006/main" w="0">
-            <a:noFill/>
-          </a:ln>
-        </p:spPr>
-        <p:txBody>
-          <a:bodyPr xmlns:a="http://schemas.openxmlformats.org/drawingml/2006/main">
-            <a:noAutofit/>
-          </a:bodyPr>
-          <a:lstStyle xmlns:a="http://schemas.openxmlformats.org/drawingml/2006/main"/>
-          <a:p xmlns:a="http://schemas.openxmlformats.org/drawingml/2006/main">
-            <a:pPr>
-              <a:defRPr sz="2175" b="0">
-                <a:solidFill>
-                  <a:srgbClr val="173C43"/>
-                </a:solidFill>
-                <a:latin typeface="Heiti TC"/>
-                <a:ea typeface="Heiti TC"/>
-                <a:cs typeface="Heiti TC"/>
-              </a:defRPr>
-            </a:pPr>
-            <a:r>
-              <a:rPr sz="2175" b="0">
-                <a:solidFill>
-                  <a:srgbClr val="173C43"/>
-                </a:solidFill>
-                <a:latin typeface="Heiti TC"/>
-                <a:ea typeface="Heiti TC"/>
-                <a:cs typeface="Heiti TC"/>
-              </a:rPr>
-              <a:t>x 每增加 1，y 改變多少？</a:t>
-            </a:r>
-          </a:p>
-        </p:txBody>
-      </p:sp>
-      <p:sp>
-        <p:nvSpPr>
-          <p:cNvPr id="7" name="">
-            <a:extLst xmlns:a="http://schemas.openxmlformats.org/drawingml/2006/main">
-              <a:ext uri="{FF2B5EF4-FFF2-40B4-BE49-F238E27FC236}">
-                <a16:creationId xmlns:a16="http://schemas.microsoft.com/office/drawing/2014/main" id="{D0F4FC41-A33D-4B33-BA7A-2D2AC89C9ECE}"/>
-              </a:ext>
-            </a:extLst>
-          </p:cNvPr>
-          <p:cNvSpPr>
-            <a:spLocks xmlns:a="http://schemas.openxmlformats.org/drawingml/2006/main" noGrp="1"/>
-          </p:cNvSpPr>
-          <p:nvPr/>
-        </p:nvSpPr>
-        <p:spPr>
-          <a:xfrm xmlns:a="http://schemas.openxmlformats.org/drawingml/2006/main">
-            <a:off x="609600" y="3962400"/>
-            <a:ext cx="5238750" cy="457200"/>
-          </a:xfrm>
-          <a:prstGeom xmlns:a="http://schemas.openxmlformats.org/drawingml/2006/main" prst="rect">
-            <a:avLst/>
-          </a:prstGeom>
-          <a:noFill xmlns:a="http://schemas.openxmlformats.org/drawingml/2006/main"/>
-          <a:ln xmlns:a="http://schemas.openxmlformats.org/drawingml/2006/main" w="0">
-            <a:noFill/>
-          </a:ln>
-        </p:spPr>
-        <p:txBody>
-          <a:bodyPr xmlns:a="http://schemas.openxmlformats.org/drawingml/2006/main">
-            <a:noAutofit/>
-          </a:bodyPr>
-          <a:lstStyle xmlns:a="http://schemas.openxmlformats.org/drawingml/2006/main"/>
-          <a:p xmlns:a="http://schemas.openxmlformats.org/drawingml/2006/main">
-            <a:pPr>
-              <a:defRPr sz="1800" b="0">
-                <a:solidFill>
-                  <a:srgbClr val="526B70"/>
-                </a:solidFill>
-                <a:latin typeface="Arial"/>
-                <a:ea typeface="Arial"/>
-                <a:cs typeface="Arial"/>
-              </a:defRPr>
-            </a:pPr>
-            <a:r>
-              <a:rPr sz="1800" b="0">
-                <a:solidFill>
-                  <a:srgbClr val="526B70"/>
-                </a:solidFill>
-                <a:latin typeface="Arial"/>
-                <a:ea typeface="Arial"/>
-                <a:cs typeface="Arial"/>
-              </a:rPr>
-              <a:t>How much does y change for each extra 1 in x?</a:t>
-            </a:r>
-          </a:p>
-        </p:txBody>
-      </p:sp>
-      <p:sp>
-        <p:nvSpPr>
-          <p:cNvPr id="8" name="">
-            <a:extLst xmlns:a="http://schemas.openxmlformats.org/drawingml/2006/main">
-              <a:ext uri="{FF2B5EF4-FFF2-40B4-BE49-F238E27FC236}">
-                <a16:creationId xmlns:a16="http://schemas.microsoft.com/office/drawing/2014/main" id="{440F439A-5048-4FB0-A765-7E60D7C85828}"/>
-              </a:ext>
-            </a:extLst>
-          </p:cNvPr>
-          <p:cNvSpPr>
-            <a:spLocks xmlns:a="http://schemas.openxmlformats.org/drawingml/2006/main" noGrp="1"/>
-          </p:cNvSpPr>
-          <p:nvPr/>
-        </p:nvSpPr>
-        <p:spPr>
-          <a:xfrm xmlns:a="http://schemas.openxmlformats.org/drawingml/2006/main">
-            <a:off x="6334125" y="3495675"/>
-            <a:ext cx="5238750" cy="495300"/>
-          </a:xfrm>
-          <a:prstGeom xmlns:a="http://schemas.openxmlformats.org/drawingml/2006/main" prst="rect">
-            <a:avLst/>
-          </a:prstGeom>
-          <a:noFill xmlns:a="http://schemas.openxmlformats.org/drawingml/2006/main"/>
-          <a:ln xmlns:a="http://schemas.openxmlformats.org/drawingml/2006/main" w="0">
-            <a:noFill/>
-          </a:ln>
-        </p:spPr>
-        <p:txBody>
-          <a:bodyPr xmlns:a="http://schemas.openxmlformats.org/drawingml/2006/main">
-            <a:noAutofit/>
-          </a:bodyPr>
-          <a:lstStyle xmlns:a="http://schemas.openxmlformats.org/drawingml/2006/main"/>
-          <a:p xmlns:a="http://schemas.openxmlformats.org/drawingml/2006/main">
-            <a:pPr>
-              <a:defRPr sz="2175" b="0">
-                <a:solidFill>
-                  <a:srgbClr val="173C43"/>
-                </a:solidFill>
-                <a:latin typeface="Heiti TC"/>
-                <a:ea typeface="Heiti TC"/>
-                <a:cs typeface="Heiti TC"/>
-              </a:defRPr>
-            </a:pPr>
-            <a:r>
-              <a:rPr sz="2175" b="0">
-                <a:solidFill>
-                  <a:srgbClr val="173C43"/>
-                </a:solidFill>
-                <a:latin typeface="Heiti TC"/>
-                <a:ea typeface="Heiti TC"/>
-                <a:cs typeface="Heiti TC"/>
-              </a:rPr>
-              <a:t>當 x = 0 時，y 是多少？</a:t>
-            </a:r>
-          </a:p>
-        </p:txBody>
-      </p:sp>
-      <p:sp>
-        <p:nvSpPr>
-          <p:cNvPr id="9" name="">
-            <a:extLst xmlns:a="http://schemas.openxmlformats.org/drawingml/2006/main">
-              <a:ext uri="{FF2B5EF4-FFF2-40B4-BE49-F238E27FC236}">
-                <a16:creationId xmlns:a16="http://schemas.microsoft.com/office/drawing/2014/main" id="{0DF31721-F529-445C-89BA-2E3F1E50E061}"/>
-              </a:ext>
-            </a:extLst>
-          </p:cNvPr>
-          <p:cNvSpPr>
-            <a:spLocks xmlns:a="http://schemas.openxmlformats.org/drawingml/2006/main" noGrp="1"/>
-          </p:cNvSpPr>
-          <p:nvPr/>
-        </p:nvSpPr>
-        <p:spPr>
-          <a:xfrm xmlns:a="http://schemas.openxmlformats.org/drawingml/2006/main">
-            <a:off x="6334125" y="3962400"/>
-            <a:ext cx="5238750" cy="457200"/>
-          </a:xfrm>
-          <a:prstGeom xmlns:a="http://schemas.openxmlformats.org/drawingml/2006/main" prst="rect">
-            <a:avLst/>
-          </a:prstGeom>
-          <a:noFill xmlns:a="http://schemas.openxmlformats.org/drawingml/2006/main"/>
-          <a:ln xmlns:a="http://schemas.openxmlformats.org/drawingml/2006/main" w="0">
-            <a:noFill/>
-          </a:ln>
-        </p:spPr>
-        <p:txBody>
-          <a:bodyPr xmlns:a="http://schemas.openxmlformats.org/drawingml/2006/main">
-            <a:noAutofit/>
-          </a:bodyPr>
-          <a:lstStyle xmlns:a="http://schemas.openxmlformats.org/drawingml/2006/main"/>
-          <a:p xmlns:a="http://schemas.openxmlformats.org/drawingml/2006/main">
-            <a:pPr>
-              <a:defRPr sz="1800" b="0">
-                <a:solidFill>
-                  <a:srgbClr val="526B70"/>
-                </a:solidFill>
-                <a:latin typeface="Arial"/>
-                <a:ea typeface="Arial"/>
-                <a:cs typeface="Arial"/>
-              </a:defRPr>
-            </a:pPr>
-            <a:r>
-              <a:rPr sz="1800" b="0">
-                <a:solidFill>
-                  <a:srgbClr val="526B70"/>
-                </a:solidFill>
-                <a:latin typeface="Arial"/>
-                <a:ea typeface="Arial"/>
-                <a:cs typeface="Arial"/>
-              </a:rPr>
-              <a:t>What is y when x = 0?</a:t>
-            </a:r>
-          </a:p>
-        </p:txBody>
-      </p:sp>
-      <p:sp>
-        <p:nvSpPr>
-          <p:cNvPr id="10" name="">
-            <a:extLst xmlns:a="http://schemas.openxmlformats.org/drawingml/2006/main">
-              <a:ext uri="{FF2B5EF4-FFF2-40B4-BE49-F238E27FC236}">
-                <a16:creationId xmlns:a16="http://schemas.microsoft.com/office/drawing/2014/main" id="{AF9D628B-E0B3-4F61-AC49-9F58570F43E8}"/>
-              </a:ext>
-            </a:extLst>
-          </p:cNvPr>
-          <p:cNvSpPr>
-            <a:spLocks xmlns:a="http://schemas.openxmlformats.org/drawingml/2006/main" noGrp="1"/>
-          </p:cNvSpPr>
-          <p:nvPr/>
-        </p:nvSpPr>
-        <p:spPr>
-          <a:xfrm xmlns:a="http://schemas.openxmlformats.org/drawingml/2006/main">
-            <a:off x="609600" y="5248275"/>
-            <a:ext cx="10668000" cy="495300"/>
-          </a:xfrm>
-          <a:prstGeom xmlns:a="http://schemas.openxmlformats.org/drawingml/2006/main" prst="rect">
-            <a:avLst/>
-          </a:prstGeom>
-          <a:noFill xmlns:a="http://schemas.openxmlformats.org/drawingml/2006/main"/>
-          <a:ln xmlns:a="http://schemas.openxmlformats.org/drawingml/2006/main" w="0">
-            <a:noFill/>
-          </a:ln>
-        </p:spPr>
-        <p:txBody>
-          <a:bodyPr xmlns:a="http://schemas.openxmlformats.org/drawingml/2006/main">
-            <a:noAutofit/>
-          </a:bodyPr>
-          <a:lstStyle xmlns:a="http://schemas.openxmlformats.org/drawingml/2006/main"/>
-          <a:p xmlns:a="http://schemas.openxmlformats.org/drawingml/2006/main">
-            <a:pPr>
-              <a:defRPr sz="2175" b="0">
-                <a:solidFill>
-                  <a:srgbClr val="173C43"/>
-                </a:solidFill>
-                <a:latin typeface="Heiti TC"/>
-                <a:ea typeface="Heiti TC"/>
-                <a:cs typeface="Heiti TC"/>
-              </a:defRPr>
-            </a:pPr>
-            <a:r>
-              <a:rPr sz="2175" b="0">
-                <a:solidFill>
-                  <a:srgbClr val="173C43"/>
-                </a:solidFill>
-                <a:latin typeface="Heiti TC"/>
-                <a:ea typeface="Heiti TC"/>
-                <a:cs typeface="Heiti TC"/>
-              </a:rPr>
-              <a:t>一條直線描述 x 與 y 的關係</a:t>
-            </a:r>
-          </a:p>
-        </p:txBody>
-      </p:sp>
-      <p:sp>
-        <p:nvSpPr>
-          <p:cNvPr id="11" name="">
-            <a:extLst xmlns:a="http://schemas.openxmlformats.org/drawingml/2006/main">
-              <a:ext uri="{FF2B5EF4-FFF2-40B4-BE49-F238E27FC236}">
-                <a16:creationId xmlns:a16="http://schemas.microsoft.com/office/drawing/2014/main" id="{91F71C44-87D0-4059-A84D-D7C13298FFEA}"/>
-              </a:ext>
-            </a:extLst>
-          </p:cNvPr>
-          <p:cNvSpPr>
-            <a:spLocks xmlns:a="http://schemas.openxmlformats.org/drawingml/2006/main" noGrp="1"/>
-          </p:cNvSpPr>
-          <p:nvPr/>
-        </p:nvSpPr>
-        <p:spPr>
-          <a:xfrm xmlns:a="http://schemas.openxmlformats.org/drawingml/2006/main">
-            <a:off x="609600" y="5715000"/>
-            <a:ext cx="10668000" cy="457200"/>
-          </a:xfrm>
-          <a:prstGeom xmlns:a="http://schemas.openxmlformats.org/drawingml/2006/main" prst="rect">
-            <a:avLst/>
-          </a:prstGeom>
-          <a:noFill xmlns:a="http://schemas.openxmlformats.org/drawingml/2006/main"/>
-          <a:ln xmlns:a="http://schemas.openxmlformats.org/drawingml/2006/main" w="0">
-            <a:noFill/>
-          </a:ln>
-        </p:spPr>
-        <p:txBody>
-          <a:bodyPr xmlns:a="http://schemas.openxmlformats.org/drawingml/2006/main">
-            <a:noAutofit/>
-          </a:bodyPr>
-          <a:lstStyle xmlns:a="http://schemas.openxmlformats.org/drawingml/2006/main"/>
-          <a:p xmlns:a="http://schemas.openxmlformats.org/drawingml/2006/main">
-            <a:pPr>
-              <a:defRPr sz="1800" b="0">
-                <a:solidFill>
-                  <a:srgbClr val="526B70"/>
-                </a:solidFill>
-                <a:latin typeface="Arial"/>
-                <a:ea typeface="Arial"/>
-                <a:cs typeface="Arial"/>
-              </a:defRPr>
-            </a:pPr>
-            <a:r>
-              <a:rPr sz="1800" b="0">
-                <a:solidFill>
-                  <a:srgbClr val="526B70"/>
-                </a:solidFill>
-                <a:latin typeface="Arial"/>
-                <a:ea typeface="Arial"/>
-                <a:cs typeface="Arial"/>
-              </a:rPr>
-              <a:t>A straight line describes the relationship between x and y</a:t>
-            </a:r>
-          </a:p>
-        </p:txBody>
-      </p:sp>
-      <p:sp>
-        <p:nvSpPr>
-          <p:cNvPr id="12" name="">
-            <a:extLst xmlns:a="http://schemas.openxmlformats.org/drawingml/2006/main">
-              <a:ext uri="{FF2B5EF4-FFF2-40B4-BE49-F238E27FC236}">
-                <a16:creationId xmlns:a16="http://schemas.microsoft.com/office/drawing/2014/main" id="{FEBD0D22-C0F3-4531-9AC4-64B1720E8CCB}"/>
+                <a16:creationId xmlns:a16="http://schemas.microsoft.com/office/drawing/2014/main" id="{29FB5AEA-7A5A-4A39-8A44-77978CC2A32A}"/>
               </a:ext>
             </a:extLst>
           </p:cNvPr>
@@ -11253,10 +10854,425 @@
           </a:p>
         </p:txBody>
       </p:sp>
+      <p:sp>
+        <p:nvSpPr>
+          <p:cNvPr id="4" name="">
+            <a:extLst xmlns:a="http://schemas.openxmlformats.org/drawingml/2006/main">
+              <a:ext uri="{FF2B5EF4-FFF2-40B4-BE49-F238E27FC236}">
+                <a16:creationId xmlns:a16="http://schemas.microsoft.com/office/drawing/2014/main" id="{B312FFDE-FA35-4314-8245-BCD1617B25AF}"/>
+              </a:ext>
+            </a:extLst>
+          </p:cNvPr>
+          <p:cNvSpPr>
+            <a:spLocks xmlns:a="http://schemas.openxmlformats.org/drawingml/2006/main" noGrp="1"/>
+          </p:cNvSpPr>
+          <p:nvPr/>
+        </p:nvSpPr>
+        <p:spPr>
+          <a:xfrm xmlns:a="http://schemas.openxmlformats.org/drawingml/2006/main">
+            <a:off x="609600" y="1657350"/>
+            <a:ext cx="4953000" cy="495300"/>
+          </a:xfrm>
+          <a:prstGeom xmlns:a="http://schemas.openxmlformats.org/drawingml/2006/main" prst="rect">
+            <a:avLst/>
+          </a:prstGeom>
+          <a:noFill xmlns:a="http://schemas.openxmlformats.org/drawingml/2006/main"/>
+          <a:ln xmlns:a="http://schemas.openxmlformats.org/drawingml/2006/main" w="0">
+            <a:noFill/>
+          </a:ln>
+        </p:spPr>
+        <p:txBody>
+          <a:bodyPr xmlns:a="http://schemas.openxmlformats.org/drawingml/2006/main">
+            <a:noAutofit/>
+          </a:bodyPr>
+          <a:lstStyle xmlns:a="http://schemas.openxmlformats.org/drawingml/2006/main"/>
+          <a:p xmlns:a="http://schemas.openxmlformats.org/drawingml/2006/main">
+            <a:pPr>
+              <a:defRPr sz="2400" b="0">
+                <a:solidFill>
+                  <a:srgbClr val="173C43"/>
+                </a:solidFill>
+                <a:latin typeface="Heiti TC"/>
+                <a:ea typeface="Heiti TC"/>
+                <a:cs typeface="Heiti TC"/>
+              </a:defRPr>
+            </a:pPr>
+            <a:r>
+              <a:rPr sz="2400" b="0">
+                <a:solidFill>
+                  <a:srgbClr val="173C43"/>
+                </a:solidFill>
+                <a:latin typeface="Heiti TC"/>
+                <a:ea typeface="Heiti TC"/>
+                <a:cs typeface="Heiti TC"/>
+              </a:rPr>
+              <a:t>水箱原有 5 公升水</a:t>
+            </a:r>
+          </a:p>
+        </p:txBody>
+      </p:sp>
+      <p:sp>
+        <p:nvSpPr>
+          <p:cNvPr id="5" name="">
+            <a:extLst xmlns:a="http://schemas.openxmlformats.org/drawingml/2006/main">
+              <a:ext uri="{FF2B5EF4-FFF2-40B4-BE49-F238E27FC236}">
+                <a16:creationId xmlns:a16="http://schemas.microsoft.com/office/drawing/2014/main" id="{FF3DC783-1E28-4A5F-8114-E5CE98670B14}"/>
+              </a:ext>
+            </a:extLst>
+          </p:cNvPr>
+          <p:cNvSpPr>
+            <a:spLocks xmlns:a="http://schemas.openxmlformats.org/drawingml/2006/main" noGrp="1"/>
+          </p:cNvSpPr>
+          <p:nvPr/>
+        </p:nvSpPr>
+        <p:spPr>
+          <a:xfrm xmlns:a="http://schemas.openxmlformats.org/drawingml/2006/main">
+            <a:off x="609600" y="2124075"/>
+            <a:ext cx="4953000" cy="457200"/>
+          </a:xfrm>
+          <a:prstGeom xmlns:a="http://schemas.openxmlformats.org/drawingml/2006/main" prst="rect">
+            <a:avLst/>
+          </a:prstGeom>
+          <a:noFill xmlns:a="http://schemas.openxmlformats.org/drawingml/2006/main"/>
+          <a:ln xmlns:a="http://schemas.openxmlformats.org/drawingml/2006/main" w="0">
+            <a:noFill/>
+          </a:ln>
+        </p:spPr>
+        <p:txBody>
+          <a:bodyPr xmlns:a="http://schemas.openxmlformats.org/drawingml/2006/main">
+            <a:noAutofit/>
+          </a:bodyPr>
+          <a:lstStyle xmlns:a="http://schemas.openxmlformats.org/drawingml/2006/main"/>
+          <a:p xmlns:a="http://schemas.openxmlformats.org/drawingml/2006/main">
+            <a:pPr>
+              <a:defRPr sz="1800" b="0">
+                <a:solidFill>
+                  <a:srgbClr val="526B70"/>
+                </a:solidFill>
+                <a:latin typeface="Arial"/>
+                <a:ea typeface="Arial"/>
+                <a:cs typeface="Arial"/>
+              </a:defRPr>
+            </a:pPr>
+            <a:r>
+              <a:rPr sz="1800" b="0">
+                <a:solidFill>
+                  <a:srgbClr val="526B70"/>
+                </a:solidFill>
+                <a:latin typeface="Arial"/>
+                <a:ea typeface="Arial"/>
+                <a:cs typeface="Arial"/>
+              </a:rPr>
+              <a:t>A tank starts with 5 litres of water</a:t>
+            </a:r>
+          </a:p>
+        </p:txBody>
+      </p:sp>
+      <p:sp>
+        <p:nvSpPr>
+          <p:cNvPr id="6" name="">
+            <a:extLst xmlns:a="http://schemas.openxmlformats.org/drawingml/2006/main">
+              <a:ext uri="{FF2B5EF4-FFF2-40B4-BE49-F238E27FC236}">
+                <a16:creationId xmlns:a16="http://schemas.microsoft.com/office/drawing/2014/main" id="{3B1C7260-2AC9-4F9F-A18E-B6213390BCB0}"/>
+              </a:ext>
+            </a:extLst>
+          </p:cNvPr>
+          <p:cNvSpPr>
+            <a:spLocks xmlns:a="http://schemas.openxmlformats.org/drawingml/2006/main" noGrp="1"/>
+          </p:cNvSpPr>
+          <p:nvPr/>
+        </p:nvSpPr>
+        <p:spPr>
+          <a:xfrm xmlns:a="http://schemas.openxmlformats.org/drawingml/2006/main">
+            <a:off x="609600" y="2762250"/>
+            <a:ext cx="4953000" cy="495300"/>
+          </a:xfrm>
+          <a:prstGeom xmlns:a="http://schemas.openxmlformats.org/drawingml/2006/main" prst="rect">
+            <a:avLst/>
+          </a:prstGeom>
+          <a:noFill xmlns:a="http://schemas.openxmlformats.org/drawingml/2006/main"/>
+          <a:ln xmlns:a="http://schemas.openxmlformats.org/drawingml/2006/main" w="0">
+            <a:noFill/>
+          </a:ln>
+        </p:spPr>
+        <p:txBody>
+          <a:bodyPr xmlns:a="http://schemas.openxmlformats.org/drawingml/2006/main">
+            <a:noAutofit/>
+          </a:bodyPr>
+          <a:lstStyle xmlns:a="http://schemas.openxmlformats.org/drawingml/2006/main"/>
+          <a:p xmlns:a="http://schemas.openxmlformats.org/drawingml/2006/main">
+            <a:pPr>
+              <a:defRPr sz="2175" b="0">
+                <a:solidFill>
+                  <a:srgbClr val="173C43"/>
+                </a:solidFill>
+                <a:latin typeface="Heiti TC"/>
+                <a:ea typeface="Heiti TC"/>
+                <a:cs typeface="Heiti TC"/>
+              </a:defRPr>
+            </a:pPr>
+            <a:r>
+              <a:rPr sz="2175" b="0">
+                <a:solidFill>
+                  <a:srgbClr val="173C43"/>
+                </a:solidFill>
+                <a:latin typeface="Heiti TC"/>
+                <a:ea typeface="Heiti TC"/>
+                <a:cs typeface="Heiti TC"/>
+              </a:rPr>
+              <a:t>x：時間（分鐘）</a:t>
+            </a:r>
+          </a:p>
+        </p:txBody>
+      </p:sp>
+      <p:sp>
+        <p:nvSpPr>
+          <p:cNvPr id="7" name="">
+            <a:extLst xmlns:a="http://schemas.openxmlformats.org/drawingml/2006/main">
+              <a:ext uri="{FF2B5EF4-FFF2-40B4-BE49-F238E27FC236}">
+                <a16:creationId xmlns:a16="http://schemas.microsoft.com/office/drawing/2014/main" id="{B790180F-5574-4A09-8148-068305C40B15}"/>
+              </a:ext>
+            </a:extLst>
+          </p:cNvPr>
+          <p:cNvSpPr>
+            <a:spLocks xmlns:a="http://schemas.openxmlformats.org/drawingml/2006/main" noGrp="1"/>
+          </p:cNvSpPr>
+          <p:nvPr/>
+        </p:nvSpPr>
+        <p:spPr>
+          <a:xfrm xmlns:a="http://schemas.openxmlformats.org/drawingml/2006/main">
+            <a:off x="609600" y="3228975"/>
+            <a:ext cx="4953000" cy="457200"/>
+          </a:xfrm>
+          <a:prstGeom xmlns:a="http://schemas.openxmlformats.org/drawingml/2006/main" prst="rect">
+            <a:avLst/>
+          </a:prstGeom>
+          <a:noFill xmlns:a="http://schemas.openxmlformats.org/drawingml/2006/main"/>
+          <a:ln xmlns:a="http://schemas.openxmlformats.org/drawingml/2006/main" w="0">
+            <a:noFill/>
+          </a:ln>
+        </p:spPr>
+        <p:txBody>
+          <a:bodyPr xmlns:a="http://schemas.openxmlformats.org/drawingml/2006/main">
+            <a:noAutofit/>
+          </a:bodyPr>
+          <a:lstStyle xmlns:a="http://schemas.openxmlformats.org/drawingml/2006/main"/>
+          <a:p xmlns:a="http://schemas.openxmlformats.org/drawingml/2006/main">
+            <a:pPr>
+              <a:defRPr sz="1800" b="0">
+                <a:solidFill>
+                  <a:srgbClr val="526B70"/>
+                </a:solidFill>
+                <a:latin typeface="Arial"/>
+                <a:ea typeface="Arial"/>
+                <a:cs typeface="Arial"/>
+              </a:defRPr>
+            </a:pPr>
+            <a:r>
+              <a:rPr sz="1800" b="0">
+                <a:solidFill>
+                  <a:srgbClr val="526B70"/>
+                </a:solidFill>
+                <a:latin typeface="Arial"/>
+                <a:ea typeface="Arial"/>
+                <a:cs typeface="Arial"/>
+              </a:rPr>
+              <a:t>x: time in minutes</a:t>
+            </a:r>
+          </a:p>
+        </p:txBody>
+      </p:sp>
+      <p:sp>
+        <p:nvSpPr>
+          <p:cNvPr id="8" name="">
+            <a:extLst xmlns:a="http://schemas.openxmlformats.org/drawingml/2006/main">
+              <a:ext uri="{FF2B5EF4-FFF2-40B4-BE49-F238E27FC236}">
+                <a16:creationId xmlns:a16="http://schemas.microsoft.com/office/drawing/2014/main" id="{B2B56073-75CB-4E79-AEA5-442B45E21201}"/>
+              </a:ext>
+            </a:extLst>
+          </p:cNvPr>
+          <p:cNvSpPr>
+            <a:spLocks xmlns:a="http://schemas.openxmlformats.org/drawingml/2006/main" noGrp="1"/>
+          </p:cNvSpPr>
+          <p:nvPr/>
+        </p:nvSpPr>
+        <p:spPr>
+          <a:xfrm xmlns:a="http://schemas.openxmlformats.org/drawingml/2006/main">
+            <a:off x="609600" y="3790950"/>
+            <a:ext cx="4953000" cy="495300"/>
+          </a:xfrm>
+          <a:prstGeom xmlns:a="http://schemas.openxmlformats.org/drawingml/2006/main" prst="rect">
+            <a:avLst/>
+          </a:prstGeom>
+          <a:noFill xmlns:a="http://schemas.openxmlformats.org/drawingml/2006/main"/>
+          <a:ln xmlns:a="http://schemas.openxmlformats.org/drawingml/2006/main" w="0">
+            <a:noFill/>
+          </a:ln>
+        </p:spPr>
+        <p:txBody>
+          <a:bodyPr xmlns:a="http://schemas.openxmlformats.org/drawingml/2006/main">
+            <a:noAutofit/>
+          </a:bodyPr>
+          <a:lstStyle xmlns:a="http://schemas.openxmlformats.org/drawingml/2006/main"/>
+          <a:p xmlns:a="http://schemas.openxmlformats.org/drawingml/2006/main">
+            <a:pPr>
+              <a:defRPr sz="2175" b="0">
+                <a:solidFill>
+                  <a:srgbClr val="173C43"/>
+                </a:solidFill>
+                <a:latin typeface="Heiti TC"/>
+                <a:ea typeface="Heiti TC"/>
+                <a:cs typeface="Heiti TC"/>
+              </a:defRPr>
+            </a:pPr>
+            <a:r>
+              <a:rPr sz="2175" b="0">
+                <a:solidFill>
+                  <a:srgbClr val="173C43"/>
+                </a:solidFill>
+                <a:latin typeface="Heiti TC"/>
+                <a:ea typeface="Heiti TC"/>
+                <a:cs typeface="Heiti TC"/>
+              </a:rPr>
+              <a:t>y：水量（公升）</a:t>
+            </a:r>
+          </a:p>
+        </p:txBody>
+      </p:sp>
+      <p:sp>
+        <p:nvSpPr>
+          <p:cNvPr id="9" name="">
+            <a:extLst xmlns:a="http://schemas.openxmlformats.org/drawingml/2006/main">
+              <a:ext uri="{FF2B5EF4-FFF2-40B4-BE49-F238E27FC236}">
+                <a16:creationId xmlns:a16="http://schemas.microsoft.com/office/drawing/2014/main" id="{AF10AAC8-EF4A-4FB5-855D-5B812C921F1B}"/>
+              </a:ext>
+            </a:extLst>
+          </p:cNvPr>
+          <p:cNvSpPr>
+            <a:spLocks xmlns:a="http://schemas.openxmlformats.org/drawingml/2006/main" noGrp="1"/>
+          </p:cNvSpPr>
+          <p:nvPr/>
+        </p:nvSpPr>
+        <p:spPr>
+          <a:xfrm xmlns:a="http://schemas.openxmlformats.org/drawingml/2006/main">
+            <a:off x="609600" y="4257675"/>
+            <a:ext cx="4953000" cy="457200"/>
+          </a:xfrm>
+          <a:prstGeom xmlns:a="http://schemas.openxmlformats.org/drawingml/2006/main" prst="rect">
+            <a:avLst/>
+          </a:prstGeom>
+          <a:noFill xmlns:a="http://schemas.openxmlformats.org/drawingml/2006/main"/>
+          <a:ln xmlns:a="http://schemas.openxmlformats.org/drawingml/2006/main" w="0">
+            <a:noFill/>
+          </a:ln>
+        </p:spPr>
+        <p:txBody>
+          <a:bodyPr xmlns:a="http://schemas.openxmlformats.org/drawingml/2006/main">
+            <a:noAutofit/>
+          </a:bodyPr>
+          <a:lstStyle xmlns:a="http://schemas.openxmlformats.org/drawingml/2006/main"/>
+          <a:p xmlns:a="http://schemas.openxmlformats.org/drawingml/2006/main">
+            <a:pPr>
+              <a:defRPr sz="1800" b="0">
+                <a:solidFill>
+                  <a:srgbClr val="526B70"/>
+                </a:solidFill>
+                <a:latin typeface="Arial"/>
+                <a:ea typeface="Arial"/>
+                <a:cs typeface="Arial"/>
+              </a:defRPr>
+            </a:pPr>
+            <a:r>
+              <a:rPr sz="1800" b="0">
+                <a:solidFill>
+                  <a:srgbClr val="526B70"/>
+                </a:solidFill>
+                <a:latin typeface="Arial"/>
+                <a:ea typeface="Arial"/>
+                <a:cs typeface="Arial"/>
+              </a:rPr>
+              <a:t>y: amount of water in litres</a:t>
+            </a:r>
+          </a:p>
+        </p:txBody>
+      </p:sp>
+      <p:sp>
+        <p:nvSpPr>
+          <p:cNvPr id="10" name="">
+            <a:extLst xmlns:a="http://schemas.openxmlformats.org/drawingml/2006/main">
+              <a:ext uri="{FF2B5EF4-FFF2-40B4-BE49-F238E27FC236}">
+                <a16:creationId xmlns:a16="http://schemas.microsoft.com/office/drawing/2014/main" id="{4D4A8C7F-2839-4A55-B6B0-D9856F5C219B}"/>
+              </a:ext>
+            </a:extLst>
+          </p:cNvPr>
+          <p:cNvSpPr>
+            <a:spLocks xmlns:a="http://schemas.openxmlformats.org/drawingml/2006/main" noGrp="1"/>
+          </p:cNvSpPr>
+          <p:nvPr/>
+        </p:nvSpPr>
+        <p:spPr>
+          <a:xfrm xmlns:a="http://schemas.openxmlformats.org/drawingml/2006/main">
+            <a:off x="609600" y="5048250"/>
+            <a:ext cx="4572000" cy="666750"/>
+          </a:xfrm>
+          <a:prstGeom xmlns:a="http://schemas.openxmlformats.org/drawingml/2006/main" prst="rect">
+            <a:avLst/>
+          </a:prstGeom>
+          <a:noFill xmlns:a="http://schemas.openxmlformats.org/drawingml/2006/main"/>
+          <a:ln xmlns:a="http://schemas.openxmlformats.org/drawingml/2006/main" w="0">
+            <a:noFill/>
+          </a:ln>
+        </p:spPr>
+        <p:txBody>
+          <a:bodyPr xmlns:a="http://schemas.openxmlformats.org/drawingml/2006/main">
+            <a:noAutofit/>
+          </a:bodyPr>
+          <a:lstStyle xmlns:a="http://schemas.openxmlformats.org/drawingml/2006/main"/>
+          <a:p xmlns:a="http://schemas.openxmlformats.org/drawingml/2006/main">
+            <a:pPr>
+              <a:defRPr sz="3300" b="1">
+                <a:solidFill>
+                  <a:srgbClr val="086C61"/>
+                </a:solidFill>
+                <a:latin typeface="Arial"/>
+                <a:ea typeface="Arial"/>
+                <a:cs typeface="Arial"/>
+              </a:defRPr>
+            </a:pPr>
+            <a:r>
+              <a:rPr sz="3300" b="1">
+                <a:solidFill>
+                  <a:srgbClr val="086C61"/>
+                </a:solidFill>
+                <a:latin typeface="Arial"/>
+                <a:ea typeface="Arial"/>
+                <a:cs typeface="Arial"/>
+              </a:rPr>
+              <a:t>x = 0, y = 5</a:t>
+            </a:r>
+          </a:p>
+        </p:txBody>
+      </p:sp>
+      <p:graphicFrame>
+        <p:nvGraphicFramePr>
+          <p:cNvPr id="22" name="Chart"/>
+          <p:cNvGraphicFramePr/>
+          <p:nvPr/>
+        </p:nvGraphicFramePr>
+        <p:xfrm>
+          <a:off xmlns:a="http://schemas.openxmlformats.org/drawingml/2006/main" x="5810250" y="1590675"/>
+          <a:ext xmlns:a="http://schemas.openxmlformats.org/drawingml/2006/main" cx="5810250" cy="4381500"/>
+        </p:xfrm>
+        <a:graphic xmlns:a="http://schemas.openxmlformats.org/drawingml/2006/main">
+          <a:graphicData uri="http://schemas.openxmlformats.org/drawingml/2006/chart">
+            <c:chart xmlns:r="http://schemas.openxmlformats.org/officeDocument/2006/relationships" xmlns:c="http://schemas.openxmlformats.org/drawingml/2006/chart" r:id="Rb19416241b5b4f44"/>
+          </a:graphicData>
+        </a:graphic>
+      </p:graphicFrame>
     </p:spTree>
     <p:extLst>
       <p:ext uri="{BB962C8B-B14F-4D97-AF65-F5344CB8AC3E}">
-        <p14:creationId xmlns:p14="http://schemas.microsoft.com/office/powerpoint/2010/main" val="1814533469"/>
+        <p14:creationId xmlns:p14="http://schemas.microsoft.com/office/powerpoint/2010/main" val="184725663"/>
       </p:ext>
     </p:extLst>
   </p:cSld>
@@ -11287,7 +11303,7 @@
           <p:cNvPr id="12" name="">
             <a:extLst xmlns:a="http://schemas.openxmlformats.org/drawingml/2006/main">
               <a:ext uri="{FF2B5EF4-FFF2-40B4-BE49-F238E27FC236}">
-                <a16:creationId xmlns:a16="http://schemas.microsoft.com/office/drawing/2014/main" id="{F68829DA-034D-4BD1-9DB2-4150D33A7C5F}"/>
+                <a16:creationId xmlns:a16="http://schemas.microsoft.com/office/drawing/2014/main" id="{8196643E-AE30-42C4-976F-F4D27D333B50}"/>
               </a:ext>
             </a:extLst>
           </p:cNvPr>
@@ -11334,7 +11350,7 @@
                 <a:ea typeface="Heiti TC"/>
                 <a:cs typeface="Heiti TC"/>
               </a:rPr>
-              <a:t>c：初始值</a:t>
+              <a:t>每分鐘增加多少？</a:t>
             </a:r>
           </a:p>
         </p:txBody>
@@ -11344,7 +11360,7 @@
           <p:cNvPr id="2" name="">
             <a:extLst xmlns:a="http://schemas.openxmlformats.org/drawingml/2006/main">
               <a:ext uri="{FF2B5EF4-FFF2-40B4-BE49-F238E27FC236}">
-                <a16:creationId xmlns:a16="http://schemas.microsoft.com/office/drawing/2014/main" id="{8407A131-175A-4B58-B50E-2472B7E2B640}"/>
+                <a16:creationId xmlns:a16="http://schemas.microsoft.com/office/drawing/2014/main" id="{2CF3D0AF-402E-4F9F-B5AA-5866561B4129}"/>
               </a:ext>
             </a:extLst>
           </p:cNvPr>
@@ -11391,7 +11407,7 @@
                 <a:ea typeface="Arial"/>
                 <a:cs typeface="Arial"/>
               </a:rPr>
-              <a:t>c: the initial value</a:t>
+              <a:t>How much is added each minute?</a:t>
             </a:r>
           </a:p>
         </p:txBody>
@@ -11401,7 +11417,7 @@
           <p:cNvPr id="3" name="">
             <a:extLst xmlns:a="http://schemas.openxmlformats.org/drawingml/2006/main">
               <a:ext uri="{FF2B5EF4-FFF2-40B4-BE49-F238E27FC236}">
-                <a16:creationId xmlns:a16="http://schemas.microsoft.com/office/drawing/2014/main" id="{A49FA5EE-F5E6-4314-B60D-D4F7B050C482}"/>
+                <a16:creationId xmlns:a16="http://schemas.microsoft.com/office/drawing/2014/main" id="{485D8AB8-A469-49D9-BAA7-153BABD113B9}"/>
               </a:ext>
             </a:extLst>
           </p:cNvPr>
@@ -11458,19 +11474,19 @@
           <p:cNvPr id="4" name="">
             <a:extLst xmlns:a="http://schemas.openxmlformats.org/drawingml/2006/main">
               <a:ext uri="{FF2B5EF4-FFF2-40B4-BE49-F238E27FC236}">
-                <a16:creationId xmlns:a16="http://schemas.microsoft.com/office/drawing/2014/main" id="{C00CAE64-0BB7-4E64-BAC6-B5BE4C33F365}"/>
-              </a:ext>
-            </a:extLst>
-          </p:cNvPr>
-          <p:cNvSpPr>
-            <a:spLocks xmlns:a="http://schemas.openxmlformats.org/drawingml/2006/main" noGrp="1"/>
-          </p:cNvSpPr>
-          <p:nvPr/>
-        </p:nvSpPr>
-        <p:spPr>
-          <a:xfrm xmlns:a="http://schemas.openxmlformats.org/drawingml/2006/main">
-            <a:off x="609600" y="1657350"/>
-            <a:ext cx="4953000" cy="495300"/>
+                <a16:creationId xmlns:a16="http://schemas.microsoft.com/office/drawing/2014/main" id="{55854A62-8637-414F-AAA0-9E2C90A5838D}"/>
+              </a:ext>
+            </a:extLst>
+          </p:cNvPr>
+          <p:cNvSpPr>
+            <a:spLocks xmlns:a="http://schemas.openxmlformats.org/drawingml/2006/main" noGrp="1"/>
+          </p:cNvSpPr>
+          <p:nvPr/>
+        </p:nvSpPr>
+        <p:spPr>
+          <a:xfrm xmlns:a="http://schemas.openxmlformats.org/drawingml/2006/main">
+            <a:off x="609600" y="1647825"/>
+            <a:ext cx="4857750" cy="495300"/>
           </a:xfrm>
           <a:prstGeom xmlns:a="http://schemas.openxmlformats.org/drawingml/2006/main" prst="rect">
             <a:avLst/>
@@ -11505,7 +11521,7 @@
                 <a:ea typeface="Heiti TC"/>
                 <a:cs typeface="Heiti TC"/>
               </a:rPr>
-              <a:t>水箱原有 5 公升水</a:t>
+              <a:t>每分鐘加入 2 公升水</a:t>
             </a:r>
           </a:p>
         </p:txBody>
@@ -11515,19 +11531,19 @@
           <p:cNvPr id="5" name="">
             <a:extLst xmlns:a="http://schemas.openxmlformats.org/drawingml/2006/main">
               <a:ext uri="{FF2B5EF4-FFF2-40B4-BE49-F238E27FC236}">
-                <a16:creationId xmlns:a16="http://schemas.microsoft.com/office/drawing/2014/main" id="{BEDD3A09-95DA-4498-B449-97E3615445C6}"/>
-              </a:ext>
-            </a:extLst>
-          </p:cNvPr>
-          <p:cNvSpPr>
-            <a:spLocks xmlns:a="http://schemas.openxmlformats.org/drawingml/2006/main" noGrp="1"/>
-          </p:cNvSpPr>
-          <p:nvPr/>
-        </p:nvSpPr>
-        <p:spPr>
-          <a:xfrm xmlns:a="http://schemas.openxmlformats.org/drawingml/2006/main">
-            <a:off x="609600" y="2124075"/>
-            <a:ext cx="4953000" cy="457200"/>
+                <a16:creationId xmlns:a16="http://schemas.microsoft.com/office/drawing/2014/main" id="{5640BA3B-2EDD-4FCD-AB9F-330E0368FFB5}"/>
+              </a:ext>
+            </a:extLst>
+          </p:cNvPr>
+          <p:cNvSpPr>
+            <a:spLocks xmlns:a="http://schemas.openxmlformats.org/drawingml/2006/main" noGrp="1"/>
+          </p:cNvSpPr>
+          <p:nvPr/>
+        </p:nvSpPr>
+        <p:spPr>
+          <a:xfrm xmlns:a="http://schemas.openxmlformats.org/drawingml/2006/main">
+            <a:off x="609600" y="2114550"/>
+            <a:ext cx="4857750" cy="457200"/>
           </a:xfrm>
           <a:prstGeom xmlns:a="http://schemas.openxmlformats.org/drawingml/2006/main" prst="rect">
             <a:avLst/>
@@ -11562,7 +11578,7 @@
                 <a:ea typeface="Arial"/>
                 <a:cs typeface="Arial"/>
               </a:rPr>
-              <a:t>A tank starts with 5 litres of water</a:t>
+              <a:t>We add 2 litres each minute</a:t>
             </a:r>
           </a:p>
         </p:txBody>
@@ -11572,36 +11588,93 @@
           <p:cNvPr id="6" name="">
             <a:extLst xmlns:a="http://schemas.openxmlformats.org/drawingml/2006/main">
               <a:ext uri="{FF2B5EF4-FFF2-40B4-BE49-F238E27FC236}">
-                <a16:creationId xmlns:a16="http://schemas.microsoft.com/office/drawing/2014/main" id="{D7DE9954-2020-4C34-849E-30C48F4D0151}"/>
-              </a:ext>
-            </a:extLst>
-          </p:cNvPr>
-          <p:cNvSpPr>
-            <a:spLocks xmlns:a="http://schemas.openxmlformats.org/drawingml/2006/main" noGrp="1"/>
-          </p:cNvSpPr>
-          <p:nvPr/>
-        </p:nvSpPr>
-        <p:spPr>
-          <a:xfrm xmlns:a="http://schemas.openxmlformats.org/drawingml/2006/main">
-            <a:off x="609600" y="2762250"/>
-            <a:ext cx="4953000" cy="495300"/>
-          </a:xfrm>
-          <a:prstGeom xmlns:a="http://schemas.openxmlformats.org/drawingml/2006/main" prst="rect">
-            <a:avLst/>
-          </a:prstGeom>
-          <a:noFill xmlns:a="http://schemas.openxmlformats.org/drawingml/2006/main"/>
-          <a:ln xmlns:a="http://schemas.openxmlformats.org/drawingml/2006/main" w="0">
-            <a:noFill/>
-          </a:ln>
-        </p:spPr>
-        <p:txBody>
-          <a:bodyPr xmlns:a="http://schemas.openxmlformats.org/drawingml/2006/main">
-            <a:noAutofit/>
-          </a:bodyPr>
-          <a:lstStyle xmlns:a="http://schemas.openxmlformats.org/drawingml/2006/main"/>
-          <a:p xmlns:a="http://schemas.openxmlformats.org/drawingml/2006/main">
-            <a:pPr>
-              <a:defRPr sz="2175" b="0">
+                <a16:creationId xmlns:a16="http://schemas.microsoft.com/office/drawing/2014/main" id="{49B08B37-E329-4905-AD5A-D8345C96C06A}"/>
+              </a:ext>
+            </a:extLst>
+          </p:cNvPr>
+          <p:cNvSpPr>
+            <a:spLocks xmlns:a="http://schemas.openxmlformats.org/drawingml/2006/main" noGrp="1"/>
+          </p:cNvSpPr>
+          <p:nvPr/>
+        </p:nvSpPr>
+        <p:spPr>
+          <a:xfrm xmlns:a="http://schemas.openxmlformats.org/drawingml/2006/main">
+            <a:off x="609600" y="2771775"/>
+            <a:ext cx="4667250" cy="619125"/>
+          </a:xfrm>
+          <a:prstGeom xmlns:a="http://schemas.openxmlformats.org/drawingml/2006/main" prst="rect">
+            <a:avLst/>
+          </a:prstGeom>
+          <a:noFill xmlns:a="http://schemas.openxmlformats.org/drawingml/2006/main"/>
+          <a:ln xmlns:a="http://schemas.openxmlformats.org/drawingml/2006/main" w="0">
+            <a:noFill/>
+          </a:ln>
+        </p:spPr>
+        <p:txBody>
+          <a:bodyPr xmlns:a="http://schemas.openxmlformats.org/drawingml/2006/main">
+            <a:noAutofit/>
+          </a:bodyPr>
+          <a:lstStyle xmlns:a="http://schemas.openxmlformats.org/drawingml/2006/main"/>
+          <a:p xmlns:a="http://schemas.openxmlformats.org/drawingml/2006/main">
+            <a:pPr>
+              <a:defRPr sz="3900" b="1">
+                <a:solidFill>
+                  <a:srgbClr val="086C61"/>
+                </a:solidFill>
+                <a:latin typeface="Arial"/>
+                <a:ea typeface="Arial"/>
+                <a:cs typeface="Arial"/>
+              </a:defRPr>
+            </a:pPr>
+            <a:r>
+              <a:rPr sz="3900" b="1">
+                <a:solidFill>
+                  <a:srgbClr val="086C61"/>
+                </a:solidFill>
+                <a:latin typeface="Arial"/>
+                <a:ea typeface="Arial"/>
+                <a:cs typeface="Arial"/>
+              </a:rPr>
+              <a:t>y = 2x + 5</a:t>
+            </a:r>
+          </a:p>
+        </p:txBody>
+      </p:sp>
+      <p:sp>
+        <p:nvSpPr>
+          <p:cNvPr id="7" name="">
+            <a:extLst xmlns:a="http://schemas.openxmlformats.org/drawingml/2006/main">
+              <a:ext uri="{FF2B5EF4-FFF2-40B4-BE49-F238E27FC236}">
+                <a16:creationId xmlns:a16="http://schemas.microsoft.com/office/drawing/2014/main" id="{B79CB966-A40A-4B25-9489-BEF2153AC464}"/>
+              </a:ext>
+            </a:extLst>
+          </p:cNvPr>
+          <p:cNvSpPr>
+            <a:spLocks xmlns:a="http://schemas.openxmlformats.org/drawingml/2006/main" noGrp="1"/>
+          </p:cNvSpPr>
+          <p:nvPr/>
+        </p:nvSpPr>
+        <p:spPr>
+          <a:xfrm xmlns:a="http://schemas.openxmlformats.org/drawingml/2006/main">
+            <a:off x="609600" y="3676650"/>
+            <a:ext cx="4857750" cy="495300"/>
+          </a:xfrm>
+          <a:prstGeom xmlns:a="http://schemas.openxmlformats.org/drawingml/2006/main" prst="rect">
+            <a:avLst/>
+          </a:prstGeom>
+          <a:noFill xmlns:a="http://schemas.openxmlformats.org/drawingml/2006/main"/>
+          <a:ln xmlns:a="http://schemas.openxmlformats.org/drawingml/2006/main" w="0">
+            <a:noFill/>
+          </a:ln>
+        </p:spPr>
+        <p:txBody>
+          <a:bodyPr xmlns:a="http://schemas.openxmlformats.org/drawingml/2006/main">
+            <a:noAutofit/>
+          </a:bodyPr>
+          <a:lstStyle xmlns:a="http://schemas.openxmlformats.org/drawingml/2006/main"/>
+          <a:p xmlns:a="http://schemas.openxmlformats.org/drawingml/2006/main">
+            <a:pPr>
+              <a:defRPr sz="2100" b="0">
                 <a:solidFill>
                   <a:srgbClr val="173C43"/>
                 </a:solidFill>
@@ -11611,7 +11684,7 @@
               </a:defRPr>
             </a:pPr>
             <a:r>
-              <a:rPr sz="2175" b="0">
+              <a:rPr sz="2100" b="0">
                 <a:solidFill>
                   <a:srgbClr val="173C43"/>
                 </a:solidFill>
@@ -11619,29 +11692,29 @@
                 <a:ea typeface="Heiti TC"/>
                 <a:cs typeface="Heiti TC"/>
               </a:rPr>
-              <a:t>x：時間（分鐘）</a:t>
-            </a:r>
-          </a:p>
-        </p:txBody>
-      </p:sp>
-      <p:sp>
-        <p:nvSpPr>
-          <p:cNvPr id="7" name="">
-            <a:extLst xmlns:a="http://schemas.openxmlformats.org/drawingml/2006/main">
-              <a:ext uri="{FF2B5EF4-FFF2-40B4-BE49-F238E27FC236}">
-                <a16:creationId xmlns:a16="http://schemas.microsoft.com/office/drawing/2014/main" id="{1957C1A2-96CF-4B41-A89E-2BB325C0AF92}"/>
-              </a:ext>
-            </a:extLst>
-          </p:cNvPr>
-          <p:cNvSpPr>
-            <a:spLocks xmlns:a="http://schemas.openxmlformats.org/drawingml/2006/main" noGrp="1"/>
-          </p:cNvSpPr>
-          <p:nvPr/>
-        </p:nvSpPr>
-        <p:spPr>
-          <a:xfrm xmlns:a="http://schemas.openxmlformats.org/drawingml/2006/main">
-            <a:off x="609600" y="3228975"/>
-            <a:ext cx="4953000" cy="457200"/>
+              <a:t>x 增加 1，y 增加 2</a:t>
+            </a:r>
+          </a:p>
+        </p:txBody>
+      </p:sp>
+      <p:sp>
+        <p:nvSpPr>
+          <p:cNvPr id="8" name="">
+            <a:extLst xmlns:a="http://schemas.openxmlformats.org/drawingml/2006/main">
+              <a:ext uri="{FF2B5EF4-FFF2-40B4-BE49-F238E27FC236}">
+                <a16:creationId xmlns:a16="http://schemas.microsoft.com/office/drawing/2014/main" id="{0B1122FA-43DB-4DAB-BEE7-AF9700E02A3A}"/>
+              </a:ext>
+            </a:extLst>
+          </p:cNvPr>
+          <p:cNvSpPr>
+            <a:spLocks xmlns:a="http://schemas.openxmlformats.org/drawingml/2006/main" noGrp="1"/>
+          </p:cNvSpPr>
+          <p:nvPr/>
+        </p:nvSpPr>
+        <p:spPr>
+          <a:xfrm xmlns:a="http://schemas.openxmlformats.org/drawingml/2006/main">
+            <a:off x="609600" y="4143375"/>
+            <a:ext cx="4857750" cy="457200"/>
           </a:xfrm>
           <a:prstGeom xmlns:a="http://schemas.openxmlformats.org/drawingml/2006/main" prst="rect">
             <a:avLst/>
@@ -11676,46 +11749,46 @@
                 <a:ea typeface="Arial"/>
                 <a:cs typeface="Arial"/>
               </a:rPr>
-              <a:t>x: time in minutes</a:t>
-            </a:r>
-          </a:p>
-        </p:txBody>
-      </p:sp>
-      <p:sp>
-        <p:nvSpPr>
-          <p:cNvPr id="8" name="">
-            <a:extLst xmlns:a="http://schemas.openxmlformats.org/drawingml/2006/main">
-              <a:ext uri="{FF2B5EF4-FFF2-40B4-BE49-F238E27FC236}">
-                <a16:creationId xmlns:a16="http://schemas.microsoft.com/office/drawing/2014/main" id="{295E26E4-B861-4428-820C-C310B594D335}"/>
-              </a:ext>
-            </a:extLst>
-          </p:cNvPr>
-          <p:cNvSpPr>
-            <a:spLocks xmlns:a="http://schemas.openxmlformats.org/drawingml/2006/main" noGrp="1"/>
-          </p:cNvSpPr>
-          <p:nvPr/>
-        </p:nvSpPr>
-        <p:spPr>
-          <a:xfrm xmlns:a="http://schemas.openxmlformats.org/drawingml/2006/main">
-            <a:off x="609600" y="3790950"/>
-            <a:ext cx="4953000" cy="495300"/>
-          </a:xfrm>
-          <a:prstGeom xmlns:a="http://schemas.openxmlformats.org/drawingml/2006/main" prst="rect">
-            <a:avLst/>
-          </a:prstGeom>
-          <a:noFill xmlns:a="http://schemas.openxmlformats.org/drawingml/2006/main"/>
-          <a:ln xmlns:a="http://schemas.openxmlformats.org/drawingml/2006/main" w="0">
-            <a:noFill/>
-          </a:ln>
-        </p:spPr>
-        <p:txBody>
-          <a:bodyPr xmlns:a="http://schemas.openxmlformats.org/drawingml/2006/main">
-            <a:noAutofit/>
-          </a:bodyPr>
-          <a:lstStyle xmlns:a="http://schemas.openxmlformats.org/drawingml/2006/main"/>
-          <a:p xmlns:a="http://schemas.openxmlformats.org/drawingml/2006/main">
-            <a:pPr>
-              <a:defRPr sz="2175" b="0">
+              <a:t>When x increases by 1, y increases by 2</a:t>
+            </a:r>
+          </a:p>
+        </p:txBody>
+      </p:sp>
+      <p:sp>
+        <p:nvSpPr>
+          <p:cNvPr id="9" name="">
+            <a:extLst xmlns:a="http://schemas.openxmlformats.org/drawingml/2006/main">
+              <a:ext uri="{FF2B5EF4-FFF2-40B4-BE49-F238E27FC236}">
+                <a16:creationId xmlns:a16="http://schemas.microsoft.com/office/drawing/2014/main" id="{B8348E6A-3778-4BE5-BB8B-D51841D04AB2}"/>
+              </a:ext>
+            </a:extLst>
+          </p:cNvPr>
+          <p:cNvSpPr>
+            <a:spLocks xmlns:a="http://schemas.openxmlformats.org/drawingml/2006/main" noGrp="1"/>
+          </p:cNvSpPr>
+          <p:nvPr/>
+        </p:nvSpPr>
+        <p:spPr>
+          <a:xfrm xmlns:a="http://schemas.openxmlformats.org/drawingml/2006/main">
+            <a:off x="609600" y="4743450"/>
+            <a:ext cx="4857750" cy="495300"/>
+          </a:xfrm>
+          <a:prstGeom xmlns:a="http://schemas.openxmlformats.org/drawingml/2006/main" prst="rect">
+            <a:avLst/>
+          </a:prstGeom>
+          <a:noFill xmlns:a="http://schemas.openxmlformats.org/drawingml/2006/main"/>
+          <a:ln xmlns:a="http://schemas.openxmlformats.org/drawingml/2006/main" w="0">
+            <a:noFill/>
+          </a:ln>
+        </p:spPr>
+        <p:txBody>
+          <a:bodyPr xmlns:a="http://schemas.openxmlformats.org/drawingml/2006/main">
+            <a:noAutofit/>
+          </a:bodyPr>
+          <a:lstStyle xmlns:a="http://schemas.openxmlformats.org/drawingml/2006/main"/>
+          <a:p xmlns:a="http://schemas.openxmlformats.org/drawingml/2006/main">
+            <a:pPr>
+              <a:defRPr sz="2250" b="0">
                 <a:solidFill>
                   <a:srgbClr val="173C43"/>
                 </a:solidFill>
@@ -11725,7 +11798,7 @@
               </a:defRPr>
             </a:pPr>
             <a:r>
-              <a:rPr sz="2175" b="0">
+              <a:rPr sz="2250" b="0">
                 <a:solidFill>
                   <a:srgbClr val="173C43"/>
                 </a:solidFill>
@@ -11733,29 +11806,29 @@
                 <a:ea typeface="Heiti TC"/>
                 <a:cs typeface="Heiti TC"/>
               </a:rPr>
-              <a:t>y：水量（公升）</a:t>
-            </a:r>
-          </a:p>
-        </p:txBody>
-      </p:sp>
-      <p:sp>
-        <p:nvSpPr>
-          <p:cNvPr id="9" name="">
-            <a:extLst xmlns:a="http://schemas.openxmlformats.org/drawingml/2006/main">
-              <a:ext uri="{FF2B5EF4-FFF2-40B4-BE49-F238E27FC236}">
-                <a16:creationId xmlns:a16="http://schemas.microsoft.com/office/drawing/2014/main" id="{8C383F61-93F1-4A99-BA8E-0C11F7887E32}"/>
-              </a:ext>
-            </a:extLst>
-          </p:cNvPr>
-          <p:cNvSpPr>
-            <a:spLocks xmlns:a="http://schemas.openxmlformats.org/drawingml/2006/main" noGrp="1"/>
-          </p:cNvSpPr>
-          <p:nvPr/>
-        </p:nvSpPr>
-        <p:spPr>
-          <a:xfrm xmlns:a="http://schemas.openxmlformats.org/drawingml/2006/main">
-            <a:off x="609600" y="4257675"/>
-            <a:ext cx="4953000" cy="457200"/>
+              <a:t>開始有 5 公升，每分鐘增加 2 公升</a:t>
+            </a:r>
+          </a:p>
+        </p:txBody>
+      </p:sp>
+      <p:sp>
+        <p:nvSpPr>
+          <p:cNvPr id="10" name="">
+            <a:extLst xmlns:a="http://schemas.openxmlformats.org/drawingml/2006/main">
+              <a:ext uri="{FF2B5EF4-FFF2-40B4-BE49-F238E27FC236}">
+                <a16:creationId xmlns:a16="http://schemas.microsoft.com/office/drawing/2014/main" id="{3378E156-35D9-4547-83FB-2F1386330AE4}"/>
+              </a:ext>
+            </a:extLst>
+          </p:cNvPr>
+          <p:cNvSpPr>
+            <a:spLocks xmlns:a="http://schemas.openxmlformats.org/drawingml/2006/main" noGrp="1"/>
+          </p:cNvSpPr>
+          <p:nvPr/>
+        </p:nvSpPr>
+        <p:spPr>
+          <a:xfrm xmlns:a="http://schemas.openxmlformats.org/drawingml/2006/main">
+            <a:off x="609600" y="5210175"/>
+            <a:ext cx="4857750" cy="457200"/>
           </a:xfrm>
           <a:prstGeom xmlns:a="http://schemas.openxmlformats.org/drawingml/2006/main" prst="rect">
             <a:avLst/>
@@ -11790,64 +11863,7 @@
                 <a:ea typeface="Arial"/>
                 <a:cs typeface="Arial"/>
               </a:rPr>
-              <a:t>y: amount of water in litres</a:t>
-            </a:r>
-          </a:p>
-        </p:txBody>
-      </p:sp>
-      <p:sp>
-        <p:nvSpPr>
-          <p:cNvPr id="10" name="">
-            <a:extLst xmlns:a="http://schemas.openxmlformats.org/drawingml/2006/main">
-              <a:ext uri="{FF2B5EF4-FFF2-40B4-BE49-F238E27FC236}">
-                <a16:creationId xmlns:a16="http://schemas.microsoft.com/office/drawing/2014/main" id="{FB1FFA6F-B7F4-4242-9DC5-A18D737A1914}"/>
-              </a:ext>
-            </a:extLst>
-          </p:cNvPr>
-          <p:cNvSpPr>
-            <a:spLocks xmlns:a="http://schemas.openxmlformats.org/drawingml/2006/main" noGrp="1"/>
-          </p:cNvSpPr>
-          <p:nvPr/>
-        </p:nvSpPr>
-        <p:spPr>
-          <a:xfrm xmlns:a="http://schemas.openxmlformats.org/drawingml/2006/main">
-            <a:off x="609600" y="5048250"/>
-            <a:ext cx="4572000" cy="666750"/>
-          </a:xfrm>
-          <a:prstGeom xmlns:a="http://schemas.openxmlformats.org/drawingml/2006/main" prst="rect">
-            <a:avLst/>
-          </a:prstGeom>
-          <a:noFill xmlns:a="http://schemas.openxmlformats.org/drawingml/2006/main"/>
-          <a:ln xmlns:a="http://schemas.openxmlformats.org/drawingml/2006/main" w="0">
-            <a:noFill/>
-          </a:ln>
-        </p:spPr>
-        <p:txBody>
-          <a:bodyPr xmlns:a="http://schemas.openxmlformats.org/drawingml/2006/main">
-            <a:noAutofit/>
-          </a:bodyPr>
-          <a:lstStyle xmlns:a="http://schemas.openxmlformats.org/drawingml/2006/main"/>
-          <a:p xmlns:a="http://schemas.openxmlformats.org/drawingml/2006/main">
-            <a:pPr>
-              <a:defRPr sz="3300" b="1">
-                <a:solidFill>
-                  <a:srgbClr val="086C61"/>
-                </a:solidFill>
-                <a:latin typeface="Arial"/>
-                <a:ea typeface="Arial"/>
-                <a:cs typeface="Arial"/>
-              </a:defRPr>
-            </a:pPr>
-            <a:r>
-              <a:rPr sz="3300" b="1">
-                <a:solidFill>
-                  <a:srgbClr val="086C61"/>
-                </a:solidFill>
-                <a:latin typeface="Arial"/>
-                <a:ea typeface="Arial"/>
-                <a:cs typeface="Arial"/>
-              </a:rPr>
-              <a:t>x = 0, y = 5</a:t>
+              <a:t>Start with 5 litres, then add 2 litres each minute</a:t>
             </a:r>
           </a:p>
         </p:txBody>
@@ -11864,14 +11880,14 @@
         </p:xfrm>
         <a:graphic xmlns:a="http://schemas.openxmlformats.org/drawingml/2006/main">
           <a:graphicData uri="http://schemas.openxmlformats.org/drawingml/2006/chart">
-            <c:chart xmlns:r="http://schemas.openxmlformats.org/officeDocument/2006/relationships" xmlns:c="http://schemas.openxmlformats.org/drawingml/2006/chart" r:id="R5d90713960614c9b"/>
+            <c:chart xmlns:r="http://schemas.openxmlformats.org/officeDocument/2006/relationships" xmlns:c="http://schemas.openxmlformats.org/drawingml/2006/chart" r:id="Rfb6b9b87a7874d26"/>
           </a:graphicData>
         </a:graphic>
       </p:graphicFrame>
     </p:spTree>
     <p:extLst>
       <p:ext uri="{BB962C8B-B14F-4D97-AF65-F5344CB8AC3E}">
-        <p14:creationId xmlns:p14="http://schemas.microsoft.com/office/powerpoint/2010/main" val="233305993"/>
+        <p14:creationId xmlns:p14="http://schemas.microsoft.com/office/powerpoint/2010/main" val="1354081807"/>
       </p:ext>
     </p:extLst>
   </p:cSld>
@@ -11899,124 +11915,637 @@
       </p:grpSpPr>
       <p:sp>
         <p:nvSpPr>
+          <p:cNvPr id="13" name="">
+            <a:extLst xmlns:a="http://schemas.openxmlformats.org/drawingml/2006/main">
+              <a:ext uri="{FF2B5EF4-FFF2-40B4-BE49-F238E27FC236}">
+                <a16:creationId xmlns:a16="http://schemas.microsoft.com/office/drawing/2014/main" id="{B797FA9C-EAF9-445E-8DE4-8D384786AA3D}"/>
+              </a:ext>
+            </a:extLst>
+          </p:cNvPr>
+          <p:cNvSpPr>
+            <a:spLocks xmlns:a="http://schemas.openxmlformats.org/drawingml/2006/main" noGrp="1"/>
+          </p:cNvSpPr>
+          <p:nvPr/>
+        </p:nvSpPr>
+        <p:spPr>
+          <a:xfrm xmlns:a="http://schemas.openxmlformats.org/drawingml/2006/main">
+            <a:off x="609600" y="552450"/>
+            <a:ext cx="10953750" cy="1428750"/>
+          </a:xfrm>
+          <a:prstGeom xmlns:a="http://schemas.openxmlformats.org/drawingml/2006/main" prst="rect">
+            <a:avLst/>
+          </a:prstGeom>
+          <a:noFill xmlns:a="http://schemas.openxmlformats.org/drawingml/2006/main"/>
+          <a:ln xmlns:a="http://schemas.openxmlformats.org/drawingml/2006/main" w="0">
+            <a:noFill/>
+          </a:ln>
+        </p:spPr>
+        <p:txBody>
+          <a:bodyPr xmlns:a="http://schemas.openxmlformats.org/drawingml/2006/main">
+            <a:noAutofit/>
+          </a:bodyPr>
+          <a:lstStyle xmlns:a="http://schemas.openxmlformats.org/drawingml/2006/main"/>
+          <a:p xmlns:a="http://schemas.openxmlformats.org/drawingml/2006/main">
+            <a:pPr>
+              <a:defRPr sz="8700" b="1">
+                <a:solidFill>
+                  <a:srgbClr val="086C61"/>
+                </a:solidFill>
+                <a:latin typeface="Arial"/>
+                <a:ea typeface="Arial"/>
+                <a:cs typeface="Arial"/>
+              </a:defRPr>
+            </a:pPr>
+            <a:r>
+              <a:rPr sz="8700" b="1">
+                <a:solidFill>
+                  <a:srgbClr val="086C61"/>
+                </a:solidFill>
+                <a:latin typeface="Arial"/>
+                <a:ea typeface="Arial"/>
+                <a:cs typeface="Arial"/>
+              </a:rPr>
+              <a:t>y = mx + c</a:t>
+            </a:r>
+          </a:p>
+        </p:txBody>
+      </p:sp>
+      <p:sp>
+        <p:nvSpPr>
+          <p:cNvPr id="2" name="">
+            <a:extLst xmlns:a="http://schemas.openxmlformats.org/drawingml/2006/main">
+              <a:ext uri="{FF2B5EF4-FFF2-40B4-BE49-F238E27FC236}">
+                <a16:creationId xmlns:a16="http://schemas.microsoft.com/office/drawing/2014/main" id="{AA32FD15-2656-4D5D-B8EE-FC7E7A782533}"/>
+              </a:ext>
+            </a:extLst>
+          </p:cNvPr>
+          <p:cNvSpPr>
+            <a:spLocks xmlns:a="http://schemas.openxmlformats.org/drawingml/2006/main" noGrp="1"/>
+          </p:cNvSpPr>
+          <p:nvPr/>
+        </p:nvSpPr>
+        <p:spPr>
+          <a:xfrm xmlns:a="http://schemas.openxmlformats.org/drawingml/2006/main">
+            <a:off x="609600" y="2276475"/>
+            <a:ext cx="5238750" cy="495300"/>
+          </a:xfrm>
+          <a:prstGeom xmlns:a="http://schemas.openxmlformats.org/drawingml/2006/main" prst="rect">
+            <a:avLst/>
+          </a:prstGeom>
+          <a:noFill xmlns:a="http://schemas.openxmlformats.org/drawingml/2006/main"/>
+          <a:ln xmlns:a="http://schemas.openxmlformats.org/drawingml/2006/main" w="0">
+            <a:noFill/>
+          </a:ln>
+        </p:spPr>
+        <p:txBody>
+          <a:bodyPr xmlns:a="http://schemas.openxmlformats.org/drawingml/2006/main">
+            <a:noAutofit/>
+          </a:bodyPr>
+          <a:lstStyle xmlns:a="http://schemas.openxmlformats.org/drawingml/2006/main"/>
+          <a:p xmlns:a="http://schemas.openxmlformats.org/drawingml/2006/main">
+            <a:pPr>
+              <a:defRPr sz="3000" b="0">
+                <a:solidFill>
+                  <a:srgbClr val="173C43"/>
+                </a:solidFill>
+                <a:latin typeface="Heiti TC"/>
+                <a:ea typeface="Heiti TC"/>
+                <a:cs typeface="Heiti TC"/>
+              </a:defRPr>
+            </a:pPr>
+            <a:r>
+              <a:rPr sz="3000" b="0">
+                <a:solidFill>
+                  <a:srgbClr val="173C43"/>
+                </a:solidFill>
+                <a:latin typeface="Heiti TC"/>
+                <a:ea typeface="Heiti TC"/>
+                <a:cs typeface="Heiti TC"/>
+              </a:rPr>
+              <a:t>m：變化率</a:t>
+            </a:r>
+          </a:p>
+        </p:txBody>
+      </p:sp>
+      <p:sp>
+        <p:nvSpPr>
+          <p:cNvPr id="3" name="">
+            <a:extLst xmlns:a="http://schemas.openxmlformats.org/drawingml/2006/main">
+              <a:ext uri="{FF2B5EF4-FFF2-40B4-BE49-F238E27FC236}">
+                <a16:creationId xmlns:a16="http://schemas.microsoft.com/office/drawing/2014/main" id="{A849E6F1-83A5-4995-BB04-CA302A48EB56}"/>
+              </a:ext>
+            </a:extLst>
+          </p:cNvPr>
+          <p:cNvSpPr>
+            <a:spLocks xmlns:a="http://schemas.openxmlformats.org/drawingml/2006/main" noGrp="1"/>
+          </p:cNvSpPr>
+          <p:nvPr/>
+        </p:nvSpPr>
+        <p:spPr>
+          <a:xfrm xmlns:a="http://schemas.openxmlformats.org/drawingml/2006/main">
+            <a:off x="609600" y="2743200"/>
+            <a:ext cx="5238750" cy="457200"/>
+          </a:xfrm>
+          <a:prstGeom xmlns:a="http://schemas.openxmlformats.org/drawingml/2006/main" prst="rect">
+            <a:avLst/>
+          </a:prstGeom>
+          <a:noFill xmlns:a="http://schemas.openxmlformats.org/drawingml/2006/main"/>
+          <a:ln xmlns:a="http://schemas.openxmlformats.org/drawingml/2006/main" w="0">
+            <a:noFill/>
+          </a:ln>
+        </p:spPr>
+        <p:txBody>
+          <a:bodyPr xmlns:a="http://schemas.openxmlformats.org/drawingml/2006/main">
+            <a:noAutofit/>
+          </a:bodyPr>
+          <a:lstStyle xmlns:a="http://schemas.openxmlformats.org/drawingml/2006/main"/>
+          <a:p xmlns:a="http://schemas.openxmlformats.org/drawingml/2006/main">
+            <a:pPr>
+              <a:defRPr sz="2400" b="0">
+                <a:solidFill>
+                  <a:srgbClr val="526B70"/>
+                </a:solidFill>
+                <a:latin typeface="Arial"/>
+                <a:ea typeface="Arial"/>
+                <a:cs typeface="Arial"/>
+              </a:defRPr>
+            </a:pPr>
+            <a:r>
+              <a:rPr sz="2400" b="0">
+                <a:solidFill>
+                  <a:srgbClr val="526B70"/>
+                </a:solidFill>
+                <a:latin typeface="Arial"/>
+                <a:ea typeface="Arial"/>
+                <a:cs typeface="Arial"/>
+              </a:rPr>
+              <a:t>m: rate of change</a:t>
+            </a:r>
+          </a:p>
+        </p:txBody>
+      </p:sp>
+      <p:sp>
+        <p:nvSpPr>
+          <p:cNvPr id="4" name="">
+            <a:extLst xmlns:a="http://schemas.openxmlformats.org/drawingml/2006/main">
+              <a:ext uri="{FF2B5EF4-FFF2-40B4-BE49-F238E27FC236}">
+                <a16:creationId xmlns:a16="http://schemas.microsoft.com/office/drawing/2014/main" id="{876A17DD-3674-45C9-B8DB-F3B99305398F}"/>
+              </a:ext>
+            </a:extLst>
+          </p:cNvPr>
+          <p:cNvSpPr>
+            <a:spLocks xmlns:a="http://schemas.openxmlformats.org/drawingml/2006/main" noGrp="1"/>
+          </p:cNvSpPr>
+          <p:nvPr/>
+        </p:nvSpPr>
+        <p:spPr>
+          <a:xfrm xmlns:a="http://schemas.openxmlformats.org/drawingml/2006/main">
+            <a:off x="6334125" y="2276475"/>
+            <a:ext cx="5238750" cy="495300"/>
+          </a:xfrm>
+          <a:prstGeom xmlns:a="http://schemas.openxmlformats.org/drawingml/2006/main" prst="rect">
+            <a:avLst/>
+          </a:prstGeom>
+          <a:noFill xmlns:a="http://schemas.openxmlformats.org/drawingml/2006/main"/>
+          <a:ln xmlns:a="http://schemas.openxmlformats.org/drawingml/2006/main" w="0">
+            <a:noFill/>
+          </a:ln>
+        </p:spPr>
+        <p:txBody>
+          <a:bodyPr xmlns:a="http://schemas.openxmlformats.org/drawingml/2006/main">
+            <a:noAutofit/>
+          </a:bodyPr>
+          <a:lstStyle xmlns:a="http://schemas.openxmlformats.org/drawingml/2006/main"/>
+          <a:p xmlns:a="http://schemas.openxmlformats.org/drawingml/2006/main">
+            <a:pPr>
+              <a:defRPr sz="3000" b="0">
+                <a:solidFill>
+                  <a:srgbClr val="173C43"/>
+                </a:solidFill>
+                <a:latin typeface="Heiti TC"/>
+                <a:ea typeface="Heiti TC"/>
+                <a:cs typeface="Heiti TC"/>
+              </a:defRPr>
+            </a:pPr>
+            <a:r>
+              <a:rPr sz="3000" b="0">
+                <a:solidFill>
+                  <a:srgbClr val="173C43"/>
+                </a:solidFill>
+                <a:latin typeface="Heiti TC"/>
+                <a:ea typeface="Heiti TC"/>
+                <a:cs typeface="Heiti TC"/>
+              </a:rPr>
+              <a:t>c：初始值</a:t>
+            </a:r>
+          </a:p>
+        </p:txBody>
+      </p:sp>
+      <p:sp>
+        <p:nvSpPr>
+          <p:cNvPr id="5" name="">
+            <a:extLst xmlns:a="http://schemas.openxmlformats.org/drawingml/2006/main">
+              <a:ext uri="{FF2B5EF4-FFF2-40B4-BE49-F238E27FC236}">
+                <a16:creationId xmlns:a16="http://schemas.microsoft.com/office/drawing/2014/main" id="{D4463783-548F-4DEF-B6B0-21B6CF065AF5}"/>
+              </a:ext>
+            </a:extLst>
+          </p:cNvPr>
+          <p:cNvSpPr>
+            <a:spLocks xmlns:a="http://schemas.openxmlformats.org/drawingml/2006/main" noGrp="1"/>
+          </p:cNvSpPr>
+          <p:nvPr/>
+        </p:nvSpPr>
+        <p:spPr>
+          <a:xfrm xmlns:a="http://schemas.openxmlformats.org/drawingml/2006/main">
+            <a:off x="6334125" y="2743200"/>
+            <a:ext cx="5238750" cy="457200"/>
+          </a:xfrm>
+          <a:prstGeom xmlns:a="http://schemas.openxmlformats.org/drawingml/2006/main" prst="rect">
+            <a:avLst/>
+          </a:prstGeom>
+          <a:noFill xmlns:a="http://schemas.openxmlformats.org/drawingml/2006/main"/>
+          <a:ln xmlns:a="http://schemas.openxmlformats.org/drawingml/2006/main" w="0">
+            <a:noFill/>
+          </a:ln>
+        </p:spPr>
+        <p:txBody>
+          <a:bodyPr xmlns:a="http://schemas.openxmlformats.org/drawingml/2006/main">
+            <a:noAutofit/>
+          </a:bodyPr>
+          <a:lstStyle xmlns:a="http://schemas.openxmlformats.org/drawingml/2006/main"/>
+          <a:p xmlns:a="http://schemas.openxmlformats.org/drawingml/2006/main">
+            <a:pPr>
+              <a:defRPr sz="2400" b="0">
+                <a:solidFill>
+                  <a:srgbClr val="526B70"/>
+                </a:solidFill>
+                <a:latin typeface="Arial"/>
+                <a:ea typeface="Arial"/>
+                <a:cs typeface="Arial"/>
+              </a:defRPr>
+            </a:pPr>
+            <a:r>
+              <a:rPr sz="2400" b="0">
+                <a:solidFill>
+                  <a:srgbClr val="526B70"/>
+                </a:solidFill>
+                <a:latin typeface="Arial"/>
+                <a:ea typeface="Arial"/>
+                <a:cs typeface="Arial"/>
+              </a:rPr>
+              <a:t>c: initial value</a:t>
+            </a:r>
+          </a:p>
+        </p:txBody>
+      </p:sp>
+      <p:sp>
+        <p:nvSpPr>
+          <p:cNvPr id="6" name="">
+            <a:extLst xmlns:a="http://schemas.openxmlformats.org/drawingml/2006/main">
+              <a:ext uri="{FF2B5EF4-FFF2-40B4-BE49-F238E27FC236}">
+                <a16:creationId xmlns:a16="http://schemas.microsoft.com/office/drawing/2014/main" id="{D5EF26FB-1900-420B-9DCD-5620518F7F94}"/>
+              </a:ext>
+            </a:extLst>
+          </p:cNvPr>
+          <p:cNvSpPr>
+            <a:spLocks xmlns:a="http://schemas.openxmlformats.org/drawingml/2006/main" noGrp="1"/>
+          </p:cNvSpPr>
+          <p:nvPr/>
+        </p:nvSpPr>
+        <p:spPr>
+          <a:xfrm xmlns:a="http://schemas.openxmlformats.org/drawingml/2006/main">
+            <a:off x="609600" y="3495675"/>
+            <a:ext cx="5238750" cy="495300"/>
+          </a:xfrm>
+          <a:prstGeom xmlns:a="http://schemas.openxmlformats.org/drawingml/2006/main" prst="rect">
+            <a:avLst/>
+          </a:prstGeom>
+          <a:noFill xmlns:a="http://schemas.openxmlformats.org/drawingml/2006/main"/>
+          <a:ln xmlns:a="http://schemas.openxmlformats.org/drawingml/2006/main" w="0">
+            <a:noFill/>
+          </a:ln>
+        </p:spPr>
+        <p:txBody>
+          <a:bodyPr xmlns:a="http://schemas.openxmlformats.org/drawingml/2006/main">
+            <a:noAutofit/>
+          </a:bodyPr>
+          <a:lstStyle xmlns:a="http://schemas.openxmlformats.org/drawingml/2006/main"/>
+          <a:p xmlns:a="http://schemas.openxmlformats.org/drawingml/2006/main">
+            <a:pPr>
+              <a:defRPr sz="2175" b="0">
+                <a:solidFill>
+                  <a:srgbClr val="173C43"/>
+                </a:solidFill>
+                <a:latin typeface="Heiti TC"/>
+                <a:ea typeface="Heiti TC"/>
+                <a:cs typeface="Heiti TC"/>
+              </a:defRPr>
+            </a:pPr>
+            <a:r>
+              <a:rPr sz="2175" b="0">
+                <a:solidFill>
+                  <a:srgbClr val="173C43"/>
+                </a:solidFill>
+                <a:latin typeface="Heiti TC"/>
+                <a:ea typeface="Heiti TC"/>
+                <a:cs typeface="Heiti TC"/>
+              </a:rPr>
+              <a:t>x 每增加 1，y 改變多少？</a:t>
+            </a:r>
+          </a:p>
+        </p:txBody>
+      </p:sp>
+      <p:sp>
+        <p:nvSpPr>
+          <p:cNvPr id="7" name="">
+            <a:extLst xmlns:a="http://schemas.openxmlformats.org/drawingml/2006/main">
+              <a:ext uri="{FF2B5EF4-FFF2-40B4-BE49-F238E27FC236}">
+                <a16:creationId xmlns:a16="http://schemas.microsoft.com/office/drawing/2014/main" id="{B059C03E-48C7-4CD4-B668-E0B5D8EF1A44}"/>
+              </a:ext>
+            </a:extLst>
+          </p:cNvPr>
+          <p:cNvSpPr>
+            <a:spLocks xmlns:a="http://schemas.openxmlformats.org/drawingml/2006/main" noGrp="1"/>
+          </p:cNvSpPr>
+          <p:nvPr/>
+        </p:nvSpPr>
+        <p:spPr>
+          <a:xfrm xmlns:a="http://schemas.openxmlformats.org/drawingml/2006/main">
+            <a:off x="609600" y="3962400"/>
+            <a:ext cx="5238750" cy="457200"/>
+          </a:xfrm>
+          <a:prstGeom xmlns:a="http://schemas.openxmlformats.org/drawingml/2006/main" prst="rect">
+            <a:avLst/>
+          </a:prstGeom>
+          <a:noFill xmlns:a="http://schemas.openxmlformats.org/drawingml/2006/main"/>
+          <a:ln xmlns:a="http://schemas.openxmlformats.org/drawingml/2006/main" w="0">
+            <a:noFill/>
+          </a:ln>
+        </p:spPr>
+        <p:txBody>
+          <a:bodyPr xmlns:a="http://schemas.openxmlformats.org/drawingml/2006/main">
+            <a:noAutofit/>
+          </a:bodyPr>
+          <a:lstStyle xmlns:a="http://schemas.openxmlformats.org/drawingml/2006/main"/>
+          <a:p xmlns:a="http://schemas.openxmlformats.org/drawingml/2006/main">
+            <a:pPr>
+              <a:defRPr sz="1800" b="0">
+                <a:solidFill>
+                  <a:srgbClr val="526B70"/>
+                </a:solidFill>
+                <a:latin typeface="Arial"/>
+                <a:ea typeface="Arial"/>
+                <a:cs typeface="Arial"/>
+              </a:defRPr>
+            </a:pPr>
+            <a:r>
+              <a:rPr sz="1800" b="0">
+                <a:solidFill>
+                  <a:srgbClr val="526B70"/>
+                </a:solidFill>
+                <a:latin typeface="Arial"/>
+                <a:ea typeface="Arial"/>
+                <a:cs typeface="Arial"/>
+              </a:rPr>
+              <a:t>How much does y change for each extra 1 in x?</a:t>
+            </a:r>
+          </a:p>
+        </p:txBody>
+      </p:sp>
+      <p:sp>
+        <p:nvSpPr>
+          <p:cNvPr id="8" name="">
+            <a:extLst xmlns:a="http://schemas.openxmlformats.org/drawingml/2006/main">
+              <a:ext uri="{FF2B5EF4-FFF2-40B4-BE49-F238E27FC236}">
+                <a16:creationId xmlns:a16="http://schemas.microsoft.com/office/drawing/2014/main" id="{B08AB3E0-7DED-476F-B61C-D9371BB04A37}"/>
+              </a:ext>
+            </a:extLst>
+          </p:cNvPr>
+          <p:cNvSpPr>
+            <a:spLocks xmlns:a="http://schemas.openxmlformats.org/drawingml/2006/main" noGrp="1"/>
+          </p:cNvSpPr>
+          <p:nvPr/>
+        </p:nvSpPr>
+        <p:spPr>
+          <a:xfrm xmlns:a="http://schemas.openxmlformats.org/drawingml/2006/main">
+            <a:off x="6334125" y="3495675"/>
+            <a:ext cx="5238750" cy="495300"/>
+          </a:xfrm>
+          <a:prstGeom xmlns:a="http://schemas.openxmlformats.org/drawingml/2006/main" prst="rect">
+            <a:avLst/>
+          </a:prstGeom>
+          <a:noFill xmlns:a="http://schemas.openxmlformats.org/drawingml/2006/main"/>
+          <a:ln xmlns:a="http://schemas.openxmlformats.org/drawingml/2006/main" w="0">
+            <a:noFill/>
+          </a:ln>
+        </p:spPr>
+        <p:txBody>
+          <a:bodyPr xmlns:a="http://schemas.openxmlformats.org/drawingml/2006/main">
+            <a:noAutofit/>
+          </a:bodyPr>
+          <a:lstStyle xmlns:a="http://schemas.openxmlformats.org/drawingml/2006/main"/>
+          <a:p xmlns:a="http://schemas.openxmlformats.org/drawingml/2006/main">
+            <a:pPr>
+              <a:defRPr sz="2175" b="0">
+                <a:solidFill>
+                  <a:srgbClr val="173C43"/>
+                </a:solidFill>
+                <a:latin typeface="Heiti TC"/>
+                <a:ea typeface="Heiti TC"/>
+                <a:cs typeface="Heiti TC"/>
+              </a:defRPr>
+            </a:pPr>
+            <a:r>
+              <a:rPr sz="2175" b="0">
+                <a:solidFill>
+                  <a:srgbClr val="173C43"/>
+                </a:solidFill>
+                <a:latin typeface="Heiti TC"/>
+                <a:ea typeface="Heiti TC"/>
+                <a:cs typeface="Heiti TC"/>
+              </a:rPr>
+              <a:t>當 x = 0 時，y 是多少？</a:t>
+            </a:r>
+          </a:p>
+        </p:txBody>
+      </p:sp>
+      <p:sp>
+        <p:nvSpPr>
+          <p:cNvPr id="9" name="">
+            <a:extLst xmlns:a="http://schemas.openxmlformats.org/drawingml/2006/main">
+              <a:ext uri="{FF2B5EF4-FFF2-40B4-BE49-F238E27FC236}">
+                <a16:creationId xmlns:a16="http://schemas.microsoft.com/office/drawing/2014/main" id="{556ACD9B-9153-4575-BE67-E637C38DF33B}"/>
+              </a:ext>
+            </a:extLst>
+          </p:cNvPr>
+          <p:cNvSpPr>
+            <a:spLocks xmlns:a="http://schemas.openxmlformats.org/drawingml/2006/main" noGrp="1"/>
+          </p:cNvSpPr>
+          <p:nvPr/>
+        </p:nvSpPr>
+        <p:spPr>
+          <a:xfrm xmlns:a="http://schemas.openxmlformats.org/drawingml/2006/main">
+            <a:off x="6334125" y="3962400"/>
+            <a:ext cx="5238750" cy="457200"/>
+          </a:xfrm>
+          <a:prstGeom xmlns:a="http://schemas.openxmlformats.org/drawingml/2006/main" prst="rect">
+            <a:avLst/>
+          </a:prstGeom>
+          <a:noFill xmlns:a="http://schemas.openxmlformats.org/drawingml/2006/main"/>
+          <a:ln xmlns:a="http://schemas.openxmlformats.org/drawingml/2006/main" w="0">
+            <a:noFill/>
+          </a:ln>
+        </p:spPr>
+        <p:txBody>
+          <a:bodyPr xmlns:a="http://schemas.openxmlformats.org/drawingml/2006/main">
+            <a:noAutofit/>
+          </a:bodyPr>
+          <a:lstStyle xmlns:a="http://schemas.openxmlformats.org/drawingml/2006/main"/>
+          <a:p xmlns:a="http://schemas.openxmlformats.org/drawingml/2006/main">
+            <a:pPr>
+              <a:defRPr sz="1800" b="0">
+                <a:solidFill>
+                  <a:srgbClr val="526B70"/>
+                </a:solidFill>
+                <a:latin typeface="Arial"/>
+                <a:ea typeface="Arial"/>
+                <a:cs typeface="Arial"/>
+              </a:defRPr>
+            </a:pPr>
+            <a:r>
+              <a:rPr sz="1800" b="0">
+                <a:solidFill>
+                  <a:srgbClr val="526B70"/>
+                </a:solidFill>
+                <a:latin typeface="Arial"/>
+                <a:ea typeface="Arial"/>
+                <a:cs typeface="Arial"/>
+              </a:rPr>
+              <a:t>What is y when x = 0?</a:t>
+            </a:r>
+          </a:p>
+        </p:txBody>
+      </p:sp>
+      <p:sp>
+        <p:nvSpPr>
+          <p:cNvPr id="10" name="">
+            <a:extLst xmlns:a="http://schemas.openxmlformats.org/drawingml/2006/main">
+              <a:ext uri="{FF2B5EF4-FFF2-40B4-BE49-F238E27FC236}">
+                <a16:creationId xmlns:a16="http://schemas.microsoft.com/office/drawing/2014/main" id="{E7BEE048-755B-4A8E-9F5A-7B0E484B10AC}"/>
+              </a:ext>
+            </a:extLst>
+          </p:cNvPr>
+          <p:cNvSpPr>
+            <a:spLocks xmlns:a="http://schemas.openxmlformats.org/drawingml/2006/main" noGrp="1"/>
+          </p:cNvSpPr>
+          <p:nvPr/>
+        </p:nvSpPr>
+        <p:spPr>
+          <a:xfrm xmlns:a="http://schemas.openxmlformats.org/drawingml/2006/main">
+            <a:off x="609600" y="5248275"/>
+            <a:ext cx="10668000" cy="495300"/>
+          </a:xfrm>
+          <a:prstGeom xmlns:a="http://schemas.openxmlformats.org/drawingml/2006/main" prst="rect">
+            <a:avLst/>
+          </a:prstGeom>
+          <a:noFill xmlns:a="http://schemas.openxmlformats.org/drawingml/2006/main"/>
+          <a:ln xmlns:a="http://schemas.openxmlformats.org/drawingml/2006/main" w="0">
+            <a:noFill/>
+          </a:ln>
+        </p:spPr>
+        <p:txBody>
+          <a:bodyPr xmlns:a="http://schemas.openxmlformats.org/drawingml/2006/main">
+            <a:noAutofit/>
+          </a:bodyPr>
+          <a:lstStyle xmlns:a="http://schemas.openxmlformats.org/drawingml/2006/main"/>
+          <a:p xmlns:a="http://schemas.openxmlformats.org/drawingml/2006/main">
+            <a:pPr>
+              <a:defRPr sz="2175" b="0">
+                <a:solidFill>
+                  <a:srgbClr val="173C43"/>
+                </a:solidFill>
+                <a:latin typeface="Heiti TC"/>
+                <a:ea typeface="Heiti TC"/>
+                <a:cs typeface="Heiti TC"/>
+              </a:defRPr>
+            </a:pPr>
+            <a:r>
+              <a:rPr sz="2175" b="0">
+                <a:solidFill>
+                  <a:srgbClr val="173C43"/>
+                </a:solidFill>
+                <a:latin typeface="Heiti TC"/>
+                <a:ea typeface="Heiti TC"/>
+                <a:cs typeface="Heiti TC"/>
+              </a:rPr>
+              <a:t>水箱例子：m = 2（每分鐘 2 公升），c = 5（開始有 5 公升）</a:t>
+            </a:r>
+          </a:p>
+        </p:txBody>
+      </p:sp>
+      <p:sp>
+        <p:nvSpPr>
+          <p:cNvPr id="11" name="">
+            <a:extLst xmlns:a="http://schemas.openxmlformats.org/drawingml/2006/main">
+              <a:ext uri="{FF2B5EF4-FFF2-40B4-BE49-F238E27FC236}">
+                <a16:creationId xmlns:a16="http://schemas.microsoft.com/office/drawing/2014/main" id="{35230CED-636F-433F-B00D-EA298AF3447A}"/>
+              </a:ext>
+            </a:extLst>
+          </p:cNvPr>
+          <p:cNvSpPr>
+            <a:spLocks xmlns:a="http://schemas.openxmlformats.org/drawingml/2006/main" noGrp="1"/>
+          </p:cNvSpPr>
+          <p:nvPr/>
+        </p:nvSpPr>
+        <p:spPr>
+          <a:xfrm xmlns:a="http://schemas.openxmlformats.org/drawingml/2006/main">
+            <a:off x="609600" y="5715000"/>
+            <a:ext cx="10668000" cy="457200"/>
+          </a:xfrm>
+          <a:prstGeom xmlns:a="http://schemas.openxmlformats.org/drawingml/2006/main" prst="rect">
+            <a:avLst/>
+          </a:prstGeom>
+          <a:noFill xmlns:a="http://schemas.openxmlformats.org/drawingml/2006/main"/>
+          <a:ln xmlns:a="http://schemas.openxmlformats.org/drawingml/2006/main" w="0">
+            <a:noFill/>
+          </a:ln>
+        </p:spPr>
+        <p:txBody>
+          <a:bodyPr xmlns:a="http://schemas.openxmlformats.org/drawingml/2006/main">
+            <a:noAutofit/>
+          </a:bodyPr>
+          <a:lstStyle xmlns:a="http://schemas.openxmlformats.org/drawingml/2006/main"/>
+          <a:p xmlns:a="http://schemas.openxmlformats.org/drawingml/2006/main">
+            <a:pPr>
+              <a:defRPr sz="1800" b="0">
+                <a:solidFill>
+                  <a:srgbClr val="526B70"/>
+                </a:solidFill>
+                <a:latin typeface="Arial"/>
+                <a:ea typeface="Arial"/>
+                <a:cs typeface="Arial"/>
+              </a:defRPr>
+            </a:pPr>
+            <a:r>
+              <a:rPr sz="1800" b="0">
+                <a:solidFill>
+                  <a:srgbClr val="526B70"/>
+                </a:solidFill>
+                <a:latin typeface="Arial"/>
+                <a:ea typeface="Arial"/>
+                <a:cs typeface="Arial"/>
+              </a:rPr>
+              <a:t>For the tank: m = 2 litres per minute; c = 5 litres at the start</a:t>
+            </a:r>
+          </a:p>
+        </p:txBody>
+      </p:sp>
+      <p:sp>
+        <p:nvSpPr>
           <p:cNvPr id="12" name="">
             <a:extLst xmlns:a="http://schemas.openxmlformats.org/drawingml/2006/main">
               <a:ext uri="{FF2B5EF4-FFF2-40B4-BE49-F238E27FC236}">
-                <a16:creationId xmlns:a16="http://schemas.microsoft.com/office/drawing/2014/main" id="{635B1CF3-2C80-41DB-A63F-8447A24854F2}"/>
-              </a:ext>
-            </a:extLst>
-          </p:cNvPr>
-          <p:cNvSpPr>
-            <a:spLocks xmlns:a="http://schemas.openxmlformats.org/drawingml/2006/main" noGrp="1"/>
-          </p:cNvSpPr>
-          <p:nvPr/>
-        </p:nvSpPr>
-        <p:spPr>
-          <a:xfrm xmlns:a="http://schemas.openxmlformats.org/drawingml/2006/main">
-            <a:off x="609600" y="400050"/>
-            <a:ext cx="10972800" cy="495300"/>
-          </a:xfrm>
-          <a:prstGeom xmlns:a="http://schemas.openxmlformats.org/drawingml/2006/main" prst="rect">
-            <a:avLst/>
-          </a:prstGeom>
-          <a:noFill xmlns:a="http://schemas.openxmlformats.org/drawingml/2006/main"/>
-          <a:ln xmlns:a="http://schemas.openxmlformats.org/drawingml/2006/main" w="0">
-            <a:noFill/>
-          </a:ln>
-        </p:spPr>
-        <p:txBody>
-          <a:bodyPr xmlns:a="http://schemas.openxmlformats.org/drawingml/2006/main">
-            <a:noAutofit/>
-          </a:bodyPr>
-          <a:lstStyle xmlns:a="http://schemas.openxmlformats.org/drawingml/2006/main"/>
-          <a:p xmlns:a="http://schemas.openxmlformats.org/drawingml/2006/main">
-            <a:pPr>
-              <a:defRPr sz="3300" b="0">
-                <a:solidFill>
-                  <a:srgbClr val="173C43"/>
-                </a:solidFill>
-                <a:latin typeface="Heiti TC"/>
-                <a:ea typeface="Heiti TC"/>
-                <a:cs typeface="Heiti TC"/>
-              </a:defRPr>
-            </a:pPr>
-            <a:r>
-              <a:rPr sz="3300" b="0">
-                <a:solidFill>
-                  <a:srgbClr val="173C43"/>
-                </a:solidFill>
-                <a:latin typeface="Heiti TC"/>
-                <a:ea typeface="Heiti TC"/>
-                <a:cs typeface="Heiti TC"/>
-              </a:rPr>
-              <a:t>m：每增加 1 單位的變化</a:t>
-            </a:r>
-          </a:p>
-        </p:txBody>
-      </p:sp>
-      <p:sp>
-        <p:nvSpPr>
-          <p:cNvPr id="2" name="">
-            <a:extLst xmlns:a="http://schemas.openxmlformats.org/drawingml/2006/main">
-              <a:ext uri="{FF2B5EF4-FFF2-40B4-BE49-F238E27FC236}">
-                <a16:creationId xmlns:a16="http://schemas.microsoft.com/office/drawing/2014/main" id="{422EB2DD-E5C8-4E71-8425-CE0F21082483}"/>
-              </a:ext>
-            </a:extLst>
-          </p:cNvPr>
-          <p:cNvSpPr>
-            <a:spLocks xmlns:a="http://schemas.openxmlformats.org/drawingml/2006/main" noGrp="1"/>
-          </p:cNvSpPr>
-          <p:nvPr/>
-        </p:nvSpPr>
-        <p:spPr>
-          <a:xfrm xmlns:a="http://schemas.openxmlformats.org/drawingml/2006/main">
-            <a:off x="609600" y="866775"/>
-            <a:ext cx="10972800" cy="457200"/>
-          </a:xfrm>
-          <a:prstGeom xmlns:a="http://schemas.openxmlformats.org/drawingml/2006/main" prst="rect">
-            <a:avLst/>
-          </a:prstGeom>
-          <a:noFill xmlns:a="http://schemas.openxmlformats.org/drawingml/2006/main"/>
-          <a:ln xmlns:a="http://schemas.openxmlformats.org/drawingml/2006/main" w="0">
-            <a:noFill/>
-          </a:ln>
-        </p:spPr>
-        <p:txBody>
-          <a:bodyPr xmlns:a="http://schemas.openxmlformats.org/drawingml/2006/main">
-            <a:noAutofit/>
-          </a:bodyPr>
-          <a:lstStyle xmlns:a="http://schemas.openxmlformats.org/drawingml/2006/main"/>
-          <a:p xmlns:a="http://schemas.openxmlformats.org/drawingml/2006/main">
-            <a:pPr>
-              <a:defRPr sz="2700" b="0">
-                <a:solidFill>
-                  <a:srgbClr val="526B70"/>
-                </a:solidFill>
-                <a:latin typeface="Arial"/>
-                <a:ea typeface="Arial"/>
-                <a:cs typeface="Arial"/>
-              </a:defRPr>
-            </a:pPr>
-            <a:r>
-              <a:rPr sz="2700" b="0">
-                <a:solidFill>
-                  <a:srgbClr val="526B70"/>
-                </a:solidFill>
-                <a:latin typeface="Arial"/>
-                <a:ea typeface="Arial"/>
-                <a:cs typeface="Arial"/>
-              </a:rPr>
-              <a:t>m: the change for each extra unit</a:t>
-            </a:r>
-          </a:p>
-        </p:txBody>
-      </p:sp>
-      <p:sp>
-        <p:nvSpPr>
-          <p:cNvPr id="3" name="">
-            <a:extLst xmlns:a="http://schemas.openxmlformats.org/drawingml/2006/main">
-              <a:ext uri="{FF2B5EF4-FFF2-40B4-BE49-F238E27FC236}">
-                <a16:creationId xmlns:a16="http://schemas.microsoft.com/office/drawing/2014/main" id="{BDA35DE1-39AF-4E5F-94FE-0DB6BC1D9A73}"/>
+                <a16:creationId xmlns:a16="http://schemas.microsoft.com/office/drawing/2014/main" id="{3F264818-5DBD-4ABC-9B0B-B4F51A25E7CA}"/>
               </a:ext>
             </a:extLst>
           </p:cNvPr>
@@ -12068,425 +12597,10 @@
           </a:p>
         </p:txBody>
       </p:sp>
-      <p:sp>
-        <p:nvSpPr>
-          <p:cNvPr id="4" name="">
-            <a:extLst xmlns:a="http://schemas.openxmlformats.org/drawingml/2006/main">
-              <a:ext uri="{FF2B5EF4-FFF2-40B4-BE49-F238E27FC236}">
-                <a16:creationId xmlns:a16="http://schemas.microsoft.com/office/drawing/2014/main" id="{908D5F8C-0F0E-4429-A7F3-7FFB2A618D7F}"/>
-              </a:ext>
-            </a:extLst>
-          </p:cNvPr>
-          <p:cNvSpPr>
-            <a:spLocks xmlns:a="http://schemas.openxmlformats.org/drawingml/2006/main" noGrp="1"/>
-          </p:cNvSpPr>
-          <p:nvPr/>
-        </p:nvSpPr>
-        <p:spPr>
-          <a:xfrm xmlns:a="http://schemas.openxmlformats.org/drawingml/2006/main">
-            <a:off x="609600" y="1647825"/>
-            <a:ext cx="4857750" cy="495300"/>
-          </a:xfrm>
-          <a:prstGeom xmlns:a="http://schemas.openxmlformats.org/drawingml/2006/main" prst="rect">
-            <a:avLst/>
-          </a:prstGeom>
-          <a:noFill xmlns:a="http://schemas.openxmlformats.org/drawingml/2006/main"/>
-          <a:ln xmlns:a="http://schemas.openxmlformats.org/drawingml/2006/main" w="0">
-            <a:noFill/>
-          </a:ln>
-        </p:spPr>
-        <p:txBody>
-          <a:bodyPr xmlns:a="http://schemas.openxmlformats.org/drawingml/2006/main">
-            <a:noAutofit/>
-          </a:bodyPr>
-          <a:lstStyle xmlns:a="http://schemas.openxmlformats.org/drawingml/2006/main"/>
-          <a:p xmlns:a="http://schemas.openxmlformats.org/drawingml/2006/main">
-            <a:pPr>
-              <a:defRPr sz="2400" b="0">
-                <a:solidFill>
-                  <a:srgbClr val="173C43"/>
-                </a:solidFill>
-                <a:latin typeface="Heiti TC"/>
-                <a:ea typeface="Heiti TC"/>
-                <a:cs typeface="Heiti TC"/>
-              </a:defRPr>
-            </a:pPr>
-            <a:r>
-              <a:rPr sz="2400" b="0">
-                <a:solidFill>
-                  <a:srgbClr val="173C43"/>
-                </a:solidFill>
-                <a:latin typeface="Heiti TC"/>
-                <a:ea typeface="Heiti TC"/>
-                <a:cs typeface="Heiti TC"/>
-              </a:rPr>
-              <a:t>每分鐘加入 2 公升水</a:t>
-            </a:r>
-          </a:p>
-        </p:txBody>
-      </p:sp>
-      <p:sp>
-        <p:nvSpPr>
-          <p:cNvPr id="5" name="">
-            <a:extLst xmlns:a="http://schemas.openxmlformats.org/drawingml/2006/main">
-              <a:ext uri="{FF2B5EF4-FFF2-40B4-BE49-F238E27FC236}">
-                <a16:creationId xmlns:a16="http://schemas.microsoft.com/office/drawing/2014/main" id="{8D8C6688-024E-465A-8449-51825DCB95D4}"/>
-              </a:ext>
-            </a:extLst>
-          </p:cNvPr>
-          <p:cNvSpPr>
-            <a:spLocks xmlns:a="http://schemas.openxmlformats.org/drawingml/2006/main" noGrp="1"/>
-          </p:cNvSpPr>
-          <p:nvPr/>
-        </p:nvSpPr>
-        <p:spPr>
-          <a:xfrm xmlns:a="http://schemas.openxmlformats.org/drawingml/2006/main">
-            <a:off x="609600" y="2114550"/>
-            <a:ext cx="4857750" cy="457200"/>
-          </a:xfrm>
-          <a:prstGeom xmlns:a="http://schemas.openxmlformats.org/drawingml/2006/main" prst="rect">
-            <a:avLst/>
-          </a:prstGeom>
-          <a:noFill xmlns:a="http://schemas.openxmlformats.org/drawingml/2006/main"/>
-          <a:ln xmlns:a="http://schemas.openxmlformats.org/drawingml/2006/main" w="0">
-            <a:noFill/>
-          </a:ln>
-        </p:spPr>
-        <p:txBody>
-          <a:bodyPr xmlns:a="http://schemas.openxmlformats.org/drawingml/2006/main">
-            <a:noAutofit/>
-          </a:bodyPr>
-          <a:lstStyle xmlns:a="http://schemas.openxmlformats.org/drawingml/2006/main"/>
-          <a:p xmlns:a="http://schemas.openxmlformats.org/drawingml/2006/main">
-            <a:pPr>
-              <a:defRPr sz="1800" b="0">
-                <a:solidFill>
-                  <a:srgbClr val="526B70"/>
-                </a:solidFill>
-                <a:latin typeface="Arial"/>
-                <a:ea typeface="Arial"/>
-                <a:cs typeface="Arial"/>
-              </a:defRPr>
-            </a:pPr>
-            <a:r>
-              <a:rPr sz="1800" b="0">
-                <a:solidFill>
-                  <a:srgbClr val="526B70"/>
-                </a:solidFill>
-                <a:latin typeface="Arial"/>
-                <a:ea typeface="Arial"/>
-                <a:cs typeface="Arial"/>
-              </a:rPr>
-              <a:t>We add 2 litres each minute</a:t>
-            </a:r>
-          </a:p>
-        </p:txBody>
-      </p:sp>
-      <p:sp>
-        <p:nvSpPr>
-          <p:cNvPr id="6" name="">
-            <a:extLst xmlns:a="http://schemas.openxmlformats.org/drawingml/2006/main">
-              <a:ext uri="{FF2B5EF4-FFF2-40B4-BE49-F238E27FC236}">
-                <a16:creationId xmlns:a16="http://schemas.microsoft.com/office/drawing/2014/main" id="{2174D7A2-48EF-48EE-8033-1DE117A8B084}"/>
-              </a:ext>
-            </a:extLst>
-          </p:cNvPr>
-          <p:cNvSpPr>
-            <a:spLocks xmlns:a="http://schemas.openxmlformats.org/drawingml/2006/main" noGrp="1"/>
-          </p:cNvSpPr>
-          <p:nvPr/>
-        </p:nvSpPr>
-        <p:spPr>
-          <a:xfrm xmlns:a="http://schemas.openxmlformats.org/drawingml/2006/main">
-            <a:off x="609600" y="2771775"/>
-            <a:ext cx="4667250" cy="619125"/>
-          </a:xfrm>
-          <a:prstGeom xmlns:a="http://schemas.openxmlformats.org/drawingml/2006/main" prst="rect">
-            <a:avLst/>
-          </a:prstGeom>
-          <a:noFill xmlns:a="http://schemas.openxmlformats.org/drawingml/2006/main"/>
-          <a:ln xmlns:a="http://schemas.openxmlformats.org/drawingml/2006/main" w="0">
-            <a:noFill/>
-          </a:ln>
-        </p:spPr>
-        <p:txBody>
-          <a:bodyPr xmlns:a="http://schemas.openxmlformats.org/drawingml/2006/main">
-            <a:noAutofit/>
-          </a:bodyPr>
-          <a:lstStyle xmlns:a="http://schemas.openxmlformats.org/drawingml/2006/main"/>
-          <a:p xmlns:a="http://schemas.openxmlformats.org/drawingml/2006/main">
-            <a:pPr>
-              <a:defRPr sz="3900" b="1">
-                <a:solidFill>
-                  <a:srgbClr val="086C61"/>
-                </a:solidFill>
-                <a:latin typeface="Arial"/>
-                <a:ea typeface="Arial"/>
-                <a:cs typeface="Arial"/>
-              </a:defRPr>
-            </a:pPr>
-            <a:r>
-              <a:rPr sz="3900" b="1">
-                <a:solidFill>
-                  <a:srgbClr val="086C61"/>
-                </a:solidFill>
-                <a:latin typeface="Arial"/>
-                <a:ea typeface="Arial"/>
-                <a:cs typeface="Arial"/>
-              </a:rPr>
-              <a:t>y = 2x + 5</a:t>
-            </a:r>
-          </a:p>
-        </p:txBody>
-      </p:sp>
-      <p:sp>
-        <p:nvSpPr>
-          <p:cNvPr id="7" name="">
-            <a:extLst xmlns:a="http://schemas.openxmlformats.org/drawingml/2006/main">
-              <a:ext uri="{FF2B5EF4-FFF2-40B4-BE49-F238E27FC236}">
-                <a16:creationId xmlns:a16="http://schemas.microsoft.com/office/drawing/2014/main" id="{686FBA57-0CD1-4CCD-914D-4781ECEC102A}"/>
-              </a:ext>
-            </a:extLst>
-          </p:cNvPr>
-          <p:cNvSpPr>
-            <a:spLocks xmlns:a="http://schemas.openxmlformats.org/drawingml/2006/main" noGrp="1"/>
-          </p:cNvSpPr>
-          <p:nvPr/>
-        </p:nvSpPr>
-        <p:spPr>
-          <a:xfrm xmlns:a="http://schemas.openxmlformats.org/drawingml/2006/main">
-            <a:off x="609600" y="3676650"/>
-            <a:ext cx="4857750" cy="495300"/>
-          </a:xfrm>
-          <a:prstGeom xmlns:a="http://schemas.openxmlformats.org/drawingml/2006/main" prst="rect">
-            <a:avLst/>
-          </a:prstGeom>
-          <a:noFill xmlns:a="http://schemas.openxmlformats.org/drawingml/2006/main"/>
-          <a:ln xmlns:a="http://schemas.openxmlformats.org/drawingml/2006/main" w="0">
-            <a:noFill/>
-          </a:ln>
-        </p:spPr>
-        <p:txBody>
-          <a:bodyPr xmlns:a="http://schemas.openxmlformats.org/drawingml/2006/main">
-            <a:noAutofit/>
-          </a:bodyPr>
-          <a:lstStyle xmlns:a="http://schemas.openxmlformats.org/drawingml/2006/main"/>
-          <a:p xmlns:a="http://schemas.openxmlformats.org/drawingml/2006/main">
-            <a:pPr>
-              <a:defRPr sz="2100" b="0">
-                <a:solidFill>
-                  <a:srgbClr val="173C43"/>
-                </a:solidFill>
-                <a:latin typeface="Heiti TC"/>
-                <a:ea typeface="Heiti TC"/>
-                <a:cs typeface="Heiti TC"/>
-              </a:defRPr>
-            </a:pPr>
-            <a:r>
-              <a:rPr sz="2100" b="0">
-                <a:solidFill>
-                  <a:srgbClr val="173C43"/>
-                </a:solidFill>
-                <a:latin typeface="Heiti TC"/>
-                <a:ea typeface="Heiti TC"/>
-                <a:cs typeface="Heiti TC"/>
-              </a:rPr>
-              <a:t>x 增加 1，y 增加 2</a:t>
-            </a:r>
-          </a:p>
-        </p:txBody>
-      </p:sp>
-      <p:sp>
-        <p:nvSpPr>
-          <p:cNvPr id="8" name="">
-            <a:extLst xmlns:a="http://schemas.openxmlformats.org/drawingml/2006/main">
-              <a:ext uri="{FF2B5EF4-FFF2-40B4-BE49-F238E27FC236}">
-                <a16:creationId xmlns:a16="http://schemas.microsoft.com/office/drawing/2014/main" id="{F10965B6-931F-4B5D-AC07-0E814F8E05CB}"/>
-              </a:ext>
-            </a:extLst>
-          </p:cNvPr>
-          <p:cNvSpPr>
-            <a:spLocks xmlns:a="http://schemas.openxmlformats.org/drawingml/2006/main" noGrp="1"/>
-          </p:cNvSpPr>
-          <p:nvPr/>
-        </p:nvSpPr>
-        <p:spPr>
-          <a:xfrm xmlns:a="http://schemas.openxmlformats.org/drawingml/2006/main">
-            <a:off x="609600" y="4143375"/>
-            <a:ext cx="4857750" cy="457200"/>
-          </a:xfrm>
-          <a:prstGeom xmlns:a="http://schemas.openxmlformats.org/drawingml/2006/main" prst="rect">
-            <a:avLst/>
-          </a:prstGeom>
-          <a:noFill xmlns:a="http://schemas.openxmlformats.org/drawingml/2006/main"/>
-          <a:ln xmlns:a="http://schemas.openxmlformats.org/drawingml/2006/main" w="0">
-            <a:noFill/>
-          </a:ln>
-        </p:spPr>
-        <p:txBody>
-          <a:bodyPr xmlns:a="http://schemas.openxmlformats.org/drawingml/2006/main">
-            <a:noAutofit/>
-          </a:bodyPr>
-          <a:lstStyle xmlns:a="http://schemas.openxmlformats.org/drawingml/2006/main"/>
-          <a:p xmlns:a="http://schemas.openxmlformats.org/drawingml/2006/main">
-            <a:pPr>
-              <a:defRPr sz="1800" b="0">
-                <a:solidFill>
-                  <a:srgbClr val="526B70"/>
-                </a:solidFill>
-                <a:latin typeface="Arial"/>
-                <a:ea typeface="Arial"/>
-                <a:cs typeface="Arial"/>
-              </a:defRPr>
-            </a:pPr>
-            <a:r>
-              <a:rPr sz="1800" b="0">
-                <a:solidFill>
-                  <a:srgbClr val="526B70"/>
-                </a:solidFill>
-                <a:latin typeface="Arial"/>
-                <a:ea typeface="Arial"/>
-                <a:cs typeface="Arial"/>
-              </a:rPr>
-              <a:t>When x increases by 1, y increases by 2</a:t>
-            </a:r>
-          </a:p>
-        </p:txBody>
-      </p:sp>
-      <p:sp>
-        <p:nvSpPr>
-          <p:cNvPr id="9" name="">
-            <a:extLst xmlns:a="http://schemas.openxmlformats.org/drawingml/2006/main">
-              <a:ext uri="{FF2B5EF4-FFF2-40B4-BE49-F238E27FC236}">
-                <a16:creationId xmlns:a16="http://schemas.microsoft.com/office/drawing/2014/main" id="{50C79DDC-B40C-4011-B626-DEC4D38A7AE5}"/>
-              </a:ext>
-            </a:extLst>
-          </p:cNvPr>
-          <p:cNvSpPr>
-            <a:spLocks xmlns:a="http://schemas.openxmlformats.org/drawingml/2006/main" noGrp="1"/>
-          </p:cNvSpPr>
-          <p:nvPr/>
-        </p:nvSpPr>
-        <p:spPr>
-          <a:xfrm xmlns:a="http://schemas.openxmlformats.org/drawingml/2006/main">
-            <a:off x="609600" y="4743450"/>
-            <a:ext cx="4857750" cy="495300"/>
-          </a:xfrm>
-          <a:prstGeom xmlns:a="http://schemas.openxmlformats.org/drawingml/2006/main" prst="rect">
-            <a:avLst/>
-          </a:prstGeom>
-          <a:noFill xmlns:a="http://schemas.openxmlformats.org/drawingml/2006/main"/>
-          <a:ln xmlns:a="http://schemas.openxmlformats.org/drawingml/2006/main" w="0">
-            <a:noFill/>
-          </a:ln>
-        </p:spPr>
-        <p:txBody>
-          <a:bodyPr xmlns:a="http://schemas.openxmlformats.org/drawingml/2006/main">
-            <a:noAutofit/>
-          </a:bodyPr>
-          <a:lstStyle xmlns:a="http://schemas.openxmlformats.org/drawingml/2006/main"/>
-          <a:p xmlns:a="http://schemas.openxmlformats.org/drawingml/2006/main">
-            <a:pPr>
-              <a:defRPr sz="2250" b="0">
-                <a:solidFill>
-                  <a:srgbClr val="173C43"/>
-                </a:solidFill>
-                <a:latin typeface="Heiti TC"/>
-                <a:ea typeface="Heiti TC"/>
-                <a:cs typeface="Heiti TC"/>
-              </a:defRPr>
-            </a:pPr>
-            <a:r>
-              <a:rPr sz="2250" b="0">
-                <a:solidFill>
-                  <a:srgbClr val="173C43"/>
-                </a:solidFill>
-                <a:latin typeface="Heiti TC"/>
-                <a:ea typeface="Heiti TC"/>
-                <a:cs typeface="Heiti TC"/>
-              </a:rPr>
-              <a:t>m = 2 公升／分鐘</a:t>
-            </a:r>
-          </a:p>
-        </p:txBody>
-      </p:sp>
-      <p:sp>
-        <p:nvSpPr>
-          <p:cNvPr id="10" name="">
-            <a:extLst xmlns:a="http://schemas.openxmlformats.org/drawingml/2006/main">
-              <a:ext uri="{FF2B5EF4-FFF2-40B4-BE49-F238E27FC236}">
-                <a16:creationId xmlns:a16="http://schemas.microsoft.com/office/drawing/2014/main" id="{D9418CC4-2F29-4112-BD26-3F6602F367DA}"/>
-              </a:ext>
-            </a:extLst>
-          </p:cNvPr>
-          <p:cNvSpPr>
-            <a:spLocks xmlns:a="http://schemas.openxmlformats.org/drawingml/2006/main" noGrp="1"/>
-          </p:cNvSpPr>
-          <p:nvPr/>
-        </p:nvSpPr>
-        <p:spPr>
-          <a:xfrm xmlns:a="http://schemas.openxmlformats.org/drawingml/2006/main">
-            <a:off x="609600" y="5210175"/>
-            <a:ext cx="4857750" cy="457200"/>
-          </a:xfrm>
-          <a:prstGeom xmlns:a="http://schemas.openxmlformats.org/drawingml/2006/main" prst="rect">
-            <a:avLst/>
-          </a:prstGeom>
-          <a:noFill xmlns:a="http://schemas.openxmlformats.org/drawingml/2006/main"/>
-          <a:ln xmlns:a="http://schemas.openxmlformats.org/drawingml/2006/main" w="0">
-            <a:noFill/>
-          </a:ln>
-        </p:spPr>
-        <p:txBody>
-          <a:bodyPr xmlns:a="http://schemas.openxmlformats.org/drawingml/2006/main">
-            <a:noAutofit/>
-          </a:bodyPr>
-          <a:lstStyle xmlns:a="http://schemas.openxmlformats.org/drawingml/2006/main"/>
-          <a:p xmlns:a="http://schemas.openxmlformats.org/drawingml/2006/main">
-            <a:pPr>
-              <a:defRPr sz="1800" b="0">
-                <a:solidFill>
-                  <a:srgbClr val="526B70"/>
-                </a:solidFill>
-                <a:latin typeface="Arial"/>
-                <a:ea typeface="Arial"/>
-                <a:cs typeface="Arial"/>
-              </a:defRPr>
-            </a:pPr>
-            <a:r>
-              <a:rPr sz="1800" b="0">
-                <a:solidFill>
-                  <a:srgbClr val="526B70"/>
-                </a:solidFill>
-                <a:latin typeface="Arial"/>
-                <a:ea typeface="Arial"/>
-                <a:cs typeface="Arial"/>
-              </a:rPr>
-              <a:t>m = 2 litres per minute</a:t>
-            </a:r>
-          </a:p>
-        </p:txBody>
-      </p:sp>
-      <p:graphicFrame>
-        <p:nvGraphicFramePr>
-          <p:cNvPr id="22" name="Chart"/>
-          <p:cNvGraphicFramePr/>
-          <p:nvPr/>
-        </p:nvGraphicFramePr>
-        <p:xfrm>
-          <a:off xmlns:a="http://schemas.openxmlformats.org/drawingml/2006/main" x="5810250" y="1590675"/>
-          <a:ext xmlns:a="http://schemas.openxmlformats.org/drawingml/2006/main" cx="5810250" cy="4381500"/>
-        </p:xfrm>
-        <a:graphic xmlns:a="http://schemas.openxmlformats.org/drawingml/2006/main">
-          <a:graphicData uri="http://schemas.openxmlformats.org/drawingml/2006/chart">
-            <c:chart xmlns:r="http://schemas.openxmlformats.org/officeDocument/2006/relationships" xmlns:c="http://schemas.openxmlformats.org/drawingml/2006/chart" r:id="R86839fc698a84edf"/>
-          </a:graphicData>
-        </a:graphic>
-      </p:graphicFrame>
     </p:spTree>
     <p:extLst>
       <p:ext uri="{BB962C8B-B14F-4D97-AF65-F5344CB8AC3E}">
-        <p14:creationId xmlns:p14="http://schemas.microsoft.com/office/powerpoint/2010/main" val="1377124455"/>
+        <p14:creationId xmlns:p14="http://schemas.microsoft.com/office/powerpoint/2010/main" val="801705192"/>
       </p:ext>
     </p:extLst>
   </p:cSld>
@@ -12517,7 +12631,7 @@
           <p:cNvPr id="16" name="">
             <a:extLst xmlns:a="http://schemas.openxmlformats.org/drawingml/2006/main">
               <a:ext uri="{FF2B5EF4-FFF2-40B4-BE49-F238E27FC236}">
-                <a16:creationId xmlns:a16="http://schemas.microsoft.com/office/drawing/2014/main" id="{32F26C6D-43FA-402E-BE99-7E61931682C3}"/>
+                <a16:creationId xmlns:a16="http://schemas.microsoft.com/office/drawing/2014/main" id="{D850A3F7-6D05-4D8C-BC80-4EE8B647C3C5}"/>
               </a:ext>
             </a:extLst>
           </p:cNvPr>
@@ -12574,7 +12688,7 @@
           <p:cNvPr id="2" name="">
             <a:extLst xmlns:a="http://schemas.openxmlformats.org/drawingml/2006/main">
               <a:ext uri="{FF2B5EF4-FFF2-40B4-BE49-F238E27FC236}">
-                <a16:creationId xmlns:a16="http://schemas.microsoft.com/office/drawing/2014/main" id="{5537C02B-B10D-4EEE-BFDD-92D3B8C19F93}"/>
+                <a16:creationId xmlns:a16="http://schemas.microsoft.com/office/drawing/2014/main" id="{4699AF36-9782-41F1-99B5-9144794F96F4}"/>
               </a:ext>
             </a:extLst>
           </p:cNvPr>
@@ -12631,7 +12745,7 @@
           <p:cNvPr id="3" name="">
             <a:extLst xmlns:a="http://schemas.openxmlformats.org/drawingml/2006/main">
               <a:ext uri="{FF2B5EF4-FFF2-40B4-BE49-F238E27FC236}">
-                <a16:creationId xmlns:a16="http://schemas.microsoft.com/office/drawing/2014/main" id="{AC188D7D-2FEB-4520-A910-1B8D49FE291B}"/>
+                <a16:creationId xmlns:a16="http://schemas.microsoft.com/office/drawing/2014/main" id="{74A6E0A6-F99A-45B9-A07E-E5D9AB051E68}"/>
               </a:ext>
             </a:extLst>
           </p:cNvPr>
@@ -12688,7 +12802,7 @@
           <p:cNvPr id="4" name="">
             <a:extLst xmlns:a="http://schemas.openxmlformats.org/drawingml/2006/main">
               <a:ext uri="{FF2B5EF4-FFF2-40B4-BE49-F238E27FC236}">
-                <a16:creationId xmlns:a16="http://schemas.microsoft.com/office/drawing/2014/main" id="{C0798F54-290E-483D-BEF7-03F068941BB9}"/>
+                <a16:creationId xmlns:a16="http://schemas.microsoft.com/office/drawing/2014/main" id="{C91C177E-0064-4325-A8BF-EB51B457BB78}"/>
               </a:ext>
             </a:extLst>
           </p:cNvPr>
@@ -12752,7 +12866,7 @@
         </p:xfrm>
         <a:graphic xmlns:a="http://schemas.openxmlformats.org/drawingml/2006/main">
           <a:graphicData uri="http://schemas.openxmlformats.org/drawingml/2006/chart">
-            <c:chart xmlns:r="http://schemas.openxmlformats.org/officeDocument/2006/relationships" xmlns:c="http://schemas.openxmlformats.org/drawingml/2006/chart" r:id="R56ab84bdd3ca4499"/>
+            <c:chart xmlns:r="http://schemas.openxmlformats.org/officeDocument/2006/relationships" xmlns:c="http://schemas.openxmlformats.org/drawingml/2006/chart" r:id="R32751a10ccfc441f"/>
           </a:graphicData>
         </a:graphic>
       </p:graphicFrame>
@@ -12761,7 +12875,7 @@
           <p:cNvPr id="6" name="">
             <a:extLst xmlns:a="http://schemas.openxmlformats.org/drawingml/2006/main">
               <a:ext uri="{FF2B5EF4-FFF2-40B4-BE49-F238E27FC236}">
-                <a16:creationId xmlns:a16="http://schemas.microsoft.com/office/drawing/2014/main" id="{E28D7460-C511-4D33-A97B-BD94058F4901}"/>
+                <a16:creationId xmlns:a16="http://schemas.microsoft.com/office/drawing/2014/main" id="{ABBCFCC0-B704-494B-8428-99085AD1478A}"/>
               </a:ext>
             </a:extLst>
           </p:cNvPr>
@@ -12818,7 +12932,7 @@
           <p:cNvPr id="7" name="">
             <a:extLst xmlns:a="http://schemas.openxmlformats.org/drawingml/2006/main">
               <a:ext uri="{FF2B5EF4-FFF2-40B4-BE49-F238E27FC236}">
-                <a16:creationId xmlns:a16="http://schemas.microsoft.com/office/drawing/2014/main" id="{5F036775-0142-41FF-9614-52BD82BBBC0F}"/>
+                <a16:creationId xmlns:a16="http://schemas.microsoft.com/office/drawing/2014/main" id="{C77D16D3-F957-4CDC-808F-05F69A7C77BC}"/>
               </a:ext>
             </a:extLst>
           </p:cNvPr>
@@ -12875,7 +12989,7 @@
           <p:cNvPr id="8" name="">
             <a:extLst xmlns:a="http://schemas.openxmlformats.org/drawingml/2006/main">
               <a:ext uri="{FF2B5EF4-FFF2-40B4-BE49-F238E27FC236}">
-                <a16:creationId xmlns:a16="http://schemas.microsoft.com/office/drawing/2014/main" id="{E24AEB3C-0134-43D1-A525-048AC05048D3}"/>
+                <a16:creationId xmlns:a16="http://schemas.microsoft.com/office/drawing/2014/main" id="{3440E882-A5DC-4AEE-8FBA-4489B9C7F101}"/>
               </a:ext>
             </a:extLst>
           </p:cNvPr>
@@ -12939,7 +13053,7 @@
         </p:xfrm>
         <a:graphic xmlns:a="http://schemas.openxmlformats.org/drawingml/2006/main">
           <a:graphicData uri="http://schemas.openxmlformats.org/drawingml/2006/chart">
-            <c:chart xmlns:r="http://schemas.openxmlformats.org/officeDocument/2006/relationships" xmlns:c="http://schemas.openxmlformats.org/drawingml/2006/chart" r:id="Rdb3d18ff511549d5"/>
+            <c:chart xmlns:r="http://schemas.openxmlformats.org/officeDocument/2006/relationships" xmlns:c="http://schemas.openxmlformats.org/drawingml/2006/chart" r:id="R56f18a40063c42a9"/>
           </a:graphicData>
         </a:graphic>
       </p:graphicFrame>
@@ -12948,7 +13062,7 @@
           <p:cNvPr id="10" name="">
             <a:extLst xmlns:a="http://schemas.openxmlformats.org/drawingml/2006/main">
               <a:ext uri="{FF2B5EF4-FFF2-40B4-BE49-F238E27FC236}">
-                <a16:creationId xmlns:a16="http://schemas.microsoft.com/office/drawing/2014/main" id="{D4F75402-90D6-4E2E-BE53-384F17015963}"/>
+                <a16:creationId xmlns:a16="http://schemas.microsoft.com/office/drawing/2014/main" id="{08680DF0-4672-4EA0-A4D6-C6A989947FDA}"/>
               </a:ext>
             </a:extLst>
           </p:cNvPr>
@@ -13005,7 +13119,7 @@
           <p:cNvPr id="11" name="">
             <a:extLst xmlns:a="http://schemas.openxmlformats.org/drawingml/2006/main">
               <a:ext uri="{FF2B5EF4-FFF2-40B4-BE49-F238E27FC236}">
-                <a16:creationId xmlns:a16="http://schemas.microsoft.com/office/drawing/2014/main" id="{58D99703-8BAB-44E9-AF85-3FBA3CB35074}"/>
+                <a16:creationId xmlns:a16="http://schemas.microsoft.com/office/drawing/2014/main" id="{9818782F-0A20-48CA-B197-14DCD6B2123C}"/>
               </a:ext>
             </a:extLst>
           </p:cNvPr>
@@ -13062,7 +13176,7 @@
           <p:cNvPr id="12" name="">
             <a:extLst xmlns:a="http://schemas.openxmlformats.org/drawingml/2006/main">
               <a:ext uri="{FF2B5EF4-FFF2-40B4-BE49-F238E27FC236}">
-                <a16:creationId xmlns:a16="http://schemas.microsoft.com/office/drawing/2014/main" id="{4EBD3475-DBA1-4200-83D0-AA518416CC05}"/>
+                <a16:creationId xmlns:a16="http://schemas.microsoft.com/office/drawing/2014/main" id="{82256DD7-FA69-49A3-B8FE-BEBDD771BA35}"/>
               </a:ext>
             </a:extLst>
           </p:cNvPr>
@@ -13126,7 +13240,7 @@
         </p:xfrm>
         <a:graphic xmlns:a="http://schemas.openxmlformats.org/drawingml/2006/main">
           <a:graphicData uri="http://schemas.openxmlformats.org/drawingml/2006/chart">
-            <c:chart xmlns:r="http://schemas.openxmlformats.org/officeDocument/2006/relationships" xmlns:c="http://schemas.openxmlformats.org/drawingml/2006/chart" r:id="Rd31c9c02aff44faa"/>
+            <c:chart xmlns:r="http://schemas.openxmlformats.org/officeDocument/2006/relationships" xmlns:c="http://schemas.openxmlformats.org/drawingml/2006/chart" r:id="Rd1f026d854464dac"/>
           </a:graphicData>
         </a:graphic>
       </p:graphicFrame>
@@ -13135,7 +13249,7 @@
           <p:cNvPr id="14" name="">
             <a:extLst xmlns:a="http://schemas.openxmlformats.org/drawingml/2006/main">
               <a:ext uri="{FF2B5EF4-FFF2-40B4-BE49-F238E27FC236}">
-                <a16:creationId xmlns:a16="http://schemas.microsoft.com/office/drawing/2014/main" id="{444BDBB4-8FE9-44F3-906C-CA0F297E9F13}"/>
+                <a16:creationId xmlns:a16="http://schemas.microsoft.com/office/drawing/2014/main" id="{A7048F5B-9946-4386-9F04-A6BF53B763AB}"/>
               </a:ext>
             </a:extLst>
           </p:cNvPr>
@@ -13192,7 +13306,7 @@
           <p:cNvPr id="15" name="">
             <a:extLst xmlns:a="http://schemas.openxmlformats.org/drawingml/2006/main">
               <a:ext uri="{FF2B5EF4-FFF2-40B4-BE49-F238E27FC236}">
-                <a16:creationId xmlns:a16="http://schemas.microsoft.com/office/drawing/2014/main" id="{C0A72D3A-8A7F-4D79-8841-812F3CD0BE4F}"/>
+                <a16:creationId xmlns:a16="http://schemas.microsoft.com/office/drawing/2014/main" id="{FD08B92E-8F3C-449E-A736-B2FAE1A8458A}"/>
               </a:ext>
             </a:extLst>
           </p:cNvPr>
@@ -13247,7 +13361,7 @@
     </p:spTree>
     <p:extLst>
       <p:ext uri="{BB962C8B-B14F-4D97-AF65-F5344CB8AC3E}">
-        <p14:creationId xmlns:p14="http://schemas.microsoft.com/office/powerpoint/2010/main" val="581355002"/>
+        <p14:creationId xmlns:p14="http://schemas.microsoft.com/office/powerpoint/2010/main" val="1932213015"/>
       </p:ext>
     </p:extLst>
   </p:cSld>
@@ -13278,7 +13392,7 @@
           <p:cNvPr id="12" name="">
             <a:extLst xmlns:a="http://schemas.openxmlformats.org/drawingml/2006/main">
               <a:ext uri="{FF2B5EF4-FFF2-40B4-BE49-F238E27FC236}">
-                <a16:creationId xmlns:a16="http://schemas.microsoft.com/office/drawing/2014/main" id="{FBD657FB-EA1C-47A4-AFFD-50FB61615E31}"/>
+                <a16:creationId xmlns:a16="http://schemas.microsoft.com/office/drawing/2014/main" id="{3E5D52E4-183E-468C-A131-BEA3F37E471F}"/>
               </a:ext>
             </a:extLst>
           </p:cNvPr>
@@ -13335,7 +13449,7 @@
           <p:cNvPr id="2" name="">
             <a:extLst xmlns:a="http://schemas.openxmlformats.org/drawingml/2006/main">
               <a:ext uri="{FF2B5EF4-FFF2-40B4-BE49-F238E27FC236}">
-                <a16:creationId xmlns:a16="http://schemas.microsoft.com/office/drawing/2014/main" id="{37187CD8-D975-45E4-8279-DE41D0181384}"/>
+                <a16:creationId xmlns:a16="http://schemas.microsoft.com/office/drawing/2014/main" id="{3B1C036F-027E-4632-A7AA-11C22C1B11C4}"/>
               </a:ext>
             </a:extLst>
           </p:cNvPr>
@@ -13392,7 +13506,7 @@
           <p:cNvPr id="3" name="">
             <a:extLst xmlns:a="http://schemas.openxmlformats.org/drawingml/2006/main">
               <a:ext uri="{FF2B5EF4-FFF2-40B4-BE49-F238E27FC236}">
-                <a16:creationId xmlns:a16="http://schemas.microsoft.com/office/drawing/2014/main" id="{77DF44AC-F838-46AD-8568-2B0B3A79592F}"/>
+                <a16:creationId xmlns:a16="http://schemas.microsoft.com/office/drawing/2014/main" id="{54A5BE94-2FF4-4999-9236-B0CD2FEC403A}"/>
               </a:ext>
             </a:extLst>
           </p:cNvPr>
@@ -13456,7 +13570,7 @@
         </p:xfrm>
         <a:graphic xmlns:a="http://schemas.openxmlformats.org/drawingml/2006/main">
           <a:graphicData uri="http://schemas.openxmlformats.org/drawingml/2006/chart">
-            <c:chart xmlns:r="http://schemas.openxmlformats.org/officeDocument/2006/relationships" xmlns:c="http://schemas.openxmlformats.org/drawingml/2006/chart" r:id="R2479a647818f4736"/>
+            <c:chart xmlns:r="http://schemas.openxmlformats.org/officeDocument/2006/relationships" xmlns:c="http://schemas.openxmlformats.org/drawingml/2006/chart" r:id="R9a1f5a21bbdb4e5d"/>
           </a:graphicData>
         </a:graphic>
       </p:graphicFrame>
@@ -13465,7 +13579,7 @@
           <p:cNvPr id="5" name="">
             <a:extLst xmlns:a="http://schemas.openxmlformats.org/drawingml/2006/main">
               <a:ext uri="{FF2B5EF4-FFF2-40B4-BE49-F238E27FC236}">
-                <a16:creationId xmlns:a16="http://schemas.microsoft.com/office/drawing/2014/main" id="{01004425-F94A-47A8-AF26-6335E1D7490F}"/>
+                <a16:creationId xmlns:a16="http://schemas.microsoft.com/office/drawing/2014/main" id="{6CE89A26-4B06-42C9-91AF-6583A0AFBD11}"/>
               </a:ext>
             </a:extLst>
           </p:cNvPr>
@@ -13522,7 +13636,7 @@
           <p:cNvPr id="6" name="">
             <a:extLst xmlns:a="http://schemas.openxmlformats.org/drawingml/2006/main">
               <a:ext uri="{FF2B5EF4-FFF2-40B4-BE49-F238E27FC236}">
-                <a16:creationId xmlns:a16="http://schemas.microsoft.com/office/drawing/2014/main" id="{B915C8F9-6A6F-42CB-8A7D-9A592FD875A3}"/>
+                <a16:creationId xmlns:a16="http://schemas.microsoft.com/office/drawing/2014/main" id="{556C9E7D-79D3-4ABD-8FFB-DE3776BBA3DA}"/>
               </a:ext>
             </a:extLst>
           </p:cNvPr>
@@ -13579,7 +13693,7 @@
           <p:cNvPr id="7" name="">
             <a:extLst xmlns:a="http://schemas.openxmlformats.org/drawingml/2006/main">
               <a:ext uri="{FF2B5EF4-FFF2-40B4-BE49-F238E27FC236}">
-                <a16:creationId xmlns:a16="http://schemas.microsoft.com/office/drawing/2014/main" id="{EBA88D78-4F12-42E9-90F2-0A7D168F9F1F}"/>
+                <a16:creationId xmlns:a16="http://schemas.microsoft.com/office/drawing/2014/main" id="{C6FE4080-9497-4094-87F7-59436D76150B}"/>
               </a:ext>
             </a:extLst>
           </p:cNvPr>
@@ -13636,7 +13750,7 @@
           <p:cNvPr id="8" name="">
             <a:extLst xmlns:a="http://schemas.openxmlformats.org/drawingml/2006/main">
               <a:ext uri="{FF2B5EF4-FFF2-40B4-BE49-F238E27FC236}">
-                <a16:creationId xmlns:a16="http://schemas.microsoft.com/office/drawing/2014/main" id="{964EAE2F-A432-4733-9C77-F9DA11672149}"/>
+                <a16:creationId xmlns:a16="http://schemas.microsoft.com/office/drawing/2014/main" id="{58478A65-830A-44A0-AA50-D9CB2D9FBEA0}"/>
               </a:ext>
             </a:extLst>
           </p:cNvPr>
@@ -13693,7 +13807,7 @@
           <p:cNvPr id="9" name="">
             <a:extLst xmlns:a="http://schemas.openxmlformats.org/drawingml/2006/main">
               <a:ext uri="{FF2B5EF4-FFF2-40B4-BE49-F238E27FC236}">
-                <a16:creationId xmlns:a16="http://schemas.microsoft.com/office/drawing/2014/main" id="{B2C0E26D-D933-454B-876E-D8ED367B4222}"/>
+                <a16:creationId xmlns:a16="http://schemas.microsoft.com/office/drawing/2014/main" id="{02C265A3-5662-4F08-86D9-A7D71B06D2EB}"/>
               </a:ext>
             </a:extLst>
           </p:cNvPr>
@@ -13750,7 +13864,7 @@
           <p:cNvPr id="10" name="">
             <a:extLst xmlns:a="http://schemas.openxmlformats.org/drawingml/2006/main">
               <a:ext uri="{FF2B5EF4-FFF2-40B4-BE49-F238E27FC236}">
-                <a16:creationId xmlns:a16="http://schemas.microsoft.com/office/drawing/2014/main" id="{8E013D35-FCF6-4DC5-BC74-2F94C23280F3}"/>
+                <a16:creationId xmlns:a16="http://schemas.microsoft.com/office/drawing/2014/main" id="{E4BFB43B-2098-4614-96D4-849FACCC4816}"/>
               </a:ext>
             </a:extLst>
           </p:cNvPr>
@@ -13807,7 +13921,7 @@
           <p:cNvPr id="11" name="">
             <a:extLst xmlns:a="http://schemas.openxmlformats.org/drawingml/2006/main">
               <a:ext uri="{FF2B5EF4-FFF2-40B4-BE49-F238E27FC236}">
-                <a16:creationId xmlns:a16="http://schemas.microsoft.com/office/drawing/2014/main" id="{9E31C4A0-CECB-443F-B38F-D04179B72A87}"/>
+                <a16:creationId xmlns:a16="http://schemas.microsoft.com/office/drawing/2014/main" id="{EF360044-8079-4BB7-9F30-803C45D9152A}"/>
               </a:ext>
             </a:extLst>
           </p:cNvPr>
@@ -13862,7 +13976,7 @@
     </p:spTree>
     <p:extLst>
       <p:ext uri="{BB962C8B-B14F-4D97-AF65-F5344CB8AC3E}">
-        <p14:creationId xmlns:p14="http://schemas.microsoft.com/office/powerpoint/2010/main" val="326941127"/>
+        <p14:creationId xmlns:p14="http://schemas.microsoft.com/office/powerpoint/2010/main" val="1878458469"/>
       </p:ext>
     </p:extLst>
   </p:cSld>
@@ -13893,7 +14007,7 @@
           <p:cNvPr id="12" name="">
             <a:extLst xmlns:a="http://schemas.openxmlformats.org/drawingml/2006/main">
               <a:ext uri="{FF2B5EF4-FFF2-40B4-BE49-F238E27FC236}">
-                <a16:creationId xmlns:a16="http://schemas.microsoft.com/office/drawing/2014/main" id="{B1436617-A37D-4FCB-BA9B-755B14113F07}"/>
+                <a16:creationId xmlns:a16="http://schemas.microsoft.com/office/drawing/2014/main" id="{7FF2ADE7-52DC-436C-9E4B-6CC665A33E5C}"/>
               </a:ext>
             </a:extLst>
           </p:cNvPr>
@@ -13950,7 +14064,7 @@
           <p:cNvPr id="2" name="">
             <a:extLst xmlns:a="http://schemas.openxmlformats.org/drawingml/2006/main">
               <a:ext uri="{FF2B5EF4-FFF2-40B4-BE49-F238E27FC236}">
-                <a16:creationId xmlns:a16="http://schemas.microsoft.com/office/drawing/2014/main" id="{30B89ADF-9CAF-49FD-8ABA-E9FDB4E1C0D0}"/>
+                <a16:creationId xmlns:a16="http://schemas.microsoft.com/office/drawing/2014/main" id="{93DA88B8-0A16-4BBC-9059-B2EC1B05D63F}"/>
               </a:ext>
             </a:extLst>
           </p:cNvPr>
@@ -14007,7 +14121,7 @@
           <p:cNvPr id="3" name="">
             <a:extLst xmlns:a="http://schemas.openxmlformats.org/drawingml/2006/main">
               <a:ext uri="{FF2B5EF4-FFF2-40B4-BE49-F238E27FC236}">
-                <a16:creationId xmlns:a16="http://schemas.microsoft.com/office/drawing/2014/main" id="{33692C4D-F499-495E-B449-0780E7B7BE0E}"/>
+                <a16:creationId xmlns:a16="http://schemas.microsoft.com/office/drawing/2014/main" id="{0D9E3A9B-181A-4612-B068-D8C44AB4D08A}"/>
               </a:ext>
             </a:extLst>
           </p:cNvPr>
@@ -14071,7 +14185,7 @@
         </p:xfrm>
         <a:graphic xmlns:a="http://schemas.openxmlformats.org/drawingml/2006/main">
           <a:graphicData uri="http://schemas.openxmlformats.org/drawingml/2006/chart">
-            <c:chart xmlns:r="http://schemas.openxmlformats.org/officeDocument/2006/relationships" xmlns:c="http://schemas.openxmlformats.org/drawingml/2006/chart" r:id="Rf5a1bf4112ab449f"/>
+            <c:chart xmlns:r="http://schemas.openxmlformats.org/officeDocument/2006/relationships" xmlns:c="http://schemas.openxmlformats.org/drawingml/2006/chart" r:id="Rf9d2562089694024"/>
           </a:graphicData>
         </a:graphic>
       </p:graphicFrame>
@@ -14080,7 +14194,7 @@
           <p:cNvPr id="5" name="">
             <a:extLst xmlns:a="http://schemas.openxmlformats.org/drawingml/2006/main">
               <a:ext uri="{FF2B5EF4-FFF2-40B4-BE49-F238E27FC236}">
-                <a16:creationId xmlns:a16="http://schemas.microsoft.com/office/drawing/2014/main" id="{F0BA6F4F-B613-4B16-AFCC-6BF876FB6651}"/>
+                <a16:creationId xmlns:a16="http://schemas.microsoft.com/office/drawing/2014/main" id="{627ED82A-060A-4ED9-B423-5E6E48CE0726}"/>
               </a:ext>
             </a:extLst>
           </p:cNvPr>
@@ -14137,7 +14251,7 @@
           <p:cNvPr id="6" name="">
             <a:extLst xmlns:a="http://schemas.openxmlformats.org/drawingml/2006/main">
               <a:ext uri="{FF2B5EF4-FFF2-40B4-BE49-F238E27FC236}">
-                <a16:creationId xmlns:a16="http://schemas.microsoft.com/office/drawing/2014/main" id="{4F912BED-E09D-40E9-8BFE-64D84151FCB0}"/>
+                <a16:creationId xmlns:a16="http://schemas.microsoft.com/office/drawing/2014/main" id="{90258545-F22B-4910-B12A-A3386510207C}"/>
               </a:ext>
             </a:extLst>
           </p:cNvPr>
@@ -14194,7 +14308,7 @@
           <p:cNvPr id="7" name="">
             <a:extLst xmlns:a="http://schemas.openxmlformats.org/drawingml/2006/main">
               <a:ext uri="{FF2B5EF4-FFF2-40B4-BE49-F238E27FC236}">
-                <a16:creationId xmlns:a16="http://schemas.microsoft.com/office/drawing/2014/main" id="{3AC9775E-49D5-4318-BD51-33C9EE9D7086}"/>
+                <a16:creationId xmlns:a16="http://schemas.microsoft.com/office/drawing/2014/main" id="{38AE13DB-056D-445B-8598-9960A7B11277}"/>
               </a:ext>
             </a:extLst>
           </p:cNvPr>
@@ -14251,7 +14365,7 @@
           <p:cNvPr id="8" name="">
             <a:extLst xmlns:a="http://schemas.openxmlformats.org/drawingml/2006/main">
               <a:ext uri="{FF2B5EF4-FFF2-40B4-BE49-F238E27FC236}">
-                <a16:creationId xmlns:a16="http://schemas.microsoft.com/office/drawing/2014/main" id="{9319F7E2-1246-48D0-A579-28C482BE6163}"/>
+                <a16:creationId xmlns:a16="http://schemas.microsoft.com/office/drawing/2014/main" id="{9AC5AA9C-E42E-4FB4-A4C8-B5E21904355B}"/>
               </a:ext>
             </a:extLst>
           </p:cNvPr>
@@ -14308,7 +14422,7 @@
           <p:cNvPr id="9" name="">
             <a:extLst xmlns:a="http://schemas.openxmlformats.org/drawingml/2006/main">
               <a:ext uri="{FF2B5EF4-FFF2-40B4-BE49-F238E27FC236}">
-                <a16:creationId xmlns:a16="http://schemas.microsoft.com/office/drawing/2014/main" id="{77925EBA-FB17-4AA1-A9BE-DE84EA57A686}"/>
+                <a16:creationId xmlns:a16="http://schemas.microsoft.com/office/drawing/2014/main" id="{7C8E83D8-F6DE-4EAD-AEBD-9525EB94287B}"/>
               </a:ext>
             </a:extLst>
           </p:cNvPr>
@@ -14365,7 +14479,7 @@
           <p:cNvPr id="10" name="">
             <a:extLst xmlns:a="http://schemas.openxmlformats.org/drawingml/2006/main">
               <a:ext uri="{FF2B5EF4-FFF2-40B4-BE49-F238E27FC236}">
-                <a16:creationId xmlns:a16="http://schemas.microsoft.com/office/drawing/2014/main" id="{53EA0176-7E3F-4F17-A915-EE07522769D9}"/>
+                <a16:creationId xmlns:a16="http://schemas.microsoft.com/office/drawing/2014/main" id="{3996BAA4-6AE3-41C1-A9D8-26E0EAFA50CA}"/>
               </a:ext>
             </a:extLst>
           </p:cNvPr>
@@ -14422,7 +14536,7 @@
           <p:cNvPr id="11" name="">
             <a:extLst xmlns:a="http://schemas.openxmlformats.org/drawingml/2006/main">
               <a:ext uri="{FF2B5EF4-FFF2-40B4-BE49-F238E27FC236}">
-                <a16:creationId xmlns:a16="http://schemas.microsoft.com/office/drawing/2014/main" id="{CB0F8927-7B2B-4405-A934-CF5DE4E7FD6E}"/>
+                <a16:creationId xmlns:a16="http://schemas.microsoft.com/office/drawing/2014/main" id="{FDA70AD6-AE91-497D-8E7E-679BF0FFD826}"/>
               </a:ext>
             </a:extLst>
           </p:cNvPr>
@@ -14477,7 +14591,7 @@
     </p:spTree>
     <p:extLst>
       <p:ext uri="{BB962C8B-B14F-4D97-AF65-F5344CB8AC3E}">
-        <p14:creationId xmlns:p14="http://schemas.microsoft.com/office/powerpoint/2010/main" val="634634023"/>
+        <p14:creationId xmlns:p14="http://schemas.microsoft.com/office/powerpoint/2010/main" val="733945966"/>
       </p:ext>
     </p:extLst>
   </p:cSld>
@@ -14508,7 +14622,7 @@
           <p:cNvPr id="13" name="">
             <a:extLst xmlns:a="http://schemas.openxmlformats.org/drawingml/2006/main">
               <a:ext uri="{FF2B5EF4-FFF2-40B4-BE49-F238E27FC236}">
-                <a16:creationId xmlns:a16="http://schemas.microsoft.com/office/drawing/2014/main" id="{BF1107A3-58F6-40F6-B709-9AA2BF21F93B}"/>
+                <a16:creationId xmlns:a16="http://schemas.microsoft.com/office/drawing/2014/main" id="{F2267E49-A67A-4B4D-B4D8-1C166BF6A17B}"/>
               </a:ext>
             </a:extLst>
           </p:cNvPr>
@@ -14565,7 +14679,7 @@
           <p:cNvPr id="2" name="">
             <a:extLst xmlns:a="http://schemas.openxmlformats.org/drawingml/2006/main">
               <a:ext uri="{FF2B5EF4-FFF2-40B4-BE49-F238E27FC236}">
-                <a16:creationId xmlns:a16="http://schemas.microsoft.com/office/drawing/2014/main" id="{72029940-3F85-40BC-8F54-3784AF85DDB4}"/>
+                <a16:creationId xmlns:a16="http://schemas.microsoft.com/office/drawing/2014/main" id="{0407DD09-629A-4D38-8F2D-5E3A9D704A8C}"/>
               </a:ext>
             </a:extLst>
           </p:cNvPr>
@@ -14622,7 +14736,7 @@
           <p:cNvPr id="3" name="">
             <a:extLst xmlns:a="http://schemas.openxmlformats.org/drawingml/2006/main">
               <a:ext uri="{FF2B5EF4-FFF2-40B4-BE49-F238E27FC236}">
-                <a16:creationId xmlns:a16="http://schemas.microsoft.com/office/drawing/2014/main" id="{76D4ED69-F769-4BA1-A02D-3C1EEFF03112}"/>
+                <a16:creationId xmlns:a16="http://schemas.microsoft.com/office/drawing/2014/main" id="{115011E3-87D2-4C04-AB75-704C7C00AD82}"/>
               </a:ext>
             </a:extLst>
           </p:cNvPr>
@@ -14679,7 +14793,7 @@
           <p:cNvPr id="4" name="">
             <a:extLst xmlns:a="http://schemas.openxmlformats.org/drawingml/2006/main">
               <a:ext uri="{FF2B5EF4-FFF2-40B4-BE49-F238E27FC236}">
-                <a16:creationId xmlns:a16="http://schemas.microsoft.com/office/drawing/2014/main" id="{936532B7-81E4-40B1-A0AA-B95D70089DFF}"/>
+                <a16:creationId xmlns:a16="http://schemas.microsoft.com/office/drawing/2014/main" id="{CC182ACE-6BE6-4444-A513-9EF66CC5AD33}"/>
               </a:ext>
             </a:extLst>
           </p:cNvPr>
@@ -14736,7 +14850,7 @@
           <p:cNvPr id="5" name="">
             <a:extLst xmlns:a="http://schemas.openxmlformats.org/drawingml/2006/main">
               <a:ext uri="{FF2B5EF4-FFF2-40B4-BE49-F238E27FC236}">
-                <a16:creationId xmlns:a16="http://schemas.microsoft.com/office/drawing/2014/main" id="{86580141-804B-46CE-84FE-95C1CE680605}"/>
+                <a16:creationId xmlns:a16="http://schemas.microsoft.com/office/drawing/2014/main" id="{37EB2925-0530-4579-B26F-9DE3E7DFEE0A}"/>
               </a:ext>
             </a:extLst>
           </p:cNvPr>
@@ -14793,7 +14907,7 @@
           <p:cNvPr id="6" name="">
             <a:extLst xmlns:a="http://schemas.openxmlformats.org/drawingml/2006/main">
               <a:ext uri="{FF2B5EF4-FFF2-40B4-BE49-F238E27FC236}">
-                <a16:creationId xmlns:a16="http://schemas.microsoft.com/office/drawing/2014/main" id="{2CD8896F-D0DA-4967-BD0B-EDFBCF7ACD0A}"/>
+                <a16:creationId xmlns:a16="http://schemas.microsoft.com/office/drawing/2014/main" id="{38F8429B-998E-48C0-8914-A53B5E833740}"/>
               </a:ext>
             </a:extLst>
           </p:cNvPr>
@@ -14850,7 +14964,7 @@
           <p:cNvPr id="7" name="">
             <a:extLst xmlns:a="http://schemas.openxmlformats.org/drawingml/2006/main">
               <a:ext uri="{FF2B5EF4-FFF2-40B4-BE49-F238E27FC236}">
-                <a16:creationId xmlns:a16="http://schemas.microsoft.com/office/drawing/2014/main" id="{50FE7F1F-A36B-4CBC-A6A1-C12D5E84F1F9}"/>
+                <a16:creationId xmlns:a16="http://schemas.microsoft.com/office/drawing/2014/main" id="{4B2F25B7-A737-4D13-82C4-AF18CFCBE414}"/>
               </a:ext>
             </a:extLst>
           </p:cNvPr>
@@ -14914,7 +15028,7 @@
         </p:xfrm>
         <a:graphic xmlns:a="http://schemas.openxmlformats.org/drawingml/2006/main">
           <a:graphicData uri="http://schemas.openxmlformats.org/drawingml/2006/chart">
-            <c:chart xmlns:r="http://schemas.openxmlformats.org/officeDocument/2006/relationships" xmlns:c="http://schemas.openxmlformats.org/drawingml/2006/chart" r:id="Rbb40d088a83c445e"/>
+            <c:chart xmlns:r="http://schemas.openxmlformats.org/officeDocument/2006/relationships" xmlns:c="http://schemas.openxmlformats.org/drawingml/2006/chart" r:id="R8c522a3b98444049"/>
           </a:graphicData>
         </a:graphic>
       </p:graphicFrame>
@@ -14930,7 +15044,7 @@
         </p:xfrm>
         <a:graphic xmlns:a="http://schemas.openxmlformats.org/drawingml/2006/main">
           <a:graphicData uri="http://schemas.openxmlformats.org/drawingml/2006/chart">
-            <c:chart xmlns:r="http://schemas.openxmlformats.org/officeDocument/2006/relationships" xmlns:c="http://schemas.openxmlformats.org/drawingml/2006/chart" r:id="R7f0d611ca2854b17"/>
+            <c:chart xmlns:r="http://schemas.openxmlformats.org/officeDocument/2006/relationships" xmlns:c="http://schemas.openxmlformats.org/drawingml/2006/chart" r:id="R7aef73ffb0764703"/>
           </a:graphicData>
         </a:graphic>
       </p:graphicFrame>
@@ -14939,7 +15053,7 @@
           <p:cNvPr id="10" name="">
             <a:extLst xmlns:a="http://schemas.openxmlformats.org/drawingml/2006/main">
               <a:ext uri="{FF2B5EF4-FFF2-40B4-BE49-F238E27FC236}">
-                <a16:creationId xmlns:a16="http://schemas.microsoft.com/office/drawing/2014/main" id="{11782787-9DDA-4C8C-AEB9-279E2A48C44C}"/>
+                <a16:creationId xmlns:a16="http://schemas.microsoft.com/office/drawing/2014/main" id="{C08CE9E5-AA0F-432F-930A-C2351053D39E}"/>
               </a:ext>
             </a:extLst>
           </p:cNvPr>
@@ -14996,7 +15110,7 @@
           <p:cNvPr id="11" name="">
             <a:extLst xmlns:a="http://schemas.openxmlformats.org/drawingml/2006/main">
               <a:ext uri="{FF2B5EF4-FFF2-40B4-BE49-F238E27FC236}">
-                <a16:creationId xmlns:a16="http://schemas.microsoft.com/office/drawing/2014/main" id="{8163B2F0-3A1F-4320-88EC-E15B28724F76}"/>
+                <a16:creationId xmlns:a16="http://schemas.microsoft.com/office/drawing/2014/main" id="{E68DE255-4682-4889-A02E-7DE82E2A42BC}"/>
               </a:ext>
             </a:extLst>
           </p:cNvPr>
@@ -15053,7 +15167,7 @@
           <p:cNvPr id="12" name="">
             <a:extLst xmlns:a="http://schemas.openxmlformats.org/drawingml/2006/main">
               <a:ext uri="{FF2B5EF4-FFF2-40B4-BE49-F238E27FC236}">
-                <a16:creationId xmlns:a16="http://schemas.microsoft.com/office/drawing/2014/main" id="{2B29844A-C3EA-4F49-A094-741A147F2DD0}"/>
+                <a16:creationId xmlns:a16="http://schemas.microsoft.com/office/drawing/2014/main" id="{ECD997F6-D093-4C8E-B2F2-C1442CA3CC60}"/>
               </a:ext>
             </a:extLst>
           </p:cNvPr>
@@ -15108,7 +15222,7 @@
     </p:spTree>
     <p:extLst>
       <p:ext uri="{BB962C8B-B14F-4D97-AF65-F5344CB8AC3E}">
-        <p14:creationId xmlns:p14="http://schemas.microsoft.com/office/powerpoint/2010/main" val="1240807934"/>
+        <p14:creationId xmlns:p14="http://schemas.microsoft.com/office/powerpoint/2010/main" val="1592836916"/>
       </p:ext>
     </p:extLst>
   </p:cSld>
